--- a/Kanban webapp - Buborék együttes.pptx
+++ b/Kanban webapp - Buborék együttes.pptx
@@ -5,10 +5,10 @@
     <p:sldMasterId id="2147483672" r:id="rId1"/>
   </p:sldMasterIdLst>
   <p:notesMasterIdLst>
-    <p:notesMasterId r:id="rId12"/>
+    <p:notesMasterId r:id="rId19"/>
   </p:notesMasterIdLst>
   <p:handoutMasterIdLst>
-    <p:handoutMasterId r:id="rId13"/>
+    <p:handoutMasterId r:id="rId20"/>
   </p:handoutMasterIdLst>
   <p:sldIdLst>
     <p:sldId id="258" r:id="rId2"/>
@@ -21,6 +21,13 @@
     <p:sldId id="263" r:id="rId9"/>
     <p:sldId id="264" r:id="rId10"/>
     <p:sldId id="267" r:id="rId11"/>
+    <p:sldId id="269" r:id="rId12"/>
+    <p:sldId id="270" r:id="rId13"/>
+    <p:sldId id="271" r:id="rId14"/>
+    <p:sldId id="272" r:id="rId15"/>
+    <p:sldId id="273" r:id="rId16"/>
+    <p:sldId id="274" r:id="rId17"/>
+    <p:sldId id="275" r:id="rId18"/>
   </p:sldIdLst>
   <p:sldSz cx="12192000" cy="6858000"/>
   <p:notesSz cx="6858000" cy="9144000"/>
@@ -221,7 +228,7 @@
           <a:p>
             <a:fld id="{795EECD7-D4C7-4FE3-AB70-00E199DD6761}" type="datetimeFigureOut">
               <a:rPr lang="hu-HU" smtClean="0"/>
-              <a:t>2025. 11. 14.</a:t>
+              <a:t>2025. 11. 15.</a:t>
             </a:fld>
             <a:endParaRPr lang="hu-HU"/>
           </a:p>
@@ -399,7 +406,7 @@
           <a:p>
             <a:fld id="{2D5DABCF-F2FF-4310-8608-C10C325E963C}" type="datetimeFigureOut">
               <a:rPr lang="hu-HU" smtClean="0"/>
-              <a:t>2025. 11. 14.</a:t>
+              <a:t>2025. 11. 15.</a:t>
             </a:fld>
             <a:endParaRPr lang="hu-HU"/>
           </a:p>
@@ -890,7 +897,7 @@
           <a:p>
             <a:fld id="{67F45AC6-C491-4585-A584-9CE2AF7D5500}" type="datetime1">
               <a:rPr lang="en-US" smtClean="0"/>
-              <a:t>11/14/2025</a:t>
+              <a:t>11/15/2025</a:t>
             </a:fld>
             <a:endParaRPr lang="en-US"/>
           </a:p>
@@ -1102,7 +1109,7 @@
           <a:p>
             <a:fld id="{67F45AC6-C491-4585-A584-9CE2AF7D5500}" type="datetime1">
               <a:rPr lang="en-US" smtClean="0"/>
-              <a:t>11/14/2025</a:t>
+              <a:t>11/15/2025</a:t>
             </a:fld>
             <a:endParaRPr lang="en-US"/>
           </a:p>
@@ -1318,7 +1325,7 @@
           <a:p>
             <a:fld id="{67F45AC6-C491-4585-A584-9CE2AF7D5500}" type="datetime1">
               <a:rPr lang="en-US" smtClean="0"/>
-              <a:t>11/14/2025</a:t>
+              <a:t>11/15/2025</a:t>
             </a:fld>
             <a:endParaRPr lang="en-US"/>
           </a:p>
@@ -1520,7 +1527,7 @@
           <a:p>
             <a:fld id="{67F45AC6-C491-4585-A584-9CE2AF7D5500}" type="datetime1">
               <a:rPr lang="en-US" smtClean="0"/>
-              <a:t>11/14/2025</a:t>
+              <a:t>11/15/2025</a:t>
             </a:fld>
             <a:endParaRPr lang="en-US"/>
           </a:p>
@@ -1800,7 +1807,7 @@
           <a:p>
             <a:fld id="{67F45AC6-C491-4585-A584-9CE2AF7D5500}" type="datetime1">
               <a:rPr lang="en-US" smtClean="0"/>
-              <a:t>11/14/2025</a:t>
+              <a:t>11/15/2025</a:t>
             </a:fld>
             <a:endParaRPr lang="en-US"/>
           </a:p>
@@ -2069,7 +2076,7 @@
           <a:p>
             <a:fld id="{67F45AC6-C491-4585-A584-9CE2AF7D5500}" type="datetime1">
               <a:rPr lang="en-US" smtClean="0"/>
-              <a:t>11/14/2025</a:t>
+              <a:t>11/15/2025</a:t>
             </a:fld>
             <a:endParaRPr lang="en-US"/>
           </a:p>
@@ -2486,7 +2493,7 @@
           <a:p>
             <a:fld id="{67F45AC6-C491-4585-A584-9CE2AF7D5500}" type="datetime1">
               <a:rPr lang="en-US" smtClean="0"/>
-              <a:t>11/14/2025</a:t>
+              <a:t>11/15/2025</a:t>
             </a:fld>
             <a:endParaRPr lang="en-US"/>
           </a:p>
@@ -2636,7 +2643,7 @@
           <a:p>
             <a:fld id="{67F45AC6-C491-4585-A584-9CE2AF7D5500}" type="datetime1">
               <a:rPr lang="en-US" smtClean="0"/>
-              <a:t>11/14/2025</a:t>
+              <a:t>11/15/2025</a:t>
             </a:fld>
             <a:endParaRPr lang="en-US"/>
           </a:p>
@@ -2763,7 +2770,7 @@
           <a:p>
             <a:fld id="{67F45AC6-C491-4585-A584-9CE2AF7D5500}" type="datetime1">
               <a:rPr lang="en-US" smtClean="0"/>
-              <a:t>11/14/2025</a:t>
+              <a:t>11/15/2025</a:t>
             </a:fld>
             <a:endParaRPr lang="en-US"/>
           </a:p>
@@ -3015,7 +3022,7 @@
           <a:p>
             <a:fld id="{67F45AC6-C491-4585-A584-9CE2AF7D5500}" type="datetime1">
               <a:rPr lang="en-US" smtClean="0"/>
-              <a:t>11/14/2025</a:t>
+              <a:t>11/15/2025</a:t>
             </a:fld>
             <a:endParaRPr lang="en-US"/>
           </a:p>
@@ -3461,7 +3468,7 @@
           <a:p>
             <a:fld id="{67F45AC6-C491-4585-A584-9CE2AF7D5500}" type="datetime1">
               <a:rPr lang="en-US" smtClean="0"/>
-              <a:t>11/14/2025</a:t>
+              <a:t>11/15/2025</a:t>
             </a:fld>
             <a:endParaRPr lang="en-US"/>
           </a:p>
@@ -3796,7 +3803,7 @@
           <a:p>
             <a:fld id="{67F45AC6-C491-4585-A584-9CE2AF7D5500}" type="datetime1">
               <a:rPr lang="en-US" smtClean="0"/>
-              <a:t>11/14/2025</a:t>
+              <a:t>11/15/2025</a:t>
             </a:fld>
             <a:endParaRPr lang="en-US"/>
           </a:p>
@@ -5204,6 +5211,4206 @@
       </p:par>
     </p:tnLst>
   </p:timing>
+</p:sld>
+</file>
+
+<file path=ppt/slides/slide11.xml><?xml version="1.0" encoding="utf-8"?>
+<p:sld xmlns:a="http://schemas.openxmlformats.org/drawingml/2006/main" xmlns:r="http://schemas.openxmlformats.org/officeDocument/2006/relationships" xmlns:p="http://schemas.openxmlformats.org/presentationml/2006/main">
+  <p:cSld>
+    <p:bg>
+      <p:bgPr>
+        <a:gradFill rotWithShape="1">
+          <a:gsLst>
+            <a:gs pos="0">
+              <a:schemeClr val="bg2">
+                <a:tint val="94000"/>
+                <a:satMod val="80000"/>
+                <a:lumMod val="106000"/>
+              </a:schemeClr>
+            </a:gs>
+            <a:gs pos="100000">
+              <a:schemeClr val="bg2">
+                <a:shade val="80000"/>
+              </a:schemeClr>
+            </a:gs>
+          </a:gsLst>
+          <a:path path="circle">
+            <a:fillToRect l="43000" r="43000" b="100000"/>
+          </a:path>
+        </a:gradFill>
+        <a:effectLst/>
+      </p:bgPr>
+    </p:bg>
+    <p:spTree>
+      <p:nvGrpSpPr>
+        <p:cNvPr id="1" name=""/>
+        <p:cNvGrpSpPr/>
+        <p:nvPr/>
+      </p:nvGrpSpPr>
+      <p:grpSpPr>
+        <a:xfrm>
+          <a:off x="0" y="0"/>
+          <a:ext cx="0" cy="0"/>
+          <a:chOff x="0" y="0"/>
+          <a:chExt cx="0" cy="0"/>
+        </a:xfrm>
+      </p:grpSpPr>
+      <p:sp>
+        <p:nvSpPr>
+          <p:cNvPr id="43" name="Rectangle 42">
+            <a:extLst>
+              <a:ext uri="{FF2B5EF4-FFF2-40B4-BE49-F238E27FC236}">
+                <a16:creationId xmlns:a16="http://schemas.microsoft.com/office/drawing/2014/main" id="{905CFAD9-EABE-4F83-B098-604752164E6A}"/>
+              </a:ext>
+              <a:ext uri="{C183D7F6-B498-43B3-948B-1728B52AA6E4}">
+                <adec:decorative xmlns:adec="http://schemas.microsoft.com/office/drawing/2017/decorative" val="1"/>
+              </a:ext>
+            </a:extLst>
+          </p:cNvPr>
+          <p:cNvSpPr>
+            <a:spLocks noGrp="1" noRot="1" noChangeAspect="1" noMove="1" noResize="1" noEditPoints="1" noAdjustHandles="1" noChangeArrowheads="1" noChangeShapeType="1" noTextEdit="1"/>
+          </p:cNvSpPr>
+          <p:nvPr>
+            <p:extLst>
+              <p:ext uri="{386F3935-93C4-4BCD-93E2-E3B085C9AB24}">
+                <p16:designElem xmlns:p16="http://schemas.microsoft.com/office/powerpoint/2015/main" val="1"/>
+              </p:ext>
+            </p:extLst>
+          </p:nvPr>
+        </p:nvSpPr>
+        <p:spPr>
+          <a:xfrm>
+            <a:off x="0" y="2019476"/>
+            <a:ext cx="12192000" cy="4105941"/>
+          </a:xfrm>
+          <a:prstGeom prst="rect">
+            <a:avLst/>
+          </a:prstGeom>
+          <a:gradFill flip="none" rotWithShape="1">
+            <a:gsLst>
+              <a:gs pos="0">
+                <a:schemeClr val="bg2">
+                  <a:alpha val="0"/>
+                </a:schemeClr>
+              </a:gs>
+              <a:gs pos="100000">
+                <a:schemeClr val="bg2"/>
+              </a:gs>
+            </a:gsLst>
+            <a:lin ang="5400000" scaled="0"/>
+            <a:tileRect/>
+          </a:gradFill>
+          <a:ln>
+            <a:noFill/>
+          </a:ln>
+        </p:spPr>
+        <p:style>
+          <a:lnRef idx="2">
+            <a:schemeClr val="accent1">
+              <a:shade val="50000"/>
+            </a:schemeClr>
+          </a:lnRef>
+          <a:fillRef idx="1">
+            <a:schemeClr val="accent1"/>
+          </a:fillRef>
+          <a:effectRef idx="0">
+            <a:schemeClr val="accent1"/>
+          </a:effectRef>
+          <a:fontRef idx="minor">
+            <a:schemeClr val="lt1"/>
+          </a:fontRef>
+        </p:style>
+        <p:txBody>
+          <a:bodyPr/>
+          <a:lstStyle/>
+          <a:p>
+            <a:endParaRPr lang="en-US"/>
+          </a:p>
+        </p:txBody>
+      </p:sp>
+      <p:pic>
+        <p:nvPicPr>
+          <p:cNvPr id="45" name="Picture 44">
+            <a:extLst>
+              <a:ext uri="{FF2B5EF4-FFF2-40B4-BE49-F238E27FC236}">
+                <a16:creationId xmlns:a16="http://schemas.microsoft.com/office/drawing/2014/main" id="{C99610E4-6194-4817-B152-498995E77181}"/>
+              </a:ext>
+              <a:ext uri="{C183D7F6-B498-43B3-948B-1728B52AA6E4}">
+                <adec:decorative xmlns:adec="http://schemas.microsoft.com/office/drawing/2017/decorative" val="1"/>
+              </a:ext>
+            </a:extLst>
+          </p:cNvPr>
+          <p:cNvPicPr>
+            <a:picLocks noGrp="1" noRot="1" noChangeAspect="1" noMove="1" noResize="1" noEditPoints="1" noAdjustHandles="1" noChangeArrowheads="1" noChangeShapeType="1" noCrop="1"/>
+          </p:cNvPicPr>
+          <p:nvPr>
+            <p:extLst>
+              <p:ext uri="{386F3935-93C4-4BCD-93E2-E3B085C9AB24}">
+                <p16:designElem xmlns:p16="http://schemas.microsoft.com/office/powerpoint/2015/main" val="1"/>
+              </p:ext>
+            </p:extLst>
+          </p:nvPr>
+        </p:nvPicPr>
+        <p:blipFill rotWithShape="1">
+          <a:blip r:embed="rId2">
+            <a:extLst>
+              <a:ext uri="{28A0092B-C50C-407E-A947-70E740481C1C}">
+                <a14:useLocalDpi xmlns:a14="http://schemas.microsoft.com/office/drawing/2010/main" val="0"/>
+              </a:ext>
+            </a:extLst>
+          </a:blip>
+          <a:srcRect t="1538" b="-1538"/>
+          <a:stretch/>
+        </p:blipFill>
+        <p:spPr bwMode="black">
+          <a:xfrm>
+            <a:off x="0" y="6126480"/>
+            <a:ext cx="12192000" cy="742950"/>
+          </a:xfrm>
+          <a:prstGeom prst="rect">
+            <a:avLst/>
+          </a:prstGeom>
+        </p:spPr>
+      </p:pic>
+      <p:cxnSp>
+        <p:nvCxnSpPr>
+          <p:cNvPr id="47" name="Straight Connector 46">
+            <a:extLst>
+              <a:ext uri="{FF2B5EF4-FFF2-40B4-BE49-F238E27FC236}">
+                <a16:creationId xmlns:a16="http://schemas.microsoft.com/office/drawing/2014/main" id="{D885E9F4-7DB6-4B77-B1FF-80BFCE81277B}"/>
+              </a:ext>
+              <a:ext uri="{C183D7F6-B498-43B3-948B-1728B52AA6E4}">
+                <adec:decorative xmlns:adec="http://schemas.microsoft.com/office/drawing/2017/decorative" val="1"/>
+              </a:ext>
+            </a:extLst>
+          </p:cNvPr>
+          <p:cNvCxnSpPr>
+            <a:cxnSpLocks noGrp="1" noRot="1" noChangeAspect="1" noMove="1" noResize="1" noEditPoints="1" noAdjustHandles="1" noChangeArrowheads="1" noChangeShapeType="1"/>
+          </p:cNvCxnSpPr>
+          <p:nvPr>
+            <p:extLst>
+              <p:ext uri="{386F3935-93C4-4BCD-93E2-E3B085C9AB24}">
+                <p16:designElem xmlns:p16="http://schemas.microsoft.com/office/powerpoint/2015/main" val="1"/>
+              </p:ext>
+            </p:extLst>
+          </p:nvPr>
+        </p:nvCxnSpPr>
+        <p:spPr>
+          <a:xfrm>
+            <a:off x="0" y="6128413"/>
+            <a:ext cx="12192000" cy="0"/>
+          </a:xfrm>
+          <a:prstGeom prst="line">
+            <a:avLst/>
+          </a:prstGeom>
+          <a:ln w="12700">
+            <a:solidFill>
+              <a:srgbClr val="000001">
+                <a:alpha val="20000"/>
+              </a:srgbClr>
+            </a:solidFill>
+          </a:ln>
+        </p:spPr>
+        <p:style>
+          <a:lnRef idx="1">
+            <a:schemeClr val="accent1"/>
+          </a:lnRef>
+          <a:fillRef idx="0">
+            <a:schemeClr val="accent1"/>
+          </a:fillRef>
+          <a:effectRef idx="0">
+            <a:schemeClr val="accent1"/>
+          </a:effectRef>
+          <a:fontRef idx="minor">
+            <a:schemeClr val="tx1"/>
+          </a:fontRef>
+        </p:style>
+      </p:cxnSp>
+      <p:cxnSp>
+        <p:nvCxnSpPr>
+          <p:cNvPr id="49" name="Straight Connector 48">
+            <a:extLst>
+              <a:ext uri="{FF2B5EF4-FFF2-40B4-BE49-F238E27FC236}">
+                <a16:creationId xmlns:a16="http://schemas.microsoft.com/office/drawing/2014/main" id="{DB639A2B-C30C-4F6F-B847-6960F3CF8A64}"/>
+              </a:ext>
+              <a:ext uri="{C183D7F6-B498-43B3-948B-1728B52AA6E4}">
+                <adec:decorative xmlns:adec="http://schemas.microsoft.com/office/drawing/2017/decorative" val="1"/>
+              </a:ext>
+            </a:extLst>
+          </p:cNvPr>
+          <p:cNvCxnSpPr>
+            <a:cxnSpLocks noGrp="1" noRot="1" noChangeAspect="1" noMove="1" noResize="1" noEditPoints="1" noAdjustHandles="1" noChangeArrowheads="1" noChangeShapeType="1"/>
+          </p:cNvCxnSpPr>
+          <p:nvPr>
+            <p:extLst>
+              <p:ext uri="{386F3935-93C4-4BCD-93E2-E3B085C9AB24}">
+                <p16:designElem xmlns:p16="http://schemas.microsoft.com/office/powerpoint/2015/main" val="1"/>
+              </p:ext>
+            </p:extLst>
+          </p:nvPr>
+        </p:nvCxnSpPr>
+        <p:spPr>
+          <a:xfrm>
+            <a:off x="2417780" y="3528542"/>
+            <a:ext cx="8637072" cy="0"/>
+          </a:xfrm>
+          <a:prstGeom prst="line">
+            <a:avLst/>
+          </a:prstGeom>
+          <a:ln w="31750"/>
+        </p:spPr>
+        <p:style>
+          <a:lnRef idx="3">
+            <a:schemeClr val="accent1"/>
+          </a:lnRef>
+          <a:fillRef idx="0">
+            <a:schemeClr val="accent1"/>
+          </a:fillRef>
+          <a:effectRef idx="2">
+            <a:schemeClr val="accent1"/>
+          </a:effectRef>
+          <a:fontRef idx="minor">
+            <a:schemeClr val="tx1"/>
+          </a:fontRef>
+        </p:style>
+      </p:cxnSp>
+      <p:sp useBgFill="1">
+        <p:nvSpPr>
+          <p:cNvPr id="51" name="Rectangle 50">
+            <a:extLst>
+              <a:ext uri="{FF2B5EF4-FFF2-40B4-BE49-F238E27FC236}">
+                <a16:creationId xmlns:a16="http://schemas.microsoft.com/office/drawing/2014/main" id="{D9926FA0-8ED1-4F3A-B23B-FD94D82C74B5}"/>
+              </a:ext>
+              <a:ext uri="{C183D7F6-B498-43B3-948B-1728B52AA6E4}">
+                <adec:decorative xmlns:adec="http://schemas.microsoft.com/office/drawing/2017/decorative" val="1"/>
+              </a:ext>
+            </a:extLst>
+          </p:cNvPr>
+          <p:cNvSpPr>
+            <a:spLocks noGrp="1" noRot="1" noChangeAspect="1" noMove="1" noResize="1" noEditPoints="1" noAdjustHandles="1" noChangeArrowheads="1" noChangeShapeType="1" noTextEdit="1"/>
+          </p:cNvSpPr>
+          <p:nvPr>
+            <p:extLst>
+              <p:ext uri="{386F3935-93C4-4BCD-93E2-E3B085C9AB24}">
+                <p16:designElem xmlns:p16="http://schemas.microsoft.com/office/powerpoint/2015/main" val="1"/>
+              </p:ext>
+            </p:extLst>
+          </p:nvPr>
+        </p:nvSpPr>
+        <p:spPr>
+          <a:xfrm>
+            <a:off x="2" y="0"/>
+            <a:ext cx="12191695" cy="6858000"/>
+          </a:xfrm>
+          <a:prstGeom prst="rect">
+            <a:avLst/>
+          </a:prstGeom>
+          <a:ln>
+            <a:noFill/>
+          </a:ln>
+        </p:spPr>
+        <p:style>
+          <a:lnRef idx="2">
+            <a:schemeClr val="accent1">
+              <a:shade val="50000"/>
+            </a:schemeClr>
+          </a:lnRef>
+          <a:fillRef idx="1">
+            <a:schemeClr val="accent1"/>
+          </a:fillRef>
+          <a:effectRef idx="0">
+            <a:schemeClr val="accent1"/>
+          </a:effectRef>
+          <a:fontRef idx="minor">
+            <a:schemeClr val="lt1"/>
+          </a:fontRef>
+        </p:style>
+        <p:txBody>
+          <a:bodyPr rtlCol="0" anchor="ctr"/>
+          <a:lstStyle/>
+          <a:p>
+            <a:pPr algn="ctr"/>
+            <a:endParaRPr lang="en-US"/>
+          </a:p>
+        </p:txBody>
+      </p:sp>
+      <p:sp>
+        <p:nvSpPr>
+          <p:cNvPr id="53" name="Rectangle 52">
+            <a:extLst>
+              <a:ext uri="{FF2B5EF4-FFF2-40B4-BE49-F238E27FC236}">
+                <a16:creationId xmlns:a16="http://schemas.microsoft.com/office/drawing/2014/main" id="{3A102CD9-C25A-4A86-B9D3-D7280D91428B}"/>
+              </a:ext>
+              <a:ext uri="{C183D7F6-B498-43B3-948B-1728B52AA6E4}">
+                <adec:decorative xmlns:adec="http://schemas.microsoft.com/office/drawing/2017/decorative" val="1"/>
+              </a:ext>
+            </a:extLst>
+          </p:cNvPr>
+          <p:cNvSpPr>
+            <a:spLocks noGrp="1" noRot="1" noChangeAspect="1" noMove="1" noResize="1" noEditPoints="1" noAdjustHandles="1" noChangeArrowheads="1" noChangeShapeType="1" noTextEdit="1"/>
+          </p:cNvSpPr>
+          <p:nvPr>
+            <p:extLst>
+              <p:ext uri="{386F3935-93C4-4BCD-93E2-E3B085C9AB24}">
+                <p16:designElem xmlns:p16="http://schemas.microsoft.com/office/powerpoint/2015/main" val="1"/>
+              </p:ext>
+            </p:extLst>
+          </p:nvPr>
+        </p:nvSpPr>
+        <p:spPr>
+          <a:xfrm>
+            <a:off x="0" y="2019476"/>
+            <a:ext cx="12192000" cy="4105941"/>
+          </a:xfrm>
+          <a:prstGeom prst="rect">
+            <a:avLst/>
+          </a:prstGeom>
+          <a:gradFill flip="none" rotWithShape="1">
+            <a:gsLst>
+              <a:gs pos="0">
+                <a:schemeClr val="bg2">
+                  <a:alpha val="0"/>
+                </a:schemeClr>
+              </a:gs>
+              <a:gs pos="100000">
+                <a:schemeClr val="bg2"/>
+              </a:gs>
+            </a:gsLst>
+            <a:lin ang="5400000" scaled="0"/>
+            <a:tileRect/>
+          </a:gradFill>
+          <a:ln>
+            <a:noFill/>
+          </a:ln>
+        </p:spPr>
+        <p:style>
+          <a:lnRef idx="2">
+            <a:schemeClr val="accent1">
+              <a:shade val="50000"/>
+            </a:schemeClr>
+          </a:lnRef>
+          <a:fillRef idx="1">
+            <a:schemeClr val="accent1"/>
+          </a:fillRef>
+          <a:effectRef idx="0">
+            <a:schemeClr val="accent1"/>
+          </a:effectRef>
+          <a:fontRef idx="minor">
+            <a:schemeClr val="lt1"/>
+          </a:fontRef>
+        </p:style>
+        <p:txBody>
+          <a:bodyPr rtlCol="0" anchor="ctr"/>
+          <a:lstStyle/>
+          <a:p>
+            <a:pPr lvl="0" algn="ctr"/>
+            <a:endParaRPr lang="en-US"/>
+          </a:p>
+        </p:txBody>
+      </p:sp>
+      <p:sp>
+        <p:nvSpPr>
+          <p:cNvPr id="2" name="Title 1">
+            <a:extLst>
+              <a:ext uri="{FF2B5EF4-FFF2-40B4-BE49-F238E27FC236}">
+                <a16:creationId xmlns:a16="http://schemas.microsoft.com/office/drawing/2014/main" id="{D3862F8B-DB53-D69C-19EE-0A453B36C085}"/>
+              </a:ext>
+            </a:extLst>
+          </p:cNvPr>
+          <p:cNvSpPr>
+            <a:spLocks noGrp="1"/>
+          </p:cNvSpPr>
+          <p:nvPr>
+            <p:ph type="title"/>
+          </p:nvPr>
+        </p:nvSpPr>
+        <p:spPr>
+          <a:xfrm>
+            <a:off x="659301" y="1474969"/>
+            <a:ext cx="2823919" cy="1868760"/>
+          </a:xfrm>
+        </p:spPr>
+        <p:txBody>
+          <a:bodyPr vert="horz" lIns="91440" tIns="45720" rIns="91440" bIns="0" rtlCol="0" anchor="b">
+            <a:normAutofit/>
+          </a:bodyPr>
+          <a:lstStyle/>
+          <a:p>
+            <a:r>
+              <a:rPr lang="en-US" sz="2800"/>
+              <a:t>Vlajk Sándor - Management</a:t>
+            </a:r>
+          </a:p>
+        </p:txBody>
+      </p:sp>
+      <p:pic>
+        <p:nvPicPr>
+          <p:cNvPr id="9" name="Picture 8">
+            <a:extLst>
+              <a:ext uri="{FF2B5EF4-FFF2-40B4-BE49-F238E27FC236}">
+                <a16:creationId xmlns:a16="http://schemas.microsoft.com/office/drawing/2014/main" id="{295C5C9D-063C-AF9D-2862-059BEA52D32C}"/>
+              </a:ext>
+            </a:extLst>
+          </p:cNvPr>
+          <p:cNvPicPr>
+            <a:picLocks noChangeAspect="1"/>
+          </p:cNvPicPr>
+          <p:nvPr/>
+        </p:nvPicPr>
+        <p:blipFill>
+          <a:blip r:embed="rId3"/>
+          <a:stretch>
+            <a:fillRect/>
+          </a:stretch>
+        </p:blipFill>
+        <p:spPr>
+          <a:xfrm>
+            <a:off x="3699533" y="533450"/>
+            <a:ext cx="4261962" cy="2994029"/>
+          </a:xfrm>
+          <a:prstGeom prst="rect">
+            <a:avLst/>
+          </a:prstGeom>
+        </p:spPr>
+      </p:pic>
+      <p:pic>
+        <p:nvPicPr>
+          <p:cNvPr id="11" name="Picture 10">
+            <a:extLst>
+              <a:ext uri="{FF2B5EF4-FFF2-40B4-BE49-F238E27FC236}">
+                <a16:creationId xmlns:a16="http://schemas.microsoft.com/office/drawing/2014/main" id="{39383BF8-280F-E773-B719-D67867986341}"/>
+              </a:ext>
+            </a:extLst>
+          </p:cNvPr>
+          <p:cNvPicPr>
+            <a:picLocks noChangeAspect="1"/>
+          </p:cNvPicPr>
+          <p:nvPr/>
+        </p:nvPicPr>
+        <p:blipFill>
+          <a:blip r:embed="rId4"/>
+          <a:stretch>
+            <a:fillRect/>
+          </a:stretch>
+        </p:blipFill>
+        <p:spPr>
+          <a:xfrm>
+            <a:off x="8027625" y="1071185"/>
+            <a:ext cx="2015925" cy="3858231"/>
+          </a:xfrm>
+          <a:prstGeom prst="rect">
+            <a:avLst/>
+          </a:prstGeom>
+        </p:spPr>
+      </p:pic>
+      <p:cxnSp>
+        <p:nvCxnSpPr>
+          <p:cNvPr id="55" name="Straight Connector 54">
+            <a:extLst>
+              <a:ext uri="{FF2B5EF4-FFF2-40B4-BE49-F238E27FC236}">
+                <a16:creationId xmlns:a16="http://schemas.microsoft.com/office/drawing/2014/main" id="{90676B93-40FB-4FA7-8E89-C24B7B1F8F57}"/>
+              </a:ext>
+              <a:ext uri="{C183D7F6-B498-43B3-948B-1728B52AA6E4}">
+                <adec:decorative xmlns:adec="http://schemas.microsoft.com/office/drawing/2017/decorative" val="1"/>
+              </a:ext>
+            </a:extLst>
+          </p:cNvPr>
+          <p:cNvCxnSpPr>
+            <a:cxnSpLocks noGrp="1" noRot="1" noChangeAspect="1" noMove="1" noResize="1" noEditPoints="1" noAdjustHandles="1" noChangeArrowheads="1" noChangeShapeType="1"/>
+          </p:cNvCxnSpPr>
+          <p:nvPr>
+            <p:extLst>
+              <p:ext uri="{386F3935-93C4-4BCD-93E2-E3B085C9AB24}">
+                <p16:designElem xmlns:p16="http://schemas.microsoft.com/office/powerpoint/2015/main" val="1"/>
+              </p:ext>
+            </p:extLst>
+          </p:nvPr>
+        </p:nvCxnSpPr>
+        <p:spPr>
+          <a:xfrm>
+            <a:off x="659301" y="3528543"/>
+            <a:ext cx="2823919" cy="0"/>
+          </a:xfrm>
+          <a:prstGeom prst="line">
+            <a:avLst/>
+          </a:prstGeom>
+          <a:ln w="31750"/>
+        </p:spPr>
+        <p:style>
+          <a:lnRef idx="3">
+            <a:schemeClr val="accent1"/>
+          </a:lnRef>
+          <a:fillRef idx="0">
+            <a:schemeClr val="accent1"/>
+          </a:fillRef>
+          <a:effectRef idx="2">
+            <a:schemeClr val="accent1"/>
+          </a:effectRef>
+          <a:fontRef idx="minor">
+            <a:schemeClr val="tx1"/>
+          </a:fontRef>
+        </p:style>
+      </p:cxnSp>
+      <p:pic>
+        <p:nvPicPr>
+          <p:cNvPr id="7" name="Picture 6">
+            <a:extLst>
+              <a:ext uri="{FF2B5EF4-FFF2-40B4-BE49-F238E27FC236}">
+                <a16:creationId xmlns:a16="http://schemas.microsoft.com/office/drawing/2014/main" id="{83799579-8EB9-DC77-CDAC-986F8B3F2A7D}"/>
+              </a:ext>
+            </a:extLst>
+          </p:cNvPr>
+          <p:cNvPicPr>
+            <a:picLocks noChangeAspect="1"/>
+          </p:cNvPicPr>
+          <p:nvPr/>
+        </p:nvPicPr>
+        <p:blipFill>
+          <a:blip r:embed="rId5"/>
+          <a:stretch>
+            <a:fillRect/>
+          </a:stretch>
+        </p:blipFill>
+        <p:spPr>
+          <a:xfrm>
+            <a:off x="463795" y="3885819"/>
+            <a:ext cx="4508551" cy="1882320"/>
+          </a:xfrm>
+          <a:prstGeom prst="rect">
+            <a:avLst/>
+          </a:prstGeom>
+        </p:spPr>
+      </p:pic>
+      <p:pic>
+        <p:nvPicPr>
+          <p:cNvPr id="5" name="Picture 4">
+            <a:extLst>
+              <a:ext uri="{FF2B5EF4-FFF2-40B4-BE49-F238E27FC236}">
+                <a16:creationId xmlns:a16="http://schemas.microsoft.com/office/drawing/2014/main" id="{43E50A31-341F-5C88-C296-35A974D49814}"/>
+              </a:ext>
+            </a:extLst>
+          </p:cNvPr>
+          <p:cNvPicPr>
+            <a:picLocks noChangeAspect="1"/>
+          </p:cNvPicPr>
+          <p:nvPr/>
+        </p:nvPicPr>
+        <p:blipFill>
+          <a:blip r:embed="rId6"/>
+          <a:stretch>
+            <a:fillRect/>
+          </a:stretch>
+        </p:blipFill>
+        <p:spPr>
+          <a:xfrm>
+            <a:off x="10175810" y="1340666"/>
+            <a:ext cx="1890344" cy="3319267"/>
+          </a:xfrm>
+          <a:prstGeom prst="rect">
+            <a:avLst/>
+          </a:prstGeom>
+        </p:spPr>
+      </p:pic>
+      <p:pic>
+        <p:nvPicPr>
+          <p:cNvPr id="57" name="Picture 56">
+            <a:extLst>
+              <a:ext uri="{FF2B5EF4-FFF2-40B4-BE49-F238E27FC236}">
+                <a16:creationId xmlns:a16="http://schemas.microsoft.com/office/drawing/2014/main" id="{3509D85C-1896-4695-A144-B562AFC58EB2}"/>
+              </a:ext>
+              <a:ext uri="{C183D7F6-B498-43B3-948B-1728B52AA6E4}">
+                <adec:decorative xmlns:adec="http://schemas.microsoft.com/office/drawing/2017/decorative" val="1"/>
+              </a:ext>
+            </a:extLst>
+          </p:cNvPr>
+          <p:cNvPicPr>
+            <a:picLocks noGrp="1" noRot="1" noChangeAspect="1" noMove="1" noResize="1" noEditPoints="1" noAdjustHandles="1" noChangeArrowheads="1" noChangeShapeType="1" noCrop="1"/>
+          </p:cNvPicPr>
+          <p:nvPr>
+            <p:extLst>
+              <p:ext uri="{386F3935-93C4-4BCD-93E2-E3B085C9AB24}">
+                <p16:designElem xmlns:p16="http://schemas.microsoft.com/office/powerpoint/2015/main" val="1"/>
+              </p:ext>
+            </p:extLst>
+          </p:nvPr>
+        </p:nvPicPr>
+        <p:blipFill rotWithShape="1">
+          <a:blip r:embed="rId2">
+            <a:extLst>
+              <a:ext uri="{28A0092B-C50C-407E-A947-70E740481C1C}">
+                <a14:useLocalDpi xmlns:a14="http://schemas.microsoft.com/office/drawing/2010/main" val="0"/>
+              </a:ext>
+            </a:extLst>
+          </a:blip>
+          <a:srcRect t="1538" b="-1538"/>
+          <a:stretch/>
+        </p:blipFill>
+        <p:spPr bwMode="black">
+          <a:xfrm>
+            <a:off x="0" y="6126480"/>
+            <a:ext cx="12192000" cy="742950"/>
+          </a:xfrm>
+          <a:prstGeom prst="rect">
+            <a:avLst/>
+          </a:prstGeom>
+        </p:spPr>
+      </p:pic>
+      <p:cxnSp>
+        <p:nvCxnSpPr>
+          <p:cNvPr id="59" name="Straight Connector 58">
+            <a:extLst>
+              <a:ext uri="{FF2B5EF4-FFF2-40B4-BE49-F238E27FC236}">
+                <a16:creationId xmlns:a16="http://schemas.microsoft.com/office/drawing/2014/main" id="{6D9F55CD-CB1D-4CB9-98D3-2BC602BC430E}"/>
+              </a:ext>
+              <a:ext uri="{C183D7F6-B498-43B3-948B-1728B52AA6E4}">
+                <adec:decorative xmlns:adec="http://schemas.microsoft.com/office/drawing/2017/decorative" val="1"/>
+              </a:ext>
+            </a:extLst>
+          </p:cNvPr>
+          <p:cNvCxnSpPr>
+            <a:cxnSpLocks noGrp="1" noRot="1" noChangeAspect="1" noMove="1" noResize="1" noEditPoints="1" noAdjustHandles="1" noChangeArrowheads="1" noChangeShapeType="1"/>
+          </p:cNvCxnSpPr>
+          <p:nvPr>
+            <p:extLst>
+              <p:ext uri="{386F3935-93C4-4BCD-93E2-E3B085C9AB24}">
+                <p16:designElem xmlns:p16="http://schemas.microsoft.com/office/powerpoint/2015/main" val="1"/>
+              </p:ext>
+            </p:extLst>
+          </p:nvPr>
+        </p:nvCxnSpPr>
+        <p:spPr>
+          <a:xfrm>
+            <a:off x="0" y="6128413"/>
+            <a:ext cx="12192000" cy="0"/>
+          </a:xfrm>
+          <a:prstGeom prst="line">
+            <a:avLst/>
+          </a:prstGeom>
+          <a:ln w="12700">
+            <a:solidFill>
+              <a:srgbClr val="000001">
+                <a:alpha val="20000"/>
+              </a:srgbClr>
+            </a:solidFill>
+          </a:ln>
+        </p:spPr>
+        <p:style>
+          <a:lnRef idx="1">
+            <a:schemeClr val="accent1"/>
+          </a:lnRef>
+          <a:fillRef idx="0">
+            <a:schemeClr val="accent1"/>
+          </a:fillRef>
+          <a:effectRef idx="0">
+            <a:schemeClr val="accent1"/>
+          </a:effectRef>
+          <a:fontRef idx="minor">
+            <a:schemeClr val="tx1"/>
+          </a:fontRef>
+        </p:style>
+      </p:cxnSp>
+    </p:spTree>
+    <p:extLst>
+      <p:ext uri="{BB962C8B-B14F-4D97-AF65-F5344CB8AC3E}">
+        <p14:creationId xmlns:p14="http://schemas.microsoft.com/office/powerpoint/2010/main" val="1886950838"/>
+      </p:ext>
+    </p:extLst>
+  </p:cSld>
+  <p:clrMapOvr>
+    <a:masterClrMapping/>
+  </p:clrMapOvr>
+</p:sld>
+</file>
+
+<file path=ppt/slides/slide12.xml><?xml version="1.0" encoding="utf-8"?>
+<p:sld xmlns:a="http://schemas.openxmlformats.org/drawingml/2006/main" xmlns:r="http://schemas.openxmlformats.org/officeDocument/2006/relationships" xmlns:p="http://schemas.openxmlformats.org/presentationml/2006/main">
+  <p:cSld>
+    <p:bg>
+      <p:bgPr>
+        <a:gradFill rotWithShape="1">
+          <a:gsLst>
+            <a:gs pos="0">
+              <a:schemeClr val="bg2">
+                <a:tint val="94000"/>
+                <a:satMod val="80000"/>
+                <a:lumMod val="106000"/>
+              </a:schemeClr>
+            </a:gs>
+            <a:gs pos="100000">
+              <a:schemeClr val="bg2">
+                <a:shade val="80000"/>
+              </a:schemeClr>
+            </a:gs>
+          </a:gsLst>
+          <a:path path="circle">
+            <a:fillToRect l="43000" r="43000" b="100000"/>
+          </a:path>
+        </a:gradFill>
+        <a:effectLst/>
+      </p:bgPr>
+    </p:bg>
+    <p:spTree>
+      <p:nvGrpSpPr>
+        <p:cNvPr id="1" name=""/>
+        <p:cNvGrpSpPr/>
+        <p:nvPr/>
+      </p:nvGrpSpPr>
+      <p:grpSpPr>
+        <a:xfrm>
+          <a:off x="0" y="0"/>
+          <a:ext cx="0" cy="0"/>
+          <a:chOff x="0" y="0"/>
+          <a:chExt cx="0" cy="0"/>
+        </a:xfrm>
+      </p:grpSpPr>
+      <p:sp>
+        <p:nvSpPr>
+          <p:cNvPr id="50" name="Rectangle 49">
+            <a:extLst>
+              <a:ext uri="{FF2B5EF4-FFF2-40B4-BE49-F238E27FC236}">
+                <a16:creationId xmlns:a16="http://schemas.microsoft.com/office/drawing/2014/main" id="{E724B9E8-02C8-4B2E-8770-A00A67760DF0}"/>
+              </a:ext>
+              <a:ext uri="{C183D7F6-B498-43B3-948B-1728B52AA6E4}">
+                <adec:decorative xmlns:adec="http://schemas.microsoft.com/office/drawing/2017/decorative" val="1"/>
+              </a:ext>
+            </a:extLst>
+          </p:cNvPr>
+          <p:cNvSpPr>
+            <a:spLocks noGrp="1" noRot="1" noChangeAspect="1" noMove="1" noResize="1" noEditPoints="1" noAdjustHandles="1" noChangeArrowheads="1" noChangeShapeType="1" noTextEdit="1"/>
+          </p:cNvSpPr>
+          <p:nvPr>
+            <p:extLst>
+              <p:ext uri="{386F3935-93C4-4BCD-93E2-E3B085C9AB24}">
+                <p16:designElem xmlns:p16="http://schemas.microsoft.com/office/powerpoint/2015/main" val="1"/>
+              </p:ext>
+            </p:extLst>
+          </p:nvPr>
+        </p:nvSpPr>
+        <p:spPr>
+          <a:xfrm>
+            <a:off x="0" y="2019476"/>
+            <a:ext cx="12192000" cy="4105941"/>
+          </a:xfrm>
+          <a:prstGeom prst="rect">
+            <a:avLst/>
+          </a:prstGeom>
+          <a:gradFill flip="none" rotWithShape="1">
+            <a:gsLst>
+              <a:gs pos="0">
+                <a:schemeClr val="bg2">
+                  <a:alpha val="0"/>
+                </a:schemeClr>
+              </a:gs>
+              <a:gs pos="100000">
+                <a:schemeClr val="bg2"/>
+              </a:gs>
+            </a:gsLst>
+            <a:lin ang="5400000" scaled="0"/>
+            <a:tileRect/>
+          </a:gradFill>
+          <a:ln>
+            <a:noFill/>
+          </a:ln>
+        </p:spPr>
+        <p:style>
+          <a:lnRef idx="2">
+            <a:schemeClr val="accent1">
+              <a:shade val="50000"/>
+            </a:schemeClr>
+          </a:lnRef>
+          <a:fillRef idx="1">
+            <a:schemeClr val="accent1"/>
+          </a:fillRef>
+          <a:effectRef idx="0">
+            <a:schemeClr val="accent1"/>
+          </a:effectRef>
+          <a:fontRef idx="minor">
+            <a:schemeClr val="lt1"/>
+          </a:fontRef>
+        </p:style>
+        <p:txBody>
+          <a:bodyPr/>
+          <a:lstStyle/>
+          <a:p>
+            <a:endParaRPr lang="en-US"/>
+          </a:p>
+        </p:txBody>
+      </p:sp>
+      <p:pic>
+        <p:nvPicPr>
+          <p:cNvPr id="51" name="Picture 50">
+            <a:extLst>
+              <a:ext uri="{FF2B5EF4-FFF2-40B4-BE49-F238E27FC236}">
+                <a16:creationId xmlns:a16="http://schemas.microsoft.com/office/drawing/2014/main" id="{7B8AE548-0BFA-4792-9962-3375923C7635}"/>
+              </a:ext>
+              <a:ext uri="{C183D7F6-B498-43B3-948B-1728B52AA6E4}">
+                <adec:decorative xmlns:adec="http://schemas.microsoft.com/office/drawing/2017/decorative" val="1"/>
+              </a:ext>
+            </a:extLst>
+          </p:cNvPr>
+          <p:cNvPicPr>
+            <a:picLocks noGrp="1" noRot="1" noChangeAspect="1" noMove="1" noResize="1" noEditPoints="1" noAdjustHandles="1" noChangeArrowheads="1" noChangeShapeType="1" noCrop="1"/>
+          </p:cNvPicPr>
+          <p:nvPr>
+            <p:extLst>
+              <p:ext uri="{386F3935-93C4-4BCD-93E2-E3B085C9AB24}">
+                <p16:designElem xmlns:p16="http://schemas.microsoft.com/office/powerpoint/2015/main" val="1"/>
+              </p:ext>
+            </p:extLst>
+          </p:nvPr>
+        </p:nvPicPr>
+        <p:blipFill rotWithShape="1">
+          <a:blip r:embed="rId2">
+            <a:extLst>
+              <a:ext uri="{28A0092B-C50C-407E-A947-70E740481C1C}">
+                <a14:useLocalDpi xmlns:a14="http://schemas.microsoft.com/office/drawing/2010/main" val="0"/>
+              </a:ext>
+            </a:extLst>
+          </a:blip>
+          <a:srcRect t="1538" b="-1538"/>
+          <a:stretch/>
+        </p:blipFill>
+        <p:spPr bwMode="black">
+          <a:xfrm>
+            <a:off x="0" y="6126480"/>
+            <a:ext cx="12192000" cy="742950"/>
+          </a:xfrm>
+          <a:prstGeom prst="rect">
+            <a:avLst/>
+          </a:prstGeom>
+        </p:spPr>
+      </p:pic>
+      <p:cxnSp>
+        <p:nvCxnSpPr>
+          <p:cNvPr id="52" name="Straight Connector 51">
+            <a:extLst>
+              <a:ext uri="{FF2B5EF4-FFF2-40B4-BE49-F238E27FC236}">
+                <a16:creationId xmlns:a16="http://schemas.microsoft.com/office/drawing/2014/main" id="{67639EF4-FA83-4D85-90FE-B831AF283896}"/>
+              </a:ext>
+              <a:ext uri="{C183D7F6-B498-43B3-948B-1728B52AA6E4}">
+                <adec:decorative xmlns:adec="http://schemas.microsoft.com/office/drawing/2017/decorative" val="1"/>
+              </a:ext>
+            </a:extLst>
+          </p:cNvPr>
+          <p:cNvCxnSpPr>
+            <a:cxnSpLocks noGrp="1" noRot="1" noChangeAspect="1" noMove="1" noResize="1" noEditPoints="1" noAdjustHandles="1" noChangeArrowheads="1" noChangeShapeType="1"/>
+          </p:cNvCxnSpPr>
+          <p:nvPr>
+            <p:extLst>
+              <p:ext uri="{386F3935-93C4-4BCD-93E2-E3B085C9AB24}">
+                <p16:designElem xmlns:p16="http://schemas.microsoft.com/office/powerpoint/2015/main" val="1"/>
+              </p:ext>
+            </p:extLst>
+          </p:nvPr>
+        </p:nvCxnSpPr>
+        <p:spPr>
+          <a:xfrm>
+            <a:off x="0" y="6128413"/>
+            <a:ext cx="12192000" cy="0"/>
+          </a:xfrm>
+          <a:prstGeom prst="line">
+            <a:avLst/>
+          </a:prstGeom>
+          <a:ln w="12700">
+            <a:solidFill>
+              <a:srgbClr val="000001">
+                <a:alpha val="20000"/>
+              </a:srgbClr>
+            </a:solidFill>
+          </a:ln>
+        </p:spPr>
+        <p:style>
+          <a:lnRef idx="1">
+            <a:schemeClr val="accent1"/>
+          </a:lnRef>
+          <a:fillRef idx="0">
+            <a:schemeClr val="accent1"/>
+          </a:fillRef>
+          <a:effectRef idx="0">
+            <a:schemeClr val="accent1"/>
+          </a:effectRef>
+          <a:fontRef idx="minor">
+            <a:schemeClr val="tx1"/>
+          </a:fontRef>
+        </p:style>
+      </p:cxnSp>
+      <p:cxnSp>
+        <p:nvCxnSpPr>
+          <p:cNvPr id="53" name="Straight Connector 52">
+            <a:extLst>
+              <a:ext uri="{FF2B5EF4-FFF2-40B4-BE49-F238E27FC236}">
+                <a16:creationId xmlns:a16="http://schemas.microsoft.com/office/drawing/2014/main" id="{CC87E76A-8F50-413D-9BFC-C5A1525BD9BC}"/>
+              </a:ext>
+              <a:ext uri="{C183D7F6-B498-43B3-948B-1728B52AA6E4}">
+                <adec:decorative xmlns:adec="http://schemas.microsoft.com/office/drawing/2017/decorative" val="1"/>
+              </a:ext>
+            </a:extLst>
+          </p:cNvPr>
+          <p:cNvCxnSpPr>
+            <a:cxnSpLocks noGrp="1" noRot="1" noChangeAspect="1" noMove="1" noResize="1" noEditPoints="1" noAdjustHandles="1" noChangeArrowheads="1" noChangeShapeType="1"/>
+          </p:cNvCxnSpPr>
+          <p:nvPr>
+            <p:extLst>
+              <p:ext uri="{386F3935-93C4-4BCD-93E2-E3B085C9AB24}">
+                <p16:designElem xmlns:p16="http://schemas.microsoft.com/office/powerpoint/2015/main" val="1"/>
+              </p:ext>
+            </p:extLst>
+          </p:nvPr>
+        </p:nvCxnSpPr>
+        <p:spPr>
+          <a:xfrm>
+            <a:off x="2417780" y="3528542"/>
+            <a:ext cx="8637072" cy="0"/>
+          </a:xfrm>
+          <a:prstGeom prst="line">
+            <a:avLst/>
+          </a:prstGeom>
+          <a:ln w="31750"/>
+        </p:spPr>
+        <p:style>
+          <a:lnRef idx="3">
+            <a:schemeClr val="accent1"/>
+          </a:lnRef>
+          <a:fillRef idx="0">
+            <a:schemeClr val="accent1"/>
+          </a:fillRef>
+          <a:effectRef idx="2">
+            <a:schemeClr val="accent1"/>
+          </a:effectRef>
+          <a:fontRef idx="minor">
+            <a:schemeClr val="tx1"/>
+          </a:fontRef>
+        </p:style>
+      </p:cxnSp>
+      <p:sp useBgFill="1">
+        <p:nvSpPr>
+          <p:cNvPr id="54" name="Rectangle 53">
+            <a:extLst>
+              <a:ext uri="{FF2B5EF4-FFF2-40B4-BE49-F238E27FC236}">
+                <a16:creationId xmlns:a16="http://schemas.microsoft.com/office/drawing/2014/main" id="{0F28EA84-13B4-4494-A4D3-8DE462FF0E6B}"/>
+              </a:ext>
+              <a:ext uri="{C183D7F6-B498-43B3-948B-1728B52AA6E4}">
+                <adec:decorative xmlns:adec="http://schemas.microsoft.com/office/drawing/2017/decorative" val="1"/>
+              </a:ext>
+            </a:extLst>
+          </p:cNvPr>
+          <p:cNvSpPr>
+            <a:spLocks noGrp="1" noRot="1" noChangeAspect="1" noMove="1" noResize="1" noEditPoints="1" noAdjustHandles="1" noChangeArrowheads="1" noChangeShapeType="1" noTextEdit="1"/>
+          </p:cNvSpPr>
+          <p:nvPr>
+            <p:extLst>
+              <p:ext uri="{386F3935-93C4-4BCD-93E2-E3B085C9AB24}">
+                <p16:designElem xmlns:p16="http://schemas.microsoft.com/office/powerpoint/2015/main" val="1"/>
+              </p:ext>
+            </p:extLst>
+          </p:nvPr>
+        </p:nvSpPr>
+        <p:spPr>
+          <a:xfrm>
+            <a:off x="2" y="0"/>
+            <a:ext cx="12191695" cy="6858000"/>
+          </a:xfrm>
+          <a:prstGeom prst="rect">
+            <a:avLst/>
+          </a:prstGeom>
+          <a:ln>
+            <a:noFill/>
+          </a:ln>
+        </p:spPr>
+        <p:style>
+          <a:lnRef idx="2">
+            <a:schemeClr val="accent1">
+              <a:shade val="50000"/>
+            </a:schemeClr>
+          </a:lnRef>
+          <a:fillRef idx="1">
+            <a:schemeClr val="accent1"/>
+          </a:fillRef>
+          <a:effectRef idx="0">
+            <a:schemeClr val="accent1"/>
+          </a:effectRef>
+          <a:fontRef idx="minor">
+            <a:schemeClr val="lt1"/>
+          </a:fontRef>
+        </p:style>
+        <p:txBody>
+          <a:bodyPr rtlCol="0" anchor="ctr"/>
+          <a:lstStyle/>
+          <a:p>
+            <a:pPr algn="ctr"/>
+            <a:endParaRPr lang="en-US"/>
+          </a:p>
+        </p:txBody>
+      </p:sp>
+      <p:sp>
+        <p:nvSpPr>
+          <p:cNvPr id="55" name="Rectangle 54">
+            <a:extLst>
+              <a:ext uri="{FF2B5EF4-FFF2-40B4-BE49-F238E27FC236}">
+                <a16:creationId xmlns:a16="http://schemas.microsoft.com/office/drawing/2014/main" id="{6BEB1B24-66CE-4D63-A39D-2D1B481DF95E}"/>
+              </a:ext>
+              <a:ext uri="{C183D7F6-B498-43B3-948B-1728B52AA6E4}">
+                <adec:decorative xmlns:adec="http://schemas.microsoft.com/office/drawing/2017/decorative" val="1"/>
+              </a:ext>
+            </a:extLst>
+          </p:cNvPr>
+          <p:cNvSpPr>
+            <a:spLocks noGrp="1" noRot="1" noChangeAspect="1" noMove="1" noResize="1" noEditPoints="1" noAdjustHandles="1" noChangeArrowheads="1" noChangeShapeType="1" noTextEdit="1"/>
+          </p:cNvSpPr>
+          <p:nvPr>
+            <p:extLst>
+              <p:ext uri="{386F3935-93C4-4BCD-93E2-E3B085C9AB24}">
+                <p16:designElem xmlns:p16="http://schemas.microsoft.com/office/powerpoint/2015/main" val="1"/>
+              </p:ext>
+            </p:extLst>
+          </p:nvPr>
+        </p:nvSpPr>
+        <p:spPr>
+          <a:xfrm>
+            <a:off x="0" y="2019476"/>
+            <a:ext cx="12192000" cy="4105941"/>
+          </a:xfrm>
+          <a:prstGeom prst="rect">
+            <a:avLst/>
+          </a:prstGeom>
+          <a:gradFill flip="none" rotWithShape="1">
+            <a:gsLst>
+              <a:gs pos="0">
+                <a:schemeClr val="bg2">
+                  <a:alpha val="0"/>
+                </a:schemeClr>
+              </a:gs>
+              <a:gs pos="100000">
+                <a:schemeClr val="bg2"/>
+              </a:gs>
+            </a:gsLst>
+            <a:lin ang="5400000" scaled="0"/>
+            <a:tileRect/>
+          </a:gradFill>
+          <a:ln>
+            <a:noFill/>
+          </a:ln>
+        </p:spPr>
+        <p:style>
+          <a:lnRef idx="2">
+            <a:schemeClr val="accent1">
+              <a:shade val="50000"/>
+            </a:schemeClr>
+          </a:lnRef>
+          <a:fillRef idx="1">
+            <a:schemeClr val="accent1"/>
+          </a:fillRef>
+          <a:effectRef idx="0">
+            <a:schemeClr val="accent1"/>
+          </a:effectRef>
+          <a:fontRef idx="minor">
+            <a:schemeClr val="lt1"/>
+          </a:fontRef>
+        </p:style>
+        <p:txBody>
+          <a:bodyPr rtlCol="0" anchor="ctr"/>
+          <a:lstStyle/>
+          <a:p>
+            <a:pPr lvl="0" algn="ctr"/>
+            <a:endParaRPr lang="en-US"/>
+          </a:p>
+        </p:txBody>
+      </p:sp>
+      <p:sp>
+        <p:nvSpPr>
+          <p:cNvPr id="2" name="Title 1">
+            <a:extLst>
+              <a:ext uri="{FF2B5EF4-FFF2-40B4-BE49-F238E27FC236}">
+                <a16:creationId xmlns:a16="http://schemas.microsoft.com/office/drawing/2014/main" id="{7BA6A004-AC9E-F83D-7C6C-8E45C6DDE234}"/>
+              </a:ext>
+            </a:extLst>
+          </p:cNvPr>
+          <p:cNvSpPr>
+            <a:spLocks noGrp="1"/>
+          </p:cNvSpPr>
+          <p:nvPr>
+            <p:ph type="title"/>
+          </p:nvPr>
+        </p:nvSpPr>
+        <p:spPr>
+          <a:xfrm>
+            <a:off x="659301" y="1474969"/>
+            <a:ext cx="2823919" cy="1868760"/>
+          </a:xfrm>
+        </p:spPr>
+        <p:txBody>
+          <a:bodyPr vert="horz" lIns="91440" tIns="45720" rIns="91440" bIns="0" rtlCol="0" anchor="b">
+            <a:normAutofit/>
+          </a:bodyPr>
+          <a:lstStyle/>
+          <a:p>
+            <a:r>
+              <a:rPr lang="en-US" sz="3600"/>
+              <a:t>Vlajk Sándor - Git</a:t>
+            </a:r>
+          </a:p>
+        </p:txBody>
+      </p:sp>
+      <p:cxnSp>
+        <p:nvCxnSpPr>
+          <p:cNvPr id="56" name="Straight Connector 55">
+            <a:extLst>
+              <a:ext uri="{FF2B5EF4-FFF2-40B4-BE49-F238E27FC236}">
+                <a16:creationId xmlns:a16="http://schemas.microsoft.com/office/drawing/2014/main" id="{78DE337D-1DBA-4536-8145-B43EE65C747D}"/>
+              </a:ext>
+              <a:ext uri="{C183D7F6-B498-43B3-948B-1728B52AA6E4}">
+                <adec:decorative xmlns:adec="http://schemas.microsoft.com/office/drawing/2017/decorative" val="1"/>
+              </a:ext>
+            </a:extLst>
+          </p:cNvPr>
+          <p:cNvCxnSpPr>
+            <a:cxnSpLocks noGrp="1" noRot="1" noChangeAspect="1" noMove="1" noResize="1" noEditPoints="1" noAdjustHandles="1" noChangeArrowheads="1" noChangeShapeType="1"/>
+          </p:cNvCxnSpPr>
+          <p:nvPr>
+            <p:extLst>
+              <p:ext uri="{386F3935-93C4-4BCD-93E2-E3B085C9AB24}">
+                <p16:designElem xmlns:p16="http://schemas.microsoft.com/office/powerpoint/2015/main" val="1"/>
+              </p:ext>
+            </p:extLst>
+          </p:nvPr>
+        </p:nvCxnSpPr>
+        <p:spPr>
+          <a:xfrm>
+            <a:off x="659301" y="3528543"/>
+            <a:ext cx="2823919" cy="0"/>
+          </a:xfrm>
+          <a:prstGeom prst="line">
+            <a:avLst/>
+          </a:prstGeom>
+          <a:ln w="31750"/>
+        </p:spPr>
+        <p:style>
+          <a:lnRef idx="3">
+            <a:schemeClr val="accent1"/>
+          </a:lnRef>
+          <a:fillRef idx="0">
+            <a:schemeClr val="accent1"/>
+          </a:fillRef>
+          <a:effectRef idx="2">
+            <a:schemeClr val="accent1"/>
+          </a:effectRef>
+          <a:fontRef idx="minor">
+            <a:schemeClr val="tx1"/>
+          </a:fontRef>
+        </p:style>
+      </p:cxnSp>
+      <p:pic>
+        <p:nvPicPr>
+          <p:cNvPr id="5" name="Picture 4">
+            <a:extLst>
+              <a:ext uri="{FF2B5EF4-FFF2-40B4-BE49-F238E27FC236}">
+                <a16:creationId xmlns:a16="http://schemas.microsoft.com/office/drawing/2014/main" id="{A88E504C-4007-0FB3-BC00-5FF4F74B5CA7}"/>
+              </a:ext>
+            </a:extLst>
+          </p:cNvPr>
+          <p:cNvPicPr>
+            <a:picLocks noChangeAspect="1"/>
+          </p:cNvPicPr>
+          <p:nvPr/>
+        </p:nvPicPr>
+        <p:blipFill>
+          <a:blip r:embed="rId3"/>
+          <a:stretch>
+            <a:fillRect/>
+          </a:stretch>
+        </p:blipFill>
+        <p:spPr>
+          <a:xfrm>
+            <a:off x="3989479" y="1522154"/>
+            <a:ext cx="3693150" cy="3067192"/>
+          </a:xfrm>
+          <a:prstGeom prst="rect">
+            <a:avLst/>
+          </a:prstGeom>
+        </p:spPr>
+      </p:pic>
+      <p:pic>
+        <p:nvPicPr>
+          <p:cNvPr id="9" name="Picture 8">
+            <a:extLst>
+              <a:ext uri="{FF2B5EF4-FFF2-40B4-BE49-F238E27FC236}">
+                <a16:creationId xmlns:a16="http://schemas.microsoft.com/office/drawing/2014/main" id="{CE8C27E6-D0FE-7D3F-0657-BC477A7054EE}"/>
+              </a:ext>
+            </a:extLst>
+          </p:cNvPr>
+          <p:cNvPicPr>
+            <a:picLocks noChangeAspect="1"/>
+          </p:cNvPicPr>
+          <p:nvPr/>
+        </p:nvPicPr>
+        <p:blipFill>
+          <a:blip r:embed="rId4"/>
+          <a:stretch>
+            <a:fillRect/>
+          </a:stretch>
+        </p:blipFill>
+        <p:spPr>
+          <a:xfrm>
+            <a:off x="7846354" y="965341"/>
+            <a:ext cx="3687168" cy="1523440"/>
+          </a:xfrm>
+          <a:prstGeom prst="rect">
+            <a:avLst/>
+          </a:prstGeom>
+        </p:spPr>
+      </p:pic>
+      <p:pic>
+        <p:nvPicPr>
+          <p:cNvPr id="7" name="Picture 6">
+            <a:extLst>
+              <a:ext uri="{FF2B5EF4-FFF2-40B4-BE49-F238E27FC236}">
+                <a16:creationId xmlns:a16="http://schemas.microsoft.com/office/drawing/2014/main" id="{0491AA9D-40D6-945F-5458-984FA0DBC683}"/>
+              </a:ext>
+            </a:extLst>
+          </p:cNvPr>
+          <p:cNvPicPr>
+            <a:picLocks noChangeAspect="1"/>
+          </p:cNvPicPr>
+          <p:nvPr/>
+        </p:nvPicPr>
+        <p:blipFill>
+          <a:blip r:embed="rId5"/>
+          <a:stretch>
+            <a:fillRect/>
+          </a:stretch>
+        </p:blipFill>
+        <p:spPr>
+          <a:xfrm>
+            <a:off x="7846051" y="3900689"/>
+            <a:ext cx="3687168" cy="967500"/>
+          </a:xfrm>
+          <a:prstGeom prst="rect">
+            <a:avLst/>
+          </a:prstGeom>
+        </p:spPr>
+      </p:pic>
+      <p:pic>
+        <p:nvPicPr>
+          <p:cNvPr id="57" name="Picture 56">
+            <a:extLst>
+              <a:ext uri="{FF2B5EF4-FFF2-40B4-BE49-F238E27FC236}">
+                <a16:creationId xmlns:a16="http://schemas.microsoft.com/office/drawing/2014/main" id="{E7233926-059A-41AD-A9F2-56552CF4FF6B}"/>
+              </a:ext>
+              <a:ext uri="{C183D7F6-B498-43B3-948B-1728B52AA6E4}">
+                <adec:decorative xmlns:adec="http://schemas.microsoft.com/office/drawing/2017/decorative" val="1"/>
+              </a:ext>
+            </a:extLst>
+          </p:cNvPr>
+          <p:cNvPicPr>
+            <a:picLocks noGrp="1" noRot="1" noChangeAspect="1" noMove="1" noResize="1" noEditPoints="1" noAdjustHandles="1" noChangeArrowheads="1" noChangeShapeType="1" noCrop="1"/>
+          </p:cNvPicPr>
+          <p:nvPr>
+            <p:extLst>
+              <p:ext uri="{386F3935-93C4-4BCD-93E2-E3B085C9AB24}">
+                <p16:designElem xmlns:p16="http://schemas.microsoft.com/office/powerpoint/2015/main" val="1"/>
+              </p:ext>
+            </p:extLst>
+          </p:nvPr>
+        </p:nvPicPr>
+        <p:blipFill rotWithShape="1">
+          <a:blip r:embed="rId2">
+            <a:extLst>
+              <a:ext uri="{28A0092B-C50C-407E-A947-70E740481C1C}">
+                <a14:useLocalDpi xmlns:a14="http://schemas.microsoft.com/office/drawing/2010/main" val="0"/>
+              </a:ext>
+            </a:extLst>
+          </a:blip>
+          <a:srcRect t="1538" b="-1538"/>
+          <a:stretch/>
+        </p:blipFill>
+        <p:spPr bwMode="black">
+          <a:xfrm>
+            <a:off x="0" y="6126480"/>
+            <a:ext cx="12192000" cy="742950"/>
+          </a:xfrm>
+          <a:prstGeom prst="rect">
+            <a:avLst/>
+          </a:prstGeom>
+        </p:spPr>
+      </p:pic>
+      <p:cxnSp>
+        <p:nvCxnSpPr>
+          <p:cNvPr id="58" name="Straight Connector 57">
+            <a:extLst>
+              <a:ext uri="{FF2B5EF4-FFF2-40B4-BE49-F238E27FC236}">
+                <a16:creationId xmlns:a16="http://schemas.microsoft.com/office/drawing/2014/main" id="{C13C145E-93D4-481E-92DC-736D9EBA37FC}"/>
+              </a:ext>
+              <a:ext uri="{C183D7F6-B498-43B3-948B-1728B52AA6E4}">
+                <adec:decorative xmlns:adec="http://schemas.microsoft.com/office/drawing/2017/decorative" val="1"/>
+              </a:ext>
+            </a:extLst>
+          </p:cNvPr>
+          <p:cNvCxnSpPr>
+            <a:cxnSpLocks noGrp="1" noRot="1" noChangeAspect="1" noMove="1" noResize="1" noEditPoints="1" noAdjustHandles="1" noChangeArrowheads="1" noChangeShapeType="1"/>
+          </p:cNvCxnSpPr>
+          <p:nvPr>
+            <p:extLst>
+              <p:ext uri="{386F3935-93C4-4BCD-93E2-E3B085C9AB24}">
+                <p16:designElem xmlns:p16="http://schemas.microsoft.com/office/powerpoint/2015/main" val="1"/>
+              </p:ext>
+            </p:extLst>
+          </p:nvPr>
+        </p:nvCxnSpPr>
+        <p:spPr>
+          <a:xfrm>
+            <a:off x="0" y="6128413"/>
+            <a:ext cx="12192000" cy="0"/>
+          </a:xfrm>
+          <a:prstGeom prst="line">
+            <a:avLst/>
+          </a:prstGeom>
+          <a:ln w="12700">
+            <a:solidFill>
+              <a:srgbClr val="000001">
+                <a:alpha val="20000"/>
+              </a:srgbClr>
+            </a:solidFill>
+          </a:ln>
+        </p:spPr>
+        <p:style>
+          <a:lnRef idx="1">
+            <a:schemeClr val="accent1"/>
+          </a:lnRef>
+          <a:fillRef idx="0">
+            <a:schemeClr val="accent1"/>
+          </a:fillRef>
+          <a:effectRef idx="0">
+            <a:schemeClr val="accent1"/>
+          </a:effectRef>
+          <a:fontRef idx="minor">
+            <a:schemeClr val="tx1"/>
+          </a:fontRef>
+        </p:style>
+      </p:cxnSp>
+    </p:spTree>
+    <p:extLst>
+      <p:ext uri="{BB962C8B-B14F-4D97-AF65-F5344CB8AC3E}">
+        <p14:creationId xmlns:p14="http://schemas.microsoft.com/office/powerpoint/2010/main" val="851204681"/>
+      </p:ext>
+    </p:extLst>
+  </p:cSld>
+  <p:clrMapOvr>
+    <a:masterClrMapping/>
+  </p:clrMapOvr>
+</p:sld>
+</file>
+
+<file path=ppt/slides/slide13.xml><?xml version="1.0" encoding="utf-8"?>
+<p:sld xmlns:a="http://schemas.openxmlformats.org/drawingml/2006/main" xmlns:r="http://schemas.openxmlformats.org/officeDocument/2006/relationships" xmlns:p="http://schemas.openxmlformats.org/presentationml/2006/main">
+  <p:cSld>
+    <p:bg>
+      <p:bgPr>
+        <a:gradFill rotWithShape="1">
+          <a:gsLst>
+            <a:gs pos="0">
+              <a:schemeClr val="bg2">
+                <a:tint val="94000"/>
+                <a:satMod val="80000"/>
+                <a:lumMod val="106000"/>
+              </a:schemeClr>
+            </a:gs>
+            <a:gs pos="100000">
+              <a:schemeClr val="bg2">
+                <a:shade val="80000"/>
+              </a:schemeClr>
+            </a:gs>
+          </a:gsLst>
+          <a:path path="circle">
+            <a:fillToRect l="43000" r="43000" b="100000"/>
+          </a:path>
+        </a:gradFill>
+        <a:effectLst/>
+      </p:bgPr>
+    </p:bg>
+    <p:spTree>
+      <p:nvGrpSpPr>
+        <p:cNvPr id="1" name=""/>
+        <p:cNvGrpSpPr/>
+        <p:nvPr/>
+      </p:nvGrpSpPr>
+      <p:grpSpPr>
+        <a:xfrm>
+          <a:off x="0" y="0"/>
+          <a:ext cx="0" cy="0"/>
+          <a:chOff x="0" y="0"/>
+          <a:chExt cx="0" cy="0"/>
+        </a:xfrm>
+      </p:grpSpPr>
+      <p:sp>
+        <p:nvSpPr>
+          <p:cNvPr id="38" name="Rectangle 37">
+            <a:extLst>
+              <a:ext uri="{FF2B5EF4-FFF2-40B4-BE49-F238E27FC236}">
+                <a16:creationId xmlns:a16="http://schemas.microsoft.com/office/drawing/2014/main" id="{E724B9E8-02C8-4B2E-8770-A00A67760DF0}"/>
+              </a:ext>
+              <a:ext uri="{C183D7F6-B498-43B3-948B-1728B52AA6E4}">
+                <adec:decorative xmlns:adec="http://schemas.microsoft.com/office/drawing/2017/decorative" val="1"/>
+              </a:ext>
+            </a:extLst>
+          </p:cNvPr>
+          <p:cNvSpPr>
+            <a:spLocks noGrp="1" noRot="1" noChangeAspect="1" noMove="1" noResize="1" noEditPoints="1" noAdjustHandles="1" noChangeArrowheads="1" noChangeShapeType="1" noTextEdit="1"/>
+          </p:cNvSpPr>
+          <p:nvPr>
+            <p:extLst>
+              <p:ext uri="{386F3935-93C4-4BCD-93E2-E3B085C9AB24}">
+                <p16:designElem xmlns:p16="http://schemas.microsoft.com/office/powerpoint/2015/main" val="1"/>
+              </p:ext>
+            </p:extLst>
+          </p:nvPr>
+        </p:nvSpPr>
+        <p:spPr>
+          <a:xfrm>
+            <a:off x="0" y="2019476"/>
+            <a:ext cx="12192000" cy="4105941"/>
+          </a:xfrm>
+          <a:prstGeom prst="rect">
+            <a:avLst/>
+          </a:prstGeom>
+          <a:gradFill flip="none" rotWithShape="1">
+            <a:gsLst>
+              <a:gs pos="0">
+                <a:schemeClr val="bg2">
+                  <a:alpha val="0"/>
+                </a:schemeClr>
+              </a:gs>
+              <a:gs pos="100000">
+                <a:schemeClr val="bg2"/>
+              </a:gs>
+            </a:gsLst>
+            <a:lin ang="5400000" scaled="0"/>
+            <a:tileRect/>
+          </a:gradFill>
+          <a:ln>
+            <a:noFill/>
+          </a:ln>
+        </p:spPr>
+        <p:style>
+          <a:lnRef idx="2">
+            <a:schemeClr val="accent1">
+              <a:shade val="50000"/>
+            </a:schemeClr>
+          </a:lnRef>
+          <a:fillRef idx="1">
+            <a:schemeClr val="accent1"/>
+          </a:fillRef>
+          <a:effectRef idx="0">
+            <a:schemeClr val="accent1"/>
+          </a:effectRef>
+          <a:fontRef idx="minor">
+            <a:schemeClr val="lt1"/>
+          </a:fontRef>
+        </p:style>
+        <p:txBody>
+          <a:bodyPr/>
+          <a:lstStyle/>
+          <a:p>
+            <a:endParaRPr lang="en-US"/>
+          </a:p>
+        </p:txBody>
+      </p:sp>
+      <p:pic>
+        <p:nvPicPr>
+          <p:cNvPr id="39" name="Picture 38">
+            <a:extLst>
+              <a:ext uri="{FF2B5EF4-FFF2-40B4-BE49-F238E27FC236}">
+                <a16:creationId xmlns:a16="http://schemas.microsoft.com/office/drawing/2014/main" id="{7B8AE548-0BFA-4792-9962-3375923C7635}"/>
+              </a:ext>
+              <a:ext uri="{C183D7F6-B498-43B3-948B-1728B52AA6E4}">
+                <adec:decorative xmlns:adec="http://schemas.microsoft.com/office/drawing/2017/decorative" val="1"/>
+              </a:ext>
+            </a:extLst>
+          </p:cNvPr>
+          <p:cNvPicPr>
+            <a:picLocks noGrp="1" noRot="1" noChangeAspect="1" noMove="1" noResize="1" noEditPoints="1" noAdjustHandles="1" noChangeArrowheads="1" noChangeShapeType="1" noCrop="1"/>
+          </p:cNvPicPr>
+          <p:nvPr>
+            <p:extLst>
+              <p:ext uri="{386F3935-93C4-4BCD-93E2-E3B085C9AB24}">
+                <p16:designElem xmlns:p16="http://schemas.microsoft.com/office/powerpoint/2015/main" val="1"/>
+              </p:ext>
+            </p:extLst>
+          </p:nvPr>
+        </p:nvPicPr>
+        <p:blipFill rotWithShape="1">
+          <a:blip r:embed="rId2">
+            <a:extLst>
+              <a:ext uri="{28A0092B-C50C-407E-A947-70E740481C1C}">
+                <a14:useLocalDpi xmlns:a14="http://schemas.microsoft.com/office/drawing/2010/main" val="0"/>
+              </a:ext>
+            </a:extLst>
+          </a:blip>
+          <a:srcRect t="1538" b="-1538"/>
+          <a:stretch/>
+        </p:blipFill>
+        <p:spPr bwMode="black">
+          <a:xfrm>
+            <a:off x="0" y="6126480"/>
+            <a:ext cx="12192000" cy="742950"/>
+          </a:xfrm>
+          <a:prstGeom prst="rect">
+            <a:avLst/>
+          </a:prstGeom>
+        </p:spPr>
+      </p:pic>
+      <p:cxnSp>
+        <p:nvCxnSpPr>
+          <p:cNvPr id="40" name="Straight Connector 39">
+            <a:extLst>
+              <a:ext uri="{FF2B5EF4-FFF2-40B4-BE49-F238E27FC236}">
+                <a16:creationId xmlns:a16="http://schemas.microsoft.com/office/drawing/2014/main" id="{67639EF4-FA83-4D85-90FE-B831AF283896}"/>
+              </a:ext>
+              <a:ext uri="{C183D7F6-B498-43B3-948B-1728B52AA6E4}">
+                <adec:decorative xmlns:adec="http://schemas.microsoft.com/office/drawing/2017/decorative" val="1"/>
+              </a:ext>
+            </a:extLst>
+          </p:cNvPr>
+          <p:cNvCxnSpPr>
+            <a:cxnSpLocks noGrp="1" noRot="1" noChangeAspect="1" noMove="1" noResize="1" noEditPoints="1" noAdjustHandles="1" noChangeArrowheads="1" noChangeShapeType="1"/>
+          </p:cNvCxnSpPr>
+          <p:nvPr>
+            <p:extLst>
+              <p:ext uri="{386F3935-93C4-4BCD-93E2-E3B085C9AB24}">
+                <p16:designElem xmlns:p16="http://schemas.microsoft.com/office/powerpoint/2015/main" val="1"/>
+              </p:ext>
+            </p:extLst>
+          </p:nvPr>
+        </p:nvCxnSpPr>
+        <p:spPr>
+          <a:xfrm>
+            <a:off x="0" y="6128413"/>
+            <a:ext cx="12192000" cy="0"/>
+          </a:xfrm>
+          <a:prstGeom prst="line">
+            <a:avLst/>
+          </a:prstGeom>
+          <a:ln w="12700">
+            <a:solidFill>
+              <a:srgbClr val="000001">
+                <a:alpha val="20000"/>
+              </a:srgbClr>
+            </a:solidFill>
+          </a:ln>
+        </p:spPr>
+        <p:style>
+          <a:lnRef idx="1">
+            <a:schemeClr val="accent1"/>
+          </a:lnRef>
+          <a:fillRef idx="0">
+            <a:schemeClr val="accent1"/>
+          </a:fillRef>
+          <a:effectRef idx="0">
+            <a:schemeClr val="accent1"/>
+          </a:effectRef>
+          <a:fontRef idx="minor">
+            <a:schemeClr val="tx1"/>
+          </a:fontRef>
+        </p:style>
+      </p:cxnSp>
+      <p:cxnSp>
+        <p:nvCxnSpPr>
+          <p:cNvPr id="41" name="Straight Connector 40">
+            <a:extLst>
+              <a:ext uri="{FF2B5EF4-FFF2-40B4-BE49-F238E27FC236}">
+                <a16:creationId xmlns:a16="http://schemas.microsoft.com/office/drawing/2014/main" id="{CC87E76A-8F50-413D-9BFC-C5A1525BD9BC}"/>
+              </a:ext>
+              <a:ext uri="{C183D7F6-B498-43B3-948B-1728B52AA6E4}">
+                <adec:decorative xmlns:adec="http://schemas.microsoft.com/office/drawing/2017/decorative" val="1"/>
+              </a:ext>
+            </a:extLst>
+          </p:cNvPr>
+          <p:cNvCxnSpPr>
+            <a:cxnSpLocks noGrp="1" noRot="1" noChangeAspect="1" noMove="1" noResize="1" noEditPoints="1" noAdjustHandles="1" noChangeArrowheads="1" noChangeShapeType="1"/>
+          </p:cNvCxnSpPr>
+          <p:nvPr>
+            <p:extLst>
+              <p:ext uri="{386F3935-93C4-4BCD-93E2-E3B085C9AB24}">
+                <p16:designElem xmlns:p16="http://schemas.microsoft.com/office/powerpoint/2015/main" val="1"/>
+              </p:ext>
+            </p:extLst>
+          </p:nvPr>
+        </p:nvCxnSpPr>
+        <p:spPr>
+          <a:xfrm>
+            <a:off x="2417780" y="3528542"/>
+            <a:ext cx="8637072" cy="0"/>
+          </a:xfrm>
+          <a:prstGeom prst="line">
+            <a:avLst/>
+          </a:prstGeom>
+          <a:ln w="31750"/>
+        </p:spPr>
+        <p:style>
+          <a:lnRef idx="3">
+            <a:schemeClr val="accent1"/>
+          </a:lnRef>
+          <a:fillRef idx="0">
+            <a:schemeClr val="accent1"/>
+          </a:fillRef>
+          <a:effectRef idx="2">
+            <a:schemeClr val="accent1"/>
+          </a:effectRef>
+          <a:fontRef idx="minor">
+            <a:schemeClr val="tx1"/>
+          </a:fontRef>
+        </p:style>
+      </p:cxnSp>
+      <p:sp useBgFill="1">
+        <p:nvSpPr>
+          <p:cNvPr id="42" name="Rectangle 41">
+            <a:extLst>
+              <a:ext uri="{FF2B5EF4-FFF2-40B4-BE49-F238E27FC236}">
+                <a16:creationId xmlns:a16="http://schemas.microsoft.com/office/drawing/2014/main" id="{9A1C6278-B7D5-4E8E-B4DC-834832980565}"/>
+              </a:ext>
+              <a:ext uri="{C183D7F6-B498-43B3-948B-1728B52AA6E4}">
+                <adec:decorative xmlns:adec="http://schemas.microsoft.com/office/drawing/2017/decorative" val="1"/>
+              </a:ext>
+            </a:extLst>
+          </p:cNvPr>
+          <p:cNvSpPr>
+            <a:spLocks noGrp="1" noRot="1" noChangeAspect="1" noMove="1" noResize="1" noEditPoints="1" noAdjustHandles="1" noChangeArrowheads="1" noChangeShapeType="1" noTextEdit="1"/>
+          </p:cNvSpPr>
+          <p:nvPr>
+            <p:extLst>
+              <p:ext uri="{386F3935-93C4-4BCD-93E2-E3B085C9AB24}">
+                <p16:designElem xmlns:p16="http://schemas.microsoft.com/office/powerpoint/2015/main" val="1"/>
+              </p:ext>
+            </p:extLst>
+          </p:nvPr>
+        </p:nvSpPr>
+        <p:spPr>
+          <a:xfrm>
+            <a:off x="2" y="0"/>
+            <a:ext cx="12191695" cy="6858000"/>
+          </a:xfrm>
+          <a:prstGeom prst="rect">
+            <a:avLst/>
+          </a:prstGeom>
+          <a:ln>
+            <a:noFill/>
+          </a:ln>
+        </p:spPr>
+        <p:style>
+          <a:lnRef idx="2">
+            <a:schemeClr val="accent1">
+              <a:shade val="50000"/>
+            </a:schemeClr>
+          </a:lnRef>
+          <a:fillRef idx="1">
+            <a:schemeClr val="accent1"/>
+          </a:fillRef>
+          <a:effectRef idx="0">
+            <a:schemeClr val="accent1"/>
+          </a:effectRef>
+          <a:fontRef idx="minor">
+            <a:schemeClr val="lt1"/>
+          </a:fontRef>
+        </p:style>
+        <p:txBody>
+          <a:bodyPr rtlCol="0" anchor="ctr"/>
+          <a:lstStyle/>
+          <a:p>
+            <a:pPr algn="ctr"/>
+            <a:endParaRPr lang="en-US"/>
+          </a:p>
+        </p:txBody>
+      </p:sp>
+      <p:sp>
+        <p:nvSpPr>
+          <p:cNvPr id="43" name="Rectangle 42">
+            <a:extLst>
+              <a:ext uri="{FF2B5EF4-FFF2-40B4-BE49-F238E27FC236}">
+                <a16:creationId xmlns:a16="http://schemas.microsoft.com/office/drawing/2014/main" id="{C007F3D3-099E-430E-8754-C084D0FA5FE3}"/>
+              </a:ext>
+              <a:ext uri="{C183D7F6-B498-43B3-948B-1728B52AA6E4}">
+                <adec:decorative xmlns:adec="http://schemas.microsoft.com/office/drawing/2017/decorative" val="1"/>
+              </a:ext>
+            </a:extLst>
+          </p:cNvPr>
+          <p:cNvSpPr>
+            <a:spLocks noGrp="1" noRot="1" noChangeAspect="1" noMove="1" noResize="1" noEditPoints="1" noAdjustHandles="1" noChangeArrowheads="1" noChangeShapeType="1" noTextEdit="1"/>
+          </p:cNvSpPr>
+          <p:nvPr>
+            <p:extLst>
+              <p:ext uri="{386F3935-93C4-4BCD-93E2-E3B085C9AB24}">
+                <p16:designElem xmlns:p16="http://schemas.microsoft.com/office/powerpoint/2015/main" val="1"/>
+              </p:ext>
+            </p:extLst>
+          </p:nvPr>
+        </p:nvSpPr>
+        <p:spPr>
+          <a:xfrm>
+            <a:off x="0" y="2019476"/>
+            <a:ext cx="12192000" cy="4105941"/>
+          </a:xfrm>
+          <a:prstGeom prst="rect">
+            <a:avLst/>
+          </a:prstGeom>
+          <a:gradFill flip="none" rotWithShape="1">
+            <a:gsLst>
+              <a:gs pos="0">
+                <a:schemeClr val="bg2">
+                  <a:alpha val="0"/>
+                </a:schemeClr>
+              </a:gs>
+              <a:gs pos="100000">
+                <a:schemeClr val="bg2"/>
+              </a:gs>
+            </a:gsLst>
+            <a:lin ang="5400000" scaled="0"/>
+            <a:tileRect/>
+          </a:gradFill>
+          <a:ln>
+            <a:noFill/>
+          </a:ln>
+        </p:spPr>
+        <p:style>
+          <a:lnRef idx="2">
+            <a:schemeClr val="accent1">
+              <a:shade val="50000"/>
+            </a:schemeClr>
+          </a:lnRef>
+          <a:fillRef idx="1">
+            <a:schemeClr val="accent1"/>
+          </a:fillRef>
+          <a:effectRef idx="0">
+            <a:schemeClr val="accent1"/>
+          </a:effectRef>
+          <a:fontRef idx="minor">
+            <a:schemeClr val="lt1"/>
+          </a:fontRef>
+        </p:style>
+        <p:txBody>
+          <a:bodyPr rtlCol="0" anchor="ctr"/>
+          <a:lstStyle/>
+          <a:p>
+            <a:pPr lvl="0" algn="ctr"/>
+            <a:endParaRPr lang="en-US"/>
+          </a:p>
+        </p:txBody>
+      </p:sp>
+      <p:sp>
+        <p:nvSpPr>
+          <p:cNvPr id="2" name="Title 1">
+            <a:extLst>
+              <a:ext uri="{FF2B5EF4-FFF2-40B4-BE49-F238E27FC236}">
+                <a16:creationId xmlns:a16="http://schemas.microsoft.com/office/drawing/2014/main" id="{39DDDFD2-F9A9-3A01-FF2A-6CDF8AAF1529}"/>
+              </a:ext>
+            </a:extLst>
+          </p:cNvPr>
+          <p:cNvSpPr>
+            <a:spLocks noGrp="1"/>
+          </p:cNvSpPr>
+          <p:nvPr>
+            <p:ph type="title"/>
+          </p:nvPr>
+        </p:nvSpPr>
+        <p:spPr>
+          <a:xfrm>
+            <a:off x="1776729" y="4459039"/>
+            <a:ext cx="8643011" cy="551528"/>
+          </a:xfrm>
+        </p:spPr>
+        <p:txBody>
+          <a:bodyPr vert="horz" lIns="91440" tIns="45720" rIns="91440" bIns="0" rtlCol="0" anchor="b">
+            <a:normAutofit/>
+          </a:bodyPr>
+          <a:lstStyle/>
+          <a:p>
+            <a:r>
+              <a:rPr lang="en-US" sz="3600"/>
+              <a:t>Vlajk Sándor – Dokumentáció</a:t>
+            </a:r>
+          </a:p>
+        </p:txBody>
+      </p:sp>
+      <p:pic>
+        <p:nvPicPr>
+          <p:cNvPr id="11" name="Picture 10">
+            <a:extLst>
+              <a:ext uri="{FF2B5EF4-FFF2-40B4-BE49-F238E27FC236}">
+                <a16:creationId xmlns:a16="http://schemas.microsoft.com/office/drawing/2014/main" id="{3C11F97F-2AE4-3D9B-35A6-AF80BEF77AF7}"/>
+              </a:ext>
+            </a:extLst>
+          </p:cNvPr>
+          <p:cNvPicPr>
+            <a:picLocks noChangeAspect="1"/>
+          </p:cNvPicPr>
+          <p:nvPr/>
+        </p:nvPicPr>
+        <p:blipFill>
+          <a:blip r:embed="rId3"/>
+          <a:stretch>
+            <a:fillRect/>
+          </a:stretch>
+        </p:blipFill>
+        <p:spPr>
+          <a:xfrm>
+            <a:off x="215647" y="470463"/>
+            <a:ext cx="3553338" cy="3856996"/>
+          </a:xfrm>
+          <a:prstGeom prst="rect">
+            <a:avLst/>
+          </a:prstGeom>
+        </p:spPr>
+      </p:pic>
+      <p:pic>
+        <p:nvPicPr>
+          <p:cNvPr id="9" name="Picture 8">
+            <a:extLst>
+              <a:ext uri="{FF2B5EF4-FFF2-40B4-BE49-F238E27FC236}">
+                <a16:creationId xmlns:a16="http://schemas.microsoft.com/office/drawing/2014/main" id="{EB92CDCE-F939-2C1B-FB2C-35BCFBC61213}"/>
+              </a:ext>
+            </a:extLst>
+          </p:cNvPr>
+          <p:cNvPicPr>
+            <a:picLocks noChangeAspect="1"/>
+          </p:cNvPicPr>
+          <p:nvPr/>
+        </p:nvPicPr>
+        <p:blipFill>
+          <a:blip r:embed="rId4"/>
+          <a:stretch>
+            <a:fillRect/>
+          </a:stretch>
+        </p:blipFill>
+        <p:spPr>
+          <a:xfrm>
+            <a:off x="4025898" y="890198"/>
+            <a:ext cx="3376192" cy="3215823"/>
+          </a:xfrm>
+          <a:prstGeom prst="rect">
+            <a:avLst/>
+          </a:prstGeom>
+        </p:spPr>
+      </p:pic>
+      <p:pic>
+        <p:nvPicPr>
+          <p:cNvPr id="5" name="Picture 4">
+            <a:extLst>
+              <a:ext uri="{FF2B5EF4-FFF2-40B4-BE49-F238E27FC236}">
+                <a16:creationId xmlns:a16="http://schemas.microsoft.com/office/drawing/2014/main" id="{C20FFCFC-0AFB-A5C7-E6B7-F9D1DC4B2FC6}"/>
+              </a:ext>
+            </a:extLst>
+          </p:cNvPr>
+          <p:cNvPicPr>
+            <a:picLocks noChangeAspect="1"/>
+          </p:cNvPicPr>
+          <p:nvPr/>
+        </p:nvPicPr>
+        <p:blipFill>
+          <a:blip r:embed="rId5"/>
+          <a:stretch>
+            <a:fillRect/>
+          </a:stretch>
+        </p:blipFill>
+        <p:spPr>
+          <a:xfrm>
+            <a:off x="7659003" y="1278460"/>
+            <a:ext cx="4317350" cy="2439301"/>
+          </a:xfrm>
+          <a:prstGeom prst="rect">
+            <a:avLst/>
+          </a:prstGeom>
+        </p:spPr>
+      </p:pic>
+      <p:cxnSp>
+        <p:nvCxnSpPr>
+          <p:cNvPr id="44" name="Straight Connector 43">
+            <a:extLst>
+              <a:ext uri="{FF2B5EF4-FFF2-40B4-BE49-F238E27FC236}">
+                <a16:creationId xmlns:a16="http://schemas.microsoft.com/office/drawing/2014/main" id="{6B9EA5DA-6DFD-447D-B8F9-CB95CA114076}"/>
+              </a:ext>
+              <a:ext uri="{C183D7F6-B498-43B3-948B-1728B52AA6E4}">
+                <adec:decorative xmlns:adec="http://schemas.microsoft.com/office/drawing/2017/decorative" val="1"/>
+              </a:ext>
+            </a:extLst>
+          </p:cNvPr>
+          <p:cNvCxnSpPr>
+            <a:cxnSpLocks noGrp="1" noRot="1" noChangeAspect="1" noMove="1" noResize="1" noEditPoints="1" noAdjustHandles="1" noChangeArrowheads="1" noChangeShapeType="1"/>
+          </p:cNvCxnSpPr>
+          <p:nvPr>
+            <p:extLst>
+              <p:ext uri="{386F3935-93C4-4BCD-93E2-E3B085C9AB24}">
+                <p16:designElem xmlns:p16="http://schemas.microsoft.com/office/powerpoint/2015/main" val="1"/>
+              </p:ext>
+            </p:extLst>
+          </p:nvPr>
+        </p:nvCxnSpPr>
+        <p:spPr>
+          <a:xfrm>
+            <a:off x="1776728" y="5027185"/>
+            <a:ext cx="8643011" cy="0"/>
+          </a:xfrm>
+          <a:prstGeom prst="line">
+            <a:avLst/>
+          </a:prstGeom>
+          <a:ln w="31750"/>
+        </p:spPr>
+        <p:style>
+          <a:lnRef idx="3">
+            <a:schemeClr val="accent1"/>
+          </a:lnRef>
+          <a:fillRef idx="0">
+            <a:schemeClr val="accent1"/>
+          </a:fillRef>
+          <a:effectRef idx="2">
+            <a:schemeClr val="accent1"/>
+          </a:effectRef>
+          <a:fontRef idx="minor">
+            <a:schemeClr val="tx1"/>
+          </a:fontRef>
+        </p:style>
+      </p:cxnSp>
+      <p:pic>
+        <p:nvPicPr>
+          <p:cNvPr id="45" name="Picture 44">
+            <a:extLst>
+              <a:ext uri="{FF2B5EF4-FFF2-40B4-BE49-F238E27FC236}">
+                <a16:creationId xmlns:a16="http://schemas.microsoft.com/office/drawing/2014/main" id="{87612EF9-94E7-42BA-B4A9-4B38643FBAF7}"/>
+              </a:ext>
+              <a:ext uri="{C183D7F6-B498-43B3-948B-1728B52AA6E4}">
+                <adec:decorative xmlns:adec="http://schemas.microsoft.com/office/drawing/2017/decorative" val="1"/>
+              </a:ext>
+            </a:extLst>
+          </p:cNvPr>
+          <p:cNvPicPr>
+            <a:picLocks noGrp="1" noRot="1" noChangeAspect="1" noMove="1" noResize="1" noEditPoints="1" noAdjustHandles="1" noChangeArrowheads="1" noChangeShapeType="1" noCrop="1"/>
+          </p:cNvPicPr>
+          <p:nvPr>
+            <p:extLst>
+              <p:ext uri="{386F3935-93C4-4BCD-93E2-E3B085C9AB24}">
+                <p16:designElem xmlns:p16="http://schemas.microsoft.com/office/powerpoint/2015/main" val="1"/>
+              </p:ext>
+            </p:extLst>
+          </p:nvPr>
+        </p:nvPicPr>
+        <p:blipFill rotWithShape="1">
+          <a:blip r:embed="rId2">
+            <a:extLst>
+              <a:ext uri="{28A0092B-C50C-407E-A947-70E740481C1C}">
+                <a14:useLocalDpi xmlns:a14="http://schemas.microsoft.com/office/drawing/2010/main" val="0"/>
+              </a:ext>
+            </a:extLst>
+          </a:blip>
+          <a:srcRect t="1538" b="-1538"/>
+          <a:stretch/>
+        </p:blipFill>
+        <p:spPr bwMode="black">
+          <a:xfrm>
+            <a:off x="0" y="6126480"/>
+            <a:ext cx="12192000" cy="742950"/>
+          </a:xfrm>
+          <a:prstGeom prst="rect">
+            <a:avLst/>
+          </a:prstGeom>
+        </p:spPr>
+      </p:pic>
+      <p:cxnSp>
+        <p:nvCxnSpPr>
+          <p:cNvPr id="46" name="Straight Connector 45">
+            <a:extLst>
+              <a:ext uri="{FF2B5EF4-FFF2-40B4-BE49-F238E27FC236}">
+                <a16:creationId xmlns:a16="http://schemas.microsoft.com/office/drawing/2014/main" id="{9E597F0B-0A17-4BF2-A904-9D99811F3E2E}"/>
+              </a:ext>
+              <a:ext uri="{C183D7F6-B498-43B3-948B-1728B52AA6E4}">
+                <adec:decorative xmlns:adec="http://schemas.microsoft.com/office/drawing/2017/decorative" val="1"/>
+              </a:ext>
+            </a:extLst>
+          </p:cNvPr>
+          <p:cNvCxnSpPr>
+            <a:cxnSpLocks noGrp="1" noRot="1" noChangeAspect="1" noMove="1" noResize="1" noEditPoints="1" noAdjustHandles="1" noChangeArrowheads="1" noChangeShapeType="1"/>
+          </p:cNvCxnSpPr>
+          <p:nvPr>
+            <p:extLst>
+              <p:ext uri="{386F3935-93C4-4BCD-93E2-E3B085C9AB24}">
+                <p16:designElem xmlns:p16="http://schemas.microsoft.com/office/powerpoint/2015/main" val="1"/>
+              </p:ext>
+            </p:extLst>
+          </p:nvPr>
+        </p:nvCxnSpPr>
+        <p:spPr>
+          <a:xfrm>
+            <a:off x="0" y="6128413"/>
+            <a:ext cx="12192000" cy="0"/>
+          </a:xfrm>
+          <a:prstGeom prst="line">
+            <a:avLst/>
+          </a:prstGeom>
+          <a:ln w="12700">
+            <a:solidFill>
+              <a:srgbClr val="000001">
+                <a:alpha val="20000"/>
+              </a:srgbClr>
+            </a:solidFill>
+          </a:ln>
+        </p:spPr>
+        <p:style>
+          <a:lnRef idx="1">
+            <a:schemeClr val="accent1"/>
+          </a:lnRef>
+          <a:fillRef idx="0">
+            <a:schemeClr val="accent1"/>
+          </a:fillRef>
+          <a:effectRef idx="0">
+            <a:schemeClr val="accent1"/>
+          </a:effectRef>
+          <a:fontRef idx="minor">
+            <a:schemeClr val="tx1"/>
+          </a:fontRef>
+        </p:style>
+      </p:cxnSp>
+    </p:spTree>
+    <p:extLst>
+      <p:ext uri="{BB962C8B-B14F-4D97-AF65-F5344CB8AC3E}">
+        <p14:creationId xmlns:p14="http://schemas.microsoft.com/office/powerpoint/2010/main" val="3510849585"/>
+      </p:ext>
+    </p:extLst>
+  </p:cSld>
+  <p:clrMapOvr>
+    <a:masterClrMapping/>
+  </p:clrMapOvr>
+</p:sld>
+</file>
+
+<file path=ppt/slides/slide14.xml><?xml version="1.0" encoding="utf-8"?>
+<p:sld xmlns:a="http://schemas.openxmlformats.org/drawingml/2006/main" xmlns:r="http://schemas.openxmlformats.org/officeDocument/2006/relationships" xmlns:p="http://schemas.openxmlformats.org/presentationml/2006/main">
+  <p:cSld>
+    <p:spTree>
+      <p:nvGrpSpPr>
+        <p:cNvPr id="1" name=""/>
+        <p:cNvGrpSpPr/>
+        <p:nvPr/>
+      </p:nvGrpSpPr>
+      <p:grpSpPr>
+        <a:xfrm>
+          <a:off x="0" y="0"/>
+          <a:ext cx="0" cy="0"/>
+          <a:chOff x="0" y="0"/>
+          <a:chExt cx="0" cy="0"/>
+        </a:xfrm>
+      </p:grpSpPr>
+      <p:sp>
+        <p:nvSpPr>
+          <p:cNvPr id="2" name="Title 1">
+            <a:extLst>
+              <a:ext uri="{FF2B5EF4-FFF2-40B4-BE49-F238E27FC236}">
+                <a16:creationId xmlns:a16="http://schemas.microsoft.com/office/drawing/2014/main" id="{6302D0E6-DFB3-5E17-192B-D3B11F717D8C}"/>
+              </a:ext>
+            </a:extLst>
+          </p:cNvPr>
+          <p:cNvSpPr>
+            <a:spLocks noGrp="1"/>
+          </p:cNvSpPr>
+          <p:nvPr>
+            <p:ph type="title"/>
+          </p:nvPr>
+        </p:nvSpPr>
+        <p:spPr/>
+        <p:txBody>
+          <a:bodyPr/>
+          <a:lstStyle/>
+          <a:p>
+            <a:r>
+              <a:rPr lang="en-US" dirty="0"/>
+              <a:t>Vlajk Sándor – </a:t>
+            </a:r>
+            <a:r>
+              <a:rPr lang="en-US" dirty="0" err="1"/>
+              <a:t>Fejlesztés</a:t>
+            </a:r>
+            <a:endParaRPr lang="en-US" dirty="0"/>
+          </a:p>
+        </p:txBody>
+      </p:sp>
+      <p:pic>
+        <p:nvPicPr>
+          <p:cNvPr id="5" name="Picture 4">
+            <a:extLst>
+              <a:ext uri="{FF2B5EF4-FFF2-40B4-BE49-F238E27FC236}">
+                <a16:creationId xmlns:a16="http://schemas.microsoft.com/office/drawing/2014/main" id="{E7DCF374-80C3-CBE5-BC73-F12C234A38EC}"/>
+              </a:ext>
+            </a:extLst>
+          </p:cNvPr>
+          <p:cNvPicPr>
+            <a:picLocks noChangeAspect="1"/>
+          </p:cNvPicPr>
+          <p:nvPr/>
+        </p:nvPicPr>
+        <p:blipFill>
+          <a:blip r:embed="rId2"/>
+          <a:stretch>
+            <a:fillRect/>
+          </a:stretch>
+        </p:blipFill>
+        <p:spPr>
+          <a:xfrm>
+            <a:off x="809387" y="2190530"/>
+            <a:ext cx="8630854" cy="3143689"/>
+          </a:xfrm>
+          <a:prstGeom prst="rect">
+            <a:avLst/>
+          </a:prstGeom>
+        </p:spPr>
+      </p:pic>
+      <p:pic>
+        <p:nvPicPr>
+          <p:cNvPr id="7" name="Picture 6">
+            <a:extLst>
+              <a:ext uri="{FF2B5EF4-FFF2-40B4-BE49-F238E27FC236}">
+                <a16:creationId xmlns:a16="http://schemas.microsoft.com/office/drawing/2014/main" id="{13C83DBE-18EF-02F8-4CDE-12A988AA16AE}"/>
+              </a:ext>
+            </a:extLst>
+          </p:cNvPr>
+          <p:cNvPicPr>
+            <a:picLocks noChangeAspect="1"/>
+          </p:cNvPicPr>
+          <p:nvPr/>
+        </p:nvPicPr>
+        <p:blipFill>
+          <a:blip r:embed="rId3"/>
+          <a:stretch>
+            <a:fillRect/>
+          </a:stretch>
+        </p:blipFill>
+        <p:spPr>
+          <a:xfrm>
+            <a:off x="809387" y="5504284"/>
+            <a:ext cx="3410426" cy="333422"/>
+          </a:xfrm>
+          <a:prstGeom prst="rect">
+            <a:avLst/>
+          </a:prstGeom>
+        </p:spPr>
+      </p:pic>
+    </p:spTree>
+    <p:extLst>
+      <p:ext uri="{BB962C8B-B14F-4D97-AF65-F5344CB8AC3E}">
+        <p14:creationId xmlns:p14="http://schemas.microsoft.com/office/powerpoint/2010/main" val="2040790998"/>
+      </p:ext>
+    </p:extLst>
+  </p:cSld>
+  <p:clrMapOvr>
+    <a:masterClrMapping/>
+  </p:clrMapOvr>
+</p:sld>
+</file>
+
+<file path=ppt/slides/slide15.xml><?xml version="1.0" encoding="utf-8"?>
+<p:sld xmlns:a="http://schemas.openxmlformats.org/drawingml/2006/main" xmlns:r="http://schemas.openxmlformats.org/officeDocument/2006/relationships" xmlns:p="http://schemas.openxmlformats.org/presentationml/2006/main">
+  <p:cSld>
+    <p:bg>
+      <p:bgPr>
+        <a:gradFill rotWithShape="1">
+          <a:gsLst>
+            <a:gs pos="0">
+              <a:schemeClr val="bg2">
+                <a:tint val="94000"/>
+                <a:satMod val="80000"/>
+                <a:lumMod val="106000"/>
+              </a:schemeClr>
+            </a:gs>
+            <a:gs pos="100000">
+              <a:schemeClr val="bg2">
+                <a:shade val="80000"/>
+              </a:schemeClr>
+            </a:gs>
+          </a:gsLst>
+          <a:path path="circle">
+            <a:fillToRect l="43000" r="43000" b="100000"/>
+          </a:path>
+        </a:gradFill>
+        <a:effectLst/>
+      </p:bgPr>
+    </p:bg>
+    <p:spTree>
+      <p:nvGrpSpPr>
+        <p:cNvPr id="1" name=""/>
+        <p:cNvGrpSpPr/>
+        <p:nvPr/>
+      </p:nvGrpSpPr>
+      <p:grpSpPr>
+        <a:xfrm>
+          <a:off x="0" y="0"/>
+          <a:ext cx="0" cy="0"/>
+          <a:chOff x="0" y="0"/>
+          <a:chExt cx="0" cy="0"/>
+        </a:xfrm>
+      </p:grpSpPr>
+      <p:sp>
+        <p:nvSpPr>
+          <p:cNvPr id="14" name="Rectangle 13">
+            <a:extLst>
+              <a:ext uri="{FF2B5EF4-FFF2-40B4-BE49-F238E27FC236}">
+                <a16:creationId xmlns:a16="http://schemas.microsoft.com/office/drawing/2014/main" id="{E724B9E8-02C8-4B2E-8770-A00A67760DF0}"/>
+              </a:ext>
+              <a:ext uri="{C183D7F6-B498-43B3-948B-1728B52AA6E4}">
+                <adec:decorative xmlns:adec="http://schemas.microsoft.com/office/drawing/2017/decorative" val="1"/>
+              </a:ext>
+            </a:extLst>
+          </p:cNvPr>
+          <p:cNvSpPr>
+            <a:spLocks noGrp="1" noRot="1" noChangeAspect="1" noMove="1" noResize="1" noEditPoints="1" noAdjustHandles="1" noChangeArrowheads="1" noChangeShapeType="1" noTextEdit="1"/>
+          </p:cNvSpPr>
+          <p:nvPr>
+            <p:extLst>
+              <p:ext uri="{386F3935-93C4-4BCD-93E2-E3B085C9AB24}">
+                <p16:designElem xmlns:p16="http://schemas.microsoft.com/office/powerpoint/2015/main" val="1"/>
+              </p:ext>
+            </p:extLst>
+          </p:nvPr>
+        </p:nvSpPr>
+        <p:spPr>
+          <a:xfrm>
+            <a:off x="0" y="2019476"/>
+            <a:ext cx="12192000" cy="4105941"/>
+          </a:xfrm>
+          <a:prstGeom prst="rect">
+            <a:avLst/>
+          </a:prstGeom>
+          <a:gradFill flip="none" rotWithShape="1">
+            <a:gsLst>
+              <a:gs pos="0">
+                <a:schemeClr val="bg2">
+                  <a:alpha val="0"/>
+                </a:schemeClr>
+              </a:gs>
+              <a:gs pos="100000">
+                <a:schemeClr val="bg2"/>
+              </a:gs>
+            </a:gsLst>
+            <a:lin ang="5400000" scaled="0"/>
+            <a:tileRect/>
+          </a:gradFill>
+          <a:ln>
+            <a:noFill/>
+          </a:ln>
+        </p:spPr>
+        <p:style>
+          <a:lnRef idx="2">
+            <a:schemeClr val="accent1">
+              <a:shade val="50000"/>
+            </a:schemeClr>
+          </a:lnRef>
+          <a:fillRef idx="1">
+            <a:schemeClr val="accent1"/>
+          </a:fillRef>
+          <a:effectRef idx="0">
+            <a:schemeClr val="accent1"/>
+          </a:effectRef>
+          <a:fontRef idx="minor">
+            <a:schemeClr val="lt1"/>
+          </a:fontRef>
+        </p:style>
+        <p:txBody>
+          <a:bodyPr/>
+          <a:lstStyle/>
+          <a:p>
+            <a:endParaRPr lang="en-US"/>
+          </a:p>
+        </p:txBody>
+      </p:sp>
+      <p:pic>
+        <p:nvPicPr>
+          <p:cNvPr id="16" name="Picture 15">
+            <a:extLst>
+              <a:ext uri="{FF2B5EF4-FFF2-40B4-BE49-F238E27FC236}">
+                <a16:creationId xmlns:a16="http://schemas.microsoft.com/office/drawing/2014/main" id="{7B8AE548-0BFA-4792-9962-3375923C7635}"/>
+              </a:ext>
+              <a:ext uri="{C183D7F6-B498-43B3-948B-1728B52AA6E4}">
+                <adec:decorative xmlns:adec="http://schemas.microsoft.com/office/drawing/2017/decorative" val="1"/>
+              </a:ext>
+            </a:extLst>
+          </p:cNvPr>
+          <p:cNvPicPr>
+            <a:picLocks noGrp="1" noRot="1" noChangeAspect="1" noMove="1" noResize="1" noEditPoints="1" noAdjustHandles="1" noChangeArrowheads="1" noChangeShapeType="1" noCrop="1"/>
+          </p:cNvPicPr>
+          <p:nvPr>
+            <p:extLst>
+              <p:ext uri="{386F3935-93C4-4BCD-93E2-E3B085C9AB24}">
+                <p16:designElem xmlns:p16="http://schemas.microsoft.com/office/powerpoint/2015/main" val="1"/>
+              </p:ext>
+            </p:extLst>
+          </p:nvPr>
+        </p:nvPicPr>
+        <p:blipFill rotWithShape="1">
+          <a:blip r:embed="rId2">
+            <a:extLst>
+              <a:ext uri="{28A0092B-C50C-407E-A947-70E740481C1C}">
+                <a14:useLocalDpi xmlns:a14="http://schemas.microsoft.com/office/drawing/2010/main" val="0"/>
+              </a:ext>
+            </a:extLst>
+          </a:blip>
+          <a:srcRect t="1538" b="-1538"/>
+          <a:stretch/>
+        </p:blipFill>
+        <p:spPr bwMode="black">
+          <a:xfrm>
+            <a:off x="0" y="6126480"/>
+            <a:ext cx="12192000" cy="742950"/>
+          </a:xfrm>
+          <a:prstGeom prst="rect">
+            <a:avLst/>
+          </a:prstGeom>
+        </p:spPr>
+      </p:pic>
+      <p:cxnSp>
+        <p:nvCxnSpPr>
+          <p:cNvPr id="18" name="Straight Connector 17">
+            <a:extLst>
+              <a:ext uri="{FF2B5EF4-FFF2-40B4-BE49-F238E27FC236}">
+                <a16:creationId xmlns:a16="http://schemas.microsoft.com/office/drawing/2014/main" id="{67639EF4-FA83-4D85-90FE-B831AF283896}"/>
+              </a:ext>
+              <a:ext uri="{C183D7F6-B498-43B3-948B-1728B52AA6E4}">
+                <adec:decorative xmlns:adec="http://schemas.microsoft.com/office/drawing/2017/decorative" val="1"/>
+              </a:ext>
+            </a:extLst>
+          </p:cNvPr>
+          <p:cNvCxnSpPr>
+            <a:cxnSpLocks noGrp="1" noRot="1" noChangeAspect="1" noMove="1" noResize="1" noEditPoints="1" noAdjustHandles="1" noChangeArrowheads="1" noChangeShapeType="1"/>
+          </p:cNvCxnSpPr>
+          <p:nvPr>
+            <p:extLst>
+              <p:ext uri="{386F3935-93C4-4BCD-93E2-E3B085C9AB24}">
+                <p16:designElem xmlns:p16="http://schemas.microsoft.com/office/powerpoint/2015/main" val="1"/>
+              </p:ext>
+            </p:extLst>
+          </p:nvPr>
+        </p:nvCxnSpPr>
+        <p:spPr>
+          <a:xfrm>
+            <a:off x="0" y="6128413"/>
+            <a:ext cx="12192000" cy="0"/>
+          </a:xfrm>
+          <a:prstGeom prst="line">
+            <a:avLst/>
+          </a:prstGeom>
+          <a:ln w="12700">
+            <a:solidFill>
+              <a:srgbClr val="000001">
+                <a:alpha val="20000"/>
+              </a:srgbClr>
+            </a:solidFill>
+          </a:ln>
+        </p:spPr>
+        <p:style>
+          <a:lnRef idx="1">
+            <a:schemeClr val="accent1"/>
+          </a:lnRef>
+          <a:fillRef idx="0">
+            <a:schemeClr val="accent1"/>
+          </a:fillRef>
+          <a:effectRef idx="0">
+            <a:schemeClr val="accent1"/>
+          </a:effectRef>
+          <a:fontRef idx="minor">
+            <a:schemeClr val="tx1"/>
+          </a:fontRef>
+        </p:style>
+      </p:cxnSp>
+      <p:cxnSp>
+        <p:nvCxnSpPr>
+          <p:cNvPr id="20" name="Straight Connector 19">
+            <a:extLst>
+              <a:ext uri="{FF2B5EF4-FFF2-40B4-BE49-F238E27FC236}">
+                <a16:creationId xmlns:a16="http://schemas.microsoft.com/office/drawing/2014/main" id="{CC87E76A-8F50-413D-9BFC-C5A1525BD9BC}"/>
+              </a:ext>
+              <a:ext uri="{C183D7F6-B498-43B3-948B-1728B52AA6E4}">
+                <adec:decorative xmlns:adec="http://schemas.microsoft.com/office/drawing/2017/decorative" val="1"/>
+              </a:ext>
+            </a:extLst>
+          </p:cNvPr>
+          <p:cNvCxnSpPr>
+            <a:cxnSpLocks noGrp="1" noRot="1" noChangeAspect="1" noMove="1" noResize="1" noEditPoints="1" noAdjustHandles="1" noChangeArrowheads="1" noChangeShapeType="1"/>
+          </p:cNvCxnSpPr>
+          <p:nvPr>
+            <p:extLst>
+              <p:ext uri="{386F3935-93C4-4BCD-93E2-E3B085C9AB24}">
+                <p16:designElem xmlns:p16="http://schemas.microsoft.com/office/powerpoint/2015/main" val="1"/>
+              </p:ext>
+            </p:extLst>
+          </p:nvPr>
+        </p:nvCxnSpPr>
+        <p:spPr>
+          <a:xfrm>
+            <a:off x="2417780" y="3528542"/>
+            <a:ext cx="8637072" cy="0"/>
+          </a:xfrm>
+          <a:prstGeom prst="line">
+            <a:avLst/>
+          </a:prstGeom>
+          <a:ln w="31750"/>
+        </p:spPr>
+        <p:style>
+          <a:lnRef idx="3">
+            <a:schemeClr val="accent1"/>
+          </a:lnRef>
+          <a:fillRef idx="0">
+            <a:schemeClr val="accent1"/>
+          </a:fillRef>
+          <a:effectRef idx="2">
+            <a:schemeClr val="accent1"/>
+          </a:effectRef>
+          <a:fontRef idx="minor">
+            <a:schemeClr val="tx1"/>
+          </a:fontRef>
+        </p:style>
+      </p:cxnSp>
+      <p:sp useBgFill="1">
+        <p:nvSpPr>
+          <p:cNvPr id="22" name="Rectangle 21">
+            <a:extLst>
+              <a:ext uri="{FF2B5EF4-FFF2-40B4-BE49-F238E27FC236}">
+                <a16:creationId xmlns:a16="http://schemas.microsoft.com/office/drawing/2014/main" id="{9A1C6278-B7D5-4E8E-B4DC-834832980565}"/>
+              </a:ext>
+              <a:ext uri="{C183D7F6-B498-43B3-948B-1728B52AA6E4}">
+                <adec:decorative xmlns:adec="http://schemas.microsoft.com/office/drawing/2017/decorative" val="1"/>
+              </a:ext>
+            </a:extLst>
+          </p:cNvPr>
+          <p:cNvSpPr>
+            <a:spLocks noGrp="1" noRot="1" noChangeAspect="1" noMove="1" noResize="1" noEditPoints="1" noAdjustHandles="1" noChangeArrowheads="1" noChangeShapeType="1" noTextEdit="1"/>
+          </p:cNvSpPr>
+          <p:nvPr>
+            <p:extLst>
+              <p:ext uri="{386F3935-93C4-4BCD-93E2-E3B085C9AB24}">
+                <p16:designElem xmlns:p16="http://schemas.microsoft.com/office/powerpoint/2015/main" val="1"/>
+              </p:ext>
+            </p:extLst>
+          </p:nvPr>
+        </p:nvSpPr>
+        <p:spPr>
+          <a:xfrm>
+            <a:off x="2" y="0"/>
+            <a:ext cx="12191695" cy="6858000"/>
+          </a:xfrm>
+          <a:prstGeom prst="rect">
+            <a:avLst/>
+          </a:prstGeom>
+          <a:ln>
+            <a:noFill/>
+          </a:ln>
+        </p:spPr>
+        <p:style>
+          <a:lnRef idx="2">
+            <a:schemeClr val="accent1">
+              <a:shade val="50000"/>
+            </a:schemeClr>
+          </a:lnRef>
+          <a:fillRef idx="1">
+            <a:schemeClr val="accent1"/>
+          </a:fillRef>
+          <a:effectRef idx="0">
+            <a:schemeClr val="accent1"/>
+          </a:effectRef>
+          <a:fontRef idx="minor">
+            <a:schemeClr val="lt1"/>
+          </a:fontRef>
+        </p:style>
+        <p:txBody>
+          <a:bodyPr rtlCol="0" anchor="ctr"/>
+          <a:lstStyle/>
+          <a:p>
+            <a:pPr algn="ctr"/>
+            <a:endParaRPr lang="en-US"/>
+          </a:p>
+        </p:txBody>
+      </p:sp>
+      <p:sp>
+        <p:nvSpPr>
+          <p:cNvPr id="24" name="Rectangle 23">
+            <a:extLst>
+              <a:ext uri="{FF2B5EF4-FFF2-40B4-BE49-F238E27FC236}">
+                <a16:creationId xmlns:a16="http://schemas.microsoft.com/office/drawing/2014/main" id="{C007F3D3-099E-430E-8754-C084D0FA5FE3}"/>
+              </a:ext>
+              <a:ext uri="{C183D7F6-B498-43B3-948B-1728B52AA6E4}">
+                <adec:decorative xmlns:adec="http://schemas.microsoft.com/office/drawing/2017/decorative" val="1"/>
+              </a:ext>
+            </a:extLst>
+          </p:cNvPr>
+          <p:cNvSpPr>
+            <a:spLocks noGrp="1" noRot="1" noChangeAspect="1" noMove="1" noResize="1" noEditPoints="1" noAdjustHandles="1" noChangeArrowheads="1" noChangeShapeType="1" noTextEdit="1"/>
+          </p:cNvSpPr>
+          <p:nvPr>
+            <p:extLst>
+              <p:ext uri="{386F3935-93C4-4BCD-93E2-E3B085C9AB24}">
+                <p16:designElem xmlns:p16="http://schemas.microsoft.com/office/powerpoint/2015/main" val="1"/>
+              </p:ext>
+            </p:extLst>
+          </p:nvPr>
+        </p:nvSpPr>
+        <p:spPr>
+          <a:xfrm>
+            <a:off x="0" y="2019476"/>
+            <a:ext cx="12192000" cy="4105941"/>
+          </a:xfrm>
+          <a:prstGeom prst="rect">
+            <a:avLst/>
+          </a:prstGeom>
+          <a:gradFill flip="none" rotWithShape="1">
+            <a:gsLst>
+              <a:gs pos="0">
+                <a:schemeClr val="bg2">
+                  <a:alpha val="0"/>
+                </a:schemeClr>
+              </a:gs>
+              <a:gs pos="100000">
+                <a:schemeClr val="bg2"/>
+              </a:gs>
+            </a:gsLst>
+            <a:lin ang="5400000" scaled="0"/>
+            <a:tileRect/>
+          </a:gradFill>
+          <a:ln>
+            <a:noFill/>
+          </a:ln>
+        </p:spPr>
+        <p:style>
+          <a:lnRef idx="2">
+            <a:schemeClr val="accent1">
+              <a:shade val="50000"/>
+            </a:schemeClr>
+          </a:lnRef>
+          <a:fillRef idx="1">
+            <a:schemeClr val="accent1"/>
+          </a:fillRef>
+          <a:effectRef idx="0">
+            <a:schemeClr val="accent1"/>
+          </a:effectRef>
+          <a:fontRef idx="minor">
+            <a:schemeClr val="lt1"/>
+          </a:fontRef>
+        </p:style>
+        <p:txBody>
+          <a:bodyPr rtlCol="0" anchor="ctr"/>
+          <a:lstStyle/>
+          <a:p>
+            <a:pPr lvl="0" algn="ctr"/>
+            <a:endParaRPr lang="en-US"/>
+          </a:p>
+        </p:txBody>
+      </p:sp>
+      <p:sp>
+        <p:nvSpPr>
+          <p:cNvPr id="2" name="Title 1">
+            <a:extLst>
+              <a:ext uri="{FF2B5EF4-FFF2-40B4-BE49-F238E27FC236}">
+                <a16:creationId xmlns:a16="http://schemas.microsoft.com/office/drawing/2014/main" id="{13CFD6D8-D4CB-7D22-6034-0448D726F997}"/>
+              </a:ext>
+            </a:extLst>
+          </p:cNvPr>
+          <p:cNvSpPr>
+            <a:spLocks noGrp="1"/>
+          </p:cNvSpPr>
+          <p:nvPr>
+            <p:ph type="title"/>
+          </p:nvPr>
+        </p:nvSpPr>
+        <p:spPr>
+          <a:xfrm>
+            <a:off x="1776729" y="4459039"/>
+            <a:ext cx="8643011" cy="551528"/>
+          </a:xfrm>
+        </p:spPr>
+        <p:txBody>
+          <a:bodyPr vert="horz" lIns="91440" tIns="45720" rIns="91440" bIns="0" rtlCol="0" anchor="b">
+            <a:normAutofit/>
+          </a:bodyPr>
+          <a:lstStyle/>
+          <a:p>
+            <a:r>
+              <a:rPr lang="en-US" sz="3600"/>
+              <a:t>Vlajk Sándor - Fejlesztés</a:t>
+            </a:r>
+          </a:p>
+        </p:txBody>
+      </p:sp>
+      <p:pic>
+        <p:nvPicPr>
+          <p:cNvPr id="5" name="Content Placeholder 4">
+            <a:extLst>
+              <a:ext uri="{FF2B5EF4-FFF2-40B4-BE49-F238E27FC236}">
+                <a16:creationId xmlns:a16="http://schemas.microsoft.com/office/drawing/2014/main" id="{D328A2F4-206A-9FAD-C168-CDB9610FB783}"/>
+              </a:ext>
+            </a:extLst>
+          </p:cNvPr>
+          <p:cNvPicPr>
+            <a:picLocks noGrp="1" noChangeAspect="1"/>
+          </p:cNvPicPr>
+          <p:nvPr>
+            <p:ph idx="1"/>
+          </p:nvPr>
+        </p:nvPicPr>
+        <p:blipFill>
+          <a:blip r:embed="rId3"/>
+          <a:stretch>
+            <a:fillRect/>
+          </a:stretch>
+        </p:blipFill>
+        <p:spPr>
+          <a:xfrm>
+            <a:off x="984120" y="198045"/>
+            <a:ext cx="4106012" cy="3007654"/>
+          </a:xfrm>
+          <a:prstGeom prst="rect">
+            <a:avLst/>
+          </a:prstGeom>
+        </p:spPr>
+      </p:pic>
+      <p:pic>
+        <p:nvPicPr>
+          <p:cNvPr id="7" name="Picture 6">
+            <a:extLst>
+              <a:ext uri="{FF2B5EF4-FFF2-40B4-BE49-F238E27FC236}">
+                <a16:creationId xmlns:a16="http://schemas.microsoft.com/office/drawing/2014/main" id="{AA8CF25F-105A-EA84-AB38-9B2CDC7B3277}"/>
+              </a:ext>
+            </a:extLst>
+          </p:cNvPr>
+          <p:cNvPicPr>
+            <a:picLocks noChangeAspect="1"/>
+          </p:cNvPicPr>
+          <p:nvPr/>
+        </p:nvPicPr>
+        <p:blipFill>
+          <a:blip r:embed="rId4"/>
+          <a:stretch>
+            <a:fillRect/>
+          </a:stretch>
+        </p:blipFill>
+        <p:spPr>
+          <a:xfrm>
+            <a:off x="6074249" y="638316"/>
+            <a:ext cx="5549025" cy="3079707"/>
+          </a:xfrm>
+          <a:prstGeom prst="rect">
+            <a:avLst/>
+          </a:prstGeom>
+        </p:spPr>
+      </p:pic>
+      <p:pic>
+        <p:nvPicPr>
+          <p:cNvPr id="9" name="Picture 8">
+            <a:extLst>
+              <a:ext uri="{FF2B5EF4-FFF2-40B4-BE49-F238E27FC236}">
+                <a16:creationId xmlns:a16="http://schemas.microsoft.com/office/drawing/2014/main" id="{07C5DCCD-B4B3-22CE-2C2A-CC1050E657B0}"/>
+              </a:ext>
+            </a:extLst>
+          </p:cNvPr>
+          <p:cNvPicPr>
+            <a:picLocks noChangeAspect="1"/>
+          </p:cNvPicPr>
+          <p:nvPr/>
+        </p:nvPicPr>
+        <p:blipFill>
+          <a:blip r:embed="rId5"/>
+          <a:stretch>
+            <a:fillRect/>
+          </a:stretch>
+        </p:blipFill>
+        <p:spPr>
+          <a:xfrm>
+            <a:off x="1343846" y="3271561"/>
+            <a:ext cx="3386560" cy="1121616"/>
+          </a:xfrm>
+          <a:prstGeom prst="rect">
+            <a:avLst/>
+          </a:prstGeom>
+        </p:spPr>
+      </p:pic>
+      <p:cxnSp>
+        <p:nvCxnSpPr>
+          <p:cNvPr id="26" name="Straight Connector 25">
+            <a:extLst>
+              <a:ext uri="{FF2B5EF4-FFF2-40B4-BE49-F238E27FC236}">
+                <a16:creationId xmlns:a16="http://schemas.microsoft.com/office/drawing/2014/main" id="{6B9EA5DA-6DFD-447D-B8F9-CB95CA114076}"/>
+              </a:ext>
+              <a:ext uri="{C183D7F6-B498-43B3-948B-1728B52AA6E4}">
+                <adec:decorative xmlns:adec="http://schemas.microsoft.com/office/drawing/2017/decorative" val="1"/>
+              </a:ext>
+            </a:extLst>
+          </p:cNvPr>
+          <p:cNvCxnSpPr>
+            <a:cxnSpLocks noGrp="1" noRot="1" noChangeAspect="1" noMove="1" noResize="1" noEditPoints="1" noAdjustHandles="1" noChangeArrowheads="1" noChangeShapeType="1"/>
+          </p:cNvCxnSpPr>
+          <p:nvPr>
+            <p:extLst>
+              <p:ext uri="{386F3935-93C4-4BCD-93E2-E3B085C9AB24}">
+                <p16:designElem xmlns:p16="http://schemas.microsoft.com/office/powerpoint/2015/main" val="1"/>
+              </p:ext>
+            </p:extLst>
+          </p:nvPr>
+        </p:nvCxnSpPr>
+        <p:spPr>
+          <a:xfrm>
+            <a:off x="1776728" y="5027185"/>
+            <a:ext cx="8643011" cy="0"/>
+          </a:xfrm>
+          <a:prstGeom prst="line">
+            <a:avLst/>
+          </a:prstGeom>
+          <a:ln w="31750"/>
+        </p:spPr>
+        <p:style>
+          <a:lnRef idx="3">
+            <a:schemeClr val="accent1"/>
+          </a:lnRef>
+          <a:fillRef idx="0">
+            <a:schemeClr val="accent1"/>
+          </a:fillRef>
+          <a:effectRef idx="2">
+            <a:schemeClr val="accent1"/>
+          </a:effectRef>
+          <a:fontRef idx="minor">
+            <a:schemeClr val="tx1"/>
+          </a:fontRef>
+        </p:style>
+      </p:cxnSp>
+      <p:pic>
+        <p:nvPicPr>
+          <p:cNvPr id="28" name="Picture 27">
+            <a:extLst>
+              <a:ext uri="{FF2B5EF4-FFF2-40B4-BE49-F238E27FC236}">
+                <a16:creationId xmlns:a16="http://schemas.microsoft.com/office/drawing/2014/main" id="{87612EF9-94E7-42BA-B4A9-4B38643FBAF7}"/>
+              </a:ext>
+              <a:ext uri="{C183D7F6-B498-43B3-948B-1728B52AA6E4}">
+                <adec:decorative xmlns:adec="http://schemas.microsoft.com/office/drawing/2017/decorative" val="1"/>
+              </a:ext>
+            </a:extLst>
+          </p:cNvPr>
+          <p:cNvPicPr>
+            <a:picLocks noGrp="1" noRot="1" noChangeAspect="1" noMove="1" noResize="1" noEditPoints="1" noAdjustHandles="1" noChangeArrowheads="1" noChangeShapeType="1" noCrop="1"/>
+          </p:cNvPicPr>
+          <p:nvPr>
+            <p:extLst>
+              <p:ext uri="{386F3935-93C4-4BCD-93E2-E3B085C9AB24}">
+                <p16:designElem xmlns:p16="http://schemas.microsoft.com/office/powerpoint/2015/main" val="1"/>
+              </p:ext>
+            </p:extLst>
+          </p:nvPr>
+        </p:nvPicPr>
+        <p:blipFill rotWithShape="1">
+          <a:blip r:embed="rId2">
+            <a:extLst>
+              <a:ext uri="{28A0092B-C50C-407E-A947-70E740481C1C}">
+                <a14:useLocalDpi xmlns:a14="http://schemas.microsoft.com/office/drawing/2010/main" val="0"/>
+              </a:ext>
+            </a:extLst>
+          </a:blip>
+          <a:srcRect t="1538" b="-1538"/>
+          <a:stretch/>
+        </p:blipFill>
+        <p:spPr bwMode="black">
+          <a:xfrm>
+            <a:off x="0" y="6126480"/>
+            <a:ext cx="12192000" cy="742950"/>
+          </a:xfrm>
+          <a:prstGeom prst="rect">
+            <a:avLst/>
+          </a:prstGeom>
+        </p:spPr>
+      </p:pic>
+      <p:cxnSp>
+        <p:nvCxnSpPr>
+          <p:cNvPr id="30" name="Straight Connector 29">
+            <a:extLst>
+              <a:ext uri="{FF2B5EF4-FFF2-40B4-BE49-F238E27FC236}">
+                <a16:creationId xmlns:a16="http://schemas.microsoft.com/office/drawing/2014/main" id="{9E597F0B-0A17-4BF2-A904-9D99811F3E2E}"/>
+              </a:ext>
+              <a:ext uri="{C183D7F6-B498-43B3-948B-1728B52AA6E4}">
+                <adec:decorative xmlns:adec="http://schemas.microsoft.com/office/drawing/2017/decorative" val="1"/>
+              </a:ext>
+            </a:extLst>
+          </p:cNvPr>
+          <p:cNvCxnSpPr>
+            <a:cxnSpLocks noGrp="1" noRot="1" noChangeAspect="1" noMove="1" noResize="1" noEditPoints="1" noAdjustHandles="1" noChangeArrowheads="1" noChangeShapeType="1"/>
+          </p:cNvCxnSpPr>
+          <p:nvPr>
+            <p:extLst>
+              <p:ext uri="{386F3935-93C4-4BCD-93E2-E3B085C9AB24}">
+                <p16:designElem xmlns:p16="http://schemas.microsoft.com/office/powerpoint/2015/main" val="1"/>
+              </p:ext>
+            </p:extLst>
+          </p:nvPr>
+        </p:nvCxnSpPr>
+        <p:spPr>
+          <a:xfrm>
+            <a:off x="0" y="6128413"/>
+            <a:ext cx="12192000" cy="0"/>
+          </a:xfrm>
+          <a:prstGeom prst="line">
+            <a:avLst/>
+          </a:prstGeom>
+          <a:ln w="12700">
+            <a:solidFill>
+              <a:srgbClr val="000001">
+                <a:alpha val="20000"/>
+              </a:srgbClr>
+            </a:solidFill>
+          </a:ln>
+        </p:spPr>
+        <p:style>
+          <a:lnRef idx="1">
+            <a:schemeClr val="accent1"/>
+          </a:lnRef>
+          <a:fillRef idx="0">
+            <a:schemeClr val="accent1"/>
+          </a:fillRef>
+          <a:effectRef idx="0">
+            <a:schemeClr val="accent1"/>
+          </a:effectRef>
+          <a:fontRef idx="minor">
+            <a:schemeClr val="tx1"/>
+          </a:fontRef>
+        </p:style>
+      </p:cxnSp>
+    </p:spTree>
+    <p:extLst>
+      <p:ext uri="{BB962C8B-B14F-4D97-AF65-F5344CB8AC3E}">
+        <p14:creationId xmlns:p14="http://schemas.microsoft.com/office/powerpoint/2010/main" val="3079083219"/>
+      </p:ext>
+    </p:extLst>
+  </p:cSld>
+  <p:clrMapOvr>
+    <a:masterClrMapping/>
+  </p:clrMapOvr>
+</p:sld>
+</file>
+
+<file path=ppt/slides/slide16.xml><?xml version="1.0" encoding="utf-8"?>
+<p:sld xmlns:a="http://schemas.openxmlformats.org/drawingml/2006/main" xmlns:r="http://schemas.openxmlformats.org/officeDocument/2006/relationships" xmlns:p="http://schemas.openxmlformats.org/presentationml/2006/main">
+  <p:cSld>
+    <p:bg>
+      <p:bgPr>
+        <a:gradFill rotWithShape="1">
+          <a:gsLst>
+            <a:gs pos="0">
+              <a:schemeClr val="bg2">
+                <a:tint val="94000"/>
+                <a:satMod val="80000"/>
+                <a:lumMod val="106000"/>
+              </a:schemeClr>
+            </a:gs>
+            <a:gs pos="100000">
+              <a:schemeClr val="bg2">
+                <a:shade val="80000"/>
+              </a:schemeClr>
+            </a:gs>
+          </a:gsLst>
+          <a:path path="circle">
+            <a:fillToRect l="43000" r="43000" b="100000"/>
+          </a:path>
+        </a:gradFill>
+        <a:effectLst/>
+      </p:bgPr>
+    </p:bg>
+    <p:spTree>
+      <p:nvGrpSpPr>
+        <p:cNvPr id="1" name=""/>
+        <p:cNvGrpSpPr/>
+        <p:nvPr/>
+      </p:nvGrpSpPr>
+      <p:grpSpPr>
+        <a:xfrm>
+          <a:off x="0" y="0"/>
+          <a:ext cx="0" cy="0"/>
+          <a:chOff x="0" y="0"/>
+          <a:chExt cx="0" cy="0"/>
+        </a:xfrm>
+      </p:grpSpPr>
+      <p:sp>
+        <p:nvSpPr>
+          <p:cNvPr id="17" name="Rectangle 16">
+            <a:extLst>
+              <a:ext uri="{FF2B5EF4-FFF2-40B4-BE49-F238E27FC236}">
+                <a16:creationId xmlns:a16="http://schemas.microsoft.com/office/drawing/2014/main" id="{E724B9E8-02C8-4B2E-8770-A00A67760DF0}"/>
+              </a:ext>
+              <a:ext uri="{C183D7F6-B498-43B3-948B-1728B52AA6E4}">
+                <adec:decorative xmlns:adec="http://schemas.microsoft.com/office/drawing/2017/decorative" val="1"/>
+              </a:ext>
+            </a:extLst>
+          </p:cNvPr>
+          <p:cNvSpPr>
+            <a:spLocks noGrp="1" noRot="1" noChangeAspect="1" noMove="1" noResize="1" noEditPoints="1" noAdjustHandles="1" noChangeArrowheads="1" noChangeShapeType="1" noTextEdit="1"/>
+          </p:cNvSpPr>
+          <p:nvPr>
+            <p:extLst>
+              <p:ext uri="{386F3935-93C4-4BCD-93E2-E3B085C9AB24}">
+                <p16:designElem xmlns:p16="http://schemas.microsoft.com/office/powerpoint/2015/main" val="1"/>
+              </p:ext>
+            </p:extLst>
+          </p:nvPr>
+        </p:nvSpPr>
+        <p:spPr>
+          <a:xfrm>
+            <a:off x="0" y="2019476"/>
+            <a:ext cx="12192000" cy="4105941"/>
+          </a:xfrm>
+          <a:prstGeom prst="rect">
+            <a:avLst/>
+          </a:prstGeom>
+          <a:gradFill flip="none" rotWithShape="1">
+            <a:gsLst>
+              <a:gs pos="0">
+                <a:schemeClr val="bg2">
+                  <a:alpha val="0"/>
+                </a:schemeClr>
+              </a:gs>
+              <a:gs pos="100000">
+                <a:schemeClr val="bg2"/>
+              </a:gs>
+            </a:gsLst>
+            <a:lin ang="5400000" scaled="0"/>
+            <a:tileRect/>
+          </a:gradFill>
+          <a:ln>
+            <a:noFill/>
+          </a:ln>
+        </p:spPr>
+        <p:style>
+          <a:lnRef idx="2">
+            <a:schemeClr val="accent1">
+              <a:shade val="50000"/>
+            </a:schemeClr>
+          </a:lnRef>
+          <a:fillRef idx="1">
+            <a:schemeClr val="accent1"/>
+          </a:fillRef>
+          <a:effectRef idx="0">
+            <a:schemeClr val="accent1"/>
+          </a:effectRef>
+          <a:fontRef idx="minor">
+            <a:schemeClr val="lt1"/>
+          </a:fontRef>
+        </p:style>
+        <p:txBody>
+          <a:bodyPr/>
+          <a:lstStyle/>
+          <a:p>
+            <a:endParaRPr lang="en-US"/>
+          </a:p>
+        </p:txBody>
+      </p:sp>
+      <p:pic>
+        <p:nvPicPr>
+          <p:cNvPr id="19" name="Picture 18">
+            <a:extLst>
+              <a:ext uri="{FF2B5EF4-FFF2-40B4-BE49-F238E27FC236}">
+                <a16:creationId xmlns:a16="http://schemas.microsoft.com/office/drawing/2014/main" id="{7B8AE548-0BFA-4792-9962-3375923C7635}"/>
+              </a:ext>
+              <a:ext uri="{C183D7F6-B498-43B3-948B-1728B52AA6E4}">
+                <adec:decorative xmlns:adec="http://schemas.microsoft.com/office/drawing/2017/decorative" val="1"/>
+              </a:ext>
+            </a:extLst>
+          </p:cNvPr>
+          <p:cNvPicPr>
+            <a:picLocks noGrp="1" noRot="1" noChangeAspect="1" noMove="1" noResize="1" noEditPoints="1" noAdjustHandles="1" noChangeArrowheads="1" noChangeShapeType="1" noCrop="1"/>
+          </p:cNvPicPr>
+          <p:nvPr>
+            <p:extLst>
+              <p:ext uri="{386F3935-93C4-4BCD-93E2-E3B085C9AB24}">
+                <p16:designElem xmlns:p16="http://schemas.microsoft.com/office/powerpoint/2015/main" val="1"/>
+              </p:ext>
+            </p:extLst>
+          </p:nvPr>
+        </p:nvPicPr>
+        <p:blipFill rotWithShape="1">
+          <a:blip r:embed="rId2">
+            <a:extLst>
+              <a:ext uri="{28A0092B-C50C-407E-A947-70E740481C1C}">
+                <a14:useLocalDpi xmlns:a14="http://schemas.microsoft.com/office/drawing/2010/main" val="0"/>
+              </a:ext>
+            </a:extLst>
+          </a:blip>
+          <a:srcRect t="1538" b="-1538"/>
+          <a:stretch/>
+        </p:blipFill>
+        <p:spPr bwMode="black">
+          <a:xfrm>
+            <a:off x="0" y="6126480"/>
+            <a:ext cx="12192000" cy="742950"/>
+          </a:xfrm>
+          <a:prstGeom prst="rect">
+            <a:avLst/>
+          </a:prstGeom>
+        </p:spPr>
+      </p:pic>
+      <p:cxnSp>
+        <p:nvCxnSpPr>
+          <p:cNvPr id="21" name="Straight Connector 20">
+            <a:extLst>
+              <a:ext uri="{FF2B5EF4-FFF2-40B4-BE49-F238E27FC236}">
+                <a16:creationId xmlns:a16="http://schemas.microsoft.com/office/drawing/2014/main" id="{67639EF4-FA83-4D85-90FE-B831AF283896}"/>
+              </a:ext>
+              <a:ext uri="{C183D7F6-B498-43B3-948B-1728B52AA6E4}">
+                <adec:decorative xmlns:adec="http://schemas.microsoft.com/office/drawing/2017/decorative" val="1"/>
+              </a:ext>
+            </a:extLst>
+          </p:cNvPr>
+          <p:cNvCxnSpPr>
+            <a:cxnSpLocks noGrp="1" noRot="1" noChangeAspect="1" noMove="1" noResize="1" noEditPoints="1" noAdjustHandles="1" noChangeArrowheads="1" noChangeShapeType="1"/>
+          </p:cNvCxnSpPr>
+          <p:nvPr>
+            <p:extLst>
+              <p:ext uri="{386F3935-93C4-4BCD-93E2-E3B085C9AB24}">
+                <p16:designElem xmlns:p16="http://schemas.microsoft.com/office/powerpoint/2015/main" val="1"/>
+              </p:ext>
+            </p:extLst>
+          </p:nvPr>
+        </p:nvCxnSpPr>
+        <p:spPr>
+          <a:xfrm>
+            <a:off x="0" y="6128413"/>
+            <a:ext cx="12192000" cy="0"/>
+          </a:xfrm>
+          <a:prstGeom prst="line">
+            <a:avLst/>
+          </a:prstGeom>
+          <a:ln w="12700">
+            <a:solidFill>
+              <a:srgbClr val="000001">
+                <a:alpha val="20000"/>
+              </a:srgbClr>
+            </a:solidFill>
+          </a:ln>
+        </p:spPr>
+        <p:style>
+          <a:lnRef idx="1">
+            <a:schemeClr val="accent1"/>
+          </a:lnRef>
+          <a:fillRef idx="0">
+            <a:schemeClr val="accent1"/>
+          </a:fillRef>
+          <a:effectRef idx="0">
+            <a:schemeClr val="accent1"/>
+          </a:effectRef>
+          <a:fontRef idx="minor">
+            <a:schemeClr val="tx1"/>
+          </a:fontRef>
+        </p:style>
+      </p:cxnSp>
+      <p:cxnSp>
+        <p:nvCxnSpPr>
+          <p:cNvPr id="23" name="Straight Connector 22">
+            <a:extLst>
+              <a:ext uri="{FF2B5EF4-FFF2-40B4-BE49-F238E27FC236}">
+                <a16:creationId xmlns:a16="http://schemas.microsoft.com/office/drawing/2014/main" id="{CC87E76A-8F50-413D-9BFC-C5A1525BD9BC}"/>
+              </a:ext>
+              <a:ext uri="{C183D7F6-B498-43B3-948B-1728B52AA6E4}">
+                <adec:decorative xmlns:adec="http://schemas.microsoft.com/office/drawing/2017/decorative" val="1"/>
+              </a:ext>
+            </a:extLst>
+          </p:cNvPr>
+          <p:cNvCxnSpPr>
+            <a:cxnSpLocks noGrp="1" noRot="1" noChangeAspect="1" noMove="1" noResize="1" noEditPoints="1" noAdjustHandles="1" noChangeArrowheads="1" noChangeShapeType="1"/>
+          </p:cNvCxnSpPr>
+          <p:nvPr>
+            <p:extLst>
+              <p:ext uri="{386F3935-93C4-4BCD-93E2-E3B085C9AB24}">
+                <p16:designElem xmlns:p16="http://schemas.microsoft.com/office/powerpoint/2015/main" val="1"/>
+              </p:ext>
+            </p:extLst>
+          </p:nvPr>
+        </p:nvCxnSpPr>
+        <p:spPr>
+          <a:xfrm>
+            <a:off x="2417780" y="3528542"/>
+            <a:ext cx="8637072" cy="0"/>
+          </a:xfrm>
+          <a:prstGeom prst="line">
+            <a:avLst/>
+          </a:prstGeom>
+          <a:ln w="31750"/>
+        </p:spPr>
+        <p:style>
+          <a:lnRef idx="3">
+            <a:schemeClr val="accent1"/>
+          </a:lnRef>
+          <a:fillRef idx="0">
+            <a:schemeClr val="accent1"/>
+          </a:fillRef>
+          <a:effectRef idx="2">
+            <a:schemeClr val="accent1"/>
+          </a:effectRef>
+          <a:fontRef idx="minor">
+            <a:schemeClr val="tx1"/>
+          </a:fontRef>
+        </p:style>
+      </p:cxnSp>
+      <p:sp useBgFill="1">
+        <p:nvSpPr>
+          <p:cNvPr id="25" name="Rectangle 24">
+            <a:extLst>
+              <a:ext uri="{FF2B5EF4-FFF2-40B4-BE49-F238E27FC236}">
+                <a16:creationId xmlns:a16="http://schemas.microsoft.com/office/drawing/2014/main" id="{9A1C6278-B7D5-4E8E-B4DC-834832980565}"/>
+              </a:ext>
+              <a:ext uri="{C183D7F6-B498-43B3-948B-1728B52AA6E4}">
+                <adec:decorative xmlns:adec="http://schemas.microsoft.com/office/drawing/2017/decorative" val="1"/>
+              </a:ext>
+            </a:extLst>
+          </p:cNvPr>
+          <p:cNvSpPr>
+            <a:spLocks noGrp="1" noRot="1" noChangeAspect="1" noMove="1" noResize="1" noEditPoints="1" noAdjustHandles="1" noChangeArrowheads="1" noChangeShapeType="1" noTextEdit="1"/>
+          </p:cNvSpPr>
+          <p:nvPr>
+            <p:extLst>
+              <p:ext uri="{386F3935-93C4-4BCD-93E2-E3B085C9AB24}">
+                <p16:designElem xmlns:p16="http://schemas.microsoft.com/office/powerpoint/2015/main" val="1"/>
+              </p:ext>
+            </p:extLst>
+          </p:nvPr>
+        </p:nvSpPr>
+        <p:spPr>
+          <a:xfrm>
+            <a:off x="2" y="0"/>
+            <a:ext cx="12191695" cy="6858000"/>
+          </a:xfrm>
+          <a:prstGeom prst="rect">
+            <a:avLst/>
+          </a:prstGeom>
+          <a:ln>
+            <a:noFill/>
+          </a:ln>
+        </p:spPr>
+        <p:style>
+          <a:lnRef idx="2">
+            <a:schemeClr val="accent1">
+              <a:shade val="50000"/>
+            </a:schemeClr>
+          </a:lnRef>
+          <a:fillRef idx="1">
+            <a:schemeClr val="accent1"/>
+          </a:fillRef>
+          <a:effectRef idx="0">
+            <a:schemeClr val="accent1"/>
+          </a:effectRef>
+          <a:fontRef idx="minor">
+            <a:schemeClr val="lt1"/>
+          </a:fontRef>
+        </p:style>
+        <p:txBody>
+          <a:bodyPr rtlCol="0" anchor="ctr"/>
+          <a:lstStyle/>
+          <a:p>
+            <a:pPr algn="ctr"/>
+            <a:endParaRPr lang="en-US"/>
+          </a:p>
+        </p:txBody>
+      </p:sp>
+      <p:sp>
+        <p:nvSpPr>
+          <p:cNvPr id="27" name="Rectangle 26">
+            <a:extLst>
+              <a:ext uri="{FF2B5EF4-FFF2-40B4-BE49-F238E27FC236}">
+                <a16:creationId xmlns:a16="http://schemas.microsoft.com/office/drawing/2014/main" id="{C007F3D3-099E-430E-8754-C084D0FA5FE3}"/>
+              </a:ext>
+              <a:ext uri="{C183D7F6-B498-43B3-948B-1728B52AA6E4}">
+                <adec:decorative xmlns:adec="http://schemas.microsoft.com/office/drawing/2017/decorative" val="1"/>
+              </a:ext>
+            </a:extLst>
+          </p:cNvPr>
+          <p:cNvSpPr>
+            <a:spLocks noGrp="1" noRot="1" noChangeAspect="1" noMove="1" noResize="1" noEditPoints="1" noAdjustHandles="1" noChangeArrowheads="1" noChangeShapeType="1" noTextEdit="1"/>
+          </p:cNvSpPr>
+          <p:nvPr>
+            <p:extLst>
+              <p:ext uri="{386F3935-93C4-4BCD-93E2-E3B085C9AB24}">
+                <p16:designElem xmlns:p16="http://schemas.microsoft.com/office/powerpoint/2015/main" val="1"/>
+              </p:ext>
+            </p:extLst>
+          </p:nvPr>
+        </p:nvSpPr>
+        <p:spPr>
+          <a:xfrm>
+            <a:off x="0" y="2019476"/>
+            <a:ext cx="12192000" cy="4105941"/>
+          </a:xfrm>
+          <a:prstGeom prst="rect">
+            <a:avLst/>
+          </a:prstGeom>
+          <a:gradFill flip="none" rotWithShape="1">
+            <a:gsLst>
+              <a:gs pos="0">
+                <a:schemeClr val="bg2">
+                  <a:alpha val="0"/>
+                </a:schemeClr>
+              </a:gs>
+              <a:gs pos="100000">
+                <a:schemeClr val="bg2"/>
+              </a:gs>
+            </a:gsLst>
+            <a:lin ang="5400000" scaled="0"/>
+            <a:tileRect/>
+          </a:gradFill>
+          <a:ln>
+            <a:noFill/>
+          </a:ln>
+        </p:spPr>
+        <p:style>
+          <a:lnRef idx="2">
+            <a:schemeClr val="accent1">
+              <a:shade val="50000"/>
+            </a:schemeClr>
+          </a:lnRef>
+          <a:fillRef idx="1">
+            <a:schemeClr val="accent1"/>
+          </a:fillRef>
+          <a:effectRef idx="0">
+            <a:schemeClr val="accent1"/>
+          </a:effectRef>
+          <a:fontRef idx="minor">
+            <a:schemeClr val="lt1"/>
+          </a:fontRef>
+        </p:style>
+        <p:txBody>
+          <a:bodyPr rtlCol="0" anchor="ctr"/>
+          <a:lstStyle/>
+          <a:p>
+            <a:pPr lvl="0" algn="ctr"/>
+            <a:endParaRPr lang="en-US"/>
+          </a:p>
+        </p:txBody>
+      </p:sp>
+      <p:sp>
+        <p:nvSpPr>
+          <p:cNvPr id="2" name="Title 1">
+            <a:extLst>
+              <a:ext uri="{FF2B5EF4-FFF2-40B4-BE49-F238E27FC236}">
+                <a16:creationId xmlns:a16="http://schemas.microsoft.com/office/drawing/2014/main" id="{0C05D6E9-FB34-5D4E-D478-F5A8B0E7C25A}"/>
+              </a:ext>
+            </a:extLst>
+          </p:cNvPr>
+          <p:cNvSpPr>
+            <a:spLocks noGrp="1"/>
+          </p:cNvSpPr>
+          <p:nvPr>
+            <p:ph type="title"/>
+          </p:nvPr>
+        </p:nvSpPr>
+        <p:spPr>
+          <a:xfrm>
+            <a:off x="1776729" y="4459039"/>
+            <a:ext cx="8643011" cy="551528"/>
+          </a:xfrm>
+        </p:spPr>
+        <p:txBody>
+          <a:bodyPr vert="horz" lIns="91440" tIns="45720" rIns="91440" bIns="0" rtlCol="0" anchor="b">
+            <a:normAutofit/>
+          </a:bodyPr>
+          <a:lstStyle/>
+          <a:p>
+            <a:r>
+              <a:rPr lang="en-US" sz="3600"/>
+              <a:t>Vlajk Sándor - Fejlesztés</a:t>
+            </a:r>
+          </a:p>
+        </p:txBody>
+      </p:sp>
+      <p:pic>
+        <p:nvPicPr>
+          <p:cNvPr id="7" name="Content Placeholder 6">
+            <a:extLst>
+              <a:ext uri="{FF2B5EF4-FFF2-40B4-BE49-F238E27FC236}">
+                <a16:creationId xmlns:a16="http://schemas.microsoft.com/office/drawing/2014/main" id="{5CAD100C-B467-C9FA-742C-83A81B896BF9}"/>
+              </a:ext>
+            </a:extLst>
+          </p:cNvPr>
+          <p:cNvPicPr>
+            <a:picLocks noGrp="1" noChangeAspect="1"/>
+          </p:cNvPicPr>
+          <p:nvPr>
+            <p:ph idx="1"/>
+          </p:nvPr>
+        </p:nvPicPr>
+        <p:blipFill>
+          <a:blip r:embed="rId3"/>
+          <a:stretch>
+            <a:fillRect/>
+          </a:stretch>
+        </p:blipFill>
+        <p:spPr>
+          <a:xfrm>
+            <a:off x="813173" y="457201"/>
+            <a:ext cx="4934512" cy="2689308"/>
+          </a:xfrm>
+          <a:prstGeom prst="rect">
+            <a:avLst/>
+          </a:prstGeom>
+        </p:spPr>
+      </p:pic>
+      <p:pic>
+        <p:nvPicPr>
+          <p:cNvPr id="12" name="Picture 11">
+            <a:extLst>
+              <a:ext uri="{FF2B5EF4-FFF2-40B4-BE49-F238E27FC236}">
+                <a16:creationId xmlns:a16="http://schemas.microsoft.com/office/drawing/2014/main" id="{31D188B4-F8EB-7281-F69A-9DE7E48DAAA3}"/>
+              </a:ext>
+            </a:extLst>
+          </p:cNvPr>
+          <p:cNvPicPr>
+            <a:picLocks noChangeAspect="1"/>
+          </p:cNvPicPr>
+          <p:nvPr/>
+        </p:nvPicPr>
+        <p:blipFill>
+          <a:blip r:embed="rId4"/>
+          <a:stretch>
+            <a:fillRect/>
+          </a:stretch>
+        </p:blipFill>
+        <p:spPr>
+          <a:xfrm>
+            <a:off x="6025216" y="1062951"/>
+            <a:ext cx="5517445" cy="2979420"/>
+          </a:xfrm>
+          <a:prstGeom prst="rect">
+            <a:avLst/>
+          </a:prstGeom>
+        </p:spPr>
+      </p:pic>
+      <p:pic>
+        <p:nvPicPr>
+          <p:cNvPr id="9" name="Picture 8">
+            <a:extLst>
+              <a:ext uri="{FF2B5EF4-FFF2-40B4-BE49-F238E27FC236}">
+                <a16:creationId xmlns:a16="http://schemas.microsoft.com/office/drawing/2014/main" id="{D59158A9-81B7-7204-17BE-FD603E88906B}"/>
+              </a:ext>
+            </a:extLst>
+          </p:cNvPr>
+          <p:cNvPicPr>
+            <a:picLocks noChangeAspect="1"/>
+          </p:cNvPicPr>
+          <p:nvPr/>
+        </p:nvPicPr>
+        <p:blipFill>
+          <a:blip r:embed="rId5"/>
+          <a:stretch>
+            <a:fillRect/>
+          </a:stretch>
+        </p:blipFill>
+        <p:spPr>
+          <a:xfrm>
+            <a:off x="1566686" y="3252392"/>
+            <a:ext cx="3429598" cy="1251340"/>
+          </a:xfrm>
+          <a:prstGeom prst="rect">
+            <a:avLst/>
+          </a:prstGeom>
+        </p:spPr>
+      </p:pic>
+      <p:cxnSp>
+        <p:nvCxnSpPr>
+          <p:cNvPr id="29" name="Straight Connector 28">
+            <a:extLst>
+              <a:ext uri="{FF2B5EF4-FFF2-40B4-BE49-F238E27FC236}">
+                <a16:creationId xmlns:a16="http://schemas.microsoft.com/office/drawing/2014/main" id="{6B9EA5DA-6DFD-447D-B8F9-CB95CA114076}"/>
+              </a:ext>
+              <a:ext uri="{C183D7F6-B498-43B3-948B-1728B52AA6E4}">
+                <adec:decorative xmlns:adec="http://schemas.microsoft.com/office/drawing/2017/decorative" val="1"/>
+              </a:ext>
+            </a:extLst>
+          </p:cNvPr>
+          <p:cNvCxnSpPr>
+            <a:cxnSpLocks noGrp="1" noRot="1" noChangeAspect="1" noMove="1" noResize="1" noEditPoints="1" noAdjustHandles="1" noChangeArrowheads="1" noChangeShapeType="1"/>
+          </p:cNvCxnSpPr>
+          <p:nvPr>
+            <p:extLst>
+              <p:ext uri="{386F3935-93C4-4BCD-93E2-E3B085C9AB24}">
+                <p16:designElem xmlns:p16="http://schemas.microsoft.com/office/powerpoint/2015/main" val="1"/>
+              </p:ext>
+            </p:extLst>
+          </p:nvPr>
+        </p:nvCxnSpPr>
+        <p:spPr>
+          <a:xfrm>
+            <a:off x="1776728" y="5027185"/>
+            <a:ext cx="8643011" cy="0"/>
+          </a:xfrm>
+          <a:prstGeom prst="line">
+            <a:avLst/>
+          </a:prstGeom>
+          <a:ln w="31750"/>
+        </p:spPr>
+        <p:style>
+          <a:lnRef idx="3">
+            <a:schemeClr val="accent1"/>
+          </a:lnRef>
+          <a:fillRef idx="0">
+            <a:schemeClr val="accent1"/>
+          </a:fillRef>
+          <a:effectRef idx="2">
+            <a:schemeClr val="accent1"/>
+          </a:effectRef>
+          <a:fontRef idx="minor">
+            <a:schemeClr val="tx1"/>
+          </a:fontRef>
+        </p:style>
+      </p:cxnSp>
+      <p:pic>
+        <p:nvPicPr>
+          <p:cNvPr id="31" name="Picture 30">
+            <a:extLst>
+              <a:ext uri="{FF2B5EF4-FFF2-40B4-BE49-F238E27FC236}">
+                <a16:creationId xmlns:a16="http://schemas.microsoft.com/office/drawing/2014/main" id="{87612EF9-94E7-42BA-B4A9-4B38643FBAF7}"/>
+              </a:ext>
+              <a:ext uri="{C183D7F6-B498-43B3-948B-1728B52AA6E4}">
+                <adec:decorative xmlns:adec="http://schemas.microsoft.com/office/drawing/2017/decorative" val="1"/>
+              </a:ext>
+            </a:extLst>
+          </p:cNvPr>
+          <p:cNvPicPr>
+            <a:picLocks noGrp="1" noRot="1" noChangeAspect="1" noMove="1" noResize="1" noEditPoints="1" noAdjustHandles="1" noChangeArrowheads="1" noChangeShapeType="1" noCrop="1"/>
+          </p:cNvPicPr>
+          <p:nvPr>
+            <p:extLst>
+              <p:ext uri="{386F3935-93C4-4BCD-93E2-E3B085C9AB24}">
+                <p16:designElem xmlns:p16="http://schemas.microsoft.com/office/powerpoint/2015/main" val="1"/>
+              </p:ext>
+            </p:extLst>
+          </p:nvPr>
+        </p:nvPicPr>
+        <p:blipFill rotWithShape="1">
+          <a:blip r:embed="rId2">
+            <a:extLst>
+              <a:ext uri="{28A0092B-C50C-407E-A947-70E740481C1C}">
+                <a14:useLocalDpi xmlns:a14="http://schemas.microsoft.com/office/drawing/2010/main" val="0"/>
+              </a:ext>
+            </a:extLst>
+          </a:blip>
+          <a:srcRect t="1538" b="-1538"/>
+          <a:stretch/>
+        </p:blipFill>
+        <p:spPr bwMode="black">
+          <a:xfrm>
+            <a:off x="0" y="6126480"/>
+            <a:ext cx="12192000" cy="742950"/>
+          </a:xfrm>
+          <a:prstGeom prst="rect">
+            <a:avLst/>
+          </a:prstGeom>
+        </p:spPr>
+      </p:pic>
+      <p:cxnSp>
+        <p:nvCxnSpPr>
+          <p:cNvPr id="33" name="Straight Connector 32">
+            <a:extLst>
+              <a:ext uri="{FF2B5EF4-FFF2-40B4-BE49-F238E27FC236}">
+                <a16:creationId xmlns:a16="http://schemas.microsoft.com/office/drawing/2014/main" id="{9E597F0B-0A17-4BF2-A904-9D99811F3E2E}"/>
+              </a:ext>
+              <a:ext uri="{C183D7F6-B498-43B3-948B-1728B52AA6E4}">
+                <adec:decorative xmlns:adec="http://schemas.microsoft.com/office/drawing/2017/decorative" val="1"/>
+              </a:ext>
+            </a:extLst>
+          </p:cNvPr>
+          <p:cNvCxnSpPr>
+            <a:cxnSpLocks noGrp="1" noRot="1" noChangeAspect="1" noMove="1" noResize="1" noEditPoints="1" noAdjustHandles="1" noChangeArrowheads="1" noChangeShapeType="1"/>
+          </p:cNvCxnSpPr>
+          <p:nvPr>
+            <p:extLst>
+              <p:ext uri="{386F3935-93C4-4BCD-93E2-E3B085C9AB24}">
+                <p16:designElem xmlns:p16="http://schemas.microsoft.com/office/powerpoint/2015/main" val="1"/>
+              </p:ext>
+            </p:extLst>
+          </p:nvPr>
+        </p:nvCxnSpPr>
+        <p:spPr>
+          <a:xfrm>
+            <a:off x="0" y="6128413"/>
+            <a:ext cx="12192000" cy="0"/>
+          </a:xfrm>
+          <a:prstGeom prst="line">
+            <a:avLst/>
+          </a:prstGeom>
+          <a:ln w="12700">
+            <a:solidFill>
+              <a:srgbClr val="000001">
+                <a:alpha val="20000"/>
+              </a:srgbClr>
+            </a:solidFill>
+          </a:ln>
+        </p:spPr>
+        <p:style>
+          <a:lnRef idx="1">
+            <a:schemeClr val="accent1"/>
+          </a:lnRef>
+          <a:fillRef idx="0">
+            <a:schemeClr val="accent1"/>
+          </a:fillRef>
+          <a:effectRef idx="0">
+            <a:schemeClr val="accent1"/>
+          </a:effectRef>
+          <a:fontRef idx="minor">
+            <a:schemeClr val="tx1"/>
+          </a:fontRef>
+        </p:style>
+      </p:cxnSp>
+    </p:spTree>
+    <p:extLst>
+      <p:ext uri="{BB962C8B-B14F-4D97-AF65-F5344CB8AC3E}">
+        <p14:creationId xmlns:p14="http://schemas.microsoft.com/office/powerpoint/2010/main" val="3817290165"/>
+      </p:ext>
+    </p:extLst>
+  </p:cSld>
+  <p:clrMapOvr>
+    <a:masterClrMapping/>
+  </p:clrMapOvr>
+</p:sld>
+</file>
+
+<file path=ppt/slides/slide17.xml><?xml version="1.0" encoding="utf-8"?>
+<p:sld xmlns:a="http://schemas.openxmlformats.org/drawingml/2006/main" xmlns:r="http://schemas.openxmlformats.org/officeDocument/2006/relationships" xmlns:p="http://schemas.openxmlformats.org/presentationml/2006/main">
+  <p:cSld>
+    <p:bg>
+      <p:bgPr>
+        <a:gradFill rotWithShape="1">
+          <a:gsLst>
+            <a:gs pos="0">
+              <a:schemeClr val="bg2">
+                <a:tint val="94000"/>
+                <a:satMod val="80000"/>
+                <a:lumMod val="106000"/>
+              </a:schemeClr>
+            </a:gs>
+            <a:gs pos="100000">
+              <a:schemeClr val="bg2">
+                <a:shade val="80000"/>
+              </a:schemeClr>
+            </a:gs>
+          </a:gsLst>
+          <a:path path="circle">
+            <a:fillToRect l="43000" r="43000" b="100000"/>
+          </a:path>
+        </a:gradFill>
+        <a:effectLst/>
+      </p:bgPr>
+    </p:bg>
+    <p:spTree>
+      <p:nvGrpSpPr>
+        <p:cNvPr id="1" name=""/>
+        <p:cNvGrpSpPr/>
+        <p:nvPr/>
+      </p:nvGrpSpPr>
+      <p:grpSpPr>
+        <a:xfrm>
+          <a:off x="0" y="0"/>
+          <a:ext cx="0" cy="0"/>
+          <a:chOff x="0" y="0"/>
+          <a:chExt cx="0" cy="0"/>
+        </a:xfrm>
+      </p:grpSpPr>
+      <p:sp>
+        <p:nvSpPr>
+          <p:cNvPr id="33" name="Rectangle 32">
+            <a:extLst>
+              <a:ext uri="{FF2B5EF4-FFF2-40B4-BE49-F238E27FC236}">
+                <a16:creationId xmlns:a16="http://schemas.microsoft.com/office/drawing/2014/main" id="{EEA869E1-F851-4A52-92F5-77E592B76A5B}"/>
+              </a:ext>
+              <a:ext uri="{C183D7F6-B498-43B3-948B-1728B52AA6E4}">
+                <adec:decorative xmlns:adec="http://schemas.microsoft.com/office/drawing/2017/decorative" val="1"/>
+              </a:ext>
+            </a:extLst>
+          </p:cNvPr>
+          <p:cNvSpPr>
+            <a:spLocks noGrp="1" noRot="1" noChangeAspect="1" noMove="1" noResize="1" noEditPoints="1" noAdjustHandles="1" noChangeArrowheads="1" noChangeShapeType="1" noTextEdit="1"/>
+          </p:cNvSpPr>
+          <p:nvPr>
+            <p:extLst>
+              <p:ext uri="{386F3935-93C4-4BCD-93E2-E3B085C9AB24}">
+                <p16:designElem xmlns:p16="http://schemas.microsoft.com/office/powerpoint/2015/main" val="1"/>
+              </p:ext>
+            </p:extLst>
+          </p:nvPr>
+        </p:nvSpPr>
+        <p:spPr>
+          <a:xfrm>
+            <a:off x="0" y="2019476"/>
+            <a:ext cx="12192000" cy="4105941"/>
+          </a:xfrm>
+          <a:prstGeom prst="rect">
+            <a:avLst/>
+          </a:prstGeom>
+          <a:gradFill flip="none" rotWithShape="1">
+            <a:gsLst>
+              <a:gs pos="0">
+                <a:schemeClr val="bg2">
+                  <a:alpha val="0"/>
+                </a:schemeClr>
+              </a:gs>
+              <a:gs pos="100000">
+                <a:schemeClr val="bg2"/>
+              </a:gs>
+            </a:gsLst>
+            <a:lin ang="5400000" scaled="0"/>
+            <a:tileRect/>
+          </a:gradFill>
+          <a:ln>
+            <a:noFill/>
+          </a:ln>
+        </p:spPr>
+        <p:style>
+          <a:lnRef idx="2">
+            <a:schemeClr val="accent1">
+              <a:shade val="50000"/>
+            </a:schemeClr>
+          </a:lnRef>
+          <a:fillRef idx="1">
+            <a:schemeClr val="accent1"/>
+          </a:fillRef>
+          <a:effectRef idx="0">
+            <a:schemeClr val="accent1"/>
+          </a:effectRef>
+          <a:fontRef idx="minor">
+            <a:schemeClr val="lt1"/>
+          </a:fontRef>
+        </p:style>
+        <p:txBody>
+          <a:bodyPr/>
+          <a:lstStyle/>
+          <a:p>
+            <a:endParaRPr lang="en-US"/>
+          </a:p>
+        </p:txBody>
+      </p:sp>
+      <p:pic>
+        <p:nvPicPr>
+          <p:cNvPr id="35" name="Picture 34">
+            <a:extLst>
+              <a:ext uri="{FF2B5EF4-FFF2-40B4-BE49-F238E27FC236}">
+                <a16:creationId xmlns:a16="http://schemas.microsoft.com/office/drawing/2014/main" id="{B083AD55-8296-44BD-8E14-DD2DDBC351B0}"/>
+              </a:ext>
+              <a:ext uri="{C183D7F6-B498-43B3-948B-1728B52AA6E4}">
+                <adec:decorative xmlns:adec="http://schemas.microsoft.com/office/drawing/2017/decorative" val="1"/>
+              </a:ext>
+            </a:extLst>
+          </p:cNvPr>
+          <p:cNvPicPr>
+            <a:picLocks noGrp="1" noRot="1" noChangeAspect="1" noMove="1" noResize="1" noEditPoints="1" noAdjustHandles="1" noChangeArrowheads="1" noChangeShapeType="1" noCrop="1"/>
+          </p:cNvPicPr>
+          <p:nvPr>
+            <p:extLst>
+              <p:ext uri="{386F3935-93C4-4BCD-93E2-E3B085C9AB24}">
+                <p16:designElem xmlns:p16="http://schemas.microsoft.com/office/powerpoint/2015/main" val="1"/>
+              </p:ext>
+            </p:extLst>
+          </p:nvPr>
+        </p:nvPicPr>
+        <p:blipFill rotWithShape="1">
+          <a:blip r:embed="rId2">
+            <a:extLst>
+              <a:ext uri="{28A0092B-C50C-407E-A947-70E740481C1C}">
+                <a14:useLocalDpi xmlns:a14="http://schemas.microsoft.com/office/drawing/2010/main" val="0"/>
+              </a:ext>
+            </a:extLst>
+          </a:blip>
+          <a:srcRect t="1538" b="-1538"/>
+          <a:stretch/>
+        </p:blipFill>
+        <p:spPr bwMode="black">
+          <a:xfrm>
+            <a:off x="0" y="6126480"/>
+            <a:ext cx="12192000" cy="742950"/>
+          </a:xfrm>
+          <a:prstGeom prst="rect">
+            <a:avLst/>
+          </a:prstGeom>
+        </p:spPr>
+      </p:pic>
+      <p:cxnSp>
+        <p:nvCxnSpPr>
+          <p:cNvPr id="37" name="Straight Connector 36">
+            <a:extLst>
+              <a:ext uri="{FF2B5EF4-FFF2-40B4-BE49-F238E27FC236}">
+                <a16:creationId xmlns:a16="http://schemas.microsoft.com/office/drawing/2014/main" id="{2BF46B26-15FC-4C5A-94FA-AE9ED64B5C20}"/>
+              </a:ext>
+              <a:ext uri="{C183D7F6-B498-43B3-948B-1728B52AA6E4}">
+                <adec:decorative xmlns:adec="http://schemas.microsoft.com/office/drawing/2017/decorative" val="1"/>
+              </a:ext>
+            </a:extLst>
+          </p:cNvPr>
+          <p:cNvCxnSpPr>
+            <a:cxnSpLocks noGrp="1" noRot="1" noChangeAspect="1" noMove="1" noResize="1" noEditPoints="1" noAdjustHandles="1" noChangeArrowheads="1" noChangeShapeType="1"/>
+          </p:cNvCxnSpPr>
+          <p:nvPr>
+            <p:extLst>
+              <p:ext uri="{386F3935-93C4-4BCD-93E2-E3B085C9AB24}">
+                <p16:designElem xmlns:p16="http://schemas.microsoft.com/office/powerpoint/2015/main" val="1"/>
+              </p:ext>
+            </p:extLst>
+          </p:nvPr>
+        </p:nvCxnSpPr>
+        <p:spPr>
+          <a:xfrm>
+            <a:off x="0" y="6128413"/>
+            <a:ext cx="12192000" cy="0"/>
+          </a:xfrm>
+          <a:prstGeom prst="line">
+            <a:avLst/>
+          </a:prstGeom>
+          <a:ln w="12700">
+            <a:solidFill>
+              <a:srgbClr val="000001">
+                <a:alpha val="20000"/>
+              </a:srgbClr>
+            </a:solidFill>
+          </a:ln>
+        </p:spPr>
+        <p:style>
+          <a:lnRef idx="1">
+            <a:schemeClr val="accent1"/>
+          </a:lnRef>
+          <a:fillRef idx="0">
+            <a:schemeClr val="accent1"/>
+          </a:fillRef>
+          <a:effectRef idx="0">
+            <a:schemeClr val="accent1"/>
+          </a:effectRef>
+          <a:fontRef idx="minor">
+            <a:schemeClr val="tx1"/>
+          </a:fontRef>
+        </p:style>
+      </p:cxnSp>
+      <p:cxnSp>
+        <p:nvCxnSpPr>
+          <p:cNvPr id="39" name="Straight Connector 38">
+            <a:extLst>
+              <a:ext uri="{FF2B5EF4-FFF2-40B4-BE49-F238E27FC236}">
+                <a16:creationId xmlns:a16="http://schemas.microsoft.com/office/drawing/2014/main" id="{912F6065-5345-44BD-B66E-5487CCD7A9B9}"/>
+              </a:ext>
+              <a:ext uri="{C183D7F6-B498-43B3-948B-1728B52AA6E4}">
+                <adec:decorative xmlns:adec="http://schemas.microsoft.com/office/drawing/2017/decorative" val="1"/>
+              </a:ext>
+            </a:extLst>
+          </p:cNvPr>
+          <p:cNvCxnSpPr>
+            <a:cxnSpLocks noGrp="1" noRot="1" noChangeAspect="1" noMove="1" noResize="1" noEditPoints="1" noAdjustHandles="1" noChangeArrowheads="1" noChangeShapeType="1"/>
+          </p:cNvCxnSpPr>
+          <p:nvPr>
+            <p:extLst>
+              <p:ext uri="{386F3935-93C4-4BCD-93E2-E3B085C9AB24}">
+                <p16:designElem xmlns:p16="http://schemas.microsoft.com/office/powerpoint/2015/main" val="1"/>
+              </p:ext>
+            </p:extLst>
+          </p:nvPr>
+        </p:nvCxnSpPr>
+        <p:spPr>
+          <a:xfrm>
+            <a:off x="2417780" y="3528542"/>
+            <a:ext cx="8637072" cy="0"/>
+          </a:xfrm>
+          <a:prstGeom prst="line">
+            <a:avLst/>
+          </a:prstGeom>
+          <a:ln w="31750"/>
+        </p:spPr>
+        <p:style>
+          <a:lnRef idx="3">
+            <a:schemeClr val="accent1"/>
+          </a:lnRef>
+          <a:fillRef idx="0">
+            <a:schemeClr val="accent1"/>
+          </a:fillRef>
+          <a:effectRef idx="2">
+            <a:schemeClr val="accent1"/>
+          </a:effectRef>
+          <a:fontRef idx="minor">
+            <a:schemeClr val="tx1"/>
+          </a:fontRef>
+        </p:style>
+      </p:cxnSp>
+      <p:sp useBgFill="1">
+        <p:nvSpPr>
+          <p:cNvPr id="41" name="Rectangle 40">
+            <a:extLst>
+              <a:ext uri="{FF2B5EF4-FFF2-40B4-BE49-F238E27FC236}">
+                <a16:creationId xmlns:a16="http://schemas.microsoft.com/office/drawing/2014/main" id="{E7ABCFA2-55B0-438C-A39A-637FFC6246E8}"/>
+              </a:ext>
+              <a:ext uri="{C183D7F6-B498-43B3-948B-1728B52AA6E4}">
+                <adec:decorative xmlns:adec="http://schemas.microsoft.com/office/drawing/2017/decorative" val="1"/>
+              </a:ext>
+            </a:extLst>
+          </p:cNvPr>
+          <p:cNvSpPr>
+            <a:spLocks noGrp="1" noRot="1" noChangeAspect="1" noMove="1" noResize="1" noEditPoints="1" noAdjustHandles="1" noChangeArrowheads="1" noChangeShapeType="1" noTextEdit="1"/>
+          </p:cNvSpPr>
+          <p:nvPr>
+            <p:extLst>
+              <p:ext uri="{386F3935-93C4-4BCD-93E2-E3B085C9AB24}">
+                <p16:designElem xmlns:p16="http://schemas.microsoft.com/office/powerpoint/2015/main" val="1"/>
+              </p:ext>
+            </p:extLst>
+          </p:nvPr>
+        </p:nvSpPr>
+        <p:spPr>
+          <a:xfrm>
+            <a:off x="2" y="0"/>
+            <a:ext cx="12191695" cy="6858000"/>
+          </a:xfrm>
+          <a:prstGeom prst="rect">
+            <a:avLst/>
+          </a:prstGeom>
+          <a:ln>
+            <a:noFill/>
+          </a:ln>
+        </p:spPr>
+        <p:style>
+          <a:lnRef idx="2">
+            <a:schemeClr val="accent1">
+              <a:shade val="50000"/>
+            </a:schemeClr>
+          </a:lnRef>
+          <a:fillRef idx="1">
+            <a:schemeClr val="accent1"/>
+          </a:fillRef>
+          <a:effectRef idx="0">
+            <a:schemeClr val="accent1"/>
+          </a:effectRef>
+          <a:fontRef idx="minor">
+            <a:schemeClr val="lt1"/>
+          </a:fontRef>
+        </p:style>
+        <p:txBody>
+          <a:bodyPr rtlCol="0" anchor="ctr"/>
+          <a:lstStyle/>
+          <a:p>
+            <a:pPr algn="ctr"/>
+            <a:endParaRPr lang="en-US"/>
+          </a:p>
+        </p:txBody>
+      </p:sp>
+      <p:sp>
+        <p:nvSpPr>
+          <p:cNvPr id="43" name="Rectangle 42">
+            <a:extLst>
+              <a:ext uri="{FF2B5EF4-FFF2-40B4-BE49-F238E27FC236}">
+                <a16:creationId xmlns:a16="http://schemas.microsoft.com/office/drawing/2014/main" id="{1BD2C934-710E-4E0E-9ED4-03F07E019205}"/>
+              </a:ext>
+              <a:ext uri="{C183D7F6-B498-43B3-948B-1728B52AA6E4}">
+                <adec:decorative xmlns:adec="http://schemas.microsoft.com/office/drawing/2017/decorative" val="1"/>
+              </a:ext>
+            </a:extLst>
+          </p:cNvPr>
+          <p:cNvSpPr>
+            <a:spLocks noGrp="1" noRot="1" noChangeAspect="1" noMove="1" noResize="1" noEditPoints="1" noAdjustHandles="1" noChangeArrowheads="1" noChangeShapeType="1" noTextEdit="1"/>
+          </p:cNvSpPr>
+          <p:nvPr>
+            <p:extLst>
+              <p:ext uri="{386F3935-93C4-4BCD-93E2-E3B085C9AB24}">
+                <p16:designElem xmlns:p16="http://schemas.microsoft.com/office/powerpoint/2015/main" val="1"/>
+              </p:ext>
+            </p:extLst>
+          </p:nvPr>
+        </p:nvSpPr>
+        <p:spPr>
+          <a:xfrm>
+            <a:off x="0" y="2019476"/>
+            <a:ext cx="12192000" cy="4105941"/>
+          </a:xfrm>
+          <a:prstGeom prst="rect">
+            <a:avLst/>
+          </a:prstGeom>
+          <a:gradFill flip="none" rotWithShape="1">
+            <a:gsLst>
+              <a:gs pos="0">
+                <a:schemeClr val="bg2">
+                  <a:alpha val="0"/>
+                </a:schemeClr>
+              </a:gs>
+              <a:gs pos="100000">
+                <a:schemeClr val="bg2"/>
+              </a:gs>
+            </a:gsLst>
+            <a:lin ang="5400000" scaled="0"/>
+            <a:tileRect/>
+          </a:gradFill>
+          <a:ln>
+            <a:noFill/>
+          </a:ln>
+        </p:spPr>
+        <p:style>
+          <a:lnRef idx="2">
+            <a:schemeClr val="accent1">
+              <a:shade val="50000"/>
+            </a:schemeClr>
+          </a:lnRef>
+          <a:fillRef idx="1">
+            <a:schemeClr val="accent1"/>
+          </a:fillRef>
+          <a:effectRef idx="0">
+            <a:schemeClr val="accent1"/>
+          </a:effectRef>
+          <a:fontRef idx="minor">
+            <a:schemeClr val="lt1"/>
+          </a:fontRef>
+        </p:style>
+        <p:txBody>
+          <a:bodyPr rtlCol="0" anchor="ctr"/>
+          <a:lstStyle/>
+          <a:p>
+            <a:pPr lvl="0" algn="ctr"/>
+            <a:endParaRPr lang="en-US"/>
+          </a:p>
+        </p:txBody>
+      </p:sp>
+      <p:sp>
+        <p:nvSpPr>
+          <p:cNvPr id="2" name="Title 1">
+            <a:extLst>
+              <a:ext uri="{FF2B5EF4-FFF2-40B4-BE49-F238E27FC236}">
+                <a16:creationId xmlns:a16="http://schemas.microsoft.com/office/drawing/2014/main" id="{BAF48F60-BA92-C874-30CC-5ED58A820747}"/>
+              </a:ext>
+            </a:extLst>
+          </p:cNvPr>
+          <p:cNvSpPr>
+            <a:spLocks noGrp="1"/>
+          </p:cNvSpPr>
+          <p:nvPr>
+            <p:ph type="title"/>
+          </p:nvPr>
+        </p:nvSpPr>
+        <p:spPr>
+          <a:xfrm>
+            <a:off x="485695" y="1474969"/>
+            <a:ext cx="3026558" cy="1868760"/>
+          </a:xfrm>
+        </p:spPr>
+        <p:txBody>
+          <a:bodyPr vert="horz" lIns="91440" tIns="45720" rIns="91440" bIns="0" rtlCol="0" anchor="b">
+            <a:normAutofit/>
+          </a:bodyPr>
+          <a:lstStyle/>
+          <a:p>
+            <a:r>
+              <a:rPr lang="en-US" sz="3600" dirty="0"/>
+              <a:t>Vlajk Sándor - </a:t>
+            </a:r>
+            <a:r>
+              <a:rPr lang="en-US" sz="3600" dirty="0" err="1"/>
+              <a:t>Tesztelés</a:t>
+            </a:r>
+            <a:endParaRPr lang="en-US" sz="3600" dirty="0"/>
+          </a:p>
+        </p:txBody>
+      </p:sp>
+      <p:cxnSp>
+        <p:nvCxnSpPr>
+          <p:cNvPr id="45" name="Straight Connector 44">
+            <a:extLst>
+              <a:ext uri="{FF2B5EF4-FFF2-40B4-BE49-F238E27FC236}">
+                <a16:creationId xmlns:a16="http://schemas.microsoft.com/office/drawing/2014/main" id="{0AD0F4F3-8F5C-421F-9FC1-DB3ED0BF61DF}"/>
+              </a:ext>
+              <a:ext uri="{C183D7F6-B498-43B3-948B-1728B52AA6E4}">
+                <adec:decorative xmlns:adec="http://schemas.microsoft.com/office/drawing/2017/decorative" val="1"/>
+              </a:ext>
+            </a:extLst>
+          </p:cNvPr>
+          <p:cNvCxnSpPr>
+            <a:cxnSpLocks noGrp="1" noRot="1" noChangeAspect="1" noMove="1" noResize="1" noEditPoints="1" noAdjustHandles="1" noChangeArrowheads="1" noChangeShapeType="1"/>
+          </p:cNvCxnSpPr>
+          <p:nvPr>
+            <p:extLst>
+              <p:ext uri="{386F3935-93C4-4BCD-93E2-E3B085C9AB24}">
+                <p16:designElem xmlns:p16="http://schemas.microsoft.com/office/powerpoint/2015/main" val="1"/>
+              </p:ext>
+            </p:extLst>
+          </p:nvPr>
+        </p:nvCxnSpPr>
+        <p:spPr>
+          <a:xfrm>
+            <a:off x="484009" y="3526496"/>
+            <a:ext cx="3023617" cy="0"/>
+          </a:xfrm>
+          <a:prstGeom prst="line">
+            <a:avLst/>
+          </a:prstGeom>
+          <a:ln w="31750"/>
+        </p:spPr>
+        <p:style>
+          <a:lnRef idx="3">
+            <a:schemeClr val="accent1"/>
+          </a:lnRef>
+          <a:fillRef idx="0">
+            <a:schemeClr val="accent1"/>
+          </a:fillRef>
+          <a:effectRef idx="2">
+            <a:schemeClr val="accent1"/>
+          </a:effectRef>
+          <a:fontRef idx="minor">
+            <a:schemeClr val="tx1"/>
+          </a:fontRef>
+        </p:style>
+      </p:cxnSp>
+      <p:pic>
+        <p:nvPicPr>
+          <p:cNvPr id="7" name="Picture 6">
+            <a:extLst>
+              <a:ext uri="{FF2B5EF4-FFF2-40B4-BE49-F238E27FC236}">
+                <a16:creationId xmlns:a16="http://schemas.microsoft.com/office/drawing/2014/main" id="{234C8A63-DED3-546C-6BEE-CEFFDC8E281B}"/>
+              </a:ext>
+            </a:extLst>
+          </p:cNvPr>
+          <p:cNvPicPr>
+            <a:picLocks noChangeAspect="1"/>
+          </p:cNvPicPr>
+          <p:nvPr/>
+        </p:nvPicPr>
+        <p:blipFill>
+          <a:blip r:embed="rId3"/>
+          <a:stretch>
+            <a:fillRect/>
+          </a:stretch>
+        </p:blipFill>
+        <p:spPr>
+          <a:xfrm>
+            <a:off x="4528985" y="3109744"/>
+            <a:ext cx="7094289" cy="2837715"/>
+          </a:xfrm>
+          <a:prstGeom prst="rect">
+            <a:avLst/>
+          </a:prstGeom>
+        </p:spPr>
+      </p:pic>
+      <p:pic>
+        <p:nvPicPr>
+          <p:cNvPr id="5" name="Picture 4">
+            <a:extLst>
+              <a:ext uri="{FF2B5EF4-FFF2-40B4-BE49-F238E27FC236}">
+                <a16:creationId xmlns:a16="http://schemas.microsoft.com/office/drawing/2014/main" id="{468886C1-6620-95E9-B1BE-EABD49FF3267}"/>
+              </a:ext>
+            </a:extLst>
+          </p:cNvPr>
+          <p:cNvPicPr>
+            <a:picLocks noChangeAspect="1"/>
+          </p:cNvPicPr>
+          <p:nvPr/>
+        </p:nvPicPr>
+        <p:blipFill>
+          <a:blip r:embed="rId4"/>
+          <a:stretch>
+            <a:fillRect/>
+          </a:stretch>
+        </p:blipFill>
+        <p:spPr>
+          <a:xfrm>
+            <a:off x="3077701" y="159389"/>
+            <a:ext cx="7560295" cy="2608300"/>
+          </a:xfrm>
+          <a:prstGeom prst="rect">
+            <a:avLst/>
+          </a:prstGeom>
+        </p:spPr>
+      </p:pic>
+      <p:pic>
+        <p:nvPicPr>
+          <p:cNvPr id="47" name="Picture 46">
+            <a:extLst>
+              <a:ext uri="{FF2B5EF4-FFF2-40B4-BE49-F238E27FC236}">
+                <a16:creationId xmlns:a16="http://schemas.microsoft.com/office/drawing/2014/main" id="{B0A40572-62E5-460B-AD24-B6628527ACB1}"/>
+              </a:ext>
+              <a:ext uri="{C183D7F6-B498-43B3-948B-1728B52AA6E4}">
+                <adec:decorative xmlns:adec="http://schemas.microsoft.com/office/drawing/2017/decorative" val="1"/>
+              </a:ext>
+            </a:extLst>
+          </p:cNvPr>
+          <p:cNvPicPr>
+            <a:picLocks noGrp="1" noRot="1" noChangeAspect="1" noMove="1" noResize="1" noEditPoints="1" noAdjustHandles="1" noChangeArrowheads="1" noChangeShapeType="1" noCrop="1"/>
+          </p:cNvPicPr>
+          <p:nvPr>
+            <p:extLst>
+              <p:ext uri="{386F3935-93C4-4BCD-93E2-E3B085C9AB24}">
+                <p16:designElem xmlns:p16="http://schemas.microsoft.com/office/powerpoint/2015/main" val="1"/>
+              </p:ext>
+            </p:extLst>
+          </p:nvPr>
+        </p:nvPicPr>
+        <p:blipFill rotWithShape="1">
+          <a:blip r:embed="rId2">
+            <a:extLst>
+              <a:ext uri="{28A0092B-C50C-407E-A947-70E740481C1C}">
+                <a14:useLocalDpi xmlns:a14="http://schemas.microsoft.com/office/drawing/2010/main" val="0"/>
+              </a:ext>
+            </a:extLst>
+          </a:blip>
+          <a:srcRect t="1538" b="-1538"/>
+          <a:stretch/>
+        </p:blipFill>
+        <p:spPr bwMode="black">
+          <a:xfrm>
+            <a:off x="0" y="6126480"/>
+            <a:ext cx="12192000" cy="742950"/>
+          </a:xfrm>
+          <a:prstGeom prst="rect">
+            <a:avLst/>
+          </a:prstGeom>
+        </p:spPr>
+      </p:pic>
+      <p:cxnSp>
+        <p:nvCxnSpPr>
+          <p:cNvPr id="49" name="Straight Connector 48">
+            <a:extLst>
+              <a:ext uri="{FF2B5EF4-FFF2-40B4-BE49-F238E27FC236}">
+                <a16:creationId xmlns:a16="http://schemas.microsoft.com/office/drawing/2014/main" id="{F1D872D4-D7E5-4CD8-9DAC-2BC612F08E69}"/>
+              </a:ext>
+              <a:ext uri="{C183D7F6-B498-43B3-948B-1728B52AA6E4}">
+                <adec:decorative xmlns:adec="http://schemas.microsoft.com/office/drawing/2017/decorative" val="1"/>
+              </a:ext>
+            </a:extLst>
+          </p:cNvPr>
+          <p:cNvCxnSpPr>
+            <a:cxnSpLocks noGrp="1" noRot="1" noChangeAspect="1" noMove="1" noResize="1" noEditPoints="1" noAdjustHandles="1" noChangeArrowheads="1" noChangeShapeType="1"/>
+          </p:cNvCxnSpPr>
+          <p:nvPr>
+            <p:extLst>
+              <p:ext uri="{386F3935-93C4-4BCD-93E2-E3B085C9AB24}">
+                <p16:designElem xmlns:p16="http://schemas.microsoft.com/office/powerpoint/2015/main" val="1"/>
+              </p:ext>
+            </p:extLst>
+          </p:nvPr>
+        </p:nvCxnSpPr>
+        <p:spPr>
+          <a:xfrm>
+            <a:off x="0" y="6128413"/>
+            <a:ext cx="12192000" cy="0"/>
+          </a:xfrm>
+          <a:prstGeom prst="line">
+            <a:avLst/>
+          </a:prstGeom>
+          <a:ln w="12700">
+            <a:solidFill>
+              <a:srgbClr val="000001">
+                <a:alpha val="20000"/>
+              </a:srgbClr>
+            </a:solidFill>
+          </a:ln>
+        </p:spPr>
+        <p:style>
+          <a:lnRef idx="1">
+            <a:schemeClr val="accent1"/>
+          </a:lnRef>
+          <a:fillRef idx="0">
+            <a:schemeClr val="accent1"/>
+          </a:fillRef>
+          <a:effectRef idx="0">
+            <a:schemeClr val="accent1"/>
+          </a:effectRef>
+          <a:fontRef idx="minor">
+            <a:schemeClr val="tx1"/>
+          </a:fontRef>
+        </p:style>
+      </p:cxnSp>
+    </p:spTree>
+    <p:extLst>
+      <p:ext uri="{BB962C8B-B14F-4D97-AF65-F5344CB8AC3E}">
+        <p14:creationId xmlns:p14="http://schemas.microsoft.com/office/powerpoint/2010/main" val="858810309"/>
+      </p:ext>
+    </p:extLst>
+  </p:cSld>
+  <p:clrMapOvr>
+    <a:masterClrMapping/>
+  </p:clrMapOvr>
 </p:sld>
 </file>
 

--- a/Kanban webapp - Buborék együttes.pptx
+++ b/Kanban webapp - Buborék együttes.pptx
@@ -5,10 +5,10 @@
     <p:sldMasterId id="2147483672" r:id="rId1"/>
   </p:sldMasterIdLst>
   <p:notesMasterIdLst>
-    <p:notesMasterId r:id="rId19"/>
+    <p:notesMasterId r:id="rId26"/>
   </p:notesMasterIdLst>
   <p:handoutMasterIdLst>
-    <p:handoutMasterId r:id="rId20"/>
+    <p:handoutMasterId r:id="rId27"/>
   </p:handoutMasterIdLst>
   <p:sldIdLst>
     <p:sldId id="258" r:id="rId2"/>
@@ -28,6 +28,13 @@
     <p:sldId id="273" r:id="rId16"/>
     <p:sldId id="274" r:id="rId17"/>
     <p:sldId id="275" r:id="rId18"/>
+    <p:sldId id="277" r:id="rId19"/>
+    <p:sldId id="278" r:id="rId20"/>
+    <p:sldId id="279" r:id="rId21"/>
+    <p:sldId id="280" r:id="rId22"/>
+    <p:sldId id="281" r:id="rId23"/>
+    <p:sldId id="282" r:id="rId24"/>
+    <p:sldId id="283" r:id="rId25"/>
   </p:sldIdLst>
   <p:sldSz cx="12192000" cy="6858000"/>
   <p:notesSz cx="6858000" cy="9144000"/>
@@ -128,7 +135,7 @@
   </p:defaultTextStyle>
   <p:extLst>
     <p:ext uri="{EFAFB233-063F-42B5-8137-9DF3F51BA10A}">
-      <p15:sldGuideLst xmlns:p15="http://schemas.microsoft.com/office/powerpoint/2012/main"/>
+      <p15:sldGuideLst xmlns:p15="http://schemas.microsoft.com/office/powerpoint/2012/main" xmlns=""/>
     </p:ext>
   </p:extLst>
 </p:presentation>
@@ -161,7 +168,7 @@
           <p:cNvPr id="2" name="Élőfej helye 1">
             <a:extLst>
               <a:ext uri="{FF2B5EF4-FFF2-40B4-BE49-F238E27FC236}">
-                <a16:creationId xmlns:a16="http://schemas.microsoft.com/office/drawing/2014/main" id="{8B3139B0-081C-FE30-0B39-CA3232006985}"/>
+                <a16:creationId xmlns:a16="http://schemas.microsoft.com/office/drawing/2014/main" xmlns="" id="{8B3139B0-081C-FE30-0B39-CA3232006985}"/>
               </a:ext>
             </a:extLst>
           </p:cNvPr>
@@ -198,7 +205,7 @@
           <p:cNvPr id="3" name="Dátum helye 2">
             <a:extLst>
               <a:ext uri="{FF2B5EF4-FFF2-40B4-BE49-F238E27FC236}">
-                <a16:creationId xmlns:a16="http://schemas.microsoft.com/office/drawing/2014/main" id="{2B3B78BF-44EC-6563-0DAB-79B7460CA83E}"/>
+                <a16:creationId xmlns:a16="http://schemas.microsoft.com/office/drawing/2014/main" xmlns="" id="{2B3B78BF-44EC-6563-0DAB-79B7460CA83E}"/>
               </a:ext>
             </a:extLst>
           </p:cNvPr>
@@ -228,6 +235,7 @@
           <a:p>
             <a:fld id="{795EECD7-D4C7-4FE3-AB70-00E199DD6761}" type="datetimeFigureOut">
               <a:rPr lang="hu-HU" smtClean="0"/>
+              <a:pPr/>
               <a:t>2025. 11. 15.</a:t>
             </a:fld>
             <a:endParaRPr lang="hu-HU"/>
@@ -239,7 +247,7 @@
           <p:cNvPr id="4" name="Élőláb helye 3">
             <a:extLst>
               <a:ext uri="{FF2B5EF4-FFF2-40B4-BE49-F238E27FC236}">
-                <a16:creationId xmlns:a16="http://schemas.microsoft.com/office/drawing/2014/main" id="{E3EC39D6-A0F8-45E6-7791-5C50A0DBB470}"/>
+                <a16:creationId xmlns:a16="http://schemas.microsoft.com/office/drawing/2014/main" xmlns="" id="{E3EC39D6-A0F8-45E6-7791-5C50A0DBB470}"/>
               </a:ext>
             </a:extLst>
           </p:cNvPr>
@@ -276,7 +284,7 @@
           <p:cNvPr id="5" name="Dia számának helye 4">
             <a:extLst>
               <a:ext uri="{FF2B5EF4-FFF2-40B4-BE49-F238E27FC236}">
-                <a16:creationId xmlns:a16="http://schemas.microsoft.com/office/drawing/2014/main" id="{2F2DDB24-4697-57F6-2A56-F247C6312B67}"/>
+                <a16:creationId xmlns:a16="http://schemas.microsoft.com/office/drawing/2014/main" xmlns="" id="{2F2DDB24-4697-57F6-2A56-F247C6312B67}"/>
               </a:ext>
             </a:extLst>
           </p:cNvPr>
@@ -306,6 +314,7 @@
           <a:p>
             <a:fld id="{D404402C-C6F0-495F-ADE6-07855EA9D352}" type="slidenum">
               <a:rPr lang="hu-HU" smtClean="0"/>
+              <a:pPr/>
               <a:t>‹#›</a:t>
             </a:fld>
             <a:endParaRPr lang="hu-HU"/>
@@ -315,7 +324,7 @@
     </p:spTree>
     <p:extLst>
       <p:ext uri="{BB962C8B-B14F-4D97-AF65-F5344CB8AC3E}">
-        <p14:creationId xmlns:p14="http://schemas.microsoft.com/office/powerpoint/2010/main" val="3830844958"/>
+        <p14:creationId xmlns:p14="http://schemas.microsoft.com/office/powerpoint/2010/main" xmlns="" val="3830844958"/>
       </p:ext>
     </p:extLst>
   </p:cSld>
@@ -406,6 +415,7 @@
           <a:p>
             <a:fld id="{2D5DABCF-F2FF-4310-8608-C10C325E963C}" type="datetimeFigureOut">
               <a:rPr lang="hu-HU" smtClean="0"/>
+              <a:pPr/>
               <a:t>2025. 11. 15.</a:t>
             </a:fld>
             <a:endParaRPr lang="hu-HU"/>
@@ -564,6 +574,7 @@
           <a:p>
             <a:fld id="{B01DC74D-9B6A-4707-A793-6FDBF6F7CCC6}" type="slidenum">
               <a:rPr lang="hu-HU" smtClean="0"/>
+              <a:pPr/>
               <a:t>‹#›</a:t>
             </a:fld>
             <a:endParaRPr lang="hu-HU"/>
@@ -573,7 +584,7 @@
     </p:spTree>
     <p:extLst>
       <p:ext uri="{BB962C8B-B14F-4D97-AF65-F5344CB8AC3E}">
-        <p14:creationId xmlns:p14="http://schemas.microsoft.com/office/powerpoint/2010/main" val="400803380"/>
+        <p14:creationId xmlns:p14="http://schemas.microsoft.com/office/powerpoint/2010/main" xmlns="" val="400803380"/>
       </p:ext>
     </p:extLst>
   </p:cSld>
@@ -739,6 +750,7 @@
           <a:p>
             <a:fld id="{B01DC74D-9B6A-4707-A793-6FDBF6F7CCC6}" type="slidenum">
               <a:rPr lang="hu-HU" smtClean="0"/>
+              <a:pPr/>
               <a:t>2</a:t>
             </a:fld>
             <a:endParaRPr lang="hu-HU"/>
@@ -748,7 +760,7 @@
     </p:spTree>
     <p:extLst>
       <p:ext uri="{BB962C8B-B14F-4D97-AF65-F5344CB8AC3E}">
-        <p14:creationId xmlns:p14="http://schemas.microsoft.com/office/powerpoint/2010/main" val="1144435710"/>
+        <p14:creationId xmlns:p14="http://schemas.microsoft.com/office/powerpoint/2010/main" xmlns="" val="1144435710"/>
       </p:ext>
     </p:extLst>
   </p:cSld>
@@ -897,6 +909,7 @@
           <a:p>
             <a:fld id="{67F45AC6-C491-4585-A584-9CE2AF7D5500}" type="datetime1">
               <a:rPr lang="en-US" smtClean="0"/>
+              <a:pPr/>
               <a:t>11/15/2025</a:t>
             </a:fld>
             <a:endParaRPr lang="en-US"/>
@@ -949,6 +962,7 @@
           <a:p>
             <a:fld id="{CC057153-B650-4DEB-B370-79DDCFDCE934}" type="slidenum">
               <a:rPr lang="en-US" smtClean="0"/>
+              <a:pPr/>
               <a:t>‹#›</a:t>
             </a:fld>
             <a:endParaRPr lang="en-US"/>
@@ -989,7 +1003,7 @@
     </p:spTree>
     <p:extLst>
       <p:ext uri="{BB962C8B-B14F-4D97-AF65-F5344CB8AC3E}">
-        <p14:creationId xmlns:p14="http://schemas.microsoft.com/office/powerpoint/2010/main" val="1845892265"/>
+        <p14:creationId xmlns:p14="http://schemas.microsoft.com/office/powerpoint/2010/main" xmlns="" val="1845892265"/>
       </p:ext>
     </p:extLst>
   </p:cSld>
@@ -1109,6 +1123,7 @@
           <a:p>
             <a:fld id="{67F45AC6-C491-4585-A584-9CE2AF7D5500}" type="datetime1">
               <a:rPr lang="en-US" smtClean="0"/>
+              <a:pPr/>
               <a:t>11/15/2025</a:t>
             </a:fld>
             <a:endParaRPr lang="en-US"/>
@@ -1151,6 +1166,7 @@
           <a:p>
             <a:fld id="{CC057153-B650-4DEB-B370-79DDCFDCE934}" type="slidenum">
               <a:rPr lang="en-US" smtClean="0"/>
+              <a:pPr/>
               <a:t>‹#›</a:t>
             </a:fld>
             <a:endParaRPr lang="en-US"/>
@@ -1191,7 +1207,7 @@
     </p:spTree>
     <p:extLst>
       <p:ext uri="{BB962C8B-B14F-4D97-AF65-F5344CB8AC3E}">
-        <p14:creationId xmlns:p14="http://schemas.microsoft.com/office/powerpoint/2010/main" val="91267506"/>
+        <p14:creationId xmlns:p14="http://schemas.microsoft.com/office/powerpoint/2010/main" xmlns="" val="91267506"/>
       </p:ext>
     </p:extLst>
   </p:cSld>
@@ -1325,6 +1341,7 @@
           <a:p>
             <a:fld id="{67F45AC6-C491-4585-A584-9CE2AF7D5500}" type="datetime1">
               <a:rPr lang="en-US" smtClean="0"/>
+              <a:pPr/>
               <a:t>11/15/2025</a:t>
             </a:fld>
             <a:endParaRPr lang="en-US"/>
@@ -1367,6 +1384,7 @@
           <a:p>
             <a:fld id="{CC057153-B650-4DEB-B370-79DDCFDCE934}" type="slidenum">
               <a:rPr lang="en-US" smtClean="0"/>
+              <a:pPr/>
               <a:t>‹#›</a:t>
             </a:fld>
             <a:endParaRPr lang="en-US"/>
@@ -1407,7 +1425,7 @@
     </p:spTree>
     <p:extLst>
       <p:ext uri="{BB962C8B-B14F-4D97-AF65-F5344CB8AC3E}">
-        <p14:creationId xmlns:p14="http://schemas.microsoft.com/office/powerpoint/2010/main" val="1192826027"/>
+        <p14:creationId xmlns:p14="http://schemas.microsoft.com/office/powerpoint/2010/main" xmlns="" val="1192826027"/>
       </p:ext>
     </p:extLst>
   </p:cSld>
@@ -1527,6 +1545,7 @@
           <a:p>
             <a:fld id="{67F45AC6-C491-4585-A584-9CE2AF7D5500}" type="datetime1">
               <a:rPr lang="en-US" smtClean="0"/>
+              <a:pPr/>
               <a:t>11/15/2025</a:t>
             </a:fld>
             <a:endParaRPr lang="en-US"/>
@@ -1569,6 +1588,7 @@
           <a:p>
             <a:fld id="{CC057153-B650-4DEB-B370-79DDCFDCE934}" type="slidenum">
               <a:rPr lang="en-US" smtClean="0"/>
+              <a:pPr/>
               <a:t>‹#›</a:t>
             </a:fld>
             <a:endParaRPr lang="en-US"/>
@@ -1609,7 +1629,7 @@
     </p:spTree>
     <p:extLst>
       <p:ext uri="{BB962C8B-B14F-4D97-AF65-F5344CB8AC3E}">
-        <p14:creationId xmlns:p14="http://schemas.microsoft.com/office/powerpoint/2010/main" val="2336284126"/>
+        <p14:creationId xmlns:p14="http://schemas.microsoft.com/office/powerpoint/2010/main" xmlns="" val="2336284126"/>
       </p:ext>
     </p:extLst>
   </p:cSld>
@@ -1807,6 +1827,7 @@
           <a:p>
             <a:fld id="{67F45AC6-C491-4585-A584-9CE2AF7D5500}" type="datetime1">
               <a:rPr lang="en-US" smtClean="0"/>
+              <a:pPr/>
               <a:t>11/15/2025</a:t>
             </a:fld>
             <a:endParaRPr lang="en-US"/>
@@ -1849,6 +1870,7 @@
           <a:p>
             <a:fld id="{CC057153-B650-4DEB-B370-79DDCFDCE934}" type="slidenum">
               <a:rPr lang="en-US" smtClean="0"/>
+              <a:pPr/>
               <a:t>‹#›</a:t>
             </a:fld>
             <a:endParaRPr lang="en-US"/>
@@ -1889,7 +1911,7 @@
     </p:spTree>
     <p:extLst>
       <p:ext uri="{BB962C8B-B14F-4D97-AF65-F5344CB8AC3E}">
-        <p14:creationId xmlns:p14="http://schemas.microsoft.com/office/powerpoint/2010/main" val="2864186830"/>
+        <p14:creationId xmlns:p14="http://schemas.microsoft.com/office/powerpoint/2010/main" xmlns="" val="2864186830"/>
       </p:ext>
     </p:extLst>
   </p:cSld>
@@ -2076,6 +2098,7 @@
           <a:p>
             <a:fld id="{67F45AC6-C491-4585-A584-9CE2AF7D5500}" type="datetime1">
               <a:rPr lang="en-US" smtClean="0"/>
+              <a:pPr/>
               <a:t>11/15/2025</a:t>
             </a:fld>
             <a:endParaRPr lang="en-US"/>
@@ -2118,6 +2141,7 @@
           <a:p>
             <a:fld id="{CC057153-B650-4DEB-B370-79DDCFDCE934}" type="slidenum">
               <a:rPr lang="en-US" smtClean="0"/>
+              <a:pPr/>
               <a:t>‹#›</a:t>
             </a:fld>
             <a:endParaRPr lang="en-US"/>
@@ -2158,7 +2182,7 @@
     </p:spTree>
     <p:extLst>
       <p:ext uri="{BB962C8B-B14F-4D97-AF65-F5344CB8AC3E}">
-        <p14:creationId xmlns:p14="http://schemas.microsoft.com/office/powerpoint/2010/main" val="700596866"/>
+        <p14:creationId xmlns:p14="http://schemas.microsoft.com/office/powerpoint/2010/main" xmlns="" val="700596866"/>
       </p:ext>
     </p:extLst>
   </p:cSld>
@@ -2493,6 +2517,7 @@
           <a:p>
             <a:fld id="{67F45AC6-C491-4585-A584-9CE2AF7D5500}" type="datetime1">
               <a:rPr lang="en-US" smtClean="0"/>
+              <a:pPr/>
               <a:t>11/15/2025</a:t>
             </a:fld>
             <a:endParaRPr lang="en-US"/>
@@ -2535,6 +2560,7 @@
           <a:p>
             <a:fld id="{CC057153-B650-4DEB-B370-79DDCFDCE934}" type="slidenum">
               <a:rPr lang="en-US" smtClean="0"/>
+              <a:pPr/>
               <a:t>‹#›</a:t>
             </a:fld>
             <a:endParaRPr lang="en-US"/>
@@ -2575,7 +2601,7 @@
     </p:spTree>
     <p:extLst>
       <p:ext uri="{BB962C8B-B14F-4D97-AF65-F5344CB8AC3E}">
-        <p14:creationId xmlns:p14="http://schemas.microsoft.com/office/powerpoint/2010/main" val="1860441236"/>
+        <p14:creationId xmlns:p14="http://schemas.microsoft.com/office/powerpoint/2010/main" xmlns="" val="1860441236"/>
       </p:ext>
     </p:extLst>
   </p:cSld>
@@ -2643,6 +2669,7 @@
           <a:p>
             <a:fld id="{67F45AC6-C491-4585-A584-9CE2AF7D5500}" type="datetime1">
               <a:rPr lang="en-US" smtClean="0"/>
+              <a:pPr/>
               <a:t>11/15/2025</a:t>
             </a:fld>
             <a:endParaRPr lang="en-US"/>
@@ -2685,6 +2712,7 @@
           <a:p>
             <a:fld id="{CC057153-B650-4DEB-B370-79DDCFDCE934}" type="slidenum">
               <a:rPr lang="en-US" smtClean="0"/>
+              <a:pPr/>
               <a:t>‹#›</a:t>
             </a:fld>
             <a:endParaRPr lang="en-US"/>
@@ -2725,7 +2753,7 @@
     </p:spTree>
     <p:extLst>
       <p:ext uri="{BB962C8B-B14F-4D97-AF65-F5344CB8AC3E}">
-        <p14:creationId xmlns:p14="http://schemas.microsoft.com/office/powerpoint/2010/main" val="3403264876"/>
+        <p14:creationId xmlns:p14="http://schemas.microsoft.com/office/powerpoint/2010/main" xmlns="" val="3403264876"/>
       </p:ext>
     </p:extLst>
   </p:cSld>
@@ -2770,6 +2798,7 @@
           <a:p>
             <a:fld id="{67F45AC6-C491-4585-A584-9CE2AF7D5500}" type="datetime1">
               <a:rPr lang="en-US" smtClean="0"/>
+              <a:pPr/>
               <a:t>11/15/2025</a:t>
             </a:fld>
             <a:endParaRPr lang="en-US"/>
@@ -2812,6 +2841,7 @@
           <a:p>
             <a:fld id="{CC057153-B650-4DEB-B370-79DDCFDCE934}" type="slidenum">
               <a:rPr lang="en-US" smtClean="0"/>
+              <a:pPr/>
               <a:t>‹#›</a:t>
             </a:fld>
             <a:endParaRPr lang="en-US"/>
@@ -2821,7 +2851,7 @@
     </p:spTree>
     <p:extLst>
       <p:ext uri="{BB962C8B-B14F-4D97-AF65-F5344CB8AC3E}">
-        <p14:creationId xmlns:p14="http://schemas.microsoft.com/office/powerpoint/2010/main" val="3549359683"/>
+        <p14:creationId xmlns:p14="http://schemas.microsoft.com/office/powerpoint/2010/main" xmlns="" val="3549359683"/>
       </p:ext>
     </p:extLst>
   </p:cSld>
@@ -3022,6 +3052,7 @@
           <a:p>
             <a:fld id="{67F45AC6-C491-4585-A584-9CE2AF7D5500}" type="datetime1">
               <a:rPr lang="en-US" smtClean="0"/>
+              <a:pPr/>
               <a:t>11/15/2025</a:t>
             </a:fld>
             <a:endParaRPr lang="en-US"/>
@@ -3064,6 +3095,7 @@
           <a:p>
             <a:fld id="{CC057153-B650-4DEB-B370-79DDCFDCE934}" type="slidenum">
               <a:rPr lang="en-US" smtClean="0"/>
+              <a:pPr/>
               <a:t>‹#›</a:t>
             </a:fld>
             <a:endParaRPr lang="en-US"/>
@@ -3104,7 +3136,7 @@
     </p:spTree>
     <p:extLst>
       <p:ext uri="{BB962C8B-B14F-4D97-AF65-F5344CB8AC3E}">
-        <p14:creationId xmlns:p14="http://schemas.microsoft.com/office/powerpoint/2010/main" val="1237110938"/>
+        <p14:creationId xmlns:p14="http://schemas.microsoft.com/office/powerpoint/2010/main" xmlns="" val="1237110938"/>
       </p:ext>
     </p:extLst>
   </p:cSld>
@@ -3468,6 +3500,7 @@
           <a:p>
             <a:fld id="{67F45AC6-C491-4585-A584-9CE2AF7D5500}" type="datetime1">
               <a:rPr lang="en-US" smtClean="0"/>
+              <a:pPr/>
               <a:t>11/15/2025</a:t>
             </a:fld>
             <a:endParaRPr lang="en-US"/>
@@ -3515,6 +3548,7 @@
           <a:p>
             <a:fld id="{CC057153-B650-4DEB-B370-79DDCFDCE934}" type="slidenum">
               <a:rPr lang="en-US" smtClean="0"/>
+              <a:pPr/>
               <a:t>‹#›</a:t>
             </a:fld>
             <a:endParaRPr lang="en-US"/>
@@ -3555,7 +3589,7 @@
     </p:spTree>
     <p:extLst>
       <p:ext uri="{BB962C8B-B14F-4D97-AF65-F5344CB8AC3E}">
-        <p14:creationId xmlns:p14="http://schemas.microsoft.com/office/powerpoint/2010/main" val="2431406703"/>
+        <p14:creationId xmlns:p14="http://schemas.microsoft.com/office/powerpoint/2010/main" xmlns="" val="2431406703"/>
       </p:ext>
     </p:extLst>
   </p:cSld>
@@ -3656,7 +3690,7 @@
           <a:blip r:embed="rId13">
             <a:extLst>
               <a:ext uri="{28A0092B-C50C-407E-A947-70E740481C1C}">
-                <a14:useLocalDpi xmlns:a14="http://schemas.microsoft.com/office/drawing/2010/main" val="0"/>
+                <a14:useLocalDpi xmlns:a14="http://schemas.microsoft.com/office/drawing/2010/main" xmlns="" val="0"/>
               </a:ext>
             </a:extLst>
           </a:blip>
@@ -3803,6 +3837,7 @@
           <a:p>
             <a:fld id="{67F45AC6-C491-4585-A584-9CE2AF7D5500}" type="datetime1">
               <a:rPr lang="en-US" smtClean="0"/>
+              <a:pPr/>
               <a:t>11/15/2025</a:t>
             </a:fld>
             <a:endParaRPr lang="en-US"/>
@@ -3879,6 +3914,7 @@
           <a:p>
             <a:fld id="{CC057153-B650-4DEB-B370-79DDCFDCE934}" type="slidenum">
               <a:rPr lang="en-US" smtClean="0"/>
+              <a:pPr/>
               <a:t>‹#›</a:t>
             </a:fld>
             <a:endParaRPr lang="en-US"/>
@@ -3925,7 +3961,7 @@
     </p:spTree>
     <p:extLst>
       <p:ext uri="{BB962C8B-B14F-4D97-AF65-F5344CB8AC3E}">
-        <p14:creationId xmlns:p14="http://schemas.microsoft.com/office/powerpoint/2010/main" val="2588649061"/>
+        <p14:creationId xmlns:p14="http://schemas.microsoft.com/office/powerpoint/2010/main" xmlns="" val="2588649061"/>
       </p:ext>
     </p:extLst>
   </p:cSld>
@@ -4303,10 +4339,10 @@
           <p:cNvPr id="22" name="Rectangle 7">
             <a:extLst>
               <a:ext uri="{FF2B5EF4-FFF2-40B4-BE49-F238E27FC236}">
-                <a16:creationId xmlns:a16="http://schemas.microsoft.com/office/drawing/2014/main" id="{1EE485E7-7D6D-4CB0-A3AD-261D97B2EFEA}"/>
+                <a16:creationId xmlns:a16="http://schemas.microsoft.com/office/drawing/2014/main" xmlns="" id="{1EE485E7-7D6D-4CB0-A3AD-261D97B2EFEA}"/>
               </a:ext>
               <a:ext uri="{C183D7F6-B498-43B3-948B-1728B52AA6E4}">
-                <adec:decorative xmlns:adec="http://schemas.microsoft.com/office/drawing/2017/decorative" val="1"/>
+                <adec:decorative xmlns:adec="http://schemas.microsoft.com/office/drawing/2017/decorative" xmlns="" val="1"/>
               </a:ext>
             </a:extLst>
           </p:cNvPr>
@@ -4316,7 +4352,7 @@
           <p:nvPr>
             <p:extLst>
               <p:ext uri="{386F3935-93C4-4BCD-93E2-E3B085C9AB24}">
-                <p16:designElem xmlns:p16="http://schemas.microsoft.com/office/powerpoint/2015/main" val="1"/>
+                <p16:designElem xmlns:p16="http://schemas.microsoft.com/office/powerpoint/2015/main" xmlns="" val="1"/>
               </p:ext>
             </p:extLst>
           </p:nvPr>
@@ -4363,10 +4399,10 @@
           <p:cNvPr id="23" name="Rectangle 9">
             <a:extLst>
               <a:ext uri="{FF2B5EF4-FFF2-40B4-BE49-F238E27FC236}">
-                <a16:creationId xmlns:a16="http://schemas.microsoft.com/office/drawing/2014/main" id="{A55E3208-F0C4-4962-8946-065C94F89635}"/>
+                <a16:creationId xmlns:a16="http://schemas.microsoft.com/office/drawing/2014/main" xmlns="" id="{A55E3208-F0C4-4962-8946-065C94F89635}"/>
               </a:ext>
               <a:ext uri="{C183D7F6-B498-43B3-948B-1728B52AA6E4}">
-                <adec:decorative xmlns:adec="http://schemas.microsoft.com/office/drawing/2017/decorative" val="1"/>
+                <adec:decorative xmlns:adec="http://schemas.microsoft.com/office/drawing/2017/decorative" xmlns="" val="1"/>
               </a:ext>
             </a:extLst>
           </p:cNvPr>
@@ -4376,7 +4412,7 @@
           <p:nvPr>
             <p:extLst>
               <p:ext uri="{386F3935-93C4-4BCD-93E2-E3B085C9AB24}">
-                <p16:designElem xmlns:p16="http://schemas.microsoft.com/office/powerpoint/2015/main" val="1"/>
+                <p16:designElem xmlns:p16="http://schemas.microsoft.com/office/powerpoint/2015/main" xmlns="" val="1"/>
               </p:ext>
             </p:extLst>
           </p:nvPr>
@@ -4437,7 +4473,7 @@
           <p:cNvPr id="2" name="Cím 1">
             <a:extLst>
               <a:ext uri="{FF2B5EF4-FFF2-40B4-BE49-F238E27FC236}">
-                <a16:creationId xmlns:a16="http://schemas.microsoft.com/office/drawing/2014/main" id="{71137672-A00C-135C-4D3A-698554AD7312}"/>
+                <a16:creationId xmlns:a16="http://schemas.microsoft.com/office/drawing/2014/main" xmlns="" id="{71137672-A00C-135C-4D3A-698554AD7312}"/>
               </a:ext>
             </a:extLst>
           </p:cNvPr>
@@ -4472,7 +4508,7 @@
           <p:cNvPr id="3" name="Alcím 2">
             <a:extLst>
               <a:ext uri="{FF2B5EF4-FFF2-40B4-BE49-F238E27FC236}">
-                <a16:creationId xmlns:a16="http://schemas.microsoft.com/office/drawing/2014/main" id="{44E7AF2D-E654-D9AB-9F02-59791EDDA448}"/>
+                <a16:creationId xmlns:a16="http://schemas.microsoft.com/office/drawing/2014/main" xmlns="" id="{44E7AF2D-E654-D9AB-9F02-59791EDDA448}"/>
               </a:ext>
             </a:extLst>
           </p:cNvPr>
@@ -4508,10 +4544,10 @@
           <p:cNvPr id="24" name="Straight Connector 11">
             <a:extLst>
               <a:ext uri="{FF2B5EF4-FFF2-40B4-BE49-F238E27FC236}">
-                <a16:creationId xmlns:a16="http://schemas.microsoft.com/office/drawing/2014/main" id="{4FAE17D3-C2DC-4665-AF20-33C5BACD5E01}"/>
+                <a16:creationId xmlns:a16="http://schemas.microsoft.com/office/drawing/2014/main" xmlns="" id="{4FAE17D3-C2DC-4665-AF20-33C5BACD5E01}"/>
               </a:ext>
               <a:ext uri="{C183D7F6-B498-43B3-948B-1728B52AA6E4}">
-                <adec:decorative xmlns:adec="http://schemas.microsoft.com/office/drawing/2017/decorative" val="1"/>
+                <adec:decorative xmlns:adec="http://schemas.microsoft.com/office/drawing/2017/decorative" xmlns="" val="1"/>
               </a:ext>
             </a:extLst>
           </p:cNvPr>
@@ -4521,7 +4557,7 @@
           <p:nvPr>
             <p:extLst>
               <p:ext uri="{386F3935-93C4-4BCD-93E2-E3B085C9AB24}">
-                <p16:designElem xmlns:p16="http://schemas.microsoft.com/office/powerpoint/2015/main" val="1"/>
+                <p16:designElem xmlns:p16="http://schemas.microsoft.com/office/powerpoint/2015/main" xmlns="" val="1"/>
               </p:ext>
             </p:extLst>
           </p:nvPr>
@@ -4556,10 +4592,10 @@
           <p:cNvPr id="25" name="Picture 13">
             <a:extLst>
               <a:ext uri="{FF2B5EF4-FFF2-40B4-BE49-F238E27FC236}">
-                <a16:creationId xmlns:a16="http://schemas.microsoft.com/office/drawing/2014/main" id="{7021C573-B3FF-44B8-A5DE-AB39E9AA6B96}"/>
+                <a16:creationId xmlns:a16="http://schemas.microsoft.com/office/drawing/2014/main" xmlns="" id="{7021C573-B3FF-44B8-A5DE-AB39E9AA6B96}"/>
               </a:ext>
               <a:ext uri="{C183D7F6-B498-43B3-948B-1728B52AA6E4}">
-                <adec:decorative xmlns:adec="http://schemas.microsoft.com/office/drawing/2017/decorative" val="1"/>
+                <adec:decorative xmlns:adec="http://schemas.microsoft.com/office/drawing/2017/decorative" xmlns="" val="1"/>
               </a:ext>
             </a:extLst>
           </p:cNvPr>
@@ -4569,7 +4605,7 @@
           <p:nvPr>
             <p:extLst>
               <p:ext uri="{386F3935-93C4-4BCD-93E2-E3B085C9AB24}">
-                <p16:designElem xmlns:p16="http://schemas.microsoft.com/office/powerpoint/2015/main" val="1"/>
+                <p16:designElem xmlns:p16="http://schemas.microsoft.com/office/powerpoint/2015/main" xmlns="" val="1"/>
               </p:ext>
             </p:extLst>
           </p:nvPr>
@@ -4578,7 +4614,7 @@
           <a:blip r:embed="rId2">
             <a:extLst>
               <a:ext uri="{28A0092B-C50C-407E-A947-70E740481C1C}">
-                <a14:useLocalDpi xmlns:a14="http://schemas.microsoft.com/office/drawing/2010/main" val="0"/>
+                <a14:useLocalDpi xmlns:a14="http://schemas.microsoft.com/office/drawing/2010/main" xmlns="" val="0"/>
               </a:ext>
             </a:extLst>
           </a:blip>
@@ -4600,10 +4636,10 @@
           <p:cNvPr id="26" name="Straight Connector 15">
             <a:extLst>
               <a:ext uri="{FF2B5EF4-FFF2-40B4-BE49-F238E27FC236}">
-                <a16:creationId xmlns:a16="http://schemas.microsoft.com/office/drawing/2014/main" id="{50B0CCD4-E9B0-43B2-806F-05EDF57A7628}"/>
+                <a16:creationId xmlns:a16="http://schemas.microsoft.com/office/drawing/2014/main" xmlns="" id="{50B0CCD4-E9B0-43B2-806F-05EDF57A7628}"/>
               </a:ext>
               <a:ext uri="{C183D7F6-B498-43B3-948B-1728B52AA6E4}">
-                <adec:decorative xmlns:adec="http://schemas.microsoft.com/office/drawing/2017/decorative" val="1"/>
+                <adec:decorative xmlns:adec="http://schemas.microsoft.com/office/drawing/2017/decorative" xmlns="" val="1"/>
               </a:ext>
             </a:extLst>
           </p:cNvPr>
@@ -4613,7 +4649,7 @@
           <p:nvPr>
             <p:extLst>
               <p:ext uri="{386F3935-93C4-4BCD-93E2-E3B085C9AB24}">
-                <p16:designElem xmlns:p16="http://schemas.microsoft.com/office/powerpoint/2015/main" val="1"/>
+                <p16:designElem xmlns:p16="http://schemas.microsoft.com/office/powerpoint/2015/main" xmlns="" val="1"/>
               </p:ext>
             </p:extLst>
           </p:nvPr>
@@ -4652,7 +4688,7 @@
     </p:spTree>
     <p:extLst>
       <p:ext uri="{BB962C8B-B14F-4D97-AF65-F5344CB8AC3E}">
-        <p14:creationId xmlns:p14="http://schemas.microsoft.com/office/powerpoint/2010/main" val="884048900"/>
+        <p14:creationId xmlns:p14="http://schemas.microsoft.com/office/powerpoint/2010/main" xmlns="" val="884048900"/>
       </p:ext>
     </p:extLst>
   </p:cSld>
@@ -4684,7 +4720,7 @@
           <p:cNvPr id="2" name="Cím 1">
             <a:extLst>
               <a:ext uri="{FF2B5EF4-FFF2-40B4-BE49-F238E27FC236}">
-                <a16:creationId xmlns:a16="http://schemas.microsoft.com/office/drawing/2014/main" id="{5F9D479E-1FE8-51D6-A1FC-8EF788F5968E}"/>
+                <a16:creationId xmlns:a16="http://schemas.microsoft.com/office/drawing/2014/main" xmlns="" id="{5F9D479E-1FE8-51D6-A1FC-8EF788F5968E}"/>
               </a:ext>
             </a:extLst>
           </p:cNvPr>
@@ -4712,7 +4748,7 @@
           <p:cNvPr id="7" name="Kép 6">
             <a:extLst>
               <a:ext uri="{FF2B5EF4-FFF2-40B4-BE49-F238E27FC236}">
-                <a16:creationId xmlns:a16="http://schemas.microsoft.com/office/drawing/2014/main" id="{4198433E-9CA4-DD9B-293B-99D84D4D8B21}"/>
+                <a16:creationId xmlns:a16="http://schemas.microsoft.com/office/drawing/2014/main" xmlns="" id="{4198433E-9CA4-DD9B-293B-99D84D4D8B21}"/>
               </a:ext>
             </a:extLst>
           </p:cNvPr>
@@ -4743,7 +4779,7 @@
           <p:cNvPr id="9" name="Kép 8">
             <a:extLst>
               <a:ext uri="{FF2B5EF4-FFF2-40B4-BE49-F238E27FC236}">
-                <a16:creationId xmlns:a16="http://schemas.microsoft.com/office/drawing/2014/main" id="{2197A9F4-A241-EB61-91DE-E7F30AF53F8C}"/>
+                <a16:creationId xmlns:a16="http://schemas.microsoft.com/office/drawing/2014/main" xmlns="" id="{2197A9F4-A241-EB61-91DE-E7F30AF53F8C}"/>
               </a:ext>
             </a:extLst>
           </p:cNvPr>
@@ -4773,7 +4809,7 @@
           <p:cNvPr id="11" name="Kép 10">
             <a:extLst>
               <a:ext uri="{FF2B5EF4-FFF2-40B4-BE49-F238E27FC236}">
-                <a16:creationId xmlns:a16="http://schemas.microsoft.com/office/drawing/2014/main" id="{F33CF63A-4651-EB0E-1439-6882D81BE854}"/>
+                <a16:creationId xmlns:a16="http://schemas.microsoft.com/office/drawing/2014/main" xmlns="" id="{F33CF63A-4651-EB0E-1439-6882D81BE854}"/>
               </a:ext>
             </a:extLst>
           </p:cNvPr>
@@ -4803,7 +4839,7 @@
           <p:cNvPr id="13" name="Kép 12">
             <a:extLst>
               <a:ext uri="{FF2B5EF4-FFF2-40B4-BE49-F238E27FC236}">
-                <a16:creationId xmlns:a16="http://schemas.microsoft.com/office/drawing/2014/main" id="{E6B3369E-E201-601C-A3FC-3D2604BA1A5C}"/>
+                <a16:creationId xmlns:a16="http://schemas.microsoft.com/office/drawing/2014/main" xmlns="" id="{E6B3369E-E201-601C-A3FC-3D2604BA1A5C}"/>
               </a:ext>
             </a:extLst>
           </p:cNvPr>
@@ -4831,7 +4867,7 @@
     </p:spTree>
     <p:extLst>
       <p:ext uri="{BB962C8B-B14F-4D97-AF65-F5344CB8AC3E}">
-        <p14:creationId xmlns:p14="http://schemas.microsoft.com/office/powerpoint/2010/main" val="2621692130"/>
+        <p14:creationId xmlns:p14="http://schemas.microsoft.com/office/powerpoint/2010/main" xmlns="" val="2621692130"/>
       </p:ext>
     </p:extLst>
   </p:cSld>
@@ -5260,10 +5296,10 @@
           <p:cNvPr id="43" name="Rectangle 42">
             <a:extLst>
               <a:ext uri="{FF2B5EF4-FFF2-40B4-BE49-F238E27FC236}">
-                <a16:creationId xmlns:a16="http://schemas.microsoft.com/office/drawing/2014/main" id="{905CFAD9-EABE-4F83-B098-604752164E6A}"/>
+                <a16:creationId xmlns:a16="http://schemas.microsoft.com/office/drawing/2014/main" xmlns="" id="{905CFAD9-EABE-4F83-B098-604752164E6A}"/>
               </a:ext>
               <a:ext uri="{C183D7F6-B498-43B3-948B-1728B52AA6E4}">
-                <adec:decorative xmlns:adec="http://schemas.microsoft.com/office/drawing/2017/decorative" val="1"/>
+                <adec:decorative xmlns:adec="http://schemas.microsoft.com/office/drawing/2017/decorative" xmlns="" val="1"/>
               </a:ext>
             </a:extLst>
           </p:cNvPr>
@@ -5273,7 +5309,7 @@
           <p:nvPr>
             <p:extLst>
               <p:ext uri="{386F3935-93C4-4BCD-93E2-E3B085C9AB24}">
-                <p16:designElem xmlns:p16="http://schemas.microsoft.com/office/powerpoint/2015/main" val="1"/>
+                <p16:designElem xmlns:p16="http://schemas.microsoft.com/office/powerpoint/2015/main" xmlns="" val="1"/>
               </p:ext>
             </p:extLst>
           </p:nvPr>
@@ -5333,10 +5369,10 @@
           <p:cNvPr id="45" name="Picture 44">
             <a:extLst>
               <a:ext uri="{FF2B5EF4-FFF2-40B4-BE49-F238E27FC236}">
-                <a16:creationId xmlns:a16="http://schemas.microsoft.com/office/drawing/2014/main" id="{C99610E4-6194-4817-B152-498995E77181}"/>
+                <a16:creationId xmlns:a16="http://schemas.microsoft.com/office/drawing/2014/main" xmlns="" id="{C99610E4-6194-4817-B152-498995E77181}"/>
               </a:ext>
               <a:ext uri="{C183D7F6-B498-43B3-948B-1728B52AA6E4}">
-                <adec:decorative xmlns:adec="http://schemas.microsoft.com/office/drawing/2017/decorative" val="1"/>
+                <adec:decorative xmlns:adec="http://schemas.microsoft.com/office/drawing/2017/decorative" xmlns="" val="1"/>
               </a:ext>
             </a:extLst>
           </p:cNvPr>
@@ -5346,7 +5382,7 @@
           <p:nvPr>
             <p:extLst>
               <p:ext uri="{386F3935-93C4-4BCD-93E2-E3B085C9AB24}">
-                <p16:designElem xmlns:p16="http://schemas.microsoft.com/office/powerpoint/2015/main" val="1"/>
+                <p16:designElem xmlns:p16="http://schemas.microsoft.com/office/powerpoint/2015/main" xmlns="" val="1"/>
               </p:ext>
             </p:extLst>
           </p:nvPr>
@@ -5355,7 +5391,7 @@
           <a:blip r:embed="rId2">
             <a:extLst>
               <a:ext uri="{28A0092B-C50C-407E-A947-70E740481C1C}">
-                <a14:useLocalDpi xmlns:a14="http://schemas.microsoft.com/office/drawing/2010/main" val="0"/>
+                <a14:useLocalDpi xmlns:a14="http://schemas.microsoft.com/office/drawing/2010/main" xmlns="" val="0"/>
               </a:ext>
             </a:extLst>
           </a:blip>
@@ -5377,10 +5413,10 @@
           <p:cNvPr id="47" name="Straight Connector 46">
             <a:extLst>
               <a:ext uri="{FF2B5EF4-FFF2-40B4-BE49-F238E27FC236}">
-                <a16:creationId xmlns:a16="http://schemas.microsoft.com/office/drawing/2014/main" id="{D885E9F4-7DB6-4B77-B1FF-80BFCE81277B}"/>
+                <a16:creationId xmlns:a16="http://schemas.microsoft.com/office/drawing/2014/main" xmlns="" id="{D885E9F4-7DB6-4B77-B1FF-80BFCE81277B}"/>
               </a:ext>
               <a:ext uri="{C183D7F6-B498-43B3-948B-1728B52AA6E4}">
-                <adec:decorative xmlns:adec="http://schemas.microsoft.com/office/drawing/2017/decorative" val="1"/>
+                <adec:decorative xmlns:adec="http://schemas.microsoft.com/office/drawing/2017/decorative" xmlns="" val="1"/>
               </a:ext>
             </a:extLst>
           </p:cNvPr>
@@ -5390,7 +5426,7 @@
           <p:nvPr>
             <p:extLst>
               <p:ext uri="{386F3935-93C4-4BCD-93E2-E3B085C9AB24}">
-                <p16:designElem xmlns:p16="http://schemas.microsoft.com/office/powerpoint/2015/main" val="1"/>
+                <p16:designElem xmlns:p16="http://schemas.microsoft.com/office/powerpoint/2015/main" xmlns="" val="1"/>
               </p:ext>
             </p:extLst>
           </p:nvPr>
@@ -5431,10 +5467,10 @@
           <p:cNvPr id="49" name="Straight Connector 48">
             <a:extLst>
               <a:ext uri="{FF2B5EF4-FFF2-40B4-BE49-F238E27FC236}">
-                <a16:creationId xmlns:a16="http://schemas.microsoft.com/office/drawing/2014/main" id="{DB639A2B-C30C-4F6F-B847-6960F3CF8A64}"/>
+                <a16:creationId xmlns:a16="http://schemas.microsoft.com/office/drawing/2014/main" xmlns="" id="{DB639A2B-C30C-4F6F-B847-6960F3CF8A64}"/>
               </a:ext>
               <a:ext uri="{C183D7F6-B498-43B3-948B-1728B52AA6E4}">
-                <adec:decorative xmlns:adec="http://schemas.microsoft.com/office/drawing/2017/decorative" val="1"/>
+                <adec:decorative xmlns:adec="http://schemas.microsoft.com/office/drawing/2017/decorative" xmlns="" val="1"/>
               </a:ext>
             </a:extLst>
           </p:cNvPr>
@@ -5444,7 +5480,7 @@
           <p:nvPr>
             <p:extLst>
               <p:ext uri="{386F3935-93C4-4BCD-93E2-E3B085C9AB24}">
-                <p16:designElem xmlns:p16="http://schemas.microsoft.com/office/powerpoint/2015/main" val="1"/>
+                <p16:designElem xmlns:p16="http://schemas.microsoft.com/office/powerpoint/2015/main" xmlns="" val="1"/>
               </p:ext>
             </p:extLst>
           </p:nvPr>
@@ -5479,10 +5515,10 @@
           <p:cNvPr id="51" name="Rectangle 50">
             <a:extLst>
               <a:ext uri="{FF2B5EF4-FFF2-40B4-BE49-F238E27FC236}">
-                <a16:creationId xmlns:a16="http://schemas.microsoft.com/office/drawing/2014/main" id="{D9926FA0-8ED1-4F3A-B23B-FD94D82C74B5}"/>
+                <a16:creationId xmlns:a16="http://schemas.microsoft.com/office/drawing/2014/main" xmlns="" id="{D9926FA0-8ED1-4F3A-B23B-FD94D82C74B5}"/>
               </a:ext>
               <a:ext uri="{C183D7F6-B498-43B3-948B-1728B52AA6E4}">
-                <adec:decorative xmlns:adec="http://schemas.microsoft.com/office/drawing/2017/decorative" val="1"/>
+                <adec:decorative xmlns:adec="http://schemas.microsoft.com/office/drawing/2017/decorative" xmlns="" val="1"/>
               </a:ext>
             </a:extLst>
           </p:cNvPr>
@@ -5492,7 +5528,7 @@
           <p:nvPr>
             <p:extLst>
               <p:ext uri="{386F3935-93C4-4BCD-93E2-E3B085C9AB24}">
-                <p16:designElem xmlns:p16="http://schemas.microsoft.com/office/powerpoint/2015/main" val="1"/>
+                <p16:designElem xmlns:p16="http://schemas.microsoft.com/office/powerpoint/2015/main" xmlns="" val="1"/>
               </p:ext>
             </p:extLst>
           </p:nvPr>
@@ -5539,10 +5575,10 @@
           <p:cNvPr id="53" name="Rectangle 52">
             <a:extLst>
               <a:ext uri="{FF2B5EF4-FFF2-40B4-BE49-F238E27FC236}">
-                <a16:creationId xmlns:a16="http://schemas.microsoft.com/office/drawing/2014/main" id="{3A102CD9-C25A-4A86-B9D3-D7280D91428B}"/>
+                <a16:creationId xmlns:a16="http://schemas.microsoft.com/office/drawing/2014/main" xmlns="" id="{3A102CD9-C25A-4A86-B9D3-D7280D91428B}"/>
               </a:ext>
               <a:ext uri="{C183D7F6-B498-43B3-948B-1728B52AA6E4}">
-                <adec:decorative xmlns:adec="http://schemas.microsoft.com/office/drawing/2017/decorative" val="1"/>
+                <adec:decorative xmlns:adec="http://schemas.microsoft.com/office/drawing/2017/decorative" xmlns="" val="1"/>
               </a:ext>
             </a:extLst>
           </p:cNvPr>
@@ -5552,7 +5588,7 @@
           <p:nvPr>
             <p:extLst>
               <p:ext uri="{386F3935-93C4-4BCD-93E2-E3B085C9AB24}">
-                <p16:designElem xmlns:p16="http://schemas.microsoft.com/office/powerpoint/2015/main" val="1"/>
+                <p16:designElem xmlns:p16="http://schemas.microsoft.com/office/powerpoint/2015/main" xmlns="" val="1"/>
               </p:ext>
             </p:extLst>
           </p:nvPr>
@@ -5613,7 +5649,7 @@
           <p:cNvPr id="2" name="Title 1">
             <a:extLst>
               <a:ext uri="{FF2B5EF4-FFF2-40B4-BE49-F238E27FC236}">
-                <a16:creationId xmlns:a16="http://schemas.microsoft.com/office/drawing/2014/main" id="{D3862F8B-DB53-D69C-19EE-0A453B36C085}"/>
+                <a16:creationId xmlns:a16="http://schemas.microsoft.com/office/drawing/2014/main" xmlns="" id="{D3862F8B-DB53-D69C-19EE-0A453B36C085}"/>
               </a:ext>
             </a:extLst>
           </p:cNvPr>
@@ -5648,7 +5684,7 @@
           <p:cNvPr id="9" name="Picture 8">
             <a:extLst>
               <a:ext uri="{FF2B5EF4-FFF2-40B4-BE49-F238E27FC236}">
-                <a16:creationId xmlns:a16="http://schemas.microsoft.com/office/drawing/2014/main" id="{295C5C9D-063C-AF9D-2862-059BEA52D32C}"/>
+                <a16:creationId xmlns:a16="http://schemas.microsoft.com/office/drawing/2014/main" xmlns="" id="{295C5C9D-063C-AF9D-2862-059BEA52D32C}"/>
               </a:ext>
             </a:extLst>
           </p:cNvPr>
@@ -5678,7 +5714,7 @@
           <p:cNvPr id="11" name="Picture 10">
             <a:extLst>
               <a:ext uri="{FF2B5EF4-FFF2-40B4-BE49-F238E27FC236}">
-                <a16:creationId xmlns:a16="http://schemas.microsoft.com/office/drawing/2014/main" id="{39383BF8-280F-E773-B719-D67867986341}"/>
+                <a16:creationId xmlns:a16="http://schemas.microsoft.com/office/drawing/2014/main" xmlns="" id="{39383BF8-280F-E773-B719-D67867986341}"/>
               </a:ext>
             </a:extLst>
           </p:cNvPr>
@@ -5708,10 +5744,10 @@
           <p:cNvPr id="55" name="Straight Connector 54">
             <a:extLst>
               <a:ext uri="{FF2B5EF4-FFF2-40B4-BE49-F238E27FC236}">
-                <a16:creationId xmlns:a16="http://schemas.microsoft.com/office/drawing/2014/main" id="{90676B93-40FB-4FA7-8E89-C24B7B1F8F57}"/>
+                <a16:creationId xmlns:a16="http://schemas.microsoft.com/office/drawing/2014/main" xmlns="" id="{90676B93-40FB-4FA7-8E89-C24B7B1F8F57}"/>
               </a:ext>
               <a:ext uri="{C183D7F6-B498-43B3-948B-1728B52AA6E4}">
-                <adec:decorative xmlns:adec="http://schemas.microsoft.com/office/drawing/2017/decorative" val="1"/>
+                <adec:decorative xmlns:adec="http://schemas.microsoft.com/office/drawing/2017/decorative" xmlns="" val="1"/>
               </a:ext>
             </a:extLst>
           </p:cNvPr>
@@ -5721,7 +5757,7 @@
           <p:nvPr>
             <p:extLst>
               <p:ext uri="{386F3935-93C4-4BCD-93E2-E3B085C9AB24}">
-                <p16:designElem xmlns:p16="http://schemas.microsoft.com/office/powerpoint/2015/main" val="1"/>
+                <p16:designElem xmlns:p16="http://schemas.microsoft.com/office/powerpoint/2015/main" xmlns="" val="1"/>
               </p:ext>
             </p:extLst>
           </p:nvPr>
@@ -5756,7 +5792,7 @@
           <p:cNvPr id="7" name="Picture 6">
             <a:extLst>
               <a:ext uri="{FF2B5EF4-FFF2-40B4-BE49-F238E27FC236}">
-                <a16:creationId xmlns:a16="http://schemas.microsoft.com/office/drawing/2014/main" id="{83799579-8EB9-DC77-CDAC-986F8B3F2A7D}"/>
+                <a16:creationId xmlns:a16="http://schemas.microsoft.com/office/drawing/2014/main" xmlns="" id="{83799579-8EB9-DC77-CDAC-986F8B3F2A7D}"/>
               </a:ext>
             </a:extLst>
           </p:cNvPr>
@@ -5766,7 +5802,7 @@
           <p:nvPr/>
         </p:nvPicPr>
         <p:blipFill>
-          <a:blip r:embed="rId5"/>
+          <a:blip r:embed="rId5" cstate="print"/>
           <a:stretch>
             <a:fillRect/>
           </a:stretch>
@@ -5786,7 +5822,7 @@
           <p:cNvPr id="5" name="Picture 4">
             <a:extLst>
               <a:ext uri="{FF2B5EF4-FFF2-40B4-BE49-F238E27FC236}">
-                <a16:creationId xmlns:a16="http://schemas.microsoft.com/office/drawing/2014/main" id="{43E50A31-341F-5C88-C296-35A974D49814}"/>
+                <a16:creationId xmlns:a16="http://schemas.microsoft.com/office/drawing/2014/main" xmlns="" id="{43E50A31-341F-5C88-C296-35A974D49814}"/>
               </a:ext>
             </a:extLst>
           </p:cNvPr>
@@ -5816,10 +5852,10 @@
           <p:cNvPr id="57" name="Picture 56">
             <a:extLst>
               <a:ext uri="{FF2B5EF4-FFF2-40B4-BE49-F238E27FC236}">
-                <a16:creationId xmlns:a16="http://schemas.microsoft.com/office/drawing/2014/main" id="{3509D85C-1896-4695-A144-B562AFC58EB2}"/>
+                <a16:creationId xmlns:a16="http://schemas.microsoft.com/office/drawing/2014/main" xmlns="" id="{3509D85C-1896-4695-A144-B562AFC58EB2}"/>
               </a:ext>
               <a:ext uri="{C183D7F6-B498-43B3-948B-1728B52AA6E4}">
-                <adec:decorative xmlns:adec="http://schemas.microsoft.com/office/drawing/2017/decorative" val="1"/>
+                <adec:decorative xmlns:adec="http://schemas.microsoft.com/office/drawing/2017/decorative" xmlns="" val="1"/>
               </a:ext>
             </a:extLst>
           </p:cNvPr>
@@ -5829,7 +5865,7 @@
           <p:nvPr>
             <p:extLst>
               <p:ext uri="{386F3935-93C4-4BCD-93E2-E3B085C9AB24}">
-                <p16:designElem xmlns:p16="http://schemas.microsoft.com/office/powerpoint/2015/main" val="1"/>
+                <p16:designElem xmlns:p16="http://schemas.microsoft.com/office/powerpoint/2015/main" xmlns="" val="1"/>
               </p:ext>
             </p:extLst>
           </p:nvPr>
@@ -5838,7 +5874,7 @@
           <a:blip r:embed="rId2">
             <a:extLst>
               <a:ext uri="{28A0092B-C50C-407E-A947-70E740481C1C}">
-                <a14:useLocalDpi xmlns:a14="http://schemas.microsoft.com/office/drawing/2010/main" val="0"/>
+                <a14:useLocalDpi xmlns:a14="http://schemas.microsoft.com/office/drawing/2010/main" xmlns="" val="0"/>
               </a:ext>
             </a:extLst>
           </a:blip>
@@ -5860,10 +5896,10 @@
           <p:cNvPr id="59" name="Straight Connector 58">
             <a:extLst>
               <a:ext uri="{FF2B5EF4-FFF2-40B4-BE49-F238E27FC236}">
-                <a16:creationId xmlns:a16="http://schemas.microsoft.com/office/drawing/2014/main" id="{6D9F55CD-CB1D-4CB9-98D3-2BC602BC430E}"/>
+                <a16:creationId xmlns:a16="http://schemas.microsoft.com/office/drawing/2014/main" xmlns="" id="{6D9F55CD-CB1D-4CB9-98D3-2BC602BC430E}"/>
               </a:ext>
               <a:ext uri="{C183D7F6-B498-43B3-948B-1728B52AA6E4}">
-                <adec:decorative xmlns:adec="http://schemas.microsoft.com/office/drawing/2017/decorative" val="1"/>
+                <adec:decorative xmlns:adec="http://schemas.microsoft.com/office/drawing/2017/decorative" xmlns="" val="1"/>
               </a:ext>
             </a:extLst>
           </p:cNvPr>
@@ -5873,7 +5909,7 @@
           <p:nvPr>
             <p:extLst>
               <p:ext uri="{386F3935-93C4-4BCD-93E2-E3B085C9AB24}">
-                <p16:designElem xmlns:p16="http://schemas.microsoft.com/office/powerpoint/2015/main" val="1"/>
+                <p16:designElem xmlns:p16="http://schemas.microsoft.com/office/powerpoint/2015/main" xmlns="" val="1"/>
               </p:ext>
             </p:extLst>
           </p:nvPr>
@@ -5912,7 +5948,7 @@
     </p:spTree>
     <p:extLst>
       <p:ext uri="{BB962C8B-B14F-4D97-AF65-F5344CB8AC3E}">
-        <p14:creationId xmlns:p14="http://schemas.microsoft.com/office/powerpoint/2010/main" val="1886950838"/>
+        <p14:creationId xmlns:p14="http://schemas.microsoft.com/office/powerpoint/2010/main" xmlns="" val="1886950838"/>
       </p:ext>
     </p:extLst>
   </p:cSld>
@@ -5968,10 +6004,10 @@
           <p:cNvPr id="50" name="Rectangle 49">
             <a:extLst>
               <a:ext uri="{FF2B5EF4-FFF2-40B4-BE49-F238E27FC236}">
-                <a16:creationId xmlns:a16="http://schemas.microsoft.com/office/drawing/2014/main" id="{E724B9E8-02C8-4B2E-8770-A00A67760DF0}"/>
+                <a16:creationId xmlns:a16="http://schemas.microsoft.com/office/drawing/2014/main" xmlns="" id="{E724B9E8-02C8-4B2E-8770-A00A67760DF0}"/>
               </a:ext>
               <a:ext uri="{C183D7F6-B498-43B3-948B-1728B52AA6E4}">
-                <adec:decorative xmlns:adec="http://schemas.microsoft.com/office/drawing/2017/decorative" val="1"/>
+                <adec:decorative xmlns:adec="http://schemas.microsoft.com/office/drawing/2017/decorative" xmlns="" val="1"/>
               </a:ext>
             </a:extLst>
           </p:cNvPr>
@@ -5981,7 +6017,7 @@
           <p:nvPr>
             <p:extLst>
               <p:ext uri="{386F3935-93C4-4BCD-93E2-E3B085C9AB24}">
-                <p16:designElem xmlns:p16="http://schemas.microsoft.com/office/powerpoint/2015/main" val="1"/>
+                <p16:designElem xmlns:p16="http://schemas.microsoft.com/office/powerpoint/2015/main" xmlns="" val="1"/>
               </p:ext>
             </p:extLst>
           </p:nvPr>
@@ -6041,10 +6077,10 @@
           <p:cNvPr id="51" name="Picture 50">
             <a:extLst>
               <a:ext uri="{FF2B5EF4-FFF2-40B4-BE49-F238E27FC236}">
-                <a16:creationId xmlns:a16="http://schemas.microsoft.com/office/drawing/2014/main" id="{7B8AE548-0BFA-4792-9962-3375923C7635}"/>
+                <a16:creationId xmlns:a16="http://schemas.microsoft.com/office/drawing/2014/main" xmlns="" id="{7B8AE548-0BFA-4792-9962-3375923C7635}"/>
               </a:ext>
               <a:ext uri="{C183D7F6-B498-43B3-948B-1728B52AA6E4}">
-                <adec:decorative xmlns:adec="http://schemas.microsoft.com/office/drawing/2017/decorative" val="1"/>
+                <adec:decorative xmlns:adec="http://schemas.microsoft.com/office/drawing/2017/decorative" xmlns="" val="1"/>
               </a:ext>
             </a:extLst>
           </p:cNvPr>
@@ -6054,7 +6090,7 @@
           <p:nvPr>
             <p:extLst>
               <p:ext uri="{386F3935-93C4-4BCD-93E2-E3B085C9AB24}">
-                <p16:designElem xmlns:p16="http://schemas.microsoft.com/office/powerpoint/2015/main" val="1"/>
+                <p16:designElem xmlns:p16="http://schemas.microsoft.com/office/powerpoint/2015/main" xmlns="" val="1"/>
               </p:ext>
             </p:extLst>
           </p:nvPr>
@@ -6063,7 +6099,7 @@
           <a:blip r:embed="rId2">
             <a:extLst>
               <a:ext uri="{28A0092B-C50C-407E-A947-70E740481C1C}">
-                <a14:useLocalDpi xmlns:a14="http://schemas.microsoft.com/office/drawing/2010/main" val="0"/>
+                <a14:useLocalDpi xmlns:a14="http://schemas.microsoft.com/office/drawing/2010/main" xmlns="" val="0"/>
               </a:ext>
             </a:extLst>
           </a:blip>
@@ -6085,10 +6121,10 @@
           <p:cNvPr id="52" name="Straight Connector 51">
             <a:extLst>
               <a:ext uri="{FF2B5EF4-FFF2-40B4-BE49-F238E27FC236}">
-                <a16:creationId xmlns:a16="http://schemas.microsoft.com/office/drawing/2014/main" id="{67639EF4-FA83-4D85-90FE-B831AF283896}"/>
+                <a16:creationId xmlns:a16="http://schemas.microsoft.com/office/drawing/2014/main" xmlns="" id="{67639EF4-FA83-4D85-90FE-B831AF283896}"/>
               </a:ext>
               <a:ext uri="{C183D7F6-B498-43B3-948B-1728B52AA6E4}">
-                <adec:decorative xmlns:adec="http://schemas.microsoft.com/office/drawing/2017/decorative" val="1"/>
+                <adec:decorative xmlns:adec="http://schemas.microsoft.com/office/drawing/2017/decorative" xmlns="" val="1"/>
               </a:ext>
             </a:extLst>
           </p:cNvPr>
@@ -6098,7 +6134,7 @@
           <p:nvPr>
             <p:extLst>
               <p:ext uri="{386F3935-93C4-4BCD-93E2-E3B085C9AB24}">
-                <p16:designElem xmlns:p16="http://schemas.microsoft.com/office/powerpoint/2015/main" val="1"/>
+                <p16:designElem xmlns:p16="http://schemas.microsoft.com/office/powerpoint/2015/main" xmlns="" val="1"/>
               </p:ext>
             </p:extLst>
           </p:nvPr>
@@ -6139,10 +6175,10 @@
           <p:cNvPr id="53" name="Straight Connector 52">
             <a:extLst>
               <a:ext uri="{FF2B5EF4-FFF2-40B4-BE49-F238E27FC236}">
-                <a16:creationId xmlns:a16="http://schemas.microsoft.com/office/drawing/2014/main" id="{CC87E76A-8F50-413D-9BFC-C5A1525BD9BC}"/>
+                <a16:creationId xmlns:a16="http://schemas.microsoft.com/office/drawing/2014/main" xmlns="" id="{CC87E76A-8F50-413D-9BFC-C5A1525BD9BC}"/>
               </a:ext>
               <a:ext uri="{C183D7F6-B498-43B3-948B-1728B52AA6E4}">
-                <adec:decorative xmlns:adec="http://schemas.microsoft.com/office/drawing/2017/decorative" val="1"/>
+                <adec:decorative xmlns:adec="http://schemas.microsoft.com/office/drawing/2017/decorative" xmlns="" val="1"/>
               </a:ext>
             </a:extLst>
           </p:cNvPr>
@@ -6152,7 +6188,7 @@
           <p:nvPr>
             <p:extLst>
               <p:ext uri="{386F3935-93C4-4BCD-93E2-E3B085C9AB24}">
-                <p16:designElem xmlns:p16="http://schemas.microsoft.com/office/powerpoint/2015/main" val="1"/>
+                <p16:designElem xmlns:p16="http://schemas.microsoft.com/office/powerpoint/2015/main" xmlns="" val="1"/>
               </p:ext>
             </p:extLst>
           </p:nvPr>
@@ -6187,10 +6223,10 @@
           <p:cNvPr id="54" name="Rectangle 53">
             <a:extLst>
               <a:ext uri="{FF2B5EF4-FFF2-40B4-BE49-F238E27FC236}">
-                <a16:creationId xmlns:a16="http://schemas.microsoft.com/office/drawing/2014/main" id="{0F28EA84-13B4-4494-A4D3-8DE462FF0E6B}"/>
+                <a16:creationId xmlns:a16="http://schemas.microsoft.com/office/drawing/2014/main" xmlns="" id="{0F28EA84-13B4-4494-A4D3-8DE462FF0E6B}"/>
               </a:ext>
               <a:ext uri="{C183D7F6-B498-43B3-948B-1728B52AA6E4}">
-                <adec:decorative xmlns:adec="http://schemas.microsoft.com/office/drawing/2017/decorative" val="1"/>
+                <adec:decorative xmlns:adec="http://schemas.microsoft.com/office/drawing/2017/decorative" xmlns="" val="1"/>
               </a:ext>
             </a:extLst>
           </p:cNvPr>
@@ -6200,7 +6236,7 @@
           <p:nvPr>
             <p:extLst>
               <p:ext uri="{386F3935-93C4-4BCD-93E2-E3B085C9AB24}">
-                <p16:designElem xmlns:p16="http://schemas.microsoft.com/office/powerpoint/2015/main" val="1"/>
+                <p16:designElem xmlns:p16="http://schemas.microsoft.com/office/powerpoint/2015/main" xmlns="" val="1"/>
               </p:ext>
             </p:extLst>
           </p:nvPr>
@@ -6247,10 +6283,10 @@
           <p:cNvPr id="55" name="Rectangle 54">
             <a:extLst>
               <a:ext uri="{FF2B5EF4-FFF2-40B4-BE49-F238E27FC236}">
-                <a16:creationId xmlns:a16="http://schemas.microsoft.com/office/drawing/2014/main" id="{6BEB1B24-66CE-4D63-A39D-2D1B481DF95E}"/>
+                <a16:creationId xmlns:a16="http://schemas.microsoft.com/office/drawing/2014/main" xmlns="" id="{6BEB1B24-66CE-4D63-A39D-2D1B481DF95E}"/>
               </a:ext>
               <a:ext uri="{C183D7F6-B498-43B3-948B-1728B52AA6E4}">
-                <adec:decorative xmlns:adec="http://schemas.microsoft.com/office/drawing/2017/decorative" val="1"/>
+                <adec:decorative xmlns:adec="http://schemas.microsoft.com/office/drawing/2017/decorative" xmlns="" val="1"/>
               </a:ext>
             </a:extLst>
           </p:cNvPr>
@@ -6260,7 +6296,7 @@
           <p:nvPr>
             <p:extLst>
               <p:ext uri="{386F3935-93C4-4BCD-93E2-E3B085C9AB24}">
-                <p16:designElem xmlns:p16="http://schemas.microsoft.com/office/powerpoint/2015/main" val="1"/>
+                <p16:designElem xmlns:p16="http://schemas.microsoft.com/office/powerpoint/2015/main" xmlns="" val="1"/>
               </p:ext>
             </p:extLst>
           </p:nvPr>
@@ -6321,7 +6357,7 @@
           <p:cNvPr id="2" name="Title 1">
             <a:extLst>
               <a:ext uri="{FF2B5EF4-FFF2-40B4-BE49-F238E27FC236}">
-                <a16:creationId xmlns:a16="http://schemas.microsoft.com/office/drawing/2014/main" id="{7BA6A004-AC9E-F83D-7C6C-8E45C6DDE234}"/>
+                <a16:creationId xmlns:a16="http://schemas.microsoft.com/office/drawing/2014/main" xmlns="" id="{7BA6A004-AC9E-F83D-7C6C-8E45C6DDE234}"/>
               </a:ext>
             </a:extLst>
           </p:cNvPr>
@@ -6356,10 +6392,10 @@
           <p:cNvPr id="56" name="Straight Connector 55">
             <a:extLst>
               <a:ext uri="{FF2B5EF4-FFF2-40B4-BE49-F238E27FC236}">
-                <a16:creationId xmlns:a16="http://schemas.microsoft.com/office/drawing/2014/main" id="{78DE337D-1DBA-4536-8145-B43EE65C747D}"/>
+                <a16:creationId xmlns:a16="http://schemas.microsoft.com/office/drawing/2014/main" xmlns="" id="{78DE337D-1DBA-4536-8145-B43EE65C747D}"/>
               </a:ext>
               <a:ext uri="{C183D7F6-B498-43B3-948B-1728B52AA6E4}">
-                <adec:decorative xmlns:adec="http://schemas.microsoft.com/office/drawing/2017/decorative" val="1"/>
+                <adec:decorative xmlns:adec="http://schemas.microsoft.com/office/drawing/2017/decorative" xmlns="" val="1"/>
               </a:ext>
             </a:extLst>
           </p:cNvPr>
@@ -6369,7 +6405,7 @@
           <p:nvPr>
             <p:extLst>
               <p:ext uri="{386F3935-93C4-4BCD-93E2-E3B085C9AB24}">
-                <p16:designElem xmlns:p16="http://schemas.microsoft.com/office/powerpoint/2015/main" val="1"/>
+                <p16:designElem xmlns:p16="http://schemas.microsoft.com/office/powerpoint/2015/main" xmlns="" val="1"/>
               </p:ext>
             </p:extLst>
           </p:nvPr>
@@ -6404,7 +6440,7 @@
           <p:cNvPr id="5" name="Picture 4">
             <a:extLst>
               <a:ext uri="{FF2B5EF4-FFF2-40B4-BE49-F238E27FC236}">
-                <a16:creationId xmlns:a16="http://schemas.microsoft.com/office/drawing/2014/main" id="{A88E504C-4007-0FB3-BC00-5FF4F74B5CA7}"/>
+                <a16:creationId xmlns:a16="http://schemas.microsoft.com/office/drawing/2014/main" xmlns="" id="{A88E504C-4007-0FB3-BC00-5FF4F74B5CA7}"/>
               </a:ext>
             </a:extLst>
           </p:cNvPr>
@@ -6434,7 +6470,7 @@
           <p:cNvPr id="9" name="Picture 8">
             <a:extLst>
               <a:ext uri="{FF2B5EF4-FFF2-40B4-BE49-F238E27FC236}">
-                <a16:creationId xmlns:a16="http://schemas.microsoft.com/office/drawing/2014/main" id="{CE8C27E6-D0FE-7D3F-0657-BC477A7054EE}"/>
+                <a16:creationId xmlns:a16="http://schemas.microsoft.com/office/drawing/2014/main" xmlns="" id="{CE8C27E6-D0FE-7D3F-0657-BC477A7054EE}"/>
               </a:ext>
             </a:extLst>
           </p:cNvPr>
@@ -6464,7 +6500,7 @@
           <p:cNvPr id="7" name="Picture 6">
             <a:extLst>
               <a:ext uri="{FF2B5EF4-FFF2-40B4-BE49-F238E27FC236}">
-                <a16:creationId xmlns:a16="http://schemas.microsoft.com/office/drawing/2014/main" id="{0491AA9D-40D6-945F-5458-984FA0DBC683}"/>
+                <a16:creationId xmlns:a16="http://schemas.microsoft.com/office/drawing/2014/main" xmlns="" id="{0491AA9D-40D6-945F-5458-984FA0DBC683}"/>
               </a:ext>
             </a:extLst>
           </p:cNvPr>
@@ -6494,10 +6530,10 @@
           <p:cNvPr id="57" name="Picture 56">
             <a:extLst>
               <a:ext uri="{FF2B5EF4-FFF2-40B4-BE49-F238E27FC236}">
-                <a16:creationId xmlns:a16="http://schemas.microsoft.com/office/drawing/2014/main" id="{E7233926-059A-41AD-A9F2-56552CF4FF6B}"/>
+                <a16:creationId xmlns:a16="http://schemas.microsoft.com/office/drawing/2014/main" xmlns="" id="{E7233926-059A-41AD-A9F2-56552CF4FF6B}"/>
               </a:ext>
               <a:ext uri="{C183D7F6-B498-43B3-948B-1728B52AA6E4}">
-                <adec:decorative xmlns:adec="http://schemas.microsoft.com/office/drawing/2017/decorative" val="1"/>
+                <adec:decorative xmlns:adec="http://schemas.microsoft.com/office/drawing/2017/decorative" xmlns="" val="1"/>
               </a:ext>
             </a:extLst>
           </p:cNvPr>
@@ -6507,7 +6543,7 @@
           <p:nvPr>
             <p:extLst>
               <p:ext uri="{386F3935-93C4-4BCD-93E2-E3B085C9AB24}">
-                <p16:designElem xmlns:p16="http://schemas.microsoft.com/office/powerpoint/2015/main" val="1"/>
+                <p16:designElem xmlns:p16="http://schemas.microsoft.com/office/powerpoint/2015/main" xmlns="" val="1"/>
               </p:ext>
             </p:extLst>
           </p:nvPr>
@@ -6516,7 +6552,7 @@
           <a:blip r:embed="rId2">
             <a:extLst>
               <a:ext uri="{28A0092B-C50C-407E-A947-70E740481C1C}">
-                <a14:useLocalDpi xmlns:a14="http://schemas.microsoft.com/office/drawing/2010/main" val="0"/>
+                <a14:useLocalDpi xmlns:a14="http://schemas.microsoft.com/office/drawing/2010/main" xmlns="" val="0"/>
               </a:ext>
             </a:extLst>
           </a:blip>
@@ -6538,10 +6574,10 @@
           <p:cNvPr id="58" name="Straight Connector 57">
             <a:extLst>
               <a:ext uri="{FF2B5EF4-FFF2-40B4-BE49-F238E27FC236}">
-                <a16:creationId xmlns:a16="http://schemas.microsoft.com/office/drawing/2014/main" id="{C13C145E-93D4-481E-92DC-736D9EBA37FC}"/>
+                <a16:creationId xmlns:a16="http://schemas.microsoft.com/office/drawing/2014/main" xmlns="" id="{C13C145E-93D4-481E-92DC-736D9EBA37FC}"/>
               </a:ext>
               <a:ext uri="{C183D7F6-B498-43B3-948B-1728B52AA6E4}">
-                <adec:decorative xmlns:adec="http://schemas.microsoft.com/office/drawing/2017/decorative" val="1"/>
+                <adec:decorative xmlns:adec="http://schemas.microsoft.com/office/drawing/2017/decorative" xmlns="" val="1"/>
               </a:ext>
             </a:extLst>
           </p:cNvPr>
@@ -6551,7 +6587,7 @@
           <p:nvPr>
             <p:extLst>
               <p:ext uri="{386F3935-93C4-4BCD-93E2-E3B085C9AB24}">
-                <p16:designElem xmlns:p16="http://schemas.microsoft.com/office/powerpoint/2015/main" val="1"/>
+                <p16:designElem xmlns:p16="http://schemas.microsoft.com/office/powerpoint/2015/main" xmlns="" val="1"/>
               </p:ext>
             </p:extLst>
           </p:nvPr>
@@ -6590,7 +6626,7 @@
     </p:spTree>
     <p:extLst>
       <p:ext uri="{BB962C8B-B14F-4D97-AF65-F5344CB8AC3E}">
-        <p14:creationId xmlns:p14="http://schemas.microsoft.com/office/powerpoint/2010/main" val="851204681"/>
+        <p14:creationId xmlns:p14="http://schemas.microsoft.com/office/powerpoint/2010/main" xmlns="" val="851204681"/>
       </p:ext>
     </p:extLst>
   </p:cSld>
@@ -6646,10 +6682,10 @@
           <p:cNvPr id="38" name="Rectangle 37">
             <a:extLst>
               <a:ext uri="{FF2B5EF4-FFF2-40B4-BE49-F238E27FC236}">
-                <a16:creationId xmlns:a16="http://schemas.microsoft.com/office/drawing/2014/main" id="{E724B9E8-02C8-4B2E-8770-A00A67760DF0}"/>
+                <a16:creationId xmlns:a16="http://schemas.microsoft.com/office/drawing/2014/main" xmlns="" id="{E724B9E8-02C8-4B2E-8770-A00A67760DF0}"/>
               </a:ext>
               <a:ext uri="{C183D7F6-B498-43B3-948B-1728B52AA6E4}">
-                <adec:decorative xmlns:adec="http://schemas.microsoft.com/office/drawing/2017/decorative" val="1"/>
+                <adec:decorative xmlns:adec="http://schemas.microsoft.com/office/drawing/2017/decorative" xmlns="" val="1"/>
               </a:ext>
             </a:extLst>
           </p:cNvPr>
@@ -6659,7 +6695,7 @@
           <p:nvPr>
             <p:extLst>
               <p:ext uri="{386F3935-93C4-4BCD-93E2-E3B085C9AB24}">
-                <p16:designElem xmlns:p16="http://schemas.microsoft.com/office/powerpoint/2015/main" val="1"/>
+                <p16:designElem xmlns:p16="http://schemas.microsoft.com/office/powerpoint/2015/main" xmlns="" val="1"/>
               </p:ext>
             </p:extLst>
           </p:nvPr>
@@ -6719,10 +6755,10 @@
           <p:cNvPr id="39" name="Picture 38">
             <a:extLst>
               <a:ext uri="{FF2B5EF4-FFF2-40B4-BE49-F238E27FC236}">
-                <a16:creationId xmlns:a16="http://schemas.microsoft.com/office/drawing/2014/main" id="{7B8AE548-0BFA-4792-9962-3375923C7635}"/>
+                <a16:creationId xmlns:a16="http://schemas.microsoft.com/office/drawing/2014/main" xmlns="" id="{7B8AE548-0BFA-4792-9962-3375923C7635}"/>
               </a:ext>
               <a:ext uri="{C183D7F6-B498-43B3-948B-1728B52AA6E4}">
-                <adec:decorative xmlns:adec="http://schemas.microsoft.com/office/drawing/2017/decorative" val="1"/>
+                <adec:decorative xmlns:adec="http://schemas.microsoft.com/office/drawing/2017/decorative" xmlns="" val="1"/>
               </a:ext>
             </a:extLst>
           </p:cNvPr>
@@ -6732,7 +6768,7 @@
           <p:nvPr>
             <p:extLst>
               <p:ext uri="{386F3935-93C4-4BCD-93E2-E3B085C9AB24}">
-                <p16:designElem xmlns:p16="http://schemas.microsoft.com/office/powerpoint/2015/main" val="1"/>
+                <p16:designElem xmlns:p16="http://schemas.microsoft.com/office/powerpoint/2015/main" xmlns="" val="1"/>
               </p:ext>
             </p:extLst>
           </p:nvPr>
@@ -6741,7 +6777,7 @@
           <a:blip r:embed="rId2">
             <a:extLst>
               <a:ext uri="{28A0092B-C50C-407E-A947-70E740481C1C}">
-                <a14:useLocalDpi xmlns:a14="http://schemas.microsoft.com/office/drawing/2010/main" val="0"/>
+                <a14:useLocalDpi xmlns:a14="http://schemas.microsoft.com/office/drawing/2010/main" xmlns="" val="0"/>
               </a:ext>
             </a:extLst>
           </a:blip>
@@ -6763,10 +6799,10 @@
           <p:cNvPr id="40" name="Straight Connector 39">
             <a:extLst>
               <a:ext uri="{FF2B5EF4-FFF2-40B4-BE49-F238E27FC236}">
-                <a16:creationId xmlns:a16="http://schemas.microsoft.com/office/drawing/2014/main" id="{67639EF4-FA83-4D85-90FE-B831AF283896}"/>
+                <a16:creationId xmlns:a16="http://schemas.microsoft.com/office/drawing/2014/main" xmlns="" id="{67639EF4-FA83-4D85-90FE-B831AF283896}"/>
               </a:ext>
               <a:ext uri="{C183D7F6-B498-43B3-948B-1728B52AA6E4}">
-                <adec:decorative xmlns:adec="http://schemas.microsoft.com/office/drawing/2017/decorative" val="1"/>
+                <adec:decorative xmlns:adec="http://schemas.microsoft.com/office/drawing/2017/decorative" xmlns="" val="1"/>
               </a:ext>
             </a:extLst>
           </p:cNvPr>
@@ -6776,7 +6812,7 @@
           <p:nvPr>
             <p:extLst>
               <p:ext uri="{386F3935-93C4-4BCD-93E2-E3B085C9AB24}">
-                <p16:designElem xmlns:p16="http://schemas.microsoft.com/office/powerpoint/2015/main" val="1"/>
+                <p16:designElem xmlns:p16="http://schemas.microsoft.com/office/powerpoint/2015/main" xmlns="" val="1"/>
               </p:ext>
             </p:extLst>
           </p:nvPr>
@@ -6817,10 +6853,10 @@
           <p:cNvPr id="41" name="Straight Connector 40">
             <a:extLst>
               <a:ext uri="{FF2B5EF4-FFF2-40B4-BE49-F238E27FC236}">
-                <a16:creationId xmlns:a16="http://schemas.microsoft.com/office/drawing/2014/main" id="{CC87E76A-8F50-413D-9BFC-C5A1525BD9BC}"/>
+                <a16:creationId xmlns:a16="http://schemas.microsoft.com/office/drawing/2014/main" xmlns="" id="{CC87E76A-8F50-413D-9BFC-C5A1525BD9BC}"/>
               </a:ext>
               <a:ext uri="{C183D7F6-B498-43B3-948B-1728B52AA6E4}">
-                <adec:decorative xmlns:adec="http://schemas.microsoft.com/office/drawing/2017/decorative" val="1"/>
+                <adec:decorative xmlns:adec="http://schemas.microsoft.com/office/drawing/2017/decorative" xmlns="" val="1"/>
               </a:ext>
             </a:extLst>
           </p:cNvPr>
@@ -6830,7 +6866,7 @@
           <p:nvPr>
             <p:extLst>
               <p:ext uri="{386F3935-93C4-4BCD-93E2-E3B085C9AB24}">
-                <p16:designElem xmlns:p16="http://schemas.microsoft.com/office/powerpoint/2015/main" val="1"/>
+                <p16:designElem xmlns:p16="http://schemas.microsoft.com/office/powerpoint/2015/main" xmlns="" val="1"/>
               </p:ext>
             </p:extLst>
           </p:nvPr>
@@ -6865,10 +6901,10 @@
           <p:cNvPr id="42" name="Rectangle 41">
             <a:extLst>
               <a:ext uri="{FF2B5EF4-FFF2-40B4-BE49-F238E27FC236}">
-                <a16:creationId xmlns:a16="http://schemas.microsoft.com/office/drawing/2014/main" id="{9A1C6278-B7D5-4E8E-B4DC-834832980565}"/>
+                <a16:creationId xmlns:a16="http://schemas.microsoft.com/office/drawing/2014/main" xmlns="" id="{9A1C6278-B7D5-4E8E-B4DC-834832980565}"/>
               </a:ext>
               <a:ext uri="{C183D7F6-B498-43B3-948B-1728B52AA6E4}">
-                <adec:decorative xmlns:adec="http://schemas.microsoft.com/office/drawing/2017/decorative" val="1"/>
+                <adec:decorative xmlns:adec="http://schemas.microsoft.com/office/drawing/2017/decorative" xmlns="" val="1"/>
               </a:ext>
             </a:extLst>
           </p:cNvPr>
@@ -6878,7 +6914,7 @@
           <p:nvPr>
             <p:extLst>
               <p:ext uri="{386F3935-93C4-4BCD-93E2-E3B085C9AB24}">
-                <p16:designElem xmlns:p16="http://schemas.microsoft.com/office/powerpoint/2015/main" val="1"/>
+                <p16:designElem xmlns:p16="http://schemas.microsoft.com/office/powerpoint/2015/main" xmlns="" val="1"/>
               </p:ext>
             </p:extLst>
           </p:nvPr>
@@ -6925,10 +6961,10 @@
           <p:cNvPr id="43" name="Rectangle 42">
             <a:extLst>
               <a:ext uri="{FF2B5EF4-FFF2-40B4-BE49-F238E27FC236}">
-                <a16:creationId xmlns:a16="http://schemas.microsoft.com/office/drawing/2014/main" id="{C007F3D3-099E-430E-8754-C084D0FA5FE3}"/>
+                <a16:creationId xmlns:a16="http://schemas.microsoft.com/office/drawing/2014/main" xmlns="" id="{C007F3D3-099E-430E-8754-C084D0FA5FE3}"/>
               </a:ext>
               <a:ext uri="{C183D7F6-B498-43B3-948B-1728B52AA6E4}">
-                <adec:decorative xmlns:adec="http://schemas.microsoft.com/office/drawing/2017/decorative" val="1"/>
+                <adec:decorative xmlns:adec="http://schemas.microsoft.com/office/drawing/2017/decorative" xmlns="" val="1"/>
               </a:ext>
             </a:extLst>
           </p:cNvPr>
@@ -6938,7 +6974,7 @@
           <p:nvPr>
             <p:extLst>
               <p:ext uri="{386F3935-93C4-4BCD-93E2-E3B085C9AB24}">
-                <p16:designElem xmlns:p16="http://schemas.microsoft.com/office/powerpoint/2015/main" val="1"/>
+                <p16:designElem xmlns:p16="http://schemas.microsoft.com/office/powerpoint/2015/main" xmlns="" val="1"/>
               </p:ext>
             </p:extLst>
           </p:nvPr>
@@ -6999,7 +7035,7 @@
           <p:cNvPr id="2" name="Title 1">
             <a:extLst>
               <a:ext uri="{FF2B5EF4-FFF2-40B4-BE49-F238E27FC236}">
-                <a16:creationId xmlns:a16="http://schemas.microsoft.com/office/drawing/2014/main" id="{39DDDFD2-F9A9-3A01-FF2A-6CDF8AAF1529}"/>
+                <a16:creationId xmlns:a16="http://schemas.microsoft.com/office/drawing/2014/main" xmlns="" id="{39DDDFD2-F9A9-3A01-FF2A-6CDF8AAF1529}"/>
               </a:ext>
             </a:extLst>
           </p:cNvPr>
@@ -7034,7 +7070,7 @@
           <p:cNvPr id="11" name="Picture 10">
             <a:extLst>
               <a:ext uri="{FF2B5EF4-FFF2-40B4-BE49-F238E27FC236}">
-                <a16:creationId xmlns:a16="http://schemas.microsoft.com/office/drawing/2014/main" id="{3C11F97F-2AE4-3D9B-35A6-AF80BEF77AF7}"/>
+                <a16:creationId xmlns:a16="http://schemas.microsoft.com/office/drawing/2014/main" xmlns="" id="{3C11F97F-2AE4-3D9B-35A6-AF80BEF77AF7}"/>
               </a:ext>
             </a:extLst>
           </p:cNvPr>
@@ -7064,7 +7100,7 @@
           <p:cNvPr id="9" name="Picture 8">
             <a:extLst>
               <a:ext uri="{FF2B5EF4-FFF2-40B4-BE49-F238E27FC236}">
-                <a16:creationId xmlns:a16="http://schemas.microsoft.com/office/drawing/2014/main" id="{EB92CDCE-F939-2C1B-FB2C-35BCFBC61213}"/>
+                <a16:creationId xmlns:a16="http://schemas.microsoft.com/office/drawing/2014/main" xmlns="" id="{EB92CDCE-F939-2C1B-FB2C-35BCFBC61213}"/>
               </a:ext>
             </a:extLst>
           </p:cNvPr>
@@ -7094,7 +7130,7 @@
           <p:cNvPr id="5" name="Picture 4">
             <a:extLst>
               <a:ext uri="{FF2B5EF4-FFF2-40B4-BE49-F238E27FC236}">
-                <a16:creationId xmlns:a16="http://schemas.microsoft.com/office/drawing/2014/main" id="{C20FFCFC-0AFB-A5C7-E6B7-F9D1DC4B2FC6}"/>
+                <a16:creationId xmlns:a16="http://schemas.microsoft.com/office/drawing/2014/main" xmlns="" id="{C20FFCFC-0AFB-A5C7-E6B7-F9D1DC4B2FC6}"/>
               </a:ext>
             </a:extLst>
           </p:cNvPr>
@@ -7124,10 +7160,10 @@
           <p:cNvPr id="44" name="Straight Connector 43">
             <a:extLst>
               <a:ext uri="{FF2B5EF4-FFF2-40B4-BE49-F238E27FC236}">
-                <a16:creationId xmlns:a16="http://schemas.microsoft.com/office/drawing/2014/main" id="{6B9EA5DA-6DFD-447D-B8F9-CB95CA114076}"/>
+                <a16:creationId xmlns:a16="http://schemas.microsoft.com/office/drawing/2014/main" xmlns="" id="{6B9EA5DA-6DFD-447D-B8F9-CB95CA114076}"/>
               </a:ext>
               <a:ext uri="{C183D7F6-B498-43B3-948B-1728B52AA6E4}">
-                <adec:decorative xmlns:adec="http://schemas.microsoft.com/office/drawing/2017/decorative" val="1"/>
+                <adec:decorative xmlns:adec="http://schemas.microsoft.com/office/drawing/2017/decorative" xmlns="" val="1"/>
               </a:ext>
             </a:extLst>
           </p:cNvPr>
@@ -7137,7 +7173,7 @@
           <p:nvPr>
             <p:extLst>
               <p:ext uri="{386F3935-93C4-4BCD-93E2-E3B085C9AB24}">
-                <p16:designElem xmlns:p16="http://schemas.microsoft.com/office/powerpoint/2015/main" val="1"/>
+                <p16:designElem xmlns:p16="http://schemas.microsoft.com/office/powerpoint/2015/main" xmlns="" val="1"/>
               </p:ext>
             </p:extLst>
           </p:nvPr>
@@ -7172,10 +7208,10 @@
           <p:cNvPr id="45" name="Picture 44">
             <a:extLst>
               <a:ext uri="{FF2B5EF4-FFF2-40B4-BE49-F238E27FC236}">
-                <a16:creationId xmlns:a16="http://schemas.microsoft.com/office/drawing/2014/main" id="{87612EF9-94E7-42BA-B4A9-4B38643FBAF7}"/>
+                <a16:creationId xmlns:a16="http://schemas.microsoft.com/office/drawing/2014/main" xmlns="" id="{87612EF9-94E7-42BA-B4A9-4B38643FBAF7}"/>
               </a:ext>
               <a:ext uri="{C183D7F6-B498-43B3-948B-1728B52AA6E4}">
-                <adec:decorative xmlns:adec="http://schemas.microsoft.com/office/drawing/2017/decorative" val="1"/>
+                <adec:decorative xmlns:adec="http://schemas.microsoft.com/office/drawing/2017/decorative" xmlns="" val="1"/>
               </a:ext>
             </a:extLst>
           </p:cNvPr>
@@ -7185,7 +7221,7 @@
           <p:nvPr>
             <p:extLst>
               <p:ext uri="{386F3935-93C4-4BCD-93E2-E3B085C9AB24}">
-                <p16:designElem xmlns:p16="http://schemas.microsoft.com/office/powerpoint/2015/main" val="1"/>
+                <p16:designElem xmlns:p16="http://schemas.microsoft.com/office/powerpoint/2015/main" xmlns="" val="1"/>
               </p:ext>
             </p:extLst>
           </p:nvPr>
@@ -7194,7 +7230,7 @@
           <a:blip r:embed="rId2">
             <a:extLst>
               <a:ext uri="{28A0092B-C50C-407E-A947-70E740481C1C}">
-                <a14:useLocalDpi xmlns:a14="http://schemas.microsoft.com/office/drawing/2010/main" val="0"/>
+                <a14:useLocalDpi xmlns:a14="http://schemas.microsoft.com/office/drawing/2010/main" xmlns="" val="0"/>
               </a:ext>
             </a:extLst>
           </a:blip>
@@ -7216,10 +7252,10 @@
           <p:cNvPr id="46" name="Straight Connector 45">
             <a:extLst>
               <a:ext uri="{FF2B5EF4-FFF2-40B4-BE49-F238E27FC236}">
-                <a16:creationId xmlns:a16="http://schemas.microsoft.com/office/drawing/2014/main" id="{9E597F0B-0A17-4BF2-A904-9D99811F3E2E}"/>
+                <a16:creationId xmlns:a16="http://schemas.microsoft.com/office/drawing/2014/main" xmlns="" id="{9E597F0B-0A17-4BF2-A904-9D99811F3E2E}"/>
               </a:ext>
               <a:ext uri="{C183D7F6-B498-43B3-948B-1728B52AA6E4}">
-                <adec:decorative xmlns:adec="http://schemas.microsoft.com/office/drawing/2017/decorative" val="1"/>
+                <adec:decorative xmlns:adec="http://schemas.microsoft.com/office/drawing/2017/decorative" xmlns="" val="1"/>
               </a:ext>
             </a:extLst>
           </p:cNvPr>
@@ -7229,7 +7265,7 @@
           <p:nvPr>
             <p:extLst>
               <p:ext uri="{386F3935-93C4-4BCD-93E2-E3B085C9AB24}">
-                <p16:designElem xmlns:p16="http://schemas.microsoft.com/office/powerpoint/2015/main" val="1"/>
+                <p16:designElem xmlns:p16="http://schemas.microsoft.com/office/powerpoint/2015/main" xmlns="" val="1"/>
               </p:ext>
             </p:extLst>
           </p:nvPr>
@@ -7268,7 +7304,7 @@
     </p:spTree>
     <p:extLst>
       <p:ext uri="{BB962C8B-B14F-4D97-AF65-F5344CB8AC3E}">
-        <p14:creationId xmlns:p14="http://schemas.microsoft.com/office/powerpoint/2010/main" val="3510849585"/>
+        <p14:creationId xmlns:p14="http://schemas.microsoft.com/office/powerpoint/2010/main" xmlns="" val="3510849585"/>
       </p:ext>
     </p:extLst>
   </p:cSld>
@@ -7300,7 +7336,7 @@
           <p:cNvPr id="2" name="Title 1">
             <a:extLst>
               <a:ext uri="{FF2B5EF4-FFF2-40B4-BE49-F238E27FC236}">
-                <a16:creationId xmlns:a16="http://schemas.microsoft.com/office/drawing/2014/main" id="{6302D0E6-DFB3-5E17-192B-D3B11F717D8C}"/>
+                <a16:creationId xmlns:a16="http://schemas.microsoft.com/office/drawing/2014/main" xmlns="" id="{6302D0E6-DFB3-5E17-192B-D3B11F717D8C}"/>
               </a:ext>
             </a:extLst>
           </p:cNvPr>
@@ -7333,7 +7369,7 @@
           <p:cNvPr id="5" name="Picture 4">
             <a:extLst>
               <a:ext uri="{FF2B5EF4-FFF2-40B4-BE49-F238E27FC236}">
-                <a16:creationId xmlns:a16="http://schemas.microsoft.com/office/drawing/2014/main" id="{E7DCF374-80C3-CBE5-BC73-F12C234A38EC}"/>
+                <a16:creationId xmlns:a16="http://schemas.microsoft.com/office/drawing/2014/main" xmlns="" id="{E7DCF374-80C3-CBE5-BC73-F12C234A38EC}"/>
               </a:ext>
             </a:extLst>
           </p:cNvPr>
@@ -7363,7 +7399,7 @@
           <p:cNvPr id="7" name="Picture 6">
             <a:extLst>
               <a:ext uri="{FF2B5EF4-FFF2-40B4-BE49-F238E27FC236}">
-                <a16:creationId xmlns:a16="http://schemas.microsoft.com/office/drawing/2014/main" id="{13C83DBE-18EF-02F8-4CDE-12A988AA16AE}"/>
+                <a16:creationId xmlns:a16="http://schemas.microsoft.com/office/drawing/2014/main" xmlns="" id="{13C83DBE-18EF-02F8-4CDE-12A988AA16AE}"/>
               </a:ext>
             </a:extLst>
           </p:cNvPr>
@@ -7391,7 +7427,7 @@
     </p:spTree>
     <p:extLst>
       <p:ext uri="{BB962C8B-B14F-4D97-AF65-F5344CB8AC3E}">
-        <p14:creationId xmlns:p14="http://schemas.microsoft.com/office/powerpoint/2010/main" val="2040790998"/>
+        <p14:creationId xmlns:p14="http://schemas.microsoft.com/office/powerpoint/2010/main" xmlns="" val="2040790998"/>
       </p:ext>
     </p:extLst>
   </p:cSld>
@@ -7447,10 +7483,10 @@
           <p:cNvPr id="14" name="Rectangle 13">
             <a:extLst>
               <a:ext uri="{FF2B5EF4-FFF2-40B4-BE49-F238E27FC236}">
-                <a16:creationId xmlns:a16="http://schemas.microsoft.com/office/drawing/2014/main" id="{E724B9E8-02C8-4B2E-8770-A00A67760DF0}"/>
+                <a16:creationId xmlns:a16="http://schemas.microsoft.com/office/drawing/2014/main" xmlns="" id="{E724B9E8-02C8-4B2E-8770-A00A67760DF0}"/>
               </a:ext>
               <a:ext uri="{C183D7F6-B498-43B3-948B-1728B52AA6E4}">
-                <adec:decorative xmlns:adec="http://schemas.microsoft.com/office/drawing/2017/decorative" val="1"/>
+                <adec:decorative xmlns:adec="http://schemas.microsoft.com/office/drawing/2017/decorative" xmlns="" val="1"/>
               </a:ext>
             </a:extLst>
           </p:cNvPr>
@@ -7460,7 +7496,7 @@
           <p:nvPr>
             <p:extLst>
               <p:ext uri="{386F3935-93C4-4BCD-93E2-E3B085C9AB24}">
-                <p16:designElem xmlns:p16="http://schemas.microsoft.com/office/powerpoint/2015/main" val="1"/>
+                <p16:designElem xmlns:p16="http://schemas.microsoft.com/office/powerpoint/2015/main" xmlns="" val="1"/>
               </p:ext>
             </p:extLst>
           </p:nvPr>
@@ -7520,10 +7556,10 @@
           <p:cNvPr id="16" name="Picture 15">
             <a:extLst>
               <a:ext uri="{FF2B5EF4-FFF2-40B4-BE49-F238E27FC236}">
-                <a16:creationId xmlns:a16="http://schemas.microsoft.com/office/drawing/2014/main" id="{7B8AE548-0BFA-4792-9962-3375923C7635}"/>
+                <a16:creationId xmlns:a16="http://schemas.microsoft.com/office/drawing/2014/main" xmlns="" id="{7B8AE548-0BFA-4792-9962-3375923C7635}"/>
               </a:ext>
               <a:ext uri="{C183D7F6-B498-43B3-948B-1728B52AA6E4}">
-                <adec:decorative xmlns:adec="http://schemas.microsoft.com/office/drawing/2017/decorative" val="1"/>
+                <adec:decorative xmlns:adec="http://schemas.microsoft.com/office/drawing/2017/decorative" xmlns="" val="1"/>
               </a:ext>
             </a:extLst>
           </p:cNvPr>
@@ -7533,7 +7569,7 @@
           <p:nvPr>
             <p:extLst>
               <p:ext uri="{386F3935-93C4-4BCD-93E2-E3B085C9AB24}">
-                <p16:designElem xmlns:p16="http://schemas.microsoft.com/office/powerpoint/2015/main" val="1"/>
+                <p16:designElem xmlns:p16="http://schemas.microsoft.com/office/powerpoint/2015/main" xmlns="" val="1"/>
               </p:ext>
             </p:extLst>
           </p:nvPr>
@@ -7542,7 +7578,7 @@
           <a:blip r:embed="rId2">
             <a:extLst>
               <a:ext uri="{28A0092B-C50C-407E-A947-70E740481C1C}">
-                <a14:useLocalDpi xmlns:a14="http://schemas.microsoft.com/office/drawing/2010/main" val="0"/>
+                <a14:useLocalDpi xmlns:a14="http://schemas.microsoft.com/office/drawing/2010/main" xmlns="" val="0"/>
               </a:ext>
             </a:extLst>
           </a:blip>
@@ -7564,10 +7600,10 @@
           <p:cNvPr id="18" name="Straight Connector 17">
             <a:extLst>
               <a:ext uri="{FF2B5EF4-FFF2-40B4-BE49-F238E27FC236}">
-                <a16:creationId xmlns:a16="http://schemas.microsoft.com/office/drawing/2014/main" id="{67639EF4-FA83-4D85-90FE-B831AF283896}"/>
+                <a16:creationId xmlns:a16="http://schemas.microsoft.com/office/drawing/2014/main" xmlns="" id="{67639EF4-FA83-4D85-90FE-B831AF283896}"/>
               </a:ext>
               <a:ext uri="{C183D7F6-B498-43B3-948B-1728B52AA6E4}">
-                <adec:decorative xmlns:adec="http://schemas.microsoft.com/office/drawing/2017/decorative" val="1"/>
+                <adec:decorative xmlns:adec="http://schemas.microsoft.com/office/drawing/2017/decorative" xmlns="" val="1"/>
               </a:ext>
             </a:extLst>
           </p:cNvPr>
@@ -7577,7 +7613,7 @@
           <p:nvPr>
             <p:extLst>
               <p:ext uri="{386F3935-93C4-4BCD-93E2-E3B085C9AB24}">
-                <p16:designElem xmlns:p16="http://schemas.microsoft.com/office/powerpoint/2015/main" val="1"/>
+                <p16:designElem xmlns:p16="http://schemas.microsoft.com/office/powerpoint/2015/main" xmlns="" val="1"/>
               </p:ext>
             </p:extLst>
           </p:nvPr>
@@ -7618,10 +7654,10 @@
           <p:cNvPr id="20" name="Straight Connector 19">
             <a:extLst>
               <a:ext uri="{FF2B5EF4-FFF2-40B4-BE49-F238E27FC236}">
-                <a16:creationId xmlns:a16="http://schemas.microsoft.com/office/drawing/2014/main" id="{CC87E76A-8F50-413D-9BFC-C5A1525BD9BC}"/>
+                <a16:creationId xmlns:a16="http://schemas.microsoft.com/office/drawing/2014/main" xmlns="" id="{CC87E76A-8F50-413D-9BFC-C5A1525BD9BC}"/>
               </a:ext>
               <a:ext uri="{C183D7F6-B498-43B3-948B-1728B52AA6E4}">
-                <adec:decorative xmlns:adec="http://schemas.microsoft.com/office/drawing/2017/decorative" val="1"/>
+                <adec:decorative xmlns:adec="http://schemas.microsoft.com/office/drawing/2017/decorative" xmlns="" val="1"/>
               </a:ext>
             </a:extLst>
           </p:cNvPr>
@@ -7631,7 +7667,7 @@
           <p:nvPr>
             <p:extLst>
               <p:ext uri="{386F3935-93C4-4BCD-93E2-E3B085C9AB24}">
-                <p16:designElem xmlns:p16="http://schemas.microsoft.com/office/powerpoint/2015/main" val="1"/>
+                <p16:designElem xmlns:p16="http://schemas.microsoft.com/office/powerpoint/2015/main" xmlns="" val="1"/>
               </p:ext>
             </p:extLst>
           </p:nvPr>
@@ -7666,10 +7702,10 @@
           <p:cNvPr id="22" name="Rectangle 21">
             <a:extLst>
               <a:ext uri="{FF2B5EF4-FFF2-40B4-BE49-F238E27FC236}">
-                <a16:creationId xmlns:a16="http://schemas.microsoft.com/office/drawing/2014/main" id="{9A1C6278-B7D5-4E8E-B4DC-834832980565}"/>
+                <a16:creationId xmlns:a16="http://schemas.microsoft.com/office/drawing/2014/main" xmlns="" id="{9A1C6278-B7D5-4E8E-B4DC-834832980565}"/>
               </a:ext>
               <a:ext uri="{C183D7F6-B498-43B3-948B-1728B52AA6E4}">
-                <adec:decorative xmlns:adec="http://schemas.microsoft.com/office/drawing/2017/decorative" val="1"/>
+                <adec:decorative xmlns:adec="http://schemas.microsoft.com/office/drawing/2017/decorative" xmlns="" val="1"/>
               </a:ext>
             </a:extLst>
           </p:cNvPr>
@@ -7679,7 +7715,7 @@
           <p:nvPr>
             <p:extLst>
               <p:ext uri="{386F3935-93C4-4BCD-93E2-E3B085C9AB24}">
-                <p16:designElem xmlns:p16="http://schemas.microsoft.com/office/powerpoint/2015/main" val="1"/>
+                <p16:designElem xmlns:p16="http://schemas.microsoft.com/office/powerpoint/2015/main" xmlns="" val="1"/>
               </p:ext>
             </p:extLst>
           </p:nvPr>
@@ -7726,10 +7762,10 @@
           <p:cNvPr id="24" name="Rectangle 23">
             <a:extLst>
               <a:ext uri="{FF2B5EF4-FFF2-40B4-BE49-F238E27FC236}">
-                <a16:creationId xmlns:a16="http://schemas.microsoft.com/office/drawing/2014/main" id="{C007F3D3-099E-430E-8754-C084D0FA5FE3}"/>
+                <a16:creationId xmlns:a16="http://schemas.microsoft.com/office/drawing/2014/main" xmlns="" id="{C007F3D3-099E-430E-8754-C084D0FA5FE3}"/>
               </a:ext>
               <a:ext uri="{C183D7F6-B498-43B3-948B-1728B52AA6E4}">
-                <adec:decorative xmlns:adec="http://schemas.microsoft.com/office/drawing/2017/decorative" val="1"/>
+                <adec:decorative xmlns:adec="http://schemas.microsoft.com/office/drawing/2017/decorative" xmlns="" val="1"/>
               </a:ext>
             </a:extLst>
           </p:cNvPr>
@@ -7739,7 +7775,7 @@
           <p:nvPr>
             <p:extLst>
               <p:ext uri="{386F3935-93C4-4BCD-93E2-E3B085C9AB24}">
-                <p16:designElem xmlns:p16="http://schemas.microsoft.com/office/powerpoint/2015/main" val="1"/>
+                <p16:designElem xmlns:p16="http://schemas.microsoft.com/office/powerpoint/2015/main" xmlns="" val="1"/>
               </p:ext>
             </p:extLst>
           </p:nvPr>
@@ -7800,7 +7836,7 @@
           <p:cNvPr id="2" name="Title 1">
             <a:extLst>
               <a:ext uri="{FF2B5EF4-FFF2-40B4-BE49-F238E27FC236}">
-                <a16:creationId xmlns:a16="http://schemas.microsoft.com/office/drawing/2014/main" id="{13CFD6D8-D4CB-7D22-6034-0448D726F997}"/>
+                <a16:creationId xmlns:a16="http://schemas.microsoft.com/office/drawing/2014/main" xmlns="" id="{13CFD6D8-D4CB-7D22-6034-0448D726F997}"/>
               </a:ext>
             </a:extLst>
           </p:cNvPr>
@@ -7835,7 +7871,7 @@
           <p:cNvPr id="5" name="Content Placeholder 4">
             <a:extLst>
               <a:ext uri="{FF2B5EF4-FFF2-40B4-BE49-F238E27FC236}">
-                <a16:creationId xmlns:a16="http://schemas.microsoft.com/office/drawing/2014/main" id="{D328A2F4-206A-9FAD-C168-CDB9610FB783}"/>
+                <a16:creationId xmlns:a16="http://schemas.microsoft.com/office/drawing/2014/main" xmlns="" id="{D328A2F4-206A-9FAD-C168-CDB9610FB783}"/>
               </a:ext>
             </a:extLst>
           </p:cNvPr>
@@ -7867,7 +7903,7 @@
           <p:cNvPr id="7" name="Picture 6">
             <a:extLst>
               <a:ext uri="{FF2B5EF4-FFF2-40B4-BE49-F238E27FC236}">
-                <a16:creationId xmlns:a16="http://schemas.microsoft.com/office/drawing/2014/main" id="{AA8CF25F-105A-EA84-AB38-9B2CDC7B3277}"/>
+                <a16:creationId xmlns:a16="http://schemas.microsoft.com/office/drawing/2014/main" xmlns="" id="{AA8CF25F-105A-EA84-AB38-9B2CDC7B3277}"/>
               </a:ext>
             </a:extLst>
           </p:cNvPr>
@@ -7897,7 +7933,7 @@
           <p:cNvPr id="9" name="Picture 8">
             <a:extLst>
               <a:ext uri="{FF2B5EF4-FFF2-40B4-BE49-F238E27FC236}">
-                <a16:creationId xmlns:a16="http://schemas.microsoft.com/office/drawing/2014/main" id="{07C5DCCD-B4B3-22CE-2C2A-CC1050E657B0}"/>
+                <a16:creationId xmlns:a16="http://schemas.microsoft.com/office/drawing/2014/main" xmlns="" id="{07C5DCCD-B4B3-22CE-2C2A-CC1050E657B0}"/>
               </a:ext>
             </a:extLst>
           </p:cNvPr>
@@ -7927,10 +7963,10 @@
           <p:cNvPr id="26" name="Straight Connector 25">
             <a:extLst>
               <a:ext uri="{FF2B5EF4-FFF2-40B4-BE49-F238E27FC236}">
-                <a16:creationId xmlns:a16="http://schemas.microsoft.com/office/drawing/2014/main" id="{6B9EA5DA-6DFD-447D-B8F9-CB95CA114076}"/>
+                <a16:creationId xmlns:a16="http://schemas.microsoft.com/office/drawing/2014/main" xmlns="" id="{6B9EA5DA-6DFD-447D-B8F9-CB95CA114076}"/>
               </a:ext>
               <a:ext uri="{C183D7F6-B498-43B3-948B-1728B52AA6E4}">
-                <adec:decorative xmlns:adec="http://schemas.microsoft.com/office/drawing/2017/decorative" val="1"/>
+                <adec:decorative xmlns:adec="http://schemas.microsoft.com/office/drawing/2017/decorative" xmlns="" val="1"/>
               </a:ext>
             </a:extLst>
           </p:cNvPr>
@@ -7940,7 +7976,7 @@
           <p:nvPr>
             <p:extLst>
               <p:ext uri="{386F3935-93C4-4BCD-93E2-E3B085C9AB24}">
-                <p16:designElem xmlns:p16="http://schemas.microsoft.com/office/powerpoint/2015/main" val="1"/>
+                <p16:designElem xmlns:p16="http://schemas.microsoft.com/office/powerpoint/2015/main" xmlns="" val="1"/>
               </p:ext>
             </p:extLst>
           </p:nvPr>
@@ -7975,10 +8011,10 @@
           <p:cNvPr id="28" name="Picture 27">
             <a:extLst>
               <a:ext uri="{FF2B5EF4-FFF2-40B4-BE49-F238E27FC236}">
-                <a16:creationId xmlns:a16="http://schemas.microsoft.com/office/drawing/2014/main" id="{87612EF9-94E7-42BA-B4A9-4B38643FBAF7}"/>
+                <a16:creationId xmlns:a16="http://schemas.microsoft.com/office/drawing/2014/main" xmlns="" id="{87612EF9-94E7-42BA-B4A9-4B38643FBAF7}"/>
               </a:ext>
               <a:ext uri="{C183D7F6-B498-43B3-948B-1728B52AA6E4}">
-                <adec:decorative xmlns:adec="http://schemas.microsoft.com/office/drawing/2017/decorative" val="1"/>
+                <adec:decorative xmlns:adec="http://schemas.microsoft.com/office/drawing/2017/decorative" xmlns="" val="1"/>
               </a:ext>
             </a:extLst>
           </p:cNvPr>
@@ -7988,7 +8024,7 @@
           <p:nvPr>
             <p:extLst>
               <p:ext uri="{386F3935-93C4-4BCD-93E2-E3B085C9AB24}">
-                <p16:designElem xmlns:p16="http://schemas.microsoft.com/office/powerpoint/2015/main" val="1"/>
+                <p16:designElem xmlns:p16="http://schemas.microsoft.com/office/powerpoint/2015/main" xmlns="" val="1"/>
               </p:ext>
             </p:extLst>
           </p:nvPr>
@@ -7997,7 +8033,7 @@
           <a:blip r:embed="rId2">
             <a:extLst>
               <a:ext uri="{28A0092B-C50C-407E-A947-70E740481C1C}">
-                <a14:useLocalDpi xmlns:a14="http://schemas.microsoft.com/office/drawing/2010/main" val="0"/>
+                <a14:useLocalDpi xmlns:a14="http://schemas.microsoft.com/office/drawing/2010/main" xmlns="" val="0"/>
               </a:ext>
             </a:extLst>
           </a:blip>
@@ -8019,10 +8055,10 @@
           <p:cNvPr id="30" name="Straight Connector 29">
             <a:extLst>
               <a:ext uri="{FF2B5EF4-FFF2-40B4-BE49-F238E27FC236}">
-                <a16:creationId xmlns:a16="http://schemas.microsoft.com/office/drawing/2014/main" id="{9E597F0B-0A17-4BF2-A904-9D99811F3E2E}"/>
+                <a16:creationId xmlns:a16="http://schemas.microsoft.com/office/drawing/2014/main" xmlns="" id="{9E597F0B-0A17-4BF2-A904-9D99811F3E2E}"/>
               </a:ext>
               <a:ext uri="{C183D7F6-B498-43B3-948B-1728B52AA6E4}">
-                <adec:decorative xmlns:adec="http://schemas.microsoft.com/office/drawing/2017/decorative" val="1"/>
+                <adec:decorative xmlns:adec="http://schemas.microsoft.com/office/drawing/2017/decorative" xmlns="" val="1"/>
               </a:ext>
             </a:extLst>
           </p:cNvPr>
@@ -8032,7 +8068,7 @@
           <p:nvPr>
             <p:extLst>
               <p:ext uri="{386F3935-93C4-4BCD-93E2-E3B085C9AB24}">
-                <p16:designElem xmlns:p16="http://schemas.microsoft.com/office/powerpoint/2015/main" val="1"/>
+                <p16:designElem xmlns:p16="http://schemas.microsoft.com/office/powerpoint/2015/main" xmlns="" val="1"/>
               </p:ext>
             </p:extLst>
           </p:nvPr>
@@ -8071,7 +8107,7 @@
     </p:spTree>
     <p:extLst>
       <p:ext uri="{BB962C8B-B14F-4D97-AF65-F5344CB8AC3E}">
-        <p14:creationId xmlns:p14="http://schemas.microsoft.com/office/powerpoint/2010/main" val="3079083219"/>
+        <p14:creationId xmlns:p14="http://schemas.microsoft.com/office/powerpoint/2010/main" xmlns="" val="3079083219"/>
       </p:ext>
     </p:extLst>
   </p:cSld>
@@ -8127,10 +8163,10 @@
           <p:cNvPr id="17" name="Rectangle 16">
             <a:extLst>
               <a:ext uri="{FF2B5EF4-FFF2-40B4-BE49-F238E27FC236}">
-                <a16:creationId xmlns:a16="http://schemas.microsoft.com/office/drawing/2014/main" id="{E724B9E8-02C8-4B2E-8770-A00A67760DF0}"/>
+                <a16:creationId xmlns:a16="http://schemas.microsoft.com/office/drawing/2014/main" xmlns="" id="{E724B9E8-02C8-4B2E-8770-A00A67760DF0}"/>
               </a:ext>
               <a:ext uri="{C183D7F6-B498-43B3-948B-1728B52AA6E4}">
-                <adec:decorative xmlns:adec="http://schemas.microsoft.com/office/drawing/2017/decorative" val="1"/>
+                <adec:decorative xmlns:adec="http://schemas.microsoft.com/office/drawing/2017/decorative" xmlns="" val="1"/>
               </a:ext>
             </a:extLst>
           </p:cNvPr>
@@ -8140,7 +8176,7 @@
           <p:nvPr>
             <p:extLst>
               <p:ext uri="{386F3935-93C4-4BCD-93E2-E3B085C9AB24}">
-                <p16:designElem xmlns:p16="http://schemas.microsoft.com/office/powerpoint/2015/main" val="1"/>
+                <p16:designElem xmlns:p16="http://schemas.microsoft.com/office/powerpoint/2015/main" xmlns="" val="1"/>
               </p:ext>
             </p:extLst>
           </p:nvPr>
@@ -8200,10 +8236,10 @@
           <p:cNvPr id="19" name="Picture 18">
             <a:extLst>
               <a:ext uri="{FF2B5EF4-FFF2-40B4-BE49-F238E27FC236}">
-                <a16:creationId xmlns:a16="http://schemas.microsoft.com/office/drawing/2014/main" id="{7B8AE548-0BFA-4792-9962-3375923C7635}"/>
+                <a16:creationId xmlns:a16="http://schemas.microsoft.com/office/drawing/2014/main" xmlns="" id="{7B8AE548-0BFA-4792-9962-3375923C7635}"/>
               </a:ext>
               <a:ext uri="{C183D7F6-B498-43B3-948B-1728B52AA6E4}">
-                <adec:decorative xmlns:adec="http://schemas.microsoft.com/office/drawing/2017/decorative" val="1"/>
+                <adec:decorative xmlns:adec="http://schemas.microsoft.com/office/drawing/2017/decorative" xmlns="" val="1"/>
               </a:ext>
             </a:extLst>
           </p:cNvPr>
@@ -8213,7 +8249,7 @@
           <p:nvPr>
             <p:extLst>
               <p:ext uri="{386F3935-93C4-4BCD-93E2-E3B085C9AB24}">
-                <p16:designElem xmlns:p16="http://schemas.microsoft.com/office/powerpoint/2015/main" val="1"/>
+                <p16:designElem xmlns:p16="http://schemas.microsoft.com/office/powerpoint/2015/main" xmlns="" val="1"/>
               </p:ext>
             </p:extLst>
           </p:nvPr>
@@ -8222,7 +8258,7 @@
           <a:blip r:embed="rId2">
             <a:extLst>
               <a:ext uri="{28A0092B-C50C-407E-A947-70E740481C1C}">
-                <a14:useLocalDpi xmlns:a14="http://schemas.microsoft.com/office/drawing/2010/main" val="0"/>
+                <a14:useLocalDpi xmlns:a14="http://schemas.microsoft.com/office/drawing/2010/main" xmlns="" val="0"/>
               </a:ext>
             </a:extLst>
           </a:blip>
@@ -8244,10 +8280,10 @@
           <p:cNvPr id="21" name="Straight Connector 20">
             <a:extLst>
               <a:ext uri="{FF2B5EF4-FFF2-40B4-BE49-F238E27FC236}">
-                <a16:creationId xmlns:a16="http://schemas.microsoft.com/office/drawing/2014/main" id="{67639EF4-FA83-4D85-90FE-B831AF283896}"/>
+                <a16:creationId xmlns:a16="http://schemas.microsoft.com/office/drawing/2014/main" xmlns="" id="{67639EF4-FA83-4D85-90FE-B831AF283896}"/>
               </a:ext>
               <a:ext uri="{C183D7F6-B498-43B3-948B-1728B52AA6E4}">
-                <adec:decorative xmlns:adec="http://schemas.microsoft.com/office/drawing/2017/decorative" val="1"/>
+                <adec:decorative xmlns:adec="http://schemas.microsoft.com/office/drawing/2017/decorative" xmlns="" val="1"/>
               </a:ext>
             </a:extLst>
           </p:cNvPr>
@@ -8257,7 +8293,7 @@
           <p:nvPr>
             <p:extLst>
               <p:ext uri="{386F3935-93C4-4BCD-93E2-E3B085C9AB24}">
-                <p16:designElem xmlns:p16="http://schemas.microsoft.com/office/powerpoint/2015/main" val="1"/>
+                <p16:designElem xmlns:p16="http://schemas.microsoft.com/office/powerpoint/2015/main" xmlns="" val="1"/>
               </p:ext>
             </p:extLst>
           </p:nvPr>
@@ -8298,10 +8334,10 @@
           <p:cNvPr id="23" name="Straight Connector 22">
             <a:extLst>
               <a:ext uri="{FF2B5EF4-FFF2-40B4-BE49-F238E27FC236}">
-                <a16:creationId xmlns:a16="http://schemas.microsoft.com/office/drawing/2014/main" id="{CC87E76A-8F50-413D-9BFC-C5A1525BD9BC}"/>
+                <a16:creationId xmlns:a16="http://schemas.microsoft.com/office/drawing/2014/main" xmlns="" id="{CC87E76A-8F50-413D-9BFC-C5A1525BD9BC}"/>
               </a:ext>
               <a:ext uri="{C183D7F6-B498-43B3-948B-1728B52AA6E4}">
-                <adec:decorative xmlns:adec="http://schemas.microsoft.com/office/drawing/2017/decorative" val="1"/>
+                <adec:decorative xmlns:adec="http://schemas.microsoft.com/office/drawing/2017/decorative" xmlns="" val="1"/>
               </a:ext>
             </a:extLst>
           </p:cNvPr>
@@ -8311,7 +8347,7 @@
           <p:nvPr>
             <p:extLst>
               <p:ext uri="{386F3935-93C4-4BCD-93E2-E3B085C9AB24}">
-                <p16:designElem xmlns:p16="http://schemas.microsoft.com/office/powerpoint/2015/main" val="1"/>
+                <p16:designElem xmlns:p16="http://schemas.microsoft.com/office/powerpoint/2015/main" xmlns="" val="1"/>
               </p:ext>
             </p:extLst>
           </p:nvPr>
@@ -8346,10 +8382,10 @@
           <p:cNvPr id="25" name="Rectangle 24">
             <a:extLst>
               <a:ext uri="{FF2B5EF4-FFF2-40B4-BE49-F238E27FC236}">
-                <a16:creationId xmlns:a16="http://schemas.microsoft.com/office/drawing/2014/main" id="{9A1C6278-B7D5-4E8E-B4DC-834832980565}"/>
+                <a16:creationId xmlns:a16="http://schemas.microsoft.com/office/drawing/2014/main" xmlns="" id="{9A1C6278-B7D5-4E8E-B4DC-834832980565}"/>
               </a:ext>
               <a:ext uri="{C183D7F6-B498-43B3-948B-1728B52AA6E4}">
-                <adec:decorative xmlns:adec="http://schemas.microsoft.com/office/drawing/2017/decorative" val="1"/>
+                <adec:decorative xmlns:adec="http://schemas.microsoft.com/office/drawing/2017/decorative" xmlns="" val="1"/>
               </a:ext>
             </a:extLst>
           </p:cNvPr>
@@ -8359,7 +8395,7 @@
           <p:nvPr>
             <p:extLst>
               <p:ext uri="{386F3935-93C4-4BCD-93E2-E3B085C9AB24}">
-                <p16:designElem xmlns:p16="http://schemas.microsoft.com/office/powerpoint/2015/main" val="1"/>
+                <p16:designElem xmlns:p16="http://schemas.microsoft.com/office/powerpoint/2015/main" xmlns="" val="1"/>
               </p:ext>
             </p:extLst>
           </p:nvPr>
@@ -8406,10 +8442,10 @@
           <p:cNvPr id="27" name="Rectangle 26">
             <a:extLst>
               <a:ext uri="{FF2B5EF4-FFF2-40B4-BE49-F238E27FC236}">
-                <a16:creationId xmlns:a16="http://schemas.microsoft.com/office/drawing/2014/main" id="{C007F3D3-099E-430E-8754-C084D0FA5FE3}"/>
+                <a16:creationId xmlns:a16="http://schemas.microsoft.com/office/drawing/2014/main" xmlns="" id="{C007F3D3-099E-430E-8754-C084D0FA5FE3}"/>
               </a:ext>
               <a:ext uri="{C183D7F6-B498-43B3-948B-1728B52AA6E4}">
-                <adec:decorative xmlns:adec="http://schemas.microsoft.com/office/drawing/2017/decorative" val="1"/>
+                <adec:decorative xmlns:adec="http://schemas.microsoft.com/office/drawing/2017/decorative" xmlns="" val="1"/>
               </a:ext>
             </a:extLst>
           </p:cNvPr>
@@ -8419,7 +8455,7 @@
           <p:nvPr>
             <p:extLst>
               <p:ext uri="{386F3935-93C4-4BCD-93E2-E3B085C9AB24}">
-                <p16:designElem xmlns:p16="http://schemas.microsoft.com/office/powerpoint/2015/main" val="1"/>
+                <p16:designElem xmlns:p16="http://schemas.microsoft.com/office/powerpoint/2015/main" xmlns="" val="1"/>
               </p:ext>
             </p:extLst>
           </p:nvPr>
@@ -8480,7 +8516,7 @@
           <p:cNvPr id="2" name="Title 1">
             <a:extLst>
               <a:ext uri="{FF2B5EF4-FFF2-40B4-BE49-F238E27FC236}">
-                <a16:creationId xmlns:a16="http://schemas.microsoft.com/office/drawing/2014/main" id="{0C05D6E9-FB34-5D4E-D478-F5A8B0E7C25A}"/>
+                <a16:creationId xmlns:a16="http://schemas.microsoft.com/office/drawing/2014/main" xmlns="" id="{0C05D6E9-FB34-5D4E-D478-F5A8B0E7C25A}"/>
               </a:ext>
             </a:extLst>
           </p:cNvPr>
@@ -8515,7 +8551,7 @@
           <p:cNvPr id="7" name="Content Placeholder 6">
             <a:extLst>
               <a:ext uri="{FF2B5EF4-FFF2-40B4-BE49-F238E27FC236}">
-                <a16:creationId xmlns:a16="http://schemas.microsoft.com/office/drawing/2014/main" id="{5CAD100C-B467-C9FA-742C-83A81B896BF9}"/>
+                <a16:creationId xmlns:a16="http://schemas.microsoft.com/office/drawing/2014/main" xmlns="" id="{5CAD100C-B467-C9FA-742C-83A81B896BF9}"/>
               </a:ext>
             </a:extLst>
           </p:cNvPr>
@@ -8547,7 +8583,7 @@
           <p:cNvPr id="12" name="Picture 11">
             <a:extLst>
               <a:ext uri="{FF2B5EF4-FFF2-40B4-BE49-F238E27FC236}">
-                <a16:creationId xmlns:a16="http://schemas.microsoft.com/office/drawing/2014/main" id="{31D188B4-F8EB-7281-F69A-9DE7E48DAAA3}"/>
+                <a16:creationId xmlns:a16="http://schemas.microsoft.com/office/drawing/2014/main" xmlns="" id="{31D188B4-F8EB-7281-F69A-9DE7E48DAAA3}"/>
               </a:ext>
             </a:extLst>
           </p:cNvPr>
@@ -8577,7 +8613,7 @@
           <p:cNvPr id="9" name="Picture 8">
             <a:extLst>
               <a:ext uri="{FF2B5EF4-FFF2-40B4-BE49-F238E27FC236}">
-                <a16:creationId xmlns:a16="http://schemas.microsoft.com/office/drawing/2014/main" id="{D59158A9-81B7-7204-17BE-FD603E88906B}"/>
+                <a16:creationId xmlns:a16="http://schemas.microsoft.com/office/drawing/2014/main" xmlns="" id="{D59158A9-81B7-7204-17BE-FD603E88906B}"/>
               </a:ext>
             </a:extLst>
           </p:cNvPr>
@@ -8607,10 +8643,10 @@
           <p:cNvPr id="29" name="Straight Connector 28">
             <a:extLst>
               <a:ext uri="{FF2B5EF4-FFF2-40B4-BE49-F238E27FC236}">
-                <a16:creationId xmlns:a16="http://schemas.microsoft.com/office/drawing/2014/main" id="{6B9EA5DA-6DFD-447D-B8F9-CB95CA114076}"/>
+                <a16:creationId xmlns:a16="http://schemas.microsoft.com/office/drawing/2014/main" xmlns="" id="{6B9EA5DA-6DFD-447D-B8F9-CB95CA114076}"/>
               </a:ext>
               <a:ext uri="{C183D7F6-B498-43B3-948B-1728B52AA6E4}">
-                <adec:decorative xmlns:adec="http://schemas.microsoft.com/office/drawing/2017/decorative" val="1"/>
+                <adec:decorative xmlns:adec="http://schemas.microsoft.com/office/drawing/2017/decorative" xmlns="" val="1"/>
               </a:ext>
             </a:extLst>
           </p:cNvPr>
@@ -8620,7 +8656,7 @@
           <p:nvPr>
             <p:extLst>
               <p:ext uri="{386F3935-93C4-4BCD-93E2-E3B085C9AB24}">
-                <p16:designElem xmlns:p16="http://schemas.microsoft.com/office/powerpoint/2015/main" val="1"/>
+                <p16:designElem xmlns:p16="http://schemas.microsoft.com/office/powerpoint/2015/main" xmlns="" val="1"/>
               </p:ext>
             </p:extLst>
           </p:nvPr>
@@ -8655,10 +8691,10 @@
           <p:cNvPr id="31" name="Picture 30">
             <a:extLst>
               <a:ext uri="{FF2B5EF4-FFF2-40B4-BE49-F238E27FC236}">
-                <a16:creationId xmlns:a16="http://schemas.microsoft.com/office/drawing/2014/main" id="{87612EF9-94E7-42BA-B4A9-4B38643FBAF7}"/>
+                <a16:creationId xmlns:a16="http://schemas.microsoft.com/office/drawing/2014/main" xmlns="" id="{87612EF9-94E7-42BA-B4A9-4B38643FBAF7}"/>
               </a:ext>
               <a:ext uri="{C183D7F6-B498-43B3-948B-1728B52AA6E4}">
-                <adec:decorative xmlns:adec="http://schemas.microsoft.com/office/drawing/2017/decorative" val="1"/>
+                <adec:decorative xmlns:adec="http://schemas.microsoft.com/office/drawing/2017/decorative" xmlns="" val="1"/>
               </a:ext>
             </a:extLst>
           </p:cNvPr>
@@ -8668,7 +8704,7 @@
           <p:nvPr>
             <p:extLst>
               <p:ext uri="{386F3935-93C4-4BCD-93E2-E3B085C9AB24}">
-                <p16:designElem xmlns:p16="http://schemas.microsoft.com/office/powerpoint/2015/main" val="1"/>
+                <p16:designElem xmlns:p16="http://schemas.microsoft.com/office/powerpoint/2015/main" xmlns="" val="1"/>
               </p:ext>
             </p:extLst>
           </p:nvPr>
@@ -8677,7 +8713,7 @@
           <a:blip r:embed="rId2">
             <a:extLst>
               <a:ext uri="{28A0092B-C50C-407E-A947-70E740481C1C}">
-                <a14:useLocalDpi xmlns:a14="http://schemas.microsoft.com/office/drawing/2010/main" val="0"/>
+                <a14:useLocalDpi xmlns:a14="http://schemas.microsoft.com/office/drawing/2010/main" xmlns="" val="0"/>
               </a:ext>
             </a:extLst>
           </a:blip>
@@ -8699,10 +8735,10 @@
           <p:cNvPr id="33" name="Straight Connector 32">
             <a:extLst>
               <a:ext uri="{FF2B5EF4-FFF2-40B4-BE49-F238E27FC236}">
-                <a16:creationId xmlns:a16="http://schemas.microsoft.com/office/drawing/2014/main" id="{9E597F0B-0A17-4BF2-A904-9D99811F3E2E}"/>
+                <a16:creationId xmlns:a16="http://schemas.microsoft.com/office/drawing/2014/main" xmlns="" id="{9E597F0B-0A17-4BF2-A904-9D99811F3E2E}"/>
               </a:ext>
               <a:ext uri="{C183D7F6-B498-43B3-948B-1728B52AA6E4}">
-                <adec:decorative xmlns:adec="http://schemas.microsoft.com/office/drawing/2017/decorative" val="1"/>
+                <adec:decorative xmlns:adec="http://schemas.microsoft.com/office/drawing/2017/decorative" xmlns="" val="1"/>
               </a:ext>
             </a:extLst>
           </p:cNvPr>
@@ -8712,7 +8748,7 @@
           <p:nvPr>
             <p:extLst>
               <p:ext uri="{386F3935-93C4-4BCD-93E2-E3B085C9AB24}">
-                <p16:designElem xmlns:p16="http://schemas.microsoft.com/office/powerpoint/2015/main" val="1"/>
+                <p16:designElem xmlns:p16="http://schemas.microsoft.com/office/powerpoint/2015/main" xmlns="" val="1"/>
               </p:ext>
             </p:extLst>
           </p:nvPr>
@@ -8751,7 +8787,7 @@
     </p:spTree>
     <p:extLst>
       <p:ext uri="{BB962C8B-B14F-4D97-AF65-F5344CB8AC3E}">
-        <p14:creationId xmlns:p14="http://schemas.microsoft.com/office/powerpoint/2010/main" val="3817290165"/>
+        <p14:creationId xmlns:p14="http://schemas.microsoft.com/office/powerpoint/2010/main" xmlns="" val="3817290165"/>
       </p:ext>
     </p:extLst>
   </p:cSld>
@@ -8807,10 +8843,10 @@
           <p:cNvPr id="33" name="Rectangle 32">
             <a:extLst>
               <a:ext uri="{FF2B5EF4-FFF2-40B4-BE49-F238E27FC236}">
-                <a16:creationId xmlns:a16="http://schemas.microsoft.com/office/drawing/2014/main" id="{EEA869E1-F851-4A52-92F5-77E592B76A5B}"/>
+                <a16:creationId xmlns:a16="http://schemas.microsoft.com/office/drawing/2014/main" xmlns="" id="{EEA869E1-F851-4A52-92F5-77E592B76A5B}"/>
               </a:ext>
               <a:ext uri="{C183D7F6-B498-43B3-948B-1728B52AA6E4}">
-                <adec:decorative xmlns:adec="http://schemas.microsoft.com/office/drawing/2017/decorative" val="1"/>
+                <adec:decorative xmlns:adec="http://schemas.microsoft.com/office/drawing/2017/decorative" xmlns="" val="1"/>
               </a:ext>
             </a:extLst>
           </p:cNvPr>
@@ -8820,7 +8856,7 @@
           <p:nvPr>
             <p:extLst>
               <p:ext uri="{386F3935-93C4-4BCD-93E2-E3B085C9AB24}">
-                <p16:designElem xmlns:p16="http://schemas.microsoft.com/office/powerpoint/2015/main" val="1"/>
+                <p16:designElem xmlns:p16="http://schemas.microsoft.com/office/powerpoint/2015/main" xmlns="" val="1"/>
               </p:ext>
             </p:extLst>
           </p:nvPr>
@@ -8880,10 +8916,10 @@
           <p:cNvPr id="35" name="Picture 34">
             <a:extLst>
               <a:ext uri="{FF2B5EF4-FFF2-40B4-BE49-F238E27FC236}">
-                <a16:creationId xmlns:a16="http://schemas.microsoft.com/office/drawing/2014/main" id="{B083AD55-8296-44BD-8E14-DD2DDBC351B0}"/>
+                <a16:creationId xmlns:a16="http://schemas.microsoft.com/office/drawing/2014/main" xmlns="" id="{B083AD55-8296-44BD-8E14-DD2DDBC351B0}"/>
               </a:ext>
               <a:ext uri="{C183D7F6-B498-43B3-948B-1728B52AA6E4}">
-                <adec:decorative xmlns:adec="http://schemas.microsoft.com/office/drawing/2017/decorative" val="1"/>
+                <adec:decorative xmlns:adec="http://schemas.microsoft.com/office/drawing/2017/decorative" xmlns="" val="1"/>
               </a:ext>
             </a:extLst>
           </p:cNvPr>
@@ -8893,7 +8929,7 @@
           <p:nvPr>
             <p:extLst>
               <p:ext uri="{386F3935-93C4-4BCD-93E2-E3B085C9AB24}">
-                <p16:designElem xmlns:p16="http://schemas.microsoft.com/office/powerpoint/2015/main" val="1"/>
+                <p16:designElem xmlns:p16="http://schemas.microsoft.com/office/powerpoint/2015/main" xmlns="" val="1"/>
               </p:ext>
             </p:extLst>
           </p:nvPr>
@@ -8902,7 +8938,7 @@
           <a:blip r:embed="rId2">
             <a:extLst>
               <a:ext uri="{28A0092B-C50C-407E-A947-70E740481C1C}">
-                <a14:useLocalDpi xmlns:a14="http://schemas.microsoft.com/office/drawing/2010/main" val="0"/>
+                <a14:useLocalDpi xmlns:a14="http://schemas.microsoft.com/office/drawing/2010/main" xmlns="" val="0"/>
               </a:ext>
             </a:extLst>
           </a:blip>
@@ -8924,10 +8960,10 @@
           <p:cNvPr id="37" name="Straight Connector 36">
             <a:extLst>
               <a:ext uri="{FF2B5EF4-FFF2-40B4-BE49-F238E27FC236}">
-                <a16:creationId xmlns:a16="http://schemas.microsoft.com/office/drawing/2014/main" id="{2BF46B26-15FC-4C5A-94FA-AE9ED64B5C20}"/>
+                <a16:creationId xmlns:a16="http://schemas.microsoft.com/office/drawing/2014/main" xmlns="" id="{2BF46B26-15FC-4C5A-94FA-AE9ED64B5C20}"/>
               </a:ext>
               <a:ext uri="{C183D7F6-B498-43B3-948B-1728B52AA6E4}">
-                <adec:decorative xmlns:adec="http://schemas.microsoft.com/office/drawing/2017/decorative" val="1"/>
+                <adec:decorative xmlns:adec="http://schemas.microsoft.com/office/drawing/2017/decorative" xmlns="" val="1"/>
               </a:ext>
             </a:extLst>
           </p:cNvPr>
@@ -8937,7 +8973,7 @@
           <p:nvPr>
             <p:extLst>
               <p:ext uri="{386F3935-93C4-4BCD-93E2-E3B085C9AB24}">
-                <p16:designElem xmlns:p16="http://schemas.microsoft.com/office/powerpoint/2015/main" val="1"/>
+                <p16:designElem xmlns:p16="http://schemas.microsoft.com/office/powerpoint/2015/main" xmlns="" val="1"/>
               </p:ext>
             </p:extLst>
           </p:nvPr>
@@ -8978,10 +9014,10 @@
           <p:cNvPr id="39" name="Straight Connector 38">
             <a:extLst>
               <a:ext uri="{FF2B5EF4-FFF2-40B4-BE49-F238E27FC236}">
-                <a16:creationId xmlns:a16="http://schemas.microsoft.com/office/drawing/2014/main" id="{912F6065-5345-44BD-B66E-5487CCD7A9B9}"/>
+                <a16:creationId xmlns:a16="http://schemas.microsoft.com/office/drawing/2014/main" xmlns="" id="{912F6065-5345-44BD-B66E-5487CCD7A9B9}"/>
               </a:ext>
               <a:ext uri="{C183D7F6-B498-43B3-948B-1728B52AA6E4}">
-                <adec:decorative xmlns:adec="http://schemas.microsoft.com/office/drawing/2017/decorative" val="1"/>
+                <adec:decorative xmlns:adec="http://schemas.microsoft.com/office/drawing/2017/decorative" xmlns="" val="1"/>
               </a:ext>
             </a:extLst>
           </p:cNvPr>
@@ -8991,7 +9027,7 @@
           <p:nvPr>
             <p:extLst>
               <p:ext uri="{386F3935-93C4-4BCD-93E2-E3B085C9AB24}">
-                <p16:designElem xmlns:p16="http://schemas.microsoft.com/office/powerpoint/2015/main" val="1"/>
+                <p16:designElem xmlns:p16="http://schemas.microsoft.com/office/powerpoint/2015/main" xmlns="" val="1"/>
               </p:ext>
             </p:extLst>
           </p:nvPr>
@@ -9026,10 +9062,10 @@
           <p:cNvPr id="41" name="Rectangle 40">
             <a:extLst>
               <a:ext uri="{FF2B5EF4-FFF2-40B4-BE49-F238E27FC236}">
-                <a16:creationId xmlns:a16="http://schemas.microsoft.com/office/drawing/2014/main" id="{E7ABCFA2-55B0-438C-A39A-637FFC6246E8}"/>
+                <a16:creationId xmlns:a16="http://schemas.microsoft.com/office/drawing/2014/main" xmlns="" id="{E7ABCFA2-55B0-438C-A39A-637FFC6246E8}"/>
               </a:ext>
               <a:ext uri="{C183D7F6-B498-43B3-948B-1728B52AA6E4}">
-                <adec:decorative xmlns:adec="http://schemas.microsoft.com/office/drawing/2017/decorative" val="1"/>
+                <adec:decorative xmlns:adec="http://schemas.microsoft.com/office/drawing/2017/decorative" xmlns="" val="1"/>
               </a:ext>
             </a:extLst>
           </p:cNvPr>
@@ -9039,7 +9075,7 @@
           <p:nvPr>
             <p:extLst>
               <p:ext uri="{386F3935-93C4-4BCD-93E2-E3B085C9AB24}">
-                <p16:designElem xmlns:p16="http://schemas.microsoft.com/office/powerpoint/2015/main" val="1"/>
+                <p16:designElem xmlns:p16="http://schemas.microsoft.com/office/powerpoint/2015/main" xmlns="" val="1"/>
               </p:ext>
             </p:extLst>
           </p:nvPr>
@@ -9086,10 +9122,10 @@
           <p:cNvPr id="43" name="Rectangle 42">
             <a:extLst>
               <a:ext uri="{FF2B5EF4-FFF2-40B4-BE49-F238E27FC236}">
-                <a16:creationId xmlns:a16="http://schemas.microsoft.com/office/drawing/2014/main" id="{1BD2C934-710E-4E0E-9ED4-03F07E019205}"/>
+                <a16:creationId xmlns:a16="http://schemas.microsoft.com/office/drawing/2014/main" xmlns="" id="{1BD2C934-710E-4E0E-9ED4-03F07E019205}"/>
               </a:ext>
               <a:ext uri="{C183D7F6-B498-43B3-948B-1728B52AA6E4}">
-                <adec:decorative xmlns:adec="http://schemas.microsoft.com/office/drawing/2017/decorative" val="1"/>
+                <adec:decorative xmlns:adec="http://schemas.microsoft.com/office/drawing/2017/decorative" xmlns="" val="1"/>
               </a:ext>
             </a:extLst>
           </p:cNvPr>
@@ -9099,7 +9135,7 @@
           <p:nvPr>
             <p:extLst>
               <p:ext uri="{386F3935-93C4-4BCD-93E2-E3B085C9AB24}">
-                <p16:designElem xmlns:p16="http://schemas.microsoft.com/office/powerpoint/2015/main" val="1"/>
+                <p16:designElem xmlns:p16="http://schemas.microsoft.com/office/powerpoint/2015/main" xmlns="" val="1"/>
               </p:ext>
             </p:extLst>
           </p:nvPr>
@@ -9160,7 +9196,7 @@
           <p:cNvPr id="2" name="Title 1">
             <a:extLst>
               <a:ext uri="{FF2B5EF4-FFF2-40B4-BE49-F238E27FC236}">
-                <a16:creationId xmlns:a16="http://schemas.microsoft.com/office/drawing/2014/main" id="{BAF48F60-BA92-C874-30CC-5ED58A820747}"/>
+                <a16:creationId xmlns:a16="http://schemas.microsoft.com/office/drawing/2014/main" xmlns="" id="{BAF48F60-BA92-C874-30CC-5ED58A820747}"/>
               </a:ext>
             </a:extLst>
           </p:cNvPr>
@@ -9200,10 +9236,10 @@
           <p:cNvPr id="45" name="Straight Connector 44">
             <a:extLst>
               <a:ext uri="{FF2B5EF4-FFF2-40B4-BE49-F238E27FC236}">
-                <a16:creationId xmlns:a16="http://schemas.microsoft.com/office/drawing/2014/main" id="{0AD0F4F3-8F5C-421F-9FC1-DB3ED0BF61DF}"/>
+                <a16:creationId xmlns:a16="http://schemas.microsoft.com/office/drawing/2014/main" xmlns="" id="{0AD0F4F3-8F5C-421F-9FC1-DB3ED0BF61DF}"/>
               </a:ext>
               <a:ext uri="{C183D7F6-B498-43B3-948B-1728B52AA6E4}">
-                <adec:decorative xmlns:adec="http://schemas.microsoft.com/office/drawing/2017/decorative" val="1"/>
+                <adec:decorative xmlns:adec="http://schemas.microsoft.com/office/drawing/2017/decorative" xmlns="" val="1"/>
               </a:ext>
             </a:extLst>
           </p:cNvPr>
@@ -9213,7 +9249,7 @@
           <p:nvPr>
             <p:extLst>
               <p:ext uri="{386F3935-93C4-4BCD-93E2-E3B085C9AB24}">
-                <p16:designElem xmlns:p16="http://schemas.microsoft.com/office/powerpoint/2015/main" val="1"/>
+                <p16:designElem xmlns:p16="http://schemas.microsoft.com/office/powerpoint/2015/main" xmlns="" val="1"/>
               </p:ext>
             </p:extLst>
           </p:nvPr>
@@ -9248,7 +9284,7 @@
           <p:cNvPr id="7" name="Picture 6">
             <a:extLst>
               <a:ext uri="{FF2B5EF4-FFF2-40B4-BE49-F238E27FC236}">
-                <a16:creationId xmlns:a16="http://schemas.microsoft.com/office/drawing/2014/main" id="{234C8A63-DED3-546C-6BEE-CEFFDC8E281B}"/>
+                <a16:creationId xmlns:a16="http://schemas.microsoft.com/office/drawing/2014/main" xmlns="" id="{234C8A63-DED3-546C-6BEE-CEFFDC8E281B}"/>
               </a:ext>
             </a:extLst>
           </p:cNvPr>
@@ -9278,7 +9314,7 @@
           <p:cNvPr id="5" name="Picture 4">
             <a:extLst>
               <a:ext uri="{FF2B5EF4-FFF2-40B4-BE49-F238E27FC236}">
-                <a16:creationId xmlns:a16="http://schemas.microsoft.com/office/drawing/2014/main" id="{468886C1-6620-95E9-B1BE-EABD49FF3267}"/>
+                <a16:creationId xmlns:a16="http://schemas.microsoft.com/office/drawing/2014/main" xmlns="" id="{468886C1-6620-95E9-B1BE-EABD49FF3267}"/>
               </a:ext>
             </a:extLst>
           </p:cNvPr>
@@ -9308,10 +9344,10 @@
           <p:cNvPr id="47" name="Picture 46">
             <a:extLst>
               <a:ext uri="{FF2B5EF4-FFF2-40B4-BE49-F238E27FC236}">
-                <a16:creationId xmlns:a16="http://schemas.microsoft.com/office/drawing/2014/main" id="{B0A40572-62E5-460B-AD24-B6628527ACB1}"/>
+                <a16:creationId xmlns:a16="http://schemas.microsoft.com/office/drawing/2014/main" xmlns="" id="{B0A40572-62E5-460B-AD24-B6628527ACB1}"/>
               </a:ext>
               <a:ext uri="{C183D7F6-B498-43B3-948B-1728B52AA6E4}">
-                <adec:decorative xmlns:adec="http://schemas.microsoft.com/office/drawing/2017/decorative" val="1"/>
+                <adec:decorative xmlns:adec="http://schemas.microsoft.com/office/drawing/2017/decorative" xmlns="" val="1"/>
               </a:ext>
             </a:extLst>
           </p:cNvPr>
@@ -9321,7 +9357,7 @@
           <p:nvPr>
             <p:extLst>
               <p:ext uri="{386F3935-93C4-4BCD-93E2-E3B085C9AB24}">
-                <p16:designElem xmlns:p16="http://schemas.microsoft.com/office/powerpoint/2015/main" val="1"/>
+                <p16:designElem xmlns:p16="http://schemas.microsoft.com/office/powerpoint/2015/main" xmlns="" val="1"/>
               </p:ext>
             </p:extLst>
           </p:nvPr>
@@ -9330,7 +9366,7 @@
           <a:blip r:embed="rId2">
             <a:extLst>
               <a:ext uri="{28A0092B-C50C-407E-A947-70E740481C1C}">
-                <a14:useLocalDpi xmlns:a14="http://schemas.microsoft.com/office/drawing/2010/main" val="0"/>
+                <a14:useLocalDpi xmlns:a14="http://schemas.microsoft.com/office/drawing/2010/main" xmlns="" val="0"/>
               </a:ext>
             </a:extLst>
           </a:blip>
@@ -9352,10 +9388,10 @@
           <p:cNvPr id="49" name="Straight Connector 48">
             <a:extLst>
               <a:ext uri="{FF2B5EF4-FFF2-40B4-BE49-F238E27FC236}">
-                <a16:creationId xmlns:a16="http://schemas.microsoft.com/office/drawing/2014/main" id="{F1D872D4-D7E5-4CD8-9DAC-2BC612F08E69}"/>
+                <a16:creationId xmlns:a16="http://schemas.microsoft.com/office/drawing/2014/main" xmlns="" id="{F1D872D4-D7E5-4CD8-9DAC-2BC612F08E69}"/>
               </a:ext>
               <a:ext uri="{C183D7F6-B498-43B3-948B-1728B52AA6E4}">
-                <adec:decorative xmlns:adec="http://schemas.microsoft.com/office/drawing/2017/decorative" val="1"/>
+                <adec:decorative xmlns:adec="http://schemas.microsoft.com/office/drawing/2017/decorative" xmlns="" val="1"/>
               </a:ext>
             </a:extLst>
           </p:cNvPr>
@@ -9365,7 +9401,7 @@
           <p:nvPr>
             <p:extLst>
               <p:ext uri="{386F3935-93C4-4BCD-93E2-E3B085C9AB24}">
-                <p16:designElem xmlns:p16="http://schemas.microsoft.com/office/powerpoint/2015/main" val="1"/>
+                <p16:designElem xmlns:p16="http://schemas.microsoft.com/office/powerpoint/2015/main" xmlns="" val="1"/>
               </p:ext>
             </p:extLst>
           </p:nvPr>
@@ -9404,9 +9440,267 @@
     </p:spTree>
     <p:extLst>
       <p:ext uri="{BB962C8B-B14F-4D97-AF65-F5344CB8AC3E}">
-        <p14:creationId xmlns:p14="http://schemas.microsoft.com/office/powerpoint/2010/main" val="858810309"/>
+        <p14:creationId xmlns:p14="http://schemas.microsoft.com/office/powerpoint/2010/main" xmlns="" val="858810309"/>
       </p:ext>
     </p:extLst>
+  </p:cSld>
+  <p:clrMapOvr>
+    <a:masterClrMapping/>
+  </p:clrMapOvr>
+</p:sld>
+</file>
+
+<file path=ppt/slides/slide18.xml><?xml version="1.0" encoding="utf-8"?>
+<p:sld xmlns:a="http://schemas.openxmlformats.org/drawingml/2006/main" xmlns:r="http://schemas.openxmlformats.org/officeDocument/2006/relationships" xmlns:p="http://schemas.openxmlformats.org/presentationml/2006/main">
+  <p:cSld>
+    <p:spTree>
+      <p:nvGrpSpPr>
+        <p:cNvPr id="1" name=""/>
+        <p:cNvGrpSpPr/>
+        <p:nvPr/>
+      </p:nvGrpSpPr>
+      <p:grpSpPr>
+        <a:xfrm>
+          <a:off x="0" y="0"/>
+          <a:ext cx="0" cy="0"/>
+          <a:chOff x="0" y="0"/>
+          <a:chExt cx="0" cy="0"/>
+        </a:xfrm>
+      </p:grpSpPr>
+      <p:sp>
+        <p:nvSpPr>
+          <p:cNvPr id="2" name="Cím 1"/>
+          <p:cNvSpPr>
+            <a:spLocks noGrp="1"/>
+          </p:cNvSpPr>
+          <p:nvPr>
+            <p:ph type="title"/>
+          </p:nvPr>
+        </p:nvSpPr>
+        <p:spPr>
+          <a:xfrm>
+            <a:off x="1444671" y="798973"/>
+            <a:ext cx="3273099" cy="2418680"/>
+          </a:xfrm>
+        </p:spPr>
+        <p:txBody>
+          <a:bodyPr>
+            <a:normAutofit/>
+          </a:bodyPr>
+          <a:lstStyle/>
+          <a:p>
+            <a:r>
+              <a:rPr lang="hu-HU" sz="3200" dirty="0" smtClean="0"/>
+              <a:t>Czeitner András - management</a:t>
+            </a:r>
+            <a:endParaRPr lang="hu-HU" sz="3200" dirty="0"/>
+          </a:p>
+        </p:txBody>
+      </p:sp>
+      <p:pic>
+        <p:nvPicPr>
+          <p:cNvPr id="5" name="Picture 12" descr="https://cdn.discordapp.com/attachments/812059683393110017/1439310372174692543/image.png?ex=691a0dbd&amp;is=6918bc3d&amp;hm=2473b7bf2008278831746b824589489045399c33f76371eede42d79fa3eba8a6&amp;"/>
+          <p:cNvPicPr>
+            <a:picLocks noChangeAspect="1" noChangeArrowheads="1"/>
+          </p:cNvPicPr>
+          <p:nvPr/>
+        </p:nvPicPr>
+        <p:blipFill>
+          <a:blip r:embed="rId2"/>
+          <a:srcRect/>
+          <a:stretch>
+            <a:fillRect/>
+          </a:stretch>
+        </p:blipFill>
+        <p:spPr bwMode="auto">
+          <a:xfrm>
+            <a:off x="845688" y="3752470"/>
+            <a:ext cx="5951926" cy="2558620"/>
+          </a:xfrm>
+          <a:prstGeom prst="rect">
+            <a:avLst/>
+          </a:prstGeom>
+          <a:noFill/>
+        </p:spPr>
+      </p:pic>
+      <p:pic>
+        <p:nvPicPr>
+          <p:cNvPr id="6" name="Picture 18" descr="https://cdn.discordapp.com/attachments/812059683393110017/1439311303293407394/image.png?ex=691a0e9b&amp;is=6918bd1b&amp;hm=b76267a9bd8fa2df8afb55329ccd083691ebc55d7bd545a7cf79ae6182b702a7&amp;"/>
+          <p:cNvPicPr>
+            <a:picLocks noChangeAspect="1" noChangeArrowheads="1"/>
+          </p:cNvPicPr>
+          <p:nvPr/>
+        </p:nvPicPr>
+        <p:blipFill>
+          <a:blip r:embed="rId3"/>
+          <a:srcRect/>
+          <a:stretch>
+            <a:fillRect/>
+          </a:stretch>
+        </p:blipFill>
+        <p:spPr bwMode="auto">
+          <a:xfrm>
+            <a:off x="7738196" y="1454523"/>
+            <a:ext cx="4192138" cy="4427075"/>
+          </a:xfrm>
+          <a:prstGeom prst="rect">
+            <a:avLst/>
+          </a:prstGeom>
+          <a:noFill/>
+        </p:spPr>
+      </p:pic>
+      <p:pic>
+        <p:nvPicPr>
+          <p:cNvPr id="7" name="Picture 2" descr="https://cdn.discordapp.com/attachments/812059683393110017/1439310147083173888/image.png?ex=691a0d88&amp;is=6918bc08&amp;hm=d9dde2fb7ff6f43b87336b768ad315f76d4e8049f9de17a1e67f0bc5c96e4af5&amp;"/>
+          <p:cNvPicPr>
+            <a:picLocks noChangeAspect="1" noChangeArrowheads="1"/>
+          </p:cNvPicPr>
+          <p:nvPr/>
+        </p:nvPicPr>
+        <p:blipFill>
+          <a:blip r:embed="rId4"/>
+          <a:srcRect/>
+          <a:stretch>
+            <a:fillRect/>
+          </a:stretch>
+        </p:blipFill>
+        <p:spPr bwMode="auto">
+          <a:xfrm>
+            <a:off x="5383184" y="285420"/>
+            <a:ext cx="2061495" cy="3303169"/>
+          </a:xfrm>
+          <a:prstGeom prst="rect">
+            <a:avLst/>
+          </a:prstGeom>
+          <a:noFill/>
+        </p:spPr>
+      </p:pic>
+    </p:spTree>
+  </p:cSld>
+  <p:clrMapOvr>
+    <a:masterClrMapping/>
+  </p:clrMapOvr>
+</p:sld>
+</file>
+
+<file path=ppt/slides/slide19.xml><?xml version="1.0" encoding="utf-8"?>
+<p:sld xmlns:a="http://schemas.openxmlformats.org/drawingml/2006/main" xmlns:r="http://schemas.openxmlformats.org/officeDocument/2006/relationships" xmlns:p="http://schemas.openxmlformats.org/presentationml/2006/main">
+  <p:cSld>
+    <p:spTree>
+      <p:nvGrpSpPr>
+        <p:cNvPr id="1" name=""/>
+        <p:cNvGrpSpPr/>
+        <p:nvPr/>
+      </p:nvGrpSpPr>
+      <p:grpSpPr>
+        <a:xfrm>
+          <a:off x="0" y="0"/>
+          <a:ext cx="0" cy="0"/>
+          <a:chOff x="0" y="0"/>
+          <a:chExt cx="0" cy="0"/>
+        </a:xfrm>
+      </p:grpSpPr>
+      <p:sp>
+        <p:nvSpPr>
+          <p:cNvPr id="2" name="Cím 1"/>
+          <p:cNvSpPr>
+            <a:spLocks noGrp="1"/>
+          </p:cNvSpPr>
+          <p:nvPr>
+            <p:ph type="title"/>
+          </p:nvPr>
+        </p:nvSpPr>
+        <p:spPr>
+          <a:xfrm>
+            <a:off x="1408446" y="1253095"/>
+            <a:ext cx="8115115" cy="592958"/>
+          </a:xfrm>
+        </p:spPr>
+        <p:txBody>
+          <a:bodyPr>
+            <a:normAutofit/>
+          </a:bodyPr>
+          <a:lstStyle/>
+          <a:p>
+            <a:r>
+              <a:rPr lang="hu-HU" dirty="0" smtClean="0"/>
+              <a:t>Czeitner András - </a:t>
+            </a:r>
+            <a:r>
+              <a:rPr lang="hu-HU" dirty="0" err="1" smtClean="0"/>
+              <a:t>Git</a:t>
+            </a:r>
+            <a:endParaRPr lang="hu-HU" dirty="0"/>
+          </a:p>
+        </p:txBody>
+      </p:sp>
+      <p:pic>
+        <p:nvPicPr>
+          <p:cNvPr id="34827" name="Picture 11"/>
+          <p:cNvPicPr>
+            <a:picLocks noChangeAspect="1" noChangeArrowheads="1"/>
+          </p:cNvPicPr>
+          <p:nvPr/>
+        </p:nvPicPr>
+        <p:blipFill>
+          <a:blip r:embed="rId2"/>
+          <a:srcRect/>
+          <a:stretch>
+            <a:fillRect/>
+          </a:stretch>
+        </p:blipFill>
+        <p:spPr bwMode="auto">
+          <a:xfrm>
+            <a:off x="5917362" y="2409735"/>
+            <a:ext cx="5981700" cy="3228975"/>
+          </a:xfrm>
+          <a:prstGeom prst="rect">
+            <a:avLst/>
+          </a:prstGeom>
+          <a:noFill/>
+          <a:ln w="9525">
+            <a:noFill/>
+            <a:miter lim="800000"/>
+            <a:headEnd/>
+            <a:tailEnd/>
+          </a:ln>
+          <a:effectLst/>
+        </p:spPr>
+      </p:pic>
+      <p:pic>
+        <p:nvPicPr>
+          <p:cNvPr id="34828" name="Picture 12"/>
+          <p:cNvPicPr>
+            <a:picLocks noChangeAspect="1" noChangeArrowheads="1"/>
+          </p:cNvPicPr>
+          <p:nvPr/>
+        </p:nvPicPr>
+        <p:blipFill>
+          <a:blip r:embed="rId3"/>
+          <a:srcRect/>
+          <a:stretch>
+            <a:fillRect/>
+          </a:stretch>
+        </p:blipFill>
+        <p:spPr bwMode="auto">
+          <a:xfrm>
+            <a:off x="336430" y="2635729"/>
+            <a:ext cx="5353050" cy="2552700"/>
+          </a:xfrm>
+          <a:prstGeom prst="rect">
+            <a:avLst/>
+          </a:prstGeom>
+          <a:noFill/>
+          <a:ln w="9525">
+            <a:noFill/>
+            <a:miter lim="800000"/>
+            <a:headEnd/>
+            <a:tailEnd/>
+          </a:ln>
+          <a:effectLst/>
+        </p:spPr>
+      </p:pic>
+    </p:spTree>
   </p:cSld>
   <p:clrMapOvr>
     <a:masterClrMapping/>
@@ -9436,7 +9730,7 @@
           <p:cNvPr id="2" name="Cím 1">
             <a:extLst>
               <a:ext uri="{FF2B5EF4-FFF2-40B4-BE49-F238E27FC236}">
-                <a16:creationId xmlns:a16="http://schemas.microsoft.com/office/drawing/2014/main" id="{CCCA6EE2-06DB-5C6F-DE67-88982F94B64B}"/>
+                <a16:creationId xmlns:a16="http://schemas.microsoft.com/office/drawing/2014/main" xmlns="" id="{CCCA6EE2-06DB-5C6F-DE67-88982F94B64B}"/>
               </a:ext>
             </a:extLst>
           </p:cNvPr>
@@ -9466,7 +9760,7 @@
           <p:cNvPr id="3" name="Tartalom helye 2">
             <a:extLst>
               <a:ext uri="{FF2B5EF4-FFF2-40B4-BE49-F238E27FC236}">
-                <a16:creationId xmlns:a16="http://schemas.microsoft.com/office/drawing/2014/main" id="{120DEFDA-C5D7-B11A-C2EA-BD5FB711AF5F}"/>
+                <a16:creationId xmlns:a16="http://schemas.microsoft.com/office/drawing/2014/main" xmlns="" id="{120DEFDA-C5D7-B11A-C2EA-BD5FB711AF5F}"/>
               </a:ext>
             </a:extLst>
           </p:cNvPr>
@@ -9499,7 +9793,7 @@
           <p:cNvPr id="7" name="Kép 6">
             <a:extLst>
               <a:ext uri="{FF2B5EF4-FFF2-40B4-BE49-F238E27FC236}">
-                <a16:creationId xmlns:a16="http://schemas.microsoft.com/office/drawing/2014/main" id="{27EF9704-8E56-4E28-96D9-C00498099B67}"/>
+                <a16:creationId xmlns:a16="http://schemas.microsoft.com/office/drawing/2014/main" xmlns="" id="{27EF9704-8E56-4E28-96D9-C00498099B67}"/>
               </a:ext>
             </a:extLst>
           </p:cNvPr>
@@ -9529,7 +9823,7 @@
           <p:cNvPr id="11" name="Kép 10">
             <a:extLst>
               <a:ext uri="{FF2B5EF4-FFF2-40B4-BE49-F238E27FC236}">
-                <a16:creationId xmlns:a16="http://schemas.microsoft.com/office/drawing/2014/main" id="{2E3E1D1A-044A-2591-10EC-F3EE8AB6A1D8}"/>
+                <a16:creationId xmlns:a16="http://schemas.microsoft.com/office/drawing/2014/main" xmlns="" id="{2E3E1D1A-044A-2591-10EC-F3EE8AB6A1D8}"/>
               </a:ext>
             </a:extLst>
           </p:cNvPr>
@@ -9559,7 +9853,7 @@
           <p:cNvPr id="15" name="Kép 14">
             <a:extLst>
               <a:ext uri="{FF2B5EF4-FFF2-40B4-BE49-F238E27FC236}">
-                <a16:creationId xmlns:a16="http://schemas.microsoft.com/office/drawing/2014/main" id="{9FDDA2FF-10DF-3525-70F9-BE2E7A6BFD10}"/>
+                <a16:creationId xmlns:a16="http://schemas.microsoft.com/office/drawing/2014/main" xmlns="" id="{9FDDA2FF-10DF-3525-70F9-BE2E7A6BFD10}"/>
               </a:ext>
             </a:extLst>
           </p:cNvPr>
@@ -9589,7 +9883,7 @@
           <p:cNvPr id="17" name="Kép 16">
             <a:extLst>
               <a:ext uri="{FF2B5EF4-FFF2-40B4-BE49-F238E27FC236}">
-                <a16:creationId xmlns:a16="http://schemas.microsoft.com/office/drawing/2014/main" id="{1A29D998-57C8-61C9-B318-0FADA21ABE44}"/>
+                <a16:creationId xmlns:a16="http://schemas.microsoft.com/office/drawing/2014/main" xmlns="" id="{1A29D998-57C8-61C9-B318-0FADA21ABE44}"/>
               </a:ext>
             </a:extLst>
           </p:cNvPr>
@@ -9619,7 +9913,7 @@
           <p:cNvPr id="19" name="Kép 18">
             <a:extLst>
               <a:ext uri="{FF2B5EF4-FFF2-40B4-BE49-F238E27FC236}">
-                <a16:creationId xmlns:a16="http://schemas.microsoft.com/office/drawing/2014/main" id="{8594A7E1-A06A-9333-7C7D-737E36876C93}"/>
+                <a16:creationId xmlns:a16="http://schemas.microsoft.com/office/drawing/2014/main" xmlns="" id="{8594A7E1-A06A-9333-7C7D-737E36876C93}"/>
               </a:ext>
             </a:extLst>
           </p:cNvPr>
@@ -9649,7 +9943,7 @@
           <p:cNvPr id="21" name="Kép 20">
             <a:extLst>
               <a:ext uri="{FF2B5EF4-FFF2-40B4-BE49-F238E27FC236}">
-                <a16:creationId xmlns:a16="http://schemas.microsoft.com/office/drawing/2014/main" id="{4BF48EDB-45AE-C7EC-0F1C-10A0E035DA89}"/>
+                <a16:creationId xmlns:a16="http://schemas.microsoft.com/office/drawing/2014/main" xmlns="" id="{4BF48EDB-45AE-C7EC-0F1C-10A0E035DA89}"/>
               </a:ext>
             </a:extLst>
           </p:cNvPr>
@@ -9679,7 +9973,7 @@
           <p:cNvPr id="23" name="Kép 22">
             <a:extLst>
               <a:ext uri="{FF2B5EF4-FFF2-40B4-BE49-F238E27FC236}">
-                <a16:creationId xmlns:a16="http://schemas.microsoft.com/office/drawing/2014/main" id="{14E70A7E-76E8-5D09-7108-FB306C9CD253}"/>
+                <a16:creationId xmlns:a16="http://schemas.microsoft.com/office/drawing/2014/main" xmlns="" id="{14E70A7E-76E8-5D09-7108-FB306C9CD253}"/>
               </a:ext>
             </a:extLst>
           </p:cNvPr>
@@ -9707,7 +10001,7 @@
     </p:spTree>
     <p:extLst>
       <p:ext uri="{BB962C8B-B14F-4D97-AF65-F5344CB8AC3E}">
-        <p14:creationId xmlns:p14="http://schemas.microsoft.com/office/powerpoint/2010/main" val="2913653460"/>
+        <p14:creationId xmlns:p14="http://schemas.microsoft.com/office/powerpoint/2010/main" xmlns="" val="2913653460"/>
       </p:ext>
     </p:extLst>
   </p:cSld>
@@ -10372,6 +10666,503 @@
 </p:sld>
 </file>
 
+<file path=ppt/slides/slide20.xml><?xml version="1.0" encoding="utf-8"?>
+<p:sld xmlns:a="http://schemas.openxmlformats.org/drawingml/2006/main" xmlns:r="http://schemas.openxmlformats.org/officeDocument/2006/relationships" xmlns:p="http://schemas.openxmlformats.org/presentationml/2006/main">
+  <p:cSld>
+    <p:spTree>
+      <p:nvGrpSpPr>
+        <p:cNvPr id="1" name=""/>
+        <p:cNvGrpSpPr/>
+        <p:nvPr/>
+      </p:nvGrpSpPr>
+      <p:grpSpPr>
+        <a:xfrm>
+          <a:off x="0" y="0"/>
+          <a:ext cx="0" cy="0"/>
+          <a:chOff x="0" y="0"/>
+          <a:chExt cx="0" cy="0"/>
+        </a:xfrm>
+      </p:grpSpPr>
+      <p:pic>
+        <p:nvPicPr>
+          <p:cNvPr id="4" name="Picture 10" descr="https://cdn.discordapp.com/attachments/812059683393110017/1439313542774919218/image.png?ex=691a10b1&amp;is=6918bf31&amp;hm=721f3fdc6ef94d17980aceee8b318a449fb0a4c497717cb7244132cb0cd8deb9&amp;"/>
+          <p:cNvPicPr>
+            <a:picLocks noChangeAspect="1" noChangeArrowheads="1"/>
+          </p:cNvPicPr>
+          <p:nvPr/>
+        </p:nvPicPr>
+        <p:blipFill>
+          <a:blip r:embed="rId2"/>
+          <a:srcRect/>
+          <a:stretch>
+            <a:fillRect/>
+          </a:stretch>
+        </p:blipFill>
+        <p:spPr bwMode="auto">
+          <a:xfrm>
+            <a:off x="1000964" y="984936"/>
+            <a:ext cx="10365340" cy="4553221"/>
+          </a:xfrm>
+          <a:prstGeom prst="rect">
+            <a:avLst/>
+          </a:prstGeom>
+          <a:noFill/>
+        </p:spPr>
+      </p:pic>
+    </p:spTree>
+  </p:cSld>
+  <p:clrMapOvr>
+    <a:masterClrMapping/>
+  </p:clrMapOvr>
+</p:sld>
+</file>
+
+<file path=ppt/slides/slide21.xml><?xml version="1.0" encoding="utf-8"?>
+<p:sld xmlns:a="http://schemas.openxmlformats.org/drawingml/2006/main" xmlns:r="http://schemas.openxmlformats.org/officeDocument/2006/relationships" xmlns:p="http://schemas.openxmlformats.org/presentationml/2006/main">
+  <p:cSld>
+    <p:spTree>
+      <p:nvGrpSpPr>
+        <p:cNvPr id="1" name=""/>
+        <p:cNvGrpSpPr/>
+        <p:nvPr/>
+      </p:nvGrpSpPr>
+      <p:grpSpPr>
+        <a:xfrm>
+          <a:off x="0" y="0"/>
+          <a:ext cx="0" cy="0"/>
+          <a:chOff x="0" y="0"/>
+          <a:chExt cx="0" cy="0"/>
+        </a:xfrm>
+      </p:grpSpPr>
+      <p:sp>
+        <p:nvSpPr>
+          <p:cNvPr id="3" name="Cím 1"/>
+          <p:cNvSpPr>
+            <a:spLocks noGrp="1"/>
+          </p:cNvSpPr>
+          <p:nvPr>
+            <p:ph type="title"/>
+          </p:nvPr>
+        </p:nvSpPr>
+        <p:spPr>
+          <a:xfrm>
+            <a:off x="1451579" y="1293962"/>
+            <a:ext cx="9603275" cy="559792"/>
+          </a:xfrm>
+        </p:spPr>
+        <p:txBody>
+          <a:bodyPr>
+            <a:normAutofit/>
+          </a:bodyPr>
+          <a:lstStyle/>
+          <a:p>
+            <a:r>
+              <a:rPr lang="hu-HU" dirty="0" smtClean="0"/>
+              <a:t>Czeitner András - Dokumentáció</a:t>
+            </a:r>
+            <a:endParaRPr lang="hu-HU" dirty="0"/>
+          </a:p>
+        </p:txBody>
+      </p:sp>
+      <p:sp>
+        <p:nvSpPr>
+          <p:cNvPr id="36866" name="AutoShape 2" descr="image.png"/>
+          <p:cNvSpPr>
+            <a:spLocks noChangeAspect="1" noChangeArrowheads="1"/>
+          </p:cNvSpPr>
+          <p:nvPr/>
+        </p:nvSpPr>
+        <p:spPr bwMode="auto">
+          <a:xfrm>
+            <a:off x="155575" y="-144463"/>
+            <a:ext cx="304800" cy="304801"/>
+          </a:xfrm>
+          <a:prstGeom prst="rect">
+            <a:avLst/>
+          </a:prstGeom>
+          <a:noFill/>
+        </p:spPr>
+        <p:txBody>
+          <a:bodyPr vert="horz" wrap="square" lIns="91440" tIns="45720" rIns="91440" bIns="45720" numCol="1" anchor="t" anchorCtr="0" compatLnSpc="1">
+            <a:prstTxWarp prst="textNoShape">
+              <a:avLst/>
+            </a:prstTxWarp>
+          </a:bodyPr>
+          <a:lstStyle/>
+          <a:p>
+            <a:endParaRPr lang="hu-HU"/>
+          </a:p>
+        </p:txBody>
+      </p:sp>
+      <p:pic>
+        <p:nvPicPr>
+          <p:cNvPr id="36868" name="Picture 4" descr="https://cdn.discordapp.com/attachments/812059683393110017/1439314057965338706/image.png?ex=691a112c&amp;is=6918bfac&amp;hm=7ba02878b65b24707a6035b4243cccf8454e5cf2085eecb6b93cfa22d6fdcdf3&amp;"/>
+          <p:cNvPicPr>
+            <a:picLocks noChangeAspect="1" noChangeArrowheads="1"/>
+          </p:cNvPicPr>
+          <p:nvPr/>
+        </p:nvPicPr>
+        <p:blipFill>
+          <a:blip r:embed="rId2"/>
+          <a:srcRect/>
+          <a:stretch>
+            <a:fillRect/>
+          </a:stretch>
+        </p:blipFill>
+        <p:spPr bwMode="auto">
+          <a:xfrm>
+            <a:off x="493983" y="2077111"/>
+            <a:ext cx="3839892" cy="3996423"/>
+          </a:xfrm>
+          <a:prstGeom prst="rect">
+            <a:avLst/>
+          </a:prstGeom>
+          <a:noFill/>
+        </p:spPr>
+      </p:pic>
+      <p:pic>
+        <p:nvPicPr>
+          <p:cNvPr id="36872" name="Picture 8" descr="https://cdn.discordapp.com/attachments/812059683393110017/1439314568546488421/Implementation-plan.png?ex=691a11a6&amp;is=6918c026&amp;hm=df378b1587e0da09569ce426a4f4a39b126cb5f94e9fae17b2eba004af3646a1&amp;"/>
+          <p:cNvPicPr>
+            <a:picLocks noChangeAspect="1" noChangeArrowheads="1"/>
+          </p:cNvPicPr>
+          <p:nvPr/>
+        </p:nvPicPr>
+        <p:blipFill>
+          <a:blip r:embed="rId3"/>
+          <a:srcRect/>
+          <a:stretch>
+            <a:fillRect/>
+          </a:stretch>
+        </p:blipFill>
+        <p:spPr bwMode="auto">
+          <a:xfrm>
+            <a:off x="4765675" y="2062389"/>
+            <a:ext cx="2806699" cy="3972162"/>
+          </a:xfrm>
+          <a:prstGeom prst="rect">
+            <a:avLst/>
+          </a:prstGeom>
+          <a:noFill/>
+        </p:spPr>
+      </p:pic>
+      <p:pic>
+        <p:nvPicPr>
+          <p:cNvPr id="36876" name="Picture 12" descr="https://cdn.discordapp.com/attachments/812059683393110017/1439314778895028354/image.png?ex=691a11d8&amp;is=6918c058&amp;hm=06ee2ab5f547cb8f7e1d96fd117710c01918934c8fe96653ace54ff3062c514c&amp;"/>
+          <p:cNvPicPr>
+            <a:picLocks noChangeAspect="1" noChangeArrowheads="1"/>
+          </p:cNvPicPr>
+          <p:nvPr/>
+        </p:nvPicPr>
+        <p:blipFill>
+          <a:blip r:embed="rId4"/>
+          <a:srcRect/>
+          <a:stretch>
+            <a:fillRect/>
+          </a:stretch>
+        </p:blipFill>
+        <p:spPr bwMode="auto">
+          <a:xfrm>
+            <a:off x="7934325" y="2047874"/>
+            <a:ext cx="3651914" cy="4004233"/>
+          </a:xfrm>
+          <a:prstGeom prst="rect">
+            <a:avLst/>
+          </a:prstGeom>
+          <a:noFill/>
+        </p:spPr>
+      </p:pic>
+    </p:spTree>
+  </p:cSld>
+  <p:clrMapOvr>
+    <a:masterClrMapping/>
+  </p:clrMapOvr>
+</p:sld>
+</file>
+
+<file path=ppt/slides/slide22.xml><?xml version="1.0" encoding="utf-8"?>
+<p:sld xmlns:a="http://schemas.openxmlformats.org/drawingml/2006/main" xmlns:r="http://schemas.openxmlformats.org/officeDocument/2006/relationships" xmlns:p="http://schemas.openxmlformats.org/presentationml/2006/main">
+  <p:cSld>
+    <p:spTree>
+      <p:nvGrpSpPr>
+        <p:cNvPr id="1" name=""/>
+        <p:cNvGrpSpPr/>
+        <p:nvPr/>
+      </p:nvGrpSpPr>
+      <p:grpSpPr>
+        <a:xfrm>
+          <a:off x="0" y="0"/>
+          <a:ext cx="0" cy="0"/>
+          <a:chOff x="0" y="0"/>
+          <a:chExt cx="0" cy="0"/>
+        </a:xfrm>
+      </p:grpSpPr>
+      <p:sp>
+        <p:nvSpPr>
+          <p:cNvPr id="2" name="Cím 1"/>
+          <p:cNvSpPr>
+            <a:spLocks noGrp="1"/>
+          </p:cNvSpPr>
+          <p:nvPr>
+            <p:ph type="title"/>
+          </p:nvPr>
+        </p:nvSpPr>
+        <p:spPr>
+          <a:xfrm>
+            <a:off x="1451579" y="1257300"/>
+            <a:ext cx="9603275" cy="596453"/>
+          </a:xfrm>
+        </p:spPr>
+        <p:txBody>
+          <a:bodyPr>
+            <a:normAutofit/>
+          </a:bodyPr>
+          <a:lstStyle/>
+          <a:p>
+            <a:r>
+              <a:rPr lang="hu-HU" dirty="0" smtClean="0"/>
+              <a:t>Czeitner András - fejlesztés</a:t>
+            </a:r>
+            <a:endParaRPr lang="hu-HU" dirty="0"/>
+          </a:p>
+        </p:txBody>
+      </p:sp>
+      <p:pic>
+        <p:nvPicPr>
+          <p:cNvPr id="7" name="Kép 6" descr="image.png"/>
+          <p:cNvPicPr>
+            <a:picLocks noChangeAspect="1"/>
+          </p:cNvPicPr>
+          <p:nvPr/>
+        </p:nvPicPr>
+        <p:blipFill>
+          <a:blip r:embed="rId2"/>
+          <a:stretch>
+            <a:fillRect/>
+          </a:stretch>
+        </p:blipFill>
+        <p:spPr>
+          <a:xfrm>
+            <a:off x="1981200" y="1970194"/>
+            <a:ext cx="8458200" cy="4575458"/>
+          </a:xfrm>
+          <a:prstGeom prst="rect">
+            <a:avLst/>
+          </a:prstGeom>
+        </p:spPr>
+      </p:pic>
+    </p:spTree>
+  </p:cSld>
+  <p:clrMapOvr>
+    <a:masterClrMapping/>
+  </p:clrMapOvr>
+</p:sld>
+</file>
+
+<file path=ppt/slides/slide23.xml><?xml version="1.0" encoding="utf-8"?>
+<p:sld xmlns:a="http://schemas.openxmlformats.org/drawingml/2006/main" xmlns:r="http://schemas.openxmlformats.org/officeDocument/2006/relationships" xmlns:p="http://schemas.openxmlformats.org/presentationml/2006/main">
+  <p:cSld>
+    <p:spTree>
+      <p:nvGrpSpPr>
+        <p:cNvPr id="1" name=""/>
+        <p:cNvGrpSpPr/>
+        <p:nvPr/>
+      </p:nvGrpSpPr>
+      <p:grpSpPr>
+        <a:xfrm>
+          <a:off x="0" y="0"/>
+          <a:ext cx="0" cy="0"/>
+          <a:chOff x="0" y="0"/>
+          <a:chExt cx="0" cy="0"/>
+        </a:xfrm>
+      </p:grpSpPr>
+      <p:sp>
+        <p:nvSpPr>
+          <p:cNvPr id="2" name="Cím 1"/>
+          <p:cNvSpPr>
+            <a:spLocks noGrp="1"/>
+          </p:cNvSpPr>
+          <p:nvPr>
+            <p:ph type="title"/>
+          </p:nvPr>
+        </p:nvSpPr>
+        <p:spPr>
+          <a:xfrm>
+            <a:off x="1451579" y="1257300"/>
+            <a:ext cx="9603275" cy="596453"/>
+          </a:xfrm>
+        </p:spPr>
+        <p:txBody>
+          <a:bodyPr>
+            <a:normAutofit/>
+          </a:bodyPr>
+          <a:lstStyle/>
+          <a:p>
+            <a:r>
+              <a:rPr lang="hu-HU" dirty="0" smtClean="0"/>
+              <a:t>Czeitner András - fejlesztés</a:t>
+            </a:r>
+            <a:endParaRPr lang="hu-HU" dirty="0"/>
+          </a:p>
+        </p:txBody>
+      </p:sp>
+      <p:pic>
+        <p:nvPicPr>
+          <p:cNvPr id="4" name="Kép 3" descr="2.png"/>
+          <p:cNvPicPr>
+            <a:picLocks noChangeAspect="1"/>
+          </p:cNvPicPr>
+          <p:nvPr/>
+        </p:nvPicPr>
+        <p:blipFill>
+          <a:blip r:embed="rId2"/>
+          <a:stretch>
+            <a:fillRect/>
+          </a:stretch>
+        </p:blipFill>
+        <p:spPr>
+          <a:xfrm>
+            <a:off x="1933574" y="2018504"/>
+            <a:ext cx="8477251" cy="4591845"/>
+          </a:xfrm>
+          <a:prstGeom prst="rect">
+            <a:avLst/>
+          </a:prstGeom>
+        </p:spPr>
+      </p:pic>
+    </p:spTree>
+  </p:cSld>
+  <p:clrMapOvr>
+    <a:masterClrMapping/>
+  </p:clrMapOvr>
+</p:sld>
+</file>
+
+<file path=ppt/slides/slide24.xml><?xml version="1.0" encoding="utf-8"?>
+<p:sld xmlns:a="http://schemas.openxmlformats.org/drawingml/2006/main" xmlns:r="http://schemas.openxmlformats.org/officeDocument/2006/relationships" xmlns:p="http://schemas.openxmlformats.org/presentationml/2006/main">
+  <p:cSld>
+    <p:spTree>
+      <p:nvGrpSpPr>
+        <p:cNvPr id="1" name=""/>
+        <p:cNvGrpSpPr/>
+        <p:nvPr/>
+      </p:nvGrpSpPr>
+      <p:grpSpPr>
+        <a:xfrm>
+          <a:off x="0" y="0"/>
+          <a:ext cx="0" cy="0"/>
+          <a:chOff x="0" y="0"/>
+          <a:chExt cx="0" cy="0"/>
+        </a:xfrm>
+      </p:grpSpPr>
+      <p:sp>
+        <p:nvSpPr>
+          <p:cNvPr id="3" name="Cím 1"/>
+          <p:cNvSpPr txBox="1">
+            <a:spLocks/>
+          </p:cNvSpPr>
+          <p:nvPr/>
+        </p:nvSpPr>
+        <p:spPr>
+          <a:xfrm>
+            <a:off x="1451579" y="1257300"/>
+            <a:ext cx="9603275" cy="596453"/>
+          </a:xfrm>
+          <a:prstGeom prst="rect">
+            <a:avLst/>
+          </a:prstGeom>
+        </p:spPr>
+        <p:txBody>
+          <a:bodyPr vert="horz" lIns="91440" tIns="45720" rIns="91440" bIns="45720" rtlCol="0" anchor="t">
+            <a:normAutofit/>
+          </a:bodyPr>
+          <a:lstStyle/>
+          <a:p>
+            <a:pPr marL="0" marR="0" lvl="0" indent="0" algn="l" defTabSz="914400" rtl="0" eaLnBrk="1" fontAlgn="auto" latinLnBrk="0" hangingPunct="1">
+              <a:lnSpc>
+                <a:spcPct val="90000"/>
+              </a:lnSpc>
+              <a:spcBef>
+                <a:spcPct val="0"/>
+              </a:spcBef>
+              <a:spcAft>
+                <a:spcPts val="0"/>
+              </a:spcAft>
+              <a:buClrTx/>
+              <a:buSzTx/>
+              <a:buFontTx/>
+              <a:buNone/>
+              <a:tabLst/>
+              <a:defRPr/>
+            </a:pPr>
+            <a:r>
+              <a:rPr kumimoji="0" lang="hu-HU" sz="3200" b="0" i="0" u="none" strike="noStrike" kern="1200" cap="all" spc="0" normalizeH="0" baseline="0" noProof="0" dirty="0" smtClean="0">
+                <a:ln>
+                  <a:noFill/>
+                </a:ln>
+                <a:solidFill>
+                  <a:schemeClr val="tx1"/>
+                </a:solidFill>
+                <a:effectLst/>
+                <a:uLnTx/>
+                <a:uFillTx/>
+                <a:latin typeface="+mj-lt"/>
+                <a:ea typeface="+mj-ea"/>
+                <a:cs typeface="+mj-cs"/>
+              </a:rPr>
+              <a:t>Czeitner András - Tesztelés</a:t>
+            </a:r>
+            <a:endParaRPr kumimoji="0" lang="hu-HU" sz="3200" b="0" i="0" u="none" strike="noStrike" kern="1200" cap="all" spc="0" normalizeH="0" baseline="0" noProof="0" dirty="0">
+              <a:ln>
+                <a:noFill/>
+              </a:ln>
+              <a:solidFill>
+                <a:schemeClr val="tx1"/>
+              </a:solidFill>
+              <a:effectLst/>
+              <a:uLnTx/>
+              <a:uFillTx/>
+              <a:latin typeface="+mj-lt"/>
+              <a:ea typeface="+mj-ea"/>
+              <a:cs typeface="+mj-cs"/>
+            </a:endParaRPr>
+          </a:p>
+        </p:txBody>
+      </p:sp>
+      <p:pic>
+        <p:nvPicPr>
+          <p:cNvPr id="40962" name="Picture 2" descr="https://cdn.discordapp.com/attachments/812059683393110017/1439330769108471859/0b063826-e102-423a-a3f0-da25c2283bb3.png?ex=691a20bc&amp;is=6918cf3c&amp;hm=e7ee6c4f8a61888e1395ca35c86c3d817f192e118aa4ded687a7a4292a37fd26&amp;"/>
+          <p:cNvPicPr>
+            <a:picLocks noChangeAspect="1" noChangeArrowheads="1"/>
+          </p:cNvPicPr>
+          <p:nvPr/>
+        </p:nvPicPr>
+        <p:blipFill>
+          <a:blip r:embed="rId2"/>
+          <a:srcRect/>
+          <a:stretch>
+            <a:fillRect/>
+          </a:stretch>
+        </p:blipFill>
+        <p:spPr bwMode="auto">
+          <a:xfrm>
+            <a:off x="3213100" y="1943100"/>
+            <a:ext cx="5935776" cy="4762800"/>
+          </a:xfrm>
+          <a:prstGeom prst="rect">
+            <a:avLst/>
+          </a:prstGeom>
+          <a:noFill/>
+        </p:spPr>
+      </p:pic>
+    </p:spTree>
+  </p:cSld>
+  <p:clrMapOvr>
+    <a:masterClrMapping/>
+  </p:clrMapOvr>
+</p:sld>
+</file>
+
 <file path=ppt/slides/slide3.xml><?xml version="1.0" encoding="utf-8"?>
 <p:sld xmlns:a="http://schemas.openxmlformats.org/drawingml/2006/main" xmlns:r="http://schemas.openxmlformats.org/officeDocument/2006/relationships" xmlns:p="http://schemas.openxmlformats.org/presentationml/2006/main">
   <p:cSld>
@@ -10394,7 +11185,7 @@
           <p:cNvPr id="2" name="Cím 1">
             <a:extLst>
               <a:ext uri="{FF2B5EF4-FFF2-40B4-BE49-F238E27FC236}">
-                <a16:creationId xmlns:a16="http://schemas.microsoft.com/office/drawing/2014/main" id="{5FDF651E-95C6-F9ED-7E3D-E593C9E1D218}"/>
+                <a16:creationId xmlns:a16="http://schemas.microsoft.com/office/drawing/2014/main" xmlns="" id="{5FDF651E-95C6-F9ED-7E3D-E593C9E1D218}"/>
               </a:ext>
             </a:extLst>
           </p:cNvPr>
@@ -10427,7 +11218,7 @@
           <p:cNvPr id="7" name="Kép 6">
             <a:extLst>
               <a:ext uri="{FF2B5EF4-FFF2-40B4-BE49-F238E27FC236}">
-                <a16:creationId xmlns:a16="http://schemas.microsoft.com/office/drawing/2014/main" id="{C2E531C9-CFFE-95F3-CB20-5D333CB1EEF9}"/>
+                <a16:creationId xmlns:a16="http://schemas.microsoft.com/office/drawing/2014/main" xmlns="" id="{C2E531C9-CFFE-95F3-CB20-5D333CB1EEF9}"/>
               </a:ext>
             </a:extLst>
           </p:cNvPr>
@@ -10457,7 +11248,7 @@
           <p:cNvPr id="9" name="Kép 8">
             <a:extLst>
               <a:ext uri="{FF2B5EF4-FFF2-40B4-BE49-F238E27FC236}">
-                <a16:creationId xmlns:a16="http://schemas.microsoft.com/office/drawing/2014/main" id="{AB2CA154-66E9-DE43-42C2-9E1C40C06D3D}"/>
+                <a16:creationId xmlns:a16="http://schemas.microsoft.com/office/drawing/2014/main" xmlns="" id="{AB2CA154-66E9-DE43-42C2-9E1C40C06D3D}"/>
               </a:ext>
             </a:extLst>
           </p:cNvPr>
@@ -10487,7 +11278,7 @@
           <p:cNvPr id="13" name="Kép 12">
             <a:extLst>
               <a:ext uri="{FF2B5EF4-FFF2-40B4-BE49-F238E27FC236}">
-                <a16:creationId xmlns:a16="http://schemas.microsoft.com/office/drawing/2014/main" id="{C66B2441-EA2E-CFBA-88E9-16A3FACE4A6F}"/>
+                <a16:creationId xmlns:a16="http://schemas.microsoft.com/office/drawing/2014/main" xmlns="" id="{C66B2441-EA2E-CFBA-88E9-16A3FACE4A6F}"/>
               </a:ext>
             </a:extLst>
           </p:cNvPr>
@@ -10517,7 +11308,7 @@
           <p:cNvPr id="15" name="Kép 14">
             <a:extLst>
               <a:ext uri="{FF2B5EF4-FFF2-40B4-BE49-F238E27FC236}">
-                <a16:creationId xmlns:a16="http://schemas.microsoft.com/office/drawing/2014/main" id="{33C624EB-6869-022C-0713-377C1FF1F93D}"/>
+                <a16:creationId xmlns:a16="http://schemas.microsoft.com/office/drawing/2014/main" xmlns="" id="{33C624EB-6869-022C-0713-377C1FF1F93D}"/>
               </a:ext>
             </a:extLst>
           </p:cNvPr>
@@ -10547,7 +11338,7 @@
           <p:cNvPr id="19" name="Kép 18">
             <a:extLst>
               <a:ext uri="{FF2B5EF4-FFF2-40B4-BE49-F238E27FC236}">
-                <a16:creationId xmlns:a16="http://schemas.microsoft.com/office/drawing/2014/main" id="{F33E6BB1-ED6C-389B-44B0-CEB31E7DA624}"/>
+                <a16:creationId xmlns:a16="http://schemas.microsoft.com/office/drawing/2014/main" xmlns="" id="{F33E6BB1-ED6C-389B-44B0-CEB31E7DA624}"/>
               </a:ext>
             </a:extLst>
           </p:cNvPr>
@@ -10577,7 +11368,7 @@
           <p:cNvPr id="21" name="Kép 20">
             <a:extLst>
               <a:ext uri="{FF2B5EF4-FFF2-40B4-BE49-F238E27FC236}">
-                <a16:creationId xmlns:a16="http://schemas.microsoft.com/office/drawing/2014/main" id="{559A1832-1C2F-A86C-7928-E56FB3681496}"/>
+                <a16:creationId xmlns:a16="http://schemas.microsoft.com/office/drawing/2014/main" xmlns="" id="{559A1832-1C2F-A86C-7928-E56FB3681496}"/>
               </a:ext>
             </a:extLst>
           </p:cNvPr>
@@ -10605,7 +11396,7 @@
     </p:spTree>
     <p:extLst>
       <p:ext uri="{BB962C8B-B14F-4D97-AF65-F5344CB8AC3E}">
-        <p14:creationId xmlns:p14="http://schemas.microsoft.com/office/powerpoint/2010/main" val="4268557178"/>
+        <p14:creationId xmlns:p14="http://schemas.microsoft.com/office/powerpoint/2010/main" xmlns="" val="4268557178"/>
       </p:ext>
     </p:extLst>
   </p:cSld>
@@ -11160,7 +11951,7 @@
         <p:cNvPr id="1" name="">
           <a:extLst>
             <a:ext uri="{FF2B5EF4-FFF2-40B4-BE49-F238E27FC236}">
-              <a16:creationId xmlns:a16="http://schemas.microsoft.com/office/drawing/2014/main" id="{E3015780-9757-D06C-EB84-20F310B80C99}"/>
+              <a16:creationId xmlns:a16="http://schemas.microsoft.com/office/drawing/2014/main" xmlns="" id="{E3015780-9757-D06C-EB84-20F310B80C99}"/>
             </a:ext>
           </a:extLst>
         </p:cNvPr>
@@ -11180,7 +11971,7 @@
           <p:cNvPr id="4" name="Kép 3">
             <a:extLst>
               <a:ext uri="{FF2B5EF4-FFF2-40B4-BE49-F238E27FC236}">
-                <a16:creationId xmlns:a16="http://schemas.microsoft.com/office/drawing/2014/main" id="{EAF2EC1B-0DBF-7B5B-E80C-601BC1B103F1}"/>
+                <a16:creationId xmlns:a16="http://schemas.microsoft.com/office/drawing/2014/main" xmlns="" id="{EAF2EC1B-0DBF-7B5B-E80C-601BC1B103F1}"/>
               </a:ext>
             </a:extLst>
           </p:cNvPr>
@@ -11208,7 +11999,7 @@
     </p:spTree>
     <p:extLst>
       <p:ext uri="{BB962C8B-B14F-4D97-AF65-F5344CB8AC3E}">
-        <p14:creationId xmlns:p14="http://schemas.microsoft.com/office/powerpoint/2010/main" val="1971315501"/>
+        <p14:creationId xmlns:p14="http://schemas.microsoft.com/office/powerpoint/2010/main" xmlns="" val="1971315501"/>
       </p:ext>
     </p:extLst>
   </p:cSld>
@@ -11367,7 +12158,7 @@
           <p:cNvPr id="2" name="Cím 1">
             <a:extLst>
               <a:ext uri="{FF2B5EF4-FFF2-40B4-BE49-F238E27FC236}">
-                <a16:creationId xmlns:a16="http://schemas.microsoft.com/office/drawing/2014/main" id="{6D7C5913-E755-24D3-ED0E-B0BD4D8D40CC}"/>
+                <a16:creationId xmlns:a16="http://schemas.microsoft.com/office/drawing/2014/main" xmlns="" id="{6D7C5913-E755-24D3-ED0E-B0BD4D8D40CC}"/>
               </a:ext>
             </a:extLst>
           </p:cNvPr>
@@ -11395,7 +12186,7 @@
           <p:cNvPr id="9" name="Kép 8">
             <a:extLst>
               <a:ext uri="{FF2B5EF4-FFF2-40B4-BE49-F238E27FC236}">
-                <a16:creationId xmlns:a16="http://schemas.microsoft.com/office/drawing/2014/main" id="{0A17DD4E-D398-7B13-D12D-81FBFB0F365D}"/>
+                <a16:creationId xmlns:a16="http://schemas.microsoft.com/office/drawing/2014/main" xmlns="" id="{0A17DD4E-D398-7B13-D12D-81FBFB0F365D}"/>
               </a:ext>
             </a:extLst>
           </p:cNvPr>
@@ -11425,7 +12216,7 @@
           <p:cNvPr id="11" name="Kép 10" descr="A képen diagram, vázlat, Műszaki rajz, Tervrajz látható&#10;&#10;Előfordulhat, hogy az AI által létrehozott tartalom helytelen.">
             <a:extLst>
               <a:ext uri="{FF2B5EF4-FFF2-40B4-BE49-F238E27FC236}">
-                <a16:creationId xmlns:a16="http://schemas.microsoft.com/office/drawing/2014/main" id="{D820F8E4-942C-5B29-932C-E33AD0D469F7}"/>
+                <a16:creationId xmlns:a16="http://schemas.microsoft.com/office/drawing/2014/main" xmlns="" id="{D820F8E4-942C-5B29-932C-E33AD0D469F7}"/>
               </a:ext>
             </a:extLst>
           </p:cNvPr>
@@ -11438,7 +12229,7 @@
           <a:blip r:embed="rId3">
             <a:extLst>
               <a:ext uri="{28A0092B-C50C-407E-A947-70E740481C1C}">
-                <a14:useLocalDpi xmlns:a14="http://schemas.microsoft.com/office/drawing/2010/main" val="0"/>
+                <a14:useLocalDpi xmlns:a14="http://schemas.microsoft.com/office/drawing/2010/main" xmlns="" val="0"/>
               </a:ext>
             </a:extLst>
           </a:blip>
@@ -11461,7 +12252,7 @@
           <p:cNvPr id="13" name="Kép 12">
             <a:extLst>
               <a:ext uri="{FF2B5EF4-FFF2-40B4-BE49-F238E27FC236}">
-                <a16:creationId xmlns:a16="http://schemas.microsoft.com/office/drawing/2014/main" id="{19745C17-69BF-2E47-C0A2-7554C8621921}"/>
+                <a16:creationId xmlns:a16="http://schemas.microsoft.com/office/drawing/2014/main" xmlns="" id="{19745C17-69BF-2E47-C0A2-7554C8621921}"/>
               </a:ext>
             </a:extLst>
           </p:cNvPr>
@@ -11489,7 +12280,7 @@
     </p:spTree>
     <p:extLst>
       <p:ext uri="{BB962C8B-B14F-4D97-AF65-F5344CB8AC3E}">
-        <p14:creationId xmlns:p14="http://schemas.microsoft.com/office/powerpoint/2010/main" val="2362346782"/>
+        <p14:creationId xmlns:p14="http://schemas.microsoft.com/office/powerpoint/2010/main" xmlns="" val="2362346782"/>
       </p:ext>
     </p:extLst>
   </p:cSld>
@@ -11812,7 +12603,7 @@
           <p:cNvPr id="2" name="Cím 1">
             <a:extLst>
               <a:ext uri="{FF2B5EF4-FFF2-40B4-BE49-F238E27FC236}">
-                <a16:creationId xmlns:a16="http://schemas.microsoft.com/office/drawing/2014/main" id="{36E3975F-341A-4037-8226-51ED45249D98}"/>
+                <a16:creationId xmlns:a16="http://schemas.microsoft.com/office/drawing/2014/main" xmlns="" id="{36E3975F-341A-4037-8226-51ED45249D98}"/>
               </a:ext>
             </a:extLst>
           </p:cNvPr>
@@ -11840,7 +12631,7 @@
           <p:cNvPr id="3" name="Tartalom helye 2">
             <a:extLst>
               <a:ext uri="{FF2B5EF4-FFF2-40B4-BE49-F238E27FC236}">
-                <a16:creationId xmlns:a16="http://schemas.microsoft.com/office/drawing/2014/main" id="{CA414179-0CF2-3378-F619-A3FE528B5B45}"/>
+                <a16:creationId xmlns:a16="http://schemas.microsoft.com/office/drawing/2014/main" xmlns="" id="{CA414179-0CF2-3378-F619-A3FE528B5B45}"/>
               </a:ext>
             </a:extLst>
           </p:cNvPr>
@@ -11943,7 +12734,7 @@
     </p:spTree>
     <p:extLst>
       <p:ext uri="{BB962C8B-B14F-4D97-AF65-F5344CB8AC3E}">
-        <p14:creationId xmlns:p14="http://schemas.microsoft.com/office/powerpoint/2010/main" val="1996424764"/>
+        <p14:creationId xmlns:p14="http://schemas.microsoft.com/office/powerpoint/2010/main" xmlns="" val="1996424764"/>
       </p:ext>
     </p:extLst>
   </p:cSld>
@@ -11978,7 +12769,7 @@
           <p:cNvPr id="9" name="Kép 8">
             <a:extLst>
               <a:ext uri="{FF2B5EF4-FFF2-40B4-BE49-F238E27FC236}">
-                <a16:creationId xmlns:a16="http://schemas.microsoft.com/office/drawing/2014/main" id="{8D4509A0-D2EA-207B-0C78-28D8E243CE44}"/>
+                <a16:creationId xmlns:a16="http://schemas.microsoft.com/office/drawing/2014/main" xmlns="" id="{8D4509A0-D2EA-207B-0C78-28D8E243CE44}"/>
               </a:ext>
             </a:extLst>
           </p:cNvPr>
@@ -12008,7 +12799,7 @@
           <p:cNvPr id="2" name="Cím 1">
             <a:extLst>
               <a:ext uri="{FF2B5EF4-FFF2-40B4-BE49-F238E27FC236}">
-                <a16:creationId xmlns:a16="http://schemas.microsoft.com/office/drawing/2014/main" id="{4A1E2D64-30E7-AF6E-D31C-64C7F5D017D1}"/>
+                <a16:creationId xmlns:a16="http://schemas.microsoft.com/office/drawing/2014/main" xmlns="" id="{4A1E2D64-30E7-AF6E-D31C-64C7F5D017D1}"/>
               </a:ext>
             </a:extLst>
           </p:cNvPr>
@@ -12034,7 +12825,7 @@
     </p:spTree>
     <p:extLst>
       <p:ext uri="{BB962C8B-B14F-4D97-AF65-F5344CB8AC3E}">
-        <p14:creationId xmlns:p14="http://schemas.microsoft.com/office/powerpoint/2010/main" val="1915318121"/>
+        <p14:creationId xmlns:p14="http://schemas.microsoft.com/office/powerpoint/2010/main" xmlns="" val="1915318121"/>
       </p:ext>
     </p:extLst>
   </p:cSld>
@@ -12055,7 +12846,7 @@
         <p:cNvPr id="1" name="">
           <a:extLst>
             <a:ext uri="{FF2B5EF4-FFF2-40B4-BE49-F238E27FC236}">
-              <a16:creationId xmlns:a16="http://schemas.microsoft.com/office/drawing/2014/main" id="{9B841A21-F3A4-BEED-4335-B280F0476433}"/>
+              <a16:creationId xmlns:a16="http://schemas.microsoft.com/office/drawing/2014/main" xmlns="" id="{9B841A21-F3A4-BEED-4335-B280F0476433}"/>
             </a:ext>
           </a:extLst>
         </p:cNvPr>
@@ -12075,7 +12866,7 @@
           <p:cNvPr id="4" name="Kép 3">
             <a:extLst>
               <a:ext uri="{FF2B5EF4-FFF2-40B4-BE49-F238E27FC236}">
-                <a16:creationId xmlns:a16="http://schemas.microsoft.com/office/drawing/2014/main" id="{93E9C8F1-A86B-86D8-7BF0-C4ADBF9BACEE}"/>
+                <a16:creationId xmlns:a16="http://schemas.microsoft.com/office/drawing/2014/main" xmlns="" id="{93E9C8F1-A86B-86D8-7BF0-C4ADBF9BACEE}"/>
               </a:ext>
             </a:extLst>
           </p:cNvPr>
@@ -12105,7 +12896,7 @@
           <p:cNvPr id="2" name="Cím 1">
             <a:extLst>
               <a:ext uri="{FF2B5EF4-FFF2-40B4-BE49-F238E27FC236}">
-                <a16:creationId xmlns:a16="http://schemas.microsoft.com/office/drawing/2014/main" id="{1B244E95-BDC4-8D7E-9410-C71185CE8C85}"/>
+                <a16:creationId xmlns:a16="http://schemas.microsoft.com/office/drawing/2014/main" xmlns="" id="{1B244E95-BDC4-8D7E-9410-C71185CE8C85}"/>
               </a:ext>
             </a:extLst>
           </p:cNvPr>
@@ -12131,7 +12922,7 @@
     </p:spTree>
     <p:extLst>
       <p:ext uri="{BB962C8B-B14F-4D97-AF65-F5344CB8AC3E}">
-        <p14:creationId xmlns:p14="http://schemas.microsoft.com/office/powerpoint/2010/main" val="1608496070"/>
+        <p14:creationId xmlns:p14="http://schemas.microsoft.com/office/powerpoint/2010/main" xmlns="" val="1608496070"/>
       </p:ext>
     </p:extLst>
   </p:cSld>
@@ -12152,7 +12943,7 @@
         <p:cNvPr id="1" name="">
           <a:extLst>
             <a:ext uri="{FF2B5EF4-FFF2-40B4-BE49-F238E27FC236}">
-              <a16:creationId xmlns:a16="http://schemas.microsoft.com/office/drawing/2014/main" id="{33154BA3-C252-6C61-9BFC-DE7EDB567000}"/>
+              <a16:creationId xmlns:a16="http://schemas.microsoft.com/office/drawing/2014/main" xmlns="" id="{33154BA3-C252-6C61-9BFC-DE7EDB567000}"/>
             </a:ext>
           </a:extLst>
         </p:cNvPr>
@@ -12172,7 +12963,7 @@
           <p:cNvPr id="7" name="Kép 6">
             <a:extLst>
               <a:ext uri="{FF2B5EF4-FFF2-40B4-BE49-F238E27FC236}">
-                <a16:creationId xmlns:a16="http://schemas.microsoft.com/office/drawing/2014/main" id="{F4E52981-0A97-79A6-C9A4-5227C7512286}"/>
+                <a16:creationId xmlns:a16="http://schemas.microsoft.com/office/drawing/2014/main" xmlns="" id="{F4E52981-0A97-79A6-C9A4-5227C7512286}"/>
               </a:ext>
             </a:extLst>
           </p:cNvPr>
@@ -12202,7 +12993,7 @@
           <p:cNvPr id="2" name="Cím 1">
             <a:extLst>
               <a:ext uri="{FF2B5EF4-FFF2-40B4-BE49-F238E27FC236}">
-                <a16:creationId xmlns:a16="http://schemas.microsoft.com/office/drawing/2014/main" id="{97CEF7D3-2587-8E79-1C83-BE4B85DDBDE8}"/>
+                <a16:creationId xmlns:a16="http://schemas.microsoft.com/office/drawing/2014/main" xmlns="" id="{97CEF7D3-2587-8E79-1C83-BE4B85DDBDE8}"/>
               </a:ext>
             </a:extLst>
           </p:cNvPr>
@@ -12228,7 +13019,7 @@
     </p:spTree>
     <p:extLst>
       <p:ext uri="{BB962C8B-B14F-4D97-AF65-F5344CB8AC3E}">
-        <p14:creationId xmlns:p14="http://schemas.microsoft.com/office/powerpoint/2010/main" val="3446405935"/>
+        <p14:creationId xmlns:p14="http://schemas.microsoft.com/office/powerpoint/2010/main" xmlns="" val="3446405935"/>
       </p:ext>
     </p:extLst>
   </p:cSld>
@@ -12284,7 +13075,7 @@
     </a:clrScheme>
     <a:fontScheme name="Galéria">
       <a:majorFont>
-        <a:latin typeface="Gill Sans MT" panose="020B0502020104020203"/>
+        <a:latin typeface="Gill Sans MT"/>
         <a:ea typeface=""/>
         <a:cs typeface=""/>
         <a:font script="Jpan" typeface="游ゴシック Light"/>
@@ -12319,7 +13110,7 @@
         <a:font script="Geor" typeface="Sylfaen"/>
       </a:majorFont>
       <a:minorFont>
-        <a:latin typeface="Gill Sans MT" panose="020B0502020104020203"/>
+        <a:latin typeface="Gill Sans MT"/>
         <a:ea typeface=""/>
         <a:cs typeface=""/>
         <a:font script="Jpan" typeface="游ゴシック"/>
@@ -12488,7 +13279,7 @@
   <a:extraClrSchemeLst/>
   <a:extLst>
     <a:ext uri="{05A4C25C-085E-4340-85A3-A5531E510DB2}">
-      <thm15:themeFamily xmlns:thm15="http://schemas.microsoft.com/office/thememl/2012/main" name="Gallery" id="{BBFCD31E-59A1-489D-B089-A3EAD7CAE12E}" vid="{F5E91637-A7B6-4E27-B710-77DA7014EE1E}"/>
+      <thm15:themeFamily xmlns:thm15="http://schemas.microsoft.com/office/thememl/2012/main" xmlns="" name="Gallery" id="{BBFCD31E-59A1-489D-B089-A3EAD7CAE12E}" vid="{F5E91637-A7B6-4E27-B710-77DA7014EE1E}"/>
     </a:ext>
   </a:extLst>
 </a:theme>
@@ -12537,7 +13328,7 @@
     </a:clrScheme>
     <a:fontScheme name="Office">
       <a:majorFont>
-        <a:latin typeface="Aptos Display" panose="02110004020202020204"/>
+        <a:latin typeface="Aptos Display"/>
         <a:ea typeface=""/>
         <a:cs typeface=""/>
         <a:font script="Jpan" typeface="游ゴシック Light"/>
@@ -12589,7 +13380,7 @@
         <a:font script="Tfng" typeface="Ebrima"/>
       </a:majorFont>
       <a:minorFont>
-        <a:latin typeface="Aptos" panose="02110004020202020204"/>
+        <a:latin typeface="Aptos"/>
         <a:ea typeface=""/>
         <a:cs typeface=""/>
         <a:font script="Jpan" typeface="游ゴシック"/>
@@ -12803,7 +13594,7 @@
   <a:extraClrSchemeLst/>
   <a:extLst>
     <a:ext uri="{05A4C25C-085E-4340-85A3-A5531E510DB2}">
-      <thm15:themeFamily xmlns:thm15="http://schemas.microsoft.com/office/thememl/2012/main" name="Office Theme" id="{2E142A2C-CD16-42D6-873A-C26D2A0506FA}" vid="{1BDDFF52-6CD6-40A5-AB3C-68EB2F1E4D0A}"/>
+      <thm15:themeFamily xmlns:thm15="http://schemas.microsoft.com/office/thememl/2012/main" xmlns="" name="Office Theme" id="{2E142A2C-CD16-42D6-873A-C26D2A0506FA}" vid="{1BDDFF52-6CD6-40A5-AB3C-68EB2F1E4D0A}"/>
     </a:ext>
   </a:extLst>
 </a:theme>
@@ -12852,7 +13643,7 @@
     </a:clrScheme>
     <a:fontScheme name="Office">
       <a:majorFont>
-        <a:latin typeface="Aptos Display" panose="02110004020202020204"/>
+        <a:latin typeface="Aptos Display"/>
         <a:ea typeface=""/>
         <a:cs typeface=""/>
         <a:font script="Jpan" typeface="游ゴシック Light"/>
@@ -12904,7 +13695,7 @@
         <a:font script="Tfng" typeface="Ebrima"/>
       </a:majorFont>
       <a:minorFont>
-        <a:latin typeface="Aptos" panose="02110004020202020204"/>
+        <a:latin typeface="Aptos"/>
         <a:ea typeface=""/>
         <a:cs typeface=""/>
         <a:font script="Jpan" typeface="游ゴシック"/>
@@ -13118,7 +13909,7 @@
   <a:extraClrSchemeLst/>
   <a:extLst>
     <a:ext uri="{05A4C25C-085E-4340-85A3-A5531E510DB2}">
-      <thm15:themeFamily xmlns:thm15="http://schemas.microsoft.com/office/thememl/2012/main" name="Office Theme" id="{2E142A2C-CD16-42D6-873A-C26D2A0506FA}" vid="{1BDDFF52-6CD6-40A5-AB3C-68EB2F1E4D0A}"/>
+      <thm15:themeFamily xmlns:thm15="http://schemas.microsoft.com/office/thememl/2012/main" xmlns="" name="Office Theme" id="{2E142A2C-CD16-42D6-873A-C26D2A0506FA}" vid="{1BDDFF52-6CD6-40A5-AB3C-68EB2F1E4D0A}"/>
     </a:ext>
   </a:extLst>
 </a:theme>

--- a/Kanban webapp - Buborék együttes.pptx
+++ b/Kanban webapp - Buborék együttes.pptx
@@ -135,7 +135,18 @@
   </p:defaultTextStyle>
   <p:extLst>
     <p:ext uri="{EFAFB233-063F-42B5-8137-9DF3F51BA10A}">
-      <p15:sldGuideLst xmlns:p15="http://schemas.microsoft.com/office/powerpoint/2012/main" xmlns=""/>
+      <p15:sldGuideLst xmlns:p15="http://schemas.microsoft.com/office/powerpoint/2012/main">
+        <p15:guide id="1" orient="horz" pos="2160">
+          <p15:clr>
+            <a:srgbClr val="A4A3A4"/>
+          </p15:clr>
+        </p15:guide>
+        <p15:guide id="2" pos="3840">
+          <p15:clr>
+            <a:srgbClr val="A4A3A4"/>
+          </p15:clr>
+        </p15:guide>
+      </p15:sldGuideLst>
     </p:ext>
   </p:extLst>
 </p:presentation>
@@ -168,7 +179,7 @@
           <p:cNvPr id="2" name="Élőfej helye 1">
             <a:extLst>
               <a:ext uri="{FF2B5EF4-FFF2-40B4-BE49-F238E27FC236}">
-                <a16:creationId xmlns:a16="http://schemas.microsoft.com/office/drawing/2014/main" xmlns="" id="{8B3139B0-081C-FE30-0B39-CA3232006985}"/>
+                <a16:creationId xmlns:a16="http://schemas.microsoft.com/office/drawing/2014/main" id="{8B3139B0-081C-FE30-0B39-CA3232006985}"/>
               </a:ext>
             </a:extLst>
           </p:cNvPr>
@@ -205,7 +216,7 @@
           <p:cNvPr id="3" name="Dátum helye 2">
             <a:extLst>
               <a:ext uri="{FF2B5EF4-FFF2-40B4-BE49-F238E27FC236}">
-                <a16:creationId xmlns:a16="http://schemas.microsoft.com/office/drawing/2014/main" xmlns="" id="{2B3B78BF-44EC-6563-0DAB-79B7460CA83E}"/>
+                <a16:creationId xmlns:a16="http://schemas.microsoft.com/office/drawing/2014/main" id="{2B3B78BF-44EC-6563-0DAB-79B7460CA83E}"/>
               </a:ext>
             </a:extLst>
           </p:cNvPr>
@@ -236,7 +247,7 @@
             <a:fld id="{795EECD7-D4C7-4FE3-AB70-00E199DD6761}" type="datetimeFigureOut">
               <a:rPr lang="hu-HU" smtClean="0"/>
               <a:pPr/>
-              <a:t>2025. 11. 15.</a:t>
+              <a:t>2025. 11. 16.</a:t>
             </a:fld>
             <a:endParaRPr lang="hu-HU"/>
           </a:p>
@@ -247,7 +258,7 @@
           <p:cNvPr id="4" name="Élőláb helye 3">
             <a:extLst>
               <a:ext uri="{FF2B5EF4-FFF2-40B4-BE49-F238E27FC236}">
-                <a16:creationId xmlns:a16="http://schemas.microsoft.com/office/drawing/2014/main" xmlns="" id="{E3EC39D6-A0F8-45E6-7791-5C50A0DBB470}"/>
+                <a16:creationId xmlns:a16="http://schemas.microsoft.com/office/drawing/2014/main" id="{E3EC39D6-A0F8-45E6-7791-5C50A0DBB470}"/>
               </a:ext>
             </a:extLst>
           </p:cNvPr>
@@ -284,7 +295,7 @@
           <p:cNvPr id="5" name="Dia számának helye 4">
             <a:extLst>
               <a:ext uri="{FF2B5EF4-FFF2-40B4-BE49-F238E27FC236}">
-                <a16:creationId xmlns:a16="http://schemas.microsoft.com/office/drawing/2014/main" xmlns="" id="{2F2DDB24-4697-57F6-2A56-F247C6312B67}"/>
+                <a16:creationId xmlns:a16="http://schemas.microsoft.com/office/drawing/2014/main" id="{2F2DDB24-4697-57F6-2A56-F247C6312B67}"/>
               </a:ext>
             </a:extLst>
           </p:cNvPr>
@@ -324,7 +335,7 @@
     </p:spTree>
     <p:extLst>
       <p:ext uri="{BB962C8B-B14F-4D97-AF65-F5344CB8AC3E}">
-        <p14:creationId xmlns:p14="http://schemas.microsoft.com/office/powerpoint/2010/main" xmlns="" val="3830844958"/>
+        <p14:creationId xmlns:p14="http://schemas.microsoft.com/office/powerpoint/2010/main" val="3830844958"/>
       </p:ext>
     </p:extLst>
   </p:cSld>
@@ -416,7 +427,7 @@
             <a:fld id="{2D5DABCF-F2FF-4310-8608-C10C325E963C}" type="datetimeFigureOut">
               <a:rPr lang="hu-HU" smtClean="0"/>
               <a:pPr/>
-              <a:t>2025. 11. 15.</a:t>
+              <a:t>2025. 11. 16.</a:t>
             </a:fld>
             <a:endParaRPr lang="hu-HU"/>
           </a:p>
@@ -584,7 +595,7 @@
     </p:spTree>
     <p:extLst>
       <p:ext uri="{BB962C8B-B14F-4D97-AF65-F5344CB8AC3E}">
-        <p14:creationId xmlns:p14="http://schemas.microsoft.com/office/powerpoint/2010/main" xmlns="" val="400803380"/>
+        <p14:creationId xmlns:p14="http://schemas.microsoft.com/office/powerpoint/2010/main" val="400803380"/>
       </p:ext>
     </p:extLst>
   </p:cSld>
@@ -760,7 +771,7 @@
     </p:spTree>
     <p:extLst>
       <p:ext uri="{BB962C8B-B14F-4D97-AF65-F5344CB8AC3E}">
-        <p14:creationId xmlns:p14="http://schemas.microsoft.com/office/powerpoint/2010/main" xmlns="" val="1144435710"/>
+        <p14:creationId xmlns:p14="http://schemas.microsoft.com/office/powerpoint/2010/main" val="1144435710"/>
       </p:ext>
     </p:extLst>
   </p:cSld>
@@ -910,7 +921,7 @@
             <a:fld id="{67F45AC6-C491-4585-A584-9CE2AF7D5500}" type="datetime1">
               <a:rPr lang="en-US" smtClean="0"/>
               <a:pPr/>
-              <a:t>11/15/2025</a:t>
+              <a:t>11/16/2025</a:t>
             </a:fld>
             <a:endParaRPr lang="en-US"/>
           </a:p>
@@ -1003,7 +1014,7 @@
     </p:spTree>
     <p:extLst>
       <p:ext uri="{BB962C8B-B14F-4D97-AF65-F5344CB8AC3E}">
-        <p14:creationId xmlns:p14="http://schemas.microsoft.com/office/powerpoint/2010/main" xmlns="" val="1845892265"/>
+        <p14:creationId xmlns:p14="http://schemas.microsoft.com/office/powerpoint/2010/main" val="1845892265"/>
       </p:ext>
     </p:extLst>
   </p:cSld>
@@ -1124,7 +1135,7 @@
             <a:fld id="{67F45AC6-C491-4585-A584-9CE2AF7D5500}" type="datetime1">
               <a:rPr lang="en-US" smtClean="0"/>
               <a:pPr/>
-              <a:t>11/15/2025</a:t>
+              <a:t>11/16/2025</a:t>
             </a:fld>
             <a:endParaRPr lang="en-US"/>
           </a:p>
@@ -1207,7 +1218,7 @@
     </p:spTree>
     <p:extLst>
       <p:ext uri="{BB962C8B-B14F-4D97-AF65-F5344CB8AC3E}">
-        <p14:creationId xmlns:p14="http://schemas.microsoft.com/office/powerpoint/2010/main" xmlns="" val="91267506"/>
+        <p14:creationId xmlns:p14="http://schemas.microsoft.com/office/powerpoint/2010/main" val="91267506"/>
       </p:ext>
     </p:extLst>
   </p:cSld>
@@ -1342,7 +1353,7 @@
             <a:fld id="{67F45AC6-C491-4585-A584-9CE2AF7D5500}" type="datetime1">
               <a:rPr lang="en-US" smtClean="0"/>
               <a:pPr/>
-              <a:t>11/15/2025</a:t>
+              <a:t>11/16/2025</a:t>
             </a:fld>
             <a:endParaRPr lang="en-US"/>
           </a:p>
@@ -1425,7 +1436,7 @@
     </p:spTree>
     <p:extLst>
       <p:ext uri="{BB962C8B-B14F-4D97-AF65-F5344CB8AC3E}">
-        <p14:creationId xmlns:p14="http://schemas.microsoft.com/office/powerpoint/2010/main" xmlns="" val="1192826027"/>
+        <p14:creationId xmlns:p14="http://schemas.microsoft.com/office/powerpoint/2010/main" val="1192826027"/>
       </p:ext>
     </p:extLst>
   </p:cSld>
@@ -1546,7 +1557,7 @@
             <a:fld id="{67F45AC6-C491-4585-A584-9CE2AF7D5500}" type="datetime1">
               <a:rPr lang="en-US" smtClean="0"/>
               <a:pPr/>
-              <a:t>11/15/2025</a:t>
+              <a:t>11/16/2025</a:t>
             </a:fld>
             <a:endParaRPr lang="en-US"/>
           </a:p>
@@ -1629,7 +1640,7 @@
     </p:spTree>
     <p:extLst>
       <p:ext uri="{BB962C8B-B14F-4D97-AF65-F5344CB8AC3E}">
-        <p14:creationId xmlns:p14="http://schemas.microsoft.com/office/powerpoint/2010/main" xmlns="" val="2336284126"/>
+        <p14:creationId xmlns:p14="http://schemas.microsoft.com/office/powerpoint/2010/main" val="2336284126"/>
       </p:ext>
     </p:extLst>
   </p:cSld>
@@ -1828,7 +1839,7 @@
             <a:fld id="{67F45AC6-C491-4585-A584-9CE2AF7D5500}" type="datetime1">
               <a:rPr lang="en-US" smtClean="0"/>
               <a:pPr/>
-              <a:t>11/15/2025</a:t>
+              <a:t>11/16/2025</a:t>
             </a:fld>
             <a:endParaRPr lang="en-US"/>
           </a:p>
@@ -1911,7 +1922,7 @@
     </p:spTree>
     <p:extLst>
       <p:ext uri="{BB962C8B-B14F-4D97-AF65-F5344CB8AC3E}">
-        <p14:creationId xmlns:p14="http://schemas.microsoft.com/office/powerpoint/2010/main" xmlns="" val="2864186830"/>
+        <p14:creationId xmlns:p14="http://schemas.microsoft.com/office/powerpoint/2010/main" val="2864186830"/>
       </p:ext>
     </p:extLst>
   </p:cSld>
@@ -2099,7 +2110,7 @@
             <a:fld id="{67F45AC6-C491-4585-A584-9CE2AF7D5500}" type="datetime1">
               <a:rPr lang="en-US" smtClean="0"/>
               <a:pPr/>
-              <a:t>11/15/2025</a:t>
+              <a:t>11/16/2025</a:t>
             </a:fld>
             <a:endParaRPr lang="en-US"/>
           </a:p>
@@ -2182,7 +2193,7 @@
     </p:spTree>
     <p:extLst>
       <p:ext uri="{BB962C8B-B14F-4D97-AF65-F5344CB8AC3E}">
-        <p14:creationId xmlns:p14="http://schemas.microsoft.com/office/powerpoint/2010/main" xmlns="" val="700596866"/>
+        <p14:creationId xmlns:p14="http://schemas.microsoft.com/office/powerpoint/2010/main" val="700596866"/>
       </p:ext>
     </p:extLst>
   </p:cSld>
@@ -2518,7 +2529,7 @@
             <a:fld id="{67F45AC6-C491-4585-A584-9CE2AF7D5500}" type="datetime1">
               <a:rPr lang="en-US" smtClean="0"/>
               <a:pPr/>
-              <a:t>11/15/2025</a:t>
+              <a:t>11/16/2025</a:t>
             </a:fld>
             <a:endParaRPr lang="en-US"/>
           </a:p>
@@ -2601,7 +2612,7 @@
     </p:spTree>
     <p:extLst>
       <p:ext uri="{BB962C8B-B14F-4D97-AF65-F5344CB8AC3E}">
-        <p14:creationId xmlns:p14="http://schemas.microsoft.com/office/powerpoint/2010/main" xmlns="" val="1860441236"/>
+        <p14:creationId xmlns:p14="http://schemas.microsoft.com/office/powerpoint/2010/main" val="1860441236"/>
       </p:ext>
     </p:extLst>
   </p:cSld>
@@ -2670,7 +2681,7 @@
             <a:fld id="{67F45AC6-C491-4585-A584-9CE2AF7D5500}" type="datetime1">
               <a:rPr lang="en-US" smtClean="0"/>
               <a:pPr/>
-              <a:t>11/15/2025</a:t>
+              <a:t>11/16/2025</a:t>
             </a:fld>
             <a:endParaRPr lang="en-US"/>
           </a:p>
@@ -2753,7 +2764,7 @@
     </p:spTree>
     <p:extLst>
       <p:ext uri="{BB962C8B-B14F-4D97-AF65-F5344CB8AC3E}">
-        <p14:creationId xmlns:p14="http://schemas.microsoft.com/office/powerpoint/2010/main" xmlns="" val="3403264876"/>
+        <p14:creationId xmlns:p14="http://schemas.microsoft.com/office/powerpoint/2010/main" val="3403264876"/>
       </p:ext>
     </p:extLst>
   </p:cSld>
@@ -2799,7 +2810,7 @@
             <a:fld id="{67F45AC6-C491-4585-A584-9CE2AF7D5500}" type="datetime1">
               <a:rPr lang="en-US" smtClean="0"/>
               <a:pPr/>
-              <a:t>11/15/2025</a:t>
+              <a:t>11/16/2025</a:t>
             </a:fld>
             <a:endParaRPr lang="en-US"/>
           </a:p>
@@ -2851,7 +2862,7 @@
     </p:spTree>
     <p:extLst>
       <p:ext uri="{BB962C8B-B14F-4D97-AF65-F5344CB8AC3E}">
-        <p14:creationId xmlns:p14="http://schemas.microsoft.com/office/powerpoint/2010/main" xmlns="" val="3549359683"/>
+        <p14:creationId xmlns:p14="http://schemas.microsoft.com/office/powerpoint/2010/main" val="3549359683"/>
       </p:ext>
     </p:extLst>
   </p:cSld>
@@ -3053,7 +3064,7 @@
             <a:fld id="{67F45AC6-C491-4585-A584-9CE2AF7D5500}" type="datetime1">
               <a:rPr lang="en-US" smtClean="0"/>
               <a:pPr/>
-              <a:t>11/15/2025</a:t>
+              <a:t>11/16/2025</a:t>
             </a:fld>
             <a:endParaRPr lang="en-US"/>
           </a:p>
@@ -3136,7 +3147,7 @@
     </p:spTree>
     <p:extLst>
       <p:ext uri="{BB962C8B-B14F-4D97-AF65-F5344CB8AC3E}">
-        <p14:creationId xmlns:p14="http://schemas.microsoft.com/office/powerpoint/2010/main" xmlns="" val="1237110938"/>
+        <p14:creationId xmlns:p14="http://schemas.microsoft.com/office/powerpoint/2010/main" val="1237110938"/>
       </p:ext>
     </p:extLst>
   </p:cSld>
@@ -3501,7 +3512,7 @@
             <a:fld id="{67F45AC6-C491-4585-A584-9CE2AF7D5500}" type="datetime1">
               <a:rPr lang="en-US" smtClean="0"/>
               <a:pPr/>
-              <a:t>11/15/2025</a:t>
+              <a:t>11/16/2025</a:t>
             </a:fld>
             <a:endParaRPr lang="en-US"/>
           </a:p>
@@ -3589,7 +3600,7 @@
     </p:spTree>
     <p:extLst>
       <p:ext uri="{BB962C8B-B14F-4D97-AF65-F5344CB8AC3E}">
-        <p14:creationId xmlns:p14="http://schemas.microsoft.com/office/powerpoint/2010/main" xmlns="" val="2431406703"/>
+        <p14:creationId xmlns:p14="http://schemas.microsoft.com/office/powerpoint/2010/main" val="2431406703"/>
       </p:ext>
     </p:extLst>
   </p:cSld>
@@ -3690,7 +3701,7 @@
           <a:blip r:embed="rId13">
             <a:extLst>
               <a:ext uri="{28A0092B-C50C-407E-A947-70E740481C1C}">
-                <a14:useLocalDpi xmlns:a14="http://schemas.microsoft.com/office/drawing/2010/main" xmlns="" val="0"/>
+                <a14:useLocalDpi xmlns:a14="http://schemas.microsoft.com/office/drawing/2010/main" val="0"/>
               </a:ext>
             </a:extLst>
           </a:blip>
@@ -3838,7 +3849,7 @@
             <a:fld id="{67F45AC6-C491-4585-A584-9CE2AF7D5500}" type="datetime1">
               <a:rPr lang="en-US" smtClean="0"/>
               <a:pPr/>
-              <a:t>11/15/2025</a:t>
+              <a:t>11/16/2025</a:t>
             </a:fld>
             <a:endParaRPr lang="en-US"/>
           </a:p>
@@ -3961,7 +3972,7 @@
     </p:spTree>
     <p:extLst>
       <p:ext uri="{BB962C8B-B14F-4D97-AF65-F5344CB8AC3E}">
-        <p14:creationId xmlns:p14="http://schemas.microsoft.com/office/powerpoint/2010/main" xmlns="" val="2588649061"/>
+        <p14:creationId xmlns:p14="http://schemas.microsoft.com/office/powerpoint/2010/main" val="2588649061"/>
       </p:ext>
     </p:extLst>
   </p:cSld>
@@ -4339,10 +4350,10 @@
           <p:cNvPr id="22" name="Rectangle 7">
             <a:extLst>
               <a:ext uri="{FF2B5EF4-FFF2-40B4-BE49-F238E27FC236}">
-                <a16:creationId xmlns:a16="http://schemas.microsoft.com/office/drawing/2014/main" xmlns="" id="{1EE485E7-7D6D-4CB0-A3AD-261D97B2EFEA}"/>
+                <a16:creationId xmlns:a16="http://schemas.microsoft.com/office/drawing/2014/main" id="{1EE485E7-7D6D-4CB0-A3AD-261D97B2EFEA}"/>
               </a:ext>
               <a:ext uri="{C183D7F6-B498-43B3-948B-1728B52AA6E4}">
-                <adec:decorative xmlns:adec="http://schemas.microsoft.com/office/drawing/2017/decorative" xmlns="" val="1"/>
+                <adec:decorative xmlns:adec="http://schemas.microsoft.com/office/drawing/2017/decorative" val="1"/>
               </a:ext>
             </a:extLst>
           </p:cNvPr>
@@ -4352,7 +4363,7 @@
           <p:nvPr>
             <p:extLst>
               <p:ext uri="{386F3935-93C4-4BCD-93E2-E3B085C9AB24}">
-                <p16:designElem xmlns:p16="http://schemas.microsoft.com/office/powerpoint/2015/main" xmlns="" val="1"/>
+                <p16:designElem xmlns:p16="http://schemas.microsoft.com/office/powerpoint/2015/main" val="1"/>
               </p:ext>
             </p:extLst>
           </p:nvPr>
@@ -4399,10 +4410,10 @@
           <p:cNvPr id="23" name="Rectangle 9">
             <a:extLst>
               <a:ext uri="{FF2B5EF4-FFF2-40B4-BE49-F238E27FC236}">
-                <a16:creationId xmlns:a16="http://schemas.microsoft.com/office/drawing/2014/main" xmlns="" id="{A55E3208-F0C4-4962-8946-065C94F89635}"/>
+                <a16:creationId xmlns:a16="http://schemas.microsoft.com/office/drawing/2014/main" id="{A55E3208-F0C4-4962-8946-065C94F89635}"/>
               </a:ext>
               <a:ext uri="{C183D7F6-B498-43B3-948B-1728B52AA6E4}">
-                <adec:decorative xmlns:adec="http://schemas.microsoft.com/office/drawing/2017/decorative" xmlns="" val="1"/>
+                <adec:decorative xmlns:adec="http://schemas.microsoft.com/office/drawing/2017/decorative" val="1"/>
               </a:ext>
             </a:extLst>
           </p:cNvPr>
@@ -4412,7 +4423,7 @@
           <p:nvPr>
             <p:extLst>
               <p:ext uri="{386F3935-93C4-4BCD-93E2-E3B085C9AB24}">
-                <p16:designElem xmlns:p16="http://schemas.microsoft.com/office/powerpoint/2015/main" xmlns="" val="1"/>
+                <p16:designElem xmlns:p16="http://schemas.microsoft.com/office/powerpoint/2015/main" val="1"/>
               </p:ext>
             </p:extLst>
           </p:nvPr>
@@ -4473,7 +4484,7 @@
           <p:cNvPr id="2" name="Cím 1">
             <a:extLst>
               <a:ext uri="{FF2B5EF4-FFF2-40B4-BE49-F238E27FC236}">
-                <a16:creationId xmlns:a16="http://schemas.microsoft.com/office/drawing/2014/main" xmlns="" id="{71137672-A00C-135C-4D3A-698554AD7312}"/>
+                <a16:creationId xmlns:a16="http://schemas.microsoft.com/office/drawing/2014/main" id="{71137672-A00C-135C-4D3A-698554AD7312}"/>
               </a:ext>
             </a:extLst>
           </p:cNvPr>
@@ -4508,7 +4519,7 @@
           <p:cNvPr id="3" name="Alcím 2">
             <a:extLst>
               <a:ext uri="{FF2B5EF4-FFF2-40B4-BE49-F238E27FC236}">
-                <a16:creationId xmlns:a16="http://schemas.microsoft.com/office/drawing/2014/main" xmlns="" id="{44E7AF2D-E654-D9AB-9F02-59791EDDA448}"/>
+                <a16:creationId xmlns:a16="http://schemas.microsoft.com/office/drawing/2014/main" id="{44E7AF2D-E654-D9AB-9F02-59791EDDA448}"/>
               </a:ext>
             </a:extLst>
           </p:cNvPr>
@@ -4544,10 +4555,10 @@
           <p:cNvPr id="24" name="Straight Connector 11">
             <a:extLst>
               <a:ext uri="{FF2B5EF4-FFF2-40B4-BE49-F238E27FC236}">
-                <a16:creationId xmlns:a16="http://schemas.microsoft.com/office/drawing/2014/main" xmlns="" id="{4FAE17D3-C2DC-4665-AF20-33C5BACD5E01}"/>
+                <a16:creationId xmlns:a16="http://schemas.microsoft.com/office/drawing/2014/main" id="{4FAE17D3-C2DC-4665-AF20-33C5BACD5E01}"/>
               </a:ext>
               <a:ext uri="{C183D7F6-B498-43B3-948B-1728B52AA6E4}">
-                <adec:decorative xmlns:adec="http://schemas.microsoft.com/office/drawing/2017/decorative" xmlns="" val="1"/>
+                <adec:decorative xmlns:adec="http://schemas.microsoft.com/office/drawing/2017/decorative" val="1"/>
               </a:ext>
             </a:extLst>
           </p:cNvPr>
@@ -4557,7 +4568,7 @@
           <p:nvPr>
             <p:extLst>
               <p:ext uri="{386F3935-93C4-4BCD-93E2-E3B085C9AB24}">
-                <p16:designElem xmlns:p16="http://schemas.microsoft.com/office/powerpoint/2015/main" xmlns="" val="1"/>
+                <p16:designElem xmlns:p16="http://schemas.microsoft.com/office/powerpoint/2015/main" val="1"/>
               </p:ext>
             </p:extLst>
           </p:nvPr>
@@ -4592,10 +4603,10 @@
           <p:cNvPr id="25" name="Picture 13">
             <a:extLst>
               <a:ext uri="{FF2B5EF4-FFF2-40B4-BE49-F238E27FC236}">
-                <a16:creationId xmlns:a16="http://schemas.microsoft.com/office/drawing/2014/main" xmlns="" id="{7021C573-B3FF-44B8-A5DE-AB39E9AA6B96}"/>
+                <a16:creationId xmlns:a16="http://schemas.microsoft.com/office/drawing/2014/main" id="{7021C573-B3FF-44B8-A5DE-AB39E9AA6B96}"/>
               </a:ext>
               <a:ext uri="{C183D7F6-B498-43B3-948B-1728B52AA6E4}">
-                <adec:decorative xmlns:adec="http://schemas.microsoft.com/office/drawing/2017/decorative" xmlns="" val="1"/>
+                <adec:decorative xmlns:adec="http://schemas.microsoft.com/office/drawing/2017/decorative" val="1"/>
               </a:ext>
             </a:extLst>
           </p:cNvPr>
@@ -4605,7 +4616,7 @@
           <p:nvPr>
             <p:extLst>
               <p:ext uri="{386F3935-93C4-4BCD-93E2-E3B085C9AB24}">
-                <p16:designElem xmlns:p16="http://schemas.microsoft.com/office/powerpoint/2015/main" xmlns="" val="1"/>
+                <p16:designElem xmlns:p16="http://schemas.microsoft.com/office/powerpoint/2015/main" val="1"/>
               </p:ext>
             </p:extLst>
           </p:nvPr>
@@ -4614,7 +4625,7 @@
           <a:blip r:embed="rId2">
             <a:extLst>
               <a:ext uri="{28A0092B-C50C-407E-A947-70E740481C1C}">
-                <a14:useLocalDpi xmlns:a14="http://schemas.microsoft.com/office/drawing/2010/main" xmlns="" val="0"/>
+                <a14:useLocalDpi xmlns:a14="http://schemas.microsoft.com/office/drawing/2010/main" val="0"/>
               </a:ext>
             </a:extLst>
           </a:blip>
@@ -4636,10 +4647,10 @@
           <p:cNvPr id="26" name="Straight Connector 15">
             <a:extLst>
               <a:ext uri="{FF2B5EF4-FFF2-40B4-BE49-F238E27FC236}">
-                <a16:creationId xmlns:a16="http://schemas.microsoft.com/office/drawing/2014/main" xmlns="" id="{50B0CCD4-E9B0-43B2-806F-05EDF57A7628}"/>
+                <a16:creationId xmlns:a16="http://schemas.microsoft.com/office/drawing/2014/main" id="{50B0CCD4-E9B0-43B2-806F-05EDF57A7628}"/>
               </a:ext>
               <a:ext uri="{C183D7F6-B498-43B3-948B-1728B52AA6E4}">
-                <adec:decorative xmlns:adec="http://schemas.microsoft.com/office/drawing/2017/decorative" xmlns="" val="1"/>
+                <adec:decorative xmlns:adec="http://schemas.microsoft.com/office/drawing/2017/decorative" val="1"/>
               </a:ext>
             </a:extLst>
           </p:cNvPr>
@@ -4649,7 +4660,7 @@
           <p:nvPr>
             <p:extLst>
               <p:ext uri="{386F3935-93C4-4BCD-93E2-E3B085C9AB24}">
-                <p16:designElem xmlns:p16="http://schemas.microsoft.com/office/powerpoint/2015/main" xmlns="" val="1"/>
+                <p16:designElem xmlns:p16="http://schemas.microsoft.com/office/powerpoint/2015/main" val="1"/>
               </p:ext>
             </p:extLst>
           </p:nvPr>
@@ -4688,7 +4699,7 @@
     </p:spTree>
     <p:extLst>
       <p:ext uri="{BB962C8B-B14F-4D97-AF65-F5344CB8AC3E}">
-        <p14:creationId xmlns:p14="http://schemas.microsoft.com/office/powerpoint/2010/main" xmlns="" val="884048900"/>
+        <p14:creationId xmlns:p14="http://schemas.microsoft.com/office/powerpoint/2010/main" val="884048900"/>
       </p:ext>
     </p:extLst>
   </p:cSld>
@@ -4720,7 +4731,7 @@
           <p:cNvPr id="2" name="Cím 1">
             <a:extLst>
               <a:ext uri="{FF2B5EF4-FFF2-40B4-BE49-F238E27FC236}">
-                <a16:creationId xmlns:a16="http://schemas.microsoft.com/office/drawing/2014/main" xmlns="" id="{5F9D479E-1FE8-51D6-A1FC-8EF788F5968E}"/>
+                <a16:creationId xmlns:a16="http://schemas.microsoft.com/office/drawing/2014/main" id="{5F9D479E-1FE8-51D6-A1FC-8EF788F5968E}"/>
               </a:ext>
             </a:extLst>
           </p:cNvPr>
@@ -4748,7 +4759,7 @@
           <p:cNvPr id="7" name="Kép 6">
             <a:extLst>
               <a:ext uri="{FF2B5EF4-FFF2-40B4-BE49-F238E27FC236}">
-                <a16:creationId xmlns:a16="http://schemas.microsoft.com/office/drawing/2014/main" xmlns="" id="{4198433E-9CA4-DD9B-293B-99D84D4D8B21}"/>
+                <a16:creationId xmlns:a16="http://schemas.microsoft.com/office/drawing/2014/main" id="{4198433E-9CA4-DD9B-293B-99D84D4D8B21}"/>
               </a:ext>
             </a:extLst>
           </p:cNvPr>
@@ -4779,7 +4790,7 @@
           <p:cNvPr id="9" name="Kép 8">
             <a:extLst>
               <a:ext uri="{FF2B5EF4-FFF2-40B4-BE49-F238E27FC236}">
-                <a16:creationId xmlns:a16="http://schemas.microsoft.com/office/drawing/2014/main" xmlns="" id="{2197A9F4-A241-EB61-91DE-E7F30AF53F8C}"/>
+                <a16:creationId xmlns:a16="http://schemas.microsoft.com/office/drawing/2014/main" id="{2197A9F4-A241-EB61-91DE-E7F30AF53F8C}"/>
               </a:ext>
             </a:extLst>
           </p:cNvPr>
@@ -4809,7 +4820,7 @@
           <p:cNvPr id="11" name="Kép 10">
             <a:extLst>
               <a:ext uri="{FF2B5EF4-FFF2-40B4-BE49-F238E27FC236}">
-                <a16:creationId xmlns:a16="http://schemas.microsoft.com/office/drawing/2014/main" xmlns="" id="{F33CF63A-4651-EB0E-1439-6882D81BE854}"/>
+                <a16:creationId xmlns:a16="http://schemas.microsoft.com/office/drawing/2014/main" id="{F33CF63A-4651-EB0E-1439-6882D81BE854}"/>
               </a:ext>
             </a:extLst>
           </p:cNvPr>
@@ -4839,7 +4850,7 @@
           <p:cNvPr id="13" name="Kép 12">
             <a:extLst>
               <a:ext uri="{FF2B5EF4-FFF2-40B4-BE49-F238E27FC236}">
-                <a16:creationId xmlns:a16="http://schemas.microsoft.com/office/drawing/2014/main" xmlns="" id="{E6B3369E-E201-601C-A3FC-3D2604BA1A5C}"/>
+                <a16:creationId xmlns:a16="http://schemas.microsoft.com/office/drawing/2014/main" id="{E6B3369E-E201-601C-A3FC-3D2604BA1A5C}"/>
               </a:ext>
             </a:extLst>
           </p:cNvPr>
@@ -4867,7 +4878,7 @@
     </p:spTree>
     <p:extLst>
       <p:ext uri="{BB962C8B-B14F-4D97-AF65-F5344CB8AC3E}">
-        <p14:creationId xmlns:p14="http://schemas.microsoft.com/office/powerpoint/2010/main" xmlns="" val="2621692130"/>
+        <p14:creationId xmlns:p14="http://schemas.microsoft.com/office/powerpoint/2010/main" val="2621692130"/>
       </p:ext>
     </p:extLst>
   </p:cSld>
@@ -5296,10 +5307,10 @@
           <p:cNvPr id="43" name="Rectangle 42">
             <a:extLst>
               <a:ext uri="{FF2B5EF4-FFF2-40B4-BE49-F238E27FC236}">
-                <a16:creationId xmlns:a16="http://schemas.microsoft.com/office/drawing/2014/main" xmlns="" id="{905CFAD9-EABE-4F83-B098-604752164E6A}"/>
+                <a16:creationId xmlns:a16="http://schemas.microsoft.com/office/drawing/2014/main" id="{905CFAD9-EABE-4F83-B098-604752164E6A}"/>
               </a:ext>
               <a:ext uri="{C183D7F6-B498-43B3-948B-1728B52AA6E4}">
-                <adec:decorative xmlns:adec="http://schemas.microsoft.com/office/drawing/2017/decorative" xmlns="" val="1"/>
+                <adec:decorative xmlns:adec="http://schemas.microsoft.com/office/drawing/2017/decorative" val="1"/>
               </a:ext>
             </a:extLst>
           </p:cNvPr>
@@ -5309,7 +5320,7 @@
           <p:nvPr>
             <p:extLst>
               <p:ext uri="{386F3935-93C4-4BCD-93E2-E3B085C9AB24}">
-                <p16:designElem xmlns:p16="http://schemas.microsoft.com/office/powerpoint/2015/main" xmlns="" val="1"/>
+                <p16:designElem xmlns:p16="http://schemas.microsoft.com/office/powerpoint/2015/main" val="1"/>
               </p:ext>
             </p:extLst>
           </p:nvPr>
@@ -5369,10 +5380,10 @@
           <p:cNvPr id="45" name="Picture 44">
             <a:extLst>
               <a:ext uri="{FF2B5EF4-FFF2-40B4-BE49-F238E27FC236}">
-                <a16:creationId xmlns:a16="http://schemas.microsoft.com/office/drawing/2014/main" xmlns="" id="{C99610E4-6194-4817-B152-498995E77181}"/>
+                <a16:creationId xmlns:a16="http://schemas.microsoft.com/office/drawing/2014/main" id="{C99610E4-6194-4817-B152-498995E77181}"/>
               </a:ext>
               <a:ext uri="{C183D7F6-B498-43B3-948B-1728B52AA6E4}">
-                <adec:decorative xmlns:adec="http://schemas.microsoft.com/office/drawing/2017/decorative" xmlns="" val="1"/>
+                <adec:decorative xmlns:adec="http://schemas.microsoft.com/office/drawing/2017/decorative" val="1"/>
               </a:ext>
             </a:extLst>
           </p:cNvPr>
@@ -5382,7 +5393,7 @@
           <p:nvPr>
             <p:extLst>
               <p:ext uri="{386F3935-93C4-4BCD-93E2-E3B085C9AB24}">
-                <p16:designElem xmlns:p16="http://schemas.microsoft.com/office/powerpoint/2015/main" xmlns="" val="1"/>
+                <p16:designElem xmlns:p16="http://schemas.microsoft.com/office/powerpoint/2015/main" val="1"/>
               </p:ext>
             </p:extLst>
           </p:nvPr>
@@ -5391,7 +5402,7 @@
           <a:blip r:embed="rId2">
             <a:extLst>
               <a:ext uri="{28A0092B-C50C-407E-A947-70E740481C1C}">
-                <a14:useLocalDpi xmlns:a14="http://schemas.microsoft.com/office/drawing/2010/main" xmlns="" val="0"/>
+                <a14:useLocalDpi xmlns:a14="http://schemas.microsoft.com/office/drawing/2010/main" val="0"/>
               </a:ext>
             </a:extLst>
           </a:blip>
@@ -5413,10 +5424,10 @@
           <p:cNvPr id="47" name="Straight Connector 46">
             <a:extLst>
               <a:ext uri="{FF2B5EF4-FFF2-40B4-BE49-F238E27FC236}">
-                <a16:creationId xmlns:a16="http://schemas.microsoft.com/office/drawing/2014/main" xmlns="" id="{D885E9F4-7DB6-4B77-B1FF-80BFCE81277B}"/>
+                <a16:creationId xmlns:a16="http://schemas.microsoft.com/office/drawing/2014/main" id="{D885E9F4-7DB6-4B77-B1FF-80BFCE81277B}"/>
               </a:ext>
               <a:ext uri="{C183D7F6-B498-43B3-948B-1728B52AA6E4}">
-                <adec:decorative xmlns:adec="http://schemas.microsoft.com/office/drawing/2017/decorative" xmlns="" val="1"/>
+                <adec:decorative xmlns:adec="http://schemas.microsoft.com/office/drawing/2017/decorative" val="1"/>
               </a:ext>
             </a:extLst>
           </p:cNvPr>
@@ -5426,7 +5437,7 @@
           <p:nvPr>
             <p:extLst>
               <p:ext uri="{386F3935-93C4-4BCD-93E2-E3B085C9AB24}">
-                <p16:designElem xmlns:p16="http://schemas.microsoft.com/office/powerpoint/2015/main" xmlns="" val="1"/>
+                <p16:designElem xmlns:p16="http://schemas.microsoft.com/office/powerpoint/2015/main" val="1"/>
               </p:ext>
             </p:extLst>
           </p:nvPr>
@@ -5467,10 +5478,10 @@
           <p:cNvPr id="49" name="Straight Connector 48">
             <a:extLst>
               <a:ext uri="{FF2B5EF4-FFF2-40B4-BE49-F238E27FC236}">
-                <a16:creationId xmlns:a16="http://schemas.microsoft.com/office/drawing/2014/main" xmlns="" id="{DB639A2B-C30C-4F6F-B847-6960F3CF8A64}"/>
+                <a16:creationId xmlns:a16="http://schemas.microsoft.com/office/drawing/2014/main" id="{DB639A2B-C30C-4F6F-B847-6960F3CF8A64}"/>
               </a:ext>
               <a:ext uri="{C183D7F6-B498-43B3-948B-1728B52AA6E4}">
-                <adec:decorative xmlns:adec="http://schemas.microsoft.com/office/drawing/2017/decorative" xmlns="" val="1"/>
+                <adec:decorative xmlns:adec="http://schemas.microsoft.com/office/drawing/2017/decorative" val="1"/>
               </a:ext>
             </a:extLst>
           </p:cNvPr>
@@ -5480,7 +5491,7 @@
           <p:nvPr>
             <p:extLst>
               <p:ext uri="{386F3935-93C4-4BCD-93E2-E3B085C9AB24}">
-                <p16:designElem xmlns:p16="http://schemas.microsoft.com/office/powerpoint/2015/main" xmlns="" val="1"/>
+                <p16:designElem xmlns:p16="http://schemas.microsoft.com/office/powerpoint/2015/main" val="1"/>
               </p:ext>
             </p:extLst>
           </p:nvPr>
@@ -5515,10 +5526,10 @@
           <p:cNvPr id="51" name="Rectangle 50">
             <a:extLst>
               <a:ext uri="{FF2B5EF4-FFF2-40B4-BE49-F238E27FC236}">
-                <a16:creationId xmlns:a16="http://schemas.microsoft.com/office/drawing/2014/main" xmlns="" id="{D9926FA0-8ED1-4F3A-B23B-FD94D82C74B5}"/>
+                <a16:creationId xmlns:a16="http://schemas.microsoft.com/office/drawing/2014/main" id="{D9926FA0-8ED1-4F3A-B23B-FD94D82C74B5}"/>
               </a:ext>
               <a:ext uri="{C183D7F6-B498-43B3-948B-1728B52AA6E4}">
-                <adec:decorative xmlns:adec="http://schemas.microsoft.com/office/drawing/2017/decorative" xmlns="" val="1"/>
+                <adec:decorative xmlns:adec="http://schemas.microsoft.com/office/drawing/2017/decorative" val="1"/>
               </a:ext>
             </a:extLst>
           </p:cNvPr>
@@ -5528,7 +5539,7 @@
           <p:nvPr>
             <p:extLst>
               <p:ext uri="{386F3935-93C4-4BCD-93E2-E3B085C9AB24}">
-                <p16:designElem xmlns:p16="http://schemas.microsoft.com/office/powerpoint/2015/main" xmlns="" val="1"/>
+                <p16:designElem xmlns:p16="http://schemas.microsoft.com/office/powerpoint/2015/main" val="1"/>
               </p:ext>
             </p:extLst>
           </p:nvPr>
@@ -5575,10 +5586,10 @@
           <p:cNvPr id="53" name="Rectangle 52">
             <a:extLst>
               <a:ext uri="{FF2B5EF4-FFF2-40B4-BE49-F238E27FC236}">
-                <a16:creationId xmlns:a16="http://schemas.microsoft.com/office/drawing/2014/main" xmlns="" id="{3A102CD9-C25A-4A86-B9D3-D7280D91428B}"/>
+                <a16:creationId xmlns:a16="http://schemas.microsoft.com/office/drawing/2014/main" id="{3A102CD9-C25A-4A86-B9D3-D7280D91428B}"/>
               </a:ext>
               <a:ext uri="{C183D7F6-B498-43B3-948B-1728B52AA6E4}">
-                <adec:decorative xmlns:adec="http://schemas.microsoft.com/office/drawing/2017/decorative" xmlns="" val="1"/>
+                <adec:decorative xmlns:adec="http://schemas.microsoft.com/office/drawing/2017/decorative" val="1"/>
               </a:ext>
             </a:extLst>
           </p:cNvPr>
@@ -5588,7 +5599,7 @@
           <p:nvPr>
             <p:extLst>
               <p:ext uri="{386F3935-93C4-4BCD-93E2-E3B085C9AB24}">
-                <p16:designElem xmlns:p16="http://schemas.microsoft.com/office/powerpoint/2015/main" xmlns="" val="1"/>
+                <p16:designElem xmlns:p16="http://schemas.microsoft.com/office/powerpoint/2015/main" val="1"/>
               </p:ext>
             </p:extLst>
           </p:nvPr>
@@ -5649,7 +5660,7 @@
           <p:cNvPr id="2" name="Title 1">
             <a:extLst>
               <a:ext uri="{FF2B5EF4-FFF2-40B4-BE49-F238E27FC236}">
-                <a16:creationId xmlns:a16="http://schemas.microsoft.com/office/drawing/2014/main" xmlns="" id="{D3862F8B-DB53-D69C-19EE-0A453B36C085}"/>
+                <a16:creationId xmlns:a16="http://schemas.microsoft.com/office/drawing/2014/main" id="{D3862F8B-DB53-D69C-19EE-0A453B36C085}"/>
               </a:ext>
             </a:extLst>
           </p:cNvPr>
@@ -5684,7 +5695,7 @@
           <p:cNvPr id="9" name="Picture 8">
             <a:extLst>
               <a:ext uri="{FF2B5EF4-FFF2-40B4-BE49-F238E27FC236}">
-                <a16:creationId xmlns:a16="http://schemas.microsoft.com/office/drawing/2014/main" xmlns="" id="{295C5C9D-063C-AF9D-2862-059BEA52D32C}"/>
+                <a16:creationId xmlns:a16="http://schemas.microsoft.com/office/drawing/2014/main" id="{295C5C9D-063C-AF9D-2862-059BEA52D32C}"/>
               </a:ext>
             </a:extLst>
           </p:cNvPr>
@@ -5714,7 +5725,7 @@
           <p:cNvPr id="11" name="Picture 10">
             <a:extLst>
               <a:ext uri="{FF2B5EF4-FFF2-40B4-BE49-F238E27FC236}">
-                <a16:creationId xmlns:a16="http://schemas.microsoft.com/office/drawing/2014/main" xmlns="" id="{39383BF8-280F-E773-B719-D67867986341}"/>
+                <a16:creationId xmlns:a16="http://schemas.microsoft.com/office/drawing/2014/main" id="{39383BF8-280F-E773-B719-D67867986341}"/>
               </a:ext>
             </a:extLst>
           </p:cNvPr>
@@ -5744,10 +5755,10 @@
           <p:cNvPr id="55" name="Straight Connector 54">
             <a:extLst>
               <a:ext uri="{FF2B5EF4-FFF2-40B4-BE49-F238E27FC236}">
-                <a16:creationId xmlns:a16="http://schemas.microsoft.com/office/drawing/2014/main" xmlns="" id="{90676B93-40FB-4FA7-8E89-C24B7B1F8F57}"/>
+                <a16:creationId xmlns:a16="http://schemas.microsoft.com/office/drawing/2014/main" id="{90676B93-40FB-4FA7-8E89-C24B7B1F8F57}"/>
               </a:ext>
               <a:ext uri="{C183D7F6-B498-43B3-948B-1728B52AA6E4}">
-                <adec:decorative xmlns:adec="http://schemas.microsoft.com/office/drawing/2017/decorative" xmlns="" val="1"/>
+                <adec:decorative xmlns:adec="http://schemas.microsoft.com/office/drawing/2017/decorative" val="1"/>
               </a:ext>
             </a:extLst>
           </p:cNvPr>
@@ -5757,7 +5768,7 @@
           <p:nvPr>
             <p:extLst>
               <p:ext uri="{386F3935-93C4-4BCD-93E2-E3B085C9AB24}">
-                <p16:designElem xmlns:p16="http://schemas.microsoft.com/office/powerpoint/2015/main" xmlns="" val="1"/>
+                <p16:designElem xmlns:p16="http://schemas.microsoft.com/office/powerpoint/2015/main" val="1"/>
               </p:ext>
             </p:extLst>
           </p:nvPr>
@@ -5792,7 +5803,7 @@
           <p:cNvPr id="7" name="Picture 6">
             <a:extLst>
               <a:ext uri="{FF2B5EF4-FFF2-40B4-BE49-F238E27FC236}">
-                <a16:creationId xmlns:a16="http://schemas.microsoft.com/office/drawing/2014/main" xmlns="" id="{83799579-8EB9-DC77-CDAC-986F8B3F2A7D}"/>
+                <a16:creationId xmlns:a16="http://schemas.microsoft.com/office/drawing/2014/main" id="{83799579-8EB9-DC77-CDAC-986F8B3F2A7D}"/>
               </a:ext>
             </a:extLst>
           </p:cNvPr>
@@ -5822,7 +5833,7 @@
           <p:cNvPr id="5" name="Picture 4">
             <a:extLst>
               <a:ext uri="{FF2B5EF4-FFF2-40B4-BE49-F238E27FC236}">
-                <a16:creationId xmlns:a16="http://schemas.microsoft.com/office/drawing/2014/main" xmlns="" id="{43E50A31-341F-5C88-C296-35A974D49814}"/>
+                <a16:creationId xmlns:a16="http://schemas.microsoft.com/office/drawing/2014/main" id="{43E50A31-341F-5C88-C296-35A974D49814}"/>
               </a:ext>
             </a:extLst>
           </p:cNvPr>
@@ -5852,10 +5863,10 @@
           <p:cNvPr id="57" name="Picture 56">
             <a:extLst>
               <a:ext uri="{FF2B5EF4-FFF2-40B4-BE49-F238E27FC236}">
-                <a16:creationId xmlns:a16="http://schemas.microsoft.com/office/drawing/2014/main" xmlns="" id="{3509D85C-1896-4695-A144-B562AFC58EB2}"/>
+                <a16:creationId xmlns:a16="http://schemas.microsoft.com/office/drawing/2014/main" id="{3509D85C-1896-4695-A144-B562AFC58EB2}"/>
               </a:ext>
               <a:ext uri="{C183D7F6-B498-43B3-948B-1728B52AA6E4}">
-                <adec:decorative xmlns:adec="http://schemas.microsoft.com/office/drawing/2017/decorative" xmlns="" val="1"/>
+                <adec:decorative xmlns:adec="http://schemas.microsoft.com/office/drawing/2017/decorative" val="1"/>
               </a:ext>
             </a:extLst>
           </p:cNvPr>
@@ -5865,7 +5876,7 @@
           <p:nvPr>
             <p:extLst>
               <p:ext uri="{386F3935-93C4-4BCD-93E2-E3B085C9AB24}">
-                <p16:designElem xmlns:p16="http://schemas.microsoft.com/office/powerpoint/2015/main" xmlns="" val="1"/>
+                <p16:designElem xmlns:p16="http://schemas.microsoft.com/office/powerpoint/2015/main" val="1"/>
               </p:ext>
             </p:extLst>
           </p:nvPr>
@@ -5874,7 +5885,7 @@
           <a:blip r:embed="rId2">
             <a:extLst>
               <a:ext uri="{28A0092B-C50C-407E-A947-70E740481C1C}">
-                <a14:useLocalDpi xmlns:a14="http://schemas.microsoft.com/office/drawing/2010/main" xmlns="" val="0"/>
+                <a14:useLocalDpi xmlns:a14="http://schemas.microsoft.com/office/drawing/2010/main" val="0"/>
               </a:ext>
             </a:extLst>
           </a:blip>
@@ -5896,10 +5907,10 @@
           <p:cNvPr id="59" name="Straight Connector 58">
             <a:extLst>
               <a:ext uri="{FF2B5EF4-FFF2-40B4-BE49-F238E27FC236}">
-                <a16:creationId xmlns:a16="http://schemas.microsoft.com/office/drawing/2014/main" xmlns="" id="{6D9F55CD-CB1D-4CB9-98D3-2BC602BC430E}"/>
+                <a16:creationId xmlns:a16="http://schemas.microsoft.com/office/drawing/2014/main" id="{6D9F55CD-CB1D-4CB9-98D3-2BC602BC430E}"/>
               </a:ext>
               <a:ext uri="{C183D7F6-B498-43B3-948B-1728B52AA6E4}">
-                <adec:decorative xmlns:adec="http://schemas.microsoft.com/office/drawing/2017/decorative" xmlns="" val="1"/>
+                <adec:decorative xmlns:adec="http://schemas.microsoft.com/office/drawing/2017/decorative" val="1"/>
               </a:ext>
             </a:extLst>
           </p:cNvPr>
@@ -5909,7 +5920,7 @@
           <p:nvPr>
             <p:extLst>
               <p:ext uri="{386F3935-93C4-4BCD-93E2-E3B085C9AB24}">
-                <p16:designElem xmlns:p16="http://schemas.microsoft.com/office/powerpoint/2015/main" xmlns="" val="1"/>
+                <p16:designElem xmlns:p16="http://schemas.microsoft.com/office/powerpoint/2015/main" val="1"/>
               </p:ext>
             </p:extLst>
           </p:nvPr>
@@ -5948,7 +5959,7 @@
     </p:spTree>
     <p:extLst>
       <p:ext uri="{BB962C8B-B14F-4D97-AF65-F5344CB8AC3E}">
-        <p14:creationId xmlns:p14="http://schemas.microsoft.com/office/powerpoint/2010/main" xmlns="" val="1886950838"/>
+        <p14:creationId xmlns:p14="http://schemas.microsoft.com/office/powerpoint/2010/main" val="1886950838"/>
       </p:ext>
     </p:extLst>
   </p:cSld>
@@ -6004,10 +6015,10 @@
           <p:cNvPr id="50" name="Rectangle 49">
             <a:extLst>
               <a:ext uri="{FF2B5EF4-FFF2-40B4-BE49-F238E27FC236}">
-                <a16:creationId xmlns:a16="http://schemas.microsoft.com/office/drawing/2014/main" xmlns="" id="{E724B9E8-02C8-4B2E-8770-A00A67760DF0}"/>
+                <a16:creationId xmlns:a16="http://schemas.microsoft.com/office/drawing/2014/main" id="{E724B9E8-02C8-4B2E-8770-A00A67760DF0}"/>
               </a:ext>
               <a:ext uri="{C183D7F6-B498-43B3-948B-1728B52AA6E4}">
-                <adec:decorative xmlns:adec="http://schemas.microsoft.com/office/drawing/2017/decorative" xmlns="" val="1"/>
+                <adec:decorative xmlns:adec="http://schemas.microsoft.com/office/drawing/2017/decorative" val="1"/>
               </a:ext>
             </a:extLst>
           </p:cNvPr>
@@ -6017,7 +6028,7 @@
           <p:nvPr>
             <p:extLst>
               <p:ext uri="{386F3935-93C4-4BCD-93E2-E3B085C9AB24}">
-                <p16:designElem xmlns:p16="http://schemas.microsoft.com/office/powerpoint/2015/main" xmlns="" val="1"/>
+                <p16:designElem xmlns:p16="http://schemas.microsoft.com/office/powerpoint/2015/main" val="1"/>
               </p:ext>
             </p:extLst>
           </p:nvPr>
@@ -6077,10 +6088,10 @@
           <p:cNvPr id="51" name="Picture 50">
             <a:extLst>
               <a:ext uri="{FF2B5EF4-FFF2-40B4-BE49-F238E27FC236}">
-                <a16:creationId xmlns:a16="http://schemas.microsoft.com/office/drawing/2014/main" xmlns="" id="{7B8AE548-0BFA-4792-9962-3375923C7635}"/>
+                <a16:creationId xmlns:a16="http://schemas.microsoft.com/office/drawing/2014/main" id="{7B8AE548-0BFA-4792-9962-3375923C7635}"/>
               </a:ext>
               <a:ext uri="{C183D7F6-B498-43B3-948B-1728B52AA6E4}">
-                <adec:decorative xmlns:adec="http://schemas.microsoft.com/office/drawing/2017/decorative" xmlns="" val="1"/>
+                <adec:decorative xmlns:adec="http://schemas.microsoft.com/office/drawing/2017/decorative" val="1"/>
               </a:ext>
             </a:extLst>
           </p:cNvPr>
@@ -6090,7 +6101,7 @@
           <p:nvPr>
             <p:extLst>
               <p:ext uri="{386F3935-93C4-4BCD-93E2-E3B085C9AB24}">
-                <p16:designElem xmlns:p16="http://schemas.microsoft.com/office/powerpoint/2015/main" xmlns="" val="1"/>
+                <p16:designElem xmlns:p16="http://schemas.microsoft.com/office/powerpoint/2015/main" val="1"/>
               </p:ext>
             </p:extLst>
           </p:nvPr>
@@ -6099,7 +6110,7 @@
           <a:blip r:embed="rId2">
             <a:extLst>
               <a:ext uri="{28A0092B-C50C-407E-A947-70E740481C1C}">
-                <a14:useLocalDpi xmlns:a14="http://schemas.microsoft.com/office/drawing/2010/main" xmlns="" val="0"/>
+                <a14:useLocalDpi xmlns:a14="http://schemas.microsoft.com/office/drawing/2010/main" val="0"/>
               </a:ext>
             </a:extLst>
           </a:blip>
@@ -6121,10 +6132,10 @@
           <p:cNvPr id="52" name="Straight Connector 51">
             <a:extLst>
               <a:ext uri="{FF2B5EF4-FFF2-40B4-BE49-F238E27FC236}">
-                <a16:creationId xmlns:a16="http://schemas.microsoft.com/office/drawing/2014/main" xmlns="" id="{67639EF4-FA83-4D85-90FE-B831AF283896}"/>
+                <a16:creationId xmlns:a16="http://schemas.microsoft.com/office/drawing/2014/main" id="{67639EF4-FA83-4D85-90FE-B831AF283896}"/>
               </a:ext>
               <a:ext uri="{C183D7F6-B498-43B3-948B-1728B52AA6E4}">
-                <adec:decorative xmlns:adec="http://schemas.microsoft.com/office/drawing/2017/decorative" xmlns="" val="1"/>
+                <adec:decorative xmlns:adec="http://schemas.microsoft.com/office/drawing/2017/decorative" val="1"/>
               </a:ext>
             </a:extLst>
           </p:cNvPr>
@@ -6134,7 +6145,7 @@
           <p:nvPr>
             <p:extLst>
               <p:ext uri="{386F3935-93C4-4BCD-93E2-E3B085C9AB24}">
-                <p16:designElem xmlns:p16="http://schemas.microsoft.com/office/powerpoint/2015/main" xmlns="" val="1"/>
+                <p16:designElem xmlns:p16="http://schemas.microsoft.com/office/powerpoint/2015/main" val="1"/>
               </p:ext>
             </p:extLst>
           </p:nvPr>
@@ -6175,10 +6186,10 @@
           <p:cNvPr id="53" name="Straight Connector 52">
             <a:extLst>
               <a:ext uri="{FF2B5EF4-FFF2-40B4-BE49-F238E27FC236}">
-                <a16:creationId xmlns:a16="http://schemas.microsoft.com/office/drawing/2014/main" xmlns="" id="{CC87E76A-8F50-413D-9BFC-C5A1525BD9BC}"/>
+                <a16:creationId xmlns:a16="http://schemas.microsoft.com/office/drawing/2014/main" id="{CC87E76A-8F50-413D-9BFC-C5A1525BD9BC}"/>
               </a:ext>
               <a:ext uri="{C183D7F6-B498-43B3-948B-1728B52AA6E4}">
-                <adec:decorative xmlns:adec="http://schemas.microsoft.com/office/drawing/2017/decorative" xmlns="" val="1"/>
+                <adec:decorative xmlns:adec="http://schemas.microsoft.com/office/drawing/2017/decorative" val="1"/>
               </a:ext>
             </a:extLst>
           </p:cNvPr>
@@ -6188,7 +6199,7 @@
           <p:nvPr>
             <p:extLst>
               <p:ext uri="{386F3935-93C4-4BCD-93E2-E3B085C9AB24}">
-                <p16:designElem xmlns:p16="http://schemas.microsoft.com/office/powerpoint/2015/main" xmlns="" val="1"/>
+                <p16:designElem xmlns:p16="http://schemas.microsoft.com/office/powerpoint/2015/main" val="1"/>
               </p:ext>
             </p:extLst>
           </p:nvPr>
@@ -6223,10 +6234,10 @@
           <p:cNvPr id="54" name="Rectangle 53">
             <a:extLst>
               <a:ext uri="{FF2B5EF4-FFF2-40B4-BE49-F238E27FC236}">
-                <a16:creationId xmlns:a16="http://schemas.microsoft.com/office/drawing/2014/main" xmlns="" id="{0F28EA84-13B4-4494-A4D3-8DE462FF0E6B}"/>
+                <a16:creationId xmlns:a16="http://schemas.microsoft.com/office/drawing/2014/main" id="{0F28EA84-13B4-4494-A4D3-8DE462FF0E6B}"/>
               </a:ext>
               <a:ext uri="{C183D7F6-B498-43B3-948B-1728B52AA6E4}">
-                <adec:decorative xmlns:adec="http://schemas.microsoft.com/office/drawing/2017/decorative" xmlns="" val="1"/>
+                <adec:decorative xmlns:adec="http://schemas.microsoft.com/office/drawing/2017/decorative" val="1"/>
               </a:ext>
             </a:extLst>
           </p:cNvPr>
@@ -6236,7 +6247,7 @@
           <p:nvPr>
             <p:extLst>
               <p:ext uri="{386F3935-93C4-4BCD-93E2-E3B085C9AB24}">
-                <p16:designElem xmlns:p16="http://schemas.microsoft.com/office/powerpoint/2015/main" xmlns="" val="1"/>
+                <p16:designElem xmlns:p16="http://schemas.microsoft.com/office/powerpoint/2015/main" val="1"/>
               </p:ext>
             </p:extLst>
           </p:nvPr>
@@ -6283,10 +6294,10 @@
           <p:cNvPr id="55" name="Rectangle 54">
             <a:extLst>
               <a:ext uri="{FF2B5EF4-FFF2-40B4-BE49-F238E27FC236}">
-                <a16:creationId xmlns:a16="http://schemas.microsoft.com/office/drawing/2014/main" xmlns="" id="{6BEB1B24-66CE-4D63-A39D-2D1B481DF95E}"/>
+                <a16:creationId xmlns:a16="http://schemas.microsoft.com/office/drawing/2014/main" id="{6BEB1B24-66CE-4D63-A39D-2D1B481DF95E}"/>
               </a:ext>
               <a:ext uri="{C183D7F6-B498-43B3-948B-1728B52AA6E4}">
-                <adec:decorative xmlns:adec="http://schemas.microsoft.com/office/drawing/2017/decorative" xmlns="" val="1"/>
+                <adec:decorative xmlns:adec="http://schemas.microsoft.com/office/drawing/2017/decorative" val="1"/>
               </a:ext>
             </a:extLst>
           </p:cNvPr>
@@ -6296,7 +6307,7 @@
           <p:nvPr>
             <p:extLst>
               <p:ext uri="{386F3935-93C4-4BCD-93E2-E3B085C9AB24}">
-                <p16:designElem xmlns:p16="http://schemas.microsoft.com/office/powerpoint/2015/main" xmlns="" val="1"/>
+                <p16:designElem xmlns:p16="http://schemas.microsoft.com/office/powerpoint/2015/main" val="1"/>
               </p:ext>
             </p:extLst>
           </p:nvPr>
@@ -6357,7 +6368,7 @@
           <p:cNvPr id="2" name="Title 1">
             <a:extLst>
               <a:ext uri="{FF2B5EF4-FFF2-40B4-BE49-F238E27FC236}">
-                <a16:creationId xmlns:a16="http://schemas.microsoft.com/office/drawing/2014/main" xmlns="" id="{7BA6A004-AC9E-F83D-7C6C-8E45C6DDE234}"/>
+                <a16:creationId xmlns:a16="http://schemas.microsoft.com/office/drawing/2014/main" id="{7BA6A004-AC9E-F83D-7C6C-8E45C6DDE234}"/>
               </a:ext>
             </a:extLst>
           </p:cNvPr>
@@ -6392,10 +6403,10 @@
           <p:cNvPr id="56" name="Straight Connector 55">
             <a:extLst>
               <a:ext uri="{FF2B5EF4-FFF2-40B4-BE49-F238E27FC236}">
-                <a16:creationId xmlns:a16="http://schemas.microsoft.com/office/drawing/2014/main" xmlns="" id="{78DE337D-1DBA-4536-8145-B43EE65C747D}"/>
+                <a16:creationId xmlns:a16="http://schemas.microsoft.com/office/drawing/2014/main" id="{78DE337D-1DBA-4536-8145-B43EE65C747D}"/>
               </a:ext>
               <a:ext uri="{C183D7F6-B498-43B3-948B-1728B52AA6E4}">
-                <adec:decorative xmlns:adec="http://schemas.microsoft.com/office/drawing/2017/decorative" xmlns="" val="1"/>
+                <adec:decorative xmlns:adec="http://schemas.microsoft.com/office/drawing/2017/decorative" val="1"/>
               </a:ext>
             </a:extLst>
           </p:cNvPr>
@@ -6405,7 +6416,7 @@
           <p:nvPr>
             <p:extLst>
               <p:ext uri="{386F3935-93C4-4BCD-93E2-E3B085C9AB24}">
-                <p16:designElem xmlns:p16="http://schemas.microsoft.com/office/powerpoint/2015/main" xmlns="" val="1"/>
+                <p16:designElem xmlns:p16="http://schemas.microsoft.com/office/powerpoint/2015/main" val="1"/>
               </p:ext>
             </p:extLst>
           </p:nvPr>
@@ -6440,7 +6451,7 @@
           <p:cNvPr id="5" name="Picture 4">
             <a:extLst>
               <a:ext uri="{FF2B5EF4-FFF2-40B4-BE49-F238E27FC236}">
-                <a16:creationId xmlns:a16="http://schemas.microsoft.com/office/drawing/2014/main" xmlns="" id="{A88E504C-4007-0FB3-BC00-5FF4F74B5CA7}"/>
+                <a16:creationId xmlns:a16="http://schemas.microsoft.com/office/drawing/2014/main" id="{A88E504C-4007-0FB3-BC00-5FF4F74B5CA7}"/>
               </a:ext>
             </a:extLst>
           </p:cNvPr>
@@ -6470,7 +6481,7 @@
           <p:cNvPr id="9" name="Picture 8">
             <a:extLst>
               <a:ext uri="{FF2B5EF4-FFF2-40B4-BE49-F238E27FC236}">
-                <a16:creationId xmlns:a16="http://schemas.microsoft.com/office/drawing/2014/main" xmlns="" id="{CE8C27E6-D0FE-7D3F-0657-BC477A7054EE}"/>
+                <a16:creationId xmlns:a16="http://schemas.microsoft.com/office/drawing/2014/main" id="{CE8C27E6-D0FE-7D3F-0657-BC477A7054EE}"/>
               </a:ext>
             </a:extLst>
           </p:cNvPr>
@@ -6500,7 +6511,7 @@
           <p:cNvPr id="7" name="Picture 6">
             <a:extLst>
               <a:ext uri="{FF2B5EF4-FFF2-40B4-BE49-F238E27FC236}">
-                <a16:creationId xmlns:a16="http://schemas.microsoft.com/office/drawing/2014/main" xmlns="" id="{0491AA9D-40D6-945F-5458-984FA0DBC683}"/>
+                <a16:creationId xmlns:a16="http://schemas.microsoft.com/office/drawing/2014/main" id="{0491AA9D-40D6-945F-5458-984FA0DBC683}"/>
               </a:ext>
             </a:extLst>
           </p:cNvPr>
@@ -6530,10 +6541,10 @@
           <p:cNvPr id="57" name="Picture 56">
             <a:extLst>
               <a:ext uri="{FF2B5EF4-FFF2-40B4-BE49-F238E27FC236}">
-                <a16:creationId xmlns:a16="http://schemas.microsoft.com/office/drawing/2014/main" xmlns="" id="{E7233926-059A-41AD-A9F2-56552CF4FF6B}"/>
+                <a16:creationId xmlns:a16="http://schemas.microsoft.com/office/drawing/2014/main" id="{E7233926-059A-41AD-A9F2-56552CF4FF6B}"/>
               </a:ext>
               <a:ext uri="{C183D7F6-B498-43B3-948B-1728B52AA6E4}">
-                <adec:decorative xmlns:adec="http://schemas.microsoft.com/office/drawing/2017/decorative" xmlns="" val="1"/>
+                <adec:decorative xmlns:adec="http://schemas.microsoft.com/office/drawing/2017/decorative" val="1"/>
               </a:ext>
             </a:extLst>
           </p:cNvPr>
@@ -6543,7 +6554,7 @@
           <p:nvPr>
             <p:extLst>
               <p:ext uri="{386F3935-93C4-4BCD-93E2-E3B085C9AB24}">
-                <p16:designElem xmlns:p16="http://schemas.microsoft.com/office/powerpoint/2015/main" xmlns="" val="1"/>
+                <p16:designElem xmlns:p16="http://schemas.microsoft.com/office/powerpoint/2015/main" val="1"/>
               </p:ext>
             </p:extLst>
           </p:nvPr>
@@ -6552,7 +6563,7 @@
           <a:blip r:embed="rId2">
             <a:extLst>
               <a:ext uri="{28A0092B-C50C-407E-A947-70E740481C1C}">
-                <a14:useLocalDpi xmlns:a14="http://schemas.microsoft.com/office/drawing/2010/main" xmlns="" val="0"/>
+                <a14:useLocalDpi xmlns:a14="http://schemas.microsoft.com/office/drawing/2010/main" val="0"/>
               </a:ext>
             </a:extLst>
           </a:blip>
@@ -6574,10 +6585,10 @@
           <p:cNvPr id="58" name="Straight Connector 57">
             <a:extLst>
               <a:ext uri="{FF2B5EF4-FFF2-40B4-BE49-F238E27FC236}">
-                <a16:creationId xmlns:a16="http://schemas.microsoft.com/office/drawing/2014/main" xmlns="" id="{C13C145E-93D4-481E-92DC-736D9EBA37FC}"/>
+                <a16:creationId xmlns:a16="http://schemas.microsoft.com/office/drawing/2014/main" id="{C13C145E-93D4-481E-92DC-736D9EBA37FC}"/>
               </a:ext>
               <a:ext uri="{C183D7F6-B498-43B3-948B-1728B52AA6E4}">
-                <adec:decorative xmlns:adec="http://schemas.microsoft.com/office/drawing/2017/decorative" xmlns="" val="1"/>
+                <adec:decorative xmlns:adec="http://schemas.microsoft.com/office/drawing/2017/decorative" val="1"/>
               </a:ext>
             </a:extLst>
           </p:cNvPr>
@@ -6587,7 +6598,7 @@
           <p:nvPr>
             <p:extLst>
               <p:ext uri="{386F3935-93C4-4BCD-93E2-E3B085C9AB24}">
-                <p16:designElem xmlns:p16="http://schemas.microsoft.com/office/powerpoint/2015/main" xmlns="" val="1"/>
+                <p16:designElem xmlns:p16="http://schemas.microsoft.com/office/powerpoint/2015/main" val="1"/>
               </p:ext>
             </p:extLst>
           </p:nvPr>
@@ -6626,7 +6637,7 @@
     </p:spTree>
     <p:extLst>
       <p:ext uri="{BB962C8B-B14F-4D97-AF65-F5344CB8AC3E}">
-        <p14:creationId xmlns:p14="http://schemas.microsoft.com/office/powerpoint/2010/main" xmlns="" val="851204681"/>
+        <p14:creationId xmlns:p14="http://schemas.microsoft.com/office/powerpoint/2010/main" val="851204681"/>
       </p:ext>
     </p:extLst>
   </p:cSld>
@@ -6682,10 +6693,10 @@
           <p:cNvPr id="38" name="Rectangle 37">
             <a:extLst>
               <a:ext uri="{FF2B5EF4-FFF2-40B4-BE49-F238E27FC236}">
-                <a16:creationId xmlns:a16="http://schemas.microsoft.com/office/drawing/2014/main" xmlns="" id="{E724B9E8-02C8-4B2E-8770-A00A67760DF0}"/>
+                <a16:creationId xmlns:a16="http://schemas.microsoft.com/office/drawing/2014/main" id="{E724B9E8-02C8-4B2E-8770-A00A67760DF0}"/>
               </a:ext>
               <a:ext uri="{C183D7F6-B498-43B3-948B-1728B52AA6E4}">
-                <adec:decorative xmlns:adec="http://schemas.microsoft.com/office/drawing/2017/decorative" xmlns="" val="1"/>
+                <adec:decorative xmlns:adec="http://schemas.microsoft.com/office/drawing/2017/decorative" val="1"/>
               </a:ext>
             </a:extLst>
           </p:cNvPr>
@@ -6695,7 +6706,7 @@
           <p:nvPr>
             <p:extLst>
               <p:ext uri="{386F3935-93C4-4BCD-93E2-E3B085C9AB24}">
-                <p16:designElem xmlns:p16="http://schemas.microsoft.com/office/powerpoint/2015/main" xmlns="" val="1"/>
+                <p16:designElem xmlns:p16="http://schemas.microsoft.com/office/powerpoint/2015/main" val="1"/>
               </p:ext>
             </p:extLst>
           </p:nvPr>
@@ -6755,10 +6766,10 @@
           <p:cNvPr id="39" name="Picture 38">
             <a:extLst>
               <a:ext uri="{FF2B5EF4-FFF2-40B4-BE49-F238E27FC236}">
-                <a16:creationId xmlns:a16="http://schemas.microsoft.com/office/drawing/2014/main" xmlns="" id="{7B8AE548-0BFA-4792-9962-3375923C7635}"/>
+                <a16:creationId xmlns:a16="http://schemas.microsoft.com/office/drawing/2014/main" id="{7B8AE548-0BFA-4792-9962-3375923C7635}"/>
               </a:ext>
               <a:ext uri="{C183D7F6-B498-43B3-948B-1728B52AA6E4}">
-                <adec:decorative xmlns:adec="http://schemas.microsoft.com/office/drawing/2017/decorative" xmlns="" val="1"/>
+                <adec:decorative xmlns:adec="http://schemas.microsoft.com/office/drawing/2017/decorative" val="1"/>
               </a:ext>
             </a:extLst>
           </p:cNvPr>
@@ -6768,7 +6779,7 @@
           <p:nvPr>
             <p:extLst>
               <p:ext uri="{386F3935-93C4-4BCD-93E2-E3B085C9AB24}">
-                <p16:designElem xmlns:p16="http://schemas.microsoft.com/office/powerpoint/2015/main" xmlns="" val="1"/>
+                <p16:designElem xmlns:p16="http://schemas.microsoft.com/office/powerpoint/2015/main" val="1"/>
               </p:ext>
             </p:extLst>
           </p:nvPr>
@@ -6777,7 +6788,7 @@
           <a:blip r:embed="rId2">
             <a:extLst>
               <a:ext uri="{28A0092B-C50C-407E-A947-70E740481C1C}">
-                <a14:useLocalDpi xmlns:a14="http://schemas.microsoft.com/office/drawing/2010/main" xmlns="" val="0"/>
+                <a14:useLocalDpi xmlns:a14="http://schemas.microsoft.com/office/drawing/2010/main" val="0"/>
               </a:ext>
             </a:extLst>
           </a:blip>
@@ -6799,10 +6810,10 @@
           <p:cNvPr id="40" name="Straight Connector 39">
             <a:extLst>
               <a:ext uri="{FF2B5EF4-FFF2-40B4-BE49-F238E27FC236}">
-                <a16:creationId xmlns:a16="http://schemas.microsoft.com/office/drawing/2014/main" xmlns="" id="{67639EF4-FA83-4D85-90FE-B831AF283896}"/>
+                <a16:creationId xmlns:a16="http://schemas.microsoft.com/office/drawing/2014/main" id="{67639EF4-FA83-4D85-90FE-B831AF283896}"/>
               </a:ext>
               <a:ext uri="{C183D7F6-B498-43B3-948B-1728B52AA6E4}">
-                <adec:decorative xmlns:adec="http://schemas.microsoft.com/office/drawing/2017/decorative" xmlns="" val="1"/>
+                <adec:decorative xmlns:adec="http://schemas.microsoft.com/office/drawing/2017/decorative" val="1"/>
               </a:ext>
             </a:extLst>
           </p:cNvPr>
@@ -6812,7 +6823,7 @@
           <p:nvPr>
             <p:extLst>
               <p:ext uri="{386F3935-93C4-4BCD-93E2-E3B085C9AB24}">
-                <p16:designElem xmlns:p16="http://schemas.microsoft.com/office/powerpoint/2015/main" xmlns="" val="1"/>
+                <p16:designElem xmlns:p16="http://schemas.microsoft.com/office/powerpoint/2015/main" val="1"/>
               </p:ext>
             </p:extLst>
           </p:nvPr>
@@ -6853,10 +6864,10 @@
           <p:cNvPr id="41" name="Straight Connector 40">
             <a:extLst>
               <a:ext uri="{FF2B5EF4-FFF2-40B4-BE49-F238E27FC236}">
-                <a16:creationId xmlns:a16="http://schemas.microsoft.com/office/drawing/2014/main" xmlns="" id="{CC87E76A-8F50-413D-9BFC-C5A1525BD9BC}"/>
+                <a16:creationId xmlns:a16="http://schemas.microsoft.com/office/drawing/2014/main" id="{CC87E76A-8F50-413D-9BFC-C5A1525BD9BC}"/>
               </a:ext>
               <a:ext uri="{C183D7F6-B498-43B3-948B-1728B52AA6E4}">
-                <adec:decorative xmlns:adec="http://schemas.microsoft.com/office/drawing/2017/decorative" xmlns="" val="1"/>
+                <adec:decorative xmlns:adec="http://schemas.microsoft.com/office/drawing/2017/decorative" val="1"/>
               </a:ext>
             </a:extLst>
           </p:cNvPr>
@@ -6866,7 +6877,7 @@
           <p:nvPr>
             <p:extLst>
               <p:ext uri="{386F3935-93C4-4BCD-93E2-E3B085C9AB24}">
-                <p16:designElem xmlns:p16="http://schemas.microsoft.com/office/powerpoint/2015/main" xmlns="" val="1"/>
+                <p16:designElem xmlns:p16="http://schemas.microsoft.com/office/powerpoint/2015/main" val="1"/>
               </p:ext>
             </p:extLst>
           </p:nvPr>
@@ -6901,10 +6912,10 @@
           <p:cNvPr id="42" name="Rectangle 41">
             <a:extLst>
               <a:ext uri="{FF2B5EF4-FFF2-40B4-BE49-F238E27FC236}">
-                <a16:creationId xmlns:a16="http://schemas.microsoft.com/office/drawing/2014/main" xmlns="" id="{9A1C6278-B7D5-4E8E-B4DC-834832980565}"/>
+                <a16:creationId xmlns:a16="http://schemas.microsoft.com/office/drawing/2014/main" id="{9A1C6278-B7D5-4E8E-B4DC-834832980565}"/>
               </a:ext>
               <a:ext uri="{C183D7F6-B498-43B3-948B-1728B52AA6E4}">
-                <adec:decorative xmlns:adec="http://schemas.microsoft.com/office/drawing/2017/decorative" xmlns="" val="1"/>
+                <adec:decorative xmlns:adec="http://schemas.microsoft.com/office/drawing/2017/decorative" val="1"/>
               </a:ext>
             </a:extLst>
           </p:cNvPr>
@@ -6914,7 +6925,7 @@
           <p:nvPr>
             <p:extLst>
               <p:ext uri="{386F3935-93C4-4BCD-93E2-E3B085C9AB24}">
-                <p16:designElem xmlns:p16="http://schemas.microsoft.com/office/powerpoint/2015/main" xmlns="" val="1"/>
+                <p16:designElem xmlns:p16="http://schemas.microsoft.com/office/powerpoint/2015/main" val="1"/>
               </p:ext>
             </p:extLst>
           </p:nvPr>
@@ -6961,10 +6972,10 @@
           <p:cNvPr id="43" name="Rectangle 42">
             <a:extLst>
               <a:ext uri="{FF2B5EF4-FFF2-40B4-BE49-F238E27FC236}">
-                <a16:creationId xmlns:a16="http://schemas.microsoft.com/office/drawing/2014/main" xmlns="" id="{C007F3D3-099E-430E-8754-C084D0FA5FE3}"/>
+                <a16:creationId xmlns:a16="http://schemas.microsoft.com/office/drawing/2014/main" id="{C007F3D3-099E-430E-8754-C084D0FA5FE3}"/>
               </a:ext>
               <a:ext uri="{C183D7F6-B498-43B3-948B-1728B52AA6E4}">
-                <adec:decorative xmlns:adec="http://schemas.microsoft.com/office/drawing/2017/decorative" xmlns="" val="1"/>
+                <adec:decorative xmlns:adec="http://schemas.microsoft.com/office/drawing/2017/decorative" val="1"/>
               </a:ext>
             </a:extLst>
           </p:cNvPr>
@@ -6974,7 +6985,7 @@
           <p:nvPr>
             <p:extLst>
               <p:ext uri="{386F3935-93C4-4BCD-93E2-E3B085C9AB24}">
-                <p16:designElem xmlns:p16="http://schemas.microsoft.com/office/powerpoint/2015/main" xmlns="" val="1"/>
+                <p16:designElem xmlns:p16="http://schemas.microsoft.com/office/powerpoint/2015/main" val="1"/>
               </p:ext>
             </p:extLst>
           </p:nvPr>
@@ -7035,7 +7046,7 @@
           <p:cNvPr id="2" name="Title 1">
             <a:extLst>
               <a:ext uri="{FF2B5EF4-FFF2-40B4-BE49-F238E27FC236}">
-                <a16:creationId xmlns:a16="http://schemas.microsoft.com/office/drawing/2014/main" xmlns="" id="{39DDDFD2-F9A9-3A01-FF2A-6CDF8AAF1529}"/>
+                <a16:creationId xmlns:a16="http://schemas.microsoft.com/office/drawing/2014/main" id="{39DDDFD2-F9A9-3A01-FF2A-6CDF8AAF1529}"/>
               </a:ext>
             </a:extLst>
           </p:cNvPr>
@@ -7070,7 +7081,7 @@
           <p:cNvPr id="11" name="Picture 10">
             <a:extLst>
               <a:ext uri="{FF2B5EF4-FFF2-40B4-BE49-F238E27FC236}">
-                <a16:creationId xmlns:a16="http://schemas.microsoft.com/office/drawing/2014/main" xmlns="" id="{3C11F97F-2AE4-3D9B-35A6-AF80BEF77AF7}"/>
+                <a16:creationId xmlns:a16="http://schemas.microsoft.com/office/drawing/2014/main" id="{3C11F97F-2AE4-3D9B-35A6-AF80BEF77AF7}"/>
               </a:ext>
             </a:extLst>
           </p:cNvPr>
@@ -7100,7 +7111,7 @@
           <p:cNvPr id="9" name="Picture 8">
             <a:extLst>
               <a:ext uri="{FF2B5EF4-FFF2-40B4-BE49-F238E27FC236}">
-                <a16:creationId xmlns:a16="http://schemas.microsoft.com/office/drawing/2014/main" xmlns="" id="{EB92CDCE-F939-2C1B-FB2C-35BCFBC61213}"/>
+                <a16:creationId xmlns:a16="http://schemas.microsoft.com/office/drawing/2014/main" id="{EB92CDCE-F939-2C1B-FB2C-35BCFBC61213}"/>
               </a:ext>
             </a:extLst>
           </p:cNvPr>
@@ -7130,7 +7141,7 @@
           <p:cNvPr id="5" name="Picture 4">
             <a:extLst>
               <a:ext uri="{FF2B5EF4-FFF2-40B4-BE49-F238E27FC236}">
-                <a16:creationId xmlns:a16="http://schemas.microsoft.com/office/drawing/2014/main" xmlns="" id="{C20FFCFC-0AFB-A5C7-E6B7-F9D1DC4B2FC6}"/>
+                <a16:creationId xmlns:a16="http://schemas.microsoft.com/office/drawing/2014/main" id="{C20FFCFC-0AFB-A5C7-E6B7-F9D1DC4B2FC6}"/>
               </a:ext>
             </a:extLst>
           </p:cNvPr>
@@ -7160,10 +7171,10 @@
           <p:cNvPr id="44" name="Straight Connector 43">
             <a:extLst>
               <a:ext uri="{FF2B5EF4-FFF2-40B4-BE49-F238E27FC236}">
-                <a16:creationId xmlns:a16="http://schemas.microsoft.com/office/drawing/2014/main" xmlns="" id="{6B9EA5DA-6DFD-447D-B8F9-CB95CA114076}"/>
+                <a16:creationId xmlns:a16="http://schemas.microsoft.com/office/drawing/2014/main" id="{6B9EA5DA-6DFD-447D-B8F9-CB95CA114076}"/>
               </a:ext>
               <a:ext uri="{C183D7F6-B498-43B3-948B-1728B52AA6E4}">
-                <adec:decorative xmlns:adec="http://schemas.microsoft.com/office/drawing/2017/decorative" xmlns="" val="1"/>
+                <adec:decorative xmlns:adec="http://schemas.microsoft.com/office/drawing/2017/decorative" val="1"/>
               </a:ext>
             </a:extLst>
           </p:cNvPr>
@@ -7173,7 +7184,7 @@
           <p:nvPr>
             <p:extLst>
               <p:ext uri="{386F3935-93C4-4BCD-93E2-E3B085C9AB24}">
-                <p16:designElem xmlns:p16="http://schemas.microsoft.com/office/powerpoint/2015/main" xmlns="" val="1"/>
+                <p16:designElem xmlns:p16="http://schemas.microsoft.com/office/powerpoint/2015/main" val="1"/>
               </p:ext>
             </p:extLst>
           </p:nvPr>
@@ -7208,10 +7219,10 @@
           <p:cNvPr id="45" name="Picture 44">
             <a:extLst>
               <a:ext uri="{FF2B5EF4-FFF2-40B4-BE49-F238E27FC236}">
-                <a16:creationId xmlns:a16="http://schemas.microsoft.com/office/drawing/2014/main" xmlns="" id="{87612EF9-94E7-42BA-B4A9-4B38643FBAF7}"/>
+                <a16:creationId xmlns:a16="http://schemas.microsoft.com/office/drawing/2014/main" id="{87612EF9-94E7-42BA-B4A9-4B38643FBAF7}"/>
               </a:ext>
               <a:ext uri="{C183D7F6-B498-43B3-948B-1728B52AA6E4}">
-                <adec:decorative xmlns:adec="http://schemas.microsoft.com/office/drawing/2017/decorative" xmlns="" val="1"/>
+                <adec:decorative xmlns:adec="http://schemas.microsoft.com/office/drawing/2017/decorative" val="1"/>
               </a:ext>
             </a:extLst>
           </p:cNvPr>
@@ -7221,7 +7232,7 @@
           <p:nvPr>
             <p:extLst>
               <p:ext uri="{386F3935-93C4-4BCD-93E2-E3B085C9AB24}">
-                <p16:designElem xmlns:p16="http://schemas.microsoft.com/office/powerpoint/2015/main" xmlns="" val="1"/>
+                <p16:designElem xmlns:p16="http://schemas.microsoft.com/office/powerpoint/2015/main" val="1"/>
               </p:ext>
             </p:extLst>
           </p:nvPr>
@@ -7230,7 +7241,7 @@
           <a:blip r:embed="rId2">
             <a:extLst>
               <a:ext uri="{28A0092B-C50C-407E-A947-70E740481C1C}">
-                <a14:useLocalDpi xmlns:a14="http://schemas.microsoft.com/office/drawing/2010/main" xmlns="" val="0"/>
+                <a14:useLocalDpi xmlns:a14="http://schemas.microsoft.com/office/drawing/2010/main" val="0"/>
               </a:ext>
             </a:extLst>
           </a:blip>
@@ -7252,10 +7263,10 @@
           <p:cNvPr id="46" name="Straight Connector 45">
             <a:extLst>
               <a:ext uri="{FF2B5EF4-FFF2-40B4-BE49-F238E27FC236}">
-                <a16:creationId xmlns:a16="http://schemas.microsoft.com/office/drawing/2014/main" xmlns="" id="{9E597F0B-0A17-4BF2-A904-9D99811F3E2E}"/>
+                <a16:creationId xmlns:a16="http://schemas.microsoft.com/office/drawing/2014/main" id="{9E597F0B-0A17-4BF2-A904-9D99811F3E2E}"/>
               </a:ext>
               <a:ext uri="{C183D7F6-B498-43B3-948B-1728B52AA6E4}">
-                <adec:decorative xmlns:adec="http://schemas.microsoft.com/office/drawing/2017/decorative" xmlns="" val="1"/>
+                <adec:decorative xmlns:adec="http://schemas.microsoft.com/office/drawing/2017/decorative" val="1"/>
               </a:ext>
             </a:extLst>
           </p:cNvPr>
@@ -7265,7 +7276,7 @@
           <p:nvPr>
             <p:extLst>
               <p:ext uri="{386F3935-93C4-4BCD-93E2-E3B085C9AB24}">
-                <p16:designElem xmlns:p16="http://schemas.microsoft.com/office/powerpoint/2015/main" xmlns="" val="1"/>
+                <p16:designElem xmlns:p16="http://schemas.microsoft.com/office/powerpoint/2015/main" val="1"/>
               </p:ext>
             </p:extLst>
           </p:nvPr>
@@ -7304,7 +7315,7 @@
     </p:spTree>
     <p:extLst>
       <p:ext uri="{BB962C8B-B14F-4D97-AF65-F5344CB8AC3E}">
-        <p14:creationId xmlns:p14="http://schemas.microsoft.com/office/powerpoint/2010/main" xmlns="" val="3510849585"/>
+        <p14:creationId xmlns:p14="http://schemas.microsoft.com/office/powerpoint/2010/main" val="3510849585"/>
       </p:ext>
     </p:extLst>
   </p:cSld>
@@ -7336,7 +7347,7 @@
           <p:cNvPr id="2" name="Title 1">
             <a:extLst>
               <a:ext uri="{FF2B5EF4-FFF2-40B4-BE49-F238E27FC236}">
-                <a16:creationId xmlns:a16="http://schemas.microsoft.com/office/drawing/2014/main" xmlns="" id="{6302D0E6-DFB3-5E17-192B-D3B11F717D8C}"/>
+                <a16:creationId xmlns:a16="http://schemas.microsoft.com/office/drawing/2014/main" id="{6302D0E6-DFB3-5E17-192B-D3B11F717D8C}"/>
               </a:ext>
             </a:extLst>
           </p:cNvPr>
@@ -7369,7 +7380,7 @@
           <p:cNvPr id="5" name="Picture 4">
             <a:extLst>
               <a:ext uri="{FF2B5EF4-FFF2-40B4-BE49-F238E27FC236}">
-                <a16:creationId xmlns:a16="http://schemas.microsoft.com/office/drawing/2014/main" xmlns="" id="{E7DCF374-80C3-CBE5-BC73-F12C234A38EC}"/>
+                <a16:creationId xmlns:a16="http://schemas.microsoft.com/office/drawing/2014/main" id="{E7DCF374-80C3-CBE5-BC73-F12C234A38EC}"/>
               </a:ext>
             </a:extLst>
           </p:cNvPr>
@@ -7399,7 +7410,7 @@
           <p:cNvPr id="7" name="Picture 6">
             <a:extLst>
               <a:ext uri="{FF2B5EF4-FFF2-40B4-BE49-F238E27FC236}">
-                <a16:creationId xmlns:a16="http://schemas.microsoft.com/office/drawing/2014/main" xmlns="" id="{13C83DBE-18EF-02F8-4CDE-12A988AA16AE}"/>
+                <a16:creationId xmlns:a16="http://schemas.microsoft.com/office/drawing/2014/main" id="{13C83DBE-18EF-02F8-4CDE-12A988AA16AE}"/>
               </a:ext>
             </a:extLst>
           </p:cNvPr>
@@ -7427,7 +7438,7 @@
     </p:spTree>
     <p:extLst>
       <p:ext uri="{BB962C8B-B14F-4D97-AF65-F5344CB8AC3E}">
-        <p14:creationId xmlns:p14="http://schemas.microsoft.com/office/powerpoint/2010/main" xmlns="" val="2040790998"/>
+        <p14:creationId xmlns:p14="http://schemas.microsoft.com/office/powerpoint/2010/main" val="2040790998"/>
       </p:ext>
     </p:extLst>
   </p:cSld>
@@ -7483,10 +7494,10 @@
           <p:cNvPr id="14" name="Rectangle 13">
             <a:extLst>
               <a:ext uri="{FF2B5EF4-FFF2-40B4-BE49-F238E27FC236}">
-                <a16:creationId xmlns:a16="http://schemas.microsoft.com/office/drawing/2014/main" xmlns="" id="{E724B9E8-02C8-4B2E-8770-A00A67760DF0}"/>
+                <a16:creationId xmlns:a16="http://schemas.microsoft.com/office/drawing/2014/main" id="{E724B9E8-02C8-4B2E-8770-A00A67760DF0}"/>
               </a:ext>
               <a:ext uri="{C183D7F6-B498-43B3-948B-1728B52AA6E4}">
-                <adec:decorative xmlns:adec="http://schemas.microsoft.com/office/drawing/2017/decorative" xmlns="" val="1"/>
+                <adec:decorative xmlns:adec="http://schemas.microsoft.com/office/drawing/2017/decorative" val="1"/>
               </a:ext>
             </a:extLst>
           </p:cNvPr>
@@ -7496,7 +7507,7 @@
           <p:nvPr>
             <p:extLst>
               <p:ext uri="{386F3935-93C4-4BCD-93E2-E3B085C9AB24}">
-                <p16:designElem xmlns:p16="http://schemas.microsoft.com/office/powerpoint/2015/main" xmlns="" val="1"/>
+                <p16:designElem xmlns:p16="http://schemas.microsoft.com/office/powerpoint/2015/main" val="1"/>
               </p:ext>
             </p:extLst>
           </p:nvPr>
@@ -7556,10 +7567,10 @@
           <p:cNvPr id="16" name="Picture 15">
             <a:extLst>
               <a:ext uri="{FF2B5EF4-FFF2-40B4-BE49-F238E27FC236}">
-                <a16:creationId xmlns:a16="http://schemas.microsoft.com/office/drawing/2014/main" xmlns="" id="{7B8AE548-0BFA-4792-9962-3375923C7635}"/>
+                <a16:creationId xmlns:a16="http://schemas.microsoft.com/office/drawing/2014/main" id="{7B8AE548-0BFA-4792-9962-3375923C7635}"/>
               </a:ext>
               <a:ext uri="{C183D7F6-B498-43B3-948B-1728B52AA6E4}">
-                <adec:decorative xmlns:adec="http://schemas.microsoft.com/office/drawing/2017/decorative" xmlns="" val="1"/>
+                <adec:decorative xmlns:adec="http://schemas.microsoft.com/office/drawing/2017/decorative" val="1"/>
               </a:ext>
             </a:extLst>
           </p:cNvPr>
@@ -7569,7 +7580,7 @@
           <p:nvPr>
             <p:extLst>
               <p:ext uri="{386F3935-93C4-4BCD-93E2-E3B085C9AB24}">
-                <p16:designElem xmlns:p16="http://schemas.microsoft.com/office/powerpoint/2015/main" xmlns="" val="1"/>
+                <p16:designElem xmlns:p16="http://schemas.microsoft.com/office/powerpoint/2015/main" val="1"/>
               </p:ext>
             </p:extLst>
           </p:nvPr>
@@ -7578,7 +7589,7 @@
           <a:blip r:embed="rId2">
             <a:extLst>
               <a:ext uri="{28A0092B-C50C-407E-A947-70E740481C1C}">
-                <a14:useLocalDpi xmlns:a14="http://schemas.microsoft.com/office/drawing/2010/main" xmlns="" val="0"/>
+                <a14:useLocalDpi xmlns:a14="http://schemas.microsoft.com/office/drawing/2010/main" val="0"/>
               </a:ext>
             </a:extLst>
           </a:blip>
@@ -7600,10 +7611,10 @@
           <p:cNvPr id="18" name="Straight Connector 17">
             <a:extLst>
               <a:ext uri="{FF2B5EF4-FFF2-40B4-BE49-F238E27FC236}">
-                <a16:creationId xmlns:a16="http://schemas.microsoft.com/office/drawing/2014/main" xmlns="" id="{67639EF4-FA83-4D85-90FE-B831AF283896}"/>
+                <a16:creationId xmlns:a16="http://schemas.microsoft.com/office/drawing/2014/main" id="{67639EF4-FA83-4D85-90FE-B831AF283896}"/>
               </a:ext>
               <a:ext uri="{C183D7F6-B498-43B3-948B-1728B52AA6E4}">
-                <adec:decorative xmlns:adec="http://schemas.microsoft.com/office/drawing/2017/decorative" xmlns="" val="1"/>
+                <adec:decorative xmlns:adec="http://schemas.microsoft.com/office/drawing/2017/decorative" val="1"/>
               </a:ext>
             </a:extLst>
           </p:cNvPr>
@@ -7613,7 +7624,7 @@
           <p:nvPr>
             <p:extLst>
               <p:ext uri="{386F3935-93C4-4BCD-93E2-E3B085C9AB24}">
-                <p16:designElem xmlns:p16="http://schemas.microsoft.com/office/powerpoint/2015/main" xmlns="" val="1"/>
+                <p16:designElem xmlns:p16="http://schemas.microsoft.com/office/powerpoint/2015/main" val="1"/>
               </p:ext>
             </p:extLst>
           </p:nvPr>
@@ -7654,10 +7665,10 @@
           <p:cNvPr id="20" name="Straight Connector 19">
             <a:extLst>
               <a:ext uri="{FF2B5EF4-FFF2-40B4-BE49-F238E27FC236}">
-                <a16:creationId xmlns:a16="http://schemas.microsoft.com/office/drawing/2014/main" xmlns="" id="{CC87E76A-8F50-413D-9BFC-C5A1525BD9BC}"/>
+                <a16:creationId xmlns:a16="http://schemas.microsoft.com/office/drawing/2014/main" id="{CC87E76A-8F50-413D-9BFC-C5A1525BD9BC}"/>
               </a:ext>
               <a:ext uri="{C183D7F6-B498-43B3-948B-1728B52AA6E4}">
-                <adec:decorative xmlns:adec="http://schemas.microsoft.com/office/drawing/2017/decorative" xmlns="" val="1"/>
+                <adec:decorative xmlns:adec="http://schemas.microsoft.com/office/drawing/2017/decorative" val="1"/>
               </a:ext>
             </a:extLst>
           </p:cNvPr>
@@ -7667,7 +7678,7 @@
           <p:nvPr>
             <p:extLst>
               <p:ext uri="{386F3935-93C4-4BCD-93E2-E3B085C9AB24}">
-                <p16:designElem xmlns:p16="http://schemas.microsoft.com/office/powerpoint/2015/main" xmlns="" val="1"/>
+                <p16:designElem xmlns:p16="http://schemas.microsoft.com/office/powerpoint/2015/main" val="1"/>
               </p:ext>
             </p:extLst>
           </p:nvPr>
@@ -7702,10 +7713,10 @@
           <p:cNvPr id="22" name="Rectangle 21">
             <a:extLst>
               <a:ext uri="{FF2B5EF4-FFF2-40B4-BE49-F238E27FC236}">
-                <a16:creationId xmlns:a16="http://schemas.microsoft.com/office/drawing/2014/main" xmlns="" id="{9A1C6278-B7D5-4E8E-B4DC-834832980565}"/>
+                <a16:creationId xmlns:a16="http://schemas.microsoft.com/office/drawing/2014/main" id="{9A1C6278-B7D5-4E8E-B4DC-834832980565}"/>
               </a:ext>
               <a:ext uri="{C183D7F6-B498-43B3-948B-1728B52AA6E4}">
-                <adec:decorative xmlns:adec="http://schemas.microsoft.com/office/drawing/2017/decorative" xmlns="" val="1"/>
+                <adec:decorative xmlns:adec="http://schemas.microsoft.com/office/drawing/2017/decorative" val="1"/>
               </a:ext>
             </a:extLst>
           </p:cNvPr>
@@ -7715,7 +7726,7 @@
           <p:nvPr>
             <p:extLst>
               <p:ext uri="{386F3935-93C4-4BCD-93E2-E3B085C9AB24}">
-                <p16:designElem xmlns:p16="http://schemas.microsoft.com/office/powerpoint/2015/main" xmlns="" val="1"/>
+                <p16:designElem xmlns:p16="http://schemas.microsoft.com/office/powerpoint/2015/main" val="1"/>
               </p:ext>
             </p:extLst>
           </p:nvPr>
@@ -7762,10 +7773,10 @@
           <p:cNvPr id="24" name="Rectangle 23">
             <a:extLst>
               <a:ext uri="{FF2B5EF4-FFF2-40B4-BE49-F238E27FC236}">
-                <a16:creationId xmlns:a16="http://schemas.microsoft.com/office/drawing/2014/main" xmlns="" id="{C007F3D3-099E-430E-8754-C084D0FA5FE3}"/>
+                <a16:creationId xmlns:a16="http://schemas.microsoft.com/office/drawing/2014/main" id="{C007F3D3-099E-430E-8754-C084D0FA5FE3}"/>
               </a:ext>
               <a:ext uri="{C183D7F6-B498-43B3-948B-1728B52AA6E4}">
-                <adec:decorative xmlns:adec="http://schemas.microsoft.com/office/drawing/2017/decorative" xmlns="" val="1"/>
+                <adec:decorative xmlns:adec="http://schemas.microsoft.com/office/drawing/2017/decorative" val="1"/>
               </a:ext>
             </a:extLst>
           </p:cNvPr>
@@ -7775,7 +7786,7 @@
           <p:nvPr>
             <p:extLst>
               <p:ext uri="{386F3935-93C4-4BCD-93E2-E3B085C9AB24}">
-                <p16:designElem xmlns:p16="http://schemas.microsoft.com/office/powerpoint/2015/main" xmlns="" val="1"/>
+                <p16:designElem xmlns:p16="http://schemas.microsoft.com/office/powerpoint/2015/main" val="1"/>
               </p:ext>
             </p:extLst>
           </p:nvPr>
@@ -7836,7 +7847,7 @@
           <p:cNvPr id="2" name="Title 1">
             <a:extLst>
               <a:ext uri="{FF2B5EF4-FFF2-40B4-BE49-F238E27FC236}">
-                <a16:creationId xmlns:a16="http://schemas.microsoft.com/office/drawing/2014/main" xmlns="" id="{13CFD6D8-D4CB-7D22-6034-0448D726F997}"/>
+                <a16:creationId xmlns:a16="http://schemas.microsoft.com/office/drawing/2014/main" id="{13CFD6D8-D4CB-7D22-6034-0448D726F997}"/>
               </a:ext>
             </a:extLst>
           </p:cNvPr>
@@ -7871,7 +7882,7 @@
           <p:cNvPr id="5" name="Content Placeholder 4">
             <a:extLst>
               <a:ext uri="{FF2B5EF4-FFF2-40B4-BE49-F238E27FC236}">
-                <a16:creationId xmlns:a16="http://schemas.microsoft.com/office/drawing/2014/main" xmlns="" id="{D328A2F4-206A-9FAD-C168-CDB9610FB783}"/>
+                <a16:creationId xmlns:a16="http://schemas.microsoft.com/office/drawing/2014/main" id="{D328A2F4-206A-9FAD-C168-CDB9610FB783}"/>
               </a:ext>
             </a:extLst>
           </p:cNvPr>
@@ -7903,7 +7914,7 @@
           <p:cNvPr id="7" name="Picture 6">
             <a:extLst>
               <a:ext uri="{FF2B5EF4-FFF2-40B4-BE49-F238E27FC236}">
-                <a16:creationId xmlns:a16="http://schemas.microsoft.com/office/drawing/2014/main" xmlns="" id="{AA8CF25F-105A-EA84-AB38-9B2CDC7B3277}"/>
+                <a16:creationId xmlns:a16="http://schemas.microsoft.com/office/drawing/2014/main" id="{AA8CF25F-105A-EA84-AB38-9B2CDC7B3277}"/>
               </a:ext>
             </a:extLst>
           </p:cNvPr>
@@ -7933,7 +7944,7 @@
           <p:cNvPr id="9" name="Picture 8">
             <a:extLst>
               <a:ext uri="{FF2B5EF4-FFF2-40B4-BE49-F238E27FC236}">
-                <a16:creationId xmlns:a16="http://schemas.microsoft.com/office/drawing/2014/main" xmlns="" id="{07C5DCCD-B4B3-22CE-2C2A-CC1050E657B0}"/>
+                <a16:creationId xmlns:a16="http://schemas.microsoft.com/office/drawing/2014/main" id="{07C5DCCD-B4B3-22CE-2C2A-CC1050E657B0}"/>
               </a:ext>
             </a:extLst>
           </p:cNvPr>
@@ -7963,10 +7974,10 @@
           <p:cNvPr id="26" name="Straight Connector 25">
             <a:extLst>
               <a:ext uri="{FF2B5EF4-FFF2-40B4-BE49-F238E27FC236}">
-                <a16:creationId xmlns:a16="http://schemas.microsoft.com/office/drawing/2014/main" xmlns="" id="{6B9EA5DA-6DFD-447D-B8F9-CB95CA114076}"/>
+                <a16:creationId xmlns:a16="http://schemas.microsoft.com/office/drawing/2014/main" id="{6B9EA5DA-6DFD-447D-B8F9-CB95CA114076}"/>
               </a:ext>
               <a:ext uri="{C183D7F6-B498-43B3-948B-1728B52AA6E4}">
-                <adec:decorative xmlns:adec="http://schemas.microsoft.com/office/drawing/2017/decorative" xmlns="" val="1"/>
+                <adec:decorative xmlns:adec="http://schemas.microsoft.com/office/drawing/2017/decorative" val="1"/>
               </a:ext>
             </a:extLst>
           </p:cNvPr>
@@ -7976,7 +7987,7 @@
           <p:nvPr>
             <p:extLst>
               <p:ext uri="{386F3935-93C4-4BCD-93E2-E3B085C9AB24}">
-                <p16:designElem xmlns:p16="http://schemas.microsoft.com/office/powerpoint/2015/main" xmlns="" val="1"/>
+                <p16:designElem xmlns:p16="http://schemas.microsoft.com/office/powerpoint/2015/main" val="1"/>
               </p:ext>
             </p:extLst>
           </p:nvPr>
@@ -8011,10 +8022,10 @@
           <p:cNvPr id="28" name="Picture 27">
             <a:extLst>
               <a:ext uri="{FF2B5EF4-FFF2-40B4-BE49-F238E27FC236}">
-                <a16:creationId xmlns:a16="http://schemas.microsoft.com/office/drawing/2014/main" xmlns="" id="{87612EF9-94E7-42BA-B4A9-4B38643FBAF7}"/>
+                <a16:creationId xmlns:a16="http://schemas.microsoft.com/office/drawing/2014/main" id="{87612EF9-94E7-42BA-B4A9-4B38643FBAF7}"/>
               </a:ext>
               <a:ext uri="{C183D7F6-B498-43B3-948B-1728B52AA6E4}">
-                <adec:decorative xmlns:adec="http://schemas.microsoft.com/office/drawing/2017/decorative" xmlns="" val="1"/>
+                <adec:decorative xmlns:adec="http://schemas.microsoft.com/office/drawing/2017/decorative" val="1"/>
               </a:ext>
             </a:extLst>
           </p:cNvPr>
@@ -8024,7 +8035,7 @@
           <p:nvPr>
             <p:extLst>
               <p:ext uri="{386F3935-93C4-4BCD-93E2-E3B085C9AB24}">
-                <p16:designElem xmlns:p16="http://schemas.microsoft.com/office/powerpoint/2015/main" xmlns="" val="1"/>
+                <p16:designElem xmlns:p16="http://schemas.microsoft.com/office/powerpoint/2015/main" val="1"/>
               </p:ext>
             </p:extLst>
           </p:nvPr>
@@ -8033,7 +8044,7 @@
           <a:blip r:embed="rId2">
             <a:extLst>
               <a:ext uri="{28A0092B-C50C-407E-A947-70E740481C1C}">
-                <a14:useLocalDpi xmlns:a14="http://schemas.microsoft.com/office/drawing/2010/main" xmlns="" val="0"/>
+                <a14:useLocalDpi xmlns:a14="http://schemas.microsoft.com/office/drawing/2010/main" val="0"/>
               </a:ext>
             </a:extLst>
           </a:blip>
@@ -8055,10 +8066,10 @@
           <p:cNvPr id="30" name="Straight Connector 29">
             <a:extLst>
               <a:ext uri="{FF2B5EF4-FFF2-40B4-BE49-F238E27FC236}">
-                <a16:creationId xmlns:a16="http://schemas.microsoft.com/office/drawing/2014/main" xmlns="" id="{9E597F0B-0A17-4BF2-A904-9D99811F3E2E}"/>
+                <a16:creationId xmlns:a16="http://schemas.microsoft.com/office/drawing/2014/main" id="{9E597F0B-0A17-4BF2-A904-9D99811F3E2E}"/>
               </a:ext>
               <a:ext uri="{C183D7F6-B498-43B3-948B-1728B52AA6E4}">
-                <adec:decorative xmlns:adec="http://schemas.microsoft.com/office/drawing/2017/decorative" xmlns="" val="1"/>
+                <adec:decorative xmlns:adec="http://schemas.microsoft.com/office/drawing/2017/decorative" val="1"/>
               </a:ext>
             </a:extLst>
           </p:cNvPr>
@@ -8068,7 +8079,7 @@
           <p:nvPr>
             <p:extLst>
               <p:ext uri="{386F3935-93C4-4BCD-93E2-E3B085C9AB24}">
-                <p16:designElem xmlns:p16="http://schemas.microsoft.com/office/powerpoint/2015/main" xmlns="" val="1"/>
+                <p16:designElem xmlns:p16="http://schemas.microsoft.com/office/powerpoint/2015/main" val="1"/>
               </p:ext>
             </p:extLst>
           </p:nvPr>
@@ -8107,7 +8118,7 @@
     </p:spTree>
     <p:extLst>
       <p:ext uri="{BB962C8B-B14F-4D97-AF65-F5344CB8AC3E}">
-        <p14:creationId xmlns:p14="http://schemas.microsoft.com/office/powerpoint/2010/main" xmlns="" val="3079083219"/>
+        <p14:creationId xmlns:p14="http://schemas.microsoft.com/office/powerpoint/2010/main" val="3079083219"/>
       </p:ext>
     </p:extLst>
   </p:cSld>
@@ -8163,10 +8174,10 @@
           <p:cNvPr id="17" name="Rectangle 16">
             <a:extLst>
               <a:ext uri="{FF2B5EF4-FFF2-40B4-BE49-F238E27FC236}">
-                <a16:creationId xmlns:a16="http://schemas.microsoft.com/office/drawing/2014/main" xmlns="" id="{E724B9E8-02C8-4B2E-8770-A00A67760DF0}"/>
+                <a16:creationId xmlns:a16="http://schemas.microsoft.com/office/drawing/2014/main" id="{E724B9E8-02C8-4B2E-8770-A00A67760DF0}"/>
               </a:ext>
               <a:ext uri="{C183D7F6-B498-43B3-948B-1728B52AA6E4}">
-                <adec:decorative xmlns:adec="http://schemas.microsoft.com/office/drawing/2017/decorative" xmlns="" val="1"/>
+                <adec:decorative xmlns:adec="http://schemas.microsoft.com/office/drawing/2017/decorative" val="1"/>
               </a:ext>
             </a:extLst>
           </p:cNvPr>
@@ -8176,7 +8187,7 @@
           <p:nvPr>
             <p:extLst>
               <p:ext uri="{386F3935-93C4-4BCD-93E2-E3B085C9AB24}">
-                <p16:designElem xmlns:p16="http://schemas.microsoft.com/office/powerpoint/2015/main" xmlns="" val="1"/>
+                <p16:designElem xmlns:p16="http://schemas.microsoft.com/office/powerpoint/2015/main" val="1"/>
               </p:ext>
             </p:extLst>
           </p:nvPr>
@@ -8236,10 +8247,10 @@
           <p:cNvPr id="19" name="Picture 18">
             <a:extLst>
               <a:ext uri="{FF2B5EF4-FFF2-40B4-BE49-F238E27FC236}">
-                <a16:creationId xmlns:a16="http://schemas.microsoft.com/office/drawing/2014/main" xmlns="" id="{7B8AE548-0BFA-4792-9962-3375923C7635}"/>
+                <a16:creationId xmlns:a16="http://schemas.microsoft.com/office/drawing/2014/main" id="{7B8AE548-0BFA-4792-9962-3375923C7635}"/>
               </a:ext>
               <a:ext uri="{C183D7F6-B498-43B3-948B-1728B52AA6E4}">
-                <adec:decorative xmlns:adec="http://schemas.microsoft.com/office/drawing/2017/decorative" xmlns="" val="1"/>
+                <adec:decorative xmlns:adec="http://schemas.microsoft.com/office/drawing/2017/decorative" val="1"/>
               </a:ext>
             </a:extLst>
           </p:cNvPr>
@@ -8249,7 +8260,7 @@
           <p:nvPr>
             <p:extLst>
               <p:ext uri="{386F3935-93C4-4BCD-93E2-E3B085C9AB24}">
-                <p16:designElem xmlns:p16="http://schemas.microsoft.com/office/powerpoint/2015/main" xmlns="" val="1"/>
+                <p16:designElem xmlns:p16="http://schemas.microsoft.com/office/powerpoint/2015/main" val="1"/>
               </p:ext>
             </p:extLst>
           </p:nvPr>
@@ -8258,7 +8269,7 @@
           <a:blip r:embed="rId2">
             <a:extLst>
               <a:ext uri="{28A0092B-C50C-407E-A947-70E740481C1C}">
-                <a14:useLocalDpi xmlns:a14="http://schemas.microsoft.com/office/drawing/2010/main" xmlns="" val="0"/>
+                <a14:useLocalDpi xmlns:a14="http://schemas.microsoft.com/office/drawing/2010/main" val="0"/>
               </a:ext>
             </a:extLst>
           </a:blip>
@@ -8280,10 +8291,10 @@
           <p:cNvPr id="21" name="Straight Connector 20">
             <a:extLst>
               <a:ext uri="{FF2B5EF4-FFF2-40B4-BE49-F238E27FC236}">
-                <a16:creationId xmlns:a16="http://schemas.microsoft.com/office/drawing/2014/main" xmlns="" id="{67639EF4-FA83-4D85-90FE-B831AF283896}"/>
+                <a16:creationId xmlns:a16="http://schemas.microsoft.com/office/drawing/2014/main" id="{67639EF4-FA83-4D85-90FE-B831AF283896}"/>
               </a:ext>
               <a:ext uri="{C183D7F6-B498-43B3-948B-1728B52AA6E4}">
-                <adec:decorative xmlns:adec="http://schemas.microsoft.com/office/drawing/2017/decorative" xmlns="" val="1"/>
+                <adec:decorative xmlns:adec="http://schemas.microsoft.com/office/drawing/2017/decorative" val="1"/>
               </a:ext>
             </a:extLst>
           </p:cNvPr>
@@ -8293,7 +8304,7 @@
           <p:nvPr>
             <p:extLst>
               <p:ext uri="{386F3935-93C4-4BCD-93E2-E3B085C9AB24}">
-                <p16:designElem xmlns:p16="http://schemas.microsoft.com/office/powerpoint/2015/main" xmlns="" val="1"/>
+                <p16:designElem xmlns:p16="http://schemas.microsoft.com/office/powerpoint/2015/main" val="1"/>
               </p:ext>
             </p:extLst>
           </p:nvPr>
@@ -8334,10 +8345,10 @@
           <p:cNvPr id="23" name="Straight Connector 22">
             <a:extLst>
               <a:ext uri="{FF2B5EF4-FFF2-40B4-BE49-F238E27FC236}">
-                <a16:creationId xmlns:a16="http://schemas.microsoft.com/office/drawing/2014/main" xmlns="" id="{CC87E76A-8F50-413D-9BFC-C5A1525BD9BC}"/>
+                <a16:creationId xmlns:a16="http://schemas.microsoft.com/office/drawing/2014/main" id="{CC87E76A-8F50-413D-9BFC-C5A1525BD9BC}"/>
               </a:ext>
               <a:ext uri="{C183D7F6-B498-43B3-948B-1728B52AA6E4}">
-                <adec:decorative xmlns:adec="http://schemas.microsoft.com/office/drawing/2017/decorative" xmlns="" val="1"/>
+                <adec:decorative xmlns:adec="http://schemas.microsoft.com/office/drawing/2017/decorative" val="1"/>
               </a:ext>
             </a:extLst>
           </p:cNvPr>
@@ -8347,7 +8358,7 @@
           <p:nvPr>
             <p:extLst>
               <p:ext uri="{386F3935-93C4-4BCD-93E2-E3B085C9AB24}">
-                <p16:designElem xmlns:p16="http://schemas.microsoft.com/office/powerpoint/2015/main" xmlns="" val="1"/>
+                <p16:designElem xmlns:p16="http://schemas.microsoft.com/office/powerpoint/2015/main" val="1"/>
               </p:ext>
             </p:extLst>
           </p:nvPr>
@@ -8382,10 +8393,10 @@
           <p:cNvPr id="25" name="Rectangle 24">
             <a:extLst>
               <a:ext uri="{FF2B5EF4-FFF2-40B4-BE49-F238E27FC236}">
-                <a16:creationId xmlns:a16="http://schemas.microsoft.com/office/drawing/2014/main" xmlns="" id="{9A1C6278-B7D5-4E8E-B4DC-834832980565}"/>
+                <a16:creationId xmlns:a16="http://schemas.microsoft.com/office/drawing/2014/main" id="{9A1C6278-B7D5-4E8E-B4DC-834832980565}"/>
               </a:ext>
               <a:ext uri="{C183D7F6-B498-43B3-948B-1728B52AA6E4}">
-                <adec:decorative xmlns:adec="http://schemas.microsoft.com/office/drawing/2017/decorative" xmlns="" val="1"/>
+                <adec:decorative xmlns:adec="http://schemas.microsoft.com/office/drawing/2017/decorative" val="1"/>
               </a:ext>
             </a:extLst>
           </p:cNvPr>
@@ -8395,7 +8406,7 @@
           <p:nvPr>
             <p:extLst>
               <p:ext uri="{386F3935-93C4-4BCD-93E2-E3B085C9AB24}">
-                <p16:designElem xmlns:p16="http://schemas.microsoft.com/office/powerpoint/2015/main" xmlns="" val="1"/>
+                <p16:designElem xmlns:p16="http://schemas.microsoft.com/office/powerpoint/2015/main" val="1"/>
               </p:ext>
             </p:extLst>
           </p:nvPr>
@@ -8442,10 +8453,10 @@
           <p:cNvPr id="27" name="Rectangle 26">
             <a:extLst>
               <a:ext uri="{FF2B5EF4-FFF2-40B4-BE49-F238E27FC236}">
-                <a16:creationId xmlns:a16="http://schemas.microsoft.com/office/drawing/2014/main" xmlns="" id="{C007F3D3-099E-430E-8754-C084D0FA5FE3}"/>
+                <a16:creationId xmlns:a16="http://schemas.microsoft.com/office/drawing/2014/main" id="{C007F3D3-099E-430E-8754-C084D0FA5FE3}"/>
               </a:ext>
               <a:ext uri="{C183D7F6-B498-43B3-948B-1728B52AA6E4}">
-                <adec:decorative xmlns:adec="http://schemas.microsoft.com/office/drawing/2017/decorative" xmlns="" val="1"/>
+                <adec:decorative xmlns:adec="http://schemas.microsoft.com/office/drawing/2017/decorative" val="1"/>
               </a:ext>
             </a:extLst>
           </p:cNvPr>
@@ -8455,7 +8466,7 @@
           <p:nvPr>
             <p:extLst>
               <p:ext uri="{386F3935-93C4-4BCD-93E2-E3B085C9AB24}">
-                <p16:designElem xmlns:p16="http://schemas.microsoft.com/office/powerpoint/2015/main" xmlns="" val="1"/>
+                <p16:designElem xmlns:p16="http://schemas.microsoft.com/office/powerpoint/2015/main" val="1"/>
               </p:ext>
             </p:extLst>
           </p:nvPr>
@@ -8516,7 +8527,7 @@
           <p:cNvPr id="2" name="Title 1">
             <a:extLst>
               <a:ext uri="{FF2B5EF4-FFF2-40B4-BE49-F238E27FC236}">
-                <a16:creationId xmlns:a16="http://schemas.microsoft.com/office/drawing/2014/main" xmlns="" id="{0C05D6E9-FB34-5D4E-D478-F5A8B0E7C25A}"/>
+                <a16:creationId xmlns:a16="http://schemas.microsoft.com/office/drawing/2014/main" id="{0C05D6E9-FB34-5D4E-D478-F5A8B0E7C25A}"/>
               </a:ext>
             </a:extLst>
           </p:cNvPr>
@@ -8551,7 +8562,7 @@
           <p:cNvPr id="7" name="Content Placeholder 6">
             <a:extLst>
               <a:ext uri="{FF2B5EF4-FFF2-40B4-BE49-F238E27FC236}">
-                <a16:creationId xmlns:a16="http://schemas.microsoft.com/office/drawing/2014/main" xmlns="" id="{5CAD100C-B467-C9FA-742C-83A81B896BF9}"/>
+                <a16:creationId xmlns:a16="http://schemas.microsoft.com/office/drawing/2014/main" id="{5CAD100C-B467-C9FA-742C-83A81B896BF9}"/>
               </a:ext>
             </a:extLst>
           </p:cNvPr>
@@ -8583,7 +8594,7 @@
           <p:cNvPr id="12" name="Picture 11">
             <a:extLst>
               <a:ext uri="{FF2B5EF4-FFF2-40B4-BE49-F238E27FC236}">
-                <a16:creationId xmlns:a16="http://schemas.microsoft.com/office/drawing/2014/main" xmlns="" id="{31D188B4-F8EB-7281-F69A-9DE7E48DAAA3}"/>
+                <a16:creationId xmlns:a16="http://schemas.microsoft.com/office/drawing/2014/main" id="{31D188B4-F8EB-7281-F69A-9DE7E48DAAA3}"/>
               </a:ext>
             </a:extLst>
           </p:cNvPr>
@@ -8613,7 +8624,7 @@
           <p:cNvPr id="9" name="Picture 8">
             <a:extLst>
               <a:ext uri="{FF2B5EF4-FFF2-40B4-BE49-F238E27FC236}">
-                <a16:creationId xmlns:a16="http://schemas.microsoft.com/office/drawing/2014/main" xmlns="" id="{D59158A9-81B7-7204-17BE-FD603E88906B}"/>
+                <a16:creationId xmlns:a16="http://schemas.microsoft.com/office/drawing/2014/main" id="{D59158A9-81B7-7204-17BE-FD603E88906B}"/>
               </a:ext>
             </a:extLst>
           </p:cNvPr>
@@ -8643,10 +8654,10 @@
           <p:cNvPr id="29" name="Straight Connector 28">
             <a:extLst>
               <a:ext uri="{FF2B5EF4-FFF2-40B4-BE49-F238E27FC236}">
-                <a16:creationId xmlns:a16="http://schemas.microsoft.com/office/drawing/2014/main" xmlns="" id="{6B9EA5DA-6DFD-447D-B8F9-CB95CA114076}"/>
+                <a16:creationId xmlns:a16="http://schemas.microsoft.com/office/drawing/2014/main" id="{6B9EA5DA-6DFD-447D-B8F9-CB95CA114076}"/>
               </a:ext>
               <a:ext uri="{C183D7F6-B498-43B3-948B-1728B52AA6E4}">
-                <adec:decorative xmlns:adec="http://schemas.microsoft.com/office/drawing/2017/decorative" xmlns="" val="1"/>
+                <adec:decorative xmlns:adec="http://schemas.microsoft.com/office/drawing/2017/decorative" val="1"/>
               </a:ext>
             </a:extLst>
           </p:cNvPr>
@@ -8656,7 +8667,7 @@
           <p:nvPr>
             <p:extLst>
               <p:ext uri="{386F3935-93C4-4BCD-93E2-E3B085C9AB24}">
-                <p16:designElem xmlns:p16="http://schemas.microsoft.com/office/powerpoint/2015/main" xmlns="" val="1"/>
+                <p16:designElem xmlns:p16="http://schemas.microsoft.com/office/powerpoint/2015/main" val="1"/>
               </p:ext>
             </p:extLst>
           </p:nvPr>
@@ -8691,10 +8702,10 @@
           <p:cNvPr id="31" name="Picture 30">
             <a:extLst>
               <a:ext uri="{FF2B5EF4-FFF2-40B4-BE49-F238E27FC236}">
-                <a16:creationId xmlns:a16="http://schemas.microsoft.com/office/drawing/2014/main" xmlns="" id="{87612EF9-94E7-42BA-B4A9-4B38643FBAF7}"/>
+                <a16:creationId xmlns:a16="http://schemas.microsoft.com/office/drawing/2014/main" id="{87612EF9-94E7-42BA-B4A9-4B38643FBAF7}"/>
               </a:ext>
               <a:ext uri="{C183D7F6-B498-43B3-948B-1728B52AA6E4}">
-                <adec:decorative xmlns:adec="http://schemas.microsoft.com/office/drawing/2017/decorative" xmlns="" val="1"/>
+                <adec:decorative xmlns:adec="http://schemas.microsoft.com/office/drawing/2017/decorative" val="1"/>
               </a:ext>
             </a:extLst>
           </p:cNvPr>
@@ -8704,7 +8715,7 @@
           <p:nvPr>
             <p:extLst>
               <p:ext uri="{386F3935-93C4-4BCD-93E2-E3B085C9AB24}">
-                <p16:designElem xmlns:p16="http://schemas.microsoft.com/office/powerpoint/2015/main" xmlns="" val="1"/>
+                <p16:designElem xmlns:p16="http://schemas.microsoft.com/office/powerpoint/2015/main" val="1"/>
               </p:ext>
             </p:extLst>
           </p:nvPr>
@@ -8713,7 +8724,7 @@
           <a:blip r:embed="rId2">
             <a:extLst>
               <a:ext uri="{28A0092B-C50C-407E-A947-70E740481C1C}">
-                <a14:useLocalDpi xmlns:a14="http://schemas.microsoft.com/office/drawing/2010/main" xmlns="" val="0"/>
+                <a14:useLocalDpi xmlns:a14="http://schemas.microsoft.com/office/drawing/2010/main" val="0"/>
               </a:ext>
             </a:extLst>
           </a:blip>
@@ -8735,10 +8746,10 @@
           <p:cNvPr id="33" name="Straight Connector 32">
             <a:extLst>
               <a:ext uri="{FF2B5EF4-FFF2-40B4-BE49-F238E27FC236}">
-                <a16:creationId xmlns:a16="http://schemas.microsoft.com/office/drawing/2014/main" xmlns="" id="{9E597F0B-0A17-4BF2-A904-9D99811F3E2E}"/>
+                <a16:creationId xmlns:a16="http://schemas.microsoft.com/office/drawing/2014/main" id="{9E597F0B-0A17-4BF2-A904-9D99811F3E2E}"/>
               </a:ext>
               <a:ext uri="{C183D7F6-B498-43B3-948B-1728B52AA6E4}">
-                <adec:decorative xmlns:adec="http://schemas.microsoft.com/office/drawing/2017/decorative" xmlns="" val="1"/>
+                <adec:decorative xmlns:adec="http://schemas.microsoft.com/office/drawing/2017/decorative" val="1"/>
               </a:ext>
             </a:extLst>
           </p:cNvPr>
@@ -8748,7 +8759,7 @@
           <p:nvPr>
             <p:extLst>
               <p:ext uri="{386F3935-93C4-4BCD-93E2-E3B085C9AB24}">
-                <p16:designElem xmlns:p16="http://schemas.microsoft.com/office/powerpoint/2015/main" xmlns="" val="1"/>
+                <p16:designElem xmlns:p16="http://schemas.microsoft.com/office/powerpoint/2015/main" val="1"/>
               </p:ext>
             </p:extLst>
           </p:nvPr>
@@ -8787,7 +8798,7 @@
     </p:spTree>
     <p:extLst>
       <p:ext uri="{BB962C8B-B14F-4D97-AF65-F5344CB8AC3E}">
-        <p14:creationId xmlns:p14="http://schemas.microsoft.com/office/powerpoint/2010/main" xmlns="" val="3817290165"/>
+        <p14:creationId xmlns:p14="http://schemas.microsoft.com/office/powerpoint/2010/main" val="3817290165"/>
       </p:ext>
     </p:extLst>
   </p:cSld>
@@ -8843,10 +8854,10 @@
           <p:cNvPr id="33" name="Rectangle 32">
             <a:extLst>
               <a:ext uri="{FF2B5EF4-FFF2-40B4-BE49-F238E27FC236}">
-                <a16:creationId xmlns:a16="http://schemas.microsoft.com/office/drawing/2014/main" xmlns="" id="{EEA869E1-F851-4A52-92F5-77E592B76A5B}"/>
+                <a16:creationId xmlns:a16="http://schemas.microsoft.com/office/drawing/2014/main" id="{EEA869E1-F851-4A52-92F5-77E592B76A5B}"/>
               </a:ext>
               <a:ext uri="{C183D7F6-B498-43B3-948B-1728B52AA6E4}">
-                <adec:decorative xmlns:adec="http://schemas.microsoft.com/office/drawing/2017/decorative" xmlns="" val="1"/>
+                <adec:decorative xmlns:adec="http://schemas.microsoft.com/office/drawing/2017/decorative" val="1"/>
               </a:ext>
             </a:extLst>
           </p:cNvPr>
@@ -8856,7 +8867,7 @@
           <p:nvPr>
             <p:extLst>
               <p:ext uri="{386F3935-93C4-4BCD-93E2-E3B085C9AB24}">
-                <p16:designElem xmlns:p16="http://schemas.microsoft.com/office/powerpoint/2015/main" xmlns="" val="1"/>
+                <p16:designElem xmlns:p16="http://schemas.microsoft.com/office/powerpoint/2015/main" val="1"/>
               </p:ext>
             </p:extLst>
           </p:nvPr>
@@ -8916,10 +8927,10 @@
           <p:cNvPr id="35" name="Picture 34">
             <a:extLst>
               <a:ext uri="{FF2B5EF4-FFF2-40B4-BE49-F238E27FC236}">
-                <a16:creationId xmlns:a16="http://schemas.microsoft.com/office/drawing/2014/main" xmlns="" id="{B083AD55-8296-44BD-8E14-DD2DDBC351B0}"/>
+                <a16:creationId xmlns:a16="http://schemas.microsoft.com/office/drawing/2014/main" id="{B083AD55-8296-44BD-8E14-DD2DDBC351B0}"/>
               </a:ext>
               <a:ext uri="{C183D7F6-B498-43B3-948B-1728B52AA6E4}">
-                <adec:decorative xmlns:adec="http://schemas.microsoft.com/office/drawing/2017/decorative" xmlns="" val="1"/>
+                <adec:decorative xmlns:adec="http://schemas.microsoft.com/office/drawing/2017/decorative" val="1"/>
               </a:ext>
             </a:extLst>
           </p:cNvPr>
@@ -8929,7 +8940,7 @@
           <p:nvPr>
             <p:extLst>
               <p:ext uri="{386F3935-93C4-4BCD-93E2-E3B085C9AB24}">
-                <p16:designElem xmlns:p16="http://schemas.microsoft.com/office/powerpoint/2015/main" xmlns="" val="1"/>
+                <p16:designElem xmlns:p16="http://schemas.microsoft.com/office/powerpoint/2015/main" val="1"/>
               </p:ext>
             </p:extLst>
           </p:nvPr>
@@ -8938,7 +8949,7 @@
           <a:blip r:embed="rId2">
             <a:extLst>
               <a:ext uri="{28A0092B-C50C-407E-A947-70E740481C1C}">
-                <a14:useLocalDpi xmlns:a14="http://schemas.microsoft.com/office/drawing/2010/main" xmlns="" val="0"/>
+                <a14:useLocalDpi xmlns:a14="http://schemas.microsoft.com/office/drawing/2010/main" val="0"/>
               </a:ext>
             </a:extLst>
           </a:blip>
@@ -8960,10 +8971,10 @@
           <p:cNvPr id="37" name="Straight Connector 36">
             <a:extLst>
               <a:ext uri="{FF2B5EF4-FFF2-40B4-BE49-F238E27FC236}">
-                <a16:creationId xmlns:a16="http://schemas.microsoft.com/office/drawing/2014/main" xmlns="" id="{2BF46B26-15FC-4C5A-94FA-AE9ED64B5C20}"/>
+                <a16:creationId xmlns:a16="http://schemas.microsoft.com/office/drawing/2014/main" id="{2BF46B26-15FC-4C5A-94FA-AE9ED64B5C20}"/>
               </a:ext>
               <a:ext uri="{C183D7F6-B498-43B3-948B-1728B52AA6E4}">
-                <adec:decorative xmlns:adec="http://schemas.microsoft.com/office/drawing/2017/decorative" xmlns="" val="1"/>
+                <adec:decorative xmlns:adec="http://schemas.microsoft.com/office/drawing/2017/decorative" val="1"/>
               </a:ext>
             </a:extLst>
           </p:cNvPr>
@@ -8973,7 +8984,7 @@
           <p:nvPr>
             <p:extLst>
               <p:ext uri="{386F3935-93C4-4BCD-93E2-E3B085C9AB24}">
-                <p16:designElem xmlns:p16="http://schemas.microsoft.com/office/powerpoint/2015/main" xmlns="" val="1"/>
+                <p16:designElem xmlns:p16="http://schemas.microsoft.com/office/powerpoint/2015/main" val="1"/>
               </p:ext>
             </p:extLst>
           </p:nvPr>
@@ -9014,10 +9025,10 @@
           <p:cNvPr id="39" name="Straight Connector 38">
             <a:extLst>
               <a:ext uri="{FF2B5EF4-FFF2-40B4-BE49-F238E27FC236}">
-                <a16:creationId xmlns:a16="http://schemas.microsoft.com/office/drawing/2014/main" xmlns="" id="{912F6065-5345-44BD-B66E-5487CCD7A9B9}"/>
+                <a16:creationId xmlns:a16="http://schemas.microsoft.com/office/drawing/2014/main" id="{912F6065-5345-44BD-B66E-5487CCD7A9B9}"/>
               </a:ext>
               <a:ext uri="{C183D7F6-B498-43B3-948B-1728B52AA6E4}">
-                <adec:decorative xmlns:adec="http://schemas.microsoft.com/office/drawing/2017/decorative" xmlns="" val="1"/>
+                <adec:decorative xmlns:adec="http://schemas.microsoft.com/office/drawing/2017/decorative" val="1"/>
               </a:ext>
             </a:extLst>
           </p:cNvPr>
@@ -9027,7 +9038,7 @@
           <p:nvPr>
             <p:extLst>
               <p:ext uri="{386F3935-93C4-4BCD-93E2-E3B085C9AB24}">
-                <p16:designElem xmlns:p16="http://schemas.microsoft.com/office/powerpoint/2015/main" xmlns="" val="1"/>
+                <p16:designElem xmlns:p16="http://schemas.microsoft.com/office/powerpoint/2015/main" val="1"/>
               </p:ext>
             </p:extLst>
           </p:nvPr>
@@ -9062,10 +9073,10 @@
           <p:cNvPr id="41" name="Rectangle 40">
             <a:extLst>
               <a:ext uri="{FF2B5EF4-FFF2-40B4-BE49-F238E27FC236}">
-                <a16:creationId xmlns:a16="http://schemas.microsoft.com/office/drawing/2014/main" xmlns="" id="{E7ABCFA2-55B0-438C-A39A-637FFC6246E8}"/>
+                <a16:creationId xmlns:a16="http://schemas.microsoft.com/office/drawing/2014/main" id="{E7ABCFA2-55B0-438C-A39A-637FFC6246E8}"/>
               </a:ext>
               <a:ext uri="{C183D7F6-B498-43B3-948B-1728B52AA6E4}">
-                <adec:decorative xmlns:adec="http://schemas.microsoft.com/office/drawing/2017/decorative" xmlns="" val="1"/>
+                <adec:decorative xmlns:adec="http://schemas.microsoft.com/office/drawing/2017/decorative" val="1"/>
               </a:ext>
             </a:extLst>
           </p:cNvPr>
@@ -9075,7 +9086,7 @@
           <p:nvPr>
             <p:extLst>
               <p:ext uri="{386F3935-93C4-4BCD-93E2-E3B085C9AB24}">
-                <p16:designElem xmlns:p16="http://schemas.microsoft.com/office/powerpoint/2015/main" xmlns="" val="1"/>
+                <p16:designElem xmlns:p16="http://schemas.microsoft.com/office/powerpoint/2015/main" val="1"/>
               </p:ext>
             </p:extLst>
           </p:nvPr>
@@ -9122,10 +9133,10 @@
           <p:cNvPr id="43" name="Rectangle 42">
             <a:extLst>
               <a:ext uri="{FF2B5EF4-FFF2-40B4-BE49-F238E27FC236}">
-                <a16:creationId xmlns:a16="http://schemas.microsoft.com/office/drawing/2014/main" xmlns="" id="{1BD2C934-710E-4E0E-9ED4-03F07E019205}"/>
+                <a16:creationId xmlns:a16="http://schemas.microsoft.com/office/drawing/2014/main" id="{1BD2C934-710E-4E0E-9ED4-03F07E019205}"/>
               </a:ext>
               <a:ext uri="{C183D7F6-B498-43B3-948B-1728B52AA6E4}">
-                <adec:decorative xmlns:adec="http://schemas.microsoft.com/office/drawing/2017/decorative" xmlns="" val="1"/>
+                <adec:decorative xmlns:adec="http://schemas.microsoft.com/office/drawing/2017/decorative" val="1"/>
               </a:ext>
             </a:extLst>
           </p:cNvPr>
@@ -9135,7 +9146,7 @@
           <p:nvPr>
             <p:extLst>
               <p:ext uri="{386F3935-93C4-4BCD-93E2-E3B085C9AB24}">
-                <p16:designElem xmlns:p16="http://schemas.microsoft.com/office/powerpoint/2015/main" xmlns="" val="1"/>
+                <p16:designElem xmlns:p16="http://schemas.microsoft.com/office/powerpoint/2015/main" val="1"/>
               </p:ext>
             </p:extLst>
           </p:nvPr>
@@ -9196,7 +9207,7 @@
           <p:cNvPr id="2" name="Title 1">
             <a:extLst>
               <a:ext uri="{FF2B5EF4-FFF2-40B4-BE49-F238E27FC236}">
-                <a16:creationId xmlns:a16="http://schemas.microsoft.com/office/drawing/2014/main" xmlns="" id="{BAF48F60-BA92-C874-30CC-5ED58A820747}"/>
+                <a16:creationId xmlns:a16="http://schemas.microsoft.com/office/drawing/2014/main" id="{BAF48F60-BA92-C874-30CC-5ED58A820747}"/>
               </a:ext>
             </a:extLst>
           </p:cNvPr>
@@ -9236,10 +9247,10 @@
           <p:cNvPr id="45" name="Straight Connector 44">
             <a:extLst>
               <a:ext uri="{FF2B5EF4-FFF2-40B4-BE49-F238E27FC236}">
-                <a16:creationId xmlns:a16="http://schemas.microsoft.com/office/drawing/2014/main" xmlns="" id="{0AD0F4F3-8F5C-421F-9FC1-DB3ED0BF61DF}"/>
+                <a16:creationId xmlns:a16="http://schemas.microsoft.com/office/drawing/2014/main" id="{0AD0F4F3-8F5C-421F-9FC1-DB3ED0BF61DF}"/>
               </a:ext>
               <a:ext uri="{C183D7F6-B498-43B3-948B-1728B52AA6E4}">
-                <adec:decorative xmlns:adec="http://schemas.microsoft.com/office/drawing/2017/decorative" xmlns="" val="1"/>
+                <adec:decorative xmlns:adec="http://schemas.microsoft.com/office/drawing/2017/decorative" val="1"/>
               </a:ext>
             </a:extLst>
           </p:cNvPr>
@@ -9249,7 +9260,7 @@
           <p:nvPr>
             <p:extLst>
               <p:ext uri="{386F3935-93C4-4BCD-93E2-E3B085C9AB24}">
-                <p16:designElem xmlns:p16="http://schemas.microsoft.com/office/powerpoint/2015/main" xmlns="" val="1"/>
+                <p16:designElem xmlns:p16="http://schemas.microsoft.com/office/powerpoint/2015/main" val="1"/>
               </p:ext>
             </p:extLst>
           </p:nvPr>
@@ -9284,7 +9295,7 @@
           <p:cNvPr id="7" name="Picture 6">
             <a:extLst>
               <a:ext uri="{FF2B5EF4-FFF2-40B4-BE49-F238E27FC236}">
-                <a16:creationId xmlns:a16="http://schemas.microsoft.com/office/drawing/2014/main" xmlns="" id="{234C8A63-DED3-546C-6BEE-CEFFDC8E281B}"/>
+                <a16:creationId xmlns:a16="http://schemas.microsoft.com/office/drawing/2014/main" id="{234C8A63-DED3-546C-6BEE-CEFFDC8E281B}"/>
               </a:ext>
             </a:extLst>
           </p:cNvPr>
@@ -9314,7 +9325,7 @@
           <p:cNvPr id="5" name="Picture 4">
             <a:extLst>
               <a:ext uri="{FF2B5EF4-FFF2-40B4-BE49-F238E27FC236}">
-                <a16:creationId xmlns:a16="http://schemas.microsoft.com/office/drawing/2014/main" xmlns="" id="{468886C1-6620-95E9-B1BE-EABD49FF3267}"/>
+                <a16:creationId xmlns:a16="http://schemas.microsoft.com/office/drawing/2014/main" id="{468886C1-6620-95E9-B1BE-EABD49FF3267}"/>
               </a:ext>
             </a:extLst>
           </p:cNvPr>
@@ -9344,10 +9355,10 @@
           <p:cNvPr id="47" name="Picture 46">
             <a:extLst>
               <a:ext uri="{FF2B5EF4-FFF2-40B4-BE49-F238E27FC236}">
-                <a16:creationId xmlns:a16="http://schemas.microsoft.com/office/drawing/2014/main" xmlns="" id="{B0A40572-62E5-460B-AD24-B6628527ACB1}"/>
+                <a16:creationId xmlns:a16="http://schemas.microsoft.com/office/drawing/2014/main" id="{B0A40572-62E5-460B-AD24-B6628527ACB1}"/>
               </a:ext>
               <a:ext uri="{C183D7F6-B498-43B3-948B-1728B52AA6E4}">
-                <adec:decorative xmlns:adec="http://schemas.microsoft.com/office/drawing/2017/decorative" xmlns="" val="1"/>
+                <adec:decorative xmlns:adec="http://schemas.microsoft.com/office/drawing/2017/decorative" val="1"/>
               </a:ext>
             </a:extLst>
           </p:cNvPr>
@@ -9357,7 +9368,7 @@
           <p:nvPr>
             <p:extLst>
               <p:ext uri="{386F3935-93C4-4BCD-93E2-E3B085C9AB24}">
-                <p16:designElem xmlns:p16="http://schemas.microsoft.com/office/powerpoint/2015/main" xmlns="" val="1"/>
+                <p16:designElem xmlns:p16="http://schemas.microsoft.com/office/powerpoint/2015/main" val="1"/>
               </p:ext>
             </p:extLst>
           </p:nvPr>
@@ -9366,7 +9377,7 @@
           <a:blip r:embed="rId2">
             <a:extLst>
               <a:ext uri="{28A0092B-C50C-407E-A947-70E740481C1C}">
-                <a14:useLocalDpi xmlns:a14="http://schemas.microsoft.com/office/drawing/2010/main" xmlns="" val="0"/>
+                <a14:useLocalDpi xmlns:a14="http://schemas.microsoft.com/office/drawing/2010/main" val="0"/>
               </a:ext>
             </a:extLst>
           </a:blip>
@@ -9388,10 +9399,10 @@
           <p:cNvPr id="49" name="Straight Connector 48">
             <a:extLst>
               <a:ext uri="{FF2B5EF4-FFF2-40B4-BE49-F238E27FC236}">
-                <a16:creationId xmlns:a16="http://schemas.microsoft.com/office/drawing/2014/main" xmlns="" id="{F1D872D4-D7E5-4CD8-9DAC-2BC612F08E69}"/>
+                <a16:creationId xmlns:a16="http://schemas.microsoft.com/office/drawing/2014/main" id="{F1D872D4-D7E5-4CD8-9DAC-2BC612F08E69}"/>
               </a:ext>
               <a:ext uri="{C183D7F6-B498-43B3-948B-1728B52AA6E4}">
-                <adec:decorative xmlns:adec="http://schemas.microsoft.com/office/drawing/2017/decorative" xmlns="" val="1"/>
+                <adec:decorative xmlns:adec="http://schemas.microsoft.com/office/drawing/2017/decorative" val="1"/>
               </a:ext>
             </a:extLst>
           </p:cNvPr>
@@ -9401,7 +9412,7 @@
           <p:nvPr>
             <p:extLst>
               <p:ext uri="{386F3935-93C4-4BCD-93E2-E3B085C9AB24}">
-                <p16:designElem xmlns:p16="http://schemas.microsoft.com/office/powerpoint/2015/main" xmlns="" val="1"/>
+                <p16:designElem xmlns:p16="http://schemas.microsoft.com/office/powerpoint/2015/main" val="1"/>
               </p:ext>
             </p:extLst>
           </p:nvPr>
@@ -9440,7 +9451,7 @@
     </p:spTree>
     <p:extLst>
       <p:ext uri="{BB962C8B-B14F-4D97-AF65-F5344CB8AC3E}">
-        <p14:creationId xmlns:p14="http://schemas.microsoft.com/office/powerpoint/2010/main" xmlns="" val="858810309"/>
+        <p14:creationId xmlns:p14="http://schemas.microsoft.com/office/powerpoint/2010/main" val="858810309"/>
       </p:ext>
     </p:extLst>
   </p:cSld>
@@ -9490,10 +9501,9 @@
           <a:lstStyle/>
           <a:p>
             <a:r>
-              <a:rPr lang="hu-HU" sz="3200" dirty="0" smtClean="0"/>
+              <a:rPr lang="hu-HU" sz="3200" dirty="0"/>
               <a:t>Czeitner András - management</a:t>
             </a:r>
-            <a:endParaRPr lang="hu-HU" sz="3200" dirty="0"/>
           </a:p>
         </p:txBody>
       </p:sp>
@@ -9623,11 +9633,11 @@
           <a:lstStyle/>
           <a:p>
             <a:r>
-              <a:rPr lang="hu-HU" dirty="0" smtClean="0"/>
+              <a:rPr lang="hu-HU" dirty="0"/>
               <a:t>Czeitner András - </a:t>
             </a:r>
             <a:r>
-              <a:rPr lang="hu-HU" dirty="0" err="1" smtClean="0"/>
+              <a:rPr lang="hu-HU" dirty="0" err="1"/>
               <a:t>Git</a:t>
             </a:r>
             <a:endParaRPr lang="hu-HU" dirty="0"/>
@@ -9730,7 +9740,7 @@
           <p:cNvPr id="2" name="Cím 1">
             <a:extLst>
               <a:ext uri="{FF2B5EF4-FFF2-40B4-BE49-F238E27FC236}">
-                <a16:creationId xmlns:a16="http://schemas.microsoft.com/office/drawing/2014/main" xmlns="" id="{CCCA6EE2-06DB-5C6F-DE67-88982F94B64B}"/>
+                <a16:creationId xmlns:a16="http://schemas.microsoft.com/office/drawing/2014/main" id="{CCCA6EE2-06DB-5C6F-DE67-88982F94B64B}"/>
               </a:ext>
             </a:extLst>
           </p:cNvPr>
@@ -9760,7 +9770,7 @@
           <p:cNvPr id="3" name="Tartalom helye 2">
             <a:extLst>
               <a:ext uri="{FF2B5EF4-FFF2-40B4-BE49-F238E27FC236}">
-                <a16:creationId xmlns:a16="http://schemas.microsoft.com/office/drawing/2014/main" xmlns="" id="{120DEFDA-C5D7-B11A-C2EA-BD5FB711AF5F}"/>
+                <a16:creationId xmlns:a16="http://schemas.microsoft.com/office/drawing/2014/main" id="{120DEFDA-C5D7-B11A-C2EA-BD5FB711AF5F}"/>
               </a:ext>
             </a:extLst>
           </p:cNvPr>
@@ -9793,7 +9803,7 @@
           <p:cNvPr id="7" name="Kép 6">
             <a:extLst>
               <a:ext uri="{FF2B5EF4-FFF2-40B4-BE49-F238E27FC236}">
-                <a16:creationId xmlns:a16="http://schemas.microsoft.com/office/drawing/2014/main" xmlns="" id="{27EF9704-8E56-4E28-96D9-C00498099B67}"/>
+                <a16:creationId xmlns:a16="http://schemas.microsoft.com/office/drawing/2014/main" id="{27EF9704-8E56-4E28-96D9-C00498099B67}"/>
               </a:ext>
             </a:extLst>
           </p:cNvPr>
@@ -9823,7 +9833,7 @@
           <p:cNvPr id="11" name="Kép 10">
             <a:extLst>
               <a:ext uri="{FF2B5EF4-FFF2-40B4-BE49-F238E27FC236}">
-                <a16:creationId xmlns:a16="http://schemas.microsoft.com/office/drawing/2014/main" xmlns="" id="{2E3E1D1A-044A-2591-10EC-F3EE8AB6A1D8}"/>
+                <a16:creationId xmlns:a16="http://schemas.microsoft.com/office/drawing/2014/main" id="{2E3E1D1A-044A-2591-10EC-F3EE8AB6A1D8}"/>
               </a:ext>
             </a:extLst>
           </p:cNvPr>
@@ -9853,7 +9863,7 @@
           <p:cNvPr id="15" name="Kép 14">
             <a:extLst>
               <a:ext uri="{FF2B5EF4-FFF2-40B4-BE49-F238E27FC236}">
-                <a16:creationId xmlns:a16="http://schemas.microsoft.com/office/drawing/2014/main" xmlns="" id="{9FDDA2FF-10DF-3525-70F9-BE2E7A6BFD10}"/>
+                <a16:creationId xmlns:a16="http://schemas.microsoft.com/office/drawing/2014/main" id="{9FDDA2FF-10DF-3525-70F9-BE2E7A6BFD10}"/>
               </a:ext>
             </a:extLst>
           </p:cNvPr>
@@ -9883,7 +9893,7 @@
           <p:cNvPr id="17" name="Kép 16">
             <a:extLst>
               <a:ext uri="{FF2B5EF4-FFF2-40B4-BE49-F238E27FC236}">
-                <a16:creationId xmlns:a16="http://schemas.microsoft.com/office/drawing/2014/main" xmlns="" id="{1A29D998-57C8-61C9-B318-0FADA21ABE44}"/>
+                <a16:creationId xmlns:a16="http://schemas.microsoft.com/office/drawing/2014/main" id="{1A29D998-57C8-61C9-B318-0FADA21ABE44}"/>
               </a:ext>
             </a:extLst>
           </p:cNvPr>
@@ -9913,7 +9923,7 @@
           <p:cNvPr id="19" name="Kép 18">
             <a:extLst>
               <a:ext uri="{FF2B5EF4-FFF2-40B4-BE49-F238E27FC236}">
-                <a16:creationId xmlns:a16="http://schemas.microsoft.com/office/drawing/2014/main" xmlns="" id="{8594A7E1-A06A-9333-7C7D-737E36876C93}"/>
+                <a16:creationId xmlns:a16="http://schemas.microsoft.com/office/drawing/2014/main" id="{8594A7E1-A06A-9333-7C7D-737E36876C93}"/>
               </a:ext>
             </a:extLst>
           </p:cNvPr>
@@ -9943,7 +9953,7 @@
           <p:cNvPr id="21" name="Kép 20">
             <a:extLst>
               <a:ext uri="{FF2B5EF4-FFF2-40B4-BE49-F238E27FC236}">
-                <a16:creationId xmlns:a16="http://schemas.microsoft.com/office/drawing/2014/main" xmlns="" id="{4BF48EDB-45AE-C7EC-0F1C-10A0E035DA89}"/>
+                <a16:creationId xmlns:a16="http://schemas.microsoft.com/office/drawing/2014/main" id="{4BF48EDB-45AE-C7EC-0F1C-10A0E035DA89}"/>
               </a:ext>
             </a:extLst>
           </p:cNvPr>
@@ -9973,7 +9983,7 @@
           <p:cNvPr id="23" name="Kép 22">
             <a:extLst>
               <a:ext uri="{FF2B5EF4-FFF2-40B4-BE49-F238E27FC236}">
-                <a16:creationId xmlns:a16="http://schemas.microsoft.com/office/drawing/2014/main" xmlns="" id="{14E70A7E-76E8-5D09-7108-FB306C9CD253}"/>
+                <a16:creationId xmlns:a16="http://schemas.microsoft.com/office/drawing/2014/main" id="{14E70A7E-76E8-5D09-7108-FB306C9CD253}"/>
               </a:ext>
             </a:extLst>
           </p:cNvPr>
@@ -10001,7 +10011,7 @@
     </p:spTree>
     <p:extLst>
       <p:ext uri="{BB962C8B-B14F-4D97-AF65-F5344CB8AC3E}">
-        <p14:creationId xmlns:p14="http://schemas.microsoft.com/office/powerpoint/2010/main" xmlns="" val="2913653460"/>
+        <p14:creationId xmlns:p14="http://schemas.microsoft.com/office/powerpoint/2010/main" val="2913653460"/>
       </p:ext>
     </p:extLst>
   </p:cSld>
@@ -10669,6 +10679,30 @@
 <file path=ppt/slides/slide20.xml><?xml version="1.0" encoding="utf-8"?>
 <p:sld xmlns:a="http://schemas.openxmlformats.org/drawingml/2006/main" xmlns:r="http://schemas.openxmlformats.org/officeDocument/2006/relationships" xmlns:p="http://schemas.openxmlformats.org/presentationml/2006/main">
   <p:cSld>
+    <p:bg>
+      <p:bgPr>
+        <a:gradFill rotWithShape="1">
+          <a:gsLst>
+            <a:gs pos="0">
+              <a:schemeClr val="bg2">
+                <a:tint val="94000"/>
+                <a:satMod val="80000"/>
+                <a:lumMod val="106000"/>
+              </a:schemeClr>
+            </a:gs>
+            <a:gs pos="100000">
+              <a:schemeClr val="bg2">
+                <a:shade val="80000"/>
+              </a:schemeClr>
+            </a:gs>
+          </a:gsLst>
+          <a:path path="circle">
+            <a:fillToRect l="43000" r="43000" b="100000"/>
+          </a:path>
+        </a:gradFill>
+        <a:effectLst/>
+      </p:bgPr>
+    </p:bg>
     <p:spTree>
       <p:nvGrpSpPr>
         <p:cNvPr id="1" name=""/>
@@ -10683,30 +10717,271 @@
           <a:chExt cx="0" cy="0"/>
         </a:xfrm>
       </p:grpSpPr>
+      <p:sp>
+        <p:nvSpPr>
+          <p:cNvPr id="8" name="Rectangle 7">
+            <a:extLst>
+              <a:ext uri="{FF2B5EF4-FFF2-40B4-BE49-F238E27FC236}">
+                <a16:creationId xmlns:a16="http://schemas.microsoft.com/office/drawing/2014/main" id="{CDDE5CDF-1512-4CDA-B956-23D223F8DE44}"/>
+              </a:ext>
+              <a:ext uri="{C183D7F6-B498-43B3-948B-1728B52AA6E4}">
+                <adec:decorative xmlns:adec="http://schemas.microsoft.com/office/drawing/2017/decorative" val="1"/>
+              </a:ext>
+            </a:extLst>
+          </p:cNvPr>
+          <p:cNvSpPr>
+            <a:spLocks noGrp="1" noRot="1" noChangeAspect="1" noMove="1" noResize="1" noEditPoints="1" noAdjustHandles="1" noChangeArrowheads="1" noChangeShapeType="1" noTextEdit="1"/>
+          </p:cNvSpPr>
+          <p:nvPr>
+            <p:extLst>
+              <p:ext uri="{386F3935-93C4-4BCD-93E2-E3B085C9AB24}">
+                <p16:designElem xmlns:p16="http://schemas.microsoft.com/office/powerpoint/2015/main" val="1"/>
+              </p:ext>
+            </p:extLst>
+          </p:nvPr>
+        </p:nvSpPr>
+        <p:spPr>
+          <a:xfrm>
+            <a:off x="0" y="2019476"/>
+            <a:ext cx="12192000" cy="4105941"/>
+          </a:xfrm>
+          <a:prstGeom prst="rect">
+            <a:avLst/>
+          </a:prstGeom>
+          <a:gradFill flip="none" rotWithShape="1">
+            <a:gsLst>
+              <a:gs pos="0">
+                <a:schemeClr val="bg2">
+                  <a:alpha val="0"/>
+                </a:schemeClr>
+              </a:gs>
+              <a:gs pos="100000">
+                <a:schemeClr val="bg2"/>
+              </a:gs>
+            </a:gsLst>
+            <a:lin ang="5400000" scaled="0"/>
+            <a:tileRect/>
+          </a:gradFill>
+          <a:ln>
+            <a:noFill/>
+          </a:ln>
+        </p:spPr>
+        <p:style>
+          <a:lnRef idx="2">
+            <a:schemeClr val="accent1">
+              <a:shade val="50000"/>
+            </a:schemeClr>
+          </a:lnRef>
+          <a:fillRef idx="1">
+            <a:schemeClr val="accent1"/>
+          </a:fillRef>
+          <a:effectRef idx="0">
+            <a:schemeClr val="accent1"/>
+          </a:effectRef>
+          <a:fontRef idx="minor">
+            <a:schemeClr val="lt1"/>
+          </a:fontRef>
+        </p:style>
+        <p:txBody>
+          <a:bodyPr/>
+          <a:lstStyle/>
+          <a:p>
+            <a:endParaRPr lang="hu-HU"/>
+          </a:p>
+        </p:txBody>
+      </p:sp>
       <p:pic>
         <p:nvPicPr>
-          <p:cNvPr id="4" name="Picture 10" descr="https://cdn.discordapp.com/attachments/812059683393110017/1439313542774919218/image.png?ex=691a10b1&amp;is=6918bf31&amp;hm=721f3fdc6ef94d17980aceee8b318a449fb0a4c497717cb7244132cb0cd8deb9&amp;"/>
+          <p:cNvPr id="10" name="Picture 9">
+            <a:extLst>
+              <a:ext uri="{FF2B5EF4-FFF2-40B4-BE49-F238E27FC236}">
+                <a16:creationId xmlns:a16="http://schemas.microsoft.com/office/drawing/2014/main" id="{B029D7D8-5A6B-4C76-94C8-15798C6C5ADB}"/>
+              </a:ext>
+              <a:ext uri="{C183D7F6-B498-43B3-948B-1728B52AA6E4}">
+                <adec:decorative xmlns:adec="http://schemas.microsoft.com/office/drawing/2017/decorative" val="1"/>
+              </a:ext>
+            </a:extLst>
+          </p:cNvPr>
           <p:cNvPicPr>
-            <a:picLocks noChangeAspect="1" noChangeArrowheads="1"/>
+            <a:picLocks noGrp="1" noRot="1" noChangeAspect="1" noMove="1" noResize="1" noEditPoints="1" noAdjustHandles="1" noChangeArrowheads="1" noChangeShapeType="1" noCrop="1"/>
+          </p:cNvPicPr>
+          <p:nvPr>
+            <p:extLst>
+              <p:ext uri="{386F3935-93C4-4BCD-93E2-E3B085C9AB24}">
+                <p16:designElem xmlns:p16="http://schemas.microsoft.com/office/powerpoint/2015/main" val="1"/>
+              </p:ext>
+            </p:extLst>
+          </p:nvPr>
+        </p:nvPicPr>
+        <p:blipFill rotWithShape="1">
+          <a:blip r:embed="rId2">
+            <a:extLst>
+              <a:ext uri="{28A0092B-C50C-407E-A947-70E740481C1C}">
+                <a14:useLocalDpi xmlns:a14="http://schemas.microsoft.com/office/drawing/2010/main" val="0"/>
+              </a:ext>
+            </a:extLst>
+          </a:blip>
+          <a:srcRect t="1538" b="-1538"/>
+          <a:stretch/>
+        </p:blipFill>
+        <p:spPr bwMode="black">
+          <a:xfrm>
+            <a:off x="0" y="6126480"/>
+            <a:ext cx="12192000" cy="742950"/>
+          </a:xfrm>
+          <a:prstGeom prst="rect">
+            <a:avLst/>
+          </a:prstGeom>
+        </p:spPr>
+      </p:pic>
+      <p:cxnSp>
+        <p:nvCxnSpPr>
+          <p:cNvPr id="12" name="Straight Connector 11">
+            <a:extLst>
+              <a:ext uri="{FF2B5EF4-FFF2-40B4-BE49-F238E27FC236}">
+                <a16:creationId xmlns:a16="http://schemas.microsoft.com/office/drawing/2014/main" id="{A5C9319C-E20D-4884-952F-60B6A58C3E34}"/>
+              </a:ext>
+              <a:ext uri="{C183D7F6-B498-43B3-948B-1728B52AA6E4}">
+                <adec:decorative xmlns:adec="http://schemas.microsoft.com/office/drawing/2017/decorative" val="1"/>
+              </a:ext>
+            </a:extLst>
+          </p:cNvPr>
+          <p:cNvCxnSpPr>
+            <a:cxnSpLocks noGrp="1" noRot="1" noChangeAspect="1" noMove="1" noResize="1" noEditPoints="1" noAdjustHandles="1" noChangeArrowheads="1" noChangeShapeType="1"/>
+          </p:cNvCxnSpPr>
+          <p:nvPr>
+            <p:extLst>
+              <p:ext uri="{386F3935-93C4-4BCD-93E2-E3B085C9AB24}">
+                <p16:designElem xmlns:p16="http://schemas.microsoft.com/office/powerpoint/2015/main" val="1"/>
+              </p:ext>
+            </p:extLst>
+          </p:nvPr>
+        </p:nvCxnSpPr>
+        <p:spPr>
+          <a:xfrm>
+            <a:off x="0" y="6128413"/>
+            <a:ext cx="12192000" cy="0"/>
+          </a:xfrm>
+          <a:prstGeom prst="line">
+            <a:avLst/>
+          </a:prstGeom>
+          <a:ln w="12700">
+            <a:solidFill>
+              <a:srgbClr val="000001">
+                <a:alpha val="20000"/>
+              </a:srgbClr>
+            </a:solidFill>
+          </a:ln>
+        </p:spPr>
+        <p:style>
+          <a:lnRef idx="1">
+            <a:schemeClr val="accent1"/>
+          </a:lnRef>
+          <a:fillRef idx="0">
+            <a:schemeClr val="accent1"/>
+          </a:fillRef>
+          <a:effectRef idx="0">
+            <a:schemeClr val="accent1"/>
+          </a:effectRef>
+          <a:fontRef idx="minor">
+            <a:schemeClr val="tx1"/>
+          </a:fontRef>
+        </p:style>
+      </p:cxnSp>
+      <p:sp useBgFill="1">
+        <p:nvSpPr>
+          <p:cNvPr id="14" name="Rectangle 13">
+            <a:extLst>
+              <a:ext uri="{FF2B5EF4-FFF2-40B4-BE49-F238E27FC236}">
+                <a16:creationId xmlns:a16="http://schemas.microsoft.com/office/drawing/2014/main" id="{62C9703D-C8F9-44AD-A7C0-C2F3871F8C1B}"/>
+              </a:ext>
+              <a:ext uri="{C183D7F6-B498-43B3-948B-1728B52AA6E4}">
+                <adec:decorative xmlns:adec="http://schemas.microsoft.com/office/drawing/2017/decorative" val="1"/>
+              </a:ext>
+            </a:extLst>
+          </p:cNvPr>
+          <p:cNvSpPr>
+            <a:spLocks noGrp="1" noRot="1" noChangeAspect="1" noMove="1" noResize="1" noEditPoints="1" noAdjustHandles="1" noChangeArrowheads="1" noChangeShapeType="1" noTextEdit="1"/>
+          </p:cNvSpPr>
+          <p:nvPr>
+            <p:extLst>
+              <p:ext uri="{386F3935-93C4-4BCD-93E2-E3B085C9AB24}">
+                <p16:designElem xmlns:p16="http://schemas.microsoft.com/office/powerpoint/2015/main" val="1"/>
+              </p:ext>
+            </p:extLst>
+          </p:nvPr>
+        </p:nvSpPr>
+        <p:spPr>
+          <a:xfrm>
+            <a:off x="0" y="0"/>
+            <a:ext cx="12192000" cy="6160168"/>
+          </a:xfrm>
+          <a:prstGeom prst="rect">
+            <a:avLst/>
+          </a:prstGeom>
+          <a:ln>
+            <a:noFill/>
+          </a:ln>
+        </p:spPr>
+        <p:style>
+          <a:lnRef idx="2">
+            <a:schemeClr val="accent1">
+              <a:shade val="50000"/>
+            </a:schemeClr>
+          </a:lnRef>
+          <a:fillRef idx="1">
+            <a:schemeClr val="accent1"/>
+          </a:fillRef>
+          <a:effectRef idx="0">
+            <a:schemeClr val="accent1"/>
+          </a:effectRef>
+          <a:fontRef idx="minor">
+            <a:schemeClr val="lt1"/>
+          </a:fontRef>
+        </p:style>
+        <p:txBody>
+          <a:bodyPr rtlCol="0" anchor="ctr"/>
+          <a:lstStyle/>
+          <a:p>
+            <a:pPr algn="ctr"/>
+            <a:endParaRPr lang="en-US"/>
+          </a:p>
+        </p:txBody>
+      </p:sp>
+      <p:pic>
+        <p:nvPicPr>
+          <p:cNvPr id="3" name="Kép 2" descr="A képen szöveg, képernyőkép, menü látható&#10;&#10;Előfordulhat, hogy az AI által létrehozott tartalom helytelen.">
+            <a:extLst>
+              <a:ext uri="{FF2B5EF4-FFF2-40B4-BE49-F238E27FC236}">
+                <a16:creationId xmlns:a16="http://schemas.microsoft.com/office/drawing/2014/main" id="{C1C22A62-A598-64EA-AD0C-853A69A68E81}"/>
+              </a:ext>
+            </a:extLst>
+          </p:cNvPr>
+          <p:cNvPicPr>
+            <a:picLocks noChangeAspect="1"/>
           </p:cNvPicPr>
           <p:nvPr/>
         </p:nvPicPr>
         <p:blipFill>
-          <a:blip r:embed="rId2"/>
-          <a:srcRect/>
+          <a:blip r:embed="rId3">
+            <a:extLst>
+              <a:ext uri="{28A0092B-C50C-407E-A947-70E740481C1C}">
+                <a14:useLocalDpi xmlns:a14="http://schemas.microsoft.com/office/drawing/2010/main" val="0"/>
+              </a:ext>
+            </a:extLst>
+          </a:blip>
           <a:stretch>
             <a:fillRect/>
           </a:stretch>
         </p:blipFill>
-        <p:spPr bwMode="auto">
-          <a:xfrm>
-            <a:off x="1000964" y="984936"/>
-            <a:ext cx="10365340" cy="4553221"/>
+        <p:spPr>
+          <a:xfrm>
+            <a:off x="1410722" y="737347"/>
+            <a:ext cx="9370556" cy="5388070"/>
           </a:xfrm>
           <a:prstGeom prst="rect">
             <a:avLst/>
           </a:prstGeom>
-          <a:noFill/>
         </p:spPr>
       </p:pic>
     </p:spTree>
@@ -10757,10 +11032,9 @@
           <a:lstStyle/>
           <a:p>
             <a:r>
-              <a:rPr lang="hu-HU" dirty="0" smtClean="0"/>
+              <a:rPr lang="hu-HU" dirty="0"/>
               <a:t>Czeitner András - Dokumentáció</a:t>
             </a:r>
-            <a:endParaRPr lang="hu-HU" dirty="0"/>
           </a:p>
         </p:txBody>
       </p:sp>
@@ -10920,10 +11194,9 @@
           <a:lstStyle/>
           <a:p>
             <a:r>
-              <a:rPr lang="hu-HU" dirty="0" smtClean="0"/>
+              <a:rPr lang="hu-HU" dirty="0"/>
               <a:t>Czeitner András - fejlesztés</a:t>
             </a:r>
-            <a:endParaRPr lang="hu-HU" dirty="0"/>
           </a:p>
         </p:txBody>
       </p:sp>
@@ -10943,7 +11216,7 @@
         </p:blipFill>
         <p:spPr>
           <a:xfrm>
-            <a:off x="1981200" y="1970194"/>
+            <a:off x="1866900" y="1950738"/>
             <a:ext cx="8458200" cy="4575458"/>
           </a:xfrm>
           <a:prstGeom prst="rect">
@@ -10999,31 +11272,42 @@
           <a:lstStyle/>
           <a:p>
             <a:r>
-              <a:rPr lang="hu-HU" dirty="0" smtClean="0"/>
+              <a:rPr lang="hu-HU" dirty="0"/>
               <a:t>Czeitner András - fejlesztés</a:t>
             </a:r>
-            <a:endParaRPr lang="hu-HU" dirty="0"/>
           </a:p>
         </p:txBody>
       </p:sp>
       <p:pic>
         <p:nvPicPr>
-          <p:cNvPr id="4" name="Kép 3" descr="2.png"/>
+          <p:cNvPr id="9" name="Kép 8" descr="A képen szöveg, képernyőkép, szoftver, Számítógépes ikon látható&#10;&#10;Előfordulhat, hogy az AI által létrehozott tartalom helytelen.">
+            <a:extLst>
+              <a:ext uri="{FF2B5EF4-FFF2-40B4-BE49-F238E27FC236}">
+                <a16:creationId xmlns:a16="http://schemas.microsoft.com/office/drawing/2014/main" id="{48B7EA85-C43E-31A2-8BE8-68363AEF182D}"/>
+              </a:ext>
+            </a:extLst>
+          </p:cNvPr>
           <p:cNvPicPr>
             <a:picLocks noChangeAspect="1"/>
           </p:cNvPicPr>
           <p:nvPr/>
         </p:nvPicPr>
         <p:blipFill>
-          <a:blip r:embed="rId2"/>
+          <a:blip r:embed="rId2">
+            <a:extLst>
+              <a:ext uri="{28A0092B-C50C-407E-A947-70E740481C1C}">
+                <a14:useLocalDpi xmlns:a14="http://schemas.microsoft.com/office/drawing/2010/main" val="0"/>
+              </a:ext>
+            </a:extLst>
+          </a:blip>
           <a:stretch>
             <a:fillRect/>
           </a:stretch>
         </p:blipFill>
         <p:spPr>
           <a:xfrm>
-            <a:off x="1933574" y="2018504"/>
-            <a:ext cx="8477251" cy="4591845"/>
+            <a:off x="1884672" y="1954720"/>
+            <a:ext cx="8422656" cy="4562272"/>
           </a:xfrm>
           <a:prstGeom prst="rect">
             <a:avLst/>
@@ -11096,7 +11380,7 @@
               <a:defRPr/>
             </a:pPr>
             <a:r>
-              <a:rPr kumimoji="0" lang="hu-HU" sz="3200" b="0" i="0" u="none" strike="noStrike" kern="1200" cap="all" spc="0" normalizeH="0" baseline="0" noProof="0" dirty="0" smtClean="0">
+              <a:rPr kumimoji="0" lang="hu-HU" sz="3200" b="0" i="0" u="none" strike="noStrike" kern="1200" cap="all" spc="0" normalizeH="0" baseline="0" noProof="0" dirty="0">
                 <a:ln>
                   <a:noFill/>
                 </a:ln>
@@ -11112,20 +11396,6 @@
               </a:rPr>
               <a:t>Czeitner András - Tesztelés</a:t>
             </a:r>
-            <a:endParaRPr kumimoji="0" lang="hu-HU" sz="3200" b="0" i="0" u="none" strike="noStrike" kern="1200" cap="all" spc="0" normalizeH="0" baseline="0" noProof="0" dirty="0">
-              <a:ln>
-                <a:noFill/>
-              </a:ln>
-              <a:solidFill>
-                <a:schemeClr val="tx1"/>
-              </a:solidFill>
-              <a:effectLst/>
-              <a:uLnTx/>
-              <a:uFillTx/>
-              <a:latin typeface="+mj-lt"/>
-              <a:ea typeface="+mj-ea"/>
-              <a:cs typeface="+mj-cs"/>
-            </a:endParaRPr>
           </a:p>
         </p:txBody>
       </p:sp>
@@ -11185,7 +11455,7 @@
           <p:cNvPr id="2" name="Cím 1">
             <a:extLst>
               <a:ext uri="{FF2B5EF4-FFF2-40B4-BE49-F238E27FC236}">
-                <a16:creationId xmlns:a16="http://schemas.microsoft.com/office/drawing/2014/main" xmlns="" id="{5FDF651E-95C6-F9ED-7E3D-E593C9E1D218}"/>
+                <a16:creationId xmlns:a16="http://schemas.microsoft.com/office/drawing/2014/main" id="{5FDF651E-95C6-F9ED-7E3D-E593C9E1D218}"/>
               </a:ext>
             </a:extLst>
           </p:cNvPr>
@@ -11218,7 +11488,7 @@
           <p:cNvPr id="7" name="Kép 6">
             <a:extLst>
               <a:ext uri="{FF2B5EF4-FFF2-40B4-BE49-F238E27FC236}">
-                <a16:creationId xmlns:a16="http://schemas.microsoft.com/office/drawing/2014/main" xmlns="" id="{C2E531C9-CFFE-95F3-CB20-5D333CB1EEF9}"/>
+                <a16:creationId xmlns:a16="http://schemas.microsoft.com/office/drawing/2014/main" id="{C2E531C9-CFFE-95F3-CB20-5D333CB1EEF9}"/>
               </a:ext>
             </a:extLst>
           </p:cNvPr>
@@ -11248,7 +11518,7 @@
           <p:cNvPr id="9" name="Kép 8">
             <a:extLst>
               <a:ext uri="{FF2B5EF4-FFF2-40B4-BE49-F238E27FC236}">
-                <a16:creationId xmlns:a16="http://schemas.microsoft.com/office/drawing/2014/main" xmlns="" id="{AB2CA154-66E9-DE43-42C2-9E1C40C06D3D}"/>
+                <a16:creationId xmlns:a16="http://schemas.microsoft.com/office/drawing/2014/main" id="{AB2CA154-66E9-DE43-42C2-9E1C40C06D3D}"/>
               </a:ext>
             </a:extLst>
           </p:cNvPr>
@@ -11278,7 +11548,7 @@
           <p:cNvPr id="13" name="Kép 12">
             <a:extLst>
               <a:ext uri="{FF2B5EF4-FFF2-40B4-BE49-F238E27FC236}">
-                <a16:creationId xmlns:a16="http://schemas.microsoft.com/office/drawing/2014/main" xmlns="" id="{C66B2441-EA2E-CFBA-88E9-16A3FACE4A6F}"/>
+                <a16:creationId xmlns:a16="http://schemas.microsoft.com/office/drawing/2014/main" id="{C66B2441-EA2E-CFBA-88E9-16A3FACE4A6F}"/>
               </a:ext>
             </a:extLst>
           </p:cNvPr>
@@ -11308,7 +11578,7 @@
           <p:cNvPr id="15" name="Kép 14">
             <a:extLst>
               <a:ext uri="{FF2B5EF4-FFF2-40B4-BE49-F238E27FC236}">
-                <a16:creationId xmlns:a16="http://schemas.microsoft.com/office/drawing/2014/main" xmlns="" id="{33C624EB-6869-022C-0713-377C1FF1F93D}"/>
+                <a16:creationId xmlns:a16="http://schemas.microsoft.com/office/drawing/2014/main" id="{33C624EB-6869-022C-0713-377C1FF1F93D}"/>
               </a:ext>
             </a:extLst>
           </p:cNvPr>
@@ -11338,7 +11608,7 @@
           <p:cNvPr id="19" name="Kép 18">
             <a:extLst>
               <a:ext uri="{FF2B5EF4-FFF2-40B4-BE49-F238E27FC236}">
-                <a16:creationId xmlns:a16="http://schemas.microsoft.com/office/drawing/2014/main" xmlns="" id="{F33E6BB1-ED6C-389B-44B0-CEB31E7DA624}"/>
+                <a16:creationId xmlns:a16="http://schemas.microsoft.com/office/drawing/2014/main" id="{F33E6BB1-ED6C-389B-44B0-CEB31E7DA624}"/>
               </a:ext>
             </a:extLst>
           </p:cNvPr>
@@ -11368,7 +11638,7 @@
           <p:cNvPr id="21" name="Kép 20">
             <a:extLst>
               <a:ext uri="{FF2B5EF4-FFF2-40B4-BE49-F238E27FC236}">
-                <a16:creationId xmlns:a16="http://schemas.microsoft.com/office/drawing/2014/main" xmlns="" id="{559A1832-1C2F-A86C-7928-E56FB3681496}"/>
+                <a16:creationId xmlns:a16="http://schemas.microsoft.com/office/drawing/2014/main" id="{559A1832-1C2F-A86C-7928-E56FB3681496}"/>
               </a:ext>
             </a:extLst>
           </p:cNvPr>
@@ -11396,7 +11666,7 @@
     </p:spTree>
     <p:extLst>
       <p:ext uri="{BB962C8B-B14F-4D97-AF65-F5344CB8AC3E}">
-        <p14:creationId xmlns:p14="http://schemas.microsoft.com/office/powerpoint/2010/main" xmlns="" val="4268557178"/>
+        <p14:creationId xmlns:p14="http://schemas.microsoft.com/office/powerpoint/2010/main" val="4268557178"/>
       </p:ext>
     </p:extLst>
   </p:cSld>
@@ -11951,7 +12221,7 @@
         <p:cNvPr id="1" name="">
           <a:extLst>
             <a:ext uri="{FF2B5EF4-FFF2-40B4-BE49-F238E27FC236}">
-              <a16:creationId xmlns:a16="http://schemas.microsoft.com/office/drawing/2014/main" xmlns="" id="{E3015780-9757-D06C-EB84-20F310B80C99}"/>
+              <a16:creationId xmlns:a16="http://schemas.microsoft.com/office/drawing/2014/main" id="{E3015780-9757-D06C-EB84-20F310B80C99}"/>
             </a:ext>
           </a:extLst>
         </p:cNvPr>
@@ -11971,7 +12241,7 @@
           <p:cNvPr id="4" name="Kép 3">
             <a:extLst>
               <a:ext uri="{FF2B5EF4-FFF2-40B4-BE49-F238E27FC236}">
-                <a16:creationId xmlns:a16="http://schemas.microsoft.com/office/drawing/2014/main" xmlns="" id="{EAF2EC1B-0DBF-7B5B-E80C-601BC1B103F1}"/>
+                <a16:creationId xmlns:a16="http://schemas.microsoft.com/office/drawing/2014/main" id="{EAF2EC1B-0DBF-7B5B-E80C-601BC1B103F1}"/>
               </a:ext>
             </a:extLst>
           </p:cNvPr>
@@ -11999,7 +12269,7 @@
     </p:spTree>
     <p:extLst>
       <p:ext uri="{BB962C8B-B14F-4D97-AF65-F5344CB8AC3E}">
-        <p14:creationId xmlns:p14="http://schemas.microsoft.com/office/powerpoint/2010/main" xmlns="" val="1971315501"/>
+        <p14:creationId xmlns:p14="http://schemas.microsoft.com/office/powerpoint/2010/main" val="1971315501"/>
       </p:ext>
     </p:extLst>
   </p:cSld>
@@ -12158,7 +12428,7 @@
           <p:cNvPr id="2" name="Cím 1">
             <a:extLst>
               <a:ext uri="{FF2B5EF4-FFF2-40B4-BE49-F238E27FC236}">
-                <a16:creationId xmlns:a16="http://schemas.microsoft.com/office/drawing/2014/main" xmlns="" id="{6D7C5913-E755-24D3-ED0E-B0BD4D8D40CC}"/>
+                <a16:creationId xmlns:a16="http://schemas.microsoft.com/office/drawing/2014/main" id="{6D7C5913-E755-24D3-ED0E-B0BD4D8D40CC}"/>
               </a:ext>
             </a:extLst>
           </p:cNvPr>
@@ -12186,7 +12456,7 @@
           <p:cNvPr id="9" name="Kép 8">
             <a:extLst>
               <a:ext uri="{FF2B5EF4-FFF2-40B4-BE49-F238E27FC236}">
-                <a16:creationId xmlns:a16="http://schemas.microsoft.com/office/drawing/2014/main" xmlns="" id="{0A17DD4E-D398-7B13-D12D-81FBFB0F365D}"/>
+                <a16:creationId xmlns:a16="http://schemas.microsoft.com/office/drawing/2014/main" id="{0A17DD4E-D398-7B13-D12D-81FBFB0F365D}"/>
               </a:ext>
             </a:extLst>
           </p:cNvPr>
@@ -12216,7 +12486,7 @@
           <p:cNvPr id="11" name="Kép 10" descr="A képen diagram, vázlat, Műszaki rajz, Tervrajz látható&#10;&#10;Előfordulhat, hogy az AI által létrehozott tartalom helytelen.">
             <a:extLst>
               <a:ext uri="{FF2B5EF4-FFF2-40B4-BE49-F238E27FC236}">
-                <a16:creationId xmlns:a16="http://schemas.microsoft.com/office/drawing/2014/main" xmlns="" id="{D820F8E4-942C-5B29-932C-E33AD0D469F7}"/>
+                <a16:creationId xmlns:a16="http://schemas.microsoft.com/office/drawing/2014/main" id="{D820F8E4-942C-5B29-932C-E33AD0D469F7}"/>
               </a:ext>
             </a:extLst>
           </p:cNvPr>
@@ -12229,7 +12499,7 @@
           <a:blip r:embed="rId3">
             <a:extLst>
               <a:ext uri="{28A0092B-C50C-407E-A947-70E740481C1C}">
-                <a14:useLocalDpi xmlns:a14="http://schemas.microsoft.com/office/drawing/2010/main" xmlns="" val="0"/>
+                <a14:useLocalDpi xmlns:a14="http://schemas.microsoft.com/office/drawing/2010/main" val="0"/>
               </a:ext>
             </a:extLst>
           </a:blip>
@@ -12252,7 +12522,7 @@
           <p:cNvPr id="13" name="Kép 12">
             <a:extLst>
               <a:ext uri="{FF2B5EF4-FFF2-40B4-BE49-F238E27FC236}">
-                <a16:creationId xmlns:a16="http://schemas.microsoft.com/office/drawing/2014/main" xmlns="" id="{19745C17-69BF-2E47-C0A2-7554C8621921}"/>
+                <a16:creationId xmlns:a16="http://schemas.microsoft.com/office/drawing/2014/main" id="{19745C17-69BF-2E47-C0A2-7554C8621921}"/>
               </a:ext>
             </a:extLst>
           </p:cNvPr>
@@ -12280,7 +12550,7 @@
     </p:spTree>
     <p:extLst>
       <p:ext uri="{BB962C8B-B14F-4D97-AF65-F5344CB8AC3E}">
-        <p14:creationId xmlns:p14="http://schemas.microsoft.com/office/powerpoint/2010/main" xmlns="" val="2362346782"/>
+        <p14:creationId xmlns:p14="http://schemas.microsoft.com/office/powerpoint/2010/main" val="2362346782"/>
       </p:ext>
     </p:extLst>
   </p:cSld>
@@ -12603,7 +12873,7 @@
           <p:cNvPr id="2" name="Cím 1">
             <a:extLst>
               <a:ext uri="{FF2B5EF4-FFF2-40B4-BE49-F238E27FC236}">
-                <a16:creationId xmlns:a16="http://schemas.microsoft.com/office/drawing/2014/main" xmlns="" id="{36E3975F-341A-4037-8226-51ED45249D98}"/>
+                <a16:creationId xmlns:a16="http://schemas.microsoft.com/office/drawing/2014/main" id="{36E3975F-341A-4037-8226-51ED45249D98}"/>
               </a:ext>
             </a:extLst>
           </p:cNvPr>
@@ -12631,7 +12901,7 @@
           <p:cNvPr id="3" name="Tartalom helye 2">
             <a:extLst>
               <a:ext uri="{FF2B5EF4-FFF2-40B4-BE49-F238E27FC236}">
-                <a16:creationId xmlns:a16="http://schemas.microsoft.com/office/drawing/2014/main" xmlns="" id="{CA414179-0CF2-3378-F619-A3FE528B5B45}"/>
+                <a16:creationId xmlns:a16="http://schemas.microsoft.com/office/drawing/2014/main" id="{CA414179-0CF2-3378-F619-A3FE528B5B45}"/>
               </a:ext>
             </a:extLst>
           </p:cNvPr>
@@ -12734,7 +13004,7 @@
     </p:spTree>
     <p:extLst>
       <p:ext uri="{BB962C8B-B14F-4D97-AF65-F5344CB8AC3E}">
-        <p14:creationId xmlns:p14="http://schemas.microsoft.com/office/powerpoint/2010/main" xmlns="" val="1996424764"/>
+        <p14:creationId xmlns:p14="http://schemas.microsoft.com/office/powerpoint/2010/main" val="1996424764"/>
       </p:ext>
     </p:extLst>
   </p:cSld>
@@ -12769,7 +13039,7 @@
           <p:cNvPr id="9" name="Kép 8">
             <a:extLst>
               <a:ext uri="{FF2B5EF4-FFF2-40B4-BE49-F238E27FC236}">
-                <a16:creationId xmlns:a16="http://schemas.microsoft.com/office/drawing/2014/main" xmlns="" id="{8D4509A0-D2EA-207B-0C78-28D8E243CE44}"/>
+                <a16:creationId xmlns:a16="http://schemas.microsoft.com/office/drawing/2014/main" id="{8D4509A0-D2EA-207B-0C78-28D8E243CE44}"/>
               </a:ext>
             </a:extLst>
           </p:cNvPr>
@@ -12799,7 +13069,7 @@
           <p:cNvPr id="2" name="Cím 1">
             <a:extLst>
               <a:ext uri="{FF2B5EF4-FFF2-40B4-BE49-F238E27FC236}">
-                <a16:creationId xmlns:a16="http://schemas.microsoft.com/office/drawing/2014/main" xmlns="" id="{4A1E2D64-30E7-AF6E-D31C-64C7F5D017D1}"/>
+                <a16:creationId xmlns:a16="http://schemas.microsoft.com/office/drawing/2014/main" id="{4A1E2D64-30E7-AF6E-D31C-64C7F5D017D1}"/>
               </a:ext>
             </a:extLst>
           </p:cNvPr>
@@ -12825,7 +13095,7 @@
     </p:spTree>
     <p:extLst>
       <p:ext uri="{BB962C8B-B14F-4D97-AF65-F5344CB8AC3E}">
-        <p14:creationId xmlns:p14="http://schemas.microsoft.com/office/powerpoint/2010/main" xmlns="" val="1915318121"/>
+        <p14:creationId xmlns:p14="http://schemas.microsoft.com/office/powerpoint/2010/main" val="1915318121"/>
       </p:ext>
     </p:extLst>
   </p:cSld>
@@ -12846,7 +13116,7 @@
         <p:cNvPr id="1" name="">
           <a:extLst>
             <a:ext uri="{FF2B5EF4-FFF2-40B4-BE49-F238E27FC236}">
-              <a16:creationId xmlns:a16="http://schemas.microsoft.com/office/drawing/2014/main" xmlns="" id="{9B841A21-F3A4-BEED-4335-B280F0476433}"/>
+              <a16:creationId xmlns:a16="http://schemas.microsoft.com/office/drawing/2014/main" id="{9B841A21-F3A4-BEED-4335-B280F0476433}"/>
             </a:ext>
           </a:extLst>
         </p:cNvPr>
@@ -12866,7 +13136,7 @@
           <p:cNvPr id="4" name="Kép 3">
             <a:extLst>
               <a:ext uri="{FF2B5EF4-FFF2-40B4-BE49-F238E27FC236}">
-                <a16:creationId xmlns:a16="http://schemas.microsoft.com/office/drawing/2014/main" xmlns="" id="{93E9C8F1-A86B-86D8-7BF0-C4ADBF9BACEE}"/>
+                <a16:creationId xmlns:a16="http://schemas.microsoft.com/office/drawing/2014/main" id="{93E9C8F1-A86B-86D8-7BF0-C4ADBF9BACEE}"/>
               </a:ext>
             </a:extLst>
           </p:cNvPr>
@@ -12896,7 +13166,7 @@
           <p:cNvPr id="2" name="Cím 1">
             <a:extLst>
               <a:ext uri="{FF2B5EF4-FFF2-40B4-BE49-F238E27FC236}">
-                <a16:creationId xmlns:a16="http://schemas.microsoft.com/office/drawing/2014/main" xmlns="" id="{1B244E95-BDC4-8D7E-9410-C71185CE8C85}"/>
+                <a16:creationId xmlns:a16="http://schemas.microsoft.com/office/drawing/2014/main" id="{1B244E95-BDC4-8D7E-9410-C71185CE8C85}"/>
               </a:ext>
             </a:extLst>
           </p:cNvPr>
@@ -12922,7 +13192,7 @@
     </p:spTree>
     <p:extLst>
       <p:ext uri="{BB962C8B-B14F-4D97-AF65-F5344CB8AC3E}">
-        <p14:creationId xmlns:p14="http://schemas.microsoft.com/office/powerpoint/2010/main" xmlns="" val="1608496070"/>
+        <p14:creationId xmlns:p14="http://schemas.microsoft.com/office/powerpoint/2010/main" val="1608496070"/>
       </p:ext>
     </p:extLst>
   </p:cSld>
@@ -12943,7 +13213,7 @@
         <p:cNvPr id="1" name="">
           <a:extLst>
             <a:ext uri="{FF2B5EF4-FFF2-40B4-BE49-F238E27FC236}">
-              <a16:creationId xmlns:a16="http://schemas.microsoft.com/office/drawing/2014/main" xmlns="" id="{33154BA3-C252-6C61-9BFC-DE7EDB567000}"/>
+              <a16:creationId xmlns:a16="http://schemas.microsoft.com/office/drawing/2014/main" id="{33154BA3-C252-6C61-9BFC-DE7EDB567000}"/>
             </a:ext>
           </a:extLst>
         </p:cNvPr>
@@ -12963,7 +13233,7 @@
           <p:cNvPr id="7" name="Kép 6">
             <a:extLst>
               <a:ext uri="{FF2B5EF4-FFF2-40B4-BE49-F238E27FC236}">
-                <a16:creationId xmlns:a16="http://schemas.microsoft.com/office/drawing/2014/main" xmlns="" id="{F4E52981-0A97-79A6-C9A4-5227C7512286}"/>
+                <a16:creationId xmlns:a16="http://schemas.microsoft.com/office/drawing/2014/main" id="{F4E52981-0A97-79A6-C9A4-5227C7512286}"/>
               </a:ext>
             </a:extLst>
           </p:cNvPr>
@@ -12993,7 +13263,7 @@
           <p:cNvPr id="2" name="Cím 1">
             <a:extLst>
               <a:ext uri="{FF2B5EF4-FFF2-40B4-BE49-F238E27FC236}">
-                <a16:creationId xmlns:a16="http://schemas.microsoft.com/office/drawing/2014/main" xmlns="" id="{97CEF7D3-2587-8E79-1C83-BE4B85DDBDE8}"/>
+                <a16:creationId xmlns:a16="http://schemas.microsoft.com/office/drawing/2014/main" id="{97CEF7D3-2587-8E79-1C83-BE4B85DDBDE8}"/>
               </a:ext>
             </a:extLst>
           </p:cNvPr>
@@ -13019,7 +13289,7 @@
     </p:spTree>
     <p:extLst>
       <p:ext uri="{BB962C8B-B14F-4D97-AF65-F5344CB8AC3E}">
-        <p14:creationId xmlns:p14="http://schemas.microsoft.com/office/powerpoint/2010/main" xmlns="" val="3446405935"/>
+        <p14:creationId xmlns:p14="http://schemas.microsoft.com/office/powerpoint/2010/main" val="3446405935"/>
       </p:ext>
     </p:extLst>
   </p:cSld>
@@ -13279,7 +13549,7 @@
   <a:extraClrSchemeLst/>
   <a:extLst>
     <a:ext uri="{05A4C25C-085E-4340-85A3-A5531E510DB2}">
-      <thm15:themeFamily xmlns:thm15="http://schemas.microsoft.com/office/thememl/2012/main" xmlns="" name="Gallery" id="{BBFCD31E-59A1-489D-B089-A3EAD7CAE12E}" vid="{F5E91637-A7B6-4E27-B710-77DA7014EE1E}"/>
+      <thm15:themeFamily xmlns:thm15="http://schemas.microsoft.com/office/thememl/2012/main" name="Gallery" id="{BBFCD31E-59A1-489D-B089-A3EAD7CAE12E}" vid="{F5E91637-A7B6-4E27-B710-77DA7014EE1E}"/>
     </a:ext>
   </a:extLst>
 </a:theme>
@@ -13594,7 +13864,7 @@
   <a:extraClrSchemeLst/>
   <a:extLst>
     <a:ext uri="{05A4C25C-085E-4340-85A3-A5531E510DB2}">
-      <thm15:themeFamily xmlns:thm15="http://schemas.microsoft.com/office/thememl/2012/main" xmlns="" name="Office Theme" id="{2E142A2C-CD16-42D6-873A-C26D2A0506FA}" vid="{1BDDFF52-6CD6-40A5-AB3C-68EB2F1E4D0A}"/>
+      <thm15:themeFamily xmlns:thm15="http://schemas.microsoft.com/office/thememl/2012/main" name="Office Theme" id="{2E142A2C-CD16-42D6-873A-C26D2A0506FA}" vid="{1BDDFF52-6CD6-40A5-AB3C-68EB2F1E4D0A}"/>
     </a:ext>
   </a:extLst>
 </a:theme>
@@ -13909,7 +14179,7 @@
   <a:extraClrSchemeLst/>
   <a:extLst>
     <a:ext uri="{05A4C25C-085E-4340-85A3-A5531E510DB2}">
-      <thm15:themeFamily xmlns:thm15="http://schemas.microsoft.com/office/thememl/2012/main" xmlns="" name="Office Theme" id="{2E142A2C-CD16-42D6-873A-C26D2A0506FA}" vid="{1BDDFF52-6CD6-40A5-AB3C-68EB2F1E4D0A}"/>
+      <thm15:themeFamily xmlns:thm15="http://schemas.microsoft.com/office/thememl/2012/main" name="Office Theme" id="{2E142A2C-CD16-42D6-873A-C26D2A0506FA}" vid="{1BDDFF52-6CD6-40A5-AB3C-68EB2F1E4D0A}"/>
     </a:ext>
   </a:extLst>
 </a:theme>

--- a/Kanban webapp - Buborék együttes.pptx
+++ b/Kanban webapp - Buborék együttes.pptx
@@ -5,10 +5,10 @@
     <p:sldMasterId id="2147483672" r:id="rId1"/>
   </p:sldMasterIdLst>
   <p:notesMasterIdLst>
-    <p:notesMasterId r:id="rId26"/>
+    <p:notesMasterId r:id="rId31"/>
   </p:notesMasterIdLst>
   <p:handoutMasterIdLst>
-    <p:handoutMasterId r:id="rId27"/>
+    <p:handoutMasterId r:id="rId32"/>
   </p:handoutMasterIdLst>
   <p:sldIdLst>
     <p:sldId id="258" r:id="rId2"/>
@@ -35,6 +35,11 @@
     <p:sldId id="281" r:id="rId23"/>
     <p:sldId id="282" r:id="rId24"/>
     <p:sldId id="283" r:id="rId25"/>
+    <p:sldId id="284" r:id="rId26"/>
+    <p:sldId id="285" r:id="rId27"/>
+    <p:sldId id="287" r:id="rId28"/>
+    <p:sldId id="288" r:id="rId29"/>
+    <p:sldId id="289" r:id="rId30"/>
   </p:sldIdLst>
   <p:sldSz cx="12192000" cy="6858000"/>
   <p:notesSz cx="6858000" cy="9144000"/>
@@ -247,7 +252,7 @@
             <a:fld id="{795EECD7-D4C7-4FE3-AB70-00E199DD6761}" type="datetimeFigureOut">
               <a:rPr lang="hu-HU" smtClean="0"/>
               <a:pPr/>
-              <a:t>2025. 11. 16.</a:t>
+              <a:t>2025. 11. 17.</a:t>
             </a:fld>
             <a:endParaRPr lang="hu-HU"/>
           </a:p>
@@ -427,7 +432,7 @@
             <a:fld id="{2D5DABCF-F2FF-4310-8608-C10C325E963C}" type="datetimeFigureOut">
               <a:rPr lang="hu-HU" smtClean="0"/>
               <a:pPr/>
-              <a:t>2025. 11. 16.</a:t>
+              <a:t>2025. 11. 17.</a:t>
             </a:fld>
             <a:endParaRPr lang="hu-HU"/>
           </a:p>
@@ -921,7 +926,7 @@
             <a:fld id="{67F45AC6-C491-4585-A584-9CE2AF7D5500}" type="datetime1">
               <a:rPr lang="en-US" smtClean="0"/>
               <a:pPr/>
-              <a:t>11/16/2025</a:t>
+              <a:t>11/17/2025</a:t>
             </a:fld>
             <a:endParaRPr lang="en-US"/>
           </a:p>
@@ -1135,7 +1140,7 @@
             <a:fld id="{67F45AC6-C491-4585-A584-9CE2AF7D5500}" type="datetime1">
               <a:rPr lang="en-US" smtClean="0"/>
               <a:pPr/>
-              <a:t>11/16/2025</a:t>
+              <a:t>11/17/2025</a:t>
             </a:fld>
             <a:endParaRPr lang="en-US"/>
           </a:p>
@@ -1353,7 +1358,7 @@
             <a:fld id="{67F45AC6-C491-4585-A584-9CE2AF7D5500}" type="datetime1">
               <a:rPr lang="en-US" smtClean="0"/>
               <a:pPr/>
-              <a:t>11/16/2025</a:t>
+              <a:t>11/17/2025</a:t>
             </a:fld>
             <a:endParaRPr lang="en-US"/>
           </a:p>
@@ -1557,7 +1562,7 @@
             <a:fld id="{67F45AC6-C491-4585-A584-9CE2AF7D5500}" type="datetime1">
               <a:rPr lang="en-US" smtClean="0"/>
               <a:pPr/>
-              <a:t>11/16/2025</a:t>
+              <a:t>11/17/2025</a:t>
             </a:fld>
             <a:endParaRPr lang="en-US"/>
           </a:p>
@@ -1839,7 +1844,7 @@
             <a:fld id="{67F45AC6-C491-4585-A584-9CE2AF7D5500}" type="datetime1">
               <a:rPr lang="en-US" smtClean="0"/>
               <a:pPr/>
-              <a:t>11/16/2025</a:t>
+              <a:t>11/17/2025</a:t>
             </a:fld>
             <a:endParaRPr lang="en-US"/>
           </a:p>
@@ -2110,7 +2115,7 @@
             <a:fld id="{67F45AC6-C491-4585-A584-9CE2AF7D5500}" type="datetime1">
               <a:rPr lang="en-US" smtClean="0"/>
               <a:pPr/>
-              <a:t>11/16/2025</a:t>
+              <a:t>11/17/2025</a:t>
             </a:fld>
             <a:endParaRPr lang="en-US"/>
           </a:p>
@@ -2529,7 +2534,7 @@
             <a:fld id="{67F45AC6-C491-4585-A584-9CE2AF7D5500}" type="datetime1">
               <a:rPr lang="en-US" smtClean="0"/>
               <a:pPr/>
-              <a:t>11/16/2025</a:t>
+              <a:t>11/17/2025</a:t>
             </a:fld>
             <a:endParaRPr lang="en-US"/>
           </a:p>
@@ -2681,7 +2686,7 @@
             <a:fld id="{67F45AC6-C491-4585-A584-9CE2AF7D5500}" type="datetime1">
               <a:rPr lang="en-US" smtClean="0"/>
               <a:pPr/>
-              <a:t>11/16/2025</a:t>
+              <a:t>11/17/2025</a:t>
             </a:fld>
             <a:endParaRPr lang="en-US"/>
           </a:p>
@@ -2810,7 +2815,7 @@
             <a:fld id="{67F45AC6-C491-4585-A584-9CE2AF7D5500}" type="datetime1">
               <a:rPr lang="en-US" smtClean="0"/>
               <a:pPr/>
-              <a:t>11/16/2025</a:t>
+              <a:t>11/17/2025</a:t>
             </a:fld>
             <a:endParaRPr lang="en-US"/>
           </a:p>
@@ -3064,7 +3069,7 @@
             <a:fld id="{67F45AC6-C491-4585-A584-9CE2AF7D5500}" type="datetime1">
               <a:rPr lang="en-US" smtClean="0"/>
               <a:pPr/>
-              <a:t>11/16/2025</a:t>
+              <a:t>11/17/2025</a:t>
             </a:fld>
             <a:endParaRPr lang="en-US"/>
           </a:p>
@@ -3512,7 +3517,7 @@
             <a:fld id="{67F45AC6-C491-4585-A584-9CE2AF7D5500}" type="datetime1">
               <a:rPr lang="en-US" smtClean="0"/>
               <a:pPr/>
-              <a:t>11/16/2025</a:t>
+              <a:t>11/17/2025</a:t>
             </a:fld>
             <a:endParaRPr lang="en-US"/>
           </a:p>
@@ -3849,7 +3854,7 @@
             <a:fld id="{67F45AC6-C491-4585-A584-9CE2AF7D5500}" type="datetime1">
               <a:rPr lang="en-US" smtClean="0"/>
               <a:pPr/>
-              <a:t>11/16/2025</a:t>
+              <a:t>11/17/2025</a:t>
             </a:fld>
             <a:endParaRPr lang="en-US"/>
           </a:p>
@@ -11426,6 +11431,699 @@
         </p:spPr>
       </p:pic>
     </p:spTree>
+  </p:cSld>
+  <p:clrMapOvr>
+    <a:masterClrMapping/>
+  </p:clrMapOvr>
+</p:sld>
+</file>
+
+<file path=ppt/slides/slide25.xml><?xml version="1.0" encoding="utf-8"?>
+<p:sld xmlns:a="http://schemas.openxmlformats.org/drawingml/2006/main" xmlns:r="http://schemas.openxmlformats.org/officeDocument/2006/relationships" xmlns:p="http://schemas.openxmlformats.org/presentationml/2006/main">
+  <p:cSld>
+    <p:spTree>
+      <p:nvGrpSpPr>
+        <p:cNvPr id="1" name=""/>
+        <p:cNvGrpSpPr/>
+        <p:nvPr/>
+      </p:nvGrpSpPr>
+      <p:grpSpPr>
+        <a:xfrm>
+          <a:off x="0" y="0"/>
+          <a:ext cx="0" cy="0"/>
+          <a:chOff x="0" y="0"/>
+          <a:chExt cx="0" cy="0"/>
+        </a:xfrm>
+      </p:grpSpPr>
+      <p:sp>
+        <p:nvSpPr>
+          <p:cNvPr id="2" name="Cím 1"/>
+          <p:cNvSpPr>
+            <a:spLocks noGrp="1"/>
+          </p:cNvSpPr>
+          <p:nvPr>
+            <p:ph type="title"/>
+          </p:nvPr>
+        </p:nvSpPr>
+        <p:spPr>
+          <a:xfrm>
+            <a:off x="1444671" y="798973"/>
+            <a:ext cx="3273099" cy="2418680"/>
+          </a:xfrm>
+        </p:spPr>
+        <p:txBody>
+          <a:bodyPr>
+            <a:normAutofit/>
+          </a:bodyPr>
+          <a:lstStyle/>
+          <a:p>
+            <a:r>
+              <a:rPr lang="hu-HU" sz="3200" dirty="0"/>
+              <a:t>Molnár Attila Management </a:t>
+            </a:r>
+          </a:p>
+        </p:txBody>
+      </p:sp>
+      <p:pic>
+        <p:nvPicPr>
+          <p:cNvPr id="4" name="Kép 3">
+            <a:extLst>
+              <a:ext uri="{FF2B5EF4-FFF2-40B4-BE49-F238E27FC236}">
+                <a16:creationId xmlns:a16="http://schemas.microsoft.com/office/drawing/2014/main" id="{8F5E240A-3213-AB66-3490-B67AB724433A}"/>
+              </a:ext>
+            </a:extLst>
+          </p:cNvPr>
+          <p:cNvPicPr>
+            <a:picLocks noChangeAspect="1"/>
+          </p:cNvPicPr>
+          <p:nvPr/>
+        </p:nvPicPr>
+        <p:blipFill>
+          <a:blip r:embed="rId2"/>
+          <a:stretch>
+            <a:fillRect/>
+          </a:stretch>
+        </p:blipFill>
+        <p:spPr>
+          <a:xfrm>
+            <a:off x="1107305" y="3588589"/>
+            <a:ext cx="3610465" cy="3077212"/>
+          </a:xfrm>
+          <a:prstGeom prst="rect">
+            <a:avLst/>
+          </a:prstGeom>
+        </p:spPr>
+      </p:pic>
+      <p:pic>
+        <p:nvPicPr>
+          <p:cNvPr id="9" name="Kép 8">
+            <a:extLst>
+              <a:ext uri="{FF2B5EF4-FFF2-40B4-BE49-F238E27FC236}">
+                <a16:creationId xmlns:a16="http://schemas.microsoft.com/office/drawing/2014/main" id="{DEC6BEF6-417E-4B25-FC15-F9A180853B7C}"/>
+              </a:ext>
+            </a:extLst>
+          </p:cNvPr>
+          <p:cNvPicPr>
+            <a:picLocks noChangeAspect="1"/>
+          </p:cNvPicPr>
+          <p:nvPr/>
+        </p:nvPicPr>
+        <p:blipFill>
+          <a:blip r:embed="rId3"/>
+          <a:stretch>
+            <a:fillRect/>
+          </a:stretch>
+        </p:blipFill>
+        <p:spPr>
+          <a:xfrm>
+            <a:off x="5327651" y="2370349"/>
+            <a:ext cx="3621419" cy="4208129"/>
+          </a:xfrm>
+          <a:prstGeom prst="rect">
+            <a:avLst/>
+          </a:prstGeom>
+        </p:spPr>
+      </p:pic>
+      <p:pic>
+        <p:nvPicPr>
+          <p:cNvPr id="11" name="Kép 10">
+            <a:extLst>
+              <a:ext uri="{FF2B5EF4-FFF2-40B4-BE49-F238E27FC236}">
+                <a16:creationId xmlns:a16="http://schemas.microsoft.com/office/drawing/2014/main" id="{8252F1FA-58E6-8D55-BAC6-75278DAEF71C}"/>
+              </a:ext>
+            </a:extLst>
+          </p:cNvPr>
+          <p:cNvPicPr>
+            <a:picLocks noChangeAspect="1"/>
+          </p:cNvPicPr>
+          <p:nvPr/>
+        </p:nvPicPr>
+        <p:blipFill>
+          <a:blip r:embed="rId4"/>
+          <a:stretch>
+            <a:fillRect/>
+          </a:stretch>
+        </p:blipFill>
+        <p:spPr>
+          <a:xfrm>
+            <a:off x="9320604" y="597102"/>
+            <a:ext cx="2554970" cy="3077212"/>
+          </a:xfrm>
+          <a:prstGeom prst="rect">
+            <a:avLst/>
+          </a:prstGeom>
+        </p:spPr>
+      </p:pic>
+    </p:spTree>
+    <p:extLst>
+      <p:ext uri="{BB962C8B-B14F-4D97-AF65-F5344CB8AC3E}">
+        <p14:creationId xmlns:p14="http://schemas.microsoft.com/office/powerpoint/2010/main" val="1723282750"/>
+      </p:ext>
+    </p:extLst>
+  </p:cSld>
+  <p:clrMapOvr>
+    <a:masterClrMapping/>
+  </p:clrMapOvr>
+</p:sld>
+</file>
+
+<file path=ppt/slides/slide26.xml><?xml version="1.0" encoding="utf-8"?>
+<p:sld xmlns:a="http://schemas.openxmlformats.org/drawingml/2006/main" xmlns:r="http://schemas.openxmlformats.org/officeDocument/2006/relationships" xmlns:p="http://schemas.openxmlformats.org/presentationml/2006/main">
+  <p:cSld>
+    <p:spTree>
+      <p:nvGrpSpPr>
+        <p:cNvPr id="1" name=""/>
+        <p:cNvGrpSpPr/>
+        <p:nvPr/>
+      </p:nvGrpSpPr>
+      <p:grpSpPr>
+        <a:xfrm>
+          <a:off x="0" y="0"/>
+          <a:ext cx="0" cy="0"/>
+          <a:chOff x="0" y="0"/>
+          <a:chExt cx="0" cy="0"/>
+        </a:xfrm>
+      </p:grpSpPr>
+      <p:sp>
+        <p:nvSpPr>
+          <p:cNvPr id="2" name="Cím 1"/>
+          <p:cNvSpPr>
+            <a:spLocks noGrp="1"/>
+          </p:cNvSpPr>
+          <p:nvPr>
+            <p:ph type="title"/>
+          </p:nvPr>
+        </p:nvSpPr>
+        <p:spPr>
+          <a:xfrm>
+            <a:off x="1408446" y="1253095"/>
+            <a:ext cx="8115115" cy="592958"/>
+          </a:xfrm>
+        </p:spPr>
+        <p:txBody>
+          <a:bodyPr>
+            <a:normAutofit/>
+          </a:bodyPr>
+          <a:lstStyle/>
+          <a:p>
+            <a:r>
+              <a:rPr lang="hu-HU" dirty="0"/>
+              <a:t>Molnár Attila- </a:t>
+            </a:r>
+            <a:r>
+              <a:rPr lang="hu-HU" dirty="0" err="1"/>
+              <a:t>Git</a:t>
+            </a:r>
+            <a:endParaRPr lang="hu-HU" dirty="0"/>
+          </a:p>
+        </p:txBody>
+      </p:sp>
+      <p:pic>
+        <p:nvPicPr>
+          <p:cNvPr id="6" name="Kép 5">
+            <a:extLst>
+              <a:ext uri="{FF2B5EF4-FFF2-40B4-BE49-F238E27FC236}">
+                <a16:creationId xmlns:a16="http://schemas.microsoft.com/office/drawing/2014/main" id="{C30DBF84-8C67-8166-0D65-FEF3A3210846}"/>
+              </a:ext>
+            </a:extLst>
+          </p:cNvPr>
+          <p:cNvPicPr>
+            <a:picLocks noChangeAspect="1"/>
+          </p:cNvPicPr>
+          <p:nvPr/>
+        </p:nvPicPr>
+        <p:blipFill>
+          <a:blip r:embed="rId2"/>
+          <a:stretch>
+            <a:fillRect/>
+          </a:stretch>
+        </p:blipFill>
+        <p:spPr>
+          <a:xfrm>
+            <a:off x="504301" y="2495550"/>
+            <a:ext cx="4553948" cy="4062836"/>
+          </a:xfrm>
+          <a:prstGeom prst="rect">
+            <a:avLst/>
+          </a:prstGeom>
+        </p:spPr>
+      </p:pic>
+      <p:pic>
+        <p:nvPicPr>
+          <p:cNvPr id="8" name="Kép 7">
+            <a:extLst>
+              <a:ext uri="{FF2B5EF4-FFF2-40B4-BE49-F238E27FC236}">
+                <a16:creationId xmlns:a16="http://schemas.microsoft.com/office/drawing/2014/main" id="{F34FCA43-70CA-B2A9-CAD0-DD753203776D}"/>
+              </a:ext>
+            </a:extLst>
+          </p:cNvPr>
+          <p:cNvPicPr>
+            <a:picLocks noChangeAspect="1"/>
+          </p:cNvPicPr>
+          <p:nvPr/>
+        </p:nvPicPr>
+        <p:blipFill>
+          <a:blip r:embed="rId3"/>
+          <a:stretch>
+            <a:fillRect/>
+          </a:stretch>
+        </p:blipFill>
+        <p:spPr>
+          <a:xfrm>
+            <a:off x="8818331" y="3542994"/>
+            <a:ext cx="3225422" cy="2937905"/>
+          </a:xfrm>
+          <a:prstGeom prst="rect">
+            <a:avLst/>
+          </a:prstGeom>
+        </p:spPr>
+      </p:pic>
+      <p:pic>
+        <p:nvPicPr>
+          <p:cNvPr id="10" name="Kép 9">
+            <a:extLst>
+              <a:ext uri="{FF2B5EF4-FFF2-40B4-BE49-F238E27FC236}">
+                <a16:creationId xmlns:a16="http://schemas.microsoft.com/office/drawing/2014/main" id="{437A2A37-4FD2-48EF-6E8F-8D1AA6EB3162}"/>
+              </a:ext>
+            </a:extLst>
+          </p:cNvPr>
+          <p:cNvPicPr>
+            <a:picLocks noChangeAspect="1"/>
+          </p:cNvPicPr>
+          <p:nvPr/>
+        </p:nvPicPr>
+        <p:blipFill>
+          <a:blip r:embed="rId4"/>
+          <a:stretch>
+            <a:fillRect/>
+          </a:stretch>
+        </p:blipFill>
+        <p:spPr>
+          <a:xfrm>
+            <a:off x="5237404" y="2923576"/>
+            <a:ext cx="3401772" cy="2591110"/>
+          </a:xfrm>
+          <a:prstGeom prst="rect">
+            <a:avLst/>
+          </a:prstGeom>
+        </p:spPr>
+      </p:pic>
+    </p:spTree>
+    <p:extLst>
+      <p:ext uri="{BB962C8B-B14F-4D97-AF65-F5344CB8AC3E}">
+        <p14:creationId xmlns:p14="http://schemas.microsoft.com/office/powerpoint/2010/main" val="2518564846"/>
+      </p:ext>
+    </p:extLst>
+  </p:cSld>
+  <p:clrMapOvr>
+    <a:masterClrMapping/>
+  </p:clrMapOvr>
+</p:sld>
+</file>
+
+<file path=ppt/slides/slide27.xml><?xml version="1.0" encoding="utf-8"?>
+<p:sld xmlns:a="http://schemas.openxmlformats.org/drawingml/2006/main" xmlns:r="http://schemas.openxmlformats.org/officeDocument/2006/relationships" xmlns:p="http://schemas.openxmlformats.org/presentationml/2006/main">
+  <p:cSld>
+    <p:spTree>
+      <p:nvGrpSpPr>
+        <p:cNvPr id="1" name=""/>
+        <p:cNvGrpSpPr/>
+        <p:nvPr/>
+      </p:nvGrpSpPr>
+      <p:grpSpPr>
+        <a:xfrm>
+          <a:off x="0" y="0"/>
+          <a:ext cx="0" cy="0"/>
+          <a:chOff x="0" y="0"/>
+          <a:chExt cx="0" cy="0"/>
+        </a:xfrm>
+      </p:grpSpPr>
+      <p:sp>
+        <p:nvSpPr>
+          <p:cNvPr id="3" name="Cím 1"/>
+          <p:cNvSpPr>
+            <a:spLocks noGrp="1"/>
+          </p:cNvSpPr>
+          <p:nvPr>
+            <p:ph type="title"/>
+          </p:nvPr>
+        </p:nvSpPr>
+        <p:spPr>
+          <a:xfrm>
+            <a:off x="722862" y="1290291"/>
+            <a:ext cx="9603275" cy="559792"/>
+          </a:xfrm>
+        </p:spPr>
+        <p:txBody>
+          <a:bodyPr>
+            <a:normAutofit/>
+          </a:bodyPr>
+          <a:lstStyle/>
+          <a:p>
+            <a:r>
+              <a:rPr lang="hu-HU" dirty="0"/>
+              <a:t>Molnár </a:t>
+            </a:r>
+            <a:r>
+              <a:rPr lang="hu-HU" dirty="0" err="1"/>
+              <a:t>attila</a:t>
+            </a:r>
+            <a:r>
+              <a:rPr lang="hu-HU" dirty="0"/>
+              <a:t> - Dokumentáció</a:t>
+            </a:r>
+          </a:p>
+        </p:txBody>
+      </p:sp>
+      <p:sp>
+        <p:nvSpPr>
+          <p:cNvPr id="36866" name="AutoShape 2" descr="image.png"/>
+          <p:cNvSpPr>
+            <a:spLocks noChangeAspect="1" noChangeArrowheads="1"/>
+          </p:cNvSpPr>
+          <p:nvPr/>
+        </p:nvSpPr>
+        <p:spPr bwMode="auto">
+          <a:xfrm>
+            <a:off x="155575" y="-144463"/>
+            <a:ext cx="304800" cy="304801"/>
+          </a:xfrm>
+          <a:prstGeom prst="rect">
+            <a:avLst/>
+          </a:prstGeom>
+          <a:noFill/>
+        </p:spPr>
+        <p:txBody>
+          <a:bodyPr vert="horz" wrap="square" lIns="91440" tIns="45720" rIns="91440" bIns="45720" numCol="1" anchor="t" anchorCtr="0" compatLnSpc="1">
+            <a:prstTxWarp prst="textNoShape">
+              <a:avLst/>
+            </a:prstTxWarp>
+          </a:bodyPr>
+          <a:lstStyle/>
+          <a:p>
+            <a:endParaRPr lang="hu-HU"/>
+          </a:p>
+        </p:txBody>
+      </p:sp>
+      <p:pic>
+        <p:nvPicPr>
+          <p:cNvPr id="4" name="Kép 3">
+            <a:extLst>
+              <a:ext uri="{FF2B5EF4-FFF2-40B4-BE49-F238E27FC236}">
+                <a16:creationId xmlns:a16="http://schemas.microsoft.com/office/drawing/2014/main" id="{FAC51E4C-7C89-3C54-9FFB-C72B8DF0BEB0}"/>
+              </a:ext>
+            </a:extLst>
+          </p:cNvPr>
+          <p:cNvPicPr>
+            <a:picLocks noChangeAspect="1"/>
+          </p:cNvPicPr>
+          <p:nvPr/>
+        </p:nvPicPr>
+        <p:blipFill>
+          <a:blip r:embed="rId2"/>
+          <a:stretch>
+            <a:fillRect/>
+          </a:stretch>
+        </p:blipFill>
+        <p:spPr>
+          <a:xfrm>
+            <a:off x="460375" y="2581275"/>
+            <a:ext cx="4554806" cy="2668438"/>
+          </a:xfrm>
+          <a:prstGeom prst="rect">
+            <a:avLst/>
+          </a:prstGeom>
+        </p:spPr>
+      </p:pic>
+      <p:pic>
+        <p:nvPicPr>
+          <p:cNvPr id="6" name="Kép 5">
+            <a:extLst>
+              <a:ext uri="{FF2B5EF4-FFF2-40B4-BE49-F238E27FC236}">
+                <a16:creationId xmlns:a16="http://schemas.microsoft.com/office/drawing/2014/main" id="{D3352C05-B4D6-E48D-0629-DE0E1B8E50CF}"/>
+              </a:ext>
+            </a:extLst>
+          </p:cNvPr>
+          <p:cNvPicPr>
+            <a:picLocks noChangeAspect="1"/>
+          </p:cNvPicPr>
+          <p:nvPr/>
+        </p:nvPicPr>
+        <p:blipFill>
+          <a:blip r:embed="rId3"/>
+          <a:stretch>
+            <a:fillRect/>
+          </a:stretch>
+        </p:blipFill>
+        <p:spPr>
+          <a:xfrm>
+            <a:off x="7602679" y="1066826"/>
+            <a:ext cx="4309921" cy="2229488"/>
+          </a:xfrm>
+          <a:prstGeom prst="rect">
+            <a:avLst/>
+          </a:prstGeom>
+        </p:spPr>
+      </p:pic>
+      <p:pic>
+        <p:nvPicPr>
+          <p:cNvPr id="8" name="Kép 7">
+            <a:extLst>
+              <a:ext uri="{FF2B5EF4-FFF2-40B4-BE49-F238E27FC236}">
+                <a16:creationId xmlns:a16="http://schemas.microsoft.com/office/drawing/2014/main" id="{9AFC4F46-621C-30DF-7DB2-B575265441D7}"/>
+              </a:ext>
+            </a:extLst>
+          </p:cNvPr>
+          <p:cNvPicPr>
+            <a:picLocks noChangeAspect="1"/>
+          </p:cNvPicPr>
+          <p:nvPr/>
+        </p:nvPicPr>
+        <p:blipFill>
+          <a:blip r:embed="rId4"/>
+          <a:stretch>
+            <a:fillRect/>
+          </a:stretch>
+        </p:blipFill>
+        <p:spPr>
+          <a:xfrm>
+            <a:off x="5401156" y="3561687"/>
+            <a:ext cx="4691296" cy="3019885"/>
+          </a:xfrm>
+          <a:prstGeom prst="rect">
+            <a:avLst/>
+          </a:prstGeom>
+        </p:spPr>
+      </p:pic>
+    </p:spTree>
+    <p:extLst>
+      <p:ext uri="{BB962C8B-B14F-4D97-AF65-F5344CB8AC3E}">
+        <p14:creationId xmlns:p14="http://schemas.microsoft.com/office/powerpoint/2010/main" val="2114799061"/>
+      </p:ext>
+    </p:extLst>
+  </p:cSld>
+  <p:clrMapOvr>
+    <a:masterClrMapping/>
+  </p:clrMapOvr>
+</p:sld>
+</file>
+
+<file path=ppt/slides/slide28.xml><?xml version="1.0" encoding="utf-8"?>
+<p:sld xmlns:a="http://schemas.openxmlformats.org/drawingml/2006/main" xmlns:r="http://schemas.openxmlformats.org/officeDocument/2006/relationships" xmlns:p="http://schemas.openxmlformats.org/presentationml/2006/main">
+  <p:cSld>
+    <p:spTree>
+      <p:nvGrpSpPr>
+        <p:cNvPr id="1" name=""/>
+        <p:cNvGrpSpPr/>
+        <p:nvPr/>
+      </p:nvGrpSpPr>
+      <p:grpSpPr>
+        <a:xfrm>
+          <a:off x="0" y="0"/>
+          <a:ext cx="0" cy="0"/>
+          <a:chOff x="0" y="0"/>
+          <a:chExt cx="0" cy="0"/>
+        </a:xfrm>
+      </p:grpSpPr>
+      <p:sp>
+        <p:nvSpPr>
+          <p:cNvPr id="2" name="Cím 1"/>
+          <p:cNvSpPr>
+            <a:spLocks noGrp="1"/>
+          </p:cNvSpPr>
+          <p:nvPr>
+            <p:ph type="title"/>
+          </p:nvPr>
+        </p:nvSpPr>
+        <p:spPr>
+          <a:xfrm>
+            <a:off x="1451579" y="1257300"/>
+            <a:ext cx="9603275" cy="596453"/>
+          </a:xfrm>
+        </p:spPr>
+        <p:txBody>
+          <a:bodyPr>
+            <a:normAutofit/>
+          </a:bodyPr>
+          <a:lstStyle/>
+          <a:p>
+            <a:r>
+              <a:rPr lang="hu-HU" dirty="0"/>
+              <a:t>Molnár </a:t>
+            </a:r>
+            <a:r>
+              <a:rPr lang="hu-HU" dirty="0" err="1"/>
+              <a:t>attila</a:t>
+            </a:r>
+            <a:r>
+              <a:rPr lang="hu-HU" dirty="0"/>
+              <a:t>- fejlesztés</a:t>
+            </a:r>
+          </a:p>
+        </p:txBody>
+      </p:sp>
+    </p:spTree>
+    <p:extLst>
+      <p:ext uri="{BB962C8B-B14F-4D97-AF65-F5344CB8AC3E}">
+        <p14:creationId xmlns:p14="http://schemas.microsoft.com/office/powerpoint/2010/main" val="2431580861"/>
+      </p:ext>
+    </p:extLst>
+  </p:cSld>
+  <p:clrMapOvr>
+    <a:masterClrMapping/>
+  </p:clrMapOvr>
+</p:sld>
+</file>
+
+<file path=ppt/slides/slide29.xml><?xml version="1.0" encoding="utf-8"?>
+<p:sld xmlns:a="http://schemas.openxmlformats.org/drawingml/2006/main" xmlns:r="http://schemas.openxmlformats.org/officeDocument/2006/relationships" xmlns:p="http://schemas.openxmlformats.org/presentationml/2006/main">
+  <p:cSld>
+    <p:spTree>
+      <p:nvGrpSpPr>
+        <p:cNvPr id="1" name=""/>
+        <p:cNvGrpSpPr/>
+        <p:nvPr/>
+      </p:nvGrpSpPr>
+      <p:grpSpPr>
+        <a:xfrm>
+          <a:off x="0" y="0"/>
+          <a:ext cx="0" cy="0"/>
+          <a:chOff x="0" y="0"/>
+          <a:chExt cx="0" cy="0"/>
+        </a:xfrm>
+      </p:grpSpPr>
+      <p:sp>
+        <p:nvSpPr>
+          <p:cNvPr id="3" name="Cím 1"/>
+          <p:cNvSpPr txBox="1">
+            <a:spLocks/>
+          </p:cNvSpPr>
+          <p:nvPr/>
+        </p:nvSpPr>
+        <p:spPr>
+          <a:xfrm>
+            <a:off x="1451579" y="1257300"/>
+            <a:ext cx="9603275" cy="596453"/>
+          </a:xfrm>
+          <a:prstGeom prst="rect">
+            <a:avLst/>
+          </a:prstGeom>
+        </p:spPr>
+        <p:txBody>
+          <a:bodyPr vert="horz" lIns="91440" tIns="45720" rIns="91440" bIns="45720" rtlCol="0" anchor="t">
+            <a:normAutofit/>
+          </a:bodyPr>
+          <a:lstStyle/>
+          <a:p>
+            <a:pPr marL="0" marR="0" lvl="0" indent="0" algn="l" defTabSz="914400" rtl="0" eaLnBrk="1" fontAlgn="auto" latinLnBrk="0" hangingPunct="1">
+              <a:lnSpc>
+                <a:spcPct val="90000"/>
+              </a:lnSpc>
+              <a:spcBef>
+                <a:spcPct val="0"/>
+              </a:spcBef>
+              <a:spcAft>
+                <a:spcPts val="0"/>
+              </a:spcAft>
+              <a:buClrTx/>
+              <a:buSzTx/>
+              <a:buFontTx/>
+              <a:buNone/>
+              <a:tabLst/>
+              <a:defRPr/>
+            </a:pPr>
+            <a:r>
+              <a:rPr lang="hu-HU" sz="3200" cap="all" dirty="0">
+                <a:latin typeface="+mj-lt"/>
+                <a:ea typeface="+mj-ea"/>
+                <a:cs typeface="+mj-cs"/>
+              </a:rPr>
+              <a:t>Molnár </a:t>
+            </a:r>
+            <a:r>
+              <a:rPr lang="hu-HU" sz="3200" cap="all" dirty="0" err="1">
+                <a:latin typeface="+mj-lt"/>
+                <a:ea typeface="+mj-ea"/>
+                <a:cs typeface="+mj-cs"/>
+              </a:rPr>
+              <a:t>attila</a:t>
+            </a:r>
+            <a:r>
+              <a:rPr kumimoji="0" lang="hu-HU" sz="3200" b="0" i="0" u="none" strike="noStrike" kern="1200" cap="all" spc="0" normalizeH="0" baseline="0" noProof="0" dirty="0">
+                <a:ln>
+                  <a:noFill/>
+                </a:ln>
+                <a:solidFill>
+                  <a:schemeClr val="tx1"/>
+                </a:solidFill>
+                <a:effectLst/>
+                <a:uLnTx/>
+                <a:uFillTx/>
+                <a:latin typeface="+mj-lt"/>
+                <a:ea typeface="+mj-ea"/>
+                <a:cs typeface="+mj-cs"/>
+              </a:rPr>
+              <a:t> - Tesztelés</a:t>
+            </a:r>
+          </a:p>
+        </p:txBody>
+      </p:sp>
+      <p:pic>
+        <p:nvPicPr>
+          <p:cNvPr id="4" name="Kép 3">
+            <a:extLst>
+              <a:ext uri="{FF2B5EF4-FFF2-40B4-BE49-F238E27FC236}">
+                <a16:creationId xmlns:a16="http://schemas.microsoft.com/office/drawing/2014/main" id="{70AE7B46-C699-EEAC-7EEC-3A0012D6848E}"/>
+              </a:ext>
+            </a:extLst>
+          </p:cNvPr>
+          <p:cNvPicPr>
+            <a:picLocks noChangeAspect="1"/>
+          </p:cNvPicPr>
+          <p:nvPr/>
+        </p:nvPicPr>
+        <p:blipFill>
+          <a:blip r:embed="rId2"/>
+          <a:stretch>
+            <a:fillRect/>
+          </a:stretch>
+        </p:blipFill>
+        <p:spPr>
+          <a:xfrm>
+            <a:off x="3299803" y="2219325"/>
+            <a:ext cx="5592394" cy="4486274"/>
+          </a:xfrm>
+          <a:prstGeom prst="rect">
+            <a:avLst/>
+          </a:prstGeom>
+        </p:spPr>
+      </p:pic>
+    </p:spTree>
+    <p:extLst>
+      <p:ext uri="{BB962C8B-B14F-4D97-AF65-F5344CB8AC3E}">
+        <p14:creationId xmlns:p14="http://schemas.microsoft.com/office/powerpoint/2010/main" val="158579989"/>
+      </p:ext>
+    </p:extLst>
   </p:cSld>
   <p:clrMapOvr>
     <a:masterClrMapping/>

--- a/Kanban webapp - Buborék együttes.pptx
+++ b/Kanban webapp - Buborék együttes.pptx
@@ -5,41 +5,46 @@
     <p:sldMasterId id="2147483672" r:id="rId1"/>
   </p:sldMasterIdLst>
   <p:notesMasterIdLst>
-    <p:notesMasterId r:id="rId31"/>
+    <p:notesMasterId r:id="rId36"/>
   </p:notesMasterIdLst>
   <p:handoutMasterIdLst>
-    <p:handoutMasterId r:id="rId32"/>
+    <p:handoutMasterId r:id="rId37"/>
   </p:handoutMasterIdLst>
   <p:sldIdLst>
     <p:sldId id="258" r:id="rId2"/>
     <p:sldId id="259" r:id="rId3"/>
-    <p:sldId id="260" r:id="rId4"/>
-    <p:sldId id="268" r:id="rId5"/>
-    <p:sldId id="261" r:id="rId6"/>
-    <p:sldId id="266" r:id="rId7"/>
-    <p:sldId id="262" r:id="rId8"/>
-    <p:sldId id="263" r:id="rId9"/>
-    <p:sldId id="264" r:id="rId10"/>
-    <p:sldId id="267" r:id="rId11"/>
-    <p:sldId id="269" r:id="rId12"/>
-    <p:sldId id="270" r:id="rId13"/>
-    <p:sldId id="271" r:id="rId14"/>
-    <p:sldId id="272" r:id="rId15"/>
-    <p:sldId id="273" r:id="rId16"/>
-    <p:sldId id="274" r:id="rId17"/>
-    <p:sldId id="275" r:id="rId18"/>
-    <p:sldId id="277" r:id="rId19"/>
-    <p:sldId id="278" r:id="rId20"/>
-    <p:sldId id="279" r:id="rId21"/>
-    <p:sldId id="280" r:id="rId22"/>
-    <p:sldId id="281" r:id="rId23"/>
-    <p:sldId id="282" r:id="rId24"/>
-    <p:sldId id="283" r:id="rId25"/>
-    <p:sldId id="284" r:id="rId26"/>
-    <p:sldId id="285" r:id="rId27"/>
-    <p:sldId id="287" r:id="rId28"/>
-    <p:sldId id="288" r:id="rId29"/>
-    <p:sldId id="289" r:id="rId30"/>
+    <p:sldId id="290" r:id="rId4"/>
+    <p:sldId id="260" r:id="rId5"/>
+    <p:sldId id="268" r:id="rId6"/>
+    <p:sldId id="261" r:id="rId7"/>
+    <p:sldId id="266" r:id="rId8"/>
+    <p:sldId id="291" r:id="rId9"/>
+    <p:sldId id="262" r:id="rId10"/>
+    <p:sldId id="263" r:id="rId11"/>
+    <p:sldId id="264" r:id="rId12"/>
+    <p:sldId id="292" r:id="rId13"/>
+    <p:sldId id="293" r:id="rId14"/>
+    <p:sldId id="267" r:id="rId15"/>
+    <p:sldId id="294" r:id="rId16"/>
+    <p:sldId id="269" r:id="rId17"/>
+    <p:sldId id="270" r:id="rId18"/>
+    <p:sldId id="271" r:id="rId19"/>
+    <p:sldId id="272" r:id="rId20"/>
+    <p:sldId id="273" r:id="rId21"/>
+    <p:sldId id="274" r:id="rId22"/>
+    <p:sldId id="275" r:id="rId23"/>
+    <p:sldId id="277" r:id="rId24"/>
+    <p:sldId id="278" r:id="rId25"/>
+    <p:sldId id="279" r:id="rId26"/>
+    <p:sldId id="280" r:id="rId27"/>
+    <p:sldId id="281" r:id="rId28"/>
+    <p:sldId id="282" r:id="rId29"/>
+    <p:sldId id="283" r:id="rId30"/>
+    <p:sldId id="284" r:id="rId31"/>
+    <p:sldId id="285" r:id="rId32"/>
+    <p:sldId id="287" r:id="rId33"/>
+    <p:sldId id="288" r:id="rId34"/>
+    <p:sldId id="289" r:id="rId35"/>
   </p:sldIdLst>
   <p:sldSz cx="12192000" cy="6858000"/>
   <p:notesSz cx="6858000" cy="9144000"/>
@@ -157,6 +162,14 @@
 </p:presentation>
 </file>
 
+<file path=ppt/revisionInfo.xml><?xml version="1.0" encoding="utf-8"?>
+<p1510:revInfo xmlns:a="http://schemas.openxmlformats.org/drawingml/2006/main" xmlns:r="http://schemas.openxmlformats.org/officeDocument/2006/relationships" xmlns:p1510="http://schemas.microsoft.com/office/powerpoint/2015/10/main">
+  <p1510:revLst>
+    <p1510:client id="{2FF116E3-B540-92BE-67DA-E6EFA372FD37}" v="290" dt="2025-12-06T20:24:49.585"/>
+  </p1510:revLst>
+</p1510:revInfo>
+</file>
+
 <file path=ppt/handoutMasters/handoutMaster1.xml><?xml version="1.0" encoding="utf-8"?>
 <p:handoutMaster xmlns:a="http://schemas.openxmlformats.org/drawingml/2006/main" xmlns:r="http://schemas.openxmlformats.org/officeDocument/2006/relationships" xmlns:p="http://schemas.openxmlformats.org/presentationml/2006/main">
   <p:cSld>
@@ -252,7 +265,7 @@
             <a:fld id="{795EECD7-D4C7-4FE3-AB70-00E199DD6761}" type="datetimeFigureOut">
               <a:rPr lang="hu-HU" smtClean="0"/>
               <a:pPr/>
-              <a:t>2025. 11. 17.</a:t>
+              <a:t>2025. 12. 06.</a:t>
             </a:fld>
             <a:endParaRPr lang="hu-HU"/>
           </a:p>
@@ -432,7 +445,7 @@
             <a:fld id="{2D5DABCF-F2FF-4310-8608-C10C325E963C}" type="datetimeFigureOut">
               <a:rPr lang="hu-HU" smtClean="0"/>
               <a:pPr/>
-              <a:t>2025. 11. 17.</a:t>
+              <a:t>2025. 12. 06.</a:t>
             </a:fld>
             <a:endParaRPr lang="hu-HU"/>
           </a:p>
@@ -926,7 +939,7 @@
             <a:fld id="{67F45AC6-C491-4585-A584-9CE2AF7D5500}" type="datetime1">
               <a:rPr lang="en-US" smtClean="0"/>
               <a:pPr/>
-              <a:t>11/17/2025</a:t>
+              <a:t>12/6/2025</a:t>
             </a:fld>
             <a:endParaRPr lang="en-US"/>
           </a:p>
@@ -1140,7 +1153,7 @@
             <a:fld id="{67F45AC6-C491-4585-A584-9CE2AF7D5500}" type="datetime1">
               <a:rPr lang="en-US" smtClean="0"/>
               <a:pPr/>
-              <a:t>11/17/2025</a:t>
+              <a:t>12/6/2025</a:t>
             </a:fld>
             <a:endParaRPr lang="en-US"/>
           </a:p>
@@ -1358,7 +1371,7 @@
             <a:fld id="{67F45AC6-C491-4585-A584-9CE2AF7D5500}" type="datetime1">
               <a:rPr lang="en-US" smtClean="0"/>
               <a:pPr/>
-              <a:t>11/17/2025</a:t>
+              <a:t>12/6/2025</a:t>
             </a:fld>
             <a:endParaRPr lang="en-US"/>
           </a:p>
@@ -1562,7 +1575,7 @@
             <a:fld id="{67F45AC6-C491-4585-A584-9CE2AF7D5500}" type="datetime1">
               <a:rPr lang="en-US" smtClean="0"/>
               <a:pPr/>
-              <a:t>11/17/2025</a:t>
+              <a:t>12/6/2025</a:t>
             </a:fld>
             <a:endParaRPr lang="en-US"/>
           </a:p>
@@ -1844,7 +1857,7 @@
             <a:fld id="{67F45AC6-C491-4585-A584-9CE2AF7D5500}" type="datetime1">
               <a:rPr lang="en-US" smtClean="0"/>
               <a:pPr/>
-              <a:t>11/17/2025</a:t>
+              <a:t>12/6/2025</a:t>
             </a:fld>
             <a:endParaRPr lang="en-US"/>
           </a:p>
@@ -2115,7 +2128,7 @@
             <a:fld id="{67F45AC6-C491-4585-A584-9CE2AF7D5500}" type="datetime1">
               <a:rPr lang="en-US" smtClean="0"/>
               <a:pPr/>
-              <a:t>11/17/2025</a:t>
+              <a:t>12/6/2025</a:t>
             </a:fld>
             <a:endParaRPr lang="en-US"/>
           </a:p>
@@ -2534,7 +2547,7 @@
             <a:fld id="{67F45AC6-C491-4585-A584-9CE2AF7D5500}" type="datetime1">
               <a:rPr lang="en-US" smtClean="0"/>
               <a:pPr/>
-              <a:t>11/17/2025</a:t>
+              <a:t>12/6/2025</a:t>
             </a:fld>
             <a:endParaRPr lang="en-US"/>
           </a:p>
@@ -2686,7 +2699,7 @@
             <a:fld id="{67F45AC6-C491-4585-A584-9CE2AF7D5500}" type="datetime1">
               <a:rPr lang="en-US" smtClean="0"/>
               <a:pPr/>
-              <a:t>11/17/2025</a:t>
+              <a:t>12/6/2025</a:t>
             </a:fld>
             <a:endParaRPr lang="en-US"/>
           </a:p>
@@ -2815,7 +2828,7 @@
             <a:fld id="{67F45AC6-C491-4585-A584-9CE2AF7D5500}" type="datetime1">
               <a:rPr lang="en-US" smtClean="0"/>
               <a:pPr/>
-              <a:t>11/17/2025</a:t>
+              <a:t>12/6/2025</a:t>
             </a:fld>
             <a:endParaRPr lang="en-US"/>
           </a:p>
@@ -3069,7 +3082,7 @@
             <a:fld id="{67F45AC6-C491-4585-A584-9CE2AF7D5500}" type="datetime1">
               <a:rPr lang="en-US" smtClean="0"/>
               <a:pPr/>
-              <a:t>11/17/2025</a:t>
+              <a:t>12/6/2025</a:t>
             </a:fld>
             <a:endParaRPr lang="en-US"/>
           </a:p>
@@ -3517,7 +3530,7 @@
             <a:fld id="{67F45AC6-C491-4585-A584-9CE2AF7D5500}" type="datetime1">
               <a:rPr lang="en-US" smtClean="0"/>
               <a:pPr/>
-              <a:t>11/17/2025</a:t>
+              <a:t>12/6/2025</a:t>
             </a:fld>
             <a:endParaRPr lang="en-US"/>
           </a:p>
@@ -3854,7 +3867,7 @@
             <a:fld id="{67F45AC6-C491-4585-A584-9CE2AF7D5500}" type="datetime1">
               <a:rPr lang="en-US" smtClean="0"/>
               <a:pPr/>
-              <a:t>11/17/2025</a:t>
+              <a:t>12/6/2025</a:t>
             </a:fld>
             <a:endParaRPr lang="en-US"/>
           </a:p>
@@ -4715,6 +4728,374 @@
 </file>
 
 <file path=ppt/slides/slide10.xml><?xml version="1.0" encoding="utf-8"?>
+<p:sld xmlns:a="http://schemas.openxmlformats.org/drawingml/2006/main" xmlns:r="http://schemas.openxmlformats.org/officeDocument/2006/relationships" xmlns:p="http://schemas.openxmlformats.org/presentationml/2006/main">
+  <p:cSld>
+    <p:spTree>
+      <p:nvGrpSpPr>
+        <p:cNvPr id="1" name="">
+          <a:extLst>
+            <a:ext uri="{FF2B5EF4-FFF2-40B4-BE49-F238E27FC236}">
+              <a16:creationId xmlns:a16="http://schemas.microsoft.com/office/drawing/2014/main" id="{9B841A21-F3A4-BEED-4335-B280F0476433}"/>
+            </a:ext>
+          </a:extLst>
+        </p:cNvPr>
+        <p:cNvGrpSpPr/>
+        <p:nvPr/>
+      </p:nvGrpSpPr>
+      <p:grpSpPr>
+        <a:xfrm>
+          <a:off x="0" y="0"/>
+          <a:ext cx="0" cy="0"/>
+          <a:chOff x="0" y="0"/>
+          <a:chExt cx="0" cy="0"/>
+        </a:xfrm>
+      </p:grpSpPr>
+      <p:sp>
+        <p:nvSpPr>
+          <p:cNvPr id="2" name="Cím 1">
+            <a:extLst>
+              <a:ext uri="{FF2B5EF4-FFF2-40B4-BE49-F238E27FC236}">
+                <a16:creationId xmlns:a16="http://schemas.microsoft.com/office/drawing/2014/main" id="{1B244E95-BDC4-8D7E-9410-C71185CE8C85}"/>
+              </a:ext>
+            </a:extLst>
+          </p:cNvPr>
+          <p:cNvSpPr>
+            <a:spLocks noGrp="1"/>
+          </p:cNvSpPr>
+          <p:nvPr>
+            <p:ph type="title"/>
+          </p:nvPr>
+        </p:nvSpPr>
+        <p:spPr/>
+        <p:txBody>
+          <a:bodyPr/>
+          <a:lstStyle/>
+          <a:p>
+            <a:r>
+              <a:rPr lang="hu-HU" dirty="0"/>
+              <a:t>Daróczi Levente - fejlesztés</a:t>
+            </a:r>
+          </a:p>
+        </p:txBody>
+      </p:sp>
+      <p:pic>
+        <p:nvPicPr>
+          <p:cNvPr id="3" name="Kép 2" descr="A képen szöveg, képernyőkép, szoftver, Számítógépes ikon látható&#10;&#10;Lehet, hogy az AI által létrehozott tartalom helytelen.">
+            <a:extLst>
+              <a:ext uri="{FF2B5EF4-FFF2-40B4-BE49-F238E27FC236}">
+                <a16:creationId xmlns:a16="http://schemas.microsoft.com/office/drawing/2014/main" id="{3EAEA149-FD4B-C486-6C06-27AE2843440E}"/>
+              </a:ext>
+            </a:extLst>
+          </p:cNvPr>
+          <p:cNvPicPr>
+            <a:picLocks noChangeAspect="1"/>
+          </p:cNvPicPr>
+          <p:nvPr/>
+        </p:nvPicPr>
+        <p:blipFill>
+          <a:blip r:embed="rId2"/>
+          <a:stretch>
+            <a:fillRect/>
+          </a:stretch>
+        </p:blipFill>
+        <p:spPr>
+          <a:xfrm>
+            <a:off x="1190625" y="1323883"/>
+            <a:ext cx="10108407" cy="5329422"/>
+          </a:xfrm>
+          <a:prstGeom prst="rect">
+            <a:avLst/>
+          </a:prstGeom>
+        </p:spPr>
+      </p:pic>
+    </p:spTree>
+    <p:extLst>
+      <p:ext uri="{BB962C8B-B14F-4D97-AF65-F5344CB8AC3E}">
+        <p14:creationId xmlns:p14="http://schemas.microsoft.com/office/powerpoint/2010/main" val="1608496070"/>
+      </p:ext>
+    </p:extLst>
+  </p:cSld>
+  <p:clrMapOvr>
+    <a:masterClrMapping/>
+  </p:clrMapOvr>
+  <p:transition spd="med">
+    <p:pull/>
+  </p:transition>
+</p:sld>
+</file>
+
+<file path=ppt/slides/slide11.xml><?xml version="1.0" encoding="utf-8"?>
+<p:sld xmlns:a="http://schemas.openxmlformats.org/drawingml/2006/main" xmlns:r="http://schemas.openxmlformats.org/officeDocument/2006/relationships" xmlns:p="http://schemas.openxmlformats.org/presentationml/2006/main">
+  <p:cSld>
+    <p:spTree>
+      <p:nvGrpSpPr>
+        <p:cNvPr id="1" name="">
+          <a:extLst>
+            <a:ext uri="{FF2B5EF4-FFF2-40B4-BE49-F238E27FC236}">
+              <a16:creationId xmlns:a16="http://schemas.microsoft.com/office/drawing/2014/main" id="{33154BA3-C252-6C61-9BFC-DE7EDB567000}"/>
+            </a:ext>
+          </a:extLst>
+        </p:cNvPr>
+        <p:cNvGrpSpPr/>
+        <p:nvPr/>
+      </p:nvGrpSpPr>
+      <p:grpSpPr>
+        <a:xfrm>
+          <a:off x="0" y="0"/>
+          <a:ext cx="0" cy="0"/>
+          <a:chOff x="0" y="0"/>
+          <a:chExt cx="0" cy="0"/>
+        </a:xfrm>
+      </p:grpSpPr>
+      <p:pic>
+        <p:nvPicPr>
+          <p:cNvPr id="7" name="Kép 6">
+            <a:extLst>
+              <a:ext uri="{FF2B5EF4-FFF2-40B4-BE49-F238E27FC236}">
+                <a16:creationId xmlns:a16="http://schemas.microsoft.com/office/drawing/2014/main" id="{F4E52981-0A97-79A6-C9A4-5227C7512286}"/>
+              </a:ext>
+            </a:extLst>
+          </p:cNvPr>
+          <p:cNvPicPr>
+            <a:picLocks noChangeAspect="1"/>
+          </p:cNvPicPr>
+          <p:nvPr/>
+        </p:nvPicPr>
+        <p:blipFill>
+          <a:blip r:embed="rId2"/>
+          <a:stretch>
+            <a:fillRect/>
+          </a:stretch>
+        </p:blipFill>
+        <p:spPr>
+          <a:xfrm>
+            <a:off x="1304411" y="1447641"/>
+            <a:ext cx="10080372" cy="5342229"/>
+          </a:xfrm>
+          <a:prstGeom prst="rect">
+            <a:avLst/>
+          </a:prstGeom>
+        </p:spPr>
+      </p:pic>
+      <p:sp>
+        <p:nvSpPr>
+          <p:cNvPr id="2" name="Cím 1">
+            <a:extLst>
+              <a:ext uri="{FF2B5EF4-FFF2-40B4-BE49-F238E27FC236}">
+                <a16:creationId xmlns:a16="http://schemas.microsoft.com/office/drawing/2014/main" id="{97CEF7D3-2587-8E79-1C83-BE4B85DDBDE8}"/>
+              </a:ext>
+            </a:extLst>
+          </p:cNvPr>
+          <p:cNvSpPr>
+            <a:spLocks noGrp="1"/>
+          </p:cNvSpPr>
+          <p:nvPr>
+            <p:ph type="title"/>
+          </p:nvPr>
+        </p:nvSpPr>
+        <p:spPr/>
+        <p:txBody>
+          <a:bodyPr/>
+          <a:lstStyle/>
+          <a:p>
+            <a:r>
+              <a:rPr lang="hu-HU" dirty="0"/>
+              <a:t>Daróczi Levente - fejlesztés</a:t>
+            </a:r>
+          </a:p>
+        </p:txBody>
+      </p:sp>
+    </p:spTree>
+    <p:extLst>
+      <p:ext uri="{BB962C8B-B14F-4D97-AF65-F5344CB8AC3E}">
+        <p14:creationId xmlns:p14="http://schemas.microsoft.com/office/powerpoint/2010/main" val="3446405935"/>
+      </p:ext>
+    </p:extLst>
+  </p:cSld>
+  <p:clrMapOvr>
+    <a:masterClrMapping/>
+  </p:clrMapOvr>
+  <p:transition spd="med">
+    <p:pull/>
+  </p:transition>
+</p:sld>
+</file>
+
+<file path=ppt/slides/slide12.xml><?xml version="1.0" encoding="utf-8"?>
+<p:sld xmlns:a="http://schemas.openxmlformats.org/drawingml/2006/main" xmlns:r="http://schemas.openxmlformats.org/officeDocument/2006/relationships" xmlns:p="http://schemas.openxmlformats.org/presentationml/2006/main">
+  <p:cSld>
+    <p:spTree>
+      <p:nvGrpSpPr>
+        <p:cNvPr id="1" name=""/>
+        <p:cNvGrpSpPr/>
+        <p:nvPr/>
+      </p:nvGrpSpPr>
+      <p:grpSpPr>
+        <a:xfrm>
+          <a:off x="0" y="0"/>
+          <a:ext cx="0" cy="0"/>
+          <a:chOff x="0" y="0"/>
+          <a:chExt cx="0" cy="0"/>
+        </a:xfrm>
+      </p:grpSpPr>
+      <p:sp>
+        <p:nvSpPr>
+          <p:cNvPr id="2" name="Cím 1">
+            <a:extLst>
+              <a:ext uri="{FF2B5EF4-FFF2-40B4-BE49-F238E27FC236}">
+                <a16:creationId xmlns:a16="http://schemas.microsoft.com/office/drawing/2014/main" id="{E2E1A329-249F-85D8-8CC6-9930E3C8862F}"/>
+              </a:ext>
+            </a:extLst>
+          </p:cNvPr>
+          <p:cNvSpPr>
+            <a:spLocks noGrp="1"/>
+          </p:cNvSpPr>
+          <p:nvPr>
+            <p:ph type="title"/>
+          </p:nvPr>
+        </p:nvSpPr>
+        <p:spPr/>
+        <p:txBody>
+          <a:bodyPr/>
+          <a:lstStyle/>
+          <a:p>
+            <a:endParaRPr lang="hu-HU"/>
+          </a:p>
+        </p:txBody>
+      </p:sp>
+      <p:pic>
+        <p:nvPicPr>
+          <p:cNvPr id="4" name="Tartalom helye 3" descr="A képen szöveg, képernyőkép, szoftver, Multimédiás szoftver látható&#10;&#10;Lehet, hogy az AI által létrehozott tartalom helytelen.">
+            <a:extLst>
+              <a:ext uri="{FF2B5EF4-FFF2-40B4-BE49-F238E27FC236}">
+                <a16:creationId xmlns:a16="http://schemas.microsoft.com/office/drawing/2014/main" id="{A2B01C89-749B-41EE-15F4-3AB73E8388D1}"/>
+              </a:ext>
+            </a:extLst>
+          </p:cNvPr>
+          <p:cNvPicPr>
+            <a:picLocks noGrp="1" noChangeAspect="1"/>
+          </p:cNvPicPr>
+          <p:nvPr>
+            <p:ph idx="1"/>
+          </p:nvPr>
+        </p:nvPicPr>
+        <p:blipFill>
+          <a:blip r:embed="rId2"/>
+          <a:stretch>
+            <a:fillRect/>
+          </a:stretch>
+        </p:blipFill>
+        <p:spPr>
+          <a:xfrm>
+            <a:off x="437854" y="503639"/>
+            <a:ext cx="11321162" cy="5855674"/>
+          </a:xfrm>
+          <a:prstGeom prst="rect">
+            <a:avLst/>
+          </a:prstGeom>
+        </p:spPr>
+      </p:pic>
+    </p:spTree>
+    <p:extLst>
+      <p:ext uri="{BB962C8B-B14F-4D97-AF65-F5344CB8AC3E}">
+        <p14:creationId xmlns:p14="http://schemas.microsoft.com/office/powerpoint/2010/main" val="350952295"/>
+      </p:ext>
+    </p:extLst>
+  </p:cSld>
+  <p:clrMapOvr>
+    <a:masterClrMapping/>
+  </p:clrMapOvr>
+</p:sld>
+</file>
+
+<file path=ppt/slides/slide13.xml><?xml version="1.0" encoding="utf-8"?>
+<p:sld xmlns:a="http://schemas.openxmlformats.org/drawingml/2006/main" xmlns:r="http://schemas.openxmlformats.org/officeDocument/2006/relationships" xmlns:p="http://schemas.openxmlformats.org/presentationml/2006/main">
+  <p:cSld>
+    <p:spTree>
+      <p:nvGrpSpPr>
+        <p:cNvPr id="1" name=""/>
+        <p:cNvGrpSpPr/>
+        <p:nvPr/>
+      </p:nvGrpSpPr>
+      <p:grpSpPr>
+        <a:xfrm>
+          <a:off x="0" y="0"/>
+          <a:ext cx="0" cy="0"/>
+          <a:chOff x="0" y="0"/>
+          <a:chExt cx="0" cy="0"/>
+        </a:xfrm>
+      </p:grpSpPr>
+      <p:sp>
+        <p:nvSpPr>
+          <p:cNvPr id="2" name="Cím 1">
+            <a:extLst>
+              <a:ext uri="{FF2B5EF4-FFF2-40B4-BE49-F238E27FC236}">
+                <a16:creationId xmlns:a16="http://schemas.microsoft.com/office/drawing/2014/main" id="{71ECA124-B97B-5473-763B-0D00B6351B64}"/>
+              </a:ext>
+            </a:extLst>
+          </p:cNvPr>
+          <p:cNvSpPr>
+            <a:spLocks noGrp="1"/>
+          </p:cNvSpPr>
+          <p:nvPr>
+            <p:ph type="title"/>
+          </p:nvPr>
+        </p:nvSpPr>
+        <p:spPr/>
+        <p:txBody>
+          <a:bodyPr/>
+          <a:lstStyle/>
+          <a:p>
+            <a:endParaRPr lang="hu-HU"/>
+          </a:p>
+        </p:txBody>
+      </p:sp>
+      <p:pic>
+        <p:nvPicPr>
+          <p:cNvPr id="4" name="Tartalom helye 3" descr="A képen szöveg, képernyőkép, szoftver, Multimédiás szoftver látható&#10;&#10;Lehet, hogy az AI által létrehozott tartalom helytelen.">
+            <a:extLst>
+              <a:ext uri="{FF2B5EF4-FFF2-40B4-BE49-F238E27FC236}">
+                <a16:creationId xmlns:a16="http://schemas.microsoft.com/office/drawing/2014/main" id="{F158AEB3-5142-B0B0-3E60-0AC5B94393AD}"/>
+              </a:ext>
+            </a:extLst>
+          </p:cNvPr>
+          <p:cNvPicPr>
+            <a:picLocks noGrp="1" noChangeAspect="1"/>
+          </p:cNvPicPr>
+          <p:nvPr>
+            <p:ph idx="1"/>
+          </p:nvPr>
+        </p:nvPicPr>
+        <p:blipFill>
+          <a:blip r:embed="rId2"/>
+          <a:stretch>
+            <a:fillRect/>
+          </a:stretch>
+        </p:blipFill>
+        <p:spPr>
+          <a:xfrm>
+            <a:off x="587380" y="444108"/>
+            <a:ext cx="11319766" cy="5962831"/>
+          </a:xfrm>
+          <a:prstGeom prst="rect">
+            <a:avLst/>
+          </a:prstGeom>
+        </p:spPr>
+      </p:pic>
+    </p:spTree>
+    <p:extLst>
+      <p:ext uri="{BB962C8B-B14F-4D97-AF65-F5344CB8AC3E}">
+        <p14:creationId xmlns:p14="http://schemas.microsoft.com/office/powerpoint/2010/main" val="2009619120"/>
+      </p:ext>
+    </p:extLst>
+  </p:cSld>
+  <p:clrMapOvr>
+    <a:masterClrMapping/>
+  </p:clrMapOvr>
+</p:sld>
+</file>
+
+<file path=ppt/slides/slide14.xml><?xml version="1.0" encoding="utf-8"?>
 <p:sld xmlns:a="http://schemas.openxmlformats.org/drawingml/2006/main" xmlns:r="http://schemas.openxmlformats.org/officeDocument/2006/relationships" xmlns:p="http://schemas.openxmlformats.org/presentationml/2006/main">
   <p:cSld>
     <p:spTree>
@@ -5266,2071 +5647,7 @@
 </p:sld>
 </file>
 
-<file path=ppt/slides/slide11.xml><?xml version="1.0" encoding="utf-8"?>
-<p:sld xmlns:a="http://schemas.openxmlformats.org/drawingml/2006/main" xmlns:r="http://schemas.openxmlformats.org/officeDocument/2006/relationships" xmlns:p="http://schemas.openxmlformats.org/presentationml/2006/main">
-  <p:cSld>
-    <p:bg>
-      <p:bgPr>
-        <a:gradFill rotWithShape="1">
-          <a:gsLst>
-            <a:gs pos="0">
-              <a:schemeClr val="bg2">
-                <a:tint val="94000"/>
-                <a:satMod val="80000"/>
-                <a:lumMod val="106000"/>
-              </a:schemeClr>
-            </a:gs>
-            <a:gs pos="100000">
-              <a:schemeClr val="bg2">
-                <a:shade val="80000"/>
-              </a:schemeClr>
-            </a:gs>
-          </a:gsLst>
-          <a:path path="circle">
-            <a:fillToRect l="43000" r="43000" b="100000"/>
-          </a:path>
-        </a:gradFill>
-        <a:effectLst/>
-      </p:bgPr>
-    </p:bg>
-    <p:spTree>
-      <p:nvGrpSpPr>
-        <p:cNvPr id="1" name=""/>
-        <p:cNvGrpSpPr/>
-        <p:nvPr/>
-      </p:nvGrpSpPr>
-      <p:grpSpPr>
-        <a:xfrm>
-          <a:off x="0" y="0"/>
-          <a:ext cx="0" cy="0"/>
-          <a:chOff x="0" y="0"/>
-          <a:chExt cx="0" cy="0"/>
-        </a:xfrm>
-      </p:grpSpPr>
-      <p:sp>
-        <p:nvSpPr>
-          <p:cNvPr id="43" name="Rectangle 42">
-            <a:extLst>
-              <a:ext uri="{FF2B5EF4-FFF2-40B4-BE49-F238E27FC236}">
-                <a16:creationId xmlns:a16="http://schemas.microsoft.com/office/drawing/2014/main" id="{905CFAD9-EABE-4F83-B098-604752164E6A}"/>
-              </a:ext>
-              <a:ext uri="{C183D7F6-B498-43B3-948B-1728B52AA6E4}">
-                <adec:decorative xmlns:adec="http://schemas.microsoft.com/office/drawing/2017/decorative" val="1"/>
-              </a:ext>
-            </a:extLst>
-          </p:cNvPr>
-          <p:cNvSpPr>
-            <a:spLocks noGrp="1" noRot="1" noChangeAspect="1" noMove="1" noResize="1" noEditPoints="1" noAdjustHandles="1" noChangeArrowheads="1" noChangeShapeType="1" noTextEdit="1"/>
-          </p:cNvSpPr>
-          <p:nvPr>
-            <p:extLst>
-              <p:ext uri="{386F3935-93C4-4BCD-93E2-E3B085C9AB24}">
-                <p16:designElem xmlns:p16="http://schemas.microsoft.com/office/powerpoint/2015/main" val="1"/>
-              </p:ext>
-            </p:extLst>
-          </p:nvPr>
-        </p:nvSpPr>
-        <p:spPr>
-          <a:xfrm>
-            <a:off x="0" y="2019476"/>
-            <a:ext cx="12192000" cy="4105941"/>
-          </a:xfrm>
-          <a:prstGeom prst="rect">
-            <a:avLst/>
-          </a:prstGeom>
-          <a:gradFill flip="none" rotWithShape="1">
-            <a:gsLst>
-              <a:gs pos="0">
-                <a:schemeClr val="bg2">
-                  <a:alpha val="0"/>
-                </a:schemeClr>
-              </a:gs>
-              <a:gs pos="100000">
-                <a:schemeClr val="bg2"/>
-              </a:gs>
-            </a:gsLst>
-            <a:lin ang="5400000" scaled="0"/>
-            <a:tileRect/>
-          </a:gradFill>
-          <a:ln>
-            <a:noFill/>
-          </a:ln>
-        </p:spPr>
-        <p:style>
-          <a:lnRef idx="2">
-            <a:schemeClr val="accent1">
-              <a:shade val="50000"/>
-            </a:schemeClr>
-          </a:lnRef>
-          <a:fillRef idx="1">
-            <a:schemeClr val="accent1"/>
-          </a:fillRef>
-          <a:effectRef idx="0">
-            <a:schemeClr val="accent1"/>
-          </a:effectRef>
-          <a:fontRef idx="minor">
-            <a:schemeClr val="lt1"/>
-          </a:fontRef>
-        </p:style>
-        <p:txBody>
-          <a:bodyPr/>
-          <a:lstStyle/>
-          <a:p>
-            <a:endParaRPr lang="en-US"/>
-          </a:p>
-        </p:txBody>
-      </p:sp>
-      <p:pic>
-        <p:nvPicPr>
-          <p:cNvPr id="45" name="Picture 44">
-            <a:extLst>
-              <a:ext uri="{FF2B5EF4-FFF2-40B4-BE49-F238E27FC236}">
-                <a16:creationId xmlns:a16="http://schemas.microsoft.com/office/drawing/2014/main" id="{C99610E4-6194-4817-B152-498995E77181}"/>
-              </a:ext>
-              <a:ext uri="{C183D7F6-B498-43B3-948B-1728B52AA6E4}">
-                <adec:decorative xmlns:adec="http://schemas.microsoft.com/office/drawing/2017/decorative" val="1"/>
-              </a:ext>
-            </a:extLst>
-          </p:cNvPr>
-          <p:cNvPicPr>
-            <a:picLocks noGrp="1" noRot="1" noChangeAspect="1" noMove="1" noResize="1" noEditPoints="1" noAdjustHandles="1" noChangeArrowheads="1" noChangeShapeType="1" noCrop="1"/>
-          </p:cNvPicPr>
-          <p:nvPr>
-            <p:extLst>
-              <p:ext uri="{386F3935-93C4-4BCD-93E2-E3B085C9AB24}">
-                <p16:designElem xmlns:p16="http://schemas.microsoft.com/office/powerpoint/2015/main" val="1"/>
-              </p:ext>
-            </p:extLst>
-          </p:nvPr>
-        </p:nvPicPr>
-        <p:blipFill rotWithShape="1">
-          <a:blip r:embed="rId2">
-            <a:extLst>
-              <a:ext uri="{28A0092B-C50C-407E-A947-70E740481C1C}">
-                <a14:useLocalDpi xmlns:a14="http://schemas.microsoft.com/office/drawing/2010/main" val="0"/>
-              </a:ext>
-            </a:extLst>
-          </a:blip>
-          <a:srcRect t="1538" b="-1538"/>
-          <a:stretch/>
-        </p:blipFill>
-        <p:spPr bwMode="black">
-          <a:xfrm>
-            <a:off x="0" y="6126480"/>
-            <a:ext cx="12192000" cy="742950"/>
-          </a:xfrm>
-          <a:prstGeom prst="rect">
-            <a:avLst/>
-          </a:prstGeom>
-        </p:spPr>
-      </p:pic>
-      <p:cxnSp>
-        <p:nvCxnSpPr>
-          <p:cNvPr id="47" name="Straight Connector 46">
-            <a:extLst>
-              <a:ext uri="{FF2B5EF4-FFF2-40B4-BE49-F238E27FC236}">
-                <a16:creationId xmlns:a16="http://schemas.microsoft.com/office/drawing/2014/main" id="{D885E9F4-7DB6-4B77-B1FF-80BFCE81277B}"/>
-              </a:ext>
-              <a:ext uri="{C183D7F6-B498-43B3-948B-1728B52AA6E4}">
-                <adec:decorative xmlns:adec="http://schemas.microsoft.com/office/drawing/2017/decorative" val="1"/>
-              </a:ext>
-            </a:extLst>
-          </p:cNvPr>
-          <p:cNvCxnSpPr>
-            <a:cxnSpLocks noGrp="1" noRot="1" noChangeAspect="1" noMove="1" noResize="1" noEditPoints="1" noAdjustHandles="1" noChangeArrowheads="1" noChangeShapeType="1"/>
-          </p:cNvCxnSpPr>
-          <p:nvPr>
-            <p:extLst>
-              <p:ext uri="{386F3935-93C4-4BCD-93E2-E3B085C9AB24}">
-                <p16:designElem xmlns:p16="http://schemas.microsoft.com/office/powerpoint/2015/main" val="1"/>
-              </p:ext>
-            </p:extLst>
-          </p:nvPr>
-        </p:nvCxnSpPr>
-        <p:spPr>
-          <a:xfrm>
-            <a:off x="0" y="6128413"/>
-            <a:ext cx="12192000" cy="0"/>
-          </a:xfrm>
-          <a:prstGeom prst="line">
-            <a:avLst/>
-          </a:prstGeom>
-          <a:ln w="12700">
-            <a:solidFill>
-              <a:srgbClr val="000001">
-                <a:alpha val="20000"/>
-              </a:srgbClr>
-            </a:solidFill>
-          </a:ln>
-        </p:spPr>
-        <p:style>
-          <a:lnRef idx="1">
-            <a:schemeClr val="accent1"/>
-          </a:lnRef>
-          <a:fillRef idx="0">
-            <a:schemeClr val="accent1"/>
-          </a:fillRef>
-          <a:effectRef idx="0">
-            <a:schemeClr val="accent1"/>
-          </a:effectRef>
-          <a:fontRef idx="minor">
-            <a:schemeClr val="tx1"/>
-          </a:fontRef>
-        </p:style>
-      </p:cxnSp>
-      <p:cxnSp>
-        <p:nvCxnSpPr>
-          <p:cNvPr id="49" name="Straight Connector 48">
-            <a:extLst>
-              <a:ext uri="{FF2B5EF4-FFF2-40B4-BE49-F238E27FC236}">
-                <a16:creationId xmlns:a16="http://schemas.microsoft.com/office/drawing/2014/main" id="{DB639A2B-C30C-4F6F-B847-6960F3CF8A64}"/>
-              </a:ext>
-              <a:ext uri="{C183D7F6-B498-43B3-948B-1728B52AA6E4}">
-                <adec:decorative xmlns:adec="http://schemas.microsoft.com/office/drawing/2017/decorative" val="1"/>
-              </a:ext>
-            </a:extLst>
-          </p:cNvPr>
-          <p:cNvCxnSpPr>
-            <a:cxnSpLocks noGrp="1" noRot="1" noChangeAspect="1" noMove="1" noResize="1" noEditPoints="1" noAdjustHandles="1" noChangeArrowheads="1" noChangeShapeType="1"/>
-          </p:cNvCxnSpPr>
-          <p:nvPr>
-            <p:extLst>
-              <p:ext uri="{386F3935-93C4-4BCD-93E2-E3B085C9AB24}">
-                <p16:designElem xmlns:p16="http://schemas.microsoft.com/office/powerpoint/2015/main" val="1"/>
-              </p:ext>
-            </p:extLst>
-          </p:nvPr>
-        </p:nvCxnSpPr>
-        <p:spPr>
-          <a:xfrm>
-            <a:off x="2417780" y="3528542"/>
-            <a:ext cx="8637072" cy="0"/>
-          </a:xfrm>
-          <a:prstGeom prst="line">
-            <a:avLst/>
-          </a:prstGeom>
-          <a:ln w="31750"/>
-        </p:spPr>
-        <p:style>
-          <a:lnRef idx="3">
-            <a:schemeClr val="accent1"/>
-          </a:lnRef>
-          <a:fillRef idx="0">
-            <a:schemeClr val="accent1"/>
-          </a:fillRef>
-          <a:effectRef idx="2">
-            <a:schemeClr val="accent1"/>
-          </a:effectRef>
-          <a:fontRef idx="minor">
-            <a:schemeClr val="tx1"/>
-          </a:fontRef>
-        </p:style>
-      </p:cxnSp>
-      <p:sp useBgFill="1">
-        <p:nvSpPr>
-          <p:cNvPr id="51" name="Rectangle 50">
-            <a:extLst>
-              <a:ext uri="{FF2B5EF4-FFF2-40B4-BE49-F238E27FC236}">
-                <a16:creationId xmlns:a16="http://schemas.microsoft.com/office/drawing/2014/main" id="{D9926FA0-8ED1-4F3A-B23B-FD94D82C74B5}"/>
-              </a:ext>
-              <a:ext uri="{C183D7F6-B498-43B3-948B-1728B52AA6E4}">
-                <adec:decorative xmlns:adec="http://schemas.microsoft.com/office/drawing/2017/decorative" val="1"/>
-              </a:ext>
-            </a:extLst>
-          </p:cNvPr>
-          <p:cNvSpPr>
-            <a:spLocks noGrp="1" noRot="1" noChangeAspect="1" noMove="1" noResize="1" noEditPoints="1" noAdjustHandles="1" noChangeArrowheads="1" noChangeShapeType="1" noTextEdit="1"/>
-          </p:cNvSpPr>
-          <p:nvPr>
-            <p:extLst>
-              <p:ext uri="{386F3935-93C4-4BCD-93E2-E3B085C9AB24}">
-                <p16:designElem xmlns:p16="http://schemas.microsoft.com/office/powerpoint/2015/main" val="1"/>
-              </p:ext>
-            </p:extLst>
-          </p:nvPr>
-        </p:nvSpPr>
-        <p:spPr>
-          <a:xfrm>
-            <a:off x="2" y="0"/>
-            <a:ext cx="12191695" cy="6858000"/>
-          </a:xfrm>
-          <a:prstGeom prst="rect">
-            <a:avLst/>
-          </a:prstGeom>
-          <a:ln>
-            <a:noFill/>
-          </a:ln>
-        </p:spPr>
-        <p:style>
-          <a:lnRef idx="2">
-            <a:schemeClr val="accent1">
-              <a:shade val="50000"/>
-            </a:schemeClr>
-          </a:lnRef>
-          <a:fillRef idx="1">
-            <a:schemeClr val="accent1"/>
-          </a:fillRef>
-          <a:effectRef idx="0">
-            <a:schemeClr val="accent1"/>
-          </a:effectRef>
-          <a:fontRef idx="minor">
-            <a:schemeClr val="lt1"/>
-          </a:fontRef>
-        </p:style>
-        <p:txBody>
-          <a:bodyPr rtlCol="0" anchor="ctr"/>
-          <a:lstStyle/>
-          <a:p>
-            <a:pPr algn="ctr"/>
-            <a:endParaRPr lang="en-US"/>
-          </a:p>
-        </p:txBody>
-      </p:sp>
-      <p:sp>
-        <p:nvSpPr>
-          <p:cNvPr id="53" name="Rectangle 52">
-            <a:extLst>
-              <a:ext uri="{FF2B5EF4-FFF2-40B4-BE49-F238E27FC236}">
-                <a16:creationId xmlns:a16="http://schemas.microsoft.com/office/drawing/2014/main" id="{3A102CD9-C25A-4A86-B9D3-D7280D91428B}"/>
-              </a:ext>
-              <a:ext uri="{C183D7F6-B498-43B3-948B-1728B52AA6E4}">
-                <adec:decorative xmlns:adec="http://schemas.microsoft.com/office/drawing/2017/decorative" val="1"/>
-              </a:ext>
-            </a:extLst>
-          </p:cNvPr>
-          <p:cNvSpPr>
-            <a:spLocks noGrp="1" noRot="1" noChangeAspect="1" noMove="1" noResize="1" noEditPoints="1" noAdjustHandles="1" noChangeArrowheads="1" noChangeShapeType="1" noTextEdit="1"/>
-          </p:cNvSpPr>
-          <p:nvPr>
-            <p:extLst>
-              <p:ext uri="{386F3935-93C4-4BCD-93E2-E3B085C9AB24}">
-                <p16:designElem xmlns:p16="http://schemas.microsoft.com/office/powerpoint/2015/main" val="1"/>
-              </p:ext>
-            </p:extLst>
-          </p:nvPr>
-        </p:nvSpPr>
-        <p:spPr>
-          <a:xfrm>
-            <a:off x="0" y="2019476"/>
-            <a:ext cx="12192000" cy="4105941"/>
-          </a:xfrm>
-          <a:prstGeom prst="rect">
-            <a:avLst/>
-          </a:prstGeom>
-          <a:gradFill flip="none" rotWithShape="1">
-            <a:gsLst>
-              <a:gs pos="0">
-                <a:schemeClr val="bg2">
-                  <a:alpha val="0"/>
-                </a:schemeClr>
-              </a:gs>
-              <a:gs pos="100000">
-                <a:schemeClr val="bg2"/>
-              </a:gs>
-            </a:gsLst>
-            <a:lin ang="5400000" scaled="0"/>
-            <a:tileRect/>
-          </a:gradFill>
-          <a:ln>
-            <a:noFill/>
-          </a:ln>
-        </p:spPr>
-        <p:style>
-          <a:lnRef idx="2">
-            <a:schemeClr val="accent1">
-              <a:shade val="50000"/>
-            </a:schemeClr>
-          </a:lnRef>
-          <a:fillRef idx="1">
-            <a:schemeClr val="accent1"/>
-          </a:fillRef>
-          <a:effectRef idx="0">
-            <a:schemeClr val="accent1"/>
-          </a:effectRef>
-          <a:fontRef idx="minor">
-            <a:schemeClr val="lt1"/>
-          </a:fontRef>
-        </p:style>
-        <p:txBody>
-          <a:bodyPr rtlCol="0" anchor="ctr"/>
-          <a:lstStyle/>
-          <a:p>
-            <a:pPr lvl="0" algn="ctr"/>
-            <a:endParaRPr lang="en-US"/>
-          </a:p>
-        </p:txBody>
-      </p:sp>
-      <p:sp>
-        <p:nvSpPr>
-          <p:cNvPr id="2" name="Title 1">
-            <a:extLst>
-              <a:ext uri="{FF2B5EF4-FFF2-40B4-BE49-F238E27FC236}">
-                <a16:creationId xmlns:a16="http://schemas.microsoft.com/office/drawing/2014/main" id="{D3862F8B-DB53-D69C-19EE-0A453B36C085}"/>
-              </a:ext>
-            </a:extLst>
-          </p:cNvPr>
-          <p:cNvSpPr>
-            <a:spLocks noGrp="1"/>
-          </p:cNvSpPr>
-          <p:nvPr>
-            <p:ph type="title"/>
-          </p:nvPr>
-        </p:nvSpPr>
-        <p:spPr>
-          <a:xfrm>
-            <a:off x="659301" y="1474969"/>
-            <a:ext cx="2823919" cy="1868760"/>
-          </a:xfrm>
-        </p:spPr>
-        <p:txBody>
-          <a:bodyPr vert="horz" lIns="91440" tIns="45720" rIns="91440" bIns="0" rtlCol="0" anchor="b">
-            <a:normAutofit/>
-          </a:bodyPr>
-          <a:lstStyle/>
-          <a:p>
-            <a:r>
-              <a:rPr lang="en-US" sz="2800"/>
-              <a:t>Vlajk Sándor - Management</a:t>
-            </a:r>
-          </a:p>
-        </p:txBody>
-      </p:sp>
-      <p:pic>
-        <p:nvPicPr>
-          <p:cNvPr id="9" name="Picture 8">
-            <a:extLst>
-              <a:ext uri="{FF2B5EF4-FFF2-40B4-BE49-F238E27FC236}">
-                <a16:creationId xmlns:a16="http://schemas.microsoft.com/office/drawing/2014/main" id="{295C5C9D-063C-AF9D-2862-059BEA52D32C}"/>
-              </a:ext>
-            </a:extLst>
-          </p:cNvPr>
-          <p:cNvPicPr>
-            <a:picLocks noChangeAspect="1"/>
-          </p:cNvPicPr>
-          <p:nvPr/>
-        </p:nvPicPr>
-        <p:blipFill>
-          <a:blip r:embed="rId3"/>
-          <a:stretch>
-            <a:fillRect/>
-          </a:stretch>
-        </p:blipFill>
-        <p:spPr>
-          <a:xfrm>
-            <a:off x="3699533" y="533450"/>
-            <a:ext cx="4261962" cy="2994029"/>
-          </a:xfrm>
-          <a:prstGeom prst="rect">
-            <a:avLst/>
-          </a:prstGeom>
-        </p:spPr>
-      </p:pic>
-      <p:pic>
-        <p:nvPicPr>
-          <p:cNvPr id="11" name="Picture 10">
-            <a:extLst>
-              <a:ext uri="{FF2B5EF4-FFF2-40B4-BE49-F238E27FC236}">
-                <a16:creationId xmlns:a16="http://schemas.microsoft.com/office/drawing/2014/main" id="{39383BF8-280F-E773-B719-D67867986341}"/>
-              </a:ext>
-            </a:extLst>
-          </p:cNvPr>
-          <p:cNvPicPr>
-            <a:picLocks noChangeAspect="1"/>
-          </p:cNvPicPr>
-          <p:nvPr/>
-        </p:nvPicPr>
-        <p:blipFill>
-          <a:blip r:embed="rId4"/>
-          <a:stretch>
-            <a:fillRect/>
-          </a:stretch>
-        </p:blipFill>
-        <p:spPr>
-          <a:xfrm>
-            <a:off x="8027625" y="1071185"/>
-            <a:ext cx="2015925" cy="3858231"/>
-          </a:xfrm>
-          <a:prstGeom prst="rect">
-            <a:avLst/>
-          </a:prstGeom>
-        </p:spPr>
-      </p:pic>
-      <p:cxnSp>
-        <p:nvCxnSpPr>
-          <p:cNvPr id="55" name="Straight Connector 54">
-            <a:extLst>
-              <a:ext uri="{FF2B5EF4-FFF2-40B4-BE49-F238E27FC236}">
-                <a16:creationId xmlns:a16="http://schemas.microsoft.com/office/drawing/2014/main" id="{90676B93-40FB-4FA7-8E89-C24B7B1F8F57}"/>
-              </a:ext>
-              <a:ext uri="{C183D7F6-B498-43B3-948B-1728B52AA6E4}">
-                <adec:decorative xmlns:adec="http://schemas.microsoft.com/office/drawing/2017/decorative" val="1"/>
-              </a:ext>
-            </a:extLst>
-          </p:cNvPr>
-          <p:cNvCxnSpPr>
-            <a:cxnSpLocks noGrp="1" noRot="1" noChangeAspect="1" noMove="1" noResize="1" noEditPoints="1" noAdjustHandles="1" noChangeArrowheads="1" noChangeShapeType="1"/>
-          </p:cNvCxnSpPr>
-          <p:nvPr>
-            <p:extLst>
-              <p:ext uri="{386F3935-93C4-4BCD-93E2-E3B085C9AB24}">
-                <p16:designElem xmlns:p16="http://schemas.microsoft.com/office/powerpoint/2015/main" val="1"/>
-              </p:ext>
-            </p:extLst>
-          </p:nvPr>
-        </p:nvCxnSpPr>
-        <p:spPr>
-          <a:xfrm>
-            <a:off x="659301" y="3528543"/>
-            <a:ext cx="2823919" cy="0"/>
-          </a:xfrm>
-          <a:prstGeom prst="line">
-            <a:avLst/>
-          </a:prstGeom>
-          <a:ln w="31750"/>
-        </p:spPr>
-        <p:style>
-          <a:lnRef idx="3">
-            <a:schemeClr val="accent1"/>
-          </a:lnRef>
-          <a:fillRef idx="0">
-            <a:schemeClr val="accent1"/>
-          </a:fillRef>
-          <a:effectRef idx="2">
-            <a:schemeClr val="accent1"/>
-          </a:effectRef>
-          <a:fontRef idx="minor">
-            <a:schemeClr val="tx1"/>
-          </a:fontRef>
-        </p:style>
-      </p:cxnSp>
-      <p:pic>
-        <p:nvPicPr>
-          <p:cNvPr id="7" name="Picture 6">
-            <a:extLst>
-              <a:ext uri="{FF2B5EF4-FFF2-40B4-BE49-F238E27FC236}">
-                <a16:creationId xmlns:a16="http://schemas.microsoft.com/office/drawing/2014/main" id="{83799579-8EB9-DC77-CDAC-986F8B3F2A7D}"/>
-              </a:ext>
-            </a:extLst>
-          </p:cNvPr>
-          <p:cNvPicPr>
-            <a:picLocks noChangeAspect="1"/>
-          </p:cNvPicPr>
-          <p:nvPr/>
-        </p:nvPicPr>
-        <p:blipFill>
-          <a:blip r:embed="rId5" cstate="print"/>
-          <a:stretch>
-            <a:fillRect/>
-          </a:stretch>
-        </p:blipFill>
-        <p:spPr>
-          <a:xfrm>
-            <a:off x="463795" y="3885819"/>
-            <a:ext cx="4508551" cy="1882320"/>
-          </a:xfrm>
-          <a:prstGeom prst="rect">
-            <a:avLst/>
-          </a:prstGeom>
-        </p:spPr>
-      </p:pic>
-      <p:pic>
-        <p:nvPicPr>
-          <p:cNvPr id="5" name="Picture 4">
-            <a:extLst>
-              <a:ext uri="{FF2B5EF4-FFF2-40B4-BE49-F238E27FC236}">
-                <a16:creationId xmlns:a16="http://schemas.microsoft.com/office/drawing/2014/main" id="{43E50A31-341F-5C88-C296-35A974D49814}"/>
-              </a:ext>
-            </a:extLst>
-          </p:cNvPr>
-          <p:cNvPicPr>
-            <a:picLocks noChangeAspect="1"/>
-          </p:cNvPicPr>
-          <p:nvPr/>
-        </p:nvPicPr>
-        <p:blipFill>
-          <a:blip r:embed="rId6"/>
-          <a:stretch>
-            <a:fillRect/>
-          </a:stretch>
-        </p:blipFill>
-        <p:spPr>
-          <a:xfrm>
-            <a:off x="10175810" y="1340666"/>
-            <a:ext cx="1890344" cy="3319267"/>
-          </a:xfrm>
-          <a:prstGeom prst="rect">
-            <a:avLst/>
-          </a:prstGeom>
-        </p:spPr>
-      </p:pic>
-      <p:pic>
-        <p:nvPicPr>
-          <p:cNvPr id="57" name="Picture 56">
-            <a:extLst>
-              <a:ext uri="{FF2B5EF4-FFF2-40B4-BE49-F238E27FC236}">
-                <a16:creationId xmlns:a16="http://schemas.microsoft.com/office/drawing/2014/main" id="{3509D85C-1896-4695-A144-B562AFC58EB2}"/>
-              </a:ext>
-              <a:ext uri="{C183D7F6-B498-43B3-948B-1728B52AA6E4}">
-                <adec:decorative xmlns:adec="http://schemas.microsoft.com/office/drawing/2017/decorative" val="1"/>
-              </a:ext>
-            </a:extLst>
-          </p:cNvPr>
-          <p:cNvPicPr>
-            <a:picLocks noGrp="1" noRot="1" noChangeAspect="1" noMove="1" noResize="1" noEditPoints="1" noAdjustHandles="1" noChangeArrowheads="1" noChangeShapeType="1" noCrop="1"/>
-          </p:cNvPicPr>
-          <p:nvPr>
-            <p:extLst>
-              <p:ext uri="{386F3935-93C4-4BCD-93E2-E3B085C9AB24}">
-                <p16:designElem xmlns:p16="http://schemas.microsoft.com/office/powerpoint/2015/main" val="1"/>
-              </p:ext>
-            </p:extLst>
-          </p:nvPr>
-        </p:nvPicPr>
-        <p:blipFill rotWithShape="1">
-          <a:blip r:embed="rId2">
-            <a:extLst>
-              <a:ext uri="{28A0092B-C50C-407E-A947-70E740481C1C}">
-                <a14:useLocalDpi xmlns:a14="http://schemas.microsoft.com/office/drawing/2010/main" val="0"/>
-              </a:ext>
-            </a:extLst>
-          </a:blip>
-          <a:srcRect t="1538" b="-1538"/>
-          <a:stretch/>
-        </p:blipFill>
-        <p:spPr bwMode="black">
-          <a:xfrm>
-            <a:off x="0" y="6126480"/>
-            <a:ext cx="12192000" cy="742950"/>
-          </a:xfrm>
-          <a:prstGeom prst="rect">
-            <a:avLst/>
-          </a:prstGeom>
-        </p:spPr>
-      </p:pic>
-      <p:cxnSp>
-        <p:nvCxnSpPr>
-          <p:cNvPr id="59" name="Straight Connector 58">
-            <a:extLst>
-              <a:ext uri="{FF2B5EF4-FFF2-40B4-BE49-F238E27FC236}">
-                <a16:creationId xmlns:a16="http://schemas.microsoft.com/office/drawing/2014/main" id="{6D9F55CD-CB1D-4CB9-98D3-2BC602BC430E}"/>
-              </a:ext>
-              <a:ext uri="{C183D7F6-B498-43B3-948B-1728B52AA6E4}">
-                <adec:decorative xmlns:adec="http://schemas.microsoft.com/office/drawing/2017/decorative" val="1"/>
-              </a:ext>
-            </a:extLst>
-          </p:cNvPr>
-          <p:cNvCxnSpPr>
-            <a:cxnSpLocks noGrp="1" noRot="1" noChangeAspect="1" noMove="1" noResize="1" noEditPoints="1" noAdjustHandles="1" noChangeArrowheads="1" noChangeShapeType="1"/>
-          </p:cNvCxnSpPr>
-          <p:nvPr>
-            <p:extLst>
-              <p:ext uri="{386F3935-93C4-4BCD-93E2-E3B085C9AB24}">
-                <p16:designElem xmlns:p16="http://schemas.microsoft.com/office/powerpoint/2015/main" val="1"/>
-              </p:ext>
-            </p:extLst>
-          </p:nvPr>
-        </p:nvCxnSpPr>
-        <p:spPr>
-          <a:xfrm>
-            <a:off x="0" y="6128413"/>
-            <a:ext cx="12192000" cy="0"/>
-          </a:xfrm>
-          <a:prstGeom prst="line">
-            <a:avLst/>
-          </a:prstGeom>
-          <a:ln w="12700">
-            <a:solidFill>
-              <a:srgbClr val="000001">
-                <a:alpha val="20000"/>
-              </a:srgbClr>
-            </a:solidFill>
-          </a:ln>
-        </p:spPr>
-        <p:style>
-          <a:lnRef idx="1">
-            <a:schemeClr val="accent1"/>
-          </a:lnRef>
-          <a:fillRef idx="0">
-            <a:schemeClr val="accent1"/>
-          </a:fillRef>
-          <a:effectRef idx="0">
-            <a:schemeClr val="accent1"/>
-          </a:effectRef>
-          <a:fontRef idx="minor">
-            <a:schemeClr val="tx1"/>
-          </a:fontRef>
-        </p:style>
-      </p:cxnSp>
-    </p:spTree>
-    <p:extLst>
-      <p:ext uri="{BB962C8B-B14F-4D97-AF65-F5344CB8AC3E}">
-        <p14:creationId xmlns:p14="http://schemas.microsoft.com/office/powerpoint/2010/main" val="1886950838"/>
-      </p:ext>
-    </p:extLst>
-  </p:cSld>
-  <p:clrMapOvr>
-    <a:masterClrMapping/>
-  </p:clrMapOvr>
-</p:sld>
-</file>
-
-<file path=ppt/slides/slide12.xml><?xml version="1.0" encoding="utf-8"?>
-<p:sld xmlns:a="http://schemas.openxmlformats.org/drawingml/2006/main" xmlns:r="http://schemas.openxmlformats.org/officeDocument/2006/relationships" xmlns:p="http://schemas.openxmlformats.org/presentationml/2006/main">
-  <p:cSld>
-    <p:bg>
-      <p:bgPr>
-        <a:gradFill rotWithShape="1">
-          <a:gsLst>
-            <a:gs pos="0">
-              <a:schemeClr val="bg2">
-                <a:tint val="94000"/>
-                <a:satMod val="80000"/>
-                <a:lumMod val="106000"/>
-              </a:schemeClr>
-            </a:gs>
-            <a:gs pos="100000">
-              <a:schemeClr val="bg2">
-                <a:shade val="80000"/>
-              </a:schemeClr>
-            </a:gs>
-          </a:gsLst>
-          <a:path path="circle">
-            <a:fillToRect l="43000" r="43000" b="100000"/>
-          </a:path>
-        </a:gradFill>
-        <a:effectLst/>
-      </p:bgPr>
-    </p:bg>
-    <p:spTree>
-      <p:nvGrpSpPr>
-        <p:cNvPr id="1" name=""/>
-        <p:cNvGrpSpPr/>
-        <p:nvPr/>
-      </p:nvGrpSpPr>
-      <p:grpSpPr>
-        <a:xfrm>
-          <a:off x="0" y="0"/>
-          <a:ext cx="0" cy="0"/>
-          <a:chOff x="0" y="0"/>
-          <a:chExt cx="0" cy="0"/>
-        </a:xfrm>
-      </p:grpSpPr>
-      <p:sp>
-        <p:nvSpPr>
-          <p:cNvPr id="50" name="Rectangle 49">
-            <a:extLst>
-              <a:ext uri="{FF2B5EF4-FFF2-40B4-BE49-F238E27FC236}">
-                <a16:creationId xmlns:a16="http://schemas.microsoft.com/office/drawing/2014/main" id="{E724B9E8-02C8-4B2E-8770-A00A67760DF0}"/>
-              </a:ext>
-              <a:ext uri="{C183D7F6-B498-43B3-948B-1728B52AA6E4}">
-                <adec:decorative xmlns:adec="http://schemas.microsoft.com/office/drawing/2017/decorative" val="1"/>
-              </a:ext>
-            </a:extLst>
-          </p:cNvPr>
-          <p:cNvSpPr>
-            <a:spLocks noGrp="1" noRot="1" noChangeAspect="1" noMove="1" noResize="1" noEditPoints="1" noAdjustHandles="1" noChangeArrowheads="1" noChangeShapeType="1" noTextEdit="1"/>
-          </p:cNvSpPr>
-          <p:nvPr>
-            <p:extLst>
-              <p:ext uri="{386F3935-93C4-4BCD-93E2-E3B085C9AB24}">
-                <p16:designElem xmlns:p16="http://schemas.microsoft.com/office/powerpoint/2015/main" val="1"/>
-              </p:ext>
-            </p:extLst>
-          </p:nvPr>
-        </p:nvSpPr>
-        <p:spPr>
-          <a:xfrm>
-            <a:off x="0" y="2019476"/>
-            <a:ext cx="12192000" cy="4105941"/>
-          </a:xfrm>
-          <a:prstGeom prst="rect">
-            <a:avLst/>
-          </a:prstGeom>
-          <a:gradFill flip="none" rotWithShape="1">
-            <a:gsLst>
-              <a:gs pos="0">
-                <a:schemeClr val="bg2">
-                  <a:alpha val="0"/>
-                </a:schemeClr>
-              </a:gs>
-              <a:gs pos="100000">
-                <a:schemeClr val="bg2"/>
-              </a:gs>
-            </a:gsLst>
-            <a:lin ang="5400000" scaled="0"/>
-            <a:tileRect/>
-          </a:gradFill>
-          <a:ln>
-            <a:noFill/>
-          </a:ln>
-        </p:spPr>
-        <p:style>
-          <a:lnRef idx="2">
-            <a:schemeClr val="accent1">
-              <a:shade val="50000"/>
-            </a:schemeClr>
-          </a:lnRef>
-          <a:fillRef idx="1">
-            <a:schemeClr val="accent1"/>
-          </a:fillRef>
-          <a:effectRef idx="0">
-            <a:schemeClr val="accent1"/>
-          </a:effectRef>
-          <a:fontRef idx="minor">
-            <a:schemeClr val="lt1"/>
-          </a:fontRef>
-        </p:style>
-        <p:txBody>
-          <a:bodyPr/>
-          <a:lstStyle/>
-          <a:p>
-            <a:endParaRPr lang="en-US"/>
-          </a:p>
-        </p:txBody>
-      </p:sp>
-      <p:pic>
-        <p:nvPicPr>
-          <p:cNvPr id="51" name="Picture 50">
-            <a:extLst>
-              <a:ext uri="{FF2B5EF4-FFF2-40B4-BE49-F238E27FC236}">
-                <a16:creationId xmlns:a16="http://schemas.microsoft.com/office/drawing/2014/main" id="{7B8AE548-0BFA-4792-9962-3375923C7635}"/>
-              </a:ext>
-              <a:ext uri="{C183D7F6-B498-43B3-948B-1728B52AA6E4}">
-                <adec:decorative xmlns:adec="http://schemas.microsoft.com/office/drawing/2017/decorative" val="1"/>
-              </a:ext>
-            </a:extLst>
-          </p:cNvPr>
-          <p:cNvPicPr>
-            <a:picLocks noGrp="1" noRot="1" noChangeAspect="1" noMove="1" noResize="1" noEditPoints="1" noAdjustHandles="1" noChangeArrowheads="1" noChangeShapeType="1" noCrop="1"/>
-          </p:cNvPicPr>
-          <p:nvPr>
-            <p:extLst>
-              <p:ext uri="{386F3935-93C4-4BCD-93E2-E3B085C9AB24}">
-                <p16:designElem xmlns:p16="http://schemas.microsoft.com/office/powerpoint/2015/main" val="1"/>
-              </p:ext>
-            </p:extLst>
-          </p:nvPr>
-        </p:nvPicPr>
-        <p:blipFill rotWithShape="1">
-          <a:blip r:embed="rId2">
-            <a:extLst>
-              <a:ext uri="{28A0092B-C50C-407E-A947-70E740481C1C}">
-                <a14:useLocalDpi xmlns:a14="http://schemas.microsoft.com/office/drawing/2010/main" val="0"/>
-              </a:ext>
-            </a:extLst>
-          </a:blip>
-          <a:srcRect t="1538" b="-1538"/>
-          <a:stretch/>
-        </p:blipFill>
-        <p:spPr bwMode="black">
-          <a:xfrm>
-            <a:off x="0" y="6126480"/>
-            <a:ext cx="12192000" cy="742950"/>
-          </a:xfrm>
-          <a:prstGeom prst="rect">
-            <a:avLst/>
-          </a:prstGeom>
-        </p:spPr>
-      </p:pic>
-      <p:cxnSp>
-        <p:nvCxnSpPr>
-          <p:cNvPr id="52" name="Straight Connector 51">
-            <a:extLst>
-              <a:ext uri="{FF2B5EF4-FFF2-40B4-BE49-F238E27FC236}">
-                <a16:creationId xmlns:a16="http://schemas.microsoft.com/office/drawing/2014/main" id="{67639EF4-FA83-4D85-90FE-B831AF283896}"/>
-              </a:ext>
-              <a:ext uri="{C183D7F6-B498-43B3-948B-1728B52AA6E4}">
-                <adec:decorative xmlns:adec="http://schemas.microsoft.com/office/drawing/2017/decorative" val="1"/>
-              </a:ext>
-            </a:extLst>
-          </p:cNvPr>
-          <p:cNvCxnSpPr>
-            <a:cxnSpLocks noGrp="1" noRot="1" noChangeAspect="1" noMove="1" noResize="1" noEditPoints="1" noAdjustHandles="1" noChangeArrowheads="1" noChangeShapeType="1"/>
-          </p:cNvCxnSpPr>
-          <p:nvPr>
-            <p:extLst>
-              <p:ext uri="{386F3935-93C4-4BCD-93E2-E3B085C9AB24}">
-                <p16:designElem xmlns:p16="http://schemas.microsoft.com/office/powerpoint/2015/main" val="1"/>
-              </p:ext>
-            </p:extLst>
-          </p:nvPr>
-        </p:nvCxnSpPr>
-        <p:spPr>
-          <a:xfrm>
-            <a:off x="0" y="6128413"/>
-            <a:ext cx="12192000" cy="0"/>
-          </a:xfrm>
-          <a:prstGeom prst="line">
-            <a:avLst/>
-          </a:prstGeom>
-          <a:ln w="12700">
-            <a:solidFill>
-              <a:srgbClr val="000001">
-                <a:alpha val="20000"/>
-              </a:srgbClr>
-            </a:solidFill>
-          </a:ln>
-        </p:spPr>
-        <p:style>
-          <a:lnRef idx="1">
-            <a:schemeClr val="accent1"/>
-          </a:lnRef>
-          <a:fillRef idx="0">
-            <a:schemeClr val="accent1"/>
-          </a:fillRef>
-          <a:effectRef idx="0">
-            <a:schemeClr val="accent1"/>
-          </a:effectRef>
-          <a:fontRef idx="minor">
-            <a:schemeClr val="tx1"/>
-          </a:fontRef>
-        </p:style>
-      </p:cxnSp>
-      <p:cxnSp>
-        <p:nvCxnSpPr>
-          <p:cNvPr id="53" name="Straight Connector 52">
-            <a:extLst>
-              <a:ext uri="{FF2B5EF4-FFF2-40B4-BE49-F238E27FC236}">
-                <a16:creationId xmlns:a16="http://schemas.microsoft.com/office/drawing/2014/main" id="{CC87E76A-8F50-413D-9BFC-C5A1525BD9BC}"/>
-              </a:ext>
-              <a:ext uri="{C183D7F6-B498-43B3-948B-1728B52AA6E4}">
-                <adec:decorative xmlns:adec="http://schemas.microsoft.com/office/drawing/2017/decorative" val="1"/>
-              </a:ext>
-            </a:extLst>
-          </p:cNvPr>
-          <p:cNvCxnSpPr>
-            <a:cxnSpLocks noGrp="1" noRot="1" noChangeAspect="1" noMove="1" noResize="1" noEditPoints="1" noAdjustHandles="1" noChangeArrowheads="1" noChangeShapeType="1"/>
-          </p:cNvCxnSpPr>
-          <p:nvPr>
-            <p:extLst>
-              <p:ext uri="{386F3935-93C4-4BCD-93E2-E3B085C9AB24}">
-                <p16:designElem xmlns:p16="http://schemas.microsoft.com/office/powerpoint/2015/main" val="1"/>
-              </p:ext>
-            </p:extLst>
-          </p:nvPr>
-        </p:nvCxnSpPr>
-        <p:spPr>
-          <a:xfrm>
-            <a:off x="2417780" y="3528542"/>
-            <a:ext cx="8637072" cy="0"/>
-          </a:xfrm>
-          <a:prstGeom prst="line">
-            <a:avLst/>
-          </a:prstGeom>
-          <a:ln w="31750"/>
-        </p:spPr>
-        <p:style>
-          <a:lnRef idx="3">
-            <a:schemeClr val="accent1"/>
-          </a:lnRef>
-          <a:fillRef idx="0">
-            <a:schemeClr val="accent1"/>
-          </a:fillRef>
-          <a:effectRef idx="2">
-            <a:schemeClr val="accent1"/>
-          </a:effectRef>
-          <a:fontRef idx="minor">
-            <a:schemeClr val="tx1"/>
-          </a:fontRef>
-        </p:style>
-      </p:cxnSp>
-      <p:sp useBgFill="1">
-        <p:nvSpPr>
-          <p:cNvPr id="54" name="Rectangle 53">
-            <a:extLst>
-              <a:ext uri="{FF2B5EF4-FFF2-40B4-BE49-F238E27FC236}">
-                <a16:creationId xmlns:a16="http://schemas.microsoft.com/office/drawing/2014/main" id="{0F28EA84-13B4-4494-A4D3-8DE462FF0E6B}"/>
-              </a:ext>
-              <a:ext uri="{C183D7F6-B498-43B3-948B-1728B52AA6E4}">
-                <adec:decorative xmlns:adec="http://schemas.microsoft.com/office/drawing/2017/decorative" val="1"/>
-              </a:ext>
-            </a:extLst>
-          </p:cNvPr>
-          <p:cNvSpPr>
-            <a:spLocks noGrp="1" noRot="1" noChangeAspect="1" noMove="1" noResize="1" noEditPoints="1" noAdjustHandles="1" noChangeArrowheads="1" noChangeShapeType="1" noTextEdit="1"/>
-          </p:cNvSpPr>
-          <p:nvPr>
-            <p:extLst>
-              <p:ext uri="{386F3935-93C4-4BCD-93E2-E3B085C9AB24}">
-                <p16:designElem xmlns:p16="http://schemas.microsoft.com/office/powerpoint/2015/main" val="1"/>
-              </p:ext>
-            </p:extLst>
-          </p:nvPr>
-        </p:nvSpPr>
-        <p:spPr>
-          <a:xfrm>
-            <a:off x="2" y="0"/>
-            <a:ext cx="12191695" cy="6858000"/>
-          </a:xfrm>
-          <a:prstGeom prst="rect">
-            <a:avLst/>
-          </a:prstGeom>
-          <a:ln>
-            <a:noFill/>
-          </a:ln>
-        </p:spPr>
-        <p:style>
-          <a:lnRef idx="2">
-            <a:schemeClr val="accent1">
-              <a:shade val="50000"/>
-            </a:schemeClr>
-          </a:lnRef>
-          <a:fillRef idx="1">
-            <a:schemeClr val="accent1"/>
-          </a:fillRef>
-          <a:effectRef idx="0">
-            <a:schemeClr val="accent1"/>
-          </a:effectRef>
-          <a:fontRef idx="minor">
-            <a:schemeClr val="lt1"/>
-          </a:fontRef>
-        </p:style>
-        <p:txBody>
-          <a:bodyPr rtlCol="0" anchor="ctr"/>
-          <a:lstStyle/>
-          <a:p>
-            <a:pPr algn="ctr"/>
-            <a:endParaRPr lang="en-US"/>
-          </a:p>
-        </p:txBody>
-      </p:sp>
-      <p:sp>
-        <p:nvSpPr>
-          <p:cNvPr id="55" name="Rectangle 54">
-            <a:extLst>
-              <a:ext uri="{FF2B5EF4-FFF2-40B4-BE49-F238E27FC236}">
-                <a16:creationId xmlns:a16="http://schemas.microsoft.com/office/drawing/2014/main" id="{6BEB1B24-66CE-4D63-A39D-2D1B481DF95E}"/>
-              </a:ext>
-              <a:ext uri="{C183D7F6-B498-43B3-948B-1728B52AA6E4}">
-                <adec:decorative xmlns:adec="http://schemas.microsoft.com/office/drawing/2017/decorative" val="1"/>
-              </a:ext>
-            </a:extLst>
-          </p:cNvPr>
-          <p:cNvSpPr>
-            <a:spLocks noGrp="1" noRot="1" noChangeAspect="1" noMove="1" noResize="1" noEditPoints="1" noAdjustHandles="1" noChangeArrowheads="1" noChangeShapeType="1" noTextEdit="1"/>
-          </p:cNvSpPr>
-          <p:nvPr>
-            <p:extLst>
-              <p:ext uri="{386F3935-93C4-4BCD-93E2-E3B085C9AB24}">
-                <p16:designElem xmlns:p16="http://schemas.microsoft.com/office/powerpoint/2015/main" val="1"/>
-              </p:ext>
-            </p:extLst>
-          </p:nvPr>
-        </p:nvSpPr>
-        <p:spPr>
-          <a:xfrm>
-            <a:off x="0" y="2019476"/>
-            <a:ext cx="12192000" cy="4105941"/>
-          </a:xfrm>
-          <a:prstGeom prst="rect">
-            <a:avLst/>
-          </a:prstGeom>
-          <a:gradFill flip="none" rotWithShape="1">
-            <a:gsLst>
-              <a:gs pos="0">
-                <a:schemeClr val="bg2">
-                  <a:alpha val="0"/>
-                </a:schemeClr>
-              </a:gs>
-              <a:gs pos="100000">
-                <a:schemeClr val="bg2"/>
-              </a:gs>
-            </a:gsLst>
-            <a:lin ang="5400000" scaled="0"/>
-            <a:tileRect/>
-          </a:gradFill>
-          <a:ln>
-            <a:noFill/>
-          </a:ln>
-        </p:spPr>
-        <p:style>
-          <a:lnRef idx="2">
-            <a:schemeClr val="accent1">
-              <a:shade val="50000"/>
-            </a:schemeClr>
-          </a:lnRef>
-          <a:fillRef idx="1">
-            <a:schemeClr val="accent1"/>
-          </a:fillRef>
-          <a:effectRef idx="0">
-            <a:schemeClr val="accent1"/>
-          </a:effectRef>
-          <a:fontRef idx="minor">
-            <a:schemeClr val="lt1"/>
-          </a:fontRef>
-        </p:style>
-        <p:txBody>
-          <a:bodyPr rtlCol="0" anchor="ctr"/>
-          <a:lstStyle/>
-          <a:p>
-            <a:pPr lvl="0" algn="ctr"/>
-            <a:endParaRPr lang="en-US"/>
-          </a:p>
-        </p:txBody>
-      </p:sp>
-      <p:sp>
-        <p:nvSpPr>
-          <p:cNvPr id="2" name="Title 1">
-            <a:extLst>
-              <a:ext uri="{FF2B5EF4-FFF2-40B4-BE49-F238E27FC236}">
-                <a16:creationId xmlns:a16="http://schemas.microsoft.com/office/drawing/2014/main" id="{7BA6A004-AC9E-F83D-7C6C-8E45C6DDE234}"/>
-              </a:ext>
-            </a:extLst>
-          </p:cNvPr>
-          <p:cNvSpPr>
-            <a:spLocks noGrp="1"/>
-          </p:cNvSpPr>
-          <p:nvPr>
-            <p:ph type="title"/>
-          </p:nvPr>
-        </p:nvSpPr>
-        <p:spPr>
-          <a:xfrm>
-            <a:off x="659301" y="1474969"/>
-            <a:ext cx="2823919" cy="1868760"/>
-          </a:xfrm>
-        </p:spPr>
-        <p:txBody>
-          <a:bodyPr vert="horz" lIns="91440" tIns="45720" rIns="91440" bIns="0" rtlCol="0" anchor="b">
-            <a:normAutofit/>
-          </a:bodyPr>
-          <a:lstStyle/>
-          <a:p>
-            <a:r>
-              <a:rPr lang="en-US" sz="3600"/>
-              <a:t>Vlajk Sándor - Git</a:t>
-            </a:r>
-          </a:p>
-        </p:txBody>
-      </p:sp>
-      <p:cxnSp>
-        <p:nvCxnSpPr>
-          <p:cNvPr id="56" name="Straight Connector 55">
-            <a:extLst>
-              <a:ext uri="{FF2B5EF4-FFF2-40B4-BE49-F238E27FC236}">
-                <a16:creationId xmlns:a16="http://schemas.microsoft.com/office/drawing/2014/main" id="{78DE337D-1DBA-4536-8145-B43EE65C747D}"/>
-              </a:ext>
-              <a:ext uri="{C183D7F6-B498-43B3-948B-1728B52AA6E4}">
-                <adec:decorative xmlns:adec="http://schemas.microsoft.com/office/drawing/2017/decorative" val="1"/>
-              </a:ext>
-            </a:extLst>
-          </p:cNvPr>
-          <p:cNvCxnSpPr>
-            <a:cxnSpLocks noGrp="1" noRot="1" noChangeAspect="1" noMove="1" noResize="1" noEditPoints="1" noAdjustHandles="1" noChangeArrowheads="1" noChangeShapeType="1"/>
-          </p:cNvCxnSpPr>
-          <p:nvPr>
-            <p:extLst>
-              <p:ext uri="{386F3935-93C4-4BCD-93E2-E3B085C9AB24}">
-                <p16:designElem xmlns:p16="http://schemas.microsoft.com/office/powerpoint/2015/main" val="1"/>
-              </p:ext>
-            </p:extLst>
-          </p:nvPr>
-        </p:nvCxnSpPr>
-        <p:spPr>
-          <a:xfrm>
-            <a:off x="659301" y="3528543"/>
-            <a:ext cx="2823919" cy="0"/>
-          </a:xfrm>
-          <a:prstGeom prst="line">
-            <a:avLst/>
-          </a:prstGeom>
-          <a:ln w="31750"/>
-        </p:spPr>
-        <p:style>
-          <a:lnRef idx="3">
-            <a:schemeClr val="accent1"/>
-          </a:lnRef>
-          <a:fillRef idx="0">
-            <a:schemeClr val="accent1"/>
-          </a:fillRef>
-          <a:effectRef idx="2">
-            <a:schemeClr val="accent1"/>
-          </a:effectRef>
-          <a:fontRef idx="minor">
-            <a:schemeClr val="tx1"/>
-          </a:fontRef>
-        </p:style>
-      </p:cxnSp>
-      <p:pic>
-        <p:nvPicPr>
-          <p:cNvPr id="5" name="Picture 4">
-            <a:extLst>
-              <a:ext uri="{FF2B5EF4-FFF2-40B4-BE49-F238E27FC236}">
-                <a16:creationId xmlns:a16="http://schemas.microsoft.com/office/drawing/2014/main" id="{A88E504C-4007-0FB3-BC00-5FF4F74B5CA7}"/>
-              </a:ext>
-            </a:extLst>
-          </p:cNvPr>
-          <p:cNvPicPr>
-            <a:picLocks noChangeAspect="1"/>
-          </p:cNvPicPr>
-          <p:nvPr/>
-        </p:nvPicPr>
-        <p:blipFill>
-          <a:blip r:embed="rId3"/>
-          <a:stretch>
-            <a:fillRect/>
-          </a:stretch>
-        </p:blipFill>
-        <p:spPr>
-          <a:xfrm>
-            <a:off x="3989479" y="1522154"/>
-            <a:ext cx="3693150" cy="3067192"/>
-          </a:xfrm>
-          <a:prstGeom prst="rect">
-            <a:avLst/>
-          </a:prstGeom>
-        </p:spPr>
-      </p:pic>
-      <p:pic>
-        <p:nvPicPr>
-          <p:cNvPr id="9" name="Picture 8">
-            <a:extLst>
-              <a:ext uri="{FF2B5EF4-FFF2-40B4-BE49-F238E27FC236}">
-                <a16:creationId xmlns:a16="http://schemas.microsoft.com/office/drawing/2014/main" id="{CE8C27E6-D0FE-7D3F-0657-BC477A7054EE}"/>
-              </a:ext>
-            </a:extLst>
-          </p:cNvPr>
-          <p:cNvPicPr>
-            <a:picLocks noChangeAspect="1"/>
-          </p:cNvPicPr>
-          <p:nvPr/>
-        </p:nvPicPr>
-        <p:blipFill>
-          <a:blip r:embed="rId4"/>
-          <a:stretch>
-            <a:fillRect/>
-          </a:stretch>
-        </p:blipFill>
-        <p:spPr>
-          <a:xfrm>
-            <a:off x="7846354" y="965341"/>
-            <a:ext cx="3687168" cy="1523440"/>
-          </a:xfrm>
-          <a:prstGeom prst="rect">
-            <a:avLst/>
-          </a:prstGeom>
-        </p:spPr>
-      </p:pic>
-      <p:pic>
-        <p:nvPicPr>
-          <p:cNvPr id="7" name="Picture 6">
-            <a:extLst>
-              <a:ext uri="{FF2B5EF4-FFF2-40B4-BE49-F238E27FC236}">
-                <a16:creationId xmlns:a16="http://schemas.microsoft.com/office/drawing/2014/main" id="{0491AA9D-40D6-945F-5458-984FA0DBC683}"/>
-              </a:ext>
-            </a:extLst>
-          </p:cNvPr>
-          <p:cNvPicPr>
-            <a:picLocks noChangeAspect="1"/>
-          </p:cNvPicPr>
-          <p:nvPr/>
-        </p:nvPicPr>
-        <p:blipFill>
-          <a:blip r:embed="rId5"/>
-          <a:stretch>
-            <a:fillRect/>
-          </a:stretch>
-        </p:blipFill>
-        <p:spPr>
-          <a:xfrm>
-            <a:off x="7846051" y="3900689"/>
-            <a:ext cx="3687168" cy="967500"/>
-          </a:xfrm>
-          <a:prstGeom prst="rect">
-            <a:avLst/>
-          </a:prstGeom>
-        </p:spPr>
-      </p:pic>
-      <p:pic>
-        <p:nvPicPr>
-          <p:cNvPr id="57" name="Picture 56">
-            <a:extLst>
-              <a:ext uri="{FF2B5EF4-FFF2-40B4-BE49-F238E27FC236}">
-                <a16:creationId xmlns:a16="http://schemas.microsoft.com/office/drawing/2014/main" id="{E7233926-059A-41AD-A9F2-56552CF4FF6B}"/>
-              </a:ext>
-              <a:ext uri="{C183D7F6-B498-43B3-948B-1728B52AA6E4}">
-                <adec:decorative xmlns:adec="http://schemas.microsoft.com/office/drawing/2017/decorative" val="1"/>
-              </a:ext>
-            </a:extLst>
-          </p:cNvPr>
-          <p:cNvPicPr>
-            <a:picLocks noGrp="1" noRot="1" noChangeAspect="1" noMove="1" noResize="1" noEditPoints="1" noAdjustHandles="1" noChangeArrowheads="1" noChangeShapeType="1" noCrop="1"/>
-          </p:cNvPicPr>
-          <p:nvPr>
-            <p:extLst>
-              <p:ext uri="{386F3935-93C4-4BCD-93E2-E3B085C9AB24}">
-                <p16:designElem xmlns:p16="http://schemas.microsoft.com/office/powerpoint/2015/main" val="1"/>
-              </p:ext>
-            </p:extLst>
-          </p:nvPr>
-        </p:nvPicPr>
-        <p:blipFill rotWithShape="1">
-          <a:blip r:embed="rId2">
-            <a:extLst>
-              <a:ext uri="{28A0092B-C50C-407E-A947-70E740481C1C}">
-                <a14:useLocalDpi xmlns:a14="http://schemas.microsoft.com/office/drawing/2010/main" val="0"/>
-              </a:ext>
-            </a:extLst>
-          </a:blip>
-          <a:srcRect t="1538" b="-1538"/>
-          <a:stretch/>
-        </p:blipFill>
-        <p:spPr bwMode="black">
-          <a:xfrm>
-            <a:off x="0" y="6126480"/>
-            <a:ext cx="12192000" cy="742950"/>
-          </a:xfrm>
-          <a:prstGeom prst="rect">
-            <a:avLst/>
-          </a:prstGeom>
-        </p:spPr>
-      </p:pic>
-      <p:cxnSp>
-        <p:nvCxnSpPr>
-          <p:cNvPr id="58" name="Straight Connector 57">
-            <a:extLst>
-              <a:ext uri="{FF2B5EF4-FFF2-40B4-BE49-F238E27FC236}">
-                <a16:creationId xmlns:a16="http://schemas.microsoft.com/office/drawing/2014/main" id="{C13C145E-93D4-481E-92DC-736D9EBA37FC}"/>
-              </a:ext>
-              <a:ext uri="{C183D7F6-B498-43B3-948B-1728B52AA6E4}">
-                <adec:decorative xmlns:adec="http://schemas.microsoft.com/office/drawing/2017/decorative" val="1"/>
-              </a:ext>
-            </a:extLst>
-          </p:cNvPr>
-          <p:cNvCxnSpPr>
-            <a:cxnSpLocks noGrp="1" noRot="1" noChangeAspect="1" noMove="1" noResize="1" noEditPoints="1" noAdjustHandles="1" noChangeArrowheads="1" noChangeShapeType="1"/>
-          </p:cNvCxnSpPr>
-          <p:nvPr>
-            <p:extLst>
-              <p:ext uri="{386F3935-93C4-4BCD-93E2-E3B085C9AB24}">
-                <p16:designElem xmlns:p16="http://schemas.microsoft.com/office/powerpoint/2015/main" val="1"/>
-              </p:ext>
-            </p:extLst>
-          </p:nvPr>
-        </p:nvCxnSpPr>
-        <p:spPr>
-          <a:xfrm>
-            <a:off x="0" y="6128413"/>
-            <a:ext cx="12192000" cy="0"/>
-          </a:xfrm>
-          <a:prstGeom prst="line">
-            <a:avLst/>
-          </a:prstGeom>
-          <a:ln w="12700">
-            <a:solidFill>
-              <a:srgbClr val="000001">
-                <a:alpha val="20000"/>
-              </a:srgbClr>
-            </a:solidFill>
-          </a:ln>
-        </p:spPr>
-        <p:style>
-          <a:lnRef idx="1">
-            <a:schemeClr val="accent1"/>
-          </a:lnRef>
-          <a:fillRef idx="0">
-            <a:schemeClr val="accent1"/>
-          </a:fillRef>
-          <a:effectRef idx="0">
-            <a:schemeClr val="accent1"/>
-          </a:effectRef>
-          <a:fontRef idx="minor">
-            <a:schemeClr val="tx1"/>
-          </a:fontRef>
-        </p:style>
-      </p:cxnSp>
-    </p:spTree>
-    <p:extLst>
-      <p:ext uri="{BB962C8B-B14F-4D97-AF65-F5344CB8AC3E}">
-        <p14:creationId xmlns:p14="http://schemas.microsoft.com/office/powerpoint/2010/main" val="851204681"/>
-      </p:ext>
-    </p:extLst>
-  </p:cSld>
-  <p:clrMapOvr>
-    <a:masterClrMapping/>
-  </p:clrMapOvr>
-</p:sld>
-</file>
-
-<file path=ppt/slides/slide13.xml><?xml version="1.0" encoding="utf-8"?>
-<p:sld xmlns:a="http://schemas.openxmlformats.org/drawingml/2006/main" xmlns:r="http://schemas.openxmlformats.org/officeDocument/2006/relationships" xmlns:p="http://schemas.openxmlformats.org/presentationml/2006/main">
-  <p:cSld>
-    <p:bg>
-      <p:bgPr>
-        <a:gradFill rotWithShape="1">
-          <a:gsLst>
-            <a:gs pos="0">
-              <a:schemeClr val="bg2">
-                <a:tint val="94000"/>
-                <a:satMod val="80000"/>
-                <a:lumMod val="106000"/>
-              </a:schemeClr>
-            </a:gs>
-            <a:gs pos="100000">
-              <a:schemeClr val="bg2">
-                <a:shade val="80000"/>
-              </a:schemeClr>
-            </a:gs>
-          </a:gsLst>
-          <a:path path="circle">
-            <a:fillToRect l="43000" r="43000" b="100000"/>
-          </a:path>
-        </a:gradFill>
-        <a:effectLst/>
-      </p:bgPr>
-    </p:bg>
-    <p:spTree>
-      <p:nvGrpSpPr>
-        <p:cNvPr id="1" name=""/>
-        <p:cNvGrpSpPr/>
-        <p:nvPr/>
-      </p:nvGrpSpPr>
-      <p:grpSpPr>
-        <a:xfrm>
-          <a:off x="0" y="0"/>
-          <a:ext cx="0" cy="0"/>
-          <a:chOff x="0" y="0"/>
-          <a:chExt cx="0" cy="0"/>
-        </a:xfrm>
-      </p:grpSpPr>
-      <p:sp>
-        <p:nvSpPr>
-          <p:cNvPr id="38" name="Rectangle 37">
-            <a:extLst>
-              <a:ext uri="{FF2B5EF4-FFF2-40B4-BE49-F238E27FC236}">
-                <a16:creationId xmlns:a16="http://schemas.microsoft.com/office/drawing/2014/main" id="{E724B9E8-02C8-4B2E-8770-A00A67760DF0}"/>
-              </a:ext>
-              <a:ext uri="{C183D7F6-B498-43B3-948B-1728B52AA6E4}">
-                <adec:decorative xmlns:adec="http://schemas.microsoft.com/office/drawing/2017/decorative" val="1"/>
-              </a:ext>
-            </a:extLst>
-          </p:cNvPr>
-          <p:cNvSpPr>
-            <a:spLocks noGrp="1" noRot="1" noChangeAspect="1" noMove="1" noResize="1" noEditPoints="1" noAdjustHandles="1" noChangeArrowheads="1" noChangeShapeType="1" noTextEdit="1"/>
-          </p:cNvSpPr>
-          <p:nvPr>
-            <p:extLst>
-              <p:ext uri="{386F3935-93C4-4BCD-93E2-E3B085C9AB24}">
-                <p16:designElem xmlns:p16="http://schemas.microsoft.com/office/powerpoint/2015/main" val="1"/>
-              </p:ext>
-            </p:extLst>
-          </p:nvPr>
-        </p:nvSpPr>
-        <p:spPr>
-          <a:xfrm>
-            <a:off x="0" y="2019476"/>
-            <a:ext cx="12192000" cy="4105941"/>
-          </a:xfrm>
-          <a:prstGeom prst="rect">
-            <a:avLst/>
-          </a:prstGeom>
-          <a:gradFill flip="none" rotWithShape="1">
-            <a:gsLst>
-              <a:gs pos="0">
-                <a:schemeClr val="bg2">
-                  <a:alpha val="0"/>
-                </a:schemeClr>
-              </a:gs>
-              <a:gs pos="100000">
-                <a:schemeClr val="bg2"/>
-              </a:gs>
-            </a:gsLst>
-            <a:lin ang="5400000" scaled="0"/>
-            <a:tileRect/>
-          </a:gradFill>
-          <a:ln>
-            <a:noFill/>
-          </a:ln>
-        </p:spPr>
-        <p:style>
-          <a:lnRef idx="2">
-            <a:schemeClr val="accent1">
-              <a:shade val="50000"/>
-            </a:schemeClr>
-          </a:lnRef>
-          <a:fillRef idx="1">
-            <a:schemeClr val="accent1"/>
-          </a:fillRef>
-          <a:effectRef idx="0">
-            <a:schemeClr val="accent1"/>
-          </a:effectRef>
-          <a:fontRef idx="minor">
-            <a:schemeClr val="lt1"/>
-          </a:fontRef>
-        </p:style>
-        <p:txBody>
-          <a:bodyPr/>
-          <a:lstStyle/>
-          <a:p>
-            <a:endParaRPr lang="en-US"/>
-          </a:p>
-        </p:txBody>
-      </p:sp>
-      <p:pic>
-        <p:nvPicPr>
-          <p:cNvPr id="39" name="Picture 38">
-            <a:extLst>
-              <a:ext uri="{FF2B5EF4-FFF2-40B4-BE49-F238E27FC236}">
-                <a16:creationId xmlns:a16="http://schemas.microsoft.com/office/drawing/2014/main" id="{7B8AE548-0BFA-4792-9962-3375923C7635}"/>
-              </a:ext>
-              <a:ext uri="{C183D7F6-B498-43B3-948B-1728B52AA6E4}">
-                <adec:decorative xmlns:adec="http://schemas.microsoft.com/office/drawing/2017/decorative" val="1"/>
-              </a:ext>
-            </a:extLst>
-          </p:cNvPr>
-          <p:cNvPicPr>
-            <a:picLocks noGrp="1" noRot="1" noChangeAspect="1" noMove="1" noResize="1" noEditPoints="1" noAdjustHandles="1" noChangeArrowheads="1" noChangeShapeType="1" noCrop="1"/>
-          </p:cNvPicPr>
-          <p:nvPr>
-            <p:extLst>
-              <p:ext uri="{386F3935-93C4-4BCD-93E2-E3B085C9AB24}">
-                <p16:designElem xmlns:p16="http://schemas.microsoft.com/office/powerpoint/2015/main" val="1"/>
-              </p:ext>
-            </p:extLst>
-          </p:nvPr>
-        </p:nvPicPr>
-        <p:blipFill rotWithShape="1">
-          <a:blip r:embed="rId2">
-            <a:extLst>
-              <a:ext uri="{28A0092B-C50C-407E-A947-70E740481C1C}">
-                <a14:useLocalDpi xmlns:a14="http://schemas.microsoft.com/office/drawing/2010/main" val="0"/>
-              </a:ext>
-            </a:extLst>
-          </a:blip>
-          <a:srcRect t="1538" b="-1538"/>
-          <a:stretch/>
-        </p:blipFill>
-        <p:spPr bwMode="black">
-          <a:xfrm>
-            <a:off x="0" y="6126480"/>
-            <a:ext cx="12192000" cy="742950"/>
-          </a:xfrm>
-          <a:prstGeom prst="rect">
-            <a:avLst/>
-          </a:prstGeom>
-        </p:spPr>
-      </p:pic>
-      <p:cxnSp>
-        <p:nvCxnSpPr>
-          <p:cNvPr id="40" name="Straight Connector 39">
-            <a:extLst>
-              <a:ext uri="{FF2B5EF4-FFF2-40B4-BE49-F238E27FC236}">
-                <a16:creationId xmlns:a16="http://schemas.microsoft.com/office/drawing/2014/main" id="{67639EF4-FA83-4D85-90FE-B831AF283896}"/>
-              </a:ext>
-              <a:ext uri="{C183D7F6-B498-43B3-948B-1728B52AA6E4}">
-                <adec:decorative xmlns:adec="http://schemas.microsoft.com/office/drawing/2017/decorative" val="1"/>
-              </a:ext>
-            </a:extLst>
-          </p:cNvPr>
-          <p:cNvCxnSpPr>
-            <a:cxnSpLocks noGrp="1" noRot="1" noChangeAspect="1" noMove="1" noResize="1" noEditPoints="1" noAdjustHandles="1" noChangeArrowheads="1" noChangeShapeType="1"/>
-          </p:cNvCxnSpPr>
-          <p:nvPr>
-            <p:extLst>
-              <p:ext uri="{386F3935-93C4-4BCD-93E2-E3B085C9AB24}">
-                <p16:designElem xmlns:p16="http://schemas.microsoft.com/office/powerpoint/2015/main" val="1"/>
-              </p:ext>
-            </p:extLst>
-          </p:nvPr>
-        </p:nvCxnSpPr>
-        <p:spPr>
-          <a:xfrm>
-            <a:off x="0" y="6128413"/>
-            <a:ext cx="12192000" cy="0"/>
-          </a:xfrm>
-          <a:prstGeom prst="line">
-            <a:avLst/>
-          </a:prstGeom>
-          <a:ln w="12700">
-            <a:solidFill>
-              <a:srgbClr val="000001">
-                <a:alpha val="20000"/>
-              </a:srgbClr>
-            </a:solidFill>
-          </a:ln>
-        </p:spPr>
-        <p:style>
-          <a:lnRef idx="1">
-            <a:schemeClr val="accent1"/>
-          </a:lnRef>
-          <a:fillRef idx="0">
-            <a:schemeClr val="accent1"/>
-          </a:fillRef>
-          <a:effectRef idx="0">
-            <a:schemeClr val="accent1"/>
-          </a:effectRef>
-          <a:fontRef idx="minor">
-            <a:schemeClr val="tx1"/>
-          </a:fontRef>
-        </p:style>
-      </p:cxnSp>
-      <p:cxnSp>
-        <p:nvCxnSpPr>
-          <p:cNvPr id="41" name="Straight Connector 40">
-            <a:extLst>
-              <a:ext uri="{FF2B5EF4-FFF2-40B4-BE49-F238E27FC236}">
-                <a16:creationId xmlns:a16="http://schemas.microsoft.com/office/drawing/2014/main" id="{CC87E76A-8F50-413D-9BFC-C5A1525BD9BC}"/>
-              </a:ext>
-              <a:ext uri="{C183D7F6-B498-43B3-948B-1728B52AA6E4}">
-                <adec:decorative xmlns:adec="http://schemas.microsoft.com/office/drawing/2017/decorative" val="1"/>
-              </a:ext>
-            </a:extLst>
-          </p:cNvPr>
-          <p:cNvCxnSpPr>
-            <a:cxnSpLocks noGrp="1" noRot="1" noChangeAspect="1" noMove="1" noResize="1" noEditPoints="1" noAdjustHandles="1" noChangeArrowheads="1" noChangeShapeType="1"/>
-          </p:cNvCxnSpPr>
-          <p:nvPr>
-            <p:extLst>
-              <p:ext uri="{386F3935-93C4-4BCD-93E2-E3B085C9AB24}">
-                <p16:designElem xmlns:p16="http://schemas.microsoft.com/office/powerpoint/2015/main" val="1"/>
-              </p:ext>
-            </p:extLst>
-          </p:nvPr>
-        </p:nvCxnSpPr>
-        <p:spPr>
-          <a:xfrm>
-            <a:off x="2417780" y="3528542"/>
-            <a:ext cx="8637072" cy="0"/>
-          </a:xfrm>
-          <a:prstGeom prst="line">
-            <a:avLst/>
-          </a:prstGeom>
-          <a:ln w="31750"/>
-        </p:spPr>
-        <p:style>
-          <a:lnRef idx="3">
-            <a:schemeClr val="accent1"/>
-          </a:lnRef>
-          <a:fillRef idx="0">
-            <a:schemeClr val="accent1"/>
-          </a:fillRef>
-          <a:effectRef idx="2">
-            <a:schemeClr val="accent1"/>
-          </a:effectRef>
-          <a:fontRef idx="minor">
-            <a:schemeClr val="tx1"/>
-          </a:fontRef>
-        </p:style>
-      </p:cxnSp>
-      <p:sp useBgFill="1">
-        <p:nvSpPr>
-          <p:cNvPr id="42" name="Rectangle 41">
-            <a:extLst>
-              <a:ext uri="{FF2B5EF4-FFF2-40B4-BE49-F238E27FC236}">
-                <a16:creationId xmlns:a16="http://schemas.microsoft.com/office/drawing/2014/main" id="{9A1C6278-B7D5-4E8E-B4DC-834832980565}"/>
-              </a:ext>
-              <a:ext uri="{C183D7F6-B498-43B3-948B-1728B52AA6E4}">
-                <adec:decorative xmlns:adec="http://schemas.microsoft.com/office/drawing/2017/decorative" val="1"/>
-              </a:ext>
-            </a:extLst>
-          </p:cNvPr>
-          <p:cNvSpPr>
-            <a:spLocks noGrp="1" noRot="1" noChangeAspect="1" noMove="1" noResize="1" noEditPoints="1" noAdjustHandles="1" noChangeArrowheads="1" noChangeShapeType="1" noTextEdit="1"/>
-          </p:cNvSpPr>
-          <p:nvPr>
-            <p:extLst>
-              <p:ext uri="{386F3935-93C4-4BCD-93E2-E3B085C9AB24}">
-                <p16:designElem xmlns:p16="http://schemas.microsoft.com/office/powerpoint/2015/main" val="1"/>
-              </p:ext>
-            </p:extLst>
-          </p:nvPr>
-        </p:nvSpPr>
-        <p:spPr>
-          <a:xfrm>
-            <a:off x="2" y="0"/>
-            <a:ext cx="12191695" cy="6858000"/>
-          </a:xfrm>
-          <a:prstGeom prst="rect">
-            <a:avLst/>
-          </a:prstGeom>
-          <a:ln>
-            <a:noFill/>
-          </a:ln>
-        </p:spPr>
-        <p:style>
-          <a:lnRef idx="2">
-            <a:schemeClr val="accent1">
-              <a:shade val="50000"/>
-            </a:schemeClr>
-          </a:lnRef>
-          <a:fillRef idx="1">
-            <a:schemeClr val="accent1"/>
-          </a:fillRef>
-          <a:effectRef idx="0">
-            <a:schemeClr val="accent1"/>
-          </a:effectRef>
-          <a:fontRef idx="minor">
-            <a:schemeClr val="lt1"/>
-          </a:fontRef>
-        </p:style>
-        <p:txBody>
-          <a:bodyPr rtlCol="0" anchor="ctr"/>
-          <a:lstStyle/>
-          <a:p>
-            <a:pPr algn="ctr"/>
-            <a:endParaRPr lang="en-US"/>
-          </a:p>
-        </p:txBody>
-      </p:sp>
-      <p:sp>
-        <p:nvSpPr>
-          <p:cNvPr id="43" name="Rectangle 42">
-            <a:extLst>
-              <a:ext uri="{FF2B5EF4-FFF2-40B4-BE49-F238E27FC236}">
-                <a16:creationId xmlns:a16="http://schemas.microsoft.com/office/drawing/2014/main" id="{C007F3D3-099E-430E-8754-C084D0FA5FE3}"/>
-              </a:ext>
-              <a:ext uri="{C183D7F6-B498-43B3-948B-1728B52AA6E4}">
-                <adec:decorative xmlns:adec="http://schemas.microsoft.com/office/drawing/2017/decorative" val="1"/>
-              </a:ext>
-            </a:extLst>
-          </p:cNvPr>
-          <p:cNvSpPr>
-            <a:spLocks noGrp="1" noRot="1" noChangeAspect="1" noMove="1" noResize="1" noEditPoints="1" noAdjustHandles="1" noChangeArrowheads="1" noChangeShapeType="1" noTextEdit="1"/>
-          </p:cNvSpPr>
-          <p:nvPr>
-            <p:extLst>
-              <p:ext uri="{386F3935-93C4-4BCD-93E2-E3B085C9AB24}">
-                <p16:designElem xmlns:p16="http://schemas.microsoft.com/office/powerpoint/2015/main" val="1"/>
-              </p:ext>
-            </p:extLst>
-          </p:nvPr>
-        </p:nvSpPr>
-        <p:spPr>
-          <a:xfrm>
-            <a:off x="0" y="2019476"/>
-            <a:ext cx="12192000" cy="4105941"/>
-          </a:xfrm>
-          <a:prstGeom prst="rect">
-            <a:avLst/>
-          </a:prstGeom>
-          <a:gradFill flip="none" rotWithShape="1">
-            <a:gsLst>
-              <a:gs pos="0">
-                <a:schemeClr val="bg2">
-                  <a:alpha val="0"/>
-                </a:schemeClr>
-              </a:gs>
-              <a:gs pos="100000">
-                <a:schemeClr val="bg2"/>
-              </a:gs>
-            </a:gsLst>
-            <a:lin ang="5400000" scaled="0"/>
-            <a:tileRect/>
-          </a:gradFill>
-          <a:ln>
-            <a:noFill/>
-          </a:ln>
-        </p:spPr>
-        <p:style>
-          <a:lnRef idx="2">
-            <a:schemeClr val="accent1">
-              <a:shade val="50000"/>
-            </a:schemeClr>
-          </a:lnRef>
-          <a:fillRef idx="1">
-            <a:schemeClr val="accent1"/>
-          </a:fillRef>
-          <a:effectRef idx="0">
-            <a:schemeClr val="accent1"/>
-          </a:effectRef>
-          <a:fontRef idx="minor">
-            <a:schemeClr val="lt1"/>
-          </a:fontRef>
-        </p:style>
-        <p:txBody>
-          <a:bodyPr rtlCol="0" anchor="ctr"/>
-          <a:lstStyle/>
-          <a:p>
-            <a:pPr lvl="0" algn="ctr"/>
-            <a:endParaRPr lang="en-US"/>
-          </a:p>
-        </p:txBody>
-      </p:sp>
-      <p:sp>
-        <p:nvSpPr>
-          <p:cNvPr id="2" name="Title 1">
-            <a:extLst>
-              <a:ext uri="{FF2B5EF4-FFF2-40B4-BE49-F238E27FC236}">
-                <a16:creationId xmlns:a16="http://schemas.microsoft.com/office/drawing/2014/main" id="{39DDDFD2-F9A9-3A01-FF2A-6CDF8AAF1529}"/>
-              </a:ext>
-            </a:extLst>
-          </p:cNvPr>
-          <p:cNvSpPr>
-            <a:spLocks noGrp="1"/>
-          </p:cNvSpPr>
-          <p:nvPr>
-            <p:ph type="title"/>
-          </p:nvPr>
-        </p:nvSpPr>
-        <p:spPr>
-          <a:xfrm>
-            <a:off x="1776729" y="4459039"/>
-            <a:ext cx="8643011" cy="551528"/>
-          </a:xfrm>
-        </p:spPr>
-        <p:txBody>
-          <a:bodyPr vert="horz" lIns="91440" tIns="45720" rIns="91440" bIns="0" rtlCol="0" anchor="b">
-            <a:normAutofit/>
-          </a:bodyPr>
-          <a:lstStyle/>
-          <a:p>
-            <a:r>
-              <a:rPr lang="en-US" sz="3600"/>
-              <a:t>Vlajk Sándor – Dokumentáció</a:t>
-            </a:r>
-          </a:p>
-        </p:txBody>
-      </p:sp>
-      <p:pic>
-        <p:nvPicPr>
-          <p:cNvPr id="11" name="Picture 10">
-            <a:extLst>
-              <a:ext uri="{FF2B5EF4-FFF2-40B4-BE49-F238E27FC236}">
-                <a16:creationId xmlns:a16="http://schemas.microsoft.com/office/drawing/2014/main" id="{3C11F97F-2AE4-3D9B-35A6-AF80BEF77AF7}"/>
-              </a:ext>
-            </a:extLst>
-          </p:cNvPr>
-          <p:cNvPicPr>
-            <a:picLocks noChangeAspect="1"/>
-          </p:cNvPicPr>
-          <p:nvPr/>
-        </p:nvPicPr>
-        <p:blipFill>
-          <a:blip r:embed="rId3"/>
-          <a:stretch>
-            <a:fillRect/>
-          </a:stretch>
-        </p:blipFill>
-        <p:spPr>
-          <a:xfrm>
-            <a:off x="215647" y="470463"/>
-            <a:ext cx="3553338" cy="3856996"/>
-          </a:xfrm>
-          <a:prstGeom prst="rect">
-            <a:avLst/>
-          </a:prstGeom>
-        </p:spPr>
-      </p:pic>
-      <p:pic>
-        <p:nvPicPr>
-          <p:cNvPr id="9" name="Picture 8">
-            <a:extLst>
-              <a:ext uri="{FF2B5EF4-FFF2-40B4-BE49-F238E27FC236}">
-                <a16:creationId xmlns:a16="http://schemas.microsoft.com/office/drawing/2014/main" id="{EB92CDCE-F939-2C1B-FB2C-35BCFBC61213}"/>
-              </a:ext>
-            </a:extLst>
-          </p:cNvPr>
-          <p:cNvPicPr>
-            <a:picLocks noChangeAspect="1"/>
-          </p:cNvPicPr>
-          <p:nvPr/>
-        </p:nvPicPr>
-        <p:blipFill>
-          <a:blip r:embed="rId4"/>
-          <a:stretch>
-            <a:fillRect/>
-          </a:stretch>
-        </p:blipFill>
-        <p:spPr>
-          <a:xfrm>
-            <a:off x="4025898" y="890198"/>
-            <a:ext cx="3376192" cy="3215823"/>
-          </a:xfrm>
-          <a:prstGeom prst="rect">
-            <a:avLst/>
-          </a:prstGeom>
-        </p:spPr>
-      </p:pic>
-      <p:pic>
-        <p:nvPicPr>
-          <p:cNvPr id="5" name="Picture 4">
-            <a:extLst>
-              <a:ext uri="{FF2B5EF4-FFF2-40B4-BE49-F238E27FC236}">
-                <a16:creationId xmlns:a16="http://schemas.microsoft.com/office/drawing/2014/main" id="{C20FFCFC-0AFB-A5C7-E6B7-F9D1DC4B2FC6}"/>
-              </a:ext>
-            </a:extLst>
-          </p:cNvPr>
-          <p:cNvPicPr>
-            <a:picLocks noChangeAspect="1"/>
-          </p:cNvPicPr>
-          <p:nvPr/>
-        </p:nvPicPr>
-        <p:blipFill>
-          <a:blip r:embed="rId5"/>
-          <a:stretch>
-            <a:fillRect/>
-          </a:stretch>
-        </p:blipFill>
-        <p:spPr>
-          <a:xfrm>
-            <a:off x="7659003" y="1278460"/>
-            <a:ext cx="4317350" cy="2439301"/>
-          </a:xfrm>
-          <a:prstGeom prst="rect">
-            <a:avLst/>
-          </a:prstGeom>
-        </p:spPr>
-      </p:pic>
-      <p:cxnSp>
-        <p:nvCxnSpPr>
-          <p:cNvPr id="44" name="Straight Connector 43">
-            <a:extLst>
-              <a:ext uri="{FF2B5EF4-FFF2-40B4-BE49-F238E27FC236}">
-                <a16:creationId xmlns:a16="http://schemas.microsoft.com/office/drawing/2014/main" id="{6B9EA5DA-6DFD-447D-B8F9-CB95CA114076}"/>
-              </a:ext>
-              <a:ext uri="{C183D7F6-B498-43B3-948B-1728B52AA6E4}">
-                <adec:decorative xmlns:adec="http://schemas.microsoft.com/office/drawing/2017/decorative" val="1"/>
-              </a:ext>
-            </a:extLst>
-          </p:cNvPr>
-          <p:cNvCxnSpPr>
-            <a:cxnSpLocks noGrp="1" noRot="1" noChangeAspect="1" noMove="1" noResize="1" noEditPoints="1" noAdjustHandles="1" noChangeArrowheads="1" noChangeShapeType="1"/>
-          </p:cNvCxnSpPr>
-          <p:nvPr>
-            <p:extLst>
-              <p:ext uri="{386F3935-93C4-4BCD-93E2-E3B085C9AB24}">
-                <p16:designElem xmlns:p16="http://schemas.microsoft.com/office/powerpoint/2015/main" val="1"/>
-              </p:ext>
-            </p:extLst>
-          </p:nvPr>
-        </p:nvCxnSpPr>
-        <p:spPr>
-          <a:xfrm>
-            <a:off x="1776728" y="5027185"/>
-            <a:ext cx="8643011" cy="0"/>
-          </a:xfrm>
-          <a:prstGeom prst="line">
-            <a:avLst/>
-          </a:prstGeom>
-          <a:ln w="31750"/>
-        </p:spPr>
-        <p:style>
-          <a:lnRef idx="3">
-            <a:schemeClr val="accent1"/>
-          </a:lnRef>
-          <a:fillRef idx="0">
-            <a:schemeClr val="accent1"/>
-          </a:fillRef>
-          <a:effectRef idx="2">
-            <a:schemeClr val="accent1"/>
-          </a:effectRef>
-          <a:fontRef idx="minor">
-            <a:schemeClr val="tx1"/>
-          </a:fontRef>
-        </p:style>
-      </p:cxnSp>
-      <p:pic>
-        <p:nvPicPr>
-          <p:cNvPr id="45" name="Picture 44">
-            <a:extLst>
-              <a:ext uri="{FF2B5EF4-FFF2-40B4-BE49-F238E27FC236}">
-                <a16:creationId xmlns:a16="http://schemas.microsoft.com/office/drawing/2014/main" id="{87612EF9-94E7-42BA-B4A9-4B38643FBAF7}"/>
-              </a:ext>
-              <a:ext uri="{C183D7F6-B498-43B3-948B-1728B52AA6E4}">
-                <adec:decorative xmlns:adec="http://schemas.microsoft.com/office/drawing/2017/decorative" val="1"/>
-              </a:ext>
-            </a:extLst>
-          </p:cNvPr>
-          <p:cNvPicPr>
-            <a:picLocks noGrp="1" noRot="1" noChangeAspect="1" noMove="1" noResize="1" noEditPoints="1" noAdjustHandles="1" noChangeArrowheads="1" noChangeShapeType="1" noCrop="1"/>
-          </p:cNvPicPr>
-          <p:nvPr>
-            <p:extLst>
-              <p:ext uri="{386F3935-93C4-4BCD-93E2-E3B085C9AB24}">
-                <p16:designElem xmlns:p16="http://schemas.microsoft.com/office/powerpoint/2015/main" val="1"/>
-              </p:ext>
-            </p:extLst>
-          </p:nvPr>
-        </p:nvPicPr>
-        <p:blipFill rotWithShape="1">
-          <a:blip r:embed="rId2">
-            <a:extLst>
-              <a:ext uri="{28A0092B-C50C-407E-A947-70E740481C1C}">
-                <a14:useLocalDpi xmlns:a14="http://schemas.microsoft.com/office/drawing/2010/main" val="0"/>
-              </a:ext>
-            </a:extLst>
-          </a:blip>
-          <a:srcRect t="1538" b="-1538"/>
-          <a:stretch/>
-        </p:blipFill>
-        <p:spPr bwMode="black">
-          <a:xfrm>
-            <a:off x="0" y="6126480"/>
-            <a:ext cx="12192000" cy="742950"/>
-          </a:xfrm>
-          <a:prstGeom prst="rect">
-            <a:avLst/>
-          </a:prstGeom>
-        </p:spPr>
-      </p:pic>
-      <p:cxnSp>
-        <p:nvCxnSpPr>
-          <p:cNvPr id="46" name="Straight Connector 45">
-            <a:extLst>
-              <a:ext uri="{FF2B5EF4-FFF2-40B4-BE49-F238E27FC236}">
-                <a16:creationId xmlns:a16="http://schemas.microsoft.com/office/drawing/2014/main" id="{9E597F0B-0A17-4BF2-A904-9D99811F3E2E}"/>
-              </a:ext>
-              <a:ext uri="{C183D7F6-B498-43B3-948B-1728B52AA6E4}">
-                <adec:decorative xmlns:adec="http://schemas.microsoft.com/office/drawing/2017/decorative" val="1"/>
-              </a:ext>
-            </a:extLst>
-          </p:cNvPr>
-          <p:cNvCxnSpPr>
-            <a:cxnSpLocks noGrp="1" noRot="1" noChangeAspect="1" noMove="1" noResize="1" noEditPoints="1" noAdjustHandles="1" noChangeArrowheads="1" noChangeShapeType="1"/>
-          </p:cNvCxnSpPr>
-          <p:nvPr>
-            <p:extLst>
-              <p:ext uri="{386F3935-93C4-4BCD-93E2-E3B085C9AB24}">
-                <p16:designElem xmlns:p16="http://schemas.microsoft.com/office/powerpoint/2015/main" val="1"/>
-              </p:ext>
-            </p:extLst>
-          </p:nvPr>
-        </p:nvCxnSpPr>
-        <p:spPr>
-          <a:xfrm>
-            <a:off x="0" y="6128413"/>
-            <a:ext cx="12192000" cy="0"/>
-          </a:xfrm>
-          <a:prstGeom prst="line">
-            <a:avLst/>
-          </a:prstGeom>
-          <a:ln w="12700">
-            <a:solidFill>
-              <a:srgbClr val="000001">
-                <a:alpha val="20000"/>
-              </a:srgbClr>
-            </a:solidFill>
-          </a:ln>
-        </p:spPr>
-        <p:style>
-          <a:lnRef idx="1">
-            <a:schemeClr val="accent1"/>
-          </a:lnRef>
-          <a:fillRef idx="0">
-            <a:schemeClr val="accent1"/>
-          </a:fillRef>
-          <a:effectRef idx="0">
-            <a:schemeClr val="accent1"/>
-          </a:effectRef>
-          <a:fontRef idx="minor">
-            <a:schemeClr val="tx1"/>
-          </a:fontRef>
-        </p:style>
-      </p:cxnSp>
-    </p:spTree>
-    <p:extLst>
-      <p:ext uri="{BB962C8B-B14F-4D97-AF65-F5344CB8AC3E}">
-        <p14:creationId xmlns:p14="http://schemas.microsoft.com/office/powerpoint/2010/main" val="3510849585"/>
-      </p:ext>
-    </p:extLst>
-  </p:cSld>
-  <p:clrMapOvr>
-    <a:masterClrMapping/>
-  </p:clrMapOvr>
-</p:sld>
-</file>
-
-<file path=ppt/slides/slide14.xml><?xml version="1.0" encoding="utf-8"?>
+<file path=ppt/slides/slide15.xml><?xml version="1.0" encoding="utf-8"?>
 <p:sld xmlns:a="http://schemas.openxmlformats.org/drawingml/2006/main" xmlns:r="http://schemas.openxmlformats.org/officeDocument/2006/relationships" xmlns:p="http://schemas.openxmlformats.org/presentationml/2006/main">
   <p:cSld>
     <p:spTree>
@@ -7349,10 +5666,10 @@
       </p:grpSpPr>
       <p:sp>
         <p:nvSpPr>
-          <p:cNvPr id="2" name="Title 1">
-            <a:extLst>
-              <a:ext uri="{FF2B5EF4-FFF2-40B4-BE49-F238E27FC236}">
-                <a16:creationId xmlns:a16="http://schemas.microsoft.com/office/drawing/2014/main" id="{6302D0E6-DFB3-5E17-192B-D3B11F717D8C}"/>
+          <p:cNvPr id="2" name="Cím 1">
+            <a:extLst>
+              <a:ext uri="{FF2B5EF4-FFF2-40B4-BE49-F238E27FC236}">
+                <a16:creationId xmlns:a16="http://schemas.microsoft.com/office/drawing/2014/main" id="{7407F714-EB82-8F09-39BE-2EA2507EAE3E}"/>
               </a:ext>
             </a:extLst>
           </p:cNvPr>
@@ -7369,23 +5686,21 @@
           <a:lstStyle/>
           <a:p>
             <a:r>
-              <a:rPr lang="en-US" dirty="0"/>
-              <a:t>Vlajk Sándor – </a:t>
+              <a:rPr lang="hu-HU" dirty="0"/>
+              <a:t>Daróczi Levente - Tesztelés</a:t>
             </a:r>
-            <a:r>
-              <a:rPr lang="en-US" dirty="0" err="1"/>
-              <a:t>Fejlesztés</a:t>
-            </a:r>
-            <a:endParaRPr lang="en-US" dirty="0"/>
+          </a:p>
+          <a:p>
+            <a:endParaRPr lang="hu-HU" dirty="0"/>
           </a:p>
         </p:txBody>
       </p:sp>
       <p:pic>
         <p:nvPicPr>
-          <p:cNvPr id="5" name="Picture 4">
-            <a:extLst>
-              <a:ext uri="{FF2B5EF4-FFF2-40B4-BE49-F238E27FC236}">
-                <a16:creationId xmlns:a16="http://schemas.microsoft.com/office/drawing/2014/main" id="{E7DCF374-80C3-CBE5-BC73-F12C234A38EC}"/>
+          <p:cNvPr id="5" name="Kép 4" descr="A képen szöveg, képernyőkép, Betűtípus látható&#10;&#10;Lehet, hogy az AI által létrehozott tartalom helytelen.">
+            <a:extLst>
+              <a:ext uri="{FF2B5EF4-FFF2-40B4-BE49-F238E27FC236}">
+                <a16:creationId xmlns:a16="http://schemas.microsoft.com/office/drawing/2014/main" id="{F3B441E7-FB21-E733-736D-5AE554D71E83}"/>
               </a:ext>
             </a:extLst>
           </p:cNvPr>
@@ -7402,38 +5717,8 @@
         </p:blipFill>
         <p:spPr>
           <a:xfrm>
-            <a:off x="809387" y="2190530"/>
-            <a:ext cx="8630854" cy="3143689"/>
-          </a:xfrm>
-          <a:prstGeom prst="rect">
-            <a:avLst/>
-          </a:prstGeom>
-        </p:spPr>
-      </p:pic>
-      <p:pic>
-        <p:nvPicPr>
-          <p:cNvPr id="7" name="Picture 6">
-            <a:extLst>
-              <a:ext uri="{FF2B5EF4-FFF2-40B4-BE49-F238E27FC236}">
-                <a16:creationId xmlns:a16="http://schemas.microsoft.com/office/drawing/2014/main" id="{13C83DBE-18EF-02F8-4CDE-12A988AA16AE}"/>
-              </a:ext>
-            </a:extLst>
-          </p:cNvPr>
-          <p:cNvPicPr>
-            <a:picLocks noChangeAspect="1"/>
-          </p:cNvPicPr>
-          <p:nvPr/>
-        </p:nvPicPr>
-        <p:blipFill>
-          <a:blip r:embed="rId3"/>
-          <a:stretch>
-            <a:fillRect/>
-          </a:stretch>
-        </p:blipFill>
-        <p:spPr>
-          <a:xfrm>
-            <a:off x="809387" y="5504284"/>
-            <a:ext cx="3410426" cy="333422"/>
+            <a:off x="2555081" y="1369218"/>
+            <a:ext cx="7391401" cy="5488782"/>
           </a:xfrm>
           <a:prstGeom prst="rect">
             <a:avLst/>
@@ -7443,687 +5728,7 @@
     </p:spTree>
     <p:extLst>
       <p:ext uri="{BB962C8B-B14F-4D97-AF65-F5344CB8AC3E}">
-        <p14:creationId xmlns:p14="http://schemas.microsoft.com/office/powerpoint/2010/main" val="2040790998"/>
-      </p:ext>
-    </p:extLst>
-  </p:cSld>
-  <p:clrMapOvr>
-    <a:masterClrMapping/>
-  </p:clrMapOvr>
-</p:sld>
-</file>
-
-<file path=ppt/slides/slide15.xml><?xml version="1.0" encoding="utf-8"?>
-<p:sld xmlns:a="http://schemas.openxmlformats.org/drawingml/2006/main" xmlns:r="http://schemas.openxmlformats.org/officeDocument/2006/relationships" xmlns:p="http://schemas.openxmlformats.org/presentationml/2006/main">
-  <p:cSld>
-    <p:bg>
-      <p:bgPr>
-        <a:gradFill rotWithShape="1">
-          <a:gsLst>
-            <a:gs pos="0">
-              <a:schemeClr val="bg2">
-                <a:tint val="94000"/>
-                <a:satMod val="80000"/>
-                <a:lumMod val="106000"/>
-              </a:schemeClr>
-            </a:gs>
-            <a:gs pos="100000">
-              <a:schemeClr val="bg2">
-                <a:shade val="80000"/>
-              </a:schemeClr>
-            </a:gs>
-          </a:gsLst>
-          <a:path path="circle">
-            <a:fillToRect l="43000" r="43000" b="100000"/>
-          </a:path>
-        </a:gradFill>
-        <a:effectLst/>
-      </p:bgPr>
-    </p:bg>
-    <p:spTree>
-      <p:nvGrpSpPr>
-        <p:cNvPr id="1" name=""/>
-        <p:cNvGrpSpPr/>
-        <p:nvPr/>
-      </p:nvGrpSpPr>
-      <p:grpSpPr>
-        <a:xfrm>
-          <a:off x="0" y="0"/>
-          <a:ext cx="0" cy="0"/>
-          <a:chOff x="0" y="0"/>
-          <a:chExt cx="0" cy="0"/>
-        </a:xfrm>
-      </p:grpSpPr>
-      <p:sp>
-        <p:nvSpPr>
-          <p:cNvPr id="14" name="Rectangle 13">
-            <a:extLst>
-              <a:ext uri="{FF2B5EF4-FFF2-40B4-BE49-F238E27FC236}">
-                <a16:creationId xmlns:a16="http://schemas.microsoft.com/office/drawing/2014/main" id="{E724B9E8-02C8-4B2E-8770-A00A67760DF0}"/>
-              </a:ext>
-              <a:ext uri="{C183D7F6-B498-43B3-948B-1728B52AA6E4}">
-                <adec:decorative xmlns:adec="http://schemas.microsoft.com/office/drawing/2017/decorative" val="1"/>
-              </a:ext>
-            </a:extLst>
-          </p:cNvPr>
-          <p:cNvSpPr>
-            <a:spLocks noGrp="1" noRot="1" noChangeAspect="1" noMove="1" noResize="1" noEditPoints="1" noAdjustHandles="1" noChangeArrowheads="1" noChangeShapeType="1" noTextEdit="1"/>
-          </p:cNvSpPr>
-          <p:nvPr>
-            <p:extLst>
-              <p:ext uri="{386F3935-93C4-4BCD-93E2-E3B085C9AB24}">
-                <p16:designElem xmlns:p16="http://schemas.microsoft.com/office/powerpoint/2015/main" val="1"/>
-              </p:ext>
-            </p:extLst>
-          </p:nvPr>
-        </p:nvSpPr>
-        <p:spPr>
-          <a:xfrm>
-            <a:off x="0" y="2019476"/>
-            <a:ext cx="12192000" cy="4105941"/>
-          </a:xfrm>
-          <a:prstGeom prst="rect">
-            <a:avLst/>
-          </a:prstGeom>
-          <a:gradFill flip="none" rotWithShape="1">
-            <a:gsLst>
-              <a:gs pos="0">
-                <a:schemeClr val="bg2">
-                  <a:alpha val="0"/>
-                </a:schemeClr>
-              </a:gs>
-              <a:gs pos="100000">
-                <a:schemeClr val="bg2"/>
-              </a:gs>
-            </a:gsLst>
-            <a:lin ang="5400000" scaled="0"/>
-            <a:tileRect/>
-          </a:gradFill>
-          <a:ln>
-            <a:noFill/>
-          </a:ln>
-        </p:spPr>
-        <p:style>
-          <a:lnRef idx="2">
-            <a:schemeClr val="accent1">
-              <a:shade val="50000"/>
-            </a:schemeClr>
-          </a:lnRef>
-          <a:fillRef idx="1">
-            <a:schemeClr val="accent1"/>
-          </a:fillRef>
-          <a:effectRef idx="0">
-            <a:schemeClr val="accent1"/>
-          </a:effectRef>
-          <a:fontRef idx="minor">
-            <a:schemeClr val="lt1"/>
-          </a:fontRef>
-        </p:style>
-        <p:txBody>
-          <a:bodyPr/>
-          <a:lstStyle/>
-          <a:p>
-            <a:endParaRPr lang="en-US"/>
-          </a:p>
-        </p:txBody>
-      </p:sp>
-      <p:pic>
-        <p:nvPicPr>
-          <p:cNvPr id="16" name="Picture 15">
-            <a:extLst>
-              <a:ext uri="{FF2B5EF4-FFF2-40B4-BE49-F238E27FC236}">
-                <a16:creationId xmlns:a16="http://schemas.microsoft.com/office/drawing/2014/main" id="{7B8AE548-0BFA-4792-9962-3375923C7635}"/>
-              </a:ext>
-              <a:ext uri="{C183D7F6-B498-43B3-948B-1728B52AA6E4}">
-                <adec:decorative xmlns:adec="http://schemas.microsoft.com/office/drawing/2017/decorative" val="1"/>
-              </a:ext>
-            </a:extLst>
-          </p:cNvPr>
-          <p:cNvPicPr>
-            <a:picLocks noGrp="1" noRot="1" noChangeAspect="1" noMove="1" noResize="1" noEditPoints="1" noAdjustHandles="1" noChangeArrowheads="1" noChangeShapeType="1" noCrop="1"/>
-          </p:cNvPicPr>
-          <p:nvPr>
-            <p:extLst>
-              <p:ext uri="{386F3935-93C4-4BCD-93E2-E3B085C9AB24}">
-                <p16:designElem xmlns:p16="http://schemas.microsoft.com/office/powerpoint/2015/main" val="1"/>
-              </p:ext>
-            </p:extLst>
-          </p:nvPr>
-        </p:nvPicPr>
-        <p:blipFill rotWithShape="1">
-          <a:blip r:embed="rId2">
-            <a:extLst>
-              <a:ext uri="{28A0092B-C50C-407E-A947-70E740481C1C}">
-                <a14:useLocalDpi xmlns:a14="http://schemas.microsoft.com/office/drawing/2010/main" val="0"/>
-              </a:ext>
-            </a:extLst>
-          </a:blip>
-          <a:srcRect t="1538" b="-1538"/>
-          <a:stretch/>
-        </p:blipFill>
-        <p:spPr bwMode="black">
-          <a:xfrm>
-            <a:off x="0" y="6126480"/>
-            <a:ext cx="12192000" cy="742950"/>
-          </a:xfrm>
-          <a:prstGeom prst="rect">
-            <a:avLst/>
-          </a:prstGeom>
-        </p:spPr>
-      </p:pic>
-      <p:cxnSp>
-        <p:nvCxnSpPr>
-          <p:cNvPr id="18" name="Straight Connector 17">
-            <a:extLst>
-              <a:ext uri="{FF2B5EF4-FFF2-40B4-BE49-F238E27FC236}">
-                <a16:creationId xmlns:a16="http://schemas.microsoft.com/office/drawing/2014/main" id="{67639EF4-FA83-4D85-90FE-B831AF283896}"/>
-              </a:ext>
-              <a:ext uri="{C183D7F6-B498-43B3-948B-1728B52AA6E4}">
-                <adec:decorative xmlns:adec="http://schemas.microsoft.com/office/drawing/2017/decorative" val="1"/>
-              </a:ext>
-            </a:extLst>
-          </p:cNvPr>
-          <p:cNvCxnSpPr>
-            <a:cxnSpLocks noGrp="1" noRot="1" noChangeAspect="1" noMove="1" noResize="1" noEditPoints="1" noAdjustHandles="1" noChangeArrowheads="1" noChangeShapeType="1"/>
-          </p:cNvCxnSpPr>
-          <p:nvPr>
-            <p:extLst>
-              <p:ext uri="{386F3935-93C4-4BCD-93E2-E3B085C9AB24}">
-                <p16:designElem xmlns:p16="http://schemas.microsoft.com/office/powerpoint/2015/main" val="1"/>
-              </p:ext>
-            </p:extLst>
-          </p:nvPr>
-        </p:nvCxnSpPr>
-        <p:spPr>
-          <a:xfrm>
-            <a:off x="0" y="6128413"/>
-            <a:ext cx="12192000" cy="0"/>
-          </a:xfrm>
-          <a:prstGeom prst="line">
-            <a:avLst/>
-          </a:prstGeom>
-          <a:ln w="12700">
-            <a:solidFill>
-              <a:srgbClr val="000001">
-                <a:alpha val="20000"/>
-              </a:srgbClr>
-            </a:solidFill>
-          </a:ln>
-        </p:spPr>
-        <p:style>
-          <a:lnRef idx="1">
-            <a:schemeClr val="accent1"/>
-          </a:lnRef>
-          <a:fillRef idx="0">
-            <a:schemeClr val="accent1"/>
-          </a:fillRef>
-          <a:effectRef idx="0">
-            <a:schemeClr val="accent1"/>
-          </a:effectRef>
-          <a:fontRef idx="minor">
-            <a:schemeClr val="tx1"/>
-          </a:fontRef>
-        </p:style>
-      </p:cxnSp>
-      <p:cxnSp>
-        <p:nvCxnSpPr>
-          <p:cNvPr id="20" name="Straight Connector 19">
-            <a:extLst>
-              <a:ext uri="{FF2B5EF4-FFF2-40B4-BE49-F238E27FC236}">
-                <a16:creationId xmlns:a16="http://schemas.microsoft.com/office/drawing/2014/main" id="{CC87E76A-8F50-413D-9BFC-C5A1525BD9BC}"/>
-              </a:ext>
-              <a:ext uri="{C183D7F6-B498-43B3-948B-1728B52AA6E4}">
-                <adec:decorative xmlns:adec="http://schemas.microsoft.com/office/drawing/2017/decorative" val="1"/>
-              </a:ext>
-            </a:extLst>
-          </p:cNvPr>
-          <p:cNvCxnSpPr>
-            <a:cxnSpLocks noGrp="1" noRot="1" noChangeAspect="1" noMove="1" noResize="1" noEditPoints="1" noAdjustHandles="1" noChangeArrowheads="1" noChangeShapeType="1"/>
-          </p:cNvCxnSpPr>
-          <p:nvPr>
-            <p:extLst>
-              <p:ext uri="{386F3935-93C4-4BCD-93E2-E3B085C9AB24}">
-                <p16:designElem xmlns:p16="http://schemas.microsoft.com/office/powerpoint/2015/main" val="1"/>
-              </p:ext>
-            </p:extLst>
-          </p:nvPr>
-        </p:nvCxnSpPr>
-        <p:spPr>
-          <a:xfrm>
-            <a:off x="2417780" y="3528542"/>
-            <a:ext cx="8637072" cy="0"/>
-          </a:xfrm>
-          <a:prstGeom prst="line">
-            <a:avLst/>
-          </a:prstGeom>
-          <a:ln w="31750"/>
-        </p:spPr>
-        <p:style>
-          <a:lnRef idx="3">
-            <a:schemeClr val="accent1"/>
-          </a:lnRef>
-          <a:fillRef idx="0">
-            <a:schemeClr val="accent1"/>
-          </a:fillRef>
-          <a:effectRef idx="2">
-            <a:schemeClr val="accent1"/>
-          </a:effectRef>
-          <a:fontRef idx="minor">
-            <a:schemeClr val="tx1"/>
-          </a:fontRef>
-        </p:style>
-      </p:cxnSp>
-      <p:sp useBgFill="1">
-        <p:nvSpPr>
-          <p:cNvPr id="22" name="Rectangle 21">
-            <a:extLst>
-              <a:ext uri="{FF2B5EF4-FFF2-40B4-BE49-F238E27FC236}">
-                <a16:creationId xmlns:a16="http://schemas.microsoft.com/office/drawing/2014/main" id="{9A1C6278-B7D5-4E8E-B4DC-834832980565}"/>
-              </a:ext>
-              <a:ext uri="{C183D7F6-B498-43B3-948B-1728B52AA6E4}">
-                <adec:decorative xmlns:adec="http://schemas.microsoft.com/office/drawing/2017/decorative" val="1"/>
-              </a:ext>
-            </a:extLst>
-          </p:cNvPr>
-          <p:cNvSpPr>
-            <a:spLocks noGrp="1" noRot="1" noChangeAspect="1" noMove="1" noResize="1" noEditPoints="1" noAdjustHandles="1" noChangeArrowheads="1" noChangeShapeType="1" noTextEdit="1"/>
-          </p:cNvSpPr>
-          <p:nvPr>
-            <p:extLst>
-              <p:ext uri="{386F3935-93C4-4BCD-93E2-E3B085C9AB24}">
-                <p16:designElem xmlns:p16="http://schemas.microsoft.com/office/powerpoint/2015/main" val="1"/>
-              </p:ext>
-            </p:extLst>
-          </p:nvPr>
-        </p:nvSpPr>
-        <p:spPr>
-          <a:xfrm>
-            <a:off x="2" y="0"/>
-            <a:ext cx="12191695" cy="6858000"/>
-          </a:xfrm>
-          <a:prstGeom prst="rect">
-            <a:avLst/>
-          </a:prstGeom>
-          <a:ln>
-            <a:noFill/>
-          </a:ln>
-        </p:spPr>
-        <p:style>
-          <a:lnRef idx="2">
-            <a:schemeClr val="accent1">
-              <a:shade val="50000"/>
-            </a:schemeClr>
-          </a:lnRef>
-          <a:fillRef idx="1">
-            <a:schemeClr val="accent1"/>
-          </a:fillRef>
-          <a:effectRef idx="0">
-            <a:schemeClr val="accent1"/>
-          </a:effectRef>
-          <a:fontRef idx="minor">
-            <a:schemeClr val="lt1"/>
-          </a:fontRef>
-        </p:style>
-        <p:txBody>
-          <a:bodyPr rtlCol="0" anchor="ctr"/>
-          <a:lstStyle/>
-          <a:p>
-            <a:pPr algn="ctr"/>
-            <a:endParaRPr lang="en-US"/>
-          </a:p>
-        </p:txBody>
-      </p:sp>
-      <p:sp>
-        <p:nvSpPr>
-          <p:cNvPr id="24" name="Rectangle 23">
-            <a:extLst>
-              <a:ext uri="{FF2B5EF4-FFF2-40B4-BE49-F238E27FC236}">
-                <a16:creationId xmlns:a16="http://schemas.microsoft.com/office/drawing/2014/main" id="{C007F3D3-099E-430E-8754-C084D0FA5FE3}"/>
-              </a:ext>
-              <a:ext uri="{C183D7F6-B498-43B3-948B-1728B52AA6E4}">
-                <adec:decorative xmlns:adec="http://schemas.microsoft.com/office/drawing/2017/decorative" val="1"/>
-              </a:ext>
-            </a:extLst>
-          </p:cNvPr>
-          <p:cNvSpPr>
-            <a:spLocks noGrp="1" noRot="1" noChangeAspect="1" noMove="1" noResize="1" noEditPoints="1" noAdjustHandles="1" noChangeArrowheads="1" noChangeShapeType="1" noTextEdit="1"/>
-          </p:cNvSpPr>
-          <p:nvPr>
-            <p:extLst>
-              <p:ext uri="{386F3935-93C4-4BCD-93E2-E3B085C9AB24}">
-                <p16:designElem xmlns:p16="http://schemas.microsoft.com/office/powerpoint/2015/main" val="1"/>
-              </p:ext>
-            </p:extLst>
-          </p:nvPr>
-        </p:nvSpPr>
-        <p:spPr>
-          <a:xfrm>
-            <a:off x="0" y="2019476"/>
-            <a:ext cx="12192000" cy="4105941"/>
-          </a:xfrm>
-          <a:prstGeom prst="rect">
-            <a:avLst/>
-          </a:prstGeom>
-          <a:gradFill flip="none" rotWithShape="1">
-            <a:gsLst>
-              <a:gs pos="0">
-                <a:schemeClr val="bg2">
-                  <a:alpha val="0"/>
-                </a:schemeClr>
-              </a:gs>
-              <a:gs pos="100000">
-                <a:schemeClr val="bg2"/>
-              </a:gs>
-            </a:gsLst>
-            <a:lin ang="5400000" scaled="0"/>
-            <a:tileRect/>
-          </a:gradFill>
-          <a:ln>
-            <a:noFill/>
-          </a:ln>
-        </p:spPr>
-        <p:style>
-          <a:lnRef idx="2">
-            <a:schemeClr val="accent1">
-              <a:shade val="50000"/>
-            </a:schemeClr>
-          </a:lnRef>
-          <a:fillRef idx="1">
-            <a:schemeClr val="accent1"/>
-          </a:fillRef>
-          <a:effectRef idx="0">
-            <a:schemeClr val="accent1"/>
-          </a:effectRef>
-          <a:fontRef idx="minor">
-            <a:schemeClr val="lt1"/>
-          </a:fontRef>
-        </p:style>
-        <p:txBody>
-          <a:bodyPr rtlCol="0" anchor="ctr"/>
-          <a:lstStyle/>
-          <a:p>
-            <a:pPr lvl="0" algn="ctr"/>
-            <a:endParaRPr lang="en-US"/>
-          </a:p>
-        </p:txBody>
-      </p:sp>
-      <p:sp>
-        <p:nvSpPr>
-          <p:cNvPr id="2" name="Title 1">
-            <a:extLst>
-              <a:ext uri="{FF2B5EF4-FFF2-40B4-BE49-F238E27FC236}">
-                <a16:creationId xmlns:a16="http://schemas.microsoft.com/office/drawing/2014/main" id="{13CFD6D8-D4CB-7D22-6034-0448D726F997}"/>
-              </a:ext>
-            </a:extLst>
-          </p:cNvPr>
-          <p:cNvSpPr>
-            <a:spLocks noGrp="1"/>
-          </p:cNvSpPr>
-          <p:nvPr>
-            <p:ph type="title"/>
-          </p:nvPr>
-        </p:nvSpPr>
-        <p:spPr>
-          <a:xfrm>
-            <a:off x="1776729" y="4459039"/>
-            <a:ext cx="8643011" cy="551528"/>
-          </a:xfrm>
-        </p:spPr>
-        <p:txBody>
-          <a:bodyPr vert="horz" lIns="91440" tIns="45720" rIns="91440" bIns="0" rtlCol="0" anchor="b">
-            <a:normAutofit/>
-          </a:bodyPr>
-          <a:lstStyle/>
-          <a:p>
-            <a:r>
-              <a:rPr lang="en-US" sz="3600"/>
-              <a:t>Vlajk Sándor - Fejlesztés</a:t>
-            </a:r>
-          </a:p>
-        </p:txBody>
-      </p:sp>
-      <p:pic>
-        <p:nvPicPr>
-          <p:cNvPr id="5" name="Content Placeholder 4">
-            <a:extLst>
-              <a:ext uri="{FF2B5EF4-FFF2-40B4-BE49-F238E27FC236}">
-                <a16:creationId xmlns:a16="http://schemas.microsoft.com/office/drawing/2014/main" id="{D328A2F4-206A-9FAD-C168-CDB9610FB783}"/>
-              </a:ext>
-            </a:extLst>
-          </p:cNvPr>
-          <p:cNvPicPr>
-            <a:picLocks noGrp="1" noChangeAspect="1"/>
-          </p:cNvPicPr>
-          <p:nvPr>
-            <p:ph idx="1"/>
-          </p:nvPr>
-        </p:nvPicPr>
-        <p:blipFill>
-          <a:blip r:embed="rId3"/>
-          <a:stretch>
-            <a:fillRect/>
-          </a:stretch>
-        </p:blipFill>
-        <p:spPr>
-          <a:xfrm>
-            <a:off x="984120" y="198045"/>
-            <a:ext cx="4106012" cy="3007654"/>
-          </a:xfrm>
-          <a:prstGeom prst="rect">
-            <a:avLst/>
-          </a:prstGeom>
-        </p:spPr>
-      </p:pic>
-      <p:pic>
-        <p:nvPicPr>
-          <p:cNvPr id="7" name="Picture 6">
-            <a:extLst>
-              <a:ext uri="{FF2B5EF4-FFF2-40B4-BE49-F238E27FC236}">
-                <a16:creationId xmlns:a16="http://schemas.microsoft.com/office/drawing/2014/main" id="{AA8CF25F-105A-EA84-AB38-9B2CDC7B3277}"/>
-              </a:ext>
-            </a:extLst>
-          </p:cNvPr>
-          <p:cNvPicPr>
-            <a:picLocks noChangeAspect="1"/>
-          </p:cNvPicPr>
-          <p:nvPr/>
-        </p:nvPicPr>
-        <p:blipFill>
-          <a:blip r:embed="rId4"/>
-          <a:stretch>
-            <a:fillRect/>
-          </a:stretch>
-        </p:blipFill>
-        <p:spPr>
-          <a:xfrm>
-            <a:off x="6074249" y="638316"/>
-            <a:ext cx="5549025" cy="3079707"/>
-          </a:xfrm>
-          <a:prstGeom prst="rect">
-            <a:avLst/>
-          </a:prstGeom>
-        </p:spPr>
-      </p:pic>
-      <p:pic>
-        <p:nvPicPr>
-          <p:cNvPr id="9" name="Picture 8">
-            <a:extLst>
-              <a:ext uri="{FF2B5EF4-FFF2-40B4-BE49-F238E27FC236}">
-                <a16:creationId xmlns:a16="http://schemas.microsoft.com/office/drawing/2014/main" id="{07C5DCCD-B4B3-22CE-2C2A-CC1050E657B0}"/>
-              </a:ext>
-            </a:extLst>
-          </p:cNvPr>
-          <p:cNvPicPr>
-            <a:picLocks noChangeAspect="1"/>
-          </p:cNvPicPr>
-          <p:nvPr/>
-        </p:nvPicPr>
-        <p:blipFill>
-          <a:blip r:embed="rId5"/>
-          <a:stretch>
-            <a:fillRect/>
-          </a:stretch>
-        </p:blipFill>
-        <p:spPr>
-          <a:xfrm>
-            <a:off x="1343846" y="3271561"/>
-            <a:ext cx="3386560" cy="1121616"/>
-          </a:xfrm>
-          <a:prstGeom prst="rect">
-            <a:avLst/>
-          </a:prstGeom>
-        </p:spPr>
-      </p:pic>
-      <p:cxnSp>
-        <p:nvCxnSpPr>
-          <p:cNvPr id="26" name="Straight Connector 25">
-            <a:extLst>
-              <a:ext uri="{FF2B5EF4-FFF2-40B4-BE49-F238E27FC236}">
-                <a16:creationId xmlns:a16="http://schemas.microsoft.com/office/drawing/2014/main" id="{6B9EA5DA-6DFD-447D-B8F9-CB95CA114076}"/>
-              </a:ext>
-              <a:ext uri="{C183D7F6-B498-43B3-948B-1728B52AA6E4}">
-                <adec:decorative xmlns:adec="http://schemas.microsoft.com/office/drawing/2017/decorative" val="1"/>
-              </a:ext>
-            </a:extLst>
-          </p:cNvPr>
-          <p:cNvCxnSpPr>
-            <a:cxnSpLocks noGrp="1" noRot="1" noChangeAspect="1" noMove="1" noResize="1" noEditPoints="1" noAdjustHandles="1" noChangeArrowheads="1" noChangeShapeType="1"/>
-          </p:cNvCxnSpPr>
-          <p:nvPr>
-            <p:extLst>
-              <p:ext uri="{386F3935-93C4-4BCD-93E2-E3B085C9AB24}">
-                <p16:designElem xmlns:p16="http://schemas.microsoft.com/office/powerpoint/2015/main" val="1"/>
-              </p:ext>
-            </p:extLst>
-          </p:nvPr>
-        </p:nvCxnSpPr>
-        <p:spPr>
-          <a:xfrm>
-            <a:off x="1776728" y="5027185"/>
-            <a:ext cx="8643011" cy="0"/>
-          </a:xfrm>
-          <a:prstGeom prst="line">
-            <a:avLst/>
-          </a:prstGeom>
-          <a:ln w="31750"/>
-        </p:spPr>
-        <p:style>
-          <a:lnRef idx="3">
-            <a:schemeClr val="accent1"/>
-          </a:lnRef>
-          <a:fillRef idx="0">
-            <a:schemeClr val="accent1"/>
-          </a:fillRef>
-          <a:effectRef idx="2">
-            <a:schemeClr val="accent1"/>
-          </a:effectRef>
-          <a:fontRef idx="minor">
-            <a:schemeClr val="tx1"/>
-          </a:fontRef>
-        </p:style>
-      </p:cxnSp>
-      <p:pic>
-        <p:nvPicPr>
-          <p:cNvPr id="28" name="Picture 27">
-            <a:extLst>
-              <a:ext uri="{FF2B5EF4-FFF2-40B4-BE49-F238E27FC236}">
-                <a16:creationId xmlns:a16="http://schemas.microsoft.com/office/drawing/2014/main" id="{87612EF9-94E7-42BA-B4A9-4B38643FBAF7}"/>
-              </a:ext>
-              <a:ext uri="{C183D7F6-B498-43B3-948B-1728B52AA6E4}">
-                <adec:decorative xmlns:adec="http://schemas.microsoft.com/office/drawing/2017/decorative" val="1"/>
-              </a:ext>
-            </a:extLst>
-          </p:cNvPr>
-          <p:cNvPicPr>
-            <a:picLocks noGrp="1" noRot="1" noChangeAspect="1" noMove="1" noResize="1" noEditPoints="1" noAdjustHandles="1" noChangeArrowheads="1" noChangeShapeType="1" noCrop="1"/>
-          </p:cNvPicPr>
-          <p:nvPr>
-            <p:extLst>
-              <p:ext uri="{386F3935-93C4-4BCD-93E2-E3B085C9AB24}">
-                <p16:designElem xmlns:p16="http://schemas.microsoft.com/office/powerpoint/2015/main" val="1"/>
-              </p:ext>
-            </p:extLst>
-          </p:nvPr>
-        </p:nvPicPr>
-        <p:blipFill rotWithShape="1">
-          <a:blip r:embed="rId2">
-            <a:extLst>
-              <a:ext uri="{28A0092B-C50C-407E-A947-70E740481C1C}">
-                <a14:useLocalDpi xmlns:a14="http://schemas.microsoft.com/office/drawing/2010/main" val="0"/>
-              </a:ext>
-            </a:extLst>
-          </a:blip>
-          <a:srcRect t="1538" b="-1538"/>
-          <a:stretch/>
-        </p:blipFill>
-        <p:spPr bwMode="black">
-          <a:xfrm>
-            <a:off x="0" y="6126480"/>
-            <a:ext cx="12192000" cy="742950"/>
-          </a:xfrm>
-          <a:prstGeom prst="rect">
-            <a:avLst/>
-          </a:prstGeom>
-        </p:spPr>
-      </p:pic>
-      <p:cxnSp>
-        <p:nvCxnSpPr>
-          <p:cNvPr id="30" name="Straight Connector 29">
-            <a:extLst>
-              <a:ext uri="{FF2B5EF4-FFF2-40B4-BE49-F238E27FC236}">
-                <a16:creationId xmlns:a16="http://schemas.microsoft.com/office/drawing/2014/main" id="{9E597F0B-0A17-4BF2-A904-9D99811F3E2E}"/>
-              </a:ext>
-              <a:ext uri="{C183D7F6-B498-43B3-948B-1728B52AA6E4}">
-                <adec:decorative xmlns:adec="http://schemas.microsoft.com/office/drawing/2017/decorative" val="1"/>
-              </a:ext>
-            </a:extLst>
-          </p:cNvPr>
-          <p:cNvCxnSpPr>
-            <a:cxnSpLocks noGrp="1" noRot="1" noChangeAspect="1" noMove="1" noResize="1" noEditPoints="1" noAdjustHandles="1" noChangeArrowheads="1" noChangeShapeType="1"/>
-          </p:cNvCxnSpPr>
-          <p:nvPr>
-            <p:extLst>
-              <p:ext uri="{386F3935-93C4-4BCD-93E2-E3B085C9AB24}">
-                <p16:designElem xmlns:p16="http://schemas.microsoft.com/office/powerpoint/2015/main" val="1"/>
-              </p:ext>
-            </p:extLst>
-          </p:nvPr>
-        </p:nvCxnSpPr>
-        <p:spPr>
-          <a:xfrm>
-            <a:off x="0" y="6128413"/>
-            <a:ext cx="12192000" cy="0"/>
-          </a:xfrm>
-          <a:prstGeom prst="line">
-            <a:avLst/>
-          </a:prstGeom>
-          <a:ln w="12700">
-            <a:solidFill>
-              <a:srgbClr val="000001">
-                <a:alpha val="20000"/>
-              </a:srgbClr>
-            </a:solidFill>
-          </a:ln>
-        </p:spPr>
-        <p:style>
-          <a:lnRef idx="1">
-            <a:schemeClr val="accent1"/>
-          </a:lnRef>
-          <a:fillRef idx="0">
-            <a:schemeClr val="accent1"/>
-          </a:fillRef>
-          <a:effectRef idx="0">
-            <a:schemeClr val="accent1"/>
-          </a:effectRef>
-          <a:fontRef idx="minor">
-            <a:schemeClr val="tx1"/>
-          </a:fontRef>
-        </p:style>
-      </p:cxnSp>
-    </p:spTree>
-    <p:extLst>
-      <p:ext uri="{BB962C8B-B14F-4D97-AF65-F5344CB8AC3E}">
-        <p14:creationId xmlns:p14="http://schemas.microsoft.com/office/powerpoint/2010/main" val="3079083219"/>
+        <p14:creationId xmlns:p14="http://schemas.microsoft.com/office/powerpoint/2010/main" val="741307236"/>
       </p:ext>
     </p:extLst>
   </p:cSld>
@@ -8176,10 +5781,10 @@
       </p:grpSpPr>
       <p:sp>
         <p:nvSpPr>
-          <p:cNvPr id="17" name="Rectangle 16">
-            <a:extLst>
-              <a:ext uri="{FF2B5EF4-FFF2-40B4-BE49-F238E27FC236}">
-                <a16:creationId xmlns:a16="http://schemas.microsoft.com/office/drawing/2014/main" id="{E724B9E8-02C8-4B2E-8770-A00A67760DF0}"/>
+          <p:cNvPr id="43" name="Rectangle 42">
+            <a:extLst>
+              <a:ext uri="{FF2B5EF4-FFF2-40B4-BE49-F238E27FC236}">
+                <a16:creationId xmlns:a16="http://schemas.microsoft.com/office/drawing/2014/main" id="{905CFAD9-EABE-4F83-B098-604752164E6A}"/>
               </a:ext>
               <a:ext uri="{C183D7F6-B498-43B3-948B-1728B52AA6E4}">
                 <adec:decorative xmlns:adec="http://schemas.microsoft.com/office/drawing/2017/decorative" val="1"/>
@@ -8249,10 +5854,10 @@
       </p:sp>
       <p:pic>
         <p:nvPicPr>
-          <p:cNvPr id="19" name="Picture 18">
-            <a:extLst>
-              <a:ext uri="{FF2B5EF4-FFF2-40B4-BE49-F238E27FC236}">
-                <a16:creationId xmlns:a16="http://schemas.microsoft.com/office/drawing/2014/main" id="{7B8AE548-0BFA-4792-9962-3375923C7635}"/>
+          <p:cNvPr id="45" name="Picture 44">
+            <a:extLst>
+              <a:ext uri="{FF2B5EF4-FFF2-40B4-BE49-F238E27FC236}">
+                <a16:creationId xmlns:a16="http://schemas.microsoft.com/office/drawing/2014/main" id="{C99610E4-6194-4817-B152-498995E77181}"/>
               </a:ext>
               <a:ext uri="{C183D7F6-B498-43B3-948B-1728B52AA6E4}">
                 <adec:decorative xmlns:adec="http://schemas.microsoft.com/office/drawing/2017/decorative" val="1"/>
@@ -8293,10 +5898,10 @@
       </p:pic>
       <p:cxnSp>
         <p:nvCxnSpPr>
-          <p:cNvPr id="21" name="Straight Connector 20">
-            <a:extLst>
-              <a:ext uri="{FF2B5EF4-FFF2-40B4-BE49-F238E27FC236}">
-                <a16:creationId xmlns:a16="http://schemas.microsoft.com/office/drawing/2014/main" id="{67639EF4-FA83-4D85-90FE-B831AF283896}"/>
+          <p:cNvPr id="47" name="Straight Connector 46">
+            <a:extLst>
+              <a:ext uri="{FF2B5EF4-FFF2-40B4-BE49-F238E27FC236}">
+                <a16:creationId xmlns:a16="http://schemas.microsoft.com/office/drawing/2014/main" id="{D885E9F4-7DB6-4B77-B1FF-80BFCE81277B}"/>
               </a:ext>
               <a:ext uri="{C183D7F6-B498-43B3-948B-1728B52AA6E4}">
                 <adec:decorative xmlns:adec="http://schemas.microsoft.com/office/drawing/2017/decorative" val="1"/>
@@ -8347,10 +5952,10 @@
       </p:cxnSp>
       <p:cxnSp>
         <p:nvCxnSpPr>
-          <p:cNvPr id="23" name="Straight Connector 22">
-            <a:extLst>
-              <a:ext uri="{FF2B5EF4-FFF2-40B4-BE49-F238E27FC236}">
-                <a16:creationId xmlns:a16="http://schemas.microsoft.com/office/drawing/2014/main" id="{CC87E76A-8F50-413D-9BFC-C5A1525BD9BC}"/>
+          <p:cNvPr id="49" name="Straight Connector 48">
+            <a:extLst>
+              <a:ext uri="{FF2B5EF4-FFF2-40B4-BE49-F238E27FC236}">
+                <a16:creationId xmlns:a16="http://schemas.microsoft.com/office/drawing/2014/main" id="{DB639A2B-C30C-4F6F-B847-6960F3CF8A64}"/>
               </a:ext>
               <a:ext uri="{C183D7F6-B498-43B3-948B-1728B52AA6E4}">
                 <adec:decorative xmlns:adec="http://schemas.microsoft.com/office/drawing/2017/decorative" val="1"/>
@@ -8395,10 +6000,10 @@
       </p:cxnSp>
       <p:sp useBgFill="1">
         <p:nvSpPr>
-          <p:cNvPr id="25" name="Rectangle 24">
-            <a:extLst>
-              <a:ext uri="{FF2B5EF4-FFF2-40B4-BE49-F238E27FC236}">
-                <a16:creationId xmlns:a16="http://schemas.microsoft.com/office/drawing/2014/main" id="{9A1C6278-B7D5-4E8E-B4DC-834832980565}"/>
+          <p:cNvPr id="51" name="Rectangle 50">
+            <a:extLst>
+              <a:ext uri="{FF2B5EF4-FFF2-40B4-BE49-F238E27FC236}">
+                <a16:creationId xmlns:a16="http://schemas.microsoft.com/office/drawing/2014/main" id="{D9926FA0-8ED1-4F3A-B23B-FD94D82C74B5}"/>
               </a:ext>
               <a:ext uri="{C183D7F6-B498-43B3-948B-1728B52AA6E4}">
                 <adec:decorative xmlns:adec="http://schemas.microsoft.com/office/drawing/2017/decorative" val="1"/>
@@ -8455,10 +6060,10 @@
       </p:sp>
       <p:sp>
         <p:nvSpPr>
-          <p:cNvPr id="27" name="Rectangle 26">
-            <a:extLst>
-              <a:ext uri="{FF2B5EF4-FFF2-40B4-BE49-F238E27FC236}">
-                <a16:creationId xmlns:a16="http://schemas.microsoft.com/office/drawing/2014/main" id="{C007F3D3-099E-430E-8754-C084D0FA5FE3}"/>
+          <p:cNvPr id="53" name="Rectangle 52">
+            <a:extLst>
+              <a:ext uri="{FF2B5EF4-FFF2-40B4-BE49-F238E27FC236}">
+                <a16:creationId xmlns:a16="http://schemas.microsoft.com/office/drawing/2014/main" id="{3A102CD9-C25A-4A86-B9D3-D7280D91428B}"/>
               </a:ext>
               <a:ext uri="{C183D7F6-B498-43B3-948B-1728B52AA6E4}">
                 <adec:decorative xmlns:adec="http://schemas.microsoft.com/office/drawing/2017/decorative" val="1"/>
@@ -8532,7 +6137,7 @@
           <p:cNvPr id="2" name="Title 1">
             <a:extLst>
               <a:ext uri="{FF2B5EF4-FFF2-40B4-BE49-F238E27FC236}">
-                <a16:creationId xmlns:a16="http://schemas.microsoft.com/office/drawing/2014/main" id="{0C05D6E9-FB34-5D4E-D478-F5A8B0E7C25A}"/>
+                <a16:creationId xmlns:a16="http://schemas.microsoft.com/office/drawing/2014/main" id="{D3862F8B-DB53-D69C-19EE-0A453B36C085}"/>
               </a:ext>
             </a:extLst>
           </p:cNvPr>
@@ -8545,8 +6150,8 @@
         </p:nvSpPr>
         <p:spPr>
           <a:xfrm>
-            <a:off x="1776729" y="4459039"/>
-            <a:ext cx="8643011" cy="551528"/>
+            <a:off x="659301" y="1474969"/>
+            <a:ext cx="2823919" cy="1868760"/>
           </a:xfrm>
         </p:spPr>
         <p:txBody>
@@ -8556,27 +6161,25 @@
           <a:lstStyle/>
           <a:p>
             <a:r>
-              <a:rPr lang="en-US" sz="3600"/>
-              <a:t>Vlajk Sándor - Fejlesztés</a:t>
+              <a:rPr lang="en-US" sz="2800"/>
+              <a:t>Vlajk Sándor - Management</a:t>
             </a:r>
           </a:p>
         </p:txBody>
       </p:sp>
       <p:pic>
         <p:nvPicPr>
-          <p:cNvPr id="7" name="Content Placeholder 6">
-            <a:extLst>
-              <a:ext uri="{FF2B5EF4-FFF2-40B4-BE49-F238E27FC236}">
-                <a16:creationId xmlns:a16="http://schemas.microsoft.com/office/drawing/2014/main" id="{5CAD100C-B467-C9FA-742C-83A81B896BF9}"/>
+          <p:cNvPr id="9" name="Picture 8">
+            <a:extLst>
+              <a:ext uri="{FF2B5EF4-FFF2-40B4-BE49-F238E27FC236}">
+                <a16:creationId xmlns:a16="http://schemas.microsoft.com/office/drawing/2014/main" id="{295C5C9D-063C-AF9D-2862-059BEA52D32C}"/>
               </a:ext>
             </a:extLst>
           </p:cNvPr>
           <p:cNvPicPr>
-            <a:picLocks noGrp="1" noChangeAspect="1"/>
+            <a:picLocks noChangeAspect="1"/>
           </p:cNvPicPr>
-          <p:nvPr>
-            <p:ph idx="1"/>
-          </p:nvPr>
+          <p:nvPr/>
         </p:nvPicPr>
         <p:blipFill>
           <a:blip r:embed="rId3"/>
@@ -8586,8 +6189,8 @@
         </p:blipFill>
         <p:spPr>
           <a:xfrm>
-            <a:off x="813173" y="457201"/>
-            <a:ext cx="4934512" cy="2689308"/>
+            <a:off x="3699533" y="533450"/>
+            <a:ext cx="4261962" cy="2994029"/>
           </a:xfrm>
           <a:prstGeom prst="rect">
             <a:avLst/>
@@ -8596,10 +6199,10 @@
       </p:pic>
       <p:pic>
         <p:nvPicPr>
-          <p:cNvPr id="12" name="Picture 11">
-            <a:extLst>
-              <a:ext uri="{FF2B5EF4-FFF2-40B4-BE49-F238E27FC236}">
-                <a16:creationId xmlns:a16="http://schemas.microsoft.com/office/drawing/2014/main" id="{31D188B4-F8EB-7281-F69A-9DE7E48DAAA3}"/>
+          <p:cNvPr id="11" name="Picture 10">
+            <a:extLst>
+              <a:ext uri="{FF2B5EF4-FFF2-40B4-BE49-F238E27FC236}">
+                <a16:creationId xmlns:a16="http://schemas.microsoft.com/office/drawing/2014/main" id="{39383BF8-280F-E773-B719-D67867986341}"/>
               </a:ext>
             </a:extLst>
           </p:cNvPr>
@@ -8616,38 +6219,8 @@
         </p:blipFill>
         <p:spPr>
           <a:xfrm>
-            <a:off x="6025216" y="1062951"/>
-            <a:ext cx="5517445" cy="2979420"/>
-          </a:xfrm>
-          <a:prstGeom prst="rect">
-            <a:avLst/>
-          </a:prstGeom>
-        </p:spPr>
-      </p:pic>
-      <p:pic>
-        <p:nvPicPr>
-          <p:cNvPr id="9" name="Picture 8">
-            <a:extLst>
-              <a:ext uri="{FF2B5EF4-FFF2-40B4-BE49-F238E27FC236}">
-                <a16:creationId xmlns:a16="http://schemas.microsoft.com/office/drawing/2014/main" id="{D59158A9-81B7-7204-17BE-FD603E88906B}"/>
-              </a:ext>
-            </a:extLst>
-          </p:cNvPr>
-          <p:cNvPicPr>
-            <a:picLocks noChangeAspect="1"/>
-          </p:cNvPicPr>
-          <p:nvPr/>
-        </p:nvPicPr>
-        <p:blipFill>
-          <a:blip r:embed="rId5"/>
-          <a:stretch>
-            <a:fillRect/>
-          </a:stretch>
-        </p:blipFill>
-        <p:spPr>
-          <a:xfrm>
-            <a:off x="1566686" y="3252392"/>
-            <a:ext cx="3429598" cy="1251340"/>
+            <a:off x="8027625" y="1071185"/>
+            <a:ext cx="2015925" cy="3858231"/>
           </a:xfrm>
           <a:prstGeom prst="rect">
             <a:avLst/>
@@ -8656,10 +6229,10 @@
       </p:pic>
       <p:cxnSp>
         <p:nvCxnSpPr>
-          <p:cNvPr id="29" name="Straight Connector 28">
-            <a:extLst>
-              <a:ext uri="{FF2B5EF4-FFF2-40B4-BE49-F238E27FC236}">
-                <a16:creationId xmlns:a16="http://schemas.microsoft.com/office/drawing/2014/main" id="{6B9EA5DA-6DFD-447D-B8F9-CB95CA114076}"/>
+          <p:cNvPr id="55" name="Straight Connector 54">
+            <a:extLst>
+              <a:ext uri="{FF2B5EF4-FFF2-40B4-BE49-F238E27FC236}">
+                <a16:creationId xmlns:a16="http://schemas.microsoft.com/office/drawing/2014/main" id="{90676B93-40FB-4FA7-8E89-C24B7B1F8F57}"/>
               </a:ext>
               <a:ext uri="{C183D7F6-B498-43B3-948B-1728B52AA6E4}">
                 <adec:decorative xmlns:adec="http://schemas.microsoft.com/office/drawing/2017/decorative" val="1"/>
@@ -8679,8 +6252,8 @@
         </p:nvCxnSpPr>
         <p:spPr>
           <a:xfrm>
-            <a:off x="1776728" y="5027185"/>
-            <a:ext cx="8643011" cy="0"/>
+            <a:off x="659301" y="3528543"/>
+            <a:ext cx="2823919" cy="0"/>
           </a:xfrm>
           <a:prstGeom prst="line">
             <a:avLst/>
@@ -8704,10 +6277,70 @@
       </p:cxnSp>
       <p:pic>
         <p:nvPicPr>
-          <p:cNvPr id="31" name="Picture 30">
-            <a:extLst>
-              <a:ext uri="{FF2B5EF4-FFF2-40B4-BE49-F238E27FC236}">
-                <a16:creationId xmlns:a16="http://schemas.microsoft.com/office/drawing/2014/main" id="{87612EF9-94E7-42BA-B4A9-4B38643FBAF7}"/>
+          <p:cNvPr id="7" name="Picture 6">
+            <a:extLst>
+              <a:ext uri="{FF2B5EF4-FFF2-40B4-BE49-F238E27FC236}">
+                <a16:creationId xmlns:a16="http://schemas.microsoft.com/office/drawing/2014/main" id="{83799579-8EB9-DC77-CDAC-986F8B3F2A7D}"/>
+              </a:ext>
+            </a:extLst>
+          </p:cNvPr>
+          <p:cNvPicPr>
+            <a:picLocks noChangeAspect="1"/>
+          </p:cNvPicPr>
+          <p:nvPr/>
+        </p:nvPicPr>
+        <p:blipFill>
+          <a:blip r:embed="rId5" cstate="print"/>
+          <a:stretch>
+            <a:fillRect/>
+          </a:stretch>
+        </p:blipFill>
+        <p:spPr>
+          <a:xfrm>
+            <a:off x="463795" y="3885819"/>
+            <a:ext cx="4508551" cy="1882320"/>
+          </a:xfrm>
+          <a:prstGeom prst="rect">
+            <a:avLst/>
+          </a:prstGeom>
+        </p:spPr>
+      </p:pic>
+      <p:pic>
+        <p:nvPicPr>
+          <p:cNvPr id="5" name="Picture 4">
+            <a:extLst>
+              <a:ext uri="{FF2B5EF4-FFF2-40B4-BE49-F238E27FC236}">
+                <a16:creationId xmlns:a16="http://schemas.microsoft.com/office/drawing/2014/main" id="{43E50A31-341F-5C88-C296-35A974D49814}"/>
+              </a:ext>
+            </a:extLst>
+          </p:cNvPr>
+          <p:cNvPicPr>
+            <a:picLocks noChangeAspect="1"/>
+          </p:cNvPicPr>
+          <p:nvPr/>
+        </p:nvPicPr>
+        <p:blipFill>
+          <a:blip r:embed="rId6"/>
+          <a:stretch>
+            <a:fillRect/>
+          </a:stretch>
+        </p:blipFill>
+        <p:spPr>
+          <a:xfrm>
+            <a:off x="10175810" y="1340666"/>
+            <a:ext cx="1890344" cy="3319267"/>
+          </a:xfrm>
+          <a:prstGeom prst="rect">
+            <a:avLst/>
+          </a:prstGeom>
+        </p:spPr>
+      </p:pic>
+      <p:pic>
+        <p:nvPicPr>
+          <p:cNvPr id="57" name="Picture 56">
+            <a:extLst>
+              <a:ext uri="{FF2B5EF4-FFF2-40B4-BE49-F238E27FC236}">
+                <a16:creationId xmlns:a16="http://schemas.microsoft.com/office/drawing/2014/main" id="{3509D85C-1896-4695-A144-B562AFC58EB2}"/>
               </a:ext>
               <a:ext uri="{C183D7F6-B498-43B3-948B-1728B52AA6E4}">
                 <adec:decorative xmlns:adec="http://schemas.microsoft.com/office/drawing/2017/decorative" val="1"/>
@@ -8748,10 +6381,10 @@
       </p:pic>
       <p:cxnSp>
         <p:nvCxnSpPr>
-          <p:cNvPr id="33" name="Straight Connector 32">
-            <a:extLst>
-              <a:ext uri="{FF2B5EF4-FFF2-40B4-BE49-F238E27FC236}">
-                <a16:creationId xmlns:a16="http://schemas.microsoft.com/office/drawing/2014/main" id="{9E597F0B-0A17-4BF2-A904-9D99811F3E2E}"/>
+          <p:cNvPr id="59" name="Straight Connector 58">
+            <a:extLst>
+              <a:ext uri="{FF2B5EF4-FFF2-40B4-BE49-F238E27FC236}">
+                <a16:creationId xmlns:a16="http://schemas.microsoft.com/office/drawing/2014/main" id="{6D9F55CD-CB1D-4CB9-98D3-2BC602BC430E}"/>
               </a:ext>
               <a:ext uri="{C183D7F6-B498-43B3-948B-1728B52AA6E4}">
                 <adec:decorative xmlns:adec="http://schemas.microsoft.com/office/drawing/2017/decorative" val="1"/>
@@ -8803,7 +6436,7 @@
     </p:spTree>
     <p:extLst>
       <p:ext uri="{BB962C8B-B14F-4D97-AF65-F5344CB8AC3E}">
-        <p14:creationId xmlns:p14="http://schemas.microsoft.com/office/powerpoint/2010/main" val="3817290165"/>
+        <p14:creationId xmlns:p14="http://schemas.microsoft.com/office/powerpoint/2010/main" val="1886950838"/>
       </p:ext>
     </p:extLst>
   </p:cSld>
@@ -8856,10 +6489,10 @@
       </p:grpSpPr>
       <p:sp>
         <p:nvSpPr>
-          <p:cNvPr id="33" name="Rectangle 32">
-            <a:extLst>
-              <a:ext uri="{FF2B5EF4-FFF2-40B4-BE49-F238E27FC236}">
-                <a16:creationId xmlns:a16="http://schemas.microsoft.com/office/drawing/2014/main" id="{EEA869E1-F851-4A52-92F5-77E592B76A5B}"/>
+          <p:cNvPr id="50" name="Rectangle 49">
+            <a:extLst>
+              <a:ext uri="{FF2B5EF4-FFF2-40B4-BE49-F238E27FC236}">
+                <a16:creationId xmlns:a16="http://schemas.microsoft.com/office/drawing/2014/main" id="{E724B9E8-02C8-4B2E-8770-A00A67760DF0}"/>
               </a:ext>
               <a:ext uri="{C183D7F6-B498-43B3-948B-1728B52AA6E4}">
                 <adec:decorative xmlns:adec="http://schemas.microsoft.com/office/drawing/2017/decorative" val="1"/>
@@ -8929,10 +6562,10 @@
       </p:sp>
       <p:pic>
         <p:nvPicPr>
-          <p:cNvPr id="35" name="Picture 34">
-            <a:extLst>
-              <a:ext uri="{FF2B5EF4-FFF2-40B4-BE49-F238E27FC236}">
-                <a16:creationId xmlns:a16="http://schemas.microsoft.com/office/drawing/2014/main" id="{B083AD55-8296-44BD-8E14-DD2DDBC351B0}"/>
+          <p:cNvPr id="51" name="Picture 50">
+            <a:extLst>
+              <a:ext uri="{FF2B5EF4-FFF2-40B4-BE49-F238E27FC236}">
+                <a16:creationId xmlns:a16="http://schemas.microsoft.com/office/drawing/2014/main" id="{7B8AE548-0BFA-4792-9962-3375923C7635}"/>
               </a:ext>
               <a:ext uri="{C183D7F6-B498-43B3-948B-1728B52AA6E4}">
                 <adec:decorative xmlns:adec="http://schemas.microsoft.com/office/drawing/2017/decorative" val="1"/>
@@ -8973,10 +6606,10 @@
       </p:pic>
       <p:cxnSp>
         <p:nvCxnSpPr>
-          <p:cNvPr id="37" name="Straight Connector 36">
-            <a:extLst>
-              <a:ext uri="{FF2B5EF4-FFF2-40B4-BE49-F238E27FC236}">
-                <a16:creationId xmlns:a16="http://schemas.microsoft.com/office/drawing/2014/main" id="{2BF46B26-15FC-4C5A-94FA-AE9ED64B5C20}"/>
+          <p:cNvPr id="52" name="Straight Connector 51">
+            <a:extLst>
+              <a:ext uri="{FF2B5EF4-FFF2-40B4-BE49-F238E27FC236}">
+                <a16:creationId xmlns:a16="http://schemas.microsoft.com/office/drawing/2014/main" id="{67639EF4-FA83-4D85-90FE-B831AF283896}"/>
               </a:ext>
               <a:ext uri="{C183D7F6-B498-43B3-948B-1728B52AA6E4}">
                 <adec:decorative xmlns:adec="http://schemas.microsoft.com/office/drawing/2017/decorative" val="1"/>
@@ -9027,10 +6660,10 @@
       </p:cxnSp>
       <p:cxnSp>
         <p:nvCxnSpPr>
-          <p:cNvPr id="39" name="Straight Connector 38">
-            <a:extLst>
-              <a:ext uri="{FF2B5EF4-FFF2-40B4-BE49-F238E27FC236}">
-                <a16:creationId xmlns:a16="http://schemas.microsoft.com/office/drawing/2014/main" id="{912F6065-5345-44BD-B66E-5487CCD7A9B9}"/>
+          <p:cNvPr id="53" name="Straight Connector 52">
+            <a:extLst>
+              <a:ext uri="{FF2B5EF4-FFF2-40B4-BE49-F238E27FC236}">
+                <a16:creationId xmlns:a16="http://schemas.microsoft.com/office/drawing/2014/main" id="{CC87E76A-8F50-413D-9BFC-C5A1525BD9BC}"/>
               </a:ext>
               <a:ext uri="{C183D7F6-B498-43B3-948B-1728B52AA6E4}">
                 <adec:decorative xmlns:adec="http://schemas.microsoft.com/office/drawing/2017/decorative" val="1"/>
@@ -9075,10 +6708,10 @@
       </p:cxnSp>
       <p:sp useBgFill="1">
         <p:nvSpPr>
-          <p:cNvPr id="41" name="Rectangle 40">
-            <a:extLst>
-              <a:ext uri="{FF2B5EF4-FFF2-40B4-BE49-F238E27FC236}">
-                <a16:creationId xmlns:a16="http://schemas.microsoft.com/office/drawing/2014/main" id="{E7ABCFA2-55B0-438C-A39A-637FFC6246E8}"/>
+          <p:cNvPr id="54" name="Rectangle 53">
+            <a:extLst>
+              <a:ext uri="{FF2B5EF4-FFF2-40B4-BE49-F238E27FC236}">
+                <a16:creationId xmlns:a16="http://schemas.microsoft.com/office/drawing/2014/main" id="{0F28EA84-13B4-4494-A4D3-8DE462FF0E6B}"/>
               </a:ext>
               <a:ext uri="{C183D7F6-B498-43B3-948B-1728B52AA6E4}">
                 <adec:decorative xmlns:adec="http://schemas.microsoft.com/office/drawing/2017/decorative" val="1"/>
@@ -9135,10 +6768,10 @@
       </p:sp>
       <p:sp>
         <p:nvSpPr>
-          <p:cNvPr id="43" name="Rectangle 42">
-            <a:extLst>
-              <a:ext uri="{FF2B5EF4-FFF2-40B4-BE49-F238E27FC236}">
-                <a16:creationId xmlns:a16="http://schemas.microsoft.com/office/drawing/2014/main" id="{1BD2C934-710E-4E0E-9ED4-03F07E019205}"/>
+          <p:cNvPr id="55" name="Rectangle 54">
+            <a:extLst>
+              <a:ext uri="{FF2B5EF4-FFF2-40B4-BE49-F238E27FC236}">
+                <a16:creationId xmlns:a16="http://schemas.microsoft.com/office/drawing/2014/main" id="{6BEB1B24-66CE-4D63-A39D-2D1B481DF95E}"/>
               </a:ext>
               <a:ext uri="{C183D7F6-B498-43B3-948B-1728B52AA6E4}">
                 <adec:decorative xmlns:adec="http://schemas.microsoft.com/office/drawing/2017/decorative" val="1"/>
@@ -9212,7 +6845,7 @@
           <p:cNvPr id="2" name="Title 1">
             <a:extLst>
               <a:ext uri="{FF2B5EF4-FFF2-40B4-BE49-F238E27FC236}">
-                <a16:creationId xmlns:a16="http://schemas.microsoft.com/office/drawing/2014/main" id="{BAF48F60-BA92-C874-30CC-5ED58A820747}"/>
+                <a16:creationId xmlns:a16="http://schemas.microsoft.com/office/drawing/2014/main" id="{7BA6A004-AC9E-F83D-7C6C-8E45C6DDE234}"/>
               </a:ext>
             </a:extLst>
           </p:cNvPr>
@@ -9225,8 +6858,8 @@
         </p:nvSpPr>
         <p:spPr>
           <a:xfrm>
-            <a:off x="485695" y="1474969"/>
-            <a:ext cx="3026558" cy="1868760"/>
+            <a:off x="659301" y="1474969"/>
+            <a:ext cx="2823919" cy="1868760"/>
           </a:xfrm>
         </p:spPr>
         <p:txBody>
@@ -9236,23 +6869,18 @@
           <a:lstStyle/>
           <a:p>
             <a:r>
-              <a:rPr lang="en-US" sz="3600" dirty="0"/>
-              <a:t>Vlajk Sándor - </a:t>
+              <a:rPr lang="en-US" sz="3600"/>
+              <a:t>Vlajk Sándor - Git</a:t>
             </a:r>
-            <a:r>
-              <a:rPr lang="en-US" sz="3600" dirty="0" err="1"/>
-              <a:t>Tesztelés</a:t>
-            </a:r>
-            <a:endParaRPr lang="en-US" sz="3600" dirty="0"/>
           </a:p>
         </p:txBody>
       </p:sp>
       <p:cxnSp>
         <p:nvCxnSpPr>
-          <p:cNvPr id="45" name="Straight Connector 44">
-            <a:extLst>
-              <a:ext uri="{FF2B5EF4-FFF2-40B4-BE49-F238E27FC236}">
-                <a16:creationId xmlns:a16="http://schemas.microsoft.com/office/drawing/2014/main" id="{0AD0F4F3-8F5C-421F-9FC1-DB3ED0BF61DF}"/>
+          <p:cNvPr id="56" name="Straight Connector 55">
+            <a:extLst>
+              <a:ext uri="{FF2B5EF4-FFF2-40B4-BE49-F238E27FC236}">
+                <a16:creationId xmlns:a16="http://schemas.microsoft.com/office/drawing/2014/main" id="{78DE337D-1DBA-4536-8145-B43EE65C747D}"/>
               </a:ext>
               <a:ext uri="{C183D7F6-B498-43B3-948B-1728B52AA6E4}">
                 <adec:decorative xmlns:adec="http://schemas.microsoft.com/office/drawing/2017/decorative" val="1"/>
@@ -9272,8 +6900,8 @@
         </p:nvCxnSpPr>
         <p:spPr>
           <a:xfrm>
-            <a:off x="484009" y="3526496"/>
-            <a:ext cx="3023617" cy="0"/>
+            <a:off x="659301" y="3528543"/>
+            <a:ext cx="2823919" cy="0"/>
           </a:xfrm>
           <a:prstGeom prst="line">
             <a:avLst/>
@@ -9297,10 +6925,10 @@
       </p:cxnSp>
       <p:pic>
         <p:nvPicPr>
-          <p:cNvPr id="7" name="Picture 6">
-            <a:extLst>
-              <a:ext uri="{FF2B5EF4-FFF2-40B4-BE49-F238E27FC236}">
-                <a16:creationId xmlns:a16="http://schemas.microsoft.com/office/drawing/2014/main" id="{234C8A63-DED3-546C-6BEE-CEFFDC8E281B}"/>
+          <p:cNvPr id="5" name="Picture 4">
+            <a:extLst>
+              <a:ext uri="{FF2B5EF4-FFF2-40B4-BE49-F238E27FC236}">
+                <a16:creationId xmlns:a16="http://schemas.microsoft.com/office/drawing/2014/main" id="{A88E504C-4007-0FB3-BC00-5FF4F74B5CA7}"/>
               </a:ext>
             </a:extLst>
           </p:cNvPr>
@@ -9317,8 +6945,8 @@
         </p:blipFill>
         <p:spPr>
           <a:xfrm>
-            <a:off x="4528985" y="3109744"/>
-            <a:ext cx="7094289" cy="2837715"/>
+            <a:off x="3989479" y="1522154"/>
+            <a:ext cx="3693150" cy="3067192"/>
           </a:xfrm>
           <a:prstGeom prst="rect">
             <a:avLst/>
@@ -9327,10 +6955,10 @@
       </p:pic>
       <p:pic>
         <p:nvPicPr>
-          <p:cNvPr id="5" name="Picture 4">
-            <a:extLst>
-              <a:ext uri="{FF2B5EF4-FFF2-40B4-BE49-F238E27FC236}">
-                <a16:creationId xmlns:a16="http://schemas.microsoft.com/office/drawing/2014/main" id="{468886C1-6620-95E9-B1BE-EABD49FF3267}"/>
+          <p:cNvPr id="9" name="Picture 8">
+            <a:extLst>
+              <a:ext uri="{FF2B5EF4-FFF2-40B4-BE49-F238E27FC236}">
+                <a16:creationId xmlns:a16="http://schemas.microsoft.com/office/drawing/2014/main" id="{CE8C27E6-D0FE-7D3F-0657-BC477A7054EE}"/>
               </a:ext>
             </a:extLst>
           </p:cNvPr>
@@ -9347,8 +6975,8 @@
         </p:blipFill>
         <p:spPr>
           <a:xfrm>
-            <a:off x="3077701" y="159389"/>
-            <a:ext cx="7560295" cy="2608300"/>
+            <a:off x="7846354" y="965341"/>
+            <a:ext cx="3687168" cy="1523440"/>
           </a:xfrm>
           <a:prstGeom prst="rect">
             <a:avLst/>
@@ -9357,10 +6985,40 @@
       </p:pic>
       <p:pic>
         <p:nvPicPr>
-          <p:cNvPr id="47" name="Picture 46">
-            <a:extLst>
-              <a:ext uri="{FF2B5EF4-FFF2-40B4-BE49-F238E27FC236}">
-                <a16:creationId xmlns:a16="http://schemas.microsoft.com/office/drawing/2014/main" id="{B0A40572-62E5-460B-AD24-B6628527ACB1}"/>
+          <p:cNvPr id="7" name="Picture 6">
+            <a:extLst>
+              <a:ext uri="{FF2B5EF4-FFF2-40B4-BE49-F238E27FC236}">
+                <a16:creationId xmlns:a16="http://schemas.microsoft.com/office/drawing/2014/main" id="{0491AA9D-40D6-945F-5458-984FA0DBC683}"/>
+              </a:ext>
+            </a:extLst>
+          </p:cNvPr>
+          <p:cNvPicPr>
+            <a:picLocks noChangeAspect="1"/>
+          </p:cNvPicPr>
+          <p:nvPr/>
+        </p:nvPicPr>
+        <p:blipFill>
+          <a:blip r:embed="rId5"/>
+          <a:stretch>
+            <a:fillRect/>
+          </a:stretch>
+        </p:blipFill>
+        <p:spPr>
+          <a:xfrm>
+            <a:off x="7846051" y="3900689"/>
+            <a:ext cx="3687168" cy="967500"/>
+          </a:xfrm>
+          <a:prstGeom prst="rect">
+            <a:avLst/>
+          </a:prstGeom>
+        </p:spPr>
+      </p:pic>
+      <p:pic>
+        <p:nvPicPr>
+          <p:cNvPr id="57" name="Picture 56">
+            <a:extLst>
+              <a:ext uri="{FF2B5EF4-FFF2-40B4-BE49-F238E27FC236}">
+                <a16:creationId xmlns:a16="http://schemas.microsoft.com/office/drawing/2014/main" id="{E7233926-059A-41AD-A9F2-56552CF4FF6B}"/>
               </a:ext>
               <a:ext uri="{C183D7F6-B498-43B3-948B-1728B52AA6E4}">
                 <adec:decorative xmlns:adec="http://schemas.microsoft.com/office/drawing/2017/decorative" val="1"/>
@@ -9401,10 +7059,10 @@
       </p:pic>
       <p:cxnSp>
         <p:nvCxnSpPr>
-          <p:cNvPr id="49" name="Straight Connector 48">
-            <a:extLst>
-              <a:ext uri="{FF2B5EF4-FFF2-40B4-BE49-F238E27FC236}">
-                <a16:creationId xmlns:a16="http://schemas.microsoft.com/office/drawing/2014/main" id="{F1D872D4-D7E5-4CD8-9DAC-2BC612F08E69}"/>
+          <p:cNvPr id="58" name="Straight Connector 57">
+            <a:extLst>
+              <a:ext uri="{FF2B5EF4-FFF2-40B4-BE49-F238E27FC236}">
+                <a16:creationId xmlns:a16="http://schemas.microsoft.com/office/drawing/2014/main" id="{C13C145E-93D4-481E-92DC-736D9EBA37FC}"/>
               </a:ext>
               <a:ext uri="{C183D7F6-B498-43B3-948B-1728B52AA6E4}">
                 <adec:decorative xmlns:adec="http://schemas.microsoft.com/office/drawing/2017/decorative" val="1"/>
@@ -9456,7 +7114,7 @@
     </p:spTree>
     <p:extLst>
       <p:ext uri="{BB962C8B-B14F-4D97-AF65-F5344CB8AC3E}">
-        <p14:creationId xmlns:p14="http://schemas.microsoft.com/office/powerpoint/2010/main" val="858810309"/>
+        <p14:creationId xmlns:p14="http://schemas.microsoft.com/office/powerpoint/2010/main" val="851204681"/>
       </p:ext>
     </p:extLst>
   </p:cSld>
@@ -9469,6 +7127,30 @@
 <file path=ppt/slides/slide18.xml><?xml version="1.0" encoding="utf-8"?>
 <p:sld xmlns:a="http://schemas.openxmlformats.org/drawingml/2006/main" xmlns:r="http://schemas.openxmlformats.org/officeDocument/2006/relationships" xmlns:p="http://schemas.openxmlformats.org/presentationml/2006/main">
   <p:cSld>
+    <p:bg>
+      <p:bgPr>
+        <a:gradFill rotWithShape="1">
+          <a:gsLst>
+            <a:gs pos="0">
+              <a:schemeClr val="bg2">
+                <a:tint val="94000"/>
+                <a:satMod val="80000"/>
+                <a:lumMod val="106000"/>
+              </a:schemeClr>
+            </a:gs>
+            <a:gs pos="100000">
+              <a:schemeClr val="bg2">
+                <a:shade val="80000"/>
+              </a:schemeClr>
+            </a:gs>
+          </a:gsLst>
+          <a:path path="circle">
+            <a:fillToRect l="43000" r="43000" b="100000"/>
+          </a:path>
+        </a:gradFill>
+        <a:effectLst/>
+      </p:bgPr>
+    </p:bg>
     <p:spTree>
       <p:nvGrpSpPr>
         <p:cNvPr id="1" name=""/>
@@ -9485,112 +7167,634 @@
       </p:grpSpPr>
       <p:sp>
         <p:nvSpPr>
-          <p:cNvPr id="2" name="Cím 1"/>
+          <p:cNvPr id="38" name="Rectangle 37">
+            <a:extLst>
+              <a:ext uri="{FF2B5EF4-FFF2-40B4-BE49-F238E27FC236}">
+                <a16:creationId xmlns:a16="http://schemas.microsoft.com/office/drawing/2014/main" id="{E724B9E8-02C8-4B2E-8770-A00A67760DF0}"/>
+              </a:ext>
+              <a:ext uri="{C183D7F6-B498-43B3-948B-1728B52AA6E4}">
+                <adec:decorative xmlns:adec="http://schemas.microsoft.com/office/drawing/2017/decorative" val="1"/>
+              </a:ext>
+            </a:extLst>
+          </p:cNvPr>
           <p:cNvSpPr>
-            <a:spLocks noGrp="1"/>
+            <a:spLocks noGrp="1" noRot="1" noChangeAspect="1" noMove="1" noResize="1" noEditPoints="1" noAdjustHandles="1" noChangeArrowheads="1" noChangeShapeType="1" noTextEdit="1"/>
           </p:cNvSpPr>
           <p:nvPr>
-            <p:ph type="title"/>
+            <p:extLst>
+              <p:ext uri="{386F3935-93C4-4BCD-93E2-E3B085C9AB24}">
+                <p16:designElem xmlns:p16="http://schemas.microsoft.com/office/powerpoint/2015/main" val="1"/>
+              </p:ext>
+            </p:extLst>
           </p:nvPr>
         </p:nvSpPr>
         <p:spPr>
           <a:xfrm>
-            <a:off x="1444671" y="798973"/>
-            <a:ext cx="3273099" cy="2418680"/>
-          </a:xfrm>
-        </p:spPr>
+            <a:off x="0" y="2019476"/>
+            <a:ext cx="12192000" cy="4105941"/>
+          </a:xfrm>
+          <a:prstGeom prst="rect">
+            <a:avLst/>
+          </a:prstGeom>
+          <a:gradFill flip="none" rotWithShape="1">
+            <a:gsLst>
+              <a:gs pos="0">
+                <a:schemeClr val="bg2">
+                  <a:alpha val="0"/>
+                </a:schemeClr>
+              </a:gs>
+              <a:gs pos="100000">
+                <a:schemeClr val="bg2"/>
+              </a:gs>
+            </a:gsLst>
+            <a:lin ang="5400000" scaled="0"/>
+            <a:tileRect/>
+          </a:gradFill>
+          <a:ln>
+            <a:noFill/>
+          </a:ln>
+        </p:spPr>
+        <p:style>
+          <a:lnRef idx="2">
+            <a:schemeClr val="accent1">
+              <a:shade val="50000"/>
+            </a:schemeClr>
+          </a:lnRef>
+          <a:fillRef idx="1">
+            <a:schemeClr val="accent1"/>
+          </a:fillRef>
+          <a:effectRef idx="0">
+            <a:schemeClr val="accent1"/>
+          </a:effectRef>
+          <a:fontRef idx="minor">
+            <a:schemeClr val="lt1"/>
+          </a:fontRef>
+        </p:style>
         <p:txBody>
-          <a:bodyPr>
-            <a:normAutofit/>
-          </a:bodyPr>
+          <a:bodyPr/>
           <a:lstStyle/>
           <a:p>
-            <a:r>
-              <a:rPr lang="hu-HU" sz="3200" dirty="0"/>
-              <a:t>Czeitner András - management</a:t>
-            </a:r>
+            <a:endParaRPr lang="en-US"/>
           </a:p>
         </p:txBody>
       </p:sp>
       <p:pic>
         <p:nvPicPr>
-          <p:cNvPr id="5" name="Picture 12" descr="https://cdn.discordapp.com/attachments/812059683393110017/1439310372174692543/image.png?ex=691a0dbd&amp;is=6918bc3d&amp;hm=2473b7bf2008278831746b824589489045399c33f76371eede42d79fa3eba8a6&amp;"/>
+          <p:cNvPr id="39" name="Picture 38">
+            <a:extLst>
+              <a:ext uri="{FF2B5EF4-FFF2-40B4-BE49-F238E27FC236}">
+                <a16:creationId xmlns:a16="http://schemas.microsoft.com/office/drawing/2014/main" id="{7B8AE548-0BFA-4792-9962-3375923C7635}"/>
+              </a:ext>
+              <a:ext uri="{C183D7F6-B498-43B3-948B-1728B52AA6E4}">
+                <adec:decorative xmlns:adec="http://schemas.microsoft.com/office/drawing/2017/decorative" val="1"/>
+              </a:ext>
+            </a:extLst>
+          </p:cNvPr>
           <p:cNvPicPr>
-            <a:picLocks noChangeAspect="1" noChangeArrowheads="1"/>
+            <a:picLocks noGrp="1" noRot="1" noChangeAspect="1" noMove="1" noResize="1" noEditPoints="1" noAdjustHandles="1" noChangeArrowheads="1" noChangeShapeType="1" noCrop="1"/>
           </p:cNvPicPr>
-          <p:nvPr/>
+          <p:nvPr>
+            <p:extLst>
+              <p:ext uri="{386F3935-93C4-4BCD-93E2-E3B085C9AB24}">
+                <p16:designElem xmlns:p16="http://schemas.microsoft.com/office/powerpoint/2015/main" val="1"/>
+              </p:ext>
+            </p:extLst>
+          </p:nvPr>
         </p:nvPicPr>
-        <p:blipFill>
-          <a:blip r:embed="rId2"/>
-          <a:srcRect/>
-          <a:stretch>
-            <a:fillRect/>
-          </a:stretch>
+        <p:blipFill rotWithShape="1">
+          <a:blip r:embed="rId2">
+            <a:extLst>
+              <a:ext uri="{28A0092B-C50C-407E-A947-70E740481C1C}">
+                <a14:useLocalDpi xmlns:a14="http://schemas.microsoft.com/office/drawing/2010/main" val="0"/>
+              </a:ext>
+            </a:extLst>
+          </a:blip>
+          <a:srcRect t="1538" b="-1538"/>
+          <a:stretch/>
         </p:blipFill>
-        <p:spPr bwMode="auto">
-          <a:xfrm>
-            <a:off x="845688" y="3752470"/>
-            <a:ext cx="5951926" cy="2558620"/>
+        <p:spPr bwMode="black">
+          <a:xfrm>
+            <a:off x="0" y="6126480"/>
+            <a:ext cx="12192000" cy="742950"/>
           </a:xfrm>
           <a:prstGeom prst="rect">
             <a:avLst/>
           </a:prstGeom>
-          <a:noFill/>
         </p:spPr>
       </p:pic>
+      <p:cxnSp>
+        <p:nvCxnSpPr>
+          <p:cNvPr id="40" name="Straight Connector 39">
+            <a:extLst>
+              <a:ext uri="{FF2B5EF4-FFF2-40B4-BE49-F238E27FC236}">
+                <a16:creationId xmlns:a16="http://schemas.microsoft.com/office/drawing/2014/main" id="{67639EF4-FA83-4D85-90FE-B831AF283896}"/>
+              </a:ext>
+              <a:ext uri="{C183D7F6-B498-43B3-948B-1728B52AA6E4}">
+                <adec:decorative xmlns:adec="http://schemas.microsoft.com/office/drawing/2017/decorative" val="1"/>
+              </a:ext>
+            </a:extLst>
+          </p:cNvPr>
+          <p:cNvCxnSpPr>
+            <a:cxnSpLocks noGrp="1" noRot="1" noChangeAspect="1" noMove="1" noResize="1" noEditPoints="1" noAdjustHandles="1" noChangeArrowheads="1" noChangeShapeType="1"/>
+          </p:cNvCxnSpPr>
+          <p:nvPr>
+            <p:extLst>
+              <p:ext uri="{386F3935-93C4-4BCD-93E2-E3B085C9AB24}">
+                <p16:designElem xmlns:p16="http://schemas.microsoft.com/office/powerpoint/2015/main" val="1"/>
+              </p:ext>
+            </p:extLst>
+          </p:nvPr>
+        </p:nvCxnSpPr>
+        <p:spPr>
+          <a:xfrm>
+            <a:off x="0" y="6128413"/>
+            <a:ext cx="12192000" cy="0"/>
+          </a:xfrm>
+          <a:prstGeom prst="line">
+            <a:avLst/>
+          </a:prstGeom>
+          <a:ln w="12700">
+            <a:solidFill>
+              <a:srgbClr val="000001">
+                <a:alpha val="20000"/>
+              </a:srgbClr>
+            </a:solidFill>
+          </a:ln>
+        </p:spPr>
+        <p:style>
+          <a:lnRef idx="1">
+            <a:schemeClr val="accent1"/>
+          </a:lnRef>
+          <a:fillRef idx="0">
+            <a:schemeClr val="accent1"/>
+          </a:fillRef>
+          <a:effectRef idx="0">
+            <a:schemeClr val="accent1"/>
+          </a:effectRef>
+          <a:fontRef idx="minor">
+            <a:schemeClr val="tx1"/>
+          </a:fontRef>
+        </p:style>
+      </p:cxnSp>
+      <p:cxnSp>
+        <p:nvCxnSpPr>
+          <p:cNvPr id="41" name="Straight Connector 40">
+            <a:extLst>
+              <a:ext uri="{FF2B5EF4-FFF2-40B4-BE49-F238E27FC236}">
+                <a16:creationId xmlns:a16="http://schemas.microsoft.com/office/drawing/2014/main" id="{CC87E76A-8F50-413D-9BFC-C5A1525BD9BC}"/>
+              </a:ext>
+              <a:ext uri="{C183D7F6-B498-43B3-948B-1728B52AA6E4}">
+                <adec:decorative xmlns:adec="http://schemas.microsoft.com/office/drawing/2017/decorative" val="1"/>
+              </a:ext>
+            </a:extLst>
+          </p:cNvPr>
+          <p:cNvCxnSpPr>
+            <a:cxnSpLocks noGrp="1" noRot="1" noChangeAspect="1" noMove="1" noResize="1" noEditPoints="1" noAdjustHandles="1" noChangeArrowheads="1" noChangeShapeType="1"/>
+          </p:cNvCxnSpPr>
+          <p:nvPr>
+            <p:extLst>
+              <p:ext uri="{386F3935-93C4-4BCD-93E2-E3B085C9AB24}">
+                <p16:designElem xmlns:p16="http://schemas.microsoft.com/office/powerpoint/2015/main" val="1"/>
+              </p:ext>
+            </p:extLst>
+          </p:nvPr>
+        </p:nvCxnSpPr>
+        <p:spPr>
+          <a:xfrm>
+            <a:off x="2417780" y="3528542"/>
+            <a:ext cx="8637072" cy="0"/>
+          </a:xfrm>
+          <a:prstGeom prst="line">
+            <a:avLst/>
+          </a:prstGeom>
+          <a:ln w="31750"/>
+        </p:spPr>
+        <p:style>
+          <a:lnRef idx="3">
+            <a:schemeClr val="accent1"/>
+          </a:lnRef>
+          <a:fillRef idx="0">
+            <a:schemeClr val="accent1"/>
+          </a:fillRef>
+          <a:effectRef idx="2">
+            <a:schemeClr val="accent1"/>
+          </a:effectRef>
+          <a:fontRef idx="minor">
+            <a:schemeClr val="tx1"/>
+          </a:fontRef>
+        </p:style>
+      </p:cxnSp>
+      <p:sp useBgFill="1">
+        <p:nvSpPr>
+          <p:cNvPr id="42" name="Rectangle 41">
+            <a:extLst>
+              <a:ext uri="{FF2B5EF4-FFF2-40B4-BE49-F238E27FC236}">
+                <a16:creationId xmlns:a16="http://schemas.microsoft.com/office/drawing/2014/main" id="{9A1C6278-B7D5-4E8E-B4DC-834832980565}"/>
+              </a:ext>
+              <a:ext uri="{C183D7F6-B498-43B3-948B-1728B52AA6E4}">
+                <adec:decorative xmlns:adec="http://schemas.microsoft.com/office/drawing/2017/decorative" val="1"/>
+              </a:ext>
+            </a:extLst>
+          </p:cNvPr>
+          <p:cNvSpPr>
+            <a:spLocks noGrp="1" noRot="1" noChangeAspect="1" noMove="1" noResize="1" noEditPoints="1" noAdjustHandles="1" noChangeArrowheads="1" noChangeShapeType="1" noTextEdit="1"/>
+          </p:cNvSpPr>
+          <p:nvPr>
+            <p:extLst>
+              <p:ext uri="{386F3935-93C4-4BCD-93E2-E3B085C9AB24}">
+                <p16:designElem xmlns:p16="http://schemas.microsoft.com/office/powerpoint/2015/main" val="1"/>
+              </p:ext>
+            </p:extLst>
+          </p:nvPr>
+        </p:nvSpPr>
+        <p:spPr>
+          <a:xfrm>
+            <a:off x="2" y="0"/>
+            <a:ext cx="12191695" cy="6858000"/>
+          </a:xfrm>
+          <a:prstGeom prst="rect">
+            <a:avLst/>
+          </a:prstGeom>
+          <a:ln>
+            <a:noFill/>
+          </a:ln>
+        </p:spPr>
+        <p:style>
+          <a:lnRef idx="2">
+            <a:schemeClr val="accent1">
+              <a:shade val="50000"/>
+            </a:schemeClr>
+          </a:lnRef>
+          <a:fillRef idx="1">
+            <a:schemeClr val="accent1"/>
+          </a:fillRef>
+          <a:effectRef idx="0">
+            <a:schemeClr val="accent1"/>
+          </a:effectRef>
+          <a:fontRef idx="minor">
+            <a:schemeClr val="lt1"/>
+          </a:fontRef>
+        </p:style>
+        <p:txBody>
+          <a:bodyPr rtlCol="0" anchor="ctr"/>
+          <a:lstStyle/>
+          <a:p>
+            <a:pPr algn="ctr"/>
+            <a:endParaRPr lang="en-US"/>
+          </a:p>
+        </p:txBody>
+      </p:sp>
+      <p:sp>
+        <p:nvSpPr>
+          <p:cNvPr id="43" name="Rectangle 42">
+            <a:extLst>
+              <a:ext uri="{FF2B5EF4-FFF2-40B4-BE49-F238E27FC236}">
+                <a16:creationId xmlns:a16="http://schemas.microsoft.com/office/drawing/2014/main" id="{C007F3D3-099E-430E-8754-C084D0FA5FE3}"/>
+              </a:ext>
+              <a:ext uri="{C183D7F6-B498-43B3-948B-1728B52AA6E4}">
+                <adec:decorative xmlns:adec="http://schemas.microsoft.com/office/drawing/2017/decorative" val="1"/>
+              </a:ext>
+            </a:extLst>
+          </p:cNvPr>
+          <p:cNvSpPr>
+            <a:spLocks noGrp="1" noRot="1" noChangeAspect="1" noMove="1" noResize="1" noEditPoints="1" noAdjustHandles="1" noChangeArrowheads="1" noChangeShapeType="1" noTextEdit="1"/>
+          </p:cNvSpPr>
+          <p:nvPr>
+            <p:extLst>
+              <p:ext uri="{386F3935-93C4-4BCD-93E2-E3B085C9AB24}">
+                <p16:designElem xmlns:p16="http://schemas.microsoft.com/office/powerpoint/2015/main" val="1"/>
+              </p:ext>
+            </p:extLst>
+          </p:nvPr>
+        </p:nvSpPr>
+        <p:spPr>
+          <a:xfrm>
+            <a:off x="0" y="2019476"/>
+            <a:ext cx="12192000" cy="4105941"/>
+          </a:xfrm>
+          <a:prstGeom prst="rect">
+            <a:avLst/>
+          </a:prstGeom>
+          <a:gradFill flip="none" rotWithShape="1">
+            <a:gsLst>
+              <a:gs pos="0">
+                <a:schemeClr val="bg2">
+                  <a:alpha val="0"/>
+                </a:schemeClr>
+              </a:gs>
+              <a:gs pos="100000">
+                <a:schemeClr val="bg2"/>
+              </a:gs>
+            </a:gsLst>
+            <a:lin ang="5400000" scaled="0"/>
+            <a:tileRect/>
+          </a:gradFill>
+          <a:ln>
+            <a:noFill/>
+          </a:ln>
+        </p:spPr>
+        <p:style>
+          <a:lnRef idx="2">
+            <a:schemeClr val="accent1">
+              <a:shade val="50000"/>
+            </a:schemeClr>
+          </a:lnRef>
+          <a:fillRef idx="1">
+            <a:schemeClr val="accent1"/>
+          </a:fillRef>
+          <a:effectRef idx="0">
+            <a:schemeClr val="accent1"/>
+          </a:effectRef>
+          <a:fontRef idx="minor">
+            <a:schemeClr val="lt1"/>
+          </a:fontRef>
+        </p:style>
+        <p:txBody>
+          <a:bodyPr rtlCol="0" anchor="ctr"/>
+          <a:lstStyle/>
+          <a:p>
+            <a:pPr lvl="0" algn="ctr"/>
+            <a:endParaRPr lang="en-US"/>
+          </a:p>
+        </p:txBody>
+      </p:sp>
+      <p:sp>
+        <p:nvSpPr>
+          <p:cNvPr id="2" name="Title 1">
+            <a:extLst>
+              <a:ext uri="{FF2B5EF4-FFF2-40B4-BE49-F238E27FC236}">
+                <a16:creationId xmlns:a16="http://schemas.microsoft.com/office/drawing/2014/main" id="{39DDDFD2-F9A9-3A01-FF2A-6CDF8AAF1529}"/>
+              </a:ext>
+            </a:extLst>
+          </p:cNvPr>
+          <p:cNvSpPr>
+            <a:spLocks noGrp="1"/>
+          </p:cNvSpPr>
+          <p:nvPr>
+            <p:ph type="title"/>
+          </p:nvPr>
+        </p:nvSpPr>
+        <p:spPr>
+          <a:xfrm>
+            <a:off x="1776729" y="4459039"/>
+            <a:ext cx="8643011" cy="551528"/>
+          </a:xfrm>
+        </p:spPr>
+        <p:txBody>
+          <a:bodyPr vert="horz" lIns="91440" tIns="45720" rIns="91440" bIns="0" rtlCol="0" anchor="b">
+            <a:normAutofit/>
+          </a:bodyPr>
+          <a:lstStyle/>
+          <a:p>
+            <a:r>
+              <a:rPr lang="en-US" sz="3600"/>
+              <a:t>Vlajk Sándor – Dokumentáció</a:t>
+            </a:r>
+          </a:p>
+        </p:txBody>
+      </p:sp>
       <p:pic>
         <p:nvPicPr>
-          <p:cNvPr id="6" name="Picture 18" descr="https://cdn.discordapp.com/attachments/812059683393110017/1439311303293407394/image.png?ex=691a0e9b&amp;is=6918bd1b&amp;hm=b76267a9bd8fa2df8afb55329ccd083691ebc55d7bd545a7cf79ae6182b702a7&amp;"/>
+          <p:cNvPr id="11" name="Picture 10">
+            <a:extLst>
+              <a:ext uri="{FF2B5EF4-FFF2-40B4-BE49-F238E27FC236}">
+                <a16:creationId xmlns:a16="http://schemas.microsoft.com/office/drawing/2014/main" id="{3C11F97F-2AE4-3D9B-35A6-AF80BEF77AF7}"/>
+              </a:ext>
+            </a:extLst>
+          </p:cNvPr>
           <p:cNvPicPr>
-            <a:picLocks noChangeAspect="1" noChangeArrowheads="1"/>
+            <a:picLocks noChangeAspect="1"/>
           </p:cNvPicPr>
           <p:nvPr/>
         </p:nvPicPr>
         <p:blipFill>
           <a:blip r:embed="rId3"/>
-          <a:srcRect/>
           <a:stretch>
             <a:fillRect/>
           </a:stretch>
         </p:blipFill>
-        <p:spPr bwMode="auto">
-          <a:xfrm>
-            <a:off x="7738196" y="1454523"/>
-            <a:ext cx="4192138" cy="4427075"/>
+        <p:spPr>
+          <a:xfrm>
+            <a:off x="215647" y="470463"/>
+            <a:ext cx="3553338" cy="3856996"/>
           </a:xfrm>
           <a:prstGeom prst="rect">
             <a:avLst/>
           </a:prstGeom>
-          <a:noFill/>
         </p:spPr>
       </p:pic>
       <p:pic>
         <p:nvPicPr>
-          <p:cNvPr id="7" name="Picture 2" descr="https://cdn.discordapp.com/attachments/812059683393110017/1439310147083173888/image.png?ex=691a0d88&amp;is=6918bc08&amp;hm=d9dde2fb7ff6f43b87336b768ad315f76d4e8049f9de17a1e67f0bc5c96e4af5&amp;"/>
+          <p:cNvPr id="9" name="Picture 8">
+            <a:extLst>
+              <a:ext uri="{FF2B5EF4-FFF2-40B4-BE49-F238E27FC236}">
+                <a16:creationId xmlns:a16="http://schemas.microsoft.com/office/drawing/2014/main" id="{EB92CDCE-F939-2C1B-FB2C-35BCFBC61213}"/>
+              </a:ext>
+            </a:extLst>
+          </p:cNvPr>
           <p:cNvPicPr>
-            <a:picLocks noChangeAspect="1" noChangeArrowheads="1"/>
+            <a:picLocks noChangeAspect="1"/>
           </p:cNvPicPr>
           <p:nvPr/>
         </p:nvPicPr>
         <p:blipFill>
           <a:blip r:embed="rId4"/>
-          <a:srcRect/>
           <a:stretch>
             <a:fillRect/>
           </a:stretch>
         </p:blipFill>
-        <p:spPr bwMode="auto">
-          <a:xfrm>
-            <a:off x="5383184" y="285420"/>
-            <a:ext cx="2061495" cy="3303169"/>
+        <p:spPr>
+          <a:xfrm>
+            <a:off x="4025898" y="890198"/>
+            <a:ext cx="3376192" cy="3215823"/>
           </a:xfrm>
           <a:prstGeom prst="rect">
             <a:avLst/>
           </a:prstGeom>
-          <a:noFill/>
         </p:spPr>
       </p:pic>
+      <p:pic>
+        <p:nvPicPr>
+          <p:cNvPr id="5" name="Picture 4">
+            <a:extLst>
+              <a:ext uri="{FF2B5EF4-FFF2-40B4-BE49-F238E27FC236}">
+                <a16:creationId xmlns:a16="http://schemas.microsoft.com/office/drawing/2014/main" id="{C20FFCFC-0AFB-A5C7-E6B7-F9D1DC4B2FC6}"/>
+              </a:ext>
+            </a:extLst>
+          </p:cNvPr>
+          <p:cNvPicPr>
+            <a:picLocks noChangeAspect="1"/>
+          </p:cNvPicPr>
+          <p:nvPr/>
+        </p:nvPicPr>
+        <p:blipFill>
+          <a:blip r:embed="rId5"/>
+          <a:stretch>
+            <a:fillRect/>
+          </a:stretch>
+        </p:blipFill>
+        <p:spPr>
+          <a:xfrm>
+            <a:off x="7659003" y="1278460"/>
+            <a:ext cx="4317350" cy="2439301"/>
+          </a:xfrm>
+          <a:prstGeom prst="rect">
+            <a:avLst/>
+          </a:prstGeom>
+        </p:spPr>
+      </p:pic>
+      <p:cxnSp>
+        <p:nvCxnSpPr>
+          <p:cNvPr id="44" name="Straight Connector 43">
+            <a:extLst>
+              <a:ext uri="{FF2B5EF4-FFF2-40B4-BE49-F238E27FC236}">
+                <a16:creationId xmlns:a16="http://schemas.microsoft.com/office/drawing/2014/main" id="{6B9EA5DA-6DFD-447D-B8F9-CB95CA114076}"/>
+              </a:ext>
+              <a:ext uri="{C183D7F6-B498-43B3-948B-1728B52AA6E4}">
+                <adec:decorative xmlns:adec="http://schemas.microsoft.com/office/drawing/2017/decorative" val="1"/>
+              </a:ext>
+            </a:extLst>
+          </p:cNvPr>
+          <p:cNvCxnSpPr>
+            <a:cxnSpLocks noGrp="1" noRot="1" noChangeAspect="1" noMove="1" noResize="1" noEditPoints="1" noAdjustHandles="1" noChangeArrowheads="1" noChangeShapeType="1"/>
+          </p:cNvCxnSpPr>
+          <p:nvPr>
+            <p:extLst>
+              <p:ext uri="{386F3935-93C4-4BCD-93E2-E3B085C9AB24}">
+                <p16:designElem xmlns:p16="http://schemas.microsoft.com/office/powerpoint/2015/main" val="1"/>
+              </p:ext>
+            </p:extLst>
+          </p:nvPr>
+        </p:nvCxnSpPr>
+        <p:spPr>
+          <a:xfrm>
+            <a:off x="1776728" y="5027185"/>
+            <a:ext cx="8643011" cy="0"/>
+          </a:xfrm>
+          <a:prstGeom prst="line">
+            <a:avLst/>
+          </a:prstGeom>
+          <a:ln w="31750"/>
+        </p:spPr>
+        <p:style>
+          <a:lnRef idx="3">
+            <a:schemeClr val="accent1"/>
+          </a:lnRef>
+          <a:fillRef idx="0">
+            <a:schemeClr val="accent1"/>
+          </a:fillRef>
+          <a:effectRef idx="2">
+            <a:schemeClr val="accent1"/>
+          </a:effectRef>
+          <a:fontRef idx="minor">
+            <a:schemeClr val="tx1"/>
+          </a:fontRef>
+        </p:style>
+      </p:cxnSp>
+      <p:pic>
+        <p:nvPicPr>
+          <p:cNvPr id="45" name="Picture 44">
+            <a:extLst>
+              <a:ext uri="{FF2B5EF4-FFF2-40B4-BE49-F238E27FC236}">
+                <a16:creationId xmlns:a16="http://schemas.microsoft.com/office/drawing/2014/main" id="{87612EF9-94E7-42BA-B4A9-4B38643FBAF7}"/>
+              </a:ext>
+              <a:ext uri="{C183D7F6-B498-43B3-948B-1728B52AA6E4}">
+                <adec:decorative xmlns:adec="http://schemas.microsoft.com/office/drawing/2017/decorative" val="1"/>
+              </a:ext>
+            </a:extLst>
+          </p:cNvPr>
+          <p:cNvPicPr>
+            <a:picLocks noGrp="1" noRot="1" noChangeAspect="1" noMove="1" noResize="1" noEditPoints="1" noAdjustHandles="1" noChangeArrowheads="1" noChangeShapeType="1" noCrop="1"/>
+          </p:cNvPicPr>
+          <p:nvPr>
+            <p:extLst>
+              <p:ext uri="{386F3935-93C4-4BCD-93E2-E3B085C9AB24}">
+                <p16:designElem xmlns:p16="http://schemas.microsoft.com/office/powerpoint/2015/main" val="1"/>
+              </p:ext>
+            </p:extLst>
+          </p:nvPr>
+        </p:nvPicPr>
+        <p:blipFill rotWithShape="1">
+          <a:blip r:embed="rId2">
+            <a:extLst>
+              <a:ext uri="{28A0092B-C50C-407E-A947-70E740481C1C}">
+                <a14:useLocalDpi xmlns:a14="http://schemas.microsoft.com/office/drawing/2010/main" val="0"/>
+              </a:ext>
+            </a:extLst>
+          </a:blip>
+          <a:srcRect t="1538" b="-1538"/>
+          <a:stretch/>
+        </p:blipFill>
+        <p:spPr bwMode="black">
+          <a:xfrm>
+            <a:off x="0" y="6126480"/>
+            <a:ext cx="12192000" cy="742950"/>
+          </a:xfrm>
+          <a:prstGeom prst="rect">
+            <a:avLst/>
+          </a:prstGeom>
+        </p:spPr>
+      </p:pic>
+      <p:cxnSp>
+        <p:nvCxnSpPr>
+          <p:cNvPr id="46" name="Straight Connector 45">
+            <a:extLst>
+              <a:ext uri="{FF2B5EF4-FFF2-40B4-BE49-F238E27FC236}">
+                <a16:creationId xmlns:a16="http://schemas.microsoft.com/office/drawing/2014/main" id="{9E597F0B-0A17-4BF2-A904-9D99811F3E2E}"/>
+              </a:ext>
+              <a:ext uri="{C183D7F6-B498-43B3-948B-1728B52AA6E4}">
+                <adec:decorative xmlns:adec="http://schemas.microsoft.com/office/drawing/2017/decorative" val="1"/>
+              </a:ext>
+            </a:extLst>
+          </p:cNvPr>
+          <p:cNvCxnSpPr>
+            <a:cxnSpLocks noGrp="1" noRot="1" noChangeAspect="1" noMove="1" noResize="1" noEditPoints="1" noAdjustHandles="1" noChangeArrowheads="1" noChangeShapeType="1"/>
+          </p:cNvCxnSpPr>
+          <p:nvPr>
+            <p:extLst>
+              <p:ext uri="{386F3935-93C4-4BCD-93E2-E3B085C9AB24}">
+                <p16:designElem xmlns:p16="http://schemas.microsoft.com/office/powerpoint/2015/main" val="1"/>
+              </p:ext>
+            </p:extLst>
+          </p:nvPr>
+        </p:nvCxnSpPr>
+        <p:spPr>
+          <a:xfrm>
+            <a:off x="0" y="6128413"/>
+            <a:ext cx="12192000" cy="0"/>
+          </a:xfrm>
+          <a:prstGeom prst="line">
+            <a:avLst/>
+          </a:prstGeom>
+          <a:ln w="12700">
+            <a:solidFill>
+              <a:srgbClr val="000001">
+                <a:alpha val="20000"/>
+              </a:srgbClr>
+            </a:solidFill>
+          </a:ln>
+        </p:spPr>
+        <p:style>
+          <a:lnRef idx="1">
+            <a:schemeClr val="accent1"/>
+          </a:lnRef>
+          <a:fillRef idx="0">
+            <a:schemeClr val="accent1"/>
+          </a:fillRef>
+          <a:effectRef idx="0">
+            <a:schemeClr val="accent1"/>
+          </a:effectRef>
+          <a:fontRef idx="minor">
+            <a:schemeClr val="tx1"/>
+          </a:fontRef>
+        </p:style>
+      </p:cxnSp>
     </p:spTree>
+    <p:extLst>
+      <p:ext uri="{BB962C8B-B14F-4D97-AF65-F5344CB8AC3E}">
+        <p14:creationId xmlns:p14="http://schemas.microsoft.com/office/powerpoint/2010/main" val="3510849585"/>
+      </p:ext>
+    </p:extLst>
   </p:cSld>
   <p:clrMapOvr>
     <a:masterClrMapping/>
@@ -9617,7 +7821,13 @@
       </p:grpSpPr>
       <p:sp>
         <p:nvSpPr>
-          <p:cNvPr id="2" name="Cím 1"/>
+          <p:cNvPr id="2" name="Title 1">
+            <a:extLst>
+              <a:ext uri="{FF2B5EF4-FFF2-40B4-BE49-F238E27FC236}">
+                <a16:creationId xmlns:a16="http://schemas.microsoft.com/office/drawing/2014/main" id="{6302D0E6-DFB3-5E17-192B-D3B11F717D8C}"/>
+              </a:ext>
+            </a:extLst>
+          </p:cNvPr>
           <p:cNvSpPr>
             <a:spLocks noGrp="1"/>
           </p:cNvSpPr>
@@ -9625,97 +7835,89 @@
             <p:ph type="title"/>
           </p:nvPr>
         </p:nvSpPr>
-        <p:spPr>
-          <a:xfrm>
-            <a:off x="1408446" y="1253095"/>
-            <a:ext cx="8115115" cy="592958"/>
-          </a:xfrm>
-        </p:spPr>
+        <p:spPr/>
         <p:txBody>
-          <a:bodyPr>
-            <a:normAutofit/>
-          </a:bodyPr>
+          <a:bodyPr/>
           <a:lstStyle/>
           <a:p>
             <a:r>
-              <a:rPr lang="hu-HU" dirty="0"/>
-              <a:t>Czeitner András - </a:t>
+              <a:rPr lang="en-US" dirty="0"/>
+              <a:t>Vlajk Sándor – </a:t>
             </a:r>
             <a:r>
-              <a:rPr lang="hu-HU" dirty="0" err="1"/>
-              <a:t>Git</a:t>
+              <a:rPr lang="en-US" dirty="0" err="1"/>
+              <a:t>Fejlesztés</a:t>
             </a:r>
-            <a:endParaRPr lang="hu-HU" dirty="0"/>
+            <a:endParaRPr lang="en-US" dirty="0"/>
           </a:p>
         </p:txBody>
       </p:sp>
       <p:pic>
         <p:nvPicPr>
-          <p:cNvPr id="34827" name="Picture 11"/>
+          <p:cNvPr id="5" name="Picture 4">
+            <a:extLst>
+              <a:ext uri="{FF2B5EF4-FFF2-40B4-BE49-F238E27FC236}">
+                <a16:creationId xmlns:a16="http://schemas.microsoft.com/office/drawing/2014/main" id="{E7DCF374-80C3-CBE5-BC73-F12C234A38EC}"/>
+              </a:ext>
+            </a:extLst>
+          </p:cNvPr>
           <p:cNvPicPr>
-            <a:picLocks noChangeAspect="1" noChangeArrowheads="1"/>
+            <a:picLocks noChangeAspect="1"/>
           </p:cNvPicPr>
           <p:nvPr/>
         </p:nvPicPr>
         <p:blipFill>
           <a:blip r:embed="rId2"/>
-          <a:srcRect/>
           <a:stretch>
             <a:fillRect/>
           </a:stretch>
         </p:blipFill>
-        <p:spPr bwMode="auto">
-          <a:xfrm>
-            <a:off x="5917362" y="2409735"/>
-            <a:ext cx="5981700" cy="3228975"/>
+        <p:spPr>
+          <a:xfrm>
+            <a:off x="809387" y="2190530"/>
+            <a:ext cx="8630854" cy="3143689"/>
           </a:xfrm>
           <a:prstGeom prst="rect">
             <a:avLst/>
           </a:prstGeom>
-          <a:noFill/>
-          <a:ln w="9525">
-            <a:noFill/>
-            <a:miter lim="800000"/>
-            <a:headEnd/>
-            <a:tailEnd/>
-          </a:ln>
-          <a:effectLst/>
         </p:spPr>
       </p:pic>
       <p:pic>
         <p:nvPicPr>
-          <p:cNvPr id="34828" name="Picture 12"/>
+          <p:cNvPr id="7" name="Picture 6">
+            <a:extLst>
+              <a:ext uri="{FF2B5EF4-FFF2-40B4-BE49-F238E27FC236}">
+                <a16:creationId xmlns:a16="http://schemas.microsoft.com/office/drawing/2014/main" id="{13C83DBE-18EF-02F8-4CDE-12A988AA16AE}"/>
+              </a:ext>
+            </a:extLst>
+          </p:cNvPr>
           <p:cNvPicPr>
-            <a:picLocks noChangeAspect="1" noChangeArrowheads="1"/>
+            <a:picLocks noChangeAspect="1"/>
           </p:cNvPicPr>
           <p:nvPr/>
         </p:nvPicPr>
         <p:blipFill>
           <a:blip r:embed="rId3"/>
-          <a:srcRect/>
           <a:stretch>
             <a:fillRect/>
           </a:stretch>
         </p:blipFill>
-        <p:spPr bwMode="auto">
-          <a:xfrm>
-            <a:off x="336430" y="2635729"/>
-            <a:ext cx="5353050" cy="2552700"/>
+        <p:spPr>
+          <a:xfrm>
+            <a:off x="809387" y="5504284"/>
+            <a:ext cx="3410426" cy="333422"/>
           </a:xfrm>
           <a:prstGeom prst="rect">
             <a:avLst/>
           </a:prstGeom>
-          <a:noFill/>
-          <a:ln w="9525">
-            <a:noFill/>
-            <a:miter lim="800000"/>
-            <a:headEnd/>
-            <a:tailEnd/>
-          </a:ln>
-          <a:effectLst/>
         </p:spPr>
       </p:pic>
     </p:spTree>
+    <p:extLst>
+      <p:ext uri="{BB962C8B-B14F-4D97-AF65-F5344CB8AC3E}">
+        <p14:creationId xmlns:p14="http://schemas.microsoft.com/office/powerpoint/2010/main" val="2040790998"/>
+      </p:ext>
+    </p:extLst>
   </p:cSld>
   <p:clrMapOvr>
     <a:masterClrMapping/>
@@ -9786,7 +7988,12 @@
             <p:ph idx="1"/>
           </p:nvPr>
         </p:nvSpPr>
-        <p:spPr/>
+        <p:spPr>
+          <a:xfrm>
+            <a:off x="1451579" y="2015732"/>
+            <a:ext cx="9603275" cy="459479"/>
+          </a:xfrm>
+        </p:spPr>
         <p:txBody>
           <a:bodyPr/>
           <a:lstStyle/>
@@ -9825,7 +8032,7 @@
         </p:blipFill>
         <p:spPr>
           <a:xfrm>
-            <a:off x="5628812" y="5415217"/>
+            <a:off x="7508933" y="5326365"/>
             <a:ext cx="3019846" cy="1276528"/>
           </a:xfrm>
           <a:prstGeom prst="rect">
@@ -9855,7 +8062,7 @@
         </p:blipFill>
         <p:spPr>
           <a:xfrm>
-            <a:off x="8904900" y="5017731"/>
+            <a:off x="7874388" y="3719594"/>
             <a:ext cx="3067478" cy="1448002"/>
           </a:xfrm>
           <a:prstGeom prst="rect">
@@ -9865,10 +8072,10 @@
       </p:pic>
       <p:pic>
         <p:nvPicPr>
-          <p:cNvPr id="15" name="Kép 14">
-            <a:extLst>
-              <a:ext uri="{FF2B5EF4-FFF2-40B4-BE49-F238E27FC236}">
-                <a16:creationId xmlns:a16="http://schemas.microsoft.com/office/drawing/2014/main" id="{9FDDA2FF-10DF-3525-70F9-BE2E7A6BFD10}"/>
+          <p:cNvPr id="23" name="Kép 22">
+            <a:extLst>
+              <a:ext uri="{FF2B5EF4-FFF2-40B4-BE49-F238E27FC236}">
+                <a16:creationId xmlns:a16="http://schemas.microsoft.com/office/drawing/2014/main" id="{14E70A7E-76E8-5D09-7108-FB306C9CD253}"/>
               </a:ext>
             </a:extLst>
           </p:cNvPr>
@@ -9885,8 +8092,8 @@
         </p:blipFill>
         <p:spPr>
           <a:xfrm>
-            <a:off x="124130" y="2691803"/>
-            <a:ext cx="4411560" cy="1049235"/>
+            <a:off x="191154" y="2522080"/>
+            <a:ext cx="3278482" cy="1418277"/>
           </a:xfrm>
           <a:prstGeom prst="rect">
             <a:avLst/>
@@ -9895,10 +8102,10 @@
       </p:pic>
       <p:pic>
         <p:nvPicPr>
-          <p:cNvPr id="17" name="Kép 16">
-            <a:extLst>
-              <a:ext uri="{FF2B5EF4-FFF2-40B4-BE49-F238E27FC236}">
-                <a16:creationId xmlns:a16="http://schemas.microsoft.com/office/drawing/2014/main" id="{1A29D998-57C8-61C9-B318-0FADA21ABE44}"/>
+          <p:cNvPr id="4" name="Kép 3" descr="A képen szöveg, képernyőkép, multimédia látható&#10;&#10;Lehet, hogy az AI által létrehozott tartalom helytelen.">
+            <a:extLst>
+              <a:ext uri="{FF2B5EF4-FFF2-40B4-BE49-F238E27FC236}">
+                <a16:creationId xmlns:a16="http://schemas.microsoft.com/office/drawing/2014/main" id="{DF41EF3A-3453-5B4B-528E-A21BDFC49D18}"/>
               </a:ext>
             </a:extLst>
           </p:cNvPr>
@@ -9915,8 +8122,8 @@
         </p:blipFill>
         <p:spPr>
           <a:xfrm>
-            <a:off x="7608745" y="1938660"/>
-            <a:ext cx="4358749" cy="1324717"/>
+            <a:off x="275621" y="4092090"/>
+            <a:ext cx="3190875" cy="2590800"/>
           </a:xfrm>
           <a:prstGeom prst="rect">
             <a:avLst/>
@@ -9925,10 +8132,10 @@
       </p:pic>
       <p:pic>
         <p:nvPicPr>
-          <p:cNvPr id="19" name="Kép 18">
-            <a:extLst>
-              <a:ext uri="{FF2B5EF4-FFF2-40B4-BE49-F238E27FC236}">
-                <a16:creationId xmlns:a16="http://schemas.microsoft.com/office/drawing/2014/main" id="{8594A7E1-A06A-9333-7C7D-737E36876C93}"/>
+          <p:cNvPr id="5" name="Kép 4" descr="A képen szöveg, képernyőkép, multimédia látható&#10;&#10;Lehet, hogy az AI által létrehozott tartalom helytelen.">
+            <a:extLst>
+              <a:ext uri="{FF2B5EF4-FFF2-40B4-BE49-F238E27FC236}">
+                <a16:creationId xmlns:a16="http://schemas.microsoft.com/office/drawing/2014/main" id="{D45A65B9-52BA-4D12-1072-5310891589B1}"/>
               </a:ext>
             </a:extLst>
           </p:cNvPr>
@@ -9945,8 +8152,8 @@
         </p:blipFill>
         <p:spPr>
           <a:xfrm>
-            <a:off x="343776" y="4038963"/>
-            <a:ext cx="4709491" cy="2453133"/>
+            <a:off x="3919429" y="4076949"/>
+            <a:ext cx="3133725" cy="2533650"/>
           </a:xfrm>
           <a:prstGeom prst="rect">
             <a:avLst/>
@@ -9955,10 +8162,10 @@
       </p:pic>
       <p:pic>
         <p:nvPicPr>
-          <p:cNvPr id="21" name="Kép 20">
-            <a:extLst>
-              <a:ext uri="{FF2B5EF4-FFF2-40B4-BE49-F238E27FC236}">
-                <a16:creationId xmlns:a16="http://schemas.microsoft.com/office/drawing/2014/main" id="{4BF48EDB-45AE-C7EC-0F1C-10A0E035DA89}"/>
+          <p:cNvPr id="6" name="Kép 5" descr="A képen szöveg, képernyőkép, multimédia, Betűtípus látható&#10;&#10;Lehet, hogy az AI által létrehozott tartalom helytelen.">
+            <a:extLst>
+              <a:ext uri="{FF2B5EF4-FFF2-40B4-BE49-F238E27FC236}">
+                <a16:creationId xmlns:a16="http://schemas.microsoft.com/office/drawing/2014/main" id="{D6972E51-27F1-EA81-5CEE-39A923D66D7D}"/>
               </a:ext>
             </a:extLst>
           </p:cNvPr>
@@ -9975,8 +8182,8 @@
         </p:blipFill>
         <p:spPr>
           <a:xfrm>
-            <a:off x="5186675" y="2488711"/>
-            <a:ext cx="2109549" cy="2771257"/>
+            <a:off x="3731953" y="2468112"/>
+            <a:ext cx="3181350" cy="1466850"/>
           </a:xfrm>
           <a:prstGeom prst="rect">
             <a:avLst/>
@@ -9985,10 +8192,10 @@
       </p:pic>
       <p:pic>
         <p:nvPicPr>
-          <p:cNvPr id="23" name="Kép 22">
-            <a:extLst>
-              <a:ext uri="{FF2B5EF4-FFF2-40B4-BE49-F238E27FC236}">
-                <a16:creationId xmlns:a16="http://schemas.microsoft.com/office/drawing/2014/main" id="{14E70A7E-76E8-5D09-7108-FB306C9CD253}"/>
+          <p:cNvPr id="8" name="Kép 7" descr="A képen szöveg, képernyőkép látható&#10;&#10;Lehet, hogy az AI által létrehozott tartalom helytelen.">
+            <a:extLst>
+              <a:ext uri="{FF2B5EF4-FFF2-40B4-BE49-F238E27FC236}">
+                <a16:creationId xmlns:a16="http://schemas.microsoft.com/office/drawing/2014/main" id="{AE6DB562-89EA-DF6C-DFDE-9283986F0D95}"/>
               </a:ext>
             </a:extLst>
           </p:cNvPr>
@@ -9999,14 +8206,15 @@
         </p:nvPicPr>
         <p:blipFill>
           <a:blip r:embed="rId9"/>
+          <a:srcRect l="4054" r="12162" b="-1083"/>
           <a:stretch>
             <a:fillRect/>
           </a:stretch>
         </p:blipFill>
         <p:spPr>
           <a:xfrm>
-            <a:off x="7909780" y="3425355"/>
-            <a:ext cx="3278482" cy="1418277"/>
+            <a:off x="8686586" y="433031"/>
+            <a:ext cx="2815153" cy="3194256"/>
           </a:xfrm>
           <a:prstGeom prst="rect">
             <a:avLst/>
@@ -10292,370 +8500,6 @@
                       </p:childTnLst>
                     </p:cTn>
                   </p:par>
-                  <p:par>
-                    <p:cTn id="19" fill="hold">
-                      <p:stCondLst>
-                        <p:cond delay="indefinite"/>
-                      </p:stCondLst>
-                      <p:childTnLst>
-                        <p:par>
-                          <p:cTn id="20" fill="hold">
-                            <p:stCondLst>
-                              <p:cond delay="0"/>
-                            </p:stCondLst>
-                            <p:childTnLst>
-                              <p:par>
-                                <p:cTn id="21" presetID="2" presetClass="entr" presetSubtype="2" fill="hold" nodeType="clickEffect">
-                                  <p:stCondLst>
-                                    <p:cond delay="0"/>
-                                  </p:stCondLst>
-                                  <p:childTnLst>
-                                    <p:set>
-                                      <p:cBhvr>
-                                        <p:cTn id="22" dur="1" fill="hold">
-                                          <p:stCondLst>
-                                            <p:cond delay="0"/>
-                                          </p:stCondLst>
-                                        </p:cTn>
-                                        <p:tgtEl>
-                                          <p:spTgt spid="17"/>
-                                        </p:tgtEl>
-                                        <p:attrNameLst>
-                                          <p:attrName>style.visibility</p:attrName>
-                                        </p:attrNameLst>
-                                      </p:cBhvr>
-                                      <p:to>
-                                        <p:strVal val="visible"/>
-                                      </p:to>
-                                    </p:set>
-                                    <p:anim calcmode="lin" valueType="num">
-                                      <p:cBhvr additive="base">
-                                        <p:cTn id="23" dur="500" fill="hold"/>
-                                        <p:tgtEl>
-                                          <p:spTgt spid="17"/>
-                                        </p:tgtEl>
-                                        <p:attrNameLst>
-                                          <p:attrName>ppt_x</p:attrName>
-                                        </p:attrNameLst>
-                                      </p:cBhvr>
-                                      <p:tavLst>
-                                        <p:tav tm="0">
-                                          <p:val>
-                                            <p:strVal val="1+#ppt_w/2"/>
-                                          </p:val>
-                                        </p:tav>
-                                        <p:tav tm="100000">
-                                          <p:val>
-                                            <p:strVal val="#ppt_x"/>
-                                          </p:val>
-                                        </p:tav>
-                                      </p:tavLst>
-                                    </p:anim>
-                                    <p:anim calcmode="lin" valueType="num">
-                                      <p:cBhvr additive="base">
-                                        <p:cTn id="24" dur="500" fill="hold"/>
-                                        <p:tgtEl>
-                                          <p:spTgt spid="17"/>
-                                        </p:tgtEl>
-                                        <p:attrNameLst>
-                                          <p:attrName>ppt_y</p:attrName>
-                                        </p:attrNameLst>
-                                      </p:cBhvr>
-                                      <p:tavLst>
-                                        <p:tav tm="0">
-                                          <p:val>
-                                            <p:strVal val="#ppt_y"/>
-                                          </p:val>
-                                        </p:tav>
-                                        <p:tav tm="100000">
-                                          <p:val>
-                                            <p:strVal val="#ppt_y"/>
-                                          </p:val>
-                                        </p:tav>
-                                      </p:tavLst>
-                                    </p:anim>
-                                  </p:childTnLst>
-                                </p:cTn>
-                              </p:par>
-                            </p:childTnLst>
-                          </p:cTn>
-                        </p:par>
-                      </p:childTnLst>
-                    </p:cTn>
-                  </p:par>
-                  <p:par>
-                    <p:cTn id="25" fill="hold">
-                      <p:stCondLst>
-                        <p:cond delay="indefinite"/>
-                      </p:stCondLst>
-                      <p:childTnLst>
-                        <p:par>
-                          <p:cTn id="26" fill="hold">
-                            <p:stCondLst>
-                              <p:cond delay="0"/>
-                            </p:stCondLst>
-                            <p:childTnLst>
-                              <p:par>
-                                <p:cTn id="27" presetID="2" presetClass="entr" presetSubtype="8" fill="hold" nodeType="clickEffect">
-                                  <p:stCondLst>
-                                    <p:cond delay="0"/>
-                                  </p:stCondLst>
-                                  <p:childTnLst>
-                                    <p:set>
-                                      <p:cBhvr>
-                                        <p:cTn id="28" dur="1" fill="hold">
-                                          <p:stCondLst>
-                                            <p:cond delay="0"/>
-                                          </p:stCondLst>
-                                        </p:cTn>
-                                        <p:tgtEl>
-                                          <p:spTgt spid="15"/>
-                                        </p:tgtEl>
-                                        <p:attrNameLst>
-                                          <p:attrName>style.visibility</p:attrName>
-                                        </p:attrNameLst>
-                                      </p:cBhvr>
-                                      <p:to>
-                                        <p:strVal val="visible"/>
-                                      </p:to>
-                                    </p:set>
-                                    <p:anim calcmode="lin" valueType="num">
-                                      <p:cBhvr additive="base">
-                                        <p:cTn id="29" dur="500" fill="hold"/>
-                                        <p:tgtEl>
-                                          <p:spTgt spid="15"/>
-                                        </p:tgtEl>
-                                        <p:attrNameLst>
-                                          <p:attrName>ppt_x</p:attrName>
-                                        </p:attrNameLst>
-                                      </p:cBhvr>
-                                      <p:tavLst>
-                                        <p:tav tm="0">
-                                          <p:val>
-                                            <p:strVal val="0-#ppt_w/2"/>
-                                          </p:val>
-                                        </p:tav>
-                                        <p:tav tm="100000">
-                                          <p:val>
-                                            <p:strVal val="#ppt_x"/>
-                                          </p:val>
-                                        </p:tav>
-                                      </p:tavLst>
-                                    </p:anim>
-                                    <p:anim calcmode="lin" valueType="num">
-                                      <p:cBhvr additive="base">
-                                        <p:cTn id="30" dur="500" fill="hold"/>
-                                        <p:tgtEl>
-                                          <p:spTgt spid="15"/>
-                                        </p:tgtEl>
-                                        <p:attrNameLst>
-                                          <p:attrName>ppt_y</p:attrName>
-                                        </p:attrNameLst>
-                                      </p:cBhvr>
-                                      <p:tavLst>
-                                        <p:tav tm="0">
-                                          <p:val>
-                                            <p:strVal val="#ppt_y"/>
-                                          </p:val>
-                                        </p:tav>
-                                        <p:tav tm="100000">
-                                          <p:val>
-                                            <p:strVal val="#ppt_y"/>
-                                          </p:val>
-                                        </p:tav>
-                                      </p:tavLst>
-                                    </p:anim>
-                                  </p:childTnLst>
-                                </p:cTn>
-                              </p:par>
-                            </p:childTnLst>
-                          </p:cTn>
-                        </p:par>
-                      </p:childTnLst>
-                    </p:cTn>
-                  </p:par>
-                  <p:par>
-                    <p:cTn id="31" fill="hold">
-                      <p:stCondLst>
-                        <p:cond delay="indefinite"/>
-                      </p:stCondLst>
-                      <p:childTnLst>
-                        <p:par>
-                          <p:cTn id="32" fill="hold">
-                            <p:stCondLst>
-                              <p:cond delay="0"/>
-                            </p:stCondLst>
-                            <p:childTnLst>
-                              <p:par>
-                                <p:cTn id="33" presetID="2" presetClass="entr" presetSubtype="8" fill="hold" nodeType="clickEffect">
-                                  <p:stCondLst>
-                                    <p:cond delay="0"/>
-                                  </p:stCondLst>
-                                  <p:childTnLst>
-                                    <p:set>
-                                      <p:cBhvr>
-                                        <p:cTn id="34" dur="1" fill="hold">
-                                          <p:stCondLst>
-                                            <p:cond delay="0"/>
-                                          </p:stCondLst>
-                                        </p:cTn>
-                                        <p:tgtEl>
-                                          <p:spTgt spid="19"/>
-                                        </p:tgtEl>
-                                        <p:attrNameLst>
-                                          <p:attrName>style.visibility</p:attrName>
-                                        </p:attrNameLst>
-                                      </p:cBhvr>
-                                      <p:to>
-                                        <p:strVal val="visible"/>
-                                      </p:to>
-                                    </p:set>
-                                    <p:anim calcmode="lin" valueType="num">
-                                      <p:cBhvr additive="base">
-                                        <p:cTn id="35" dur="500" fill="hold"/>
-                                        <p:tgtEl>
-                                          <p:spTgt spid="19"/>
-                                        </p:tgtEl>
-                                        <p:attrNameLst>
-                                          <p:attrName>ppt_x</p:attrName>
-                                        </p:attrNameLst>
-                                      </p:cBhvr>
-                                      <p:tavLst>
-                                        <p:tav tm="0">
-                                          <p:val>
-                                            <p:strVal val="0-#ppt_w/2"/>
-                                          </p:val>
-                                        </p:tav>
-                                        <p:tav tm="100000">
-                                          <p:val>
-                                            <p:strVal val="#ppt_x"/>
-                                          </p:val>
-                                        </p:tav>
-                                      </p:tavLst>
-                                    </p:anim>
-                                    <p:anim calcmode="lin" valueType="num">
-                                      <p:cBhvr additive="base">
-                                        <p:cTn id="36" dur="500" fill="hold"/>
-                                        <p:tgtEl>
-                                          <p:spTgt spid="19"/>
-                                        </p:tgtEl>
-                                        <p:attrNameLst>
-                                          <p:attrName>ppt_y</p:attrName>
-                                        </p:attrNameLst>
-                                      </p:cBhvr>
-                                      <p:tavLst>
-                                        <p:tav tm="0">
-                                          <p:val>
-                                            <p:strVal val="#ppt_y"/>
-                                          </p:val>
-                                        </p:tav>
-                                        <p:tav tm="100000">
-                                          <p:val>
-                                            <p:strVal val="#ppt_y"/>
-                                          </p:val>
-                                        </p:tav>
-                                      </p:tavLst>
-                                    </p:anim>
-                                  </p:childTnLst>
-                                </p:cTn>
-                              </p:par>
-                            </p:childTnLst>
-                          </p:cTn>
-                        </p:par>
-                      </p:childTnLst>
-                    </p:cTn>
-                  </p:par>
-                  <p:par>
-                    <p:cTn id="37" fill="hold">
-                      <p:stCondLst>
-                        <p:cond delay="indefinite"/>
-                      </p:stCondLst>
-                      <p:childTnLst>
-                        <p:par>
-                          <p:cTn id="38" fill="hold">
-                            <p:stCondLst>
-                              <p:cond delay="0"/>
-                            </p:stCondLst>
-                            <p:childTnLst>
-                              <p:par>
-                                <p:cTn id="39" presetID="2" presetClass="entr" presetSubtype="4" fill="hold" nodeType="clickEffect">
-                                  <p:stCondLst>
-                                    <p:cond delay="0"/>
-                                  </p:stCondLst>
-                                  <p:childTnLst>
-                                    <p:set>
-                                      <p:cBhvr>
-                                        <p:cTn id="40" dur="1" fill="hold">
-                                          <p:stCondLst>
-                                            <p:cond delay="0"/>
-                                          </p:stCondLst>
-                                        </p:cTn>
-                                        <p:tgtEl>
-                                          <p:spTgt spid="21"/>
-                                        </p:tgtEl>
-                                        <p:attrNameLst>
-                                          <p:attrName>style.visibility</p:attrName>
-                                        </p:attrNameLst>
-                                      </p:cBhvr>
-                                      <p:to>
-                                        <p:strVal val="visible"/>
-                                      </p:to>
-                                    </p:set>
-                                    <p:anim calcmode="lin" valueType="num">
-                                      <p:cBhvr additive="base">
-                                        <p:cTn id="41" dur="500" fill="hold"/>
-                                        <p:tgtEl>
-                                          <p:spTgt spid="21"/>
-                                        </p:tgtEl>
-                                        <p:attrNameLst>
-                                          <p:attrName>ppt_x</p:attrName>
-                                        </p:attrNameLst>
-                                      </p:cBhvr>
-                                      <p:tavLst>
-                                        <p:tav tm="0">
-                                          <p:val>
-                                            <p:strVal val="#ppt_x"/>
-                                          </p:val>
-                                        </p:tav>
-                                        <p:tav tm="100000">
-                                          <p:val>
-                                            <p:strVal val="#ppt_x"/>
-                                          </p:val>
-                                        </p:tav>
-                                      </p:tavLst>
-                                    </p:anim>
-                                    <p:anim calcmode="lin" valueType="num">
-                                      <p:cBhvr additive="base">
-                                        <p:cTn id="42" dur="500" fill="hold"/>
-                                        <p:tgtEl>
-                                          <p:spTgt spid="21"/>
-                                        </p:tgtEl>
-                                        <p:attrNameLst>
-                                          <p:attrName>ppt_y</p:attrName>
-                                        </p:attrNameLst>
-                                      </p:cBhvr>
-                                      <p:tavLst>
-                                        <p:tav tm="0">
-                                          <p:val>
-                                            <p:strVal val="1+#ppt_h/2"/>
-                                          </p:val>
-                                        </p:tav>
-                                        <p:tav tm="100000">
-                                          <p:val>
-                                            <p:strVal val="#ppt_y"/>
-                                          </p:val>
-                                        </p:tav>
-                                      </p:tavLst>
-                                    </p:anim>
-                                  </p:childTnLst>
-                                </p:cTn>
-                              </p:par>
-                            </p:childTnLst>
-                          </p:cTn>
-                        </p:par>
-                      </p:childTnLst>
-                    </p:cTn>
-                  </p:par>
                 </p:childTnLst>
               </p:cTn>
               <p:prevCondLst>
@@ -10724,10 +8568,10 @@
       </p:grpSpPr>
       <p:sp>
         <p:nvSpPr>
-          <p:cNvPr id="8" name="Rectangle 7">
-            <a:extLst>
-              <a:ext uri="{FF2B5EF4-FFF2-40B4-BE49-F238E27FC236}">
-                <a16:creationId xmlns:a16="http://schemas.microsoft.com/office/drawing/2014/main" id="{CDDE5CDF-1512-4CDA-B956-23D223F8DE44}"/>
+          <p:cNvPr id="14" name="Rectangle 13">
+            <a:extLst>
+              <a:ext uri="{FF2B5EF4-FFF2-40B4-BE49-F238E27FC236}">
+                <a16:creationId xmlns:a16="http://schemas.microsoft.com/office/drawing/2014/main" id="{E724B9E8-02C8-4B2E-8770-A00A67760DF0}"/>
               </a:ext>
               <a:ext uri="{C183D7F6-B498-43B3-948B-1728B52AA6E4}">
                 <adec:decorative xmlns:adec="http://schemas.microsoft.com/office/drawing/2017/decorative" val="1"/>
@@ -10791,16 +8635,16 @@
           <a:bodyPr/>
           <a:lstStyle/>
           <a:p>
-            <a:endParaRPr lang="hu-HU"/>
+            <a:endParaRPr lang="en-US"/>
           </a:p>
         </p:txBody>
       </p:sp>
       <p:pic>
         <p:nvPicPr>
-          <p:cNvPr id="10" name="Picture 9">
-            <a:extLst>
-              <a:ext uri="{FF2B5EF4-FFF2-40B4-BE49-F238E27FC236}">
-                <a16:creationId xmlns:a16="http://schemas.microsoft.com/office/drawing/2014/main" id="{B029D7D8-5A6B-4C76-94C8-15798C6C5ADB}"/>
+          <p:cNvPr id="16" name="Picture 15">
+            <a:extLst>
+              <a:ext uri="{FF2B5EF4-FFF2-40B4-BE49-F238E27FC236}">
+                <a16:creationId xmlns:a16="http://schemas.microsoft.com/office/drawing/2014/main" id="{7B8AE548-0BFA-4792-9962-3375923C7635}"/>
               </a:ext>
               <a:ext uri="{C183D7F6-B498-43B3-948B-1728B52AA6E4}">
                 <adec:decorative xmlns:adec="http://schemas.microsoft.com/office/drawing/2017/decorative" val="1"/>
@@ -10841,10 +8685,10 @@
       </p:pic>
       <p:cxnSp>
         <p:nvCxnSpPr>
-          <p:cNvPr id="12" name="Straight Connector 11">
-            <a:extLst>
-              <a:ext uri="{FF2B5EF4-FFF2-40B4-BE49-F238E27FC236}">
-                <a16:creationId xmlns:a16="http://schemas.microsoft.com/office/drawing/2014/main" id="{A5C9319C-E20D-4884-952F-60B6A58C3E34}"/>
+          <p:cNvPr id="18" name="Straight Connector 17">
+            <a:extLst>
+              <a:ext uri="{FF2B5EF4-FFF2-40B4-BE49-F238E27FC236}">
+                <a16:creationId xmlns:a16="http://schemas.microsoft.com/office/drawing/2014/main" id="{67639EF4-FA83-4D85-90FE-B831AF283896}"/>
               </a:ext>
               <a:ext uri="{C183D7F6-B498-43B3-948B-1728B52AA6E4}">
                 <adec:decorative xmlns:adec="http://schemas.microsoft.com/office/drawing/2017/decorative" val="1"/>
@@ -10886,6 +8730,54 @@
             <a:schemeClr val="accent1"/>
           </a:fillRef>
           <a:effectRef idx="0">
+            <a:schemeClr val="accent1"/>
+          </a:effectRef>
+          <a:fontRef idx="minor">
+            <a:schemeClr val="tx1"/>
+          </a:fontRef>
+        </p:style>
+      </p:cxnSp>
+      <p:cxnSp>
+        <p:nvCxnSpPr>
+          <p:cNvPr id="20" name="Straight Connector 19">
+            <a:extLst>
+              <a:ext uri="{FF2B5EF4-FFF2-40B4-BE49-F238E27FC236}">
+                <a16:creationId xmlns:a16="http://schemas.microsoft.com/office/drawing/2014/main" id="{CC87E76A-8F50-413D-9BFC-C5A1525BD9BC}"/>
+              </a:ext>
+              <a:ext uri="{C183D7F6-B498-43B3-948B-1728B52AA6E4}">
+                <adec:decorative xmlns:adec="http://schemas.microsoft.com/office/drawing/2017/decorative" val="1"/>
+              </a:ext>
+            </a:extLst>
+          </p:cNvPr>
+          <p:cNvCxnSpPr>
+            <a:cxnSpLocks noGrp="1" noRot="1" noChangeAspect="1" noMove="1" noResize="1" noEditPoints="1" noAdjustHandles="1" noChangeArrowheads="1" noChangeShapeType="1"/>
+          </p:cNvCxnSpPr>
+          <p:nvPr>
+            <p:extLst>
+              <p:ext uri="{386F3935-93C4-4BCD-93E2-E3B085C9AB24}">
+                <p16:designElem xmlns:p16="http://schemas.microsoft.com/office/powerpoint/2015/main" val="1"/>
+              </p:ext>
+            </p:extLst>
+          </p:nvPr>
+        </p:nvCxnSpPr>
+        <p:spPr>
+          <a:xfrm>
+            <a:off x="2417780" y="3528542"/>
+            <a:ext cx="8637072" cy="0"/>
+          </a:xfrm>
+          <a:prstGeom prst="line">
+            <a:avLst/>
+          </a:prstGeom>
+          <a:ln w="31750"/>
+        </p:spPr>
+        <p:style>
+          <a:lnRef idx="3">
+            <a:schemeClr val="accent1"/>
+          </a:lnRef>
+          <a:fillRef idx="0">
+            <a:schemeClr val="accent1"/>
+          </a:fillRef>
+          <a:effectRef idx="2">
             <a:schemeClr val="accent1"/>
           </a:effectRef>
           <a:fontRef idx="minor">
@@ -10895,10 +8787,10 @@
       </p:cxnSp>
       <p:sp useBgFill="1">
         <p:nvSpPr>
-          <p:cNvPr id="14" name="Rectangle 13">
-            <a:extLst>
-              <a:ext uri="{FF2B5EF4-FFF2-40B4-BE49-F238E27FC236}">
-                <a16:creationId xmlns:a16="http://schemas.microsoft.com/office/drawing/2014/main" id="{62C9703D-C8F9-44AD-A7C0-C2F3871F8C1B}"/>
+          <p:cNvPr id="22" name="Rectangle 21">
+            <a:extLst>
+              <a:ext uri="{FF2B5EF4-FFF2-40B4-BE49-F238E27FC236}">
+                <a16:creationId xmlns:a16="http://schemas.microsoft.com/office/drawing/2014/main" id="{9A1C6278-B7D5-4E8E-B4DC-834832980565}"/>
               </a:ext>
               <a:ext uri="{C183D7F6-B498-43B3-948B-1728B52AA6E4}">
                 <adec:decorative xmlns:adec="http://schemas.microsoft.com/office/drawing/2017/decorative" val="1"/>
@@ -10918,8 +8810,8 @@
         </p:nvSpPr>
         <p:spPr>
           <a:xfrm>
-            <a:off x="0" y="0"/>
-            <a:ext cx="12192000" cy="6160168"/>
+            <a:off x="2" y="0"/>
+            <a:ext cx="12191695" cy="6858000"/>
           </a:xfrm>
           <a:prstGeom prst="rect">
             <a:avLst/>
@@ -10953,12 +8845,153 @@
           </a:p>
         </p:txBody>
       </p:sp>
+      <p:sp>
+        <p:nvSpPr>
+          <p:cNvPr id="24" name="Rectangle 23">
+            <a:extLst>
+              <a:ext uri="{FF2B5EF4-FFF2-40B4-BE49-F238E27FC236}">
+                <a16:creationId xmlns:a16="http://schemas.microsoft.com/office/drawing/2014/main" id="{C007F3D3-099E-430E-8754-C084D0FA5FE3}"/>
+              </a:ext>
+              <a:ext uri="{C183D7F6-B498-43B3-948B-1728B52AA6E4}">
+                <adec:decorative xmlns:adec="http://schemas.microsoft.com/office/drawing/2017/decorative" val="1"/>
+              </a:ext>
+            </a:extLst>
+          </p:cNvPr>
+          <p:cNvSpPr>
+            <a:spLocks noGrp="1" noRot="1" noChangeAspect="1" noMove="1" noResize="1" noEditPoints="1" noAdjustHandles="1" noChangeArrowheads="1" noChangeShapeType="1" noTextEdit="1"/>
+          </p:cNvSpPr>
+          <p:nvPr>
+            <p:extLst>
+              <p:ext uri="{386F3935-93C4-4BCD-93E2-E3B085C9AB24}">
+                <p16:designElem xmlns:p16="http://schemas.microsoft.com/office/powerpoint/2015/main" val="1"/>
+              </p:ext>
+            </p:extLst>
+          </p:nvPr>
+        </p:nvSpPr>
+        <p:spPr>
+          <a:xfrm>
+            <a:off x="0" y="2019476"/>
+            <a:ext cx="12192000" cy="4105941"/>
+          </a:xfrm>
+          <a:prstGeom prst="rect">
+            <a:avLst/>
+          </a:prstGeom>
+          <a:gradFill flip="none" rotWithShape="1">
+            <a:gsLst>
+              <a:gs pos="0">
+                <a:schemeClr val="bg2">
+                  <a:alpha val="0"/>
+                </a:schemeClr>
+              </a:gs>
+              <a:gs pos="100000">
+                <a:schemeClr val="bg2"/>
+              </a:gs>
+            </a:gsLst>
+            <a:lin ang="5400000" scaled="0"/>
+            <a:tileRect/>
+          </a:gradFill>
+          <a:ln>
+            <a:noFill/>
+          </a:ln>
+        </p:spPr>
+        <p:style>
+          <a:lnRef idx="2">
+            <a:schemeClr val="accent1">
+              <a:shade val="50000"/>
+            </a:schemeClr>
+          </a:lnRef>
+          <a:fillRef idx="1">
+            <a:schemeClr val="accent1"/>
+          </a:fillRef>
+          <a:effectRef idx="0">
+            <a:schemeClr val="accent1"/>
+          </a:effectRef>
+          <a:fontRef idx="minor">
+            <a:schemeClr val="lt1"/>
+          </a:fontRef>
+        </p:style>
+        <p:txBody>
+          <a:bodyPr rtlCol="0" anchor="ctr"/>
+          <a:lstStyle/>
+          <a:p>
+            <a:pPr lvl="0" algn="ctr"/>
+            <a:endParaRPr lang="en-US"/>
+          </a:p>
+        </p:txBody>
+      </p:sp>
+      <p:sp>
+        <p:nvSpPr>
+          <p:cNvPr id="2" name="Title 1">
+            <a:extLst>
+              <a:ext uri="{FF2B5EF4-FFF2-40B4-BE49-F238E27FC236}">
+                <a16:creationId xmlns:a16="http://schemas.microsoft.com/office/drawing/2014/main" id="{13CFD6D8-D4CB-7D22-6034-0448D726F997}"/>
+              </a:ext>
+            </a:extLst>
+          </p:cNvPr>
+          <p:cNvSpPr>
+            <a:spLocks noGrp="1"/>
+          </p:cNvSpPr>
+          <p:nvPr>
+            <p:ph type="title"/>
+          </p:nvPr>
+        </p:nvSpPr>
+        <p:spPr>
+          <a:xfrm>
+            <a:off x="1776729" y="4459039"/>
+            <a:ext cx="8643011" cy="551528"/>
+          </a:xfrm>
+        </p:spPr>
+        <p:txBody>
+          <a:bodyPr vert="horz" lIns="91440" tIns="45720" rIns="91440" bIns="0" rtlCol="0" anchor="b">
+            <a:normAutofit/>
+          </a:bodyPr>
+          <a:lstStyle/>
+          <a:p>
+            <a:r>
+              <a:rPr lang="en-US" sz="3600"/>
+              <a:t>Vlajk Sándor - Fejlesztés</a:t>
+            </a:r>
+          </a:p>
+        </p:txBody>
+      </p:sp>
       <p:pic>
         <p:nvPicPr>
-          <p:cNvPr id="3" name="Kép 2" descr="A képen szöveg, képernyőkép, menü látható&#10;&#10;Előfordulhat, hogy az AI által létrehozott tartalom helytelen.">
-            <a:extLst>
-              <a:ext uri="{FF2B5EF4-FFF2-40B4-BE49-F238E27FC236}">
-                <a16:creationId xmlns:a16="http://schemas.microsoft.com/office/drawing/2014/main" id="{C1C22A62-A598-64EA-AD0C-853A69A68E81}"/>
+          <p:cNvPr id="5" name="Content Placeholder 4">
+            <a:extLst>
+              <a:ext uri="{FF2B5EF4-FFF2-40B4-BE49-F238E27FC236}">
+                <a16:creationId xmlns:a16="http://schemas.microsoft.com/office/drawing/2014/main" id="{D328A2F4-206A-9FAD-C168-CDB9610FB783}"/>
+              </a:ext>
+            </a:extLst>
+          </p:cNvPr>
+          <p:cNvPicPr>
+            <a:picLocks noGrp="1" noChangeAspect="1"/>
+          </p:cNvPicPr>
+          <p:nvPr>
+            <p:ph idx="1"/>
+          </p:nvPr>
+        </p:nvPicPr>
+        <p:blipFill>
+          <a:blip r:embed="rId3"/>
+          <a:stretch>
+            <a:fillRect/>
+          </a:stretch>
+        </p:blipFill>
+        <p:spPr>
+          <a:xfrm>
+            <a:off x="984120" y="198045"/>
+            <a:ext cx="4106012" cy="3007654"/>
+          </a:xfrm>
+          <a:prstGeom prst="rect">
+            <a:avLst/>
+          </a:prstGeom>
+        </p:spPr>
+      </p:pic>
+      <p:pic>
+        <p:nvPicPr>
+          <p:cNvPr id="7" name="Picture 6">
+            <a:extLst>
+              <a:ext uri="{FF2B5EF4-FFF2-40B4-BE49-F238E27FC236}">
+                <a16:creationId xmlns:a16="http://schemas.microsoft.com/office/drawing/2014/main" id="{AA8CF25F-105A-EA84-AB38-9B2CDC7B3277}"/>
               </a:ext>
             </a:extLst>
           </p:cNvPr>
@@ -10968,28 +9001,203 @@
           <p:nvPr/>
         </p:nvPicPr>
         <p:blipFill>
-          <a:blip r:embed="rId3">
-            <a:extLst>
-              <a:ext uri="{28A0092B-C50C-407E-A947-70E740481C1C}">
-                <a14:useLocalDpi xmlns:a14="http://schemas.microsoft.com/office/drawing/2010/main" val="0"/>
-              </a:ext>
-            </a:extLst>
-          </a:blip>
+          <a:blip r:embed="rId4"/>
           <a:stretch>
             <a:fillRect/>
           </a:stretch>
         </p:blipFill>
         <p:spPr>
           <a:xfrm>
-            <a:off x="1410722" y="737347"/>
-            <a:ext cx="9370556" cy="5388070"/>
+            <a:off x="6074249" y="638316"/>
+            <a:ext cx="5549025" cy="3079707"/>
           </a:xfrm>
           <a:prstGeom prst="rect">
             <a:avLst/>
           </a:prstGeom>
         </p:spPr>
       </p:pic>
+      <p:pic>
+        <p:nvPicPr>
+          <p:cNvPr id="9" name="Picture 8">
+            <a:extLst>
+              <a:ext uri="{FF2B5EF4-FFF2-40B4-BE49-F238E27FC236}">
+                <a16:creationId xmlns:a16="http://schemas.microsoft.com/office/drawing/2014/main" id="{07C5DCCD-B4B3-22CE-2C2A-CC1050E657B0}"/>
+              </a:ext>
+            </a:extLst>
+          </p:cNvPr>
+          <p:cNvPicPr>
+            <a:picLocks noChangeAspect="1"/>
+          </p:cNvPicPr>
+          <p:nvPr/>
+        </p:nvPicPr>
+        <p:blipFill>
+          <a:blip r:embed="rId5"/>
+          <a:stretch>
+            <a:fillRect/>
+          </a:stretch>
+        </p:blipFill>
+        <p:spPr>
+          <a:xfrm>
+            <a:off x="1343846" y="3271561"/>
+            <a:ext cx="3386560" cy="1121616"/>
+          </a:xfrm>
+          <a:prstGeom prst="rect">
+            <a:avLst/>
+          </a:prstGeom>
+        </p:spPr>
+      </p:pic>
+      <p:cxnSp>
+        <p:nvCxnSpPr>
+          <p:cNvPr id="26" name="Straight Connector 25">
+            <a:extLst>
+              <a:ext uri="{FF2B5EF4-FFF2-40B4-BE49-F238E27FC236}">
+                <a16:creationId xmlns:a16="http://schemas.microsoft.com/office/drawing/2014/main" id="{6B9EA5DA-6DFD-447D-B8F9-CB95CA114076}"/>
+              </a:ext>
+              <a:ext uri="{C183D7F6-B498-43B3-948B-1728B52AA6E4}">
+                <adec:decorative xmlns:adec="http://schemas.microsoft.com/office/drawing/2017/decorative" val="1"/>
+              </a:ext>
+            </a:extLst>
+          </p:cNvPr>
+          <p:cNvCxnSpPr>
+            <a:cxnSpLocks noGrp="1" noRot="1" noChangeAspect="1" noMove="1" noResize="1" noEditPoints="1" noAdjustHandles="1" noChangeArrowheads="1" noChangeShapeType="1"/>
+          </p:cNvCxnSpPr>
+          <p:nvPr>
+            <p:extLst>
+              <p:ext uri="{386F3935-93C4-4BCD-93E2-E3B085C9AB24}">
+                <p16:designElem xmlns:p16="http://schemas.microsoft.com/office/powerpoint/2015/main" val="1"/>
+              </p:ext>
+            </p:extLst>
+          </p:nvPr>
+        </p:nvCxnSpPr>
+        <p:spPr>
+          <a:xfrm>
+            <a:off x="1776728" y="5027185"/>
+            <a:ext cx="8643011" cy="0"/>
+          </a:xfrm>
+          <a:prstGeom prst="line">
+            <a:avLst/>
+          </a:prstGeom>
+          <a:ln w="31750"/>
+        </p:spPr>
+        <p:style>
+          <a:lnRef idx="3">
+            <a:schemeClr val="accent1"/>
+          </a:lnRef>
+          <a:fillRef idx="0">
+            <a:schemeClr val="accent1"/>
+          </a:fillRef>
+          <a:effectRef idx="2">
+            <a:schemeClr val="accent1"/>
+          </a:effectRef>
+          <a:fontRef idx="minor">
+            <a:schemeClr val="tx1"/>
+          </a:fontRef>
+        </p:style>
+      </p:cxnSp>
+      <p:pic>
+        <p:nvPicPr>
+          <p:cNvPr id="28" name="Picture 27">
+            <a:extLst>
+              <a:ext uri="{FF2B5EF4-FFF2-40B4-BE49-F238E27FC236}">
+                <a16:creationId xmlns:a16="http://schemas.microsoft.com/office/drawing/2014/main" id="{87612EF9-94E7-42BA-B4A9-4B38643FBAF7}"/>
+              </a:ext>
+              <a:ext uri="{C183D7F6-B498-43B3-948B-1728B52AA6E4}">
+                <adec:decorative xmlns:adec="http://schemas.microsoft.com/office/drawing/2017/decorative" val="1"/>
+              </a:ext>
+            </a:extLst>
+          </p:cNvPr>
+          <p:cNvPicPr>
+            <a:picLocks noGrp="1" noRot="1" noChangeAspect="1" noMove="1" noResize="1" noEditPoints="1" noAdjustHandles="1" noChangeArrowheads="1" noChangeShapeType="1" noCrop="1"/>
+          </p:cNvPicPr>
+          <p:nvPr>
+            <p:extLst>
+              <p:ext uri="{386F3935-93C4-4BCD-93E2-E3B085C9AB24}">
+                <p16:designElem xmlns:p16="http://schemas.microsoft.com/office/powerpoint/2015/main" val="1"/>
+              </p:ext>
+            </p:extLst>
+          </p:nvPr>
+        </p:nvPicPr>
+        <p:blipFill rotWithShape="1">
+          <a:blip r:embed="rId2">
+            <a:extLst>
+              <a:ext uri="{28A0092B-C50C-407E-A947-70E740481C1C}">
+                <a14:useLocalDpi xmlns:a14="http://schemas.microsoft.com/office/drawing/2010/main" val="0"/>
+              </a:ext>
+            </a:extLst>
+          </a:blip>
+          <a:srcRect t="1538" b="-1538"/>
+          <a:stretch/>
+        </p:blipFill>
+        <p:spPr bwMode="black">
+          <a:xfrm>
+            <a:off x="0" y="6126480"/>
+            <a:ext cx="12192000" cy="742950"/>
+          </a:xfrm>
+          <a:prstGeom prst="rect">
+            <a:avLst/>
+          </a:prstGeom>
+        </p:spPr>
+      </p:pic>
+      <p:cxnSp>
+        <p:nvCxnSpPr>
+          <p:cNvPr id="30" name="Straight Connector 29">
+            <a:extLst>
+              <a:ext uri="{FF2B5EF4-FFF2-40B4-BE49-F238E27FC236}">
+                <a16:creationId xmlns:a16="http://schemas.microsoft.com/office/drawing/2014/main" id="{9E597F0B-0A17-4BF2-A904-9D99811F3E2E}"/>
+              </a:ext>
+              <a:ext uri="{C183D7F6-B498-43B3-948B-1728B52AA6E4}">
+                <adec:decorative xmlns:adec="http://schemas.microsoft.com/office/drawing/2017/decorative" val="1"/>
+              </a:ext>
+            </a:extLst>
+          </p:cNvPr>
+          <p:cNvCxnSpPr>
+            <a:cxnSpLocks noGrp="1" noRot="1" noChangeAspect="1" noMove="1" noResize="1" noEditPoints="1" noAdjustHandles="1" noChangeArrowheads="1" noChangeShapeType="1"/>
+          </p:cNvCxnSpPr>
+          <p:nvPr>
+            <p:extLst>
+              <p:ext uri="{386F3935-93C4-4BCD-93E2-E3B085C9AB24}">
+                <p16:designElem xmlns:p16="http://schemas.microsoft.com/office/powerpoint/2015/main" val="1"/>
+              </p:ext>
+            </p:extLst>
+          </p:nvPr>
+        </p:nvCxnSpPr>
+        <p:spPr>
+          <a:xfrm>
+            <a:off x="0" y="6128413"/>
+            <a:ext cx="12192000" cy="0"/>
+          </a:xfrm>
+          <a:prstGeom prst="line">
+            <a:avLst/>
+          </a:prstGeom>
+          <a:ln w="12700">
+            <a:solidFill>
+              <a:srgbClr val="000001">
+                <a:alpha val="20000"/>
+              </a:srgbClr>
+            </a:solidFill>
+          </a:ln>
+        </p:spPr>
+        <p:style>
+          <a:lnRef idx="1">
+            <a:schemeClr val="accent1"/>
+          </a:lnRef>
+          <a:fillRef idx="0">
+            <a:schemeClr val="accent1"/>
+          </a:fillRef>
+          <a:effectRef idx="0">
+            <a:schemeClr val="accent1"/>
+          </a:effectRef>
+          <a:fontRef idx="minor">
+            <a:schemeClr val="tx1"/>
+          </a:fontRef>
+        </p:style>
+      </p:cxnSp>
     </p:spTree>
+    <p:extLst>
+      <p:ext uri="{BB962C8B-B14F-4D97-AF65-F5344CB8AC3E}">
+        <p14:creationId xmlns:p14="http://schemas.microsoft.com/office/powerpoint/2010/main" val="3079083219"/>
+      </p:ext>
+    </p:extLst>
   </p:cSld>
   <p:clrMapOvr>
     <a:masterClrMapping/>
@@ -11000,6 +9208,30 @@
 <file path=ppt/slides/slide21.xml><?xml version="1.0" encoding="utf-8"?>
 <p:sld xmlns:a="http://schemas.openxmlformats.org/drawingml/2006/main" xmlns:r="http://schemas.openxmlformats.org/officeDocument/2006/relationships" xmlns:p="http://schemas.openxmlformats.org/presentationml/2006/main">
   <p:cSld>
+    <p:bg>
+      <p:bgPr>
+        <a:gradFill rotWithShape="1">
+          <a:gsLst>
+            <a:gs pos="0">
+              <a:schemeClr val="bg2">
+                <a:tint val="94000"/>
+                <a:satMod val="80000"/>
+                <a:lumMod val="106000"/>
+              </a:schemeClr>
+            </a:gs>
+            <a:gs pos="100000">
+              <a:schemeClr val="bg2">
+                <a:shade val="80000"/>
+              </a:schemeClr>
+            </a:gs>
+          </a:gsLst>
+          <a:path path="circle">
+            <a:fillToRect l="43000" r="43000" b="100000"/>
+          </a:path>
+        </a:gradFill>
+        <a:effectLst/>
+      </p:bgPr>
+    </p:bg>
     <p:spTree>
       <p:nvGrpSpPr>
         <p:cNvPr id="1" name=""/>
@@ -11016,142 +9248,636 @@
       </p:grpSpPr>
       <p:sp>
         <p:nvSpPr>
-          <p:cNvPr id="3" name="Cím 1"/>
+          <p:cNvPr id="17" name="Rectangle 16">
+            <a:extLst>
+              <a:ext uri="{FF2B5EF4-FFF2-40B4-BE49-F238E27FC236}">
+                <a16:creationId xmlns:a16="http://schemas.microsoft.com/office/drawing/2014/main" id="{E724B9E8-02C8-4B2E-8770-A00A67760DF0}"/>
+              </a:ext>
+              <a:ext uri="{C183D7F6-B498-43B3-948B-1728B52AA6E4}">
+                <adec:decorative xmlns:adec="http://schemas.microsoft.com/office/drawing/2017/decorative" val="1"/>
+              </a:ext>
+            </a:extLst>
+          </p:cNvPr>
           <p:cNvSpPr>
-            <a:spLocks noGrp="1"/>
+            <a:spLocks noGrp="1" noRot="1" noChangeAspect="1" noMove="1" noResize="1" noEditPoints="1" noAdjustHandles="1" noChangeArrowheads="1" noChangeShapeType="1" noTextEdit="1"/>
           </p:cNvSpPr>
           <p:nvPr>
-            <p:ph type="title"/>
+            <p:extLst>
+              <p:ext uri="{386F3935-93C4-4BCD-93E2-E3B085C9AB24}">
+                <p16:designElem xmlns:p16="http://schemas.microsoft.com/office/powerpoint/2015/main" val="1"/>
+              </p:ext>
+            </p:extLst>
           </p:nvPr>
         </p:nvSpPr>
         <p:spPr>
           <a:xfrm>
-            <a:off x="1451579" y="1293962"/>
-            <a:ext cx="9603275" cy="559792"/>
-          </a:xfrm>
-        </p:spPr>
+            <a:off x="0" y="2019476"/>
+            <a:ext cx="12192000" cy="4105941"/>
+          </a:xfrm>
+          <a:prstGeom prst="rect">
+            <a:avLst/>
+          </a:prstGeom>
+          <a:gradFill flip="none" rotWithShape="1">
+            <a:gsLst>
+              <a:gs pos="0">
+                <a:schemeClr val="bg2">
+                  <a:alpha val="0"/>
+                </a:schemeClr>
+              </a:gs>
+              <a:gs pos="100000">
+                <a:schemeClr val="bg2"/>
+              </a:gs>
+            </a:gsLst>
+            <a:lin ang="5400000" scaled="0"/>
+            <a:tileRect/>
+          </a:gradFill>
+          <a:ln>
+            <a:noFill/>
+          </a:ln>
+        </p:spPr>
+        <p:style>
+          <a:lnRef idx="2">
+            <a:schemeClr val="accent1">
+              <a:shade val="50000"/>
+            </a:schemeClr>
+          </a:lnRef>
+          <a:fillRef idx="1">
+            <a:schemeClr val="accent1"/>
+          </a:fillRef>
+          <a:effectRef idx="0">
+            <a:schemeClr val="accent1"/>
+          </a:effectRef>
+          <a:fontRef idx="minor">
+            <a:schemeClr val="lt1"/>
+          </a:fontRef>
+        </p:style>
         <p:txBody>
-          <a:bodyPr>
-            <a:normAutofit/>
-          </a:bodyPr>
+          <a:bodyPr/>
           <a:lstStyle/>
           <a:p>
-            <a:r>
-              <a:rPr lang="hu-HU" dirty="0"/>
-              <a:t>Czeitner András - Dokumentáció</a:t>
-            </a:r>
+            <a:endParaRPr lang="en-US"/>
+          </a:p>
+        </p:txBody>
+      </p:sp>
+      <p:pic>
+        <p:nvPicPr>
+          <p:cNvPr id="19" name="Picture 18">
+            <a:extLst>
+              <a:ext uri="{FF2B5EF4-FFF2-40B4-BE49-F238E27FC236}">
+                <a16:creationId xmlns:a16="http://schemas.microsoft.com/office/drawing/2014/main" id="{7B8AE548-0BFA-4792-9962-3375923C7635}"/>
+              </a:ext>
+              <a:ext uri="{C183D7F6-B498-43B3-948B-1728B52AA6E4}">
+                <adec:decorative xmlns:adec="http://schemas.microsoft.com/office/drawing/2017/decorative" val="1"/>
+              </a:ext>
+            </a:extLst>
+          </p:cNvPr>
+          <p:cNvPicPr>
+            <a:picLocks noGrp="1" noRot="1" noChangeAspect="1" noMove="1" noResize="1" noEditPoints="1" noAdjustHandles="1" noChangeArrowheads="1" noChangeShapeType="1" noCrop="1"/>
+          </p:cNvPicPr>
+          <p:nvPr>
+            <p:extLst>
+              <p:ext uri="{386F3935-93C4-4BCD-93E2-E3B085C9AB24}">
+                <p16:designElem xmlns:p16="http://schemas.microsoft.com/office/powerpoint/2015/main" val="1"/>
+              </p:ext>
+            </p:extLst>
+          </p:nvPr>
+        </p:nvPicPr>
+        <p:blipFill rotWithShape="1">
+          <a:blip r:embed="rId2">
+            <a:extLst>
+              <a:ext uri="{28A0092B-C50C-407E-A947-70E740481C1C}">
+                <a14:useLocalDpi xmlns:a14="http://schemas.microsoft.com/office/drawing/2010/main" val="0"/>
+              </a:ext>
+            </a:extLst>
+          </a:blip>
+          <a:srcRect t="1538" b="-1538"/>
+          <a:stretch/>
+        </p:blipFill>
+        <p:spPr bwMode="black">
+          <a:xfrm>
+            <a:off x="0" y="6126480"/>
+            <a:ext cx="12192000" cy="742950"/>
+          </a:xfrm>
+          <a:prstGeom prst="rect">
+            <a:avLst/>
+          </a:prstGeom>
+        </p:spPr>
+      </p:pic>
+      <p:cxnSp>
+        <p:nvCxnSpPr>
+          <p:cNvPr id="21" name="Straight Connector 20">
+            <a:extLst>
+              <a:ext uri="{FF2B5EF4-FFF2-40B4-BE49-F238E27FC236}">
+                <a16:creationId xmlns:a16="http://schemas.microsoft.com/office/drawing/2014/main" id="{67639EF4-FA83-4D85-90FE-B831AF283896}"/>
+              </a:ext>
+              <a:ext uri="{C183D7F6-B498-43B3-948B-1728B52AA6E4}">
+                <adec:decorative xmlns:adec="http://schemas.microsoft.com/office/drawing/2017/decorative" val="1"/>
+              </a:ext>
+            </a:extLst>
+          </p:cNvPr>
+          <p:cNvCxnSpPr>
+            <a:cxnSpLocks noGrp="1" noRot="1" noChangeAspect="1" noMove="1" noResize="1" noEditPoints="1" noAdjustHandles="1" noChangeArrowheads="1" noChangeShapeType="1"/>
+          </p:cNvCxnSpPr>
+          <p:nvPr>
+            <p:extLst>
+              <p:ext uri="{386F3935-93C4-4BCD-93E2-E3B085C9AB24}">
+                <p16:designElem xmlns:p16="http://schemas.microsoft.com/office/powerpoint/2015/main" val="1"/>
+              </p:ext>
+            </p:extLst>
+          </p:nvPr>
+        </p:nvCxnSpPr>
+        <p:spPr>
+          <a:xfrm>
+            <a:off x="0" y="6128413"/>
+            <a:ext cx="12192000" cy="0"/>
+          </a:xfrm>
+          <a:prstGeom prst="line">
+            <a:avLst/>
+          </a:prstGeom>
+          <a:ln w="12700">
+            <a:solidFill>
+              <a:srgbClr val="000001">
+                <a:alpha val="20000"/>
+              </a:srgbClr>
+            </a:solidFill>
+          </a:ln>
+        </p:spPr>
+        <p:style>
+          <a:lnRef idx="1">
+            <a:schemeClr val="accent1"/>
+          </a:lnRef>
+          <a:fillRef idx="0">
+            <a:schemeClr val="accent1"/>
+          </a:fillRef>
+          <a:effectRef idx="0">
+            <a:schemeClr val="accent1"/>
+          </a:effectRef>
+          <a:fontRef idx="minor">
+            <a:schemeClr val="tx1"/>
+          </a:fontRef>
+        </p:style>
+      </p:cxnSp>
+      <p:cxnSp>
+        <p:nvCxnSpPr>
+          <p:cNvPr id="23" name="Straight Connector 22">
+            <a:extLst>
+              <a:ext uri="{FF2B5EF4-FFF2-40B4-BE49-F238E27FC236}">
+                <a16:creationId xmlns:a16="http://schemas.microsoft.com/office/drawing/2014/main" id="{CC87E76A-8F50-413D-9BFC-C5A1525BD9BC}"/>
+              </a:ext>
+              <a:ext uri="{C183D7F6-B498-43B3-948B-1728B52AA6E4}">
+                <adec:decorative xmlns:adec="http://schemas.microsoft.com/office/drawing/2017/decorative" val="1"/>
+              </a:ext>
+            </a:extLst>
+          </p:cNvPr>
+          <p:cNvCxnSpPr>
+            <a:cxnSpLocks noGrp="1" noRot="1" noChangeAspect="1" noMove="1" noResize="1" noEditPoints="1" noAdjustHandles="1" noChangeArrowheads="1" noChangeShapeType="1"/>
+          </p:cNvCxnSpPr>
+          <p:nvPr>
+            <p:extLst>
+              <p:ext uri="{386F3935-93C4-4BCD-93E2-E3B085C9AB24}">
+                <p16:designElem xmlns:p16="http://schemas.microsoft.com/office/powerpoint/2015/main" val="1"/>
+              </p:ext>
+            </p:extLst>
+          </p:nvPr>
+        </p:nvCxnSpPr>
+        <p:spPr>
+          <a:xfrm>
+            <a:off x="2417780" y="3528542"/>
+            <a:ext cx="8637072" cy="0"/>
+          </a:xfrm>
+          <a:prstGeom prst="line">
+            <a:avLst/>
+          </a:prstGeom>
+          <a:ln w="31750"/>
+        </p:spPr>
+        <p:style>
+          <a:lnRef idx="3">
+            <a:schemeClr val="accent1"/>
+          </a:lnRef>
+          <a:fillRef idx="0">
+            <a:schemeClr val="accent1"/>
+          </a:fillRef>
+          <a:effectRef idx="2">
+            <a:schemeClr val="accent1"/>
+          </a:effectRef>
+          <a:fontRef idx="minor">
+            <a:schemeClr val="tx1"/>
+          </a:fontRef>
+        </p:style>
+      </p:cxnSp>
+      <p:sp useBgFill="1">
+        <p:nvSpPr>
+          <p:cNvPr id="25" name="Rectangle 24">
+            <a:extLst>
+              <a:ext uri="{FF2B5EF4-FFF2-40B4-BE49-F238E27FC236}">
+                <a16:creationId xmlns:a16="http://schemas.microsoft.com/office/drawing/2014/main" id="{9A1C6278-B7D5-4E8E-B4DC-834832980565}"/>
+              </a:ext>
+              <a:ext uri="{C183D7F6-B498-43B3-948B-1728B52AA6E4}">
+                <adec:decorative xmlns:adec="http://schemas.microsoft.com/office/drawing/2017/decorative" val="1"/>
+              </a:ext>
+            </a:extLst>
+          </p:cNvPr>
+          <p:cNvSpPr>
+            <a:spLocks noGrp="1" noRot="1" noChangeAspect="1" noMove="1" noResize="1" noEditPoints="1" noAdjustHandles="1" noChangeArrowheads="1" noChangeShapeType="1" noTextEdit="1"/>
+          </p:cNvSpPr>
+          <p:nvPr>
+            <p:extLst>
+              <p:ext uri="{386F3935-93C4-4BCD-93E2-E3B085C9AB24}">
+                <p16:designElem xmlns:p16="http://schemas.microsoft.com/office/powerpoint/2015/main" val="1"/>
+              </p:ext>
+            </p:extLst>
+          </p:nvPr>
+        </p:nvSpPr>
+        <p:spPr>
+          <a:xfrm>
+            <a:off x="2" y="0"/>
+            <a:ext cx="12191695" cy="6858000"/>
+          </a:xfrm>
+          <a:prstGeom prst="rect">
+            <a:avLst/>
+          </a:prstGeom>
+          <a:ln>
+            <a:noFill/>
+          </a:ln>
+        </p:spPr>
+        <p:style>
+          <a:lnRef idx="2">
+            <a:schemeClr val="accent1">
+              <a:shade val="50000"/>
+            </a:schemeClr>
+          </a:lnRef>
+          <a:fillRef idx="1">
+            <a:schemeClr val="accent1"/>
+          </a:fillRef>
+          <a:effectRef idx="0">
+            <a:schemeClr val="accent1"/>
+          </a:effectRef>
+          <a:fontRef idx="minor">
+            <a:schemeClr val="lt1"/>
+          </a:fontRef>
+        </p:style>
+        <p:txBody>
+          <a:bodyPr rtlCol="0" anchor="ctr"/>
+          <a:lstStyle/>
+          <a:p>
+            <a:pPr algn="ctr"/>
+            <a:endParaRPr lang="en-US"/>
           </a:p>
         </p:txBody>
       </p:sp>
       <p:sp>
         <p:nvSpPr>
-          <p:cNvPr id="36866" name="AutoShape 2" descr="image.png"/>
+          <p:cNvPr id="27" name="Rectangle 26">
+            <a:extLst>
+              <a:ext uri="{FF2B5EF4-FFF2-40B4-BE49-F238E27FC236}">
+                <a16:creationId xmlns:a16="http://schemas.microsoft.com/office/drawing/2014/main" id="{C007F3D3-099E-430E-8754-C084D0FA5FE3}"/>
+              </a:ext>
+              <a:ext uri="{C183D7F6-B498-43B3-948B-1728B52AA6E4}">
+                <adec:decorative xmlns:adec="http://schemas.microsoft.com/office/drawing/2017/decorative" val="1"/>
+              </a:ext>
+            </a:extLst>
+          </p:cNvPr>
           <p:cNvSpPr>
-            <a:spLocks noChangeAspect="1" noChangeArrowheads="1"/>
+            <a:spLocks noGrp="1" noRot="1" noChangeAspect="1" noMove="1" noResize="1" noEditPoints="1" noAdjustHandles="1" noChangeArrowheads="1" noChangeShapeType="1" noTextEdit="1"/>
           </p:cNvSpPr>
-          <p:nvPr/>
+          <p:nvPr>
+            <p:extLst>
+              <p:ext uri="{386F3935-93C4-4BCD-93E2-E3B085C9AB24}">
+                <p16:designElem xmlns:p16="http://schemas.microsoft.com/office/powerpoint/2015/main" val="1"/>
+              </p:ext>
+            </p:extLst>
+          </p:nvPr>
         </p:nvSpPr>
-        <p:spPr bwMode="auto">
-          <a:xfrm>
-            <a:off x="155575" y="-144463"/>
-            <a:ext cx="304800" cy="304801"/>
+        <p:spPr>
+          <a:xfrm>
+            <a:off x="0" y="2019476"/>
+            <a:ext cx="12192000" cy="4105941"/>
           </a:xfrm>
           <a:prstGeom prst="rect">
             <a:avLst/>
           </a:prstGeom>
-          <a:noFill/>
-        </p:spPr>
+          <a:gradFill flip="none" rotWithShape="1">
+            <a:gsLst>
+              <a:gs pos="0">
+                <a:schemeClr val="bg2">
+                  <a:alpha val="0"/>
+                </a:schemeClr>
+              </a:gs>
+              <a:gs pos="100000">
+                <a:schemeClr val="bg2"/>
+              </a:gs>
+            </a:gsLst>
+            <a:lin ang="5400000" scaled="0"/>
+            <a:tileRect/>
+          </a:gradFill>
+          <a:ln>
+            <a:noFill/>
+          </a:ln>
+        </p:spPr>
+        <p:style>
+          <a:lnRef idx="2">
+            <a:schemeClr val="accent1">
+              <a:shade val="50000"/>
+            </a:schemeClr>
+          </a:lnRef>
+          <a:fillRef idx="1">
+            <a:schemeClr val="accent1"/>
+          </a:fillRef>
+          <a:effectRef idx="0">
+            <a:schemeClr val="accent1"/>
+          </a:effectRef>
+          <a:fontRef idx="minor">
+            <a:schemeClr val="lt1"/>
+          </a:fontRef>
+        </p:style>
         <p:txBody>
-          <a:bodyPr vert="horz" wrap="square" lIns="91440" tIns="45720" rIns="91440" bIns="45720" numCol="1" anchor="t" anchorCtr="0" compatLnSpc="1">
-            <a:prstTxWarp prst="textNoShape">
-              <a:avLst/>
-            </a:prstTxWarp>
+          <a:bodyPr rtlCol="0" anchor="ctr"/>
+          <a:lstStyle/>
+          <a:p>
+            <a:pPr lvl="0" algn="ctr"/>
+            <a:endParaRPr lang="en-US"/>
+          </a:p>
+        </p:txBody>
+      </p:sp>
+      <p:sp>
+        <p:nvSpPr>
+          <p:cNvPr id="2" name="Title 1">
+            <a:extLst>
+              <a:ext uri="{FF2B5EF4-FFF2-40B4-BE49-F238E27FC236}">
+                <a16:creationId xmlns:a16="http://schemas.microsoft.com/office/drawing/2014/main" id="{0C05D6E9-FB34-5D4E-D478-F5A8B0E7C25A}"/>
+              </a:ext>
+            </a:extLst>
+          </p:cNvPr>
+          <p:cNvSpPr>
+            <a:spLocks noGrp="1"/>
+          </p:cNvSpPr>
+          <p:nvPr>
+            <p:ph type="title"/>
+          </p:nvPr>
+        </p:nvSpPr>
+        <p:spPr>
+          <a:xfrm>
+            <a:off x="1776729" y="4459039"/>
+            <a:ext cx="8643011" cy="551528"/>
+          </a:xfrm>
+        </p:spPr>
+        <p:txBody>
+          <a:bodyPr vert="horz" lIns="91440" tIns="45720" rIns="91440" bIns="0" rtlCol="0" anchor="b">
+            <a:normAutofit/>
           </a:bodyPr>
           <a:lstStyle/>
           <a:p>
-            <a:endParaRPr lang="hu-HU"/>
+            <a:r>
+              <a:rPr lang="en-US" sz="3600"/>
+              <a:t>Vlajk Sándor - Fejlesztés</a:t>
+            </a:r>
           </a:p>
         </p:txBody>
       </p:sp>
       <p:pic>
         <p:nvPicPr>
-          <p:cNvPr id="36868" name="Picture 4" descr="https://cdn.discordapp.com/attachments/812059683393110017/1439314057965338706/image.png?ex=691a112c&amp;is=6918bfac&amp;hm=7ba02878b65b24707a6035b4243cccf8454e5cf2085eecb6b93cfa22d6fdcdf3&amp;"/>
+          <p:cNvPr id="7" name="Content Placeholder 6">
+            <a:extLst>
+              <a:ext uri="{FF2B5EF4-FFF2-40B4-BE49-F238E27FC236}">
+                <a16:creationId xmlns:a16="http://schemas.microsoft.com/office/drawing/2014/main" id="{5CAD100C-B467-C9FA-742C-83A81B896BF9}"/>
+              </a:ext>
+            </a:extLst>
+          </p:cNvPr>
           <p:cNvPicPr>
-            <a:picLocks noChangeAspect="1" noChangeArrowheads="1"/>
+            <a:picLocks noGrp="1" noChangeAspect="1"/>
           </p:cNvPicPr>
-          <p:nvPr/>
+          <p:nvPr>
+            <p:ph idx="1"/>
+          </p:nvPr>
         </p:nvPicPr>
         <p:blipFill>
-          <a:blip r:embed="rId2"/>
-          <a:srcRect/>
+          <a:blip r:embed="rId3"/>
           <a:stretch>
             <a:fillRect/>
           </a:stretch>
         </p:blipFill>
-        <p:spPr bwMode="auto">
-          <a:xfrm>
-            <a:off x="493983" y="2077111"/>
-            <a:ext cx="3839892" cy="3996423"/>
+        <p:spPr>
+          <a:xfrm>
+            <a:off x="813173" y="457201"/>
+            <a:ext cx="4934512" cy="2689308"/>
           </a:xfrm>
           <a:prstGeom prst="rect">
             <a:avLst/>
           </a:prstGeom>
-          <a:noFill/>
         </p:spPr>
       </p:pic>
       <p:pic>
         <p:nvPicPr>
-          <p:cNvPr id="36872" name="Picture 8" descr="https://cdn.discordapp.com/attachments/812059683393110017/1439314568546488421/Implementation-plan.png?ex=691a11a6&amp;is=6918c026&amp;hm=df378b1587e0da09569ce426a4f4a39b126cb5f94e9fae17b2eba004af3646a1&amp;"/>
+          <p:cNvPr id="12" name="Picture 11">
+            <a:extLst>
+              <a:ext uri="{FF2B5EF4-FFF2-40B4-BE49-F238E27FC236}">
+                <a16:creationId xmlns:a16="http://schemas.microsoft.com/office/drawing/2014/main" id="{31D188B4-F8EB-7281-F69A-9DE7E48DAAA3}"/>
+              </a:ext>
+            </a:extLst>
+          </p:cNvPr>
           <p:cNvPicPr>
-            <a:picLocks noChangeAspect="1" noChangeArrowheads="1"/>
-          </p:cNvPicPr>
-          <p:nvPr/>
-        </p:nvPicPr>
-        <p:blipFill>
-          <a:blip r:embed="rId3"/>
-          <a:srcRect/>
-          <a:stretch>
-            <a:fillRect/>
-          </a:stretch>
-        </p:blipFill>
-        <p:spPr bwMode="auto">
-          <a:xfrm>
-            <a:off x="4765675" y="2062389"/>
-            <a:ext cx="2806699" cy="3972162"/>
-          </a:xfrm>
-          <a:prstGeom prst="rect">
-            <a:avLst/>
-          </a:prstGeom>
-          <a:noFill/>
-        </p:spPr>
-      </p:pic>
-      <p:pic>
-        <p:nvPicPr>
-          <p:cNvPr id="36876" name="Picture 12" descr="https://cdn.discordapp.com/attachments/812059683393110017/1439314778895028354/image.png?ex=691a11d8&amp;is=6918c058&amp;hm=06ee2ab5f547cb8f7e1d96fd117710c01918934c8fe96653ace54ff3062c514c&amp;"/>
-          <p:cNvPicPr>
-            <a:picLocks noChangeAspect="1" noChangeArrowheads="1"/>
+            <a:picLocks noChangeAspect="1"/>
           </p:cNvPicPr>
           <p:nvPr/>
         </p:nvPicPr>
         <p:blipFill>
           <a:blip r:embed="rId4"/>
-          <a:srcRect/>
           <a:stretch>
             <a:fillRect/>
           </a:stretch>
         </p:blipFill>
-        <p:spPr bwMode="auto">
-          <a:xfrm>
-            <a:off x="7934325" y="2047874"/>
-            <a:ext cx="3651914" cy="4004233"/>
+        <p:spPr>
+          <a:xfrm>
+            <a:off x="6025216" y="1062951"/>
+            <a:ext cx="5517445" cy="2979420"/>
           </a:xfrm>
           <a:prstGeom prst="rect">
             <a:avLst/>
           </a:prstGeom>
-          <a:noFill/>
         </p:spPr>
       </p:pic>
+      <p:pic>
+        <p:nvPicPr>
+          <p:cNvPr id="9" name="Picture 8">
+            <a:extLst>
+              <a:ext uri="{FF2B5EF4-FFF2-40B4-BE49-F238E27FC236}">
+                <a16:creationId xmlns:a16="http://schemas.microsoft.com/office/drawing/2014/main" id="{D59158A9-81B7-7204-17BE-FD603E88906B}"/>
+              </a:ext>
+            </a:extLst>
+          </p:cNvPr>
+          <p:cNvPicPr>
+            <a:picLocks noChangeAspect="1"/>
+          </p:cNvPicPr>
+          <p:nvPr/>
+        </p:nvPicPr>
+        <p:blipFill>
+          <a:blip r:embed="rId5"/>
+          <a:stretch>
+            <a:fillRect/>
+          </a:stretch>
+        </p:blipFill>
+        <p:spPr>
+          <a:xfrm>
+            <a:off x="1566686" y="3252392"/>
+            <a:ext cx="3429598" cy="1251340"/>
+          </a:xfrm>
+          <a:prstGeom prst="rect">
+            <a:avLst/>
+          </a:prstGeom>
+        </p:spPr>
+      </p:pic>
+      <p:cxnSp>
+        <p:nvCxnSpPr>
+          <p:cNvPr id="29" name="Straight Connector 28">
+            <a:extLst>
+              <a:ext uri="{FF2B5EF4-FFF2-40B4-BE49-F238E27FC236}">
+                <a16:creationId xmlns:a16="http://schemas.microsoft.com/office/drawing/2014/main" id="{6B9EA5DA-6DFD-447D-B8F9-CB95CA114076}"/>
+              </a:ext>
+              <a:ext uri="{C183D7F6-B498-43B3-948B-1728B52AA6E4}">
+                <adec:decorative xmlns:adec="http://schemas.microsoft.com/office/drawing/2017/decorative" val="1"/>
+              </a:ext>
+            </a:extLst>
+          </p:cNvPr>
+          <p:cNvCxnSpPr>
+            <a:cxnSpLocks noGrp="1" noRot="1" noChangeAspect="1" noMove="1" noResize="1" noEditPoints="1" noAdjustHandles="1" noChangeArrowheads="1" noChangeShapeType="1"/>
+          </p:cNvCxnSpPr>
+          <p:nvPr>
+            <p:extLst>
+              <p:ext uri="{386F3935-93C4-4BCD-93E2-E3B085C9AB24}">
+                <p16:designElem xmlns:p16="http://schemas.microsoft.com/office/powerpoint/2015/main" val="1"/>
+              </p:ext>
+            </p:extLst>
+          </p:nvPr>
+        </p:nvCxnSpPr>
+        <p:spPr>
+          <a:xfrm>
+            <a:off x="1776728" y="5027185"/>
+            <a:ext cx="8643011" cy="0"/>
+          </a:xfrm>
+          <a:prstGeom prst="line">
+            <a:avLst/>
+          </a:prstGeom>
+          <a:ln w="31750"/>
+        </p:spPr>
+        <p:style>
+          <a:lnRef idx="3">
+            <a:schemeClr val="accent1"/>
+          </a:lnRef>
+          <a:fillRef idx="0">
+            <a:schemeClr val="accent1"/>
+          </a:fillRef>
+          <a:effectRef idx="2">
+            <a:schemeClr val="accent1"/>
+          </a:effectRef>
+          <a:fontRef idx="minor">
+            <a:schemeClr val="tx1"/>
+          </a:fontRef>
+        </p:style>
+      </p:cxnSp>
+      <p:pic>
+        <p:nvPicPr>
+          <p:cNvPr id="31" name="Picture 30">
+            <a:extLst>
+              <a:ext uri="{FF2B5EF4-FFF2-40B4-BE49-F238E27FC236}">
+                <a16:creationId xmlns:a16="http://schemas.microsoft.com/office/drawing/2014/main" id="{87612EF9-94E7-42BA-B4A9-4B38643FBAF7}"/>
+              </a:ext>
+              <a:ext uri="{C183D7F6-B498-43B3-948B-1728B52AA6E4}">
+                <adec:decorative xmlns:adec="http://schemas.microsoft.com/office/drawing/2017/decorative" val="1"/>
+              </a:ext>
+            </a:extLst>
+          </p:cNvPr>
+          <p:cNvPicPr>
+            <a:picLocks noGrp="1" noRot="1" noChangeAspect="1" noMove="1" noResize="1" noEditPoints="1" noAdjustHandles="1" noChangeArrowheads="1" noChangeShapeType="1" noCrop="1"/>
+          </p:cNvPicPr>
+          <p:nvPr>
+            <p:extLst>
+              <p:ext uri="{386F3935-93C4-4BCD-93E2-E3B085C9AB24}">
+                <p16:designElem xmlns:p16="http://schemas.microsoft.com/office/powerpoint/2015/main" val="1"/>
+              </p:ext>
+            </p:extLst>
+          </p:nvPr>
+        </p:nvPicPr>
+        <p:blipFill rotWithShape="1">
+          <a:blip r:embed="rId2">
+            <a:extLst>
+              <a:ext uri="{28A0092B-C50C-407E-A947-70E740481C1C}">
+                <a14:useLocalDpi xmlns:a14="http://schemas.microsoft.com/office/drawing/2010/main" val="0"/>
+              </a:ext>
+            </a:extLst>
+          </a:blip>
+          <a:srcRect t="1538" b="-1538"/>
+          <a:stretch/>
+        </p:blipFill>
+        <p:spPr bwMode="black">
+          <a:xfrm>
+            <a:off x="0" y="6126480"/>
+            <a:ext cx="12192000" cy="742950"/>
+          </a:xfrm>
+          <a:prstGeom prst="rect">
+            <a:avLst/>
+          </a:prstGeom>
+        </p:spPr>
+      </p:pic>
+      <p:cxnSp>
+        <p:nvCxnSpPr>
+          <p:cNvPr id="33" name="Straight Connector 32">
+            <a:extLst>
+              <a:ext uri="{FF2B5EF4-FFF2-40B4-BE49-F238E27FC236}">
+                <a16:creationId xmlns:a16="http://schemas.microsoft.com/office/drawing/2014/main" id="{9E597F0B-0A17-4BF2-A904-9D99811F3E2E}"/>
+              </a:ext>
+              <a:ext uri="{C183D7F6-B498-43B3-948B-1728B52AA6E4}">
+                <adec:decorative xmlns:adec="http://schemas.microsoft.com/office/drawing/2017/decorative" val="1"/>
+              </a:ext>
+            </a:extLst>
+          </p:cNvPr>
+          <p:cNvCxnSpPr>
+            <a:cxnSpLocks noGrp="1" noRot="1" noChangeAspect="1" noMove="1" noResize="1" noEditPoints="1" noAdjustHandles="1" noChangeArrowheads="1" noChangeShapeType="1"/>
+          </p:cNvCxnSpPr>
+          <p:nvPr>
+            <p:extLst>
+              <p:ext uri="{386F3935-93C4-4BCD-93E2-E3B085C9AB24}">
+                <p16:designElem xmlns:p16="http://schemas.microsoft.com/office/powerpoint/2015/main" val="1"/>
+              </p:ext>
+            </p:extLst>
+          </p:nvPr>
+        </p:nvCxnSpPr>
+        <p:spPr>
+          <a:xfrm>
+            <a:off x="0" y="6128413"/>
+            <a:ext cx="12192000" cy="0"/>
+          </a:xfrm>
+          <a:prstGeom prst="line">
+            <a:avLst/>
+          </a:prstGeom>
+          <a:ln w="12700">
+            <a:solidFill>
+              <a:srgbClr val="000001">
+                <a:alpha val="20000"/>
+              </a:srgbClr>
+            </a:solidFill>
+          </a:ln>
+        </p:spPr>
+        <p:style>
+          <a:lnRef idx="1">
+            <a:schemeClr val="accent1"/>
+          </a:lnRef>
+          <a:fillRef idx="0">
+            <a:schemeClr val="accent1"/>
+          </a:fillRef>
+          <a:effectRef idx="0">
+            <a:schemeClr val="accent1"/>
+          </a:effectRef>
+          <a:fontRef idx="minor">
+            <a:schemeClr val="tx1"/>
+          </a:fontRef>
+        </p:style>
+      </p:cxnSp>
     </p:spTree>
+    <p:extLst>
+      <p:ext uri="{BB962C8B-B14F-4D97-AF65-F5344CB8AC3E}">
+        <p14:creationId xmlns:p14="http://schemas.microsoft.com/office/powerpoint/2010/main" val="3817290165"/>
+      </p:ext>
+    </p:extLst>
   </p:cSld>
   <p:clrMapOvr>
     <a:masterClrMapping/>
@@ -11162,6 +9888,30 @@
 <file path=ppt/slides/slide22.xml><?xml version="1.0" encoding="utf-8"?>
 <p:sld xmlns:a="http://schemas.openxmlformats.org/drawingml/2006/main" xmlns:r="http://schemas.openxmlformats.org/officeDocument/2006/relationships" xmlns:p="http://schemas.openxmlformats.org/presentationml/2006/main">
   <p:cSld>
+    <p:bg>
+      <p:bgPr>
+        <a:gradFill rotWithShape="1">
+          <a:gsLst>
+            <a:gs pos="0">
+              <a:schemeClr val="bg2">
+                <a:tint val="94000"/>
+                <a:satMod val="80000"/>
+                <a:lumMod val="106000"/>
+              </a:schemeClr>
+            </a:gs>
+            <a:gs pos="100000">
+              <a:schemeClr val="bg2">
+                <a:shade val="80000"/>
+              </a:schemeClr>
+            </a:gs>
+          </a:gsLst>
+          <a:path path="circle">
+            <a:fillToRect l="43000" r="43000" b="100000"/>
+          </a:path>
+        </a:gradFill>
+        <a:effectLst/>
+      </p:bgPr>
+    </p:bg>
     <p:spTree>
       <p:nvGrpSpPr>
         <p:cNvPr id="1" name=""/>
@@ -11178,58 +9928,609 @@
       </p:grpSpPr>
       <p:sp>
         <p:nvSpPr>
-          <p:cNvPr id="2" name="Cím 1"/>
+          <p:cNvPr id="33" name="Rectangle 32">
+            <a:extLst>
+              <a:ext uri="{FF2B5EF4-FFF2-40B4-BE49-F238E27FC236}">
+                <a16:creationId xmlns:a16="http://schemas.microsoft.com/office/drawing/2014/main" id="{EEA869E1-F851-4A52-92F5-77E592B76A5B}"/>
+              </a:ext>
+              <a:ext uri="{C183D7F6-B498-43B3-948B-1728B52AA6E4}">
+                <adec:decorative xmlns:adec="http://schemas.microsoft.com/office/drawing/2017/decorative" val="1"/>
+              </a:ext>
+            </a:extLst>
+          </p:cNvPr>
           <p:cNvSpPr>
-            <a:spLocks noGrp="1"/>
+            <a:spLocks noGrp="1" noRot="1" noChangeAspect="1" noMove="1" noResize="1" noEditPoints="1" noAdjustHandles="1" noChangeArrowheads="1" noChangeShapeType="1" noTextEdit="1"/>
           </p:cNvSpPr>
           <p:nvPr>
-            <p:ph type="title"/>
+            <p:extLst>
+              <p:ext uri="{386F3935-93C4-4BCD-93E2-E3B085C9AB24}">
+                <p16:designElem xmlns:p16="http://schemas.microsoft.com/office/powerpoint/2015/main" val="1"/>
+              </p:ext>
+            </p:extLst>
           </p:nvPr>
         </p:nvSpPr>
         <p:spPr>
           <a:xfrm>
-            <a:off x="1451579" y="1257300"/>
-            <a:ext cx="9603275" cy="596453"/>
-          </a:xfrm>
-        </p:spPr>
+            <a:off x="0" y="2019476"/>
+            <a:ext cx="12192000" cy="4105941"/>
+          </a:xfrm>
+          <a:prstGeom prst="rect">
+            <a:avLst/>
+          </a:prstGeom>
+          <a:gradFill flip="none" rotWithShape="1">
+            <a:gsLst>
+              <a:gs pos="0">
+                <a:schemeClr val="bg2">
+                  <a:alpha val="0"/>
+                </a:schemeClr>
+              </a:gs>
+              <a:gs pos="100000">
+                <a:schemeClr val="bg2"/>
+              </a:gs>
+            </a:gsLst>
+            <a:lin ang="5400000" scaled="0"/>
+            <a:tileRect/>
+          </a:gradFill>
+          <a:ln>
+            <a:noFill/>
+          </a:ln>
+        </p:spPr>
+        <p:style>
+          <a:lnRef idx="2">
+            <a:schemeClr val="accent1">
+              <a:shade val="50000"/>
+            </a:schemeClr>
+          </a:lnRef>
+          <a:fillRef idx="1">
+            <a:schemeClr val="accent1"/>
+          </a:fillRef>
+          <a:effectRef idx="0">
+            <a:schemeClr val="accent1"/>
+          </a:effectRef>
+          <a:fontRef idx="minor">
+            <a:schemeClr val="lt1"/>
+          </a:fontRef>
+        </p:style>
         <p:txBody>
-          <a:bodyPr>
-            <a:normAutofit/>
-          </a:bodyPr>
+          <a:bodyPr/>
           <a:lstStyle/>
           <a:p>
-            <a:r>
-              <a:rPr lang="hu-HU" dirty="0"/>
-              <a:t>Czeitner András - fejlesztés</a:t>
-            </a:r>
+            <a:endParaRPr lang="en-US"/>
           </a:p>
         </p:txBody>
       </p:sp>
       <p:pic>
         <p:nvPicPr>
-          <p:cNvPr id="7" name="Kép 6" descr="image.png"/>
+          <p:cNvPr id="35" name="Picture 34">
+            <a:extLst>
+              <a:ext uri="{FF2B5EF4-FFF2-40B4-BE49-F238E27FC236}">
+                <a16:creationId xmlns:a16="http://schemas.microsoft.com/office/drawing/2014/main" id="{B083AD55-8296-44BD-8E14-DD2DDBC351B0}"/>
+              </a:ext>
+              <a:ext uri="{C183D7F6-B498-43B3-948B-1728B52AA6E4}">
+                <adec:decorative xmlns:adec="http://schemas.microsoft.com/office/drawing/2017/decorative" val="1"/>
+              </a:ext>
+            </a:extLst>
+          </p:cNvPr>
+          <p:cNvPicPr>
+            <a:picLocks noGrp="1" noRot="1" noChangeAspect="1" noMove="1" noResize="1" noEditPoints="1" noAdjustHandles="1" noChangeArrowheads="1" noChangeShapeType="1" noCrop="1"/>
+          </p:cNvPicPr>
+          <p:nvPr>
+            <p:extLst>
+              <p:ext uri="{386F3935-93C4-4BCD-93E2-E3B085C9AB24}">
+                <p16:designElem xmlns:p16="http://schemas.microsoft.com/office/powerpoint/2015/main" val="1"/>
+              </p:ext>
+            </p:extLst>
+          </p:nvPr>
+        </p:nvPicPr>
+        <p:blipFill rotWithShape="1">
+          <a:blip r:embed="rId2">
+            <a:extLst>
+              <a:ext uri="{28A0092B-C50C-407E-A947-70E740481C1C}">
+                <a14:useLocalDpi xmlns:a14="http://schemas.microsoft.com/office/drawing/2010/main" val="0"/>
+              </a:ext>
+            </a:extLst>
+          </a:blip>
+          <a:srcRect t="1538" b="-1538"/>
+          <a:stretch/>
+        </p:blipFill>
+        <p:spPr bwMode="black">
+          <a:xfrm>
+            <a:off x="0" y="6126480"/>
+            <a:ext cx="12192000" cy="742950"/>
+          </a:xfrm>
+          <a:prstGeom prst="rect">
+            <a:avLst/>
+          </a:prstGeom>
+        </p:spPr>
+      </p:pic>
+      <p:cxnSp>
+        <p:nvCxnSpPr>
+          <p:cNvPr id="37" name="Straight Connector 36">
+            <a:extLst>
+              <a:ext uri="{FF2B5EF4-FFF2-40B4-BE49-F238E27FC236}">
+                <a16:creationId xmlns:a16="http://schemas.microsoft.com/office/drawing/2014/main" id="{2BF46B26-15FC-4C5A-94FA-AE9ED64B5C20}"/>
+              </a:ext>
+              <a:ext uri="{C183D7F6-B498-43B3-948B-1728B52AA6E4}">
+                <adec:decorative xmlns:adec="http://schemas.microsoft.com/office/drawing/2017/decorative" val="1"/>
+              </a:ext>
+            </a:extLst>
+          </p:cNvPr>
+          <p:cNvCxnSpPr>
+            <a:cxnSpLocks noGrp="1" noRot="1" noChangeAspect="1" noMove="1" noResize="1" noEditPoints="1" noAdjustHandles="1" noChangeArrowheads="1" noChangeShapeType="1"/>
+          </p:cNvCxnSpPr>
+          <p:nvPr>
+            <p:extLst>
+              <p:ext uri="{386F3935-93C4-4BCD-93E2-E3B085C9AB24}">
+                <p16:designElem xmlns:p16="http://schemas.microsoft.com/office/powerpoint/2015/main" val="1"/>
+              </p:ext>
+            </p:extLst>
+          </p:nvPr>
+        </p:nvCxnSpPr>
+        <p:spPr>
+          <a:xfrm>
+            <a:off x="0" y="6128413"/>
+            <a:ext cx="12192000" cy="0"/>
+          </a:xfrm>
+          <a:prstGeom prst="line">
+            <a:avLst/>
+          </a:prstGeom>
+          <a:ln w="12700">
+            <a:solidFill>
+              <a:srgbClr val="000001">
+                <a:alpha val="20000"/>
+              </a:srgbClr>
+            </a:solidFill>
+          </a:ln>
+        </p:spPr>
+        <p:style>
+          <a:lnRef idx="1">
+            <a:schemeClr val="accent1"/>
+          </a:lnRef>
+          <a:fillRef idx="0">
+            <a:schemeClr val="accent1"/>
+          </a:fillRef>
+          <a:effectRef idx="0">
+            <a:schemeClr val="accent1"/>
+          </a:effectRef>
+          <a:fontRef idx="minor">
+            <a:schemeClr val="tx1"/>
+          </a:fontRef>
+        </p:style>
+      </p:cxnSp>
+      <p:cxnSp>
+        <p:nvCxnSpPr>
+          <p:cNvPr id="39" name="Straight Connector 38">
+            <a:extLst>
+              <a:ext uri="{FF2B5EF4-FFF2-40B4-BE49-F238E27FC236}">
+                <a16:creationId xmlns:a16="http://schemas.microsoft.com/office/drawing/2014/main" id="{912F6065-5345-44BD-B66E-5487CCD7A9B9}"/>
+              </a:ext>
+              <a:ext uri="{C183D7F6-B498-43B3-948B-1728B52AA6E4}">
+                <adec:decorative xmlns:adec="http://schemas.microsoft.com/office/drawing/2017/decorative" val="1"/>
+              </a:ext>
+            </a:extLst>
+          </p:cNvPr>
+          <p:cNvCxnSpPr>
+            <a:cxnSpLocks noGrp="1" noRot="1" noChangeAspect="1" noMove="1" noResize="1" noEditPoints="1" noAdjustHandles="1" noChangeArrowheads="1" noChangeShapeType="1"/>
+          </p:cNvCxnSpPr>
+          <p:nvPr>
+            <p:extLst>
+              <p:ext uri="{386F3935-93C4-4BCD-93E2-E3B085C9AB24}">
+                <p16:designElem xmlns:p16="http://schemas.microsoft.com/office/powerpoint/2015/main" val="1"/>
+              </p:ext>
+            </p:extLst>
+          </p:nvPr>
+        </p:nvCxnSpPr>
+        <p:spPr>
+          <a:xfrm>
+            <a:off x="2417780" y="3528542"/>
+            <a:ext cx="8637072" cy="0"/>
+          </a:xfrm>
+          <a:prstGeom prst="line">
+            <a:avLst/>
+          </a:prstGeom>
+          <a:ln w="31750"/>
+        </p:spPr>
+        <p:style>
+          <a:lnRef idx="3">
+            <a:schemeClr val="accent1"/>
+          </a:lnRef>
+          <a:fillRef idx="0">
+            <a:schemeClr val="accent1"/>
+          </a:fillRef>
+          <a:effectRef idx="2">
+            <a:schemeClr val="accent1"/>
+          </a:effectRef>
+          <a:fontRef idx="minor">
+            <a:schemeClr val="tx1"/>
+          </a:fontRef>
+        </p:style>
+      </p:cxnSp>
+      <p:sp useBgFill="1">
+        <p:nvSpPr>
+          <p:cNvPr id="41" name="Rectangle 40">
+            <a:extLst>
+              <a:ext uri="{FF2B5EF4-FFF2-40B4-BE49-F238E27FC236}">
+                <a16:creationId xmlns:a16="http://schemas.microsoft.com/office/drawing/2014/main" id="{E7ABCFA2-55B0-438C-A39A-637FFC6246E8}"/>
+              </a:ext>
+              <a:ext uri="{C183D7F6-B498-43B3-948B-1728B52AA6E4}">
+                <adec:decorative xmlns:adec="http://schemas.microsoft.com/office/drawing/2017/decorative" val="1"/>
+              </a:ext>
+            </a:extLst>
+          </p:cNvPr>
+          <p:cNvSpPr>
+            <a:spLocks noGrp="1" noRot="1" noChangeAspect="1" noMove="1" noResize="1" noEditPoints="1" noAdjustHandles="1" noChangeArrowheads="1" noChangeShapeType="1" noTextEdit="1"/>
+          </p:cNvSpPr>
+          <p:nvPr>
+            <p:extLst>
+              <p:ext uri="{386F3935-93C4-4BCD-93E2-E3B085C9AB24}">
+                <p16:designElem xmlns:p16="http://schemas.microsoft.com/office/powerpoint/2015/main" val="1"/>
+              </p:ext>
+            </p:extLst>
+          </p:nvPr>
+        </p:nvSpPr>
+        <p:spPr>
+          <a:xfrm>
+            <a:off x="2" y="0"/>
+            <a:ext cx="12191695" cy="6858000"/>
+          </a:xfrm>
+          <a:prstGeom prst="rect">
+            <a:avLst/>
+          </a:prstGeom>
+          <a:ln>
+            <a:noFill/>
+          </a:ln>
+        </p:spPr>
+        <p:style>
+          <a:lnRef idx="2">
+            <a:schemeClr val="accent1">
+              <a:shade val="50000"/>
+            </a:schemeClr>
+          </a:lnRef>
+          <a:fillRef idx="1">
+            <a:schemeClr val="accent1"/>
+          </a:fillRef>
+          <a:effectRef idx="0">
+            <a:schemeClr val="accent1"/>
+          </a:effectRef>
+          <a:fontRef idx="minor">
+            <a:schemeClr val="lt1"/>
+          </a:fontRef>
+        </p:style>
+        <p:txBody>
+          <a:bodyPr rtlCol="0" anchor="ctr"/>
+          <a:lstStyle/>
+          <a:p>
+            <a:pPr algn="ctr"/>
+            <a:endParaRPr lang="en-US"/>
+          </a:p>
+        </p:txBody>
+      </p:sp>
+      <p:sp>
+        <p:nvSpPr>
+          <p:cNvPr id="43" name="Rectangle 42">
+            <a:extLst>
+              <a:ext uri="{FF2B5EF4-FFF2-40B4-BE49-F238E27FC236}">
+                <a16:creationId xmlns:a16="http://schemas.microsoft.com/office/drawing/2014/main" id="{1BD2C934-710E-4E0E-9ED4-03F07E019205}"/>
+              </a:ext>
+              <a:ext uri="{C183D7F6-B498-43B3-948B-1728B52AA6E4}">
+                <adec:decorative xmlns:adec="http://schemas.microsoft.com/office/drawing/2017/decorative" val="1"/>
+              </a:ext>
+            </a:extLst>
+          </p:cNvPr>
+          <p:cNvSpPr>
+            <a:spLocks noGrp="1" noRot="1" noChangeAspect="1" noMove="1" noResize="1" noEditPoints="1" noAdjustHandles="1" noChangeArrowheads="1" noChangeShapeType="1" noTextEdit="1"/>
+          </p:cNvSpPr>
+          <p:nvPr>
+            <p:extLst>
+              <p:ext uri="{386F3935-93C4-4BCD-93E2-E3B085C9AB24}">
+                <p16:designElem xmlns:p16="http://schemas.microsoft.com/office/powerpoint/2015/main" val="1"/>
+              </p:ext>
+            </p:extLst>
+          </p:nvPr>
+        </p:nvSpPr>
+        <p:spPr>
+          <a:xfrm>
+            <a:off x="0" y="2019476"/>
+            <a:ext cx="12192000" cy="4105941"/>
+          </a:xfrm>
+          <a:prstGeom prst="rect">
+            <a:avLst/>
+          </a:prstGeom>
+          <a:gradFill flip="none" rotWithShape="1">
+            <a:gsLst>
+              <a:gs pos="0">
+                <a:schemeClr val="bg2">
+                  <a:alpha val="0"/>
+                </a:schemeClr>
+              </a:gs>
+              <a:gs pos="100000">
+                <a:schemeClr val="bg2"/>
+              </a:gs>
+            </a:gsLst>
+            <a:lin ang="5400000" scaled="0"/>
+            <a:tileRect/>
+          </a:gradFill>
+          <a:ln>
+            <a:noFill/>
+          </a:ln>
+        </p:spPr>
+        <p:style>
+          <a:lnRef idx="2">
+            <a:schemeClr val="accent1">
+              <a:shade val="50000"/>
+            </a:schemeClr>
+          </a:lnRef>
+          <a:fillRef idx="1">
+            <a:schemeClr val="accent1"/>
+          </a:fillRef>
+          <a:effectRef idx="0">
+            <a:schemeClr val="accent1"/>
+          </a:effectRef>
+          <a:fontRef idx="minor">
+            <a:schemeClr val="lt1"/>
+          </a:fontRef>
+        </p:style>
+        <p:txBody>
+          <a:bodyPr rtlCol="0" anchor="ctr"/>
+          <a:lstStyle/>
+          <a:p>
+            <a:pPr lvl="0" algn="ctr"/>
+            <a:endParaRPr lang="en-US"/>
+          </a:p>
+        </p:txBody>
+      </p:sp>
+      <p:sp>
+        <p:nvSpPr>
+          <p:cNvPr id="2" name="Title 1">
+            <a:extLst>
+              <a:ext uri="{FF2B5EF4-FFF2-40B4-BE49-F238E27FC236}">
+                <a16:creationId xmlns:a16="http://schemas.microsoft.com/office/drawing/2014/main" id="{BAF48F60-BA92-C874-30CC-5ED58A820747}"/>
+              </a:ext>
+            </a:extLst>
+          </p:cNvPr>
+          <p:cNvSpPr>
+            <a:spLocks noGrp="1"/>
+          </p:cNvSpPr>
+          <p:nvPr>
+            <p:ph type="title"/>
+          </p:nvPr>
+        </p:nvSpPr>
+        <p:spPr>
+          <a:xfrm>
+            <a:off x="485695" y="1474969"/>
+            <a:ext cx="3026558" cy="1868760"/>
+          </a:xfrm>
+        </p:spPr>
+        <p:txBody>
+          <a:bodyPr vert="horz" lIns="91440" tIns="45720" rIns="91440" bIns="0" rtlCol="0" anchor="b">
+            <a:normAutofit/>
+          </a:bodyPr>
+          <a:lstStyle/>
+          <a:p>
+            <a:r>
+              <a:rPr lang="en-US" sz="3600" dirty="0"/>
+              <a:t>Vlajk Sándor - </a:t>
+            </a:r>
+            <a:r>
+              <a:rPr lang="en-US" sz="3600" dirty="0" err="1"/>
+              <a:t>Tesztelés</a:t>
+            </a:r>
+            <a:endParaRPr lang="en-US" sz="3600" dirty="0"/>
+          </a:p>
+        </p:txBody>
+      </p:sp>
+      <p:cxnSp>
+        <p:nvCxnSpPr>
+          <p:cNvPr id="45" name="Straight Connector 44">
+            <a:extLst>
+              <a:ext uri="{FF2B5EF4-FFF2-40B4-BE49-F238E27FC236}">
+                <a16:creationId xmlns:a16="http://schemas.microsoft.com/office/drawing/2014/main" id="{0AD0F4F3-8F5C-421F-9FC1-DB3ED0BF61DF}"/>
+              </a:ext>
+              <a:ext uri="{C183D7F6-B498-43B3-948B-1728B52AA6E4}">
+                <adec:decorative xmlns:adec="http://schemas.microsoft.com/office/drawing/2017/decorative" val="1"/>
+              </a:ext>
+            </a:extLst>
+          </p:cNvPr>
+          <p:cNvCxnSpPr>
+            <a:cxnSpLocks noGrp="1" noRot="1" noChangeAspect="1" noMove="1" noResize="1" noEditPoints="1" noAdjustHandles="1" noChangeArrowheads="1" noChangeShapeType="1"/>
+          </p:cNvCxnSpPr>
+          <p:nvPr>
+            <p:extLst>
+              <p:ext uri="{386F3935-93C4-4BCD-93E2-E3B085C9AB24}">
+                <p16:designElem xmlns:p16="http://schemas.microsoft.com/office/powerpoint/2015/main" val="1"/>
+              </p:ext>
+            </p:extLst>
+          </p:nvPr>
+        </p:nvCxnSpPr>
+        <p:spPr>
+          <a:xfrm>
+            <a:off x="484009" y="3526496"/>
+            <a:ext cx="3023617" cy="0"/>
+          </a:xfrm>
+          <a:prstGeom prst="line">
+            <a:avLst/>
+          </a:prstGeom>
+          <a:ln w="31750"/>
+        </p:spPr>
+        <p:style>
+          <a:lnRef idx="3">
+            <a:schemeClr val="accent1"/>
+          </a:lnRef>
+          <a:fillRef idx="0">
+            <a:schemeClr val="accent1"/>
+          </a:fillRef>
+          <a:effectRef idx="2">
+            <a:schemeClr val="accent1"/>
+          </a:effectRef>
+          <a:fontRef idx="minor">
+            <a:schemeClr val="tx1"/>
+          </a:fontRef>
+        </p:style>
+      </p:cxnSp>
+      <p:pic>
+        <p:nvPicPr>
+          <p:cNvPr id="7" name="Picture 6">
+            <a:extLst>
+              <a:ext uri="{FF2B5EF4-FFF2-40B4-BE49-F238E27FC236}">
+                <a16:creationId xmlns:a16="http://schemas.microsoft.com/office/drawing/2014/main" id="{234C8A63-DED3-546C-6BEE-CEFFDC8E281B}"/>
+              </a:ext>
+            </a:extLst>
+          </p:cNvPr>
           <p:cNvPicPr>
             <a:picLocks noChangeAspect="1"/>
           </p:cNvPicPr>
           <p:nvPr/>
         </p:nvPicPr>
         <p:blipFill>
-          <a:blip r:embed="rId2"/>
+          <a:blip r:embed="rId3"/>
           <a:stretch>
             <a:fillRect/>
           </a:stretch>
         </p:blipFill>
         <p:spPr>
           <a:xfrm>
-            <a:off x="1866900" y="1950738"/>
-            <a:ext cx="8458200" cy="4575458"/>
+            <a:off x="4528985" y="3109744"/>
+            <a:ext cx="7094289" cy="2837715"/>
           </a:xfrm>
           <a:prstGeom prst="rect">
             <a:avLst/>
           </a:prstGeom>
         </p:spPr>
       </p:pic>
+      <p:pic>
+        <p:nvPicPr>
+          <p:cNvPr id="5" name="Picture 4">
+            <a:extLst>
+              <a:ext uri="{FF2B5EF4-FFF2-40B4-BE49-F238E27FC236}">
+                <a16:creationId xmlns:a16="http://schemas.microsoft.com/office/drawing/2014/main" id="{468886C1-6620-95E9-B1BE-EABD49FF3267}"/>
+              </a:ext>
+            </a:extLst>
+          </p:cNvPr>
+          <p:cNvPicPr>
+            <a:picLocks noChangeAspect="1"/>
+          </p:cNvPicPr>
+          <p:nvPr/>
+        </p:nvPicPr>
+        <p:blipFill>
+          <a:blip r:embed="rId4"/>
+          <a:stretch>
+            <a:fillRect/>
+          </a:stretch>
+        </p:blipFill>
+        <p:spPr>
+          <a:xfrm>
+            <a:off x="3077701" y="159389"/>
+            <a:ext cx="7560295" cy="2608300"/>
+          </a:xfrm>
+          <a:prstGeom prst="rect">
+            <a:avLst/>
+          </a:prstGeom>
+        </p:spPr>
+      </p:pic>
+      <p:pic>
+        <p:nvPicPr>
+          <p:cNvPr id="47" name="Picture 46">
+            <a:extLst>
+              <a:ext uri="{FF2B5EF4-FFF2-40B4-BE49-F238E27FC236}">
+                <a16:creationId xmlns:a16="http://schemas.microsoft.com/office/drawing/2014/main" id="{B0A40572-62E5-460B-AD24-B6628527ACB1}"/>
+              </a:ext>
+              <a:ext uri="{C183D7F6-B498-43B3-948B-1728B52AA6E4}">
+                <adec:decorative xmlns:adec="http://schemas.microsoft.com/office/drawing/2017/decorative" val="1"/>
+              </a:ext>
+            </a:extLst>
+          </p:cNvPr>
+          <p:cNvPicPr>
+            <a:picLocks noGrp="1" noRot="1" noChangeAspect="1" noMove="1" noResize="1" noEditPoints="1" noAdjustHandles="1" noChangeArrowheads="1" noChangeShapeType="1" noCrop="1"/>
+          </p:cNvPicPr>
+          <p:nvPr>
+            <p:extLst>
+              <p:ext uri="{386F3935-93C4-4BCD-93E2-E3B085C9AB24}">
+                <p16:designElem xmlns:p16="http://schemas.microsoft.com/office/powerpoint/2015/main" val="1"/>
+              </p:ext>
+            </p:extLst>
+          </p:nvPr>
+        </p:nvPicPr>
+        <p:blipFill rotWithShape="1">
+          <a:blip r:embed="rId2">
+            <a:extLst>
+              <a:ext uri="{28A0092B-C50C-407E-A947-70E740481C1C}">
+                <a14:useLocalDpi xmlns:a14="http://schemas.microsoft.com/office/drawing/2010/main" val="0"/>
+              </a:ext>
+            </a:extLst>
+          </a:blip>
+          <a:srcRect t="1538" b="-1538"/>
+          <a:stretch/>
+        </p:blipFill>
+        <p:spPr bwMode="black">
+          <a:xfrm>
+            <a:off x="0" y="6126480"/>
+            <a:ext cx="12192000" cy="742950"/>
+          </a:xfrm>
+          <a:prstGeom prst="rect">
+            <a:avLst/>
+          </a:prstGeom>
+        </p:spPr>
+      </p:pic>
+      <p:cxnSp>
+        <p:nvCxnSpPr>
+          <p:cNvPr id="49" name="Straight Connector 48">
+            <a:extLst>
+              <a:ext uri="{FF2B5EF4-FFF2-40B4-BE49-F238E27FC236}">
+                <a16:creationId xmlns:a16="http://schemas.microsoft.com/office/drawing/2014/main" id="{F1D872D4-D7E5-4CD8-9DAC-2BC612F08E69}"/>
+              </a:ext>
+              <a:ext uri="{C183D7F6-B498-43B3-948B-1728B52AA6E4}">
+                <adec:decorative xmlns:adec="http://schemas.microsoft.com/office/drawing/2017/decorative" val="1"/>
+              </a:ext>
+            </a:extLst>
+          </p:cNvPr>
+          <p:cNvCxnSpPr>
+            <a:cxnSpLocks noGrp="1" noRot="1" noChangeAspect="1" noMove="1" noResize="1" noEditPoints="1" noAdjustHandles="1" noChangeArrowheads="1" noChangeShapeType="1"/>
+          </p:cNvCxnSpPr>
+          <p:nvPr>
+            <p:extLst>
+              <p:ext uri="{386F3935-93C4-4BCD-93E2-E3B085C9AB24}">
+                <p16:designElem xmlns:p16="http://schemas.microsoft.com/office/powerpoint/2015/main" val="1"/>
+              </p:ext>
+            </p:extLst>
+          </p:nvPr>
+        </p:nvCxnSpPr>
+        <p:spPr>
+          <a:xfrm>
+            <a:off x="0" y="6128413"/>
+            <a:ext cx="12192000" cy="0"/>
+          </a:xfrm>
+          <a:prstGeom prst="line">
+            <a:avLst/>
+          </a:prstGeom>
+          <a:ln w="12700">
+            <a:solidFill>
+              <a:srgbClr val="000001">
+                <a:alpha val="20000"/>
+              </a:srgbClr>
+            </a:solidFill>
+          </a:ln>
+        </p:spPr>
+        <p:style>
+          <a:lnRef idx="1">
+            <a:schemeClr val="accent1"/>
+          </a:lnRef>
+          <a:fillRef idx="0">
+            <a:schemeClr val="accent1"/>
+          </a:fillRef>
+          <a:effectRef idx="0">
+            <a:schemeClr val="accent1"/>
+          </a:effectRef>
+          <a:fontRef idx="minor">
+            <a:schemeClr val="tx1"/>
+          </a:fontRef>
+        </p:style>
+      </p:cxnSp>
     </p:spTree>
+    <p:extLst>
+      <p:ext uri="{BB962C8B-B14F-4D97-AF65-F5344CB8AC3E}">
+        <p14:creationId xmlns:p14="http://schemas.microsoft.com/office/powerpoint/2010/main" val="858810309"/>
+      </p:ext>
+    </p:extLst>
   </p:cSld>
   <p:clrMapOvr>
     <a:masterClrMapping/>
@@ -11266,8 +10567,8 @@
         </p:nvSpPr>
         <p:spPr>
           <a:xfrm>
-            <a:off x="1451579" y="1257300"/>
-            <a:ext cx="9603275" cy="596453"/>
+            <a:off x="1444671" y="798973"/>
+            <a:ext cx="3273099" cy="2418680"/>
           </a:xfrm>
         </p:spPr>
         <p:txBody>
@@ -11277,46 +10578,88 @@
           <a:lstStyle/>
           <a:p>
             <a:r>
-              <a:rPr lang="hu-HU" dirty="0"/>
-              <a:t>Czeitner András - fejlesztés</a:t>
+              <a:rPr lang="hu-HU" sz="3200" dirty="0"/>
+              <a:t>Czeitner András - management</a:t>
             </a:r>
           </a:p>
         </p:txBody>
       </p:sp>
       <p:pic>
         <p:nvPicPr>
-          <p:cNvPr id="9" name="Kép 8" descr="A képen szöveg, képernyőkép, szoftver, Számítógépes ikon látható&#10;&#10;Előfordulhat, hogy az AI által létrehozott tartalom helytelen.">
-            <a:extLst>
-              <a:ext uri="{FF2B5EF4-FFF2-40B4-BE49-F238E27FC236}">
-                <a16:creationId xmlns:a16="http://schemas.microsoft.com/office/drawing/2014/main" id="{48B7EA85-C43E-31A2-8BE8-68363AEF182D}"/>
-              </a:ext>
-            </a:extLst>
-          </p:cNvPr>
+          <p:cNvPr id="5" name="Picture 12" descr="https://cdn.discordapp.com/attachments/812059683393110017/1439310372174692543/image.png?ex=691a0dbd&amp;is=6918bc3d&amp;hm=2473b7bf2008278831746b824589489045399c33f76371eede42d79fa3eba8a6&amp;"/>
           <p:cNvPicPr>
-            <a:picLocks noChangeAspect="1"/>
+            <a:picLocks noChangeAspect="1" noChangeArrowheads="1"/>
           </p:cNvPicPr>
           <p:nvPr/>
         </p:nvPicPr>
         <p:blipFill>
-          <a:blip r:embed="rId2">
-            <a:extLst>
-              <a:ext uri="{28A0092B-C50C-407E-A947-70E740481C1C}">
-                <a14:useLocalDpi xmlns:a14="http://schemas.microsoft.com/office/drawing/2010/main" val="0"/>
-              </a:ext>
-            </a:extLst>
-          </a:blip>
+          <a:blip r:embed="rId2"/>
+          <a:srcRect/>
           <a:stretch>
             <a:fillRect/>
           </a:stretch>
         </p:blipFill>
-        <p:spPr>
-          <a:xfrm>
-            <a:off x="1884672" y="1954720"/>
-            <a:ext cx="8422656" cy="4562272"/>
+        <p:spPr bwMode="auto">
+          <a:xfrm>
+            <a:off x="845688" y="3752470"/>
+            <a:ext cx="5951926" cy="2558620"/>
           </a:xfrm>
           <a:prstGeom prst="rect">
             <a:avLst/>
           </a:prstGeom>
+          <a:noFill/>
+        </p:spPr>
+      </p:pic>
+      <p:pic>
+        <p:nvPicPr>
+          <p:cNvPr id="6" name="Picture 18" descr="https://cdn.discordapp.com/attachments/812059683393110017/1439311303293407394/image.png?ex=691a0e9b&amp;is=6918bd1b&amp;hm=b76267a9bd8fa2df8afb55329ccd083691ebc55d7bd545a7cf79ae6182b702a7&amp;"/>
+          <p:cNvPicPr>
+            <a:picLocks noChangeAspect="1" noChangeArrowheads="1"/>
+          </p:cNvPicPr>
+          <p:nvPr/>
+        </p:nvPicPr>
+        <p:blipFill>
+          <a:blip r:embed="rId3"/>
+          <a:srcRect/>
+          <a:stretch>
+            <a:fillRect/>
+          </a:stretch>
+        </p:blipFill>
+        <p:spPr bwMode="auto">
+          <a:xfrm>
+            <a:off x="7738196" y="1454523"/>
+            <a:ext cx="4192138" cy="4427075"/>
+          </a:xfrm>
+          <a:prstGeom prst="rect">
+            <a:avLst/>
+          </a:prstGeom>
+          <a:noFill/>
+        </p:spPr>
+      </p:pic>
+      <p:pic>
+        <p:nvPicPr>
+          <p:cNvPr id="7" name="Picture 2" descr="https://cdn.discordapp.com/attachments/812059683393110017/1439310147083173888/image.png?ex=691a0d88&amp;is=6918bc08&amp;hm=d9dde2fb7ff6f43b87336b768ad315f76d4e8049f9de17a1e67f0bc5c96e4af5&amp;"/>
+          <p:cNvPicPr>
+            <a:picLocks noChangeAspect="1" noChangeArrowheads="1"/>
+          </p:cNvPicPr>
+          <p:nvPr/>
+        </p:nvPicPr>
+        <p:blipFill>
+          <a:blip r:embed="rId4"/>
+          <a:srcRect/>
+          <a:stretch>
+            <a:fillRect/>
+          </a:stretch>
+        </p:blipFill>
+        <p:spPr bwMode="auto">
+          <a:xfrm>
+            <a:off x="5383184" y="285420"/>
+            <a:ext cx="2061495" cy="3303169"/>
+          </a:xfrm>
+          <a:prstGeom prst="rect">
+            <a:avLst/>
+          </a:prstGeom>
+          <a:noFill/>
         </p:spPr>
       </p:pic>
     </p:spTree>
@@ -11328,6 +10671,777 @@
 </file>
 
 <file path=ppt/slides/slide24.xml><?xml version="1.0" encoding="utf-8"?>
+<p:sld xmlns:a="http://schemas.openxmlformats.org/drawingml/2006/main" xmlns:r="http://schemas.openxmlformats.org/officeDocument/2006/relationships" xmlns:p="http://schemas.openxmlformats.org/presentationml/2006/main">
+  <p:cSld>
+    <p:spTree>
+      <p:nvGrpSpPr>
+        <p:cNvPr id="1" name=""/>
+        <p:cNvGrpSpPr/>
+        <p:nvPr/>
+      </p:nvGrpSpPr>
+      <p:grpSpPr>
+        <a:xfrm>
+          <a:off x="0" y="0"/>
+          <a:ext cx="0" cy="0"/>
+          <a:chOff x="0" y="0"/>
+          <a:chExt cx="0" cy="0"/>
+        </a:xfrm>
+      </p:grpSpPr>
+      <p:sp>
+        <p:nvSpPr>
+          <p:cNvPr id="2" name="Cím 1"/>
+          <p:cNvSpPr>
+            <a:spLocks noGrp="1"/>
+          </p:cNvSpPr>
+          <p:nvPr>
+            <p:ph type="title"/>
+          </p:nvPr>
+        </p:nvSpPr>
+        <p:spPr>
+          <a:xfrm>
+            <a:off x="1408446" y="1253095"/>
+            <a:ext cx="8115115" cy="592958"/>
+          </a:xfrm>
+        </p:spPr>
+        <p:txBody>
+          <a:bodyPr>
+            <a:normAutofit/>
+          </a:bodyPr>
+          <a:lstStyle/>
+          <a:p>
+            <a:r>
+              <a:rPr lang="hu-HU" dirty="0"/>
+              <a:t>Czeitner András - </a:t>
+            </a:r>
+            <a:r>
+              <a:rPr lang="hu-HU" dirty="0" err="1"/>
+              <a:t>Git</a:t>
+            </a:r>
+            <a:endParaRPr lang="hu-HU" dirty="0"/>
+          </a:p>
+        </p:txBody>
+      </p:sp>
+      <p:pic>
+        <p:nvPicPr>
+          <p:cNvPr id="34827" name="Picture 11"/>
+          <p:cNvPicPr>
+            <a:picLocks noChangeAspect="1" noChangeArrowheads="1"/>
+          </p:cNvPicPr>
+          <p:nvPr/>
+        </p:nvPicPr>
+        <p:blipFill>
+          <a:blip r:embed="rId2"/>
+          <a:srcRect/>
+          <a:stretch>
+            <a:fillRect/>
+          </a:stretch>
+        </p:blipFill>
+        <p:spPr bwMode="auto">
+          <a:xfrm>
+            <a:off x="5917362" y="2409735"/>
+            <a:ext cx="5981700" cy="3228975"/>
+          </a:xfrm>
+          <a:prstGeom prst="rect">
+            <a:avLst/>
+          </a:prstGeom>
+          <a:noFill/>
+          <a:ln w="9525">
+            <a:noFill/>
+            <a:miter lim="800000"/>
+            <a:headEnd/>
+            <a:tailEnd/>
+          </a:ln>
+          <a:effectLst/>
+        </p:spPr>
+      </p:pic>
+      <p:pic>
+        <p:nvPicPr>
+          <p:cNvPr id="34828" name="Picture 12"/>
+          <p:cNvPicPr>
+            <a:picLocks noChangeAspect="1" noChangeArrowheads="1"/>
+          </p:cNvPicPr>
+          <p:nvPr/>
+        </p:nvPicPr>
+        <p:blipFill>
+          <a:blip r:embed="rId3"/>
+          <a:srcRect/>
+          <a:stretch>
+            <a:fillRect/>
+          </a:stretch>
+        </p:blipFill>
+        <p:spPr bwMode="auto">
+          <a:xfrm>
+            <a:off x="336430" y="2635729"/>
+            <a:ext cx="5353050" cy="2552700"/>
+          </a:xfrm>
+          <a:prstGeom prst="rect">
+            <a:avLst/>
+          </a:prstGeom>
+          <a:noFill/>
+          <a:ln w="9525">
+            <a:noFill/>
+            <a:miter lim="800000"/>
+            <a:headEnd/>
+            <a:tailEnd/>
+          </a:ln>
+          <a:effectLst/>
+        </p:spPr>
+      </p:pic>
+    </p:spTree>
+  </p:cSld>
+  <p:clrMapOvr>
+    <a:masterClrMapping/>
+  </p:clrMapOvr>
+</p:sld>
+</file>
+
+<file path=ppt/slides/slide25.xml><?xml version="1.0" encoding="utf-8"?>
+<p:sld xmlns:a="http://schemas.openxmlformats.org/drawingml/2006/main" xmlns:r="http://schemas.openxmlformats.org/officeDocument/2006/relationships" xmlns:p="http://schemas.openxmlformats.org/presentationml/2006/main">
+  <p:cSld>
+    <p:bg>
+      <p:bgPr>
+        <a:gradFill rotWithShape="1">
+          <a:gsLst>
+            <a:gs pos="0">
+              <a:schemeClr val="bg2">
+                <a:tint val="94000"/>
+                <a:satMod val="80000"/>
+                <a:lumMod val="106000"/>
+              </a:schemeClr>
+            </a:gs>
+            <a:gs pos="100000">
+              <a:schemeClr val="bg2">
+                <a:shade val="80000"/>
+              </a:schemeClr>
+            </a:gs>
+          </a:gsLst>
+          <a:path path="circle">
+            <a:fillToRect l="43000" r="43000" b="100000"/>
+          </a:path>
+        </a:gradFill>
+        <a:effectLst/>
+      </p:bgPr>
+    </p:bg>
+    <p:spTree>
+      <p:nvGrpSpPr>
+        <p:cNvPr id="1" name=""/>
+        <p:cNvGrpSpPr/>
+        <p:nvPr/>
+      </p:nvGrpSpPr>
+      <p:grpSpPr>
+        <a:xfrm>
+          <a:off x="0" y="0"/>
+          <a:ext cx="0" cy="0"/>
+          <a:chOff x="0" y="0"/>
+          <a:chExt cx="0" cy="0"/>
+        </a:xfrm>
+      </p:grpSpPr>
+      <p:sp>
+        <p:nvSpPr>
+          <p:cNvPr id="8" name="Rectangle 7">
+            <a:extLst>
+              <a:ext uri="{FF2B5EF4-FFF2-40B4-BE49-F238E27FC236}">
+                <a16:creationId xmlns:a16="http://schemas.microsoft.com/office/drawing/2014/main" id="{CDDE5CDF-1512-4CDA-B956-23D223F8DE44}"/>
+              </a:ext>
+              <a:ext uri="{C183D7F6-B498-43B3-948B-1728B52AA6E4}">
+                <adec:decorative xmlns:adec="http://schemas.microsoft.com/office/drawing/2017/decorative" val="1"/>
+              </a:ext>
+            </a:extLst>
+          </p:cNvPr>
+          <p:cNvSpPr>
+            <a:spLocks noGrp="1" noRot="1" noChangeAspect="1" noMove="1" noResize="1" noEditPoints="1" noAdjustHandles="1" noChangeArrowheads="1" noChangeShapeType="1" noTextEdit="1"/>
+          </p:cNvSpPr>
+          <p:nvPr>
+            <p:extLst>
+              <p:ext uri="{386F3935-93C4-4BCD-93E2-E3B085C9AB24}">
+                <p16:designElem xmlns:p16="http://schemas.microsoft.com/office/powerpoint/2015/main" val="1"/>
+              </p:ext>
+            </p:extLst>
+          </p:nvPr>
+        </p:nvSpPr>
+        <p:spPr>
+          <a:xfrm>
+            <a:off x="0" y="2019476"/>
+            <a:ext cx="12192000" cy="4105941"/>
+          </a:xfrm>
+          <a:prstGeom prst="rect">
+            <a:avLst/>
+          </a:prstGeom>
+          <a:gradFill flip="none" rotWithShape="1">
+            <a:gsLst>
+              <a:gs pos="0">
+                <a:schemeClr val="bg2">
+                  <a:alpha val="0"/>
+                </a:schemeClr>
+              </a:gs>
+              <a:gs pos="100000">
+                <a:schemeClr val="bg2"/>
+              </a:gs>
+            </a:gsLst>
+            <a:lin ang="5400000" scaled="0"/>
+            <a:tileRect/>
+          </a:gradFill>
+          <a:ln>
+            <a:noFill/>
+          </a:ln>
+        </p:spPr>
+        <p:style>
+          <a:lnRef idx="2">
+            <a:schemeClr val="accent1">
+              <a:shade val="50000"/>
+            </a:schemeClr>
+          </a:lnRef>
+          <a:fillRef idx="1">
+            <a:schemeClr val="accent1"/>
+          </a:fillRef>
+          <a:effectRef idx="0">
+            <a:schemeClr val="accent1"/>
+          </a:effectRef>
+          <a:fontRef idx="minor">
+            <a:schemeClr val="lt1"/>
+          </a:fontRef>
+        </p:style>
+        <p:txBody>
+          <a:bodyPr/>
+          <a:lstStyle/>
+          <a:p>
+            <a:endParaRPr lang="hu-HU"/>
+          </a:p>
+        </p:txBody>
+      </p:sp>
+      <p:pic>
+        <p:nvPicPr>
+          <p:cNvPr id="10" name="Picture 9">
+            <a:extLst>
+              <a:ext uri="{FF2B5EF4-FFF2-40B4-BE49-F238E27FC236}">
+                <a16:creationId xmlns:a16="http://schemas.microsoft.com/office/drawing/2014/main" id="{B029D7D8-5A6B-4C76-94C8-15798C6C5ADB}"/>
+              </a:ext>
+              <a:ext uri="{C183D7F6-B498-43B3-948B-1728B52AA6E4}">
+                <adec:decorative xmlns:adec="http://schemas.microsoft.com/office/drawing/2017/decorative" val="1"/>
+              </a:ext>
+            </a:extLst>
+          </p:cNvPr>
+          <p:cNvPicPr>
+            <a:picLocks noGrp="1" noRot="1" noChangeAspect="1" noMove="1" noResize="1" noEditPoints="1" noAdjustHandles="1" noChangeArrowheads="1" noChangeShapeType="1" noCrop="1"/>
+          </p:cNvPicPr>
+          <p:nvPr>
+            <p:extLst>
+              <p:ext uri="{386F3935-93C4-4BCD-93E2-E3B085C9AB24}">
+                <p16:designElem xmlns:p16="http://schemas.microsoft.com/office/powerpoint/2015/main" val="1"/>
+              </p:ext>
+            </p:extLst>
+          </p:nvPr>
+        </p:nvPicPr>
+        <p:blipFill rotWithShape="1">
+          <a:blip r:embed="rId2">
+            <a:extLst>
+              <a:ext uri="{28A0092B-C50C-407E-A947-70E740481C1C}">
+                <a14:useLocalDpi xmlns:a14="http://schemas.microsoft.com/office/drawing/2010/main" val="0"/>
+              </a:ext>
+            </a:extLst>
+          </a:blip>
+          <a:srcRect t="1538" b="-1538"/>
+          <a:stretch/>
+        </p:blipFill>
+        <p:spPr bwMode="black">
+          <a:xfrm>
+            <a:off x="0" y="6126480"/>
+            <a:ext cx="12192000" cy="742950"/>
+          </a:xfrm>
+          <a:prstGeom prst="rect">
+            <a:avLst/>
+          </a:prstGeom>
+        </p:spPr>
+      </p:pic>
+      <p:cxnSp>
+        <p:nvCxnSpPr>
+          <p:cNvPr id="12" name="Straight Connector 11">
+            <a:extLst>
+              <a:ext uri="{FF2B5EF4-FFF2-40B4-BE49-F238E27FC236}">
+                <a16:creationId xmlns:a16="http://schemas.microsoft.com/office/drawing/2014/main" id="{A5C9319C-E20D-4884-952F-60B6A58C3E34}"/>
+              </a:ext>
+              <a:ext uri="{C183D7F6-B498-43B3-948B-1728B52AA6E4}">
+                <adec:decorative xmlns:adec="http://schemas.microsoft.com/office/drawing/2017/decorative" val="1"/>
+              </a:ext>
+            </a:extLst>
+          </p:cNvPr>
+          <p:cNvCxnSpPr>
+            <a:cxnSpLocks noGrp="1" noRot="1" noChangeAspect="1" noMove="1" noResize="1" noEditPoints="1" noAdjustHandles="1" noChangeArrowheads="1" noChangeShapeType="1"/>
+          </p:cNvCxnSpPr>
+          <p:nvPr>
+            <p:extLst>
+              <p:ext uri="{386F3935-93C4-4BCD-93E2-E3B085C9AB24}">
+                <p16:designElem xmlns:p16="http://schemas.microsoft.com/office/powerpoint/2015/main" val="1"/>
+              </p:ext>
+            </p:extLst>
+          </p:nvPr>
+        </p:nvCxnSpPr>
+        <p:spPr>
+          <a:xfrm>
+            <a:off x="0" y="6128413"/>
+            <a:ext cx="12192000" cy="0"/>
+          </a:xfrm>
+          <a:prstGeom prst="line">
+            <a:avLst/>
+          </a:prstGeom>
+          <a:ln w="12700">
+            <a:solidFill>
+              <a:srgbClr val="000001">
+                <a:alpha val="20000"/>
+              </a:srgbClr>
+            </a:solidFill>
+          </a:ln>
+        </p:spPr>
+        <p:style>
+          <a:lnRef idx="1">
+            <a:schemeClr val="accent1"/>
+          </a:lnRef>
+          <a:fillRef idx="0">
+            <a:schemeClr val="accent1"/>
+          </a:fillRef>
+          <a:effectRef idx="0">
+            <a:schemeClr val="accent1"/>
+          </a:effectRef>
+          <a:fontRef idx="minor">
+            <a:schemeClr val="tx1"/>
+          </a:fontRef>
+        </p:style>
+      </p:cxnSp>
+      <p:sp useBgFill="1">
+        <p:nvSpPr>
+          <p:cNvPr id="14" name="Rectangle 13">
+            <a:extLst>
+              <a:ext uri="{FF2B5EF4-FFF2-40B4-BE49-F238E27FC236}">
+                <a16:creationId xmlns:a16="http://schemas.microsoft.com/office/drawing/2014/main" id="{62C9703D-C8F9-44AD-A7C0-C2F3871F8C1B}"/>
+              </a:ext>
+              <a:ext uri="{C183D7F6-B498-43B3-948B-1728B52AA6E4}">
+                <adec:decorative xmlns:adec="http://schemas.microsoft.com/office/drawing/2017/decorative" val="1"/>
+              </a:ext>
+            </a:extLst>
+          </p:cNvPr>
+          <p:cNvSpPr>
+            <a:spLocks noGrp="1" noRot="1" noChangeAspect="1" noMove="1" noResize="1" noEditPoints="1" noAdjustHandles="1" noChangeArrowheads="1" noChangeShapeType="1" noTextEdit="1"/>
+          </p:cNvSpPr>
+          <p:nvPr>
+            <p:extLst>
+              <p:ext uri="{386F3935-93C4-4BCD-93E2-E3B085C9AB24}">
+                <p16:designElem xmlns:p16="http://schemas.microsoft.com/office/powerpoint/2015/main" val="1"/>
+              </p:ext>
+            </p:extLst>
+          </p:nvPr>
+        </p:nvSpPr>
+        <p:spPr>
+          <a:xfrm>
+            <a:off x="0" y="0"/>
+            <a:ext cx="12192000" cy="6160168"/>
+          </a:xfrm>
+          <a:prstGeom prst="rect">
+            <a:avLst/>
+          </a:prstGeom>
+          <a:ln>
+            <a:noFill/>
+          </a:ln>
+        </p:spPr>
+        <p:style>
+          <a:lnRef idx="2">
+            <a:schemeClr val="accent1">
+              <a:shade val="50000"/>
+            </a:schemeClr>
+          </a:lnRef>
+          <a:fillRef idx="1">
+            <a:schemeClr val="accent1"/>
+          </a:fillRef>
+          <a:effectRef idx="0">
+            <a:schemeClr val="accent1"/>
+          </a:effectRef>
+          <a:fontRef idx="minor">
+            <a:schemeClr val="lt1"/>
+          </a:fontRef>
+        </p:style>
+        <p:txBody>
+          <a:bodyPr rtlCol="0" anchor="ctr"/>
+          <a:lstStyle/>
+          <a:p>
+            <a:pPr algn="ctr"/>
+            <a:endParaRPr lang="en-US"/>
+          </a:p>
+        </p:txBody>
+      </p:sp>
+      <p:pic>
+        <p:nvPicPr>
+          <p:cNvPr id="3" name="Kép 2" descr="A képen szöveg, képernyőkép, menü látható&#10;&#10;Előfordulhat, hogy az AI által létrehozott tartalom helytelen.">
+            <a:extLst>
+              <a:ext uri="{FF2B5EF4-FFF2-40B4-BE49-F238E27FC236}">
+                <a16:creationId xmlns:a16="http://schemas.microsoft.com/office/drawing/2014/main" id="{C1C22A62-A598-64EA-AD0C-853A69A68E81}"/>
+              </a:ext>
+            </a:extLst>
+          </p:cNvPr>
+          <p:cNvPicPr>
+            <a:picLocks noChangeAspect="1"/>
+          </p:cNvPicPr>
+          <p:nvPr/>
+        </p:nvPicPr>
+        <p:blipFill>
+          <a:blip r:embed="rId3">
+            <a:extLst>
+              <a:ext uri="{28A0092B-C50C-407E-A947-70E740481C1C}">
+                <a14:useLocalDpi xmlns:a14="http://schemas.microsoft.com/office/drawing/2010/main" val="0"/>
+              </a:ext>
+            </a:extLst>
+          </a:blip>
+          <a:stretch>
+            <a:fillRect/>
+          </a:stretch>
+        </p:blipFill>
+        <p:spPr>
+          <a:xfrm>
+            <a:off x="1410722" y="737347"/>
+            <a:ext cx="9370556" cy="5388070"/>
+          </a:xfrm>
+          <a:prstGeom prst="rect">
+            <a:avLst/>
+          </a:prstGeom>
+        </p:spPr>
+      </p:pic>
+    </p:spTree>
+  </p:cSld>
+  <p:clrMapOvr>
+    <a:masterClrMapping/>
+  </p:clrMapOvr>
+</p:sld>
+</file>
+
+<file path=ppt/slides/slide26.xml><?xml version="1.0" encoding="utf-8"?>
+<p:sld xmlns:a="http://schemas.openxmlformats.org/drawingml/2006/main" xmlns:r="http://schemas.openxmlformats.org/officeDocument/2006/relationships" xmlns:p="http://schemas.openxmlformats.org/presentationml/2006/main">
+  <p:cSld>
+    <p:spTree>
+      <p:nvGrpSpPr>
+        <p:cNvPr id="1" name=""/>
+        <p:cNvGrpSpPr/>
+        <p:nvPr/>
+      </p:nvGrpSpPr>
+      <p:grpSpPr>
+        <a:xfrm>
+          <a:off x="0" y="0"/>
+          <a:ext cx="0" cy="0"/>
+          <a:chOff x="0" y="0"/>
+          <a:chExt cx="0" cy="0"/>
+        </a:xfrm>
+      </p:grpSpPr>
+      <p:sp>
+        <p:nvSpPr>
+          <p:cNvPr id="3" name="Cím 1"/>
+          <p:cNvSpPr>
+            <a:spLocks noGrp="1"/>
+          </p:cNvSpPr>
+          <p:nvPr>
+            <p:ph type="title"/>
+          </p:nvPr>
+        </p:nvSpPr>
+        <p:spPr>
+          <a:xfrm>
+            <a:off x="1451579" y="1293962"/>
+            <a:ext cx="9603275" cy="559792"/>
+          </a:xfrm>
+        </p:spPr>
+        <p:txBody>
+          <a:bodyPr>
+            <a:normAutofit/>
+          </a:bodyPr>
+          <a:lstStyle/>
+          <a:p>
+            <a:r>
+              <a:rPr lang="hu-HU" dirty="0"/>
+              <a:t>Czeitner András - Dokumentáció</a:t>
+            </a:r>
+          </a:p>
+        </p:txBody>
+      </p:sp>
+      <p:sp>
+        <p:nvSpPr>
+          <p:cNvPr id="36866" name="AutoShape 2" descr="image.png"/>
+          <p:cNvSpPr>
+            <a:spLocks noChangeAspect="1" noChangeArrowheads="1"/>
+          </p:cNvSpPr>
+          <p:nvPr/>
+        </p:nvSpPr>
+        <p:spPr bwMode="auto">
+          <a:xfrm>
+            <a:off x="155575" y="-144463"/>
+            <a:ext cx="304800" cy="304801"/>
+          </a:xfrm>
+          <a:prstGeom prst="rect">
+            <a:avLst/>
+          </a:prstGeom>
+          <a:noFill/>
+        </p:spPr>
+        <p:txBody>
+          <a:bodyPr vert="horz" wrap="square" lIns="91440" tIns="45720" rIns="91440" bIns="45720" numCol="1" anchor="t" anchorCtr="0" compatLnSpc="1">
+            <a:prstTxWarp prst="textNoShape">
+              <a:avLst/>
+            </a:prstTxWarp>
+          </a:bodyPr>
+          <a:lstStyle/>
+          <a:p>
+            <a:endParaRPr lang="hu-HU"/>
+          </a:p>
+        </p:txBody>
+      </p:sp>
+      <p:pic>
+        <p:nvPicPr>
+          <p:cNvPr id="36868" name="Picture 4" descr="https://cdn.discordapp.com/attachments/812059683393110017/1439314057965338706/image.png?ex=691a112c&amp;is=6918bfac&amp;hm=7ba02878b65b24707a6035b4243cccf8454e5cf2085eecb6b93cfa22d6fdcdf3&amp;"/>
+          <p:cNvPicPr>
+            <a:picLocks noChangeAspect="1" noChangeArrowheads="1"/>
+          </p:cNvPicPr>
+          <p:nvPr/>
+        </p:nvPicPr>
+        <p:blipFill>
+          <a:blip r:embed="rId2"/>
+          <a:srcRect/>
+          <a:stretch>
+            <a:fillRect/>
+          </a:stretch>
+        </p:blipFill>
+        <p:spPr bwMode="auto">
+          <a:xfrm>
+            <a:off x="493983" y="2077111"/>
+            <a:ext cx="3839892" cy="3996423"/>
+          </a:xfrm>
+          <a:prstGeom prst="rect">
+            <a:avLst/>
+          </a:prstGeom>
+          <a:noFill/>
+        </p:spPr>
+      </p:pic>
+      <p:pic>
+        <p:nvPicPr>
+          <p:cNvPr id="36872" name="Picture 8" descr="https://cdn.discordapp.com/attachments/812059683393110017/1439314568546488421/Implementation-plan.png?ex=691a11a6&amp;is=6918c026&amp;hm=df378b1587e0da09569ce426a4f4a39b126cb5f94e9fae17b2eba004af3646a1&amp;"/>
+          <p:cNvPicPr>
+            <a:picLocks noChangeAspect="1" noChangeArrowheads="1"/>
+          </p:cNvPicPr>
+          <p:nvPr/>
+        </p:nvPicPr>
+        <p:blipFill>
+          <a:blip r:embed="rId3"/>
+          <a:srcRect/>
+          <a:stretch>
+            <a:fillRect/>
+          </a:stretch>
+        </p:blipFill>
+        <p:spPr bwMode="auto">
+          <a:xfrm>
+            <a:off x="4765675" y="2062389"/>
+            <a:ext cx="2806699" cy="3972162"/>
+          </a:xfrm>
+          <a:prstGeom prst="rect">
+            <a:avLst/>
+          </a:prstGeom>
+          <a:noFill/>
+        </p:spPr>
+      </p:pic>
+      <p:pic>
+        <p:nvPicPr>
+          <p:cNvPr id="36876" name="Picture 12" descr="https://cdn.discordapp.com/attachments/812059683393110017/1439314778895028354/image.png?ex=691a11d8&amp;is=6918c058&amp;hm=06ee2ab5f547cb8f7e1d96fd117710c01918934c8fe96653ace54ff3062c514c&amp;"/>
+          <p:cNvPicPr>
+            <a:picLocks noChangeAspect="1" noChangeArrowheads="1"/>
+          </p:cNvPicPr>
+          <p:nvPr/>
+        </p:nvPicPr>
+        <p:blipFill>
+          <a:blip r:embed="rId4"/>
+          <a:srcRect/>
+          <a:stretch>
+            <a:fillRect/>
+          </a:stretch>
+        </p:blipFill>
+        <p:spPr bwMode="auto">
+          <a:xfrm>
+            <a:off x="7934325" y="2047874"/>
+            <a:ext cx="3651914" cy="4004233"/>
+          </a:xfrm>
+          <a:prstGeom prst="rect">
+            <a:avLst/>
+          </a:prstGeom>
+          <a:noFill/>
+        </p:spPr>
+      </p:pic>
+    </p:spTree>
+  </p:cSld>
+  <p:clrMapOvr>
+    <a:masterClrMapping/>
+  </p:clrMapOvr>
+</p:sld>
+</file>
+
+<file path=ppt/slides/slide27.xml><?xml version="1.0" encoding="utf-8"?>
+<p:sld xmlns:a="http://schemas.openxmlformats.org/drawingml/2006/main" xmlns:r="http://schemas.openxmlformats.org/officeDocument/2006/relationships" xmlns:p="http://schemas.openxmlformats.org/presentationml/2006/main">
+  <p:cSld>
+    <p:spTree>
+      <p:nvGrpSpPr>
+        <p:cNvPr id="1" name=""/>
+        <p:cNvGrpSpPr/>
+        <p:nvPr/>
+      </p:nvGrpSpPr>
+      <p:grpSpPr>
+        <a:xfrm>
+          <a:off x="0" y="0"/>
+          <a:ext cx="0" cy="0"/>
+          <a:chOff x="0" y="0"/>
+          <a:chExt cx="0" cy="0"/>
+        </a:xfrm>
+      </p:grpSpPr>
+      <p:sp>
+        <p:nvSpPr>
+          <p:cNvPr id="2" name="Cím 1"/>
+          <p:cNvSpPr>
+            <a:spLocks noGrp="1"/>
+          </p:cNvSpPr>
+          <p:nvPr>
+            <p:ph type="title"/>
+          </p:nvPr>
+        </p:nvSpPr>
+        <p:spPr>
+          <a:xfrm>
+            <a:off x="1451579" y="1257300"/>
+            <a:ext cx="9603275" cy="596453"/>
+          </a:xfrm>
+        </p:spPr>
+        <p:txBody>
+          <a:bodyPr>
+            <a:normAutofit/>
+          </a:bodyPr>
+          <a:lstStyle/>
+          <a:p>
+            <a:r>
+              <a:rPr lang="hu-HU" dirty="0"/>
+              <a:t>Czeitner András - fejlesztés</a:t>
+            </a:r>
+          </a:p>
+        </p:txBody>
+      </p:sp>
+      <p:pic>
+        <p:nvPicPr>
+          <p:cNvPr id="7" name="Kép 6" descr="image.png"/>
+          <p:cNvPicPr>
+            <a:picLocks noChangeAspect="1"/>
+          </p:cNvPicPr>
+          <p:nvPr/>
+        </p:nvPicPr>
+        <p:blipFill>
+          <a:blip r:embed="rId2"/>
+          <a:stretch>
+            <a:fillRect/>
+          </a:stretch>
+        </p:blipFill>
+        <p:spPr>
+          <a:xfrm>
+            <a:off x="1866900" y="1950738"/>
+            <a:ext cx="8458200" cy="4575458"/>
+          </a:xfrm>
+          <a:prstGeom prst="rect">
+            <a:avLst/>
+          </a:prstGeom>
+        </p:spPr>
+      </p:pic>
+    </p:spTree>
+  </p:cSld>
+  <p:clrMapOvr>
+    <a:masterClrMapping/>
+  </p:clrMapOvr>
+</p:sld>
+</file>
+
+<file path=ppt/slides/slide28.xml><?xml version="1.0" encoding="utf-8"?>
+<p:sld xmlns:a="http://schemas.openxmlformats.org/drawingml/2006/main" xmlns:r="http://schemas.openxmlformats.org/officeDocument/2006/relationships" xmlns:p="http://schemas.openxmlformats.org/presentationml/2006/main">
+  <p:cSld>
+    <p:spTree>
+      <p:nvGrpSpPr>
+        <p:cNvPr id="1" name=""/>
+        <p:cNvGrpSpPr/>
+        <p:nvPr/>
+      </p:nvGrpSpPr>
+      <p:grpSpPr>
+        <a:xfrm>
+          <a:off x="0" y="0"/>
+          <a:ext cx="0" cy="0"/>
+          <a:chOff x="0" y="0"/>
+          <a:chExt cx="0" cy="0"/>
+        </a:xfrm>
+      </p:grpSpPr>
+      <p:sp>
+        <p:nvSpPr>
+          <p:cNvPr id="2" name="Cím 1"/>
+          <p:cNvSpPr>
+            <a:spLocks noGrp="1"/>
+          </p:cNvSpPr>
+          <p:nvPr>
+            <p:ph type="title"/>
+          </p:nvPr>
+        </p:nvSpPr>
+        <p:spPr>
+          <a:xfrm>
+            <a:off x="1451579" y="1257300"/>
+            <a:ext cx="9603275" cy="596453"/>
+          </a:xfrm>
+        </p:spPr>
+        <p:txBody>
+          <a:bodyPr>
+            <a:normAutofit/>
+          </a:bodyPr>
+          <a:lstStyle/>
+          <a:p>
+            <a:r>
+              <a:rPr lang="hu-HU" dirty="0"/>
+              <a:t>Czeitner András - fejlesztés</a:t>
+            </a:r>
+          </a:p>
+        </p:txBody>
+      </p:sp>
+      <p:pic>
+        <p:nvPicPr>
+          <p:cNvPr id="9" name="Kép 8" descr="A képen szöveg, képernyőkép, szoftver, Számítógépes ikon látható&#10;&#10;Előfordulhat, hogy az AI által létrehozott tartalom helytelen.">
+            <a:extLst>
+              <a:ext uri="{FF2B5EF4-FFF2-40B4-BE49-F238E27FC236}">
+                <a16:creationId xmlns:a16="http://schemas.microsoft.com/office/drawing/2014/main" id="{48B7EA85-C43E-31A2-8BE8-68363AEF182D}"/>
+              </a:ext>
+            </a:extLst>
+          </p:cNvPr>
+          <p:cNvPicPr>
+            <a:picLocks noChangeAspect="1"/>
+          </p:cNvPicPr>
+          <p:nvPr/>
+        </p:nvPicPr>
+        <p:blipFill>
+          <a:blip r:embed="rId2">
+            <a:extLst>
+              <a:ext uri="{28A0092B-C50C-407E-A947-70E740481C1C}">
+                <a14:useLocalDpi xmlns:a14="http://schemas.microsoft.com/office/drawing/2010/main" val="0"/>
+              </a:ext>
+            </a:extLst>
+          </a:blip>
+          <a:stretch>
+            <a:fillRect/>
+          </a:stretch>
+        </p:blipFill>
+        <p:spPr>
+          <a:xfrm>
+            <a:off x="1884672" y="1954720"/>
+            <a:ext cx="8422656" cy="4562272"/>
+          </a:xfrm>
+          <a:prstGeom prst="rect">
+            <a:avLst/>
+          </a:prstGeom>
+        </p:spPr>
+      </p:pic>
+    </p:spTree>
+  </p:cSld>
+  <p:clrMapOvr>
+    <a:masterClrMapping/>
+  </p:clrMapOvr>
+</p:sld>
+</file>
+
+<file path=ppt/slides/slide29.xml><?xml version="1.0" encoding="utf-8"?>
 <p:sld xmlns:a="http://schemas.openxmlformats.org/drawingml/2006/main" xmlns:r="http://schemas.openxmlformats.org/officeDocument/2006/relationships" xmlns:p="http://schemas.openxmlformats.org/presentationml/2006/main">
   <p:cSld>
     <p:spTree>
@@ -11438,7 +11552,248 @@
 </p:sld>
 </file>
 
-<file path=ppt/slides/slide25.xml><?xml version="1.0" encoding="utf-8"?>
+<file path=ppt/slides/slide3.xml><?xml version="1.0" encoding="utf-8"?>
+<p:sld xmlns:a="http://schemas.openxmlformats.org/drawingml/2006/main" xmlns:r="http://schemas.openxmlformats.org/officeDocument/2006/relationships" xmlns:p="http://schemas.openxmlformats.org/presentationml/2006/main">
+  <p:cSld>
+    <p:spTree>
+      <p:nvGrpSpPr>
+        <p:cNvPr id="1" name=""/>
+        <p:cNvGrpSpPr/>
+        <p:nvPr/>
+      </p:nvGrpSpPr>
+      <p:grpSpPr>
+        <a:xfrm>
+          <a:off x="0" y="0"/>
+          <a:ext cx="0" cy="0"/>
+          <a:chOff x="0" y="0"/>
+          <a:chExt cx="0" cy="0"/>
+        </a:xfrm>
+      </p:grpSpPr>
+      <p:sp>
+        <p:nvSpPr>
+          <p:cNvPr id="2" name="Cím 1">
+            <a:extLst>
+              <a:ext uri="{FF2B5EF4-FFF2-40B4-BE49-F238E27FC236}">
+                <a16:creationId xmlns:a16="http://schemas.microsoft.com/office/drawing/2014/main" id="{DFB46F62-1A57-5983-2380-8234D9D93BB3}"/>
+              </a:ext>
+            </a:extLst>
+          </p:cNvPr>
+          <p:cNvSpPr>
+            <a:spLocks noGrp="1"/>
+          </p:cNvSpPr>
+          <p:nvPr>
+            <p:ph type="title"/>
+          </p:nvPr>
+        </p:nvSpPr>
+        <p:spPr/>
+        <p:txBody>
+          <a:bodyPr/>
+          <a:lstStyle/>
+          <a:p>
+            <a:r>
+              <a:rPr lang="hu-HU" dirty="0"/>
+              <a:t>Daróczi Levente - Management</a:t>
+            </a:r>
+          </a:p>
+          <a:p>
+            <a:endParaRPr lang="hu-HU" dirty="0"/>
+          </a:p>
+        </p:txBody>
+      </p:sp>
+      <p:pic>
+        <p:nvPicPr>
+          <p:cNvPr id="4" name="Kép 3" descr="A képen szöveg, képernyőkép, szoftver, Betűtípus látható&#10;&#10;Lehet, hogy az AI által létrehozott tartalom helytelen.">
+            <a:extLst>
+              <a:ext uri="{FF2B5EF4-FFF2-40B4-BE49-F238E27FC236}">
+                <a16:creationId xmlns:a16="http://schemas.microsoft.com/office/drawing/2014/main" id="{30CE5DBA-A1D6-2558-BD72-D198CEAE609E}"/>
+              </a:ext>
+            </a:extLst>
+          </p:cNvPr>
+          <p:cNvPicPr>
+            <a:picLocks noChangeAspect="1"/>
+          </p:cNvPicPr>
+          <p:nvPr/>
+        </p:nvPicPr>
+        <p:blipFill>
+          <a:blip r:embed="rId2"/>
+          <a:stretch>
+            <a:fillRect/>
+          </a:stretch>
+        </p:blipFill>
+        <p:spPr>
+          <a:xfrm>
+            <a:off x="7125871" y="1613246"/>
+            <a:ext cx="4705350" cy="2457450"/>
+          </a:xfrm>
+          <a:prstGeom prst="rect">
+            <a:avLst/>
+          </a:prstGeom>
+        </p:spPr>
+      </p:pic>
+      <p:pic>
+        <p:nvPicPr>
+          <p:cNvPr id="5" name="Kép 4" descr="A képen szöveg, képernyőkép, Betűtípus látható&#10;&#10;Lehet, hogy az AI által létrehozott tartalom helytelen.">
+            <a:extLst>
+              <a:ext uri="{FF2B5EF4-FFF2-40B4-BE49-F238E27FC236}">
+                <a16:creationId xmlns:a16="http://schemas.microsoft.com/office/drawing/2014/main" id="{27F74772-25D0-BA3E-617B-A3718BFDA1E5}"/>
+              </a:ext>
+            </a:extLst>
+          </p:cNvPr>
+          <p:cNvPicPr>
+            <a:picLocks noChangeAspect="1"/>
+          </p:cNvPicPr>
+          <p:nvPr/>
+        </p:nvPicPr>
+        <p:blipFill>
+          <a:blip r:embed="rId3"/>
+          <a:stretch>
+            <a:fillRect/>
+          </a:stretch>
+        </p:blipFill>
+        <p:spPr>
+          <a:xfrm>
+            <a:off x="143444" y="1950597"/>
+            <a:ext cx="5090330" cy="1471825"/>
+          </a:xfrm>
+          <a:prstGeom prst="rect">
+            <a:avLst/>
+          </a:prstGeom>
+        </p:spPr>
+      </p:pic>
+      <p:pic>
+        <p:nvPicPr>
+          <p:cNvPr id="6" name="Kép 5" descr="A képen szöveg, képernyőkép, Betűtípus látható&#10;&#10;Lehet, hogy az AI által létrehozott tartalom helytelen.">
+            <a:extLst>
+              <a:ext uri="{FF2B5EF4-FFF2-40B4-BE49-F238E27FC236}">
+                <a16:creationId xmlns:a16="http://schemas.microsoft.com/office/drawing/2014/main" id="{B6ED6F96-F8FB-F1F2-CB1E-D01E960CC206}"/>
+              </a:ext>
+            </a:extLst>
+          </p:cNvPr>
+          <p:cNvPicPr>
+            <a:picLocks noChangeAspect="1"/>
+          </p:cNvPicPr>
+          <p:nvPr/>
+        </p:nvPicPr>
+        <p:blipFill>
+          <a:blip r:embed="rId4"/>
+          <a:stretch>
+            <a:fillRect/>
+          </a:stretch>
+        </p:blipFill>
+        <p:spPr>
+          <a:xfrm>
+            <a:off x="7257683" y="5526332"/>
+            <a:ext cx="4429125" cy="1057275"/>
+          </a:xfrm>
+          <a:prstGeom prst="rect">
+            <a:avLst/>
+          </a:prstGeom>
+        </p:spPr>
+      </p:pic>
+      <p:pic>
+        <p:nvPicPr>
+          <p:cNvPr id="7" name="Kép 6" descr="A képen szöveg, képernyőkép, Betűtípus látható&#10;&#10;Lehet, hogy az AI által létrehozott tartalom helytelen.">
+            <a:extLst>
+              <a:ext uri="{FF2B5EF4-FFF2-40B4-BE49-F238E27FC236}">
+                <a16:creationId xmlns:a16="http://schemas.microsoft.com/office/drawing/2014/main" id="{6CEB9145-23B1-A070-6972-082CC83886DD}"/>
+              </a:ext>
+            </a:extLst>
+          </p:cNvPr>
+          <p:cNvPicPr>
+            <a:picLocks noChangeAspect="1"/>
+          </p:cNvPicPr>
+          <p:nvPr/>
+        </p:nvPicPr>
+        <p:blipFill>
+          <a:blip r:embed="rId5"/>
+          <a:stretch>
+            <a:fillRect/>
+          </a:stretch>
+        </p:blipFill>
+        <p:spPr>
+          <a:xfrm>
+            <a:off x="649531" y="3531209"/>
+            <a:ext cx="5078292" cy="1049949"/>
+          </a:xfrm>
+          <a:prstGeom prst="rect">
+            <a:avLst/>
+          </a:prstGeom>
+        </p:spPr>
+      </p:pic>
+      <p:pic>
+        <p:nvPicPr>
+          <p:cNvPr id="8" name="Kép 7" descr="A képen szöveg, képernyőkép, Betűtípus látható&#10;&#10;Lehet, hogy az AI által létrehozott tartalom helytelen.">
+            <a:extLst>
+              <a:ext uri="{FF2B5EF4-FFF2-40B4-BE49-F238E27FC236}">
+                <a16:creationId xmlns:a16="http://schemas.microsoft.com/office/drawing/2014/main" id="{16D53964-D552-5B19-E65F-E2659D198096}"/>
+              </a:ext>
+            </a:extLst>
+          </p:cNvPr>
+          <p:cNvPicPr>
+            <a:picLocks noChangeAspect="1"/>
+          </p:cNvPicPr>
+          <p:nvPr/>
+        </p:nvPicPr>
+        <p:blipFill>
+          <a:blip r:embed="rId6"/>
+          <a:stretch>
+            <a:fillRect/>
+          </a:stretch>
+        </p:blipFill>
+        <p:spPr>
+          <a:xfrm>
+            <a:off x="316157" y="4784112"/>
+            <a:ext cx="5088549" cy="1803157"/>
+          </a:xfrm>
+          <a:prstGeom prst="rect">
+            <a:avLst/>
+          </a:prstGeom>
+        </p:spPr>
+      </p:pic>
+      <p:pic>
+        <p:nvPicPr>
+          <p:cNvPr id="10" name="Kép 9" descr="A képen szöveg, képernyőkép, Betűtípus, embléma látható&#10;&#10;Lehet, hogy az AI által létrehozott tartalom helytelen.">
+            <a:extLst>
+              <a:ext uri="{FF2B5EF4-FFF2-40B4-BE49-F238E27FC236}">
+                <a16:creationId xmlns:a16="http://schemas.microsoft.com/office/drawing/2014/main" id="{3B757F7B-301B-5E38-57D8-6905EF82CCEC}"/>
+              </a:ext>
+            </a:extLst>
+          </p:cNvPr>
+          <p:cNvPicPr>
+            <a:picLocks noChangeAspect="1"/>
+          </p:cNvPicPr>
+          <p:nvPr/>
+        </p:nvPicPr>
+        <p:blipFill>
+          <a:blip r:embed="rId7"/>
+          <a:stretch>
+            <a:fillRect/>
+          </a:stretch>
+        </p:blipFill>
+        <p:spPr>
+          <a:xfrm>
+            <a:off x="6095633" y="4193564"/>
+            <a:ext cx="5229225" cy="1190625"/>
+          </a:xfrm>
+          <a:prstGeom prst="rect">
+            <a:avLst/>
+          </a:prstGeom>
+        </p:spPr>
+      </p:pic>
+    </p:spTree>
+    <p:extLst>
+      <p:ext uri="{BB962C8B-B14F-4D97-AF65-F5344CB8AC3E}">
+        <p14:creationId xmlns:p14="http://schemas.microsoft.com/office/powerpoint/2010/main" val="1440700749"/>
+      </p:ext>
+    </p:extLst>
+  </p:cSld>
+  <p:clrMapOvr>
+    <a:masterClrMapping/>
+  </p:clrMapOvr>
+</p:sld>
+</file>
+
+<file path=ppt/slides/slide30.xml><?xml version="1.0" encoding="utf-8"?>
 <p:sld xmlns:a="http://schemas.openxmlformats.org/drawingml/2006/main" xmlns:r="http://schemas.openxmlformats.org/officeDocument/2006/relationships" xmlns:p="http://schemas.openxmlformats.org/presentationml/2006/main">
   <p:cSld>
     <p:spTree>
@@ -11587,7 +11942,7 @@
 </p:sld>
 </file>
 
-<file path=ppt/slides/slide26.xml><?xml version="1.0" encoding="utf-8"?>
+<file path=ppt/slides/slide31.xml><?xml version="1.0" encoding="utf-8"?>
 <p:sld xmlns:a="http://schemas.openxmlformats.org/drawingml/2006/main" xmlns:r="http://schemas.openxmlformats.org/officeDocument/2006/relationships" xmlns:p="http://schemas.openxmlformats.org/presentationml/2006/main">
   <p:cSld>
     <p:spTree>
@@ -11741,7 +12096,7 @@
 </p:sld>
 </file>
 
-<file path=ppt/slides/slide27.xml><?xml version="1.0" encoding="utf-8"?>
+<file path=ppt/slides/slide32.xml><?xml version="1.0" encoding="utf-8"?>
 <p:sld xmlns:a="http://schemas.openxmlformats.org/drawingml/2006/main" xmlns:r="http://schemas.openxmlformats.org/officeDocument/2006/relationships" xmlns:p="http://schemas.openxmlformats.org/presentationml/2006/main">
   <p:cSld>
     <p:spTree>
@@ -11928,7 +12283,7 @@
 </p:sld>
 </file>
 
-<file path=ppt/slides/slide28.xml><?xml version="1.0" encoding="utf-8"?>
+<file path=ppt/slides/slide33.xml><?xml version="1.0" encoding="utf-8"?>
 <p:sld xmlns:a="http://schemas.openxmlformats.org/drawingml/2006/main" xmlns:r="http://schemas.openxmlformats.org/officeDocument/2006/relationships" xmlns:p="http://schemas.openxmlformats.org/presentationml/2006/main">
   <p:cSld>
     <p:spTree>
@@ -11995,7 +12350,7 @@
 </p:sld>
 </file>
 
-<file path=ppt/slides/slide29.xml><?xml version="1.0" encoding="utf-8"?>
+<file path=ppt/slides/slide34.xml><?xml version="1.0" encoding="utf-8"?>
 <p:sld xmlns:a="http://schemas.openxmlformats.org/drawingml/2006/main" xmlns:r="http://schemas.openxmlformats.org/officeDocument/2006/relationships" xmlns:p="http://schemas.openxmlformats.org/presentationml/2006/main">
   <p:cSld>
     <p:spTree>
@@ -12131,7 +12486,7 @@
 </p:sld>
 </file>
 
-<file path=ppt/slides/slide3.xml><?xml version="1.0" encoding="utf-8"?>
+<file path=ppt/slides/slide4.xml><?xml version="1.0" encoding="utf-8"?>
 <p:sld xmlns:a="http://schemas.openxmlformats.org/drawingml/2006/main" xmlns:r="http://schemas.openxmlformats.org/officeDocument/2006/relationships" xmlns:p="http://schemas.openxmlformats.org/presentationml/2006/main">
   <p:cSld>
     <p:spTree>
@@ -12911,7 +13266,7 @@
 </p:sld>
 </file>
 
-<file path=ppt/slides/slide4.xml><?xml version="1.0" encoding="utf-8"?>
+<file path=ppt/slides/slide5.xml><?xml version="1.0" encoding="utf-8"?>
 <p:sld xmlns:a="http://schemas.openxmlformats.org/drawingml/2006/main" xmlns:r="http://schemas.openxmlformats.org/officeDocument/2006/relationships" xmlns:p="http://schemas.openxmlformats.org/presentationml/2006/main">
   <p:cSld>
     <p:spTree>
@@ -13104,7 +13459,7 @@
 </p:sld>
 </file>
 
-<file path=ppt/slides/slide5.xml><?xml version="1.0" encoding="utf-8"?>
+<file path=ppt/slides/slide6.xml><?xml version="1.0" encoding="utf-8"?>
 <p:sld xmlns:a="http://schemas.openxmlformats.org/drawingml/2006/main" xmlns:r="http://schemas.openxmlformats.org/officeDocument/2006/relationships" xmlns:p="http://schemas.openxmlformats.org/presentationml/2006/main">
   <p:cSld>
     <p:spTree>
@@ -13549,7 +13904,7 @@
 </p:sld>
 </file>
 
-<file path=ppt/slides/slide6.xml><?xml version="1.0" encoding="utf-8"?>
+<file path=ppt/slides/slide7.xml><?xml version="1.0" encoding="utf-8"?>
 <p:sld xmlns:a="http://schemas.openxmlformats.org/drawingml/2006/main" xmlns:r="http://schemas.openxmlformats.org/officeDocument/2006/relationships" xmlns:p="http://schemas.openxmlformats.org/presentationml/2006/main">
   <p:cSld>
     <p:spTree>
@@ -13680,9 +14035,16 @@
               <a:rPr lang="hu-HU" dirty="0" err="1"/>
               <a:t>client</a:t>
             </a:r>
+          </a:p>
+          <a:p>
+            <a:pPr lvl="1"/>
             <a:r>
               <a:rPr lang="hu-HU" dirty="0"/>
-              <a:t>,</a:t>
+              <a:t>Egységtesztelés: </a:t>
+            </a:r>
+            <a:r>
+              <a:rPr lang="hu-HU" dirty="0" err="1"/>
+              <a:t>Jest</a:t>
             </a:r>
           </a:p>
           <a:p>
@@ -13715,7 +14077,7 @@
 </p:sld>
 </file>
 
-<file path=ppt/slides/slide7.xml><?xml version="1.0" encoding="utf-8"?>
+<file path=ppt/slides/slide8.xml><?xml version="1.0" encoding="utf-8"?>
 <p:sld xmlns:a="http://schemas.openxmlformats.org/drawingml/2006/main" xmlns:r="http://schemas.openxmlformats.org/officeDocument/2006/relationships" xmlns:p="http://schemas.openxmlformats.org/presentationml/2006/main">
   <p:cSld>
     <p:spTree>
@@ -13732,12 +14094,186 @@
           <a:chExt cx="0" cy="0"/>
         </a:xfrm>
       </p:grpSpPr>
+      <p:sp>
+        <p:nvSpPr>
+          <p:cNvPr id="2" name="Cím 1">
+            <a:extLst>
+              <a:ext uri="{FF2B5EF4-FFF2-40B4-BE49-F238E27FC236}">
+                <a16:creationId xmlns:a16="http://schemas.microsoft.com/office/drawing/2014/main" id="{0026B396-4F63-E37D-2073-6DBF5A62DC23}"/>
+              </a:ext>
+            </a:extLst>
+          </p:cNvPr>
+          <p:cNvSpPr>
+            <a:spLocks noGrp="1"/>
+          </p:cNvSpPr>
+          <p:nvPr>
+            <p:ph type="title"/>
+          </p:nvPr>
+        </p:nvSpPr>
+        <p:spPr/>
+        <p:txBody>
+          <a:bodyPr/>
+          <a:lstStyle/>
+          <a:p>
+            <a:r>
+              <a:rPr lang="hu-HU" dirty="0"/>
+              <a:t>Daróczi Levente - fejlesztés</a:t>
+            </a:r>
+          </a:p>
+          <a:p>
+            <a:endParaRPr lang="hu-HU" dirty="0"/>
+          </a:p>
+        </p:txBody>
+      </p:sp>
+      <p:sp>
+        <p:nvSpPr>
+          <p:cNvPr id="3" name="Tartalom helye 2">
+            <a:extLst>
+              <a:ext uri="{FF2B5EF4-FFF2-40B4-BE49-F238E27FC236}">
+                <a16:creationId xmlns:a16="http://schemas.microsoft.com/office/drawing/2014/main" id="{C1B0CC2F-BDD1-D484-A889-A548C62440B9}"/>
+              </a:ext>
+            </a:extLst>
+          </p:cNvPr>
+          <p:cNvSpPr>
+            <a:spLocks noGrp="1"/>
+          </p:cNvSpPr>
+          <p:nvPr>
+            <p:ph idx="1"/>
+          </p:nvPr>
+        </p:nvSpPr>
+        <p:spPr/>
+        <p:txBody>
+          <a:bodyPr/>
+          <a:lstStyle/>
+          <a:p>
+            <a:r>
+              <a:rPr lang="hu-HU" dirty="0"/>
+              <a:t>Bejelentkezés / regisztráció - Backend, frontend</a:t>
+            </a:r>
+          </a:p>
+          <a:p>
+            <a:r>
+              <a:rPr lang="hu-HU" dirty="0" err="1"/>
+              <a:t>Board</a:t>
+            </a:r>
+            <a:r>
+              <a:rPr lang="hu-HU" dirty="0"/>
+              <a:t> – Frontend </a:t>
+            </a:r>
+            <a:r>
+              <a:rPr lang="hu-HU" dirty="0" err="1"/>
+              <a:t>mock</a:t>
+            </a:r>
+            <a:r>
+              <a:rPr lang="hu-HU" dirty="0"/>
+              <a:t> adatokkal, backend alapok</a:t>
+            </a:r>
+          </a:p>
+          <a:p>
+            <a:r>
+              <a:rPr lang="hu-HU" dirty="0" err="1"/>
+              <a:t>Task</a:t>
+            </a:r>
+            <a:r>
+              <a:rPr lang="hu-HU" dirty="0"/>
+              <a:t> – Frontend, backend alapok</a:t>
+            </a:r>
+          </a:p>
+          <a:p>
+            <a:r>
+              <a:rPr lang="hu-HU" err="1"/>
+              <a:t>Darkmode</a:t>
+            </a:r>
+            <a:r>
+              <a:rPr lang="hu-HU" dirty="0"/>
+              <a:t> színek javítása</a:t>
+            </a:r>
+          </a:p>
+          <a:p>
+            <a:r>
+              <a:rPr lang="hu-HU" dirty="0" err="1"/>
+              <a:t>Profile</a:t>
+            </a:r>
+            <a:r>
+              <a:rPr lang="hu-HU" dirty="0"/>
+              <a:t> oldal – backend</a:t>
+            </a:r>
+          </a:p>
+          <a:p>
+            <a:r>
+              <a:rPr lang="hu-HU" dirty="0"/>
+              <a:t>Egységtesztek megírása saját funkciókhoz</a:t>
+            </a:r>
+          </a:p>
+          <a:p>
+            <a:endParaRPr lang="hu-HU" dirty="0"/>
+          </a:p>
+        </p:txBody>
+      </p:sp>
+    </p:spTree>
+    <p:extLst>
+      <p:ext uri="{BB962C8B-B14F-4D97-AF65-F5344CB8AC3E}">
+        <p14:creationId xmlns:p14="http://schemas.microsoft.com/office/powerpoint/2010/main" val="1049441957"/>
+      </p:ext>
+    </p:extLst>
+  </p:cSld>
+  <p:clrMapOvr>
+    <a:masterClrMapping/>
+  </p:clrMapOvr>
+</p:sld>
+</file>
+
+<file path=ppt/slides/slide9.xml><?xml version="1.0" encoding="utf-8"?>
+<p:sld xmlns:a="http://schemas.openxmlformats.org/drawingml/2006/main" xmlns:r="http://schemas.openxmlformats.org/officeDocument/2006/relationships" xmlns:p="http://schemas.openxmlformats.org/presentationml/2006/main">
+  <p:cSld>
+    <p:spTree>
+      <p:nvGrpSpPr>
+        <p:cNvPr id="1" name=""/>
+        <p:cNvGrpSpPr/>
+        <p:nvPr/>
+      </p:nvGrpSpPr>
+      <p:grpSpPr>
+        <a:xfrm>
+          <a:off x="0" y="0"/>
+          <a:ext cx="0" cy="0"/>
+          <a:chOff x="0" y="0"/>
+          <a:chExt cx="0" cy="0"/>
+        </a:xfrm>
+      </p:grpSpPr>
+      <p:sp>
+        <p:nvSpPr>
+          <p:cNvPr id="2" name="Cím 1">
+            <a:extLst>
+              <a:ext uri="{FF2B5EF4-FFF2-40B4-BE49-F238E27FC236}">
+                <a16:creationId xmlns:a16="http://schemas.microsoft.com/office/drawing/2014/main" id="{4A1E2D64-30E7-AF6E-D31C-64C7F5D017D1}"/>
+              </a:ext>
+            </a:extLst>
+          </p:cNvPr>
+          <p:cNvSpPr>
+            <a:spLocks noGrp="1"/>
+          </p:cNvSpPr>
+          <p:nvPr>
+            <p:ph type="title"/>
+          </p:nvPr>
+        </p:nvSpPr>
+        <p:spPr/>
+        <p:txBody>
+          <a:bodyPr/>
+          <a:lstStyle/>
+          <a:p>
+            <a:r>
+              <a:rPr lang="hu-HU" dirty="0"/>
+              <a:t>Daróczi Levente - fejlesztés</a:t>
+            </a:r>
+          </a:p>
+        </p:txBody>
+      </p:sp>
       <p:pic>
         <p:nvPicPr>
-          <p:cNvPr id="9" name="Kép 8">
-            <a:extLst>
-              <a:ext uri="{FF2B5EF4-FFF2-40B4-BE49-F238E27FC236}">
-                <a16:creationId xmlns:a16="http://schemas.microsoft.com/office/drawing/2014/main" id="{8D4509A0-D2EA-207B-0C78-28D8E243CE44}"/>
+          <p:cNvPr id="5" name="Kép 4" descr="A képen szöveg, képernyőkép, szoftver, Számítógépes ikon látható&#10;&#10;Lehet, hogy az AI által létrehozott tartalom helytelen.">
+            <a:extLst>
+              <a:ext uri="{FF2B5EF4-FFF2-40B4-BE49-F238E27FC236}">
+                <a16:creationId xmlns:a16="http://schemas.microsoft.com/office/drawing/2014/main" id="{FDA896AB-95F0-01B7-58C4-F87EA6CFEC23}"/>
               </a:ext>
             </a:extLst>
           </p:cNvPr>
@@ -13754,42 +14290,14 @@
         </p:blipFill>
         <p:spPr>
           <a:xfrm>
-            <a:off x="1300126" y="1450173"/>
-            <a:ext cx="10080372" cy="5315965"/>
+            <a:off x="1184031" y="1326934"/>
+            <a:ext cx="10128739" cy="5341270"/>
           </a:xfrm>
           <a:prstGeom prst="rect">
             <a:avLst/>
           </a:prstGeom>
         </p:spPr>
       </p:pic>
-      <p:sp>
-        <p:nvSpPr>
-          <p:cNvPr id="2" name="Cím 1">
-            <a:extLst>
-              <a:ext uri="{FF2B5EF4-FFF2-40B4-BE49-F238E27FC236}">
-                <a16:creationId xmlns:a16="http://schemas.microsoft.com/office/drawing/2014/main" id="{4A1E2D64-30E7-AF6E-D31C-64C7F5D017D1}"/>
-              </a:ext>
-            </a:extLst>
-          </p:cNvPr>
-          <p:cNvSpPr>
-            <a:spLocks noGrp="1"/>
-          </p:cNvSpPr>
-          <p:nvPr>
-            <p:ph type="title"/>
-          </p:nvPr>
-        </p:nvSpPr>
-        <p:spPr/>
-        <p:txBody>
-          <a:bodyPr/>
-          <a:lstStyle/>
-          <a:p>
-            <a:r>
-              <a:rPr lang="hu-HU" dirty="0"/>
-              <a:t>Daróczi Levente - fejlesztés</a:t>
-            </a:r>
-          </a:p>
-        </p:txBody>
-      </p:sp>
     </p:spTree>
     <p:extLst>
       <p:ext uri="{BB962C8B-B14F-4D97-AF65-F5344CB8AC3E}">
@@ -13802,200 +14310,6 @@
   </p:clrMapOvr>
   <p:transition spd="slow">
     <p:push dir="u"/>
-  </p:transition>
-</p:sld>
-</file>
-
-<file path=ppt/slides/slide8.xml><?xml version="1.0" encoding="utf-8"?>
-<p:sld xmlns:a="http://schemas.openxmlformats.org/drawingml/2006/main" xmlns:r="http://schemas.openxmlformats.org/officeDocument/2006/relationships" xmlns:p="http://schemas.openxmlformats.org/presentationml/2006/main">
-  <p:cSld>
-    <p:spTree>
-      <p:nvGrpSpPr>
-        <p:cNvPr id="1" name="">
-          <a:extLst>
-            <a:ext uri="{FF2B5EF4-FFF2-40B4-BE49-F238E27FC236}">
-              <a16:creationId xmlns:a16="http://schemas.microsoft.com/office/drawing/2014/main" id="{9B841A21-F3A4-BEED-4335-B280F0476433}"/>
-            </a:ext>
-          </a:extLst>
-        </p:cNvPr>
-        <p:cNvGrpSpPr/>
-        <p:nvPr/>
-      </p:nvGrpSpPr>
-      <p:grpSpPr>
-        <a:xfrm>
-          <a:off x="0" y="0"/>
-          <a:ext cx="0" cy="0"/>
-          <a:chOff x="0" y="0"/>
-          <a:chExt cx="0" cy="0"/>
-        </a:xfrm>
-      </p:grpSpPr>
-      <p:pic>
-        <p:nvPicPr>
-          <p:cNvPr id="4" name="Kép 3">
-            <a:extLst>
-              <a:ext uri="{FF2B5EF4-FFF2-40B4-BE49-F238E27FC236}">
-                <a16:creationId xmlns:a16="http://schemas.microsoft.com/office/drawing/2014/main" id="{93E9C8F1-A86B-86D8-7BF0-C4ADBF9BACEE}"/>
-              </a:ext>
-            </a:extLst>
-          </p:cNvPr>
-          <p:cNvPicPr>
-            <a:picLocks noChangeAspect="1"/>
-          </p:cNvPicPr>
-          <p:nvPr/>
-        </p:nvPicPr>
-        <p:blipFill>
-          <a:blip r:embed="rId2"/>
-          <a:stretch>
-            <a:fillRect/>
-          </a:stretch>
-        </p:blipFill>
-        <p:spPr>
-          <a:xfrm>
-            <a:off x="1304411" y="1444237"/>
-            <a:ext cx="10080372" cy="5331723"/>
-          </a:xfrm>
-          <a:prstGeom prst="rect">
-            <a:avLst/>
-          </a:prstGeom>
-        </p:spPr>
-      </p:pic>
-      <p:sp>
-        <p:nvSpPr>
-          <p:cNvPr id="2" name="Cím 1">
-            <a:extLst>
-              <a:ext uri="{FF2B5EF4-FFF2-40B4-BE49-F238E27FC236}">
-                <a16:creationId xmlns:a16="http://schemas.microsoft.com/office/drawing/2014/main" id="{1B244E95-BDC4-8D7E-9410-C71185CE8C85}"/>
-              </a:ext>
-            </a:extLst>
-          </p:cNvPr>
-          <p:cNvSpPr>
-            <a:spLocks noGrp="1"/>
-          </p:cNvSpPr>
-          <p:nvPr>
-            <p:ph type="title"/>
-          </p:nvPr>
-        </p:nvSpPr>
-        <p:spPr/>
-        <p:txBody>
-          <a:bodyPr/>
-          <a:lstStyle/>
-          <a:p>
-            <a:r>
-              <a:rPr lang="hu-HU" dirty="0"/>
-              <a:t>Daróczi Levente - fejlesztés</a:t>
-            </a:r>
-          </a:p>
-        </p:txBody>
-      </p:sp>
-    </p:spTree>
-    <p:extLst>
-      <p:ext uri="{BB962C8B-B14F-4D97-AF65-F5344CB8AC3E}">
-        <p14:creationId xmlns:p14="http://schemas.microsoft.com/office/powerpoint/2010/main" val="1608496070"/>
-      </p:ext>
-    </p:extLst>
-  </p:cSld>
-  <p:clrMapOvr>
-    <a:masterClrMapping/>
-  </p:clrMapOvr>
-  <p:transition spd="med">
-    <p:pull/>
-  </p:transition>
-</p:sld>
-</file>
-
-<file path=ppt/slides/slide9.xml><?xml version="1.0" encoding="utf-8"?>
-<p:sld xmlns:a="http://schemas.openxmlformats.org/drawingml/2006/main" xmlns:r="http://schemas.openxmlformats.org/officeDocument/2006/relationships" xmlns:p="http://schemas.openxmlformats.org/presentationml/2006/main">
-  <p:cSld>
-    <p:spTree>
-      <p:nvGrpSpPr>
-        <p:cNvPr id="1" name="">
-          <a:extLst>
-            <a:ext uri="{FF2B5EF4-FFF2-40B4-BE49-F238E27FC236}">
-              <a16:creationId xmlns:a16="http://schemas.microsoft.com/office/drawing/2014/main" id="{33154BA3-C252-6C61-9BFC-DE7EDB567000}"/>
-            </a:ext>
-          </a:extLst>
-        </p:cNvPr>
-        <p:cNvGrpSpPr/>
-        <p:nvPr/>
-      </p:nvGrpSpPr>
-      <p:grpSpPr>
-        <a:xfrm>
-          <a:off x="0" y="0"/>
-          <a:ext cx="0" cy="0"/>
-          <a:chOff x="0" y="0"/>
-          <a:chExt cx="0" cy="0"/>
-        </a:xfrm>
-      </p:grpSpPr>
-      <p:pic>
-        <p:nvPicPr>
-          <p:cNvPr id="7" name="Kép 6">
-            <a:extLst>
-              <a:ext uri="{FF2B5EF4-FFF2-40B4-BE49-F238E27FC236}">
-                <a16:creationId xmlns:a16="http://schemas.microsoft.com/office/drawing/2014/main" id="{F4E52981-0A97-79A6-C9A4-5227C7512286}"/>
-              </a:ext>
-            </a:extLst>
-          </p:cNvPr>
-          <p:cNvPicPr>
-            <a:picLocks noChangeAspect="1"/>
-          </p:cNvPicPr>
-          <p:nvPr/>
-        </p:nvPicPr>
-        <p:blipFill>
-          <a:blip r:embed="rId2"/>
-          <a:stretch>
-            <a:fillRect/>
-          </a:stretch>
-        </p:blipFill>
-        <p:spPr>
-          <a:xfrm>
-            <a:off x="1304411" y="1447641"/>
-            <a:ext cx="10080372" cy="5342229"/>
-          </a:xfrm>
-          <a:prstGeom prst="rect">
-            <a:avLst/>
-          </a:prstGeom>
-        </p:spPr>
-      </p:pic>
-      <p:sp>
-        <p:nvSpPr>
-          <p:cNvPr id="2" name="Cím 1">
-            <a:extLst>
-              <a:ext uri="{FF2B5EF4-FFF2-40B4-BE49-F238E27FC236}">
-                <a16:creationId xmlns:a16="http://schemas.microsoft.com/office/drawing/2014/main" id="{97CEF7D3-2587-8E79-1C83-BE4B85DDBDE8}"/>
-              </a:ext>
-            </a:extLst>
-          </p:cNvPr>
-          <p:cNvSpPr>
-            <a:spLocks noGrp="1"/>
-          </p:cNvSpPr>
-          <p:nvPr>
-            <p:ph type="title"/>
-          </p:nvPr>
-        </p:nvSpPr>
-        <p:spPr/>
-        <p:txBody>
-          <a:bodyPr/>
-          <a:lstStyle/>
-          <a:p>
-            <a:r>
-              <a:rPr lang="hu-HU" dirty="0"/>
-              <a:t>Daróczi Levente - fejlesztés</a:t>
-            </a:r>
-          </a:p>
-        </p:txBody>
-      </p:sp>
-    </p:spTree>
-    <p:extLst>
-      <p:ext uri="{BB962C8B-B14F-4D97-AF65-F5344CB8AC3E}">
-        <p14:creationId xmlns:p14="http://schemas.microsoft.com/office/powerpoint/2010/main" val="3446405935"/>
-      </p:ext>
-    </p:extLst>
-  </p:cSld>
-  <p:clrMapOvr>
-    <a:masterClrMapping/>
-  </p:clrMapOvr>
-  <p:transition spd="med">
-    <p:pull/>
   </p:transition>
 </p:sld>
 </file>
